--- a/docs/test/stress/e2e-outputs/trading_case15_jongro_family_basic.pptx
+++ b/docs/test/stress/e2e-outputs/trading_case15_jongro_family_basic.pptx
@@ -8490,7 +8490,7 @@
                 <a:ea typeface="Pretendard" pitchFamily="34" charset="-122"/>
                 <a:cs typeface="Pretendard" pitchFamily="34" charset="-120"/>
               </a:rPr>
-              <a:t>밸류업 시나리오 (AI 추정)</a:t>
+              <a:t>3대 핵심 투자 포인트 (Investment Highlights)</a:t>
             </a:r>
             <a:endParaRPr lang="en-US" sz="1050" dirty="0"/>
           </a:p>
@@ -8499,6 +8499,642 @@
       <p:sp>
         <p:nvSpPr>
           <p:cNvPr id="6" name="Shape 4"/>
+          <p:cNvSpPr/>
+          <p:nvPr/>
+        </p:nvSpPr>
+        <p:spPr>
+          <a:xfrm>
+            <a:off x="566928" y="1481328"/>
+            <a:ext cx="3472586" cy="3474720"/>
+          </a:xfrm>
+          <a:prstGeom prst="roundRect">
+            <a:avLst>
+              <a:gd name="adj" fmla="val 2107"/>
+            </a:avLst>
+          </a:prstGeom>
+          <a:solidFill>
+            <a:srgbClr val="F8FAFC"/>
+          </a:solidFill>
+          <a:ln w="10160">
+            <a:solidFill>
+              <a:srgbClr val="CBD5E1"/>
+            </a:solidFill>
+            <a:prstDash val="solid"/>
+          </a:ln>
+        </p:spPr>
+      </p:sp>
+      <p:sp>
+        <p:nvSpPr>
+          <p:cNvPr id="7" name="Shape 5"/>
+          <p:cNvSpPr/>
+          <p:nvPr/>
+        </p:nvSpPr>
+        <p:spPr>
+          <a:xfrm>
+            <a:off x="566928" y="1481328"/>
+            <a:ext cx="3472586" cy="54864"/>
+          </a:xfrm>
+          <a:prstGeom prst="rect">
+            <a:avLst/>
+          </a:prstGeom>
+          <a:solidFill>
+            <a:srgbClr val="6B8E00"/>
+          </a:solidFill>
+          <a:ln/>
+        </p:spPr>
+      </p:sp>
+      <p:sp>
+        <p:nvSpPr>
+          <p:cNvPr id="8" name="Shape 6"/>
+          <p:cNvSpPr/>
+          <p:nvPr/>
+        </p:nvSpPr>
+        <p:spPr>
+          <a:xfrm>
+            <a:off x="795528" y="1755648"/>
+            <a:ext cx="475488" cy="292608"/>
+          </a:xfrm>
+          <a:prstGeom prst="roundRect">
+            <a:avLst>
+              <a:gd name="adj" fmla="val 12500"/>
+            </a:avLst>
+          </a:prstGeom>
+          <a:solidFill>
+            <a:srgbClr val="A3D900"/>
+          </a:solidFill>
+          <a:ln/>
+        </p:spPr>
+      </p:sp>
+      <p:sp>
+        <p:nvSpPr>
+          <p:cNvPr id="9" name="Text 7"/>
+          <p:cNvSpPr/>
+          <p:nvPr/>
+        </p:nvSpPr>
+        <p:spPr>
+          <a:xfrm>
+            <a:off x="795528" y="1755648"/>
+            <a:ext cx="475488" cy="292608"/>
+          </a:xfrm>
+          <a:prstGeom prst="rect">
+            <a:avLst/>
+          </a:prstGeom>
+          <a:noFill/>
+          <a:ln/>
+        </p:spPr>
+        <p:txBody>
+          <a:bodyPr wrap="square" lIns="0" tIns="0" rIns="0" bIns="0" rtlCol="0" anchor="ctr"/>
+          <a:lstStyle/>
+          <a:p>
+            <a:pPr algn="ctr" indent="0" marL="0">
+              <a:buNone/>
+            </a:pPr>
+            <a:r>
+              <a:rPr lang="en-US" sz="1100" b="1" dirty="0">
+                <a:solidFill>
+                  <a:srgbClr val="4F6A00"/>
+                </a:solidFill>
+                <a:latin typeface="Arial" pitchFamily="34" charset="0"/>
+                <a:ea typeface="Arial" pitchFamily="34" charset="-122"/>
+                <a:cs typeface="Arial" pitchFamily="34" charset="-120"/>
+              </a:rPr>
+              <a:t>01</a:t>
+            </a:r>
+            <a:endParaRPr lang="en-US" sz="1100" dirty="0"/>
+          </a:p>
+        </p:txBody>
+      </p:sp>
+      <p:sp>
+        <p:nvSpPr>
+          <p:cNvPr id="10" name="Text 8"/>
+          <p:cNvSpPr/>
+          <p:nvPr/>
+        </p:nvSpPr>
+        <p:spPr>
+          <a:xfrm>
+            <a:off x="795528" y="2194560"/>
+            <a:ext cx="3015386" cy="365760"/>
+          </a:xfrm>
+          <a:prstGeom prst="rect">
+            <a:avLst/>
+          </a:prstGeom>
+          <a:noFill/>
+          <a:ln/>
+        </p:spPr>
+        <p:txBody>
+          <a:bodyPr wrap="square" lIns="0" tIns="0" rIns="0" bIns="0" rtlCol="0" anchor="t"/>
+          <a:lstStyle/>
+          <a:p>
+            <a:pPr indent="0" marL="0">
+              <a:buNone/>
+            </a:pPr>
+            <a:r>
+              <a:rPr lang="en-US" sz="1500" b="1" dirty="0">
+                <a:solidFill>
+                  <a:srgbClr val="0F172A"/>
+                </a:solidFill>
+                <a:latin typeface="Pretendard" pitchFamily="34" charset="0"/>
+                <a:ea typeface="Pretendard" pitchFamily="34" charset="-122"/>
+                <a:cs typeface="Pretendard" pitchFamily="34" charset="-120"/>
+              </a:rPr>
+              <a:t>원금 안전판 확보</a:t>
+            </a:r>
+            <a:endParaRPr lang="en-US" sz="1500" dirty="0"/>
+          </a:p>
+        </p:txBody>
+      </p:sp>
+      <p:sp>
+        <p:nvSpPr>
+          <p:cNvPr id="11" name="Shape 9"/>
+          <p:cNvSpPr/>
+          <p:nvPr/>
+        </p:nvSpPr>
+        <p:spPr>
+          <a:xfrm>
+            <a:off x="795528" y="2624328"/>
+            <a:ext cx="3015386" cy="0"/>
+          </a:xfrm>
+          <a:prstGeom prst="line">
+            <a:avLst/>
+          </a:prstGeom>
+          <a:noFill/>
+          <a:ln w="6350">
+            <a:solidFill>
+              <a:srgbClr val="CBD5E1"/>
+            </a:solidFill>
+            <a:prstDash val="solid"/>
+          </a:ln>
+        </p:spPr>
+      </p:sp>
+      <p:sp>
+        <p:nvSpPr>
+          <p:cNvPr id="12" name="Text 10"/>
+          <p:cNvSpPr/>
+          <p:nvPr/>
+        </p:nvSpPr>
+        <p:spPr>
+          <a:xfrm>
+            <a:off x="795528" y="2779776"/>
+            <a:ext cx="3015386" cy="1965960"/>
+          </a:xfrm>
+          <a:prstGeom prst="rect">
+            <a:avLst/>
+          </a:prstGeom>
+          <a:noFill/>
+          <a:ln/>
+        </p:spPr>
+        <p:txBody>
+          <a:bodyPr wrap="square" lIns="0" tIns="0" rIns="0" bIns="0" rtlCol="0" anchor="t"/>
+          <a:lstStyle/>
+          <a:p>
+            <a:pPr indent="0" marL="0">
+              <a:lnSpc>
+                <a:spcPct val="130000"/>
+              </a:lnSpc>
+              <a:buNone/>
+            </a:pPr>
+            <a:r>
+              <a:rPr lang="en-US" sz="1200" dirty="0">
+                <a:solidFill>
+                  <a:srgbClr val="0F172A"/>
+                </a:solidFill>
+                <a:latin typeface="Pretendard" pitchFamily="34" charset="0"/>
+                <a:ea typeface="Pretendard" pitchFamily="34" charset="-122"/>
+                <a:cs typeface="Pretendard" pitchFamily="34" charset="-120"/>
+              </a:rPr>
+              <a:t>종로권역의 핵심 입지로, 우량한 대지 지분 가치가 하방 경직성을 강력히 지지합니다.</a:t>
+            </a:r>
+            <a:endParaRPr lang="en-US" sz="1200" dirty="0"/>
+          </a:p>
+        </p:txBody>
+      </p:sp>
+      <p:sp>
+        <p:nvSpPr>
+          <p:cNvPr id="13" name="Shape 11"/>
+          <p:cNvSpPr/>
+          <p:nvPr/>
+        </p:nvSpPr>
+        <p:spPr>
+          <a:xfrm>
+            <a:off x="4359554" y="1481328"/>
+            <a:ext cx="3472586" cy="3474720"/>
+          </a:xfrm>
+          <a:prstGeom prst="roundRect">
+            <a:avLst>
+              <a:gd name="adj" fmla="val 2107"/>
+            </a:avLst>
+          </a:prstGeom>
+          <a:solidFill>
+            <a:srgbClr val="F8FAFC"/>
+          </a:solidFill>
+          <a:ln w="10160">
+            <a:solidFill>
+              <a:srgbClr val="CBD5E1"/>
+            </a:solidFill>
+            <a:prstDash val="solid"/>
+          </a:ln>
+        </p:spPr>
+      </p:sp>
+      <p:sp>
+        <p:nvSpPr>
+          <p:cNvPr id="14" name="Shape 12"/>
+          <p:cNvSpPr/>
+          <p:nvPr/>
+        </p:nvSpPr>
+        <p:spPr>
+          <a:xfrm>
+            <a:off x="4359554" y="1481328"/>
+            <a:ext cx="3472586" cy="54864"/>
+          </a:xfrm>
+          <a:prstGeom prst="rect">
+            <a:avLst/>
+          </a:prstGeom>
+          <a:solidFill>
+            <a:srgbClr val="6B8E00"/>
+          </a:solidFill>
+          <a:ln/>
+        </p:spPr>
+      </p:sp>
+      <p:sp>
+        <p:nvSpPr>
+          <p:cNvPr id="15" name="Shape 13"/>
+          <p:cNvSpPr/>
+          <p:nvPr/>
+        </p:nvSpPr>
+        <p:spPr>
+          <a:xfrm>
+            <a:off x="4588154" y="1755648"/>
+            <a:ext cx="475488" cy="292608"/>
+          </a:xfrm>
+          <a:prstGeom prst="roundRect">
+            <a:avLst>
+              <a:gd name="adj" fmla="val 12500"/>
+            </a:avLst>
+          </a:prstGeom>
+          <a:solidFill>
+            <a:srgbClr val="A3D900"/>
+          </a:solidFill>
+          <a:ln/>
+        </p:spPr>
+      </p:sp>
+      <p:sp>
+        <p:nvSpPr>
+          <p:cNvPr id="16" name="Text 14"/>
+          <p:cNvSpPr/>
+          <p:nvPr/>
+        </p:nvSpPr>
+        <p:spPr>
+          <a:xfrm>
+            <a:off x="4588154" y="1755648"/>
+            <a:ext cx="475488" cy="292608"/>
+          </a:xfrm>
+          <a:prstGeom prst="rect">
+            <a:avLst/>
+          </a:prstGeom>
+          <a:noFill/>
+          <a:ln/>
+        </p:spPr>
+        <p:txBody>
+          <a:bodyPr wrap="square" lIns="0" tIns="0" rIns="0" bIns="0" rtlCol="0" anchor="ctr"/>
+          <a:lstStyle/>
+          <a:p>
+            <a:pPr algn="ctr" indent="0" marL="0">
+              <a:buNone/>
+            </a:pPr>
+            <a:r>
+              <a:rPr lang="en-US" sz="1100" b="1" dirty="0">
+                <a:solidFill>
+                  <a:srgbClr val="4F6A00"/>
+                </a:solidFill>
+                <a:latin typeface="Arial" pitchFamily="34" charset="0"/>
+                <a:ea typeface="Arial" pitchFamily="34" charset="-122"/>
+                <a:cs typeface="Arial" pitchFamily="34" charset="-120"/>
+              </a:rPr>
+              <a:t>02</a:t>
+            </a:r>
+            <a:endParaRPr lang="en-US" sz="1100" dirty="0"/>
+          </a:p>
+        </p:txBody>
+      </p:sp>
+      <p:sp>
+        <p:nvSpPr>
+          <p:cNvPr id="17" name="Text 15"/>
+          <p:cNvSpPr/>
+          <p:nvPr/>
+        </p:nvSpPr>
+        <p:spPr>
+          <a:xfrm>
+            <a:off x="4588154" y="2194560"/>
+            <a:ext cx="3015386" cy="365760"/>
+          </a:xfrm>
+          <a:prstGeom prst="rect">
+            <a:avLst/>
+          </a:prstGeom>
+          <a:noFill/>
+          <a:ln/>
+        </p:spPr>
+        <p:txBody>
+          <a:bodyPr wrap="square" lIns="0" tIns="0" rIns="0" bIns="0" rtlCol="0" anchor="t"/>
+          <a:lstStyle/>
+          <a:p>
+            <a:pPr indent="0" marL="0">
+              <a:buNone/>
+            </a:pPr>
+            <a:r>
+              <a:rPr lang="en-US" sz="1500" b="1" dirty="0">
+                <a:solidFill>
+                  <a:srgbClr val="0F172A"/>
+                </a:solidFill>
+                <a:latin typeface="Pretendard" pitchFamily="34" charset="0"/>
+                <a:ea typeface="Pretendard" pitchFamily="34" charset="-122"/>
+                <a:cs typeface="Pretendard" pitchFamily="34" charset="-120"/>
+              </a:rPr>
+              <a:t>확실한 월 현금흐름</a:t>
+            </a:r>
+            <a:endParaRPr lang="en-US" sz="1500" dirty="0"/>
+          </a:p>
+        </p:txBody>
+      </p:sp>
+      <p:sp>
+        <p:nvSpPr>
+          <p:cNvPr id="18" name="Shape 16"/>
+          <p:cNvSpPr/>
+          <p:nvPr/>
+        </p:nvSpPr>
+        <p:spPr>
+          <a:xfrm>
+            <a:off x="4588154" y="2624328"/>
+            <a:ext cx="3015386" cy="0"/>
+          </a:xfrm>
+          <a:prstGeom prst="line">
+            <a:avLst/>
+          </a:prstGeom>
+          <a:noFill/>
+          <a:ln w="6350">
+            <a:solidFill>
+              <a:srgbClr val="CBD5E1"/>
+            </a:solidFill>
+            <a:prstDash val="solid"/>
+          </a:ln>
+        </p:spPr>
+      </p:sp>
+      <p:sp>
+        <p:nvSpPr>
+          <p:cNvPr id="19" name="Text 17"/>
+          <p:cNvSpPr/>
+          <p:nvPr/>
+        </p:nvSpPr>
+        <p:spPr>
+          <a:xfrm>
+            <a:off x="4588154" y="2779776"/>
+            <a:ext cx="3015386" cy="1965960"/>
+          </a:xfrm>
+          <a:prstGeom prst="rect">
+            <a:avLst/>
+          </a:prstGeom>
+          <a:noFill/>
+          <a:ln/>
+        </p:spPr>
+        <p:txBody>
+          <a:bodyPr wrap="square" lIns="0" tIns="0" rIns="0" bIns="0" rtlCol="0" anchor="t"/>
+          <a:lstStyle/>
+          <a:p>
+            <a:pPr indent="0" marL="0">
+              <a:lnSpc>
+                <a:spcPct val="130000"/>
+              </a:lnSpc>
+              <a:buNone/>
+            </a:pPr>
+            <a:r>
+              <a:rPr lang="en-US" sz="1200" dirty="0">
+                <a:solidFill>
+                  <a:srgbClr val="0F172A"/>
+                </a:solidFill>
+                <a:latin typeface="Pretendard" pitchFamily="34" charset="0"/>
+                <a:ea typeface="Pretendard" pitchFamily="34" charset="-122"/>
+                <a:cs typeface="Pretendard" pitchFamily="34" charset="-120"/>
+              </a:rPr>
+              <a:t>우량 테넌트 만실 운영 및 장기 계약 구조를 통해 매월 안정적인 순수익 창출이 검토 여지가 있으나, 관련 법규·인허가·시설 요건의 현장 확인이 필요합니다..</a:t>
+            </a:r>
+            <a:endParaRPr lang="en-US" sz="1200" dirty="0"/>
+          </a:p>
+        </p:txBody>
+      </p:sp>
+      <p:sp>
+        <p:nvSpPr>
+          <p:cNvPr id="20" name="Shape 18"/>
+          <p:cNvSpPr/>
+          <p:nvPr/>
+        </p:nvSpPr>
+        <p:spPr>
+          <a:xfrm>
+            <a:off x="8152181" y="1481328"/>
+            <a:ext cx="3472586" cy="3474720"/>
+          </a:xfrm>
+          <a:prstGeom prst="roundRect">
+            <a:avLst>
+              <a:gd name="adj" fmla="val 2107"/>
+            </a:avLst>
+          </a:prstGeom>
+          <a:solidFill>
+            <a:srgbClr val="F8FAFC"/>
+          </a:solidFill>
+          <a:ln w="10160">
+            <a:solidFill>
+              <a:srgbClr val="CBD5E1"/>
+            </a:solidFill>
+            <a:prstDash val="solid"/>
+          </a:ln>
+        </p:spPr>
+      </p:sp>
+      <p:sp>
+        <p:nvSpPr>
+          <p:cNvPr id="21" name="Shape 19"/>
+          <p:cNvSpPr/>
+          <p:nvPr/>
+        </p:nvSpPr>
+        <p:spPr>
+          <a:xfrm>
+            <a:off x="8152181" y="1481328"/>
+            <a:ext cx="3472586" cy="54864"/>
+          </a:xfrm>
+          <a:prstGeom prst="rect">
+            <a:avLst/>
+          </a:prstGeom>
+          <a:solidFill>
+            <a:srgbClr val="6B8E00"/>
+          </a:solidFill>
+          <a:ln/>
+        </p:spPr>
+      </p:sp>
+      <p:sp>
+        <p:nvSpPr>
+          <p:cNvPr id="22" name="Shape 20"/>
+          <p:cNvSpPr/>
+          <p:nvPr/>
+        </p:nvSpPr>
+        <p:spPr>
+          <a:xfrm>
+            <a:off x="8380781" y="1755648"/>
+            <a:ext cx="475488" cy="292608"/>
+          </a:xfrm>
+          <a:prstGeom prst="roundRect">
+            <a:avLst>
+              <a:gd name="adj" fmla="val 12500"/>
+            </a:avLst>
+          </a:prstGeom>
+          <a:solidFill>
+            <a:srgbClr val="A3D900"/>
+          </a:solidFill>
+          <a:ln/>
+        </p:spPr>
+      </p:sp>
+      <p:sp>
+        <p:nvSpPr>
+          <p:cNvPr id="23" name="Text 21"/>
+          <p:cNvSpPr/>
+          <p:nvPr/>
+        </p:nvSpPr>
+        <p:spPr>
+          <a:xfrm>
+            <a:off x="8380781" y="1755648"/>
+            <a:ext cx="475488" cy="292608"/>
+          </a:xfrm>
+          <a:prstGeom prst="rect">
+            <a:avLst/>
+          </a:prstGeom>
+          <a:noFill/>
+          <a:ln/>
+        </p:spPr>
+        <p:txBody>
+          <a:bodyPr wrap="square" lIns="0" tIns="0" rIns="0" bIns="0" rtlCol="0" anchor="ctr"/>
+          <a:lstStyle/>
+          <a:p>
+            <a:pPr algn="ctr" indent="0" marL="0">
+              <a:buNone/>
+            </a:pPr>
+            <a:r>
+              <a:rPr lang="en-US" sz="1100" b="1" dirty="0">
+                <a:solidFill>
+                  <a:srgbClr val="4F6A00"/>
+                </a:solidFill>
+                <a:latin typeface="Arial" pitchFamily="34" charset="0"/>
+                <a:ea typeface="Arial" pitchFamily="34" charset="-122"/>
+                <a:cs typeface="Arial" pitchFamily="34" charset="-120"/>
+              </a:rPr>
+              <a:t>03</a:t>
+            </a:r>
+            <a:endParaRPr lang="en-US" sz="1100" dirty="0"/>
+          </a:p>
+        </p:txBody>
+      </p:sp>
+      <p:sp>
+        <p:nvSpPr>
+          <p:cNvPr id="24" name="Text 22"/>
+          <p:cNvSpPr/>
+          <p:nvPr/>
+        </p:nvSpPr>
+        <p:spPr>
+          <a:xfrm>
+            <a:off x="8380781" y="2194560"/>
+            <a:ext cx="3015386" cy="365760"/>
+          </a:xfrm>
+          <a:prstGeom prst="rect">
+            <a:avLst/>
+          </a:prstGeom>
+          <a:noFill/>
+          <a:ln/>
+        </p:spPr>
+        <p:txBody>
+          <a:bodyPr wrap="square" lIns="0" tIns="0" rIns="0" bIns="0" rtlCol="0" anchor="t"/>
+          <a:lstStyle/>
+          <a:p>
+            <a:pPr indent="0" marL="0">
+              <a:buNone/>
+            </a:pPr>
+            <a:r>
+              <a:rPr lang="en-US" sz="1500" b="1" dirty="0">
+                <a:solidFill>
+                  <a:srgbClr val="0F172A"/>
+                </a:solidFill>
+                <a:latin typeface="Pretendard" pitchFamily="34" charset="0"/>
+                <a:ea typeface="Pretendard" pitchFamily="34" charset="-122"/>
+                <a:cs typeface="Pretendard" pitchFamily="34" charset="-120"/>
+              </a:rPr>
+              <a:t>가치 상승 및 출구 전략</a:t>
+            </a:r>
+            <a:endParaRPr lang="en-US" sz="1500" dirty="0"/>
+          </a:p>
+        </p:txBody>
+      </p:sp>
+      <p:sp>
+        <p:nvSpPr>
+          <p:cNvPr id="25" name="Shape 23"/>
+          <p:cNvSpPr/>
+          <p:nvPr/>
+        </p:nvSpPr>
+        <p:spPr>
+          <a:xfrm>
+            <a:off x="8380781" y="2624328"/>
+            <a:ext cx="3015386" cy="0"/>
+          </a:xfrm>
+          <a:prstGeom prst="line">
+            <a:avLst/>
+          </a:prstGeom>
+          <a:noFill/>
+          <a:ln w="6350">
+            <a:solidFill>
+              <a:srgbClr val="CBD5E1"/>
+            </a:solidFill>
+            <a:prstDash val="solid"/>
+          </a:ln>
+        </p:spPr>
+      </p:sp>
+      <p:sp>
+        <p:nvSpPr>
+          <p:cNvPr id="26" name="Text 24"/>
+          <p:cNvSpPr/>
+          <p:nvPr/>
+        </p:nvSpPr>
+        <p:spPr>
+          <a:xfrm>
+            <a:off x="8380781" y="2779776"/>
+            <a:ext cx="3015386" cy="1965960"/>
+          </a:xfrm>
+          <a:prstGeom prst="rect">
+            <a:avLst/>
+          </a:prstGeom>
+          <a:noFill/>
+          <a:ln/>
+        </p:spPr>
+        <p:txBody>
+          <a:bodyPr wrap="square" lIns="0" tIns="0" rIns="0" bIns="0" rtlCol="0" anchor="t"/>
+          <a:lstStyle/>
+          <a:p>
+            <a:pPr indent="0" marL="0">
+              <a:lnSpc>
+                <a:spcPct val="130000"/>
+              </a:lnSpc>
+              <a:buNone/>
+            </a:pPr>
+            <a:r>
+              <a:rPr lang="en-US" sz="1200" dirty="0">
+                <a:solidFill>
+                  <a:srgbClr val="0F172A"/>
+                </a:solidFill>
+                <a:latin typeface="Pretendard" pitchFamily="34" charset="0"/>
+                <a:ea typeface="Pretendard" pitchFamily="34" charset="-122"/>
+                <a:cs typeface="Pretendard" pitchFamily="34" charset="-120"/>
+              </a:rPr>
+              <a:t>현행 공법 여력을 활용한 밸류업 기회와 더불어 향후 권역 지가 상승에 따른 시세차익 실현이 유력합니다.</a:t>
+            </a:r>
+            <a:endParaRPr lang="en-US" sz="1200" dirty="0"/>
+          </a:p>
+        </p:txBody>
+      </p:sp>
+      <p:sp>
+        <p:nvSpPr>
+          <p:cNvPr id="27" name="Shape 25"/>
           <p:cNvSpPr/>
           <p:nvPr/>
         </p:nvSpPr>
@@ -8525,7 +9161,7 @@
       </p:sp>
       <p:sp>
         <p:nvSpPr>
-          <p:cNvPr id="7" name="Text 5"/>
+          <p:cNvPr id="28" name="Text 26"/>
           <p:cNvSpPr/>
           <p:nvPr/>
         </p:nvSpPr>
@@ -8564,7 +9200,7 @@
       </p:sp>
       <p:sp>
         <p:nvSpPr>
-          <p:cNvPr id="8" name="Text 6"/>
+          <p:cNvPr id="29" name="Text 27"/>
           <p:cNvSpPr/>
           <p:nvPr/>
         </p:nvSpPr>
@@ -8598,7 +9234,7 @@
                 <a:ea typeface="Pretendard" pitchFamily="34" charset="-122"/>
                 <a:cs typeface="Pretendard" pitchFamily="34" charset="-120"/>
               </a:rPr>
-              <a:t>{"ok":true,"mocked":true,"extractedFields":{"area_signal":"역삼","asset_type":"오피스빌딩","price_band":"300억","size_signal":"3000평(약 9917.4㎡)"},"extractedFacts":{"region":"역삼","exactAddressCandidate":"역삼동 742-1","assetType":"오피스빌딩","priceText":"300억","sizeText":"3000평(약 9917.4㎡)","currentUse":"오피스","currentUseSignal":"근린생활시설","leaseSignal":"임대중","vacancySignal":"공실없음","tenantNames":["쿠팡","네이버"],"unitRentTexts":["301호: 1500만"],"sellerMotivationText":"자산 효율화","brokerNotes":["초역세권 매물"]},"detectedSensitiveFields":["exact_address","tenant_name"],"ambiguousFields":[],"warnings":[],"areaSignal":"역삼","assetType":"오피스빌딩","priceBand":"300억","sizeSignal":"3000평(약 9917.4㎡)","dealType":"매각","buildingName":"역삼 센트럴타워","exactAddress":"역삼동 742-1","totalFloorArea":9917.3,"buildYear":2015,"currentUseSignal":"근린생활시설","vacancySignal":"공실 없음","fitSummary":"초역세권 근생 빌딩으로 시행/사옥 매입에 최적화","cautionSummary":"주요 임차 업종 만기 조율 필요","hiddenFields":["exact_address","seller_motivation"],"confidence":{"areaSignal":"confirmed","assetType":"confirmed","priceBand":"ai_hypothesis","fitSummary":"ai_hypothesis"},"missingData":["sizeSignal"],"boundaryNote":"본 자료는 실거래 통계 기반 참고치입니다.","buyerType":"법인 사옥형","budgetRange":{"min":50,"max":80,"display":"50억~80억"},"preferredRegions":["강남","성수"],"assetTypes":["꼬마빌딩","사옥용"],"purchasePurpose":"사옥용 매입","mustHave":["초역세권","주차"],"niceToHave":["테라스","루프탑"],"riskTolerance":"medium","financingNote":"자본금 50% 준비","missingQuestions":["구체적인 입주 시기가 언제인가요?","선호하는 수익률이 있나요?"],"privacyNotes":["연락처 비공개"],"fitReasons":["매수자 예산(50-80억)에 부합하는 매물입니다.","요청하신 성수/강남 권역에 해당합니다."],"cautionReasons":["요청한 용도와 달리 명도 협의가 다소 필요합니다."],"recommendedNextAction":"현장 답사 제안","kakaoMessage":"안녕하세요! 요청하신 조건에 부합하는 추천 매물이 있어 안내해 드립니다. 확인해보시고 피드백 부탁드립니다.","title":"강남 역삼역 초역세권 오피스 사옥용 빌딩 매각","shortSummary":"역삼역 도보 5분 거리의 준신축급 대형 오피스빌딩입니다.","dealPoints":["초역세권","사옥 최적"],"cautionPoints":["명도 조율 필요"],"hiddenInfoNotice":["보증금 및 지번은 인가 후 확인 가능"],"gateMessage":"G1 등급 등록이 필요합니다.","kakaoText":"강남 역삼역 오피스 빌딩 매각 안내입니다.","exactUnitCandidate":"101호","floor":"1층","areaSqmText":"150㎡","spaceType":"office","depositText":"5000만","monthlyRentText":"400만","maintenanceFeeText":"50만","availableFromText":"즉시입주","leaseTermMonthsText":"24","incentivesText":"렌트프리 2개월","restrictions":[],"landlordIdentity":"김성수","currentTenant":"스타트업","vacancyReason":"이전 확장","rentNegotiation":"협의 가능","region":"성수동","areaSqm":150,"deposit":5000,"monthlyRent":400,"maintenanceFee":50,"availableFrom":"즉시입주","leaseTermMonths":24,"incentives":{"rentFreeMonths":2,"interiorSupport":"일부 인테리어 지원","freeRentDetail":"렌트프리 2개월 지원"},"shortSummaryLease":"성수역 도보 5분 거리 1층 리테일 상가 매물입니다."} &gt; 밸류업 시나리오는 AI 추정이며 실제 시장 조건에 따라 다를 수 있습니다.</a:t>
+              <a:t>본 자산의 3대 핵심 투자 포인트와 예상 매수자 유형 분석입니다. &gt; 밸류업 시나리오는 AI 추정이며 실제 시장 조건에 따라 다를 수 있습니다.</a:t>
             </a:r>
             <a:endParaRPr lang="en-US" sz="1000" dirty="0"/>
           </a:p>
@@ -8606,7 +9242,7 @@
       </p:sp>
       <p:sp>
         <p:nvSpPr>
-          <p:cNvPr id="9" name="Text 7"/>
+          <p:cNvPr id="30" name="Text 28"/>
           <p:cNvSpPr/>
           <p:nvPr/>
         </p:nvSpPr>
@@ -8645,7 +9281,7 @@
       </p:sp>
       <p:sp>
         <p:nvSpPr>
-          <p:cNvPr id="10" name="Shape 8"/>
+          <p:cNvPr id="31" name="Shape 29"/>
           <p:cNvSpPr/>
           <p:nvPr/>
         </p:nvSpPr>

--- a/docs/test/stress/e2e-outputs/trading_case15_jongro_family_basic.pptx
+++ b/docs/test/stress/e2e-outputs/trading_case15_jongro_family_basic.pptx
@@ -5160,6 +5160,45 @@
         <p:spPr>
           <a:xfrm>
             <a:off x="6053328" y="1481328"/>
+            <a:ext cx="5571439" cy="237744"/>
+          </a:xfrm>
+          <a:prstGeom prst="rect">
+            <a:avLst/>
+          </a:prstGeom>
+          <a:noFill/>
+          <a:ln/>
+        </p:spPr>
+        <p:txBody>
+          <a:bodyPr wrap="square" lIns="0" tIns="0" rIns="0" bIns="0" rtlCol="0" anchor="ctr"/>
+          <a:lstStyle/>
+          <a:p>
+            <a:pPr indent="0" marL="0">
+              <a:buNone/>
+            </a:pPr>
+            <a:r>
+              <a:rPr lang="en-US" sz="1100" b="1" dirty="0">
+                <a:solidFill>
+                  <a:srgbClr val="10161F"/>
+                </a:solidFill>
+                <a:latin typeface="Pretendard" pitchFamily="34" charset="0"/>
+                <a:ea typeface="Pretendard" pitchFamily="34" charset="-122"/>
+                <a:cs typeface="Pretendard" pitchFamily="34" charset="-120"/>
+              </a:rPr>
+              <a:t>[교통] 교통 및 도로 접근성</a:t>
+            </a:r>
+            <a:endParaRPr lang="en-US" sz="1100" dirty="0"/>
+          </a:p>
+        </p:txBody>
+      </p:sp>
+      <p:sp>
+        <p:nvSpPr>
+          <p:cNvPr id="8" name="Text 5"/>
+          <p:cNvSpPr/>
+          <p:nvPr/>
+        </p:nvSpPr>
+        <p:spPr>
+          <a:xfrm>
+            <a:off x="6053328" y="1801368"/>
             <a:ext cx="2117147" cy="493776"/>
           </a:xfrm>
           <a:prstGeom prst="rect">
@@ -5187,7 +5226,7 @@
                 <a:ea typeface="Pretendard" pitchFamily="34" charset="-122"/>
                 <a:cs typeface="Pretendard" pitchFamily="34" charset="-120"/>
               </a:rPr>
-              <a:t>교통 접근성</a:t>
+              <a:t>교통 접근성 상세 정보는 담당 브로커를 통해 확인하</a:t>
             </a:r>
             <a:endParaRPr lang="en-US" sz="1300" dirty="0"/>
           </a:p>
@@ -5195,13 +5234,13 @@
       </p:sp>
       <p:sp>
         <p:nvSpPr>
-          <p:cNvPr id="8" name="Text 5"/>
-          <p:cNvSpPr/>
-          <p:nvPr/>
-        </p:nvSpPr>
-        <p:spPr>
-          <a:xfrm>
-            <a:off x="8170475" y="1481328"/>
+          <p:cNvPr id="9" name="Text 6"/>
+          <p:cNvSpPr/>
+          <p:nvPr/>
+        </p:nvSpPr>
+        <p:spPr>
+          <a:xfrm>
+            <a:off x="8170475" y="1801368"/>
             <a:ext cx="3454292" cy="493776"/>
           </a:xfrm>
           <a:prstGeom prst="rect">
@@ -5220,16 +5259,70 @@
               </a:lnSpc>
               <a:buNone/>
             </a:pPr>
-            <a:r>
-              <a:rPr lang="en-US" sz="1300" b="1" dirty="0">
-                <a:solidFill>
-                  <a:srgbClr val="10161F"/>
+            <a:endParaRPr lang="en-US" sz="1300" dirty="0"/>
+          </a:p>
+        </p:txBody>
+      </p:sp>
+      <p:sp>
+        <p:nvSpPr>
+          <p:cNvPr id="10" name="Shape 7"/>
+          <p:cNvSpPr/>
+          <p:nvPr/>
+        </p:nvSpPr>
+        <p:spPr>
+          <a:xfrm>
+            <a:off x="6053328" y="2295144"/>
+            <a:ext cx="5571439" cy="0"/>
+          </a:xfrm>
+          <a:prstGeom prst="line">
+            <a:avLst/>
+          </a:prstGeom>
+          <a:noFill/>
+          <a:ln w="3810">
+            <a:solidFill>
+              <a:srgbClr val="CBD5E0"/>
+            </a:solidFill>
+            <a:prstDash val="solid"/>
+          </a:ln>
+        </p:spPr>
+      </p:sp>
+      <p:sp>
+        <p:nvSpPr>
+          <p:cNvPr id="11" name="Text 8"/>
+          <p:cNvSpPr/>
+          <p:nvPr/>
+        </p:nvSpPr>
+        <p:spPr>
+          <a:xfrm>
+            <a:off x="6053328" y="2295144"/>
+            <a:ext cx="2117147" cy="493776"/>
+          </a:xfrm>
+          <a:prstGeom prst="rect">
+            <a:avLst/>
+          </a:prstGeom>
+          <a:noFill/>
+          <a:ln/>
+        </p:spPr>
+        <p:txBody>
+          <a:bodyPr wrap="square" lIns="0" tIns="0" rIns="0" bIns="0" rtlCol="0" anchor="ctr"/>
+          <a:lstStyle/>
+          <a:p>
+            <a:pPr indent="0" marL="0">
+              <a:lnSpc>
+                <a:spcPct val="120000"/>
+              </a:lnSpc>
+              <a:buNone/>
+            </a:pPr>
+            <a:r>
+              <a:rPr lang="en-US" sz="1300" dirty="0">
+                <a:solidFill>
+                  <a:srgbClr val="718096"/>
                 </a:solidFill>
                 <a:latin typeface="Pretendard" pitchFamily="34" charset="0"/>
                 <a:ea typeface="Pretendard" pitchFamily="34" charset="-122"/>
                 <a:cs typeface="Pretendard" pitchFamily="34" charset="-120"/>
               </a:rPr>
-              <a:t>{"ok":true,"mocked":true,"extractedFields":{"area_signal":"역삼","asset_type":"오피스빌딩","price_band":"300억","size_signal":"3000평(약 9917.</a:t>
+              <a:t>[건물] 주변 상권</a:t>
             </a:r>
             <a:endParaRPr lang="en-US" sz="1300" dirty="0"/>
           </a:p>
@@ -5237,14 +5330,14 @@
       </p:sp>
       <p:sp>
         <p:nvSpPr>
-          <p:cNvPr id="9" name="Text 6"/>
-          <p:cNvSpPr/>
-          <p:nvPr/>
-        </p:nvSpPr>
-        <p:spPr>
-          <a:xfrm>
-            <a:off x="566928" y="6382512"/>
-            <a:ext cx="7315200" cy="219456"/>
+          <p:cNvPr id="12" name="Text 9"/>
+          <p:cNvSpPr/>
+          <p:nvPr/>
+        </p:nvSpPr>
+        <p:spPr>
+          <a:xfrm>
+            <a:off x="8170475" y="2295144"/>
+            <a:ext cx="3454292" cy="493776"/>
           </a:xfrm>
           <a:prstGeom prst="rect">
             <a:avLst/>
@@ -5257,17 +5350,155 @@
           <a:lstStyle/>
           <a:p>
             <a:pPr indent="0" marL="0">
-              <a:buNone/>
-            </a:pPr>
-            <a:r>
-              <a:rPr lang="en-US" sz="800" dirty="0">
-                <a:solidFill>
-                  <a:srgbClr val="718096"/>
+              <a:lnSpc>
+                <a:spcPct val="120000"/>
+              </a:lnSpc>
+              <a:buNone/>
+            </a:pPr>
+            <a:r>
+              <a:rPr lang="en-US" sz="1300" b="1" dirty="0">
+                <a:solidFill>
+                  <a:srgbClr val="10161F"/>
                 </a:solidFill>
                 <a:latin typeface="Pretendard" pitchFamily="34" charset="0"/>
                 <a:ea typeface="Pretendard" pitchFamily="34" charset="-122"/>
                 <a:cs typeface="Pretendard" pitchFamily="34" charset="-120"/>
               </a:rPr>
+              <a:t>종로권역 내 주요 비즈니스 및 유동인구 풍부한 상권 입지</a:t>
+            </a:r>
+            <a:endParaRPr lang="en-US" sz="1300" dirty="0"/>
+          </a:p>
+        </p:txBody>
+      </p:sp>
+      <p:sp>
+        <p:nvSpPr>
+          <p:cNvPr id="13" name="Shape 10"/>
+          <p:cNvSpPr/>
+          <p:nvPr/>
+        </p:nvSpPr>
+        <p:spPr>
+          <a:xfrm>
+            <a:off x="6053328" y="2788920"/>
+            <a:ext cx="5571439" cy="0"/>
+          </a:xfrm>
+          <a:prstGeom prst="line">
+            <a:avLst/>
+          </a:prstGeom>
+          <a:noFill/>
+          <a:ln w="3810">
+            <a:solidFill>
+              <a:srgbClr val="CBD5E0"/>
+            </a:solidFill>
+            <a:prstDash val="solid"/>
+          </a:ln>
+        </p:spPr>
+      </p:sp>
+      <p:sp>
+        <p:nvSpPr>
+          <p:cNvPr id="14" name="Text 11"/>
+          <p:cNvSpPr/>
+          <p:nvPr/>
+        </p:nvSpPr>
+        <p:spPr>
+          <a:xfrm>
+            <a:off x="6053328" y="2788920"/>
+            <a:ext cx="2117147" cy="493776"/>
+          </a:xfrm>
+          <a:prstGeom prst="rect">
+            <a:avLst/>
+          </a:prstGeom>
+          <a:noFill/>
+          <a:ln/>
+        </p:spPr>
+        <p:txBody>
+          <a:bodyPr wrap="square" lIns="0" tIns="0" rIns="0" bIns="0" rtlCol="0" anchor="ctr"/>
+          <a:lstStyle/>
+          <a:p>
+            <a:pPr indent="0" marL="0">
+              <a:lnSpc>
+                <a:spcPct val="120000"/>
+              </a:lnSpc>
+              <a:buNone/>
+            </a:pPr>
+            <a:r>
+              <a:rPr lang="en-US" sz="1300" dirty="0">
+                <a:solidFill>
+                  <a:srgbClr val="718096"/>
+                </a:solidFill>
+                <a:latin typeface="Pretendard" pitchFamily="34" charset="0"/>
+                <a:ea typeface="Pretendard" pitchFamily="34" charset="-122"/>
+                <a:cs typeface="Pretendard" pitchFamily="34" charset="-120"/>
+              </a:rPr>
+              <a:t>종로권역 내 우수한 접근성과 높은 가시성을 갖춘 핵</a:t>
+            </a:r>
+            <a:endParaRPr lang="en-US" sz="1300" dirty="0"/>
+          </a:p>
+        </p:txBody>
+      </p:sp>
+      <p:sp>
+        <p:nvSpPr>
+          <p:cNvPr id="15" name="Text 12"/>
+          <p:cNvSpPr/>
+          <p:nvPr/>
+        </p:nvSpPr>
+        <p:spPr>
+          <a:xfrm>
+            <a:off x="8170475" y="2788920"/>
+            <a:ext cx="3454292" cy="493776"/>
+          </a:xfrm>
+          <a:prstGeom prst="rect">
+            <a:avLst/>
+          </a:prstGeom>
+          <a:noFill/>
+          <a:ln/>
+        </p:spPr>
+        <p:txBody>
+          <a:bodyPr wrap="square" lIns="0" tIns="0" rIns="0" bIns="0" rtlCol="0" anchor="ctr"/>
+          <a:lstStyle/>
+          <a:p>
+            <a:pPr indent="0" marL="0">
+              <a:lnSpc>
+                <a:spcPct val="120000"/>
+              </a:lnSpc>
+              <a:buNone/>
+            </a:pPr>
+            <a:endParaRPr lang="en-US" sz="1300" dirty="0"/>
+          </a:p>
+        </p:txBody>
+      </p:sp>
+      <p:sp>
+        <p:nvSpPr>
+          <p:cNvPr id="16" name="Text 13"/>
+          <p:cNvSpPr/>
+          <p:nvPr/>
+        </p:nvSpPr>
+        <p:spPr>
+          <a:xfrm>
+            <a:off x="566928" y="6382512"/>
+            <a:ext cx="7315200" cy="219456"/>
+          </a:xfrm>
+          <a:prstGeom prst="rect">
+            <a:avLst/>
+          </a:prstGeom>
+          <a:noFill/>
+          <a:ln/>
+        </p:spPr>
+        <p:txBody>
+          <a:bodyPr wrap="square" lIns="0" tIns="0" rIns="0" bIns="0" rtlCol="0" anchor="ctr"/>
+          <a:lstStyle/>
+          <a:p>
+            <a:pPr indent="0" marL="0">
+              <a:buNone/>
+            </a:pPr>
+            <a:r>
+              <a:rPr lang="en-US" sz="800" dirty="0">
+                <a:solidFill>
+                  <a:srgbClr val="718096"/>
+                </a:solidFill>
+                <a:latin typeface="Pretendard" pitchFamily="34" charset="0"/>
+                <a:ea typeface="Pretendard" pitchFamily="34" charset="-122"/>
+                <a:cs typeface="Pretendard" pitchFamily="34" charset="-120"/>
+              </a:rPr>
               <a:t>크리딜   |   </a:t>
             </a:r>
             <a:endParaRPr lang="en-US" sz="800" dirty="0"/>
@@ -5276,7 +5507,7 @@
       </p:sp>
       <p:sp>
         <p:nvSpPr>
-          <p:cNvPr id="10" name="Text 7"/>
+          <p:cNvPr id="17" name="Text 14"/>
           <p:cNvSpPr/>
           <p:nvPr/>
         </p:nvSpPr>
@@ -5310,45 +5541,6 @@
               <a:t>3</a:t>
             </a:r>
             <a:endParaRPr lang="en-US" sz="900" dirty="0"/>
-          </a:p>
-        </p:txBody>
-      </p:sp>
-      <p:sp>
-        <p:nvSpPr>
-          <p:cNvPr id="11" name="Text 8"/>
-          <p:cNvSpPr/>
-          <p:nvPr/>
-        </p:nvSpPr>
-        <p:spPr>
-          <a:xfrm>
-            <a:off x="566928" y="1481328"/>
-            <a:ext cx="11057839" cy="9692640"/>
-          </a:xfrm>
-          <a:prstGeom prst="rect">
-            <a:avLst/>
-          </a:prstGeom>
-          <a:noFill/>
-          <a:ln/>
-        </p:spPr>
-        <p:txBody>
-          <a:bodyPr wrap="square" lIns="0" tIns="0" rIns="0" bIns="0" rtlCol="0" anchor="t"/>
-          <a:lstStyle/>
-          <a:p>
-            <a:pPr indent="0" marL="0">
-              <a:buNone/>
-            </a:pPr>
-            <a:r>
-              <a:rPr lang="en-US" sz="1000" dirty="0">
-                <a:solidFill>
-                  <a:srgbClr val="10161F"/>
-                </a:solidFill>
-                <a:latin typeface="Pretendard" pitchFamily="34" charset="0"/>
-                <a:ea typeface="Pretendard" pitchFamily="34" charset="-122"/>
-                <a:cs typeface="Pretendard" pitchFamily="34" charset="-120"/>
-              </a:rPr>
-              <a:t>{"ok":true,"mocked":true,"extractedFields":{"area_signal":"역삼","asset_type":"오피스빌딩","price_band":"300억","size_signal":"3000평(약 9917.4㎡)"},"extractedFacts":{"region":"역삼","exactAddressCandidate":"역삼동 742-1","assetType":"오피스빌딩","priceText":"300억","sizeText":"3000평(약 9917.4㎡)","currentUse":"오피스","currentUseSignal":"근린생활시설","leaseSignal":"임대중","vacancySignal":"공실없음","tenantNames":["쿠팡","네이버"],"unitRentTexts":["301호: 1500만"],"sellerMotivationText":"자산 효율화","brokerNotes":["초역세권 매물"]},"detectedSensitiveFields":["exact_address","tenant_name"],"ambiguousFields":[],"warnings":[],"areaSignal":"역삼","assetType":"오피스빌딩","priceBand":"300억","sizeSignal":"3000평(약 9917.4㎡)","dealType":"매각","buildingName":"역삼 센트럴타워","exactAddress":"역삼동 742-1","totalFloorArea":9917.3,"buildYear":2015,"currentUseSignal":"근린생활시설","vacancySignal":"공실 없음","fitSummary":"초역세권 근생 빌딩으로 시행/사옥 매입에 최적화","cautionSummary":"주요 임차 업종 만기 조율 필요","hiddenFields":["exact_address","seller_motivation"],"confidence":{"areaSignal":"confirmed","assetType":"confirmed","priceBand":"ai_hypothesis","fitSummary":"ai_hypothesis"},"missingData":["sizeSignal"],"boundaryNote":"본 자료는 실거래 통계 기반 참고치입니다.","buyerType":"법인 사옥형","budgetRange":{"min":50,"max":80,"display":"50억~80억"},"preferredRegions":["강남","성수"],"assetTypes":["꼬마빌딩","사옥용"],"purchasePurpose":"사옥용 매입","mustHave":["초역세권","주차"],"niceToHave":["테라스","루프탑"],"riskTolerance":"medium","financingNote":"자본금 50% 준비","missingQuestions":["구체적인 입주 시기가 언제인가요?","선호하는 수익률이 있나요?"],"privacyNotes":["연락처 비공개"],"fitReasons":["매수자 예산(50-80억)에 부합하는 매물입니다.","요청하신 성수/강남 권역에 해당합니다."],"cautionReasons":["요청한 용도와 달리 명도 협의가 다소 필요합니다."],"recommendedNextAction":"현장 답사 제안","kakaoMessage":"안녕하세요! 요청하신 조건에 부합하는 추천 매물이 있어 안내해 드립니다. 확인해보시고 피드백 부탁드립니다.","title":"강남 역삼역 초역세권 오피스 사옥용 빌딩 매각","shortSummary":"역삼역 도보 5분 거리의 준신축급 대형 오피스빌딩입니다.","dealPoints":["초역세권","사옥 최적"],"cautionPoints":["명도 조율 필요"],"hiddenInfoNotice":["보증금 및 지번은 인가 후 확인 가능"],"gateMessage":"G1 등급 등록이 필요합니다.","kakaoText":"강남 역삼역 오피스 빌딩 매각 안내입니다.","exactUnitCandidate":"101호","floor":"1층","areaSqmText":"150㎡","spaceType":"office","depositText":"5000만","monthlyRentText":"400만","maintenanceFeeText":"50만","availableFromText":"즉시입주","leaseTermMonthsText":"24","incentivesText":"렌트프리 2개월","restrictions":[],"landlordIdentity":"김성수","currentTenant":"스타트업","vacancyReason":"이전 확장","rentNegotiation":"협의 가능","region":"성수동","areaSqm":150,"deposit":5000,"monthlyRent":400,"maintenanceFee":50,"availableFrom":"즉시입주","leaseTermMonths":24,"incentives":{"rentFreeMonths":2,"interiorSupport":"일부 인테리어 지원","freeRentDetail":"렌트프리 2개월 지원"},"shortSummaryLease":"성수역 도보 5분 거리 1층 리테일 상가 매물입니다."}</a:t>
-            </a:r>
-            <a:endParaRPr lang="en-US" sz="1000" dirty="0"/>
           </a:p>
         </p:txBody>
       </p:sp>
@@ -5596,7 +5788,7 @@
                 <a:ea typeface="Pretendard" pitchFamily="34" charset="-122"/>
                 <a:cs typeface="Pretendard" pitchFamily="34" charset="-120"/>
               </a:rPr>
-              <a:t>소재지</a:t>
+              <a:t>{"ok"</a:t>
             </a:r>
             <a:endParaRPr lang="en-US" sz="1400" dirty="0"/>
           </a:p>
@@ -5638,7 +5830,7 @@
                 <a:ea typeface="Pretendard" pitchFamily="34" charset="-122"/>
                 <a:cs typeface="Pretendard" pitchFamily="34" charset="-120"/>
               </a:rPr>
-              <a:t>종로권역</a:t>
+              <a:t>true,"mocked":true,"extractedFields":{"area_signal":"역삼","asset_type":"오피스빌딩","price_band":"300억","size_signal":"3000평(약 9917.4㎡)"},"extractedFacts":{"region":"역삼","exactAddressCandidate":"역삼동 742-1","assetType":"오피스빌딩","priceText":"300억","sizeText":"3000평(약 9917.4㎡)","currentUse":"오피스","currentUseSignal":"근린생활시설","leaseSignal":"임대중","vacancySignal":"공실없음","tenantNames":"쿠팡","네이버","unitRentTexts":"301호: 1500만","sellerMotivationText":"자산 효율화","brokerNotes":"초역세권 매물"},"detectedSensitiveFields":"exact_address","tenant_name","ambiguousFields":,"warnings":,"areaSignal":"역삼","assetType":"오피스빌딩","priceBand":"300억","sizeSignal":"3000평(약 9917.4㎡)","dealType":"매각","buildingName":"역삼 센트럴타워","exactAddress":"역삼동 742-1","totalFloorArea":9917.3,"buildYear":2015,"currentUseSignal":"근린생활시설","vacancySignal":"공실 없음","fitSummary":"초역세권 근생 빌딩으로 시행/사옥 매입에 최적화","cautionSummary":"주요 임차 업종 만기 조율 필요","hiddenFields":"exact_address","seller_motivation","confidence":{"areaSignal":"confirmed","assetType":"confirmed","priceBand":"ai_hypothesis","fitSummary":"ai_hypothesis"},"missingData":"sizeSignal","boundaryNote":"본 자료는 실거래 통계 기반 참고치입니다.","buyerType":"법인 사옥형","budgetRange":{"min":50,"max":80,"display":"50억~80억"},"preferredRegions":"강남","성수","assetTypes":"꼬마빌딩","사옥용","purchasePurpose":"사옥용 매입","mustHave":"초역세권","주차","niceToHave":"테라스","루프탑","riskTolerance":"medium","financingNote":"자본금 50% 준비","missingQuestions":"구체적인 입주 시기가 언제인가요?","선호하는 수익률이 있나요?","privacyNotes":"연락처 비공개","fitReasons":"매수자 예산(50-80억)에 부합하는 매물입니다.","요청하신 성수/강남 권역에 해당합니다.","cautionReasons":"요청한 용도와 달리 명도 협의가 다소 필요합니다.","recommendedNextAction":"현장 답사 제안","kakaoMessage":"안녕하세요! 요청하신 조건에 부합하는 추천 매물이 있어 안내해 드립니다. 확인해보시고 피드백 부탁드립니다.","title":"강남 역삼역 초역세권 오피스 사옥용 빌딩 매각","shortSummary":"역삼역 도보 5분 거리의 준신축급 대형 오피스빌딩입니다.","dealPoints":"초역세권","사옥 최적","cautionPoints":"명도 조율 필요","hiddenInfoNotice":"보증금 및 지번은 인가 후 확인 가능","gateMessage":"G1 등급 등록이 필요합니다.","kakaoText":"강남 역삼역 오피스 빌딩 매각 안내입니다.","exactUnitCandidate":"101호","floor":"1층","areaSqmText":"150㎡","spaceType":"office","depositText":"5000만","monthlyRentText":"400만","maintenanceFeeText":"50만","availableFromText":"즉시입주","leaseTermMonthsText":"24","incentivesText":"렌트프리 2개월","restrictions":,"landlordIdentity":"김성수","currentTenant":"스타트업","vacancyReason":"이전 확장","rentNegotiation":"협의 가능","region":"성수동","areaSqm":150,"deposit":5000,"monthlyRent":400,"maintenanceFee":50,"availableFrom":"즉시입주","leaseTermMonths":24,"incentives":{"rentFreeMonths":2,"interiorSupport":"일부 인테리어 지원","freeRentDetail":"렌트프리 2개월 지원"},"shortSummaryLease":"성수역 도보 5분 거리 1층 리테일 상가 매물입니다."}</a:t>
             </a:r>
             <a:endParaRPr lang="en-US" sz="1400" dirty="0"/>
           </a:p>
@@ -5647,862 +5839,6 @@
       <p:sp>
         <p:nvSpPr>
           <p:cNvPr id="9" name="Shape 7"/>
-          <p:cNvSpPr/>
-          <p:nvPr/>
-        </p:nvSpPr>
-        <p:spPr>
-          <a:xfrm>
-            <a:off x="566928" y="2048256"/>
-            <a:ext cx="6858000" cy="0"/>
-          </a:xfrm>
-          <a:prstGeom prst="line">
-            <a:avLst/>
-          </a:prstGeom>
-          <a:noFill/>
-          <a:ln w="3810">
-            <a:solidFill>
-              <a:srgbClr val="CBD5E0"/>
-            </a:solidFill>
-            <a:prstDash val="solid"/>
-          </a:ln>
-        </p:spPr>
-      </p:sp>
-      <p:sp>
-        <p:nvSpPr>
-          <p:cNvPr id="10" name="Text 8"/>
-          <p:cNvSpPr/>
-          <p:nvPr/>
-        </p:nvSpPr>
-        <p:spPr>
-          <a:xfrm>
-            <a:off x="566928" y="2048256"/>
-            <a:ext cx="2606040" cy="402336"/>
-          </a:xfrm>
-          <a:prstGeom prst="rect">
-            <a:avLst/>
-          </a:prstGeom>
-          <a:noFill/>
-          <a:ln/>
-        </p:spPr>
-        <p:txBody>
-          <a:bodyPr wrap="square" lIns="0" tIns="0" rIns="0" bIns="0" rtlCol="0" anchor="ctr"/>
-          <a:lstStyle/>
-          <a:p>
-            <a:pPr indent="0" marL="0">
-              <a:lnSpc>
-                <a:spcPct val="120000"/>
-              </a:lnSpc>
-              <a:buNone/>
-            </a:pPr>
-            <a:r>
-              <a:rPr lang="en-US" sz="1400" dirty="0">
-                <a:solidFill>
-                  <a:srgbClr val="718096"/>
-                </a:solidFill>
-                <a:latin typeface="Pretendard" pitchFamily="34" charset="0"/>
-                <a:ea typeface="Pretendard" pitchFamily="34" charset="-122"/>
-                <a:cs typeface="Pretendard" pitchFamily="34" charset="-120"/>
-              </a:rPr>
-              <a:t>주요 용도</a:t>
-            </a:r>
-            <a:endParaRPr lang="en-US" sz="1400" dirty="0"/>
-          </a:p>
-        </p:txBody>
-      </p:sp>
-      <p:sp>
-        <p:nvSpPr>
-          <p:cNvPr id="11" name="Text 9"/>
-          <p:cNvSpPr/>
-          <p:nvPr/>
-        </p:nvSpPr>
-        <p:spPr>
-          <a:xfrm>
-            <a:off x="3172968" y="2048256"/>
-            <a:ext cx="4251960" cy="402336"/>
-          </a:xfrm>
-          <a:prstGeom prst="rect">
-            <a:avLst/>
-          </a:prstGeom>
-          <a:noFill/>
-          <a:ln/>
-        </p:spPr>
-        <p:txBody>
-          <a:bodyPr wrap="square" lIns="0" tIns="0" rIns="0" bIns="0" rtlCol="0" anchor="ctr"/>
-          <a:lstStyle/>
-          <a:p>
-            <a:pPr indent="0" marL="0">
-              <a:lnSpc>
-                <a:spcPct val="120000"/>
-              </a:lnSpc>
-              <a:buNone/>
-            </a:pPr>
-            <a:r>
-              <a:rPr lang="en-US" sz="1400" b="1" dirty="0">
-                <a:solidFill>
-                  <a:srgbClr val="10161F"/>
-                </a:solidFill>
-                <a:latin typeface="Pretendard" pitchFamily="34" charset="0"/>
-                <a:ea typeface="Pretendard" pitchFamily="34" charset="-122"/>
-                <a:cs typeface="Pretendard" pitchFamily="34" charset="-120"/>
-              </a:rPr>
-              <a:t>근린생활시설</a:t>
-            </a:r>
-            <a:endParaRPr lang="en-US" sz="1400" dirty="0"/>
-          </a:p>
-        </p:txBody>
-      </p:sp>
-      <p:sp>
-        <p:nvSpPr>
-          <p:cNvPr id="12" name="Shape 10"/>
-          <p:cNvSpPr/>
-          <p:nvPr/>
-        </p:nvSpPr>
-        <p:spPr>
-          <a:xfrm>
-            <a:off x="566928" y="2450592"/>
-            <a:ext cx="6858000" cy="0"/>
-          </a:xfrm>
-          <a:prstGeom prst="line">
-            <a:avLst/>
-          </a:prstGeom>
-          <a:noFill/>
-          <a:ln w="3810">
-            <a:solidFill>
-              <a:srgbClr val="CBD5E0"/>
-            </a:solidFill>
-            <a:prstDash val="solid"/>
-          </a:ln>
-        </p:spPr>
-      </p:sp>
-      <p:sp>
-        <p:nvSpPr>
-          <p:cNvPr id="13" name="Text 11"/>
-          <p:cNvSpPr/>
-          <p:nvPr/>
-        </p:nvSpPr>
-        <p:spPr>
-          <a:xfrm>
-            <a:off x="566928" y="2450592"/>
-            <a:ext cx="2606040" cy="402336"/>
-          </a:xfrm>
-          <a:prstGeom prst="rect">
-            <a:avLst/>
-          </a:prstGeom>
-          <a:noFill/>
-          <a:ln/>
-        </p:spPr>
-        <p:txBody>
-          <a:bodyPr wrap="square" lIns="0" tIns="0" rIns="0" bIns="0" rtlCol="0" anchor="ctr"/>
-          <a:lstStyle/>
-          <a:p>
-            <a:pPr indent="0" marL="0">
-              <a:lnSpc>
-                <a:spcPct val="120000"/>
-              </a:lnSpc>
-              <a:buNone/>
-            </a:pPr>
-            <a:r>
-              <a:rPr lang="en-US" sz="1400" dirty="0">
-                <a:solidFill>
-                  <a:srgbClr val="718096"/>
-                </a:solidFill>
-                <a:latin typeface="Pretendard" pitchFamily="34" charset="0"/>
-                <a:ea typeface="Pretendard" pitchFamily="34" charset="-122"/>
-                <a:cs typeface="Pretendard" pitchFamily="34" charset="-120"/>
-              </a:rPr>
-              <a:t>연면적</a:t>
-            </a:r>
-            <a:endParaRPr lang="en-US" sz="1400" dirty="0"/>
-          </a:p>
-        </p:txBody>
-      </p:sp>
-      <p:sp>
-        <p:nvSpPr>
-          <p:cNvPr id="14" name="Text 12"/>
-          <p:cNvSpPr/>
-          <p:nvPr/>
-        </p:nvSpPr>
-        <p:spPr>
-          <a:xfrm>
-            <a:off x="3172968" y="2450592"/>
-            <a:ext cx="4251960" cy="402336"/>
-          </a:xfrm>
-          <a:prstGeom prst="rect">
-            <a:avLst/>
-          </a:prstGeom>
-          <a:noFill/>
-          <a:ln/>
-        </p:spPr>
-        <p:txBody>
-          <a:bodyPr wrap="square" lIns="0" tIns="0" rIns="0" bIns="0" rtlCol="0" anchor="ctr"/>
-          <a:lstStyle/>
-          <a:p>
-            <a:pPr indent="0" marL="0">
-              <a:lnSpc>
-                <a:spcPct val="120000"/>
-              </a:lnSpc>
-              <a:buNone/>
-            </a:pPr>
-            <a:r>
-              <a:rPr lang="en-US" sz="1400" b="1" dirty="0">
-                <a:solidFill>
-                  <a:srgbClr val="10161F"/>
-                </a:solidFill>
-                <a:latin typeface="Pretendard" pitchFamily="34" charset="0"/>
-                <a:ea typeface="Pretendard" pitchFamily="34" charset="-122"/>
-                <a:cs typeface="Pretendard" pitchFamily="34" charset="-120"/>
-              </a:rPr>
-              <a:t>5,000㎡ (약 1513평(약 5001.7㎡))</a:t>
-            </a:r>
-            <a:endParaRPr lang="en-US" sz="1400" dirty="0"/>
-          </a:p>
-        </p:txBody>
-      </p:sp>
-      <p:sp>
-        <p:nvSpPr>
-          <p:cNvPr id="15" name="Shape 13"/>
-          <p:cNvSpPr/>
-          <p:nvPr/>
-        </p:nvSpPr>
-        <p:spPr>
-          <a:xfrm>
-            <a:off x="566928" y="2852928"/>
-            <a:ext cx="6858000" cy="0"/>
-          </a:xfrm>
-          <a:prstGeom prst="line">
-            <a:avLst/>
-          </a:prstGeom>
-          <a:noFill/>
-          <a:ln w="3810">
-            <a:solidFill>
-              <a:srgbClr val="CBD5E0"/>
-            </a:solidFill>
-            <a:prstDash val="solid"/>
-          </a:ln>
-        </p:spPr>
-      </p:sp>
-      <p:sp>
-        <p:nvSpPr>
-          <p:cNvPr id="16" name="Text 14"/>
-          <p:cNvSpPr/>
-          <p:nvPr/>
-        </p:nvSpPr>
-        <p:spPr>
-          <a:xfrm>
-            <a:off x="566928" y="2852928"/>
-            <a:ext cx="2606040" cy="402336"/>
-          </a:xfrm>
-          <a:prstGeom prst="rect">
-            <a:avLst/>
-          </a:prstGeom>
-          <a:noFill/>
-          <a:ln/>
-        </p:spPr>
-        <p:txBody>
-          <a:bodyPr wrap="square" lIns="0" tIns="0" rIns="0" bIns="0" rtlCol="0" anchor="ctr"/>
-          <a:lstStyle/>
-          <a:p>
-            <a:pPr indent="0" marL="0">
-              <a:lnSpc>
-                <a:spcPct val="120000"/>
-              </a:lnSpc>
-              <a:buNone/>
-            </a:pPr>
-            <a:r>
-              <a:rPr lang="en-US" sz="1400" dirty="0">
-                <a:solidFill>
-                  <a:srgbClr val="718096"/>
-                </a:solidFill>
-                <a:latin typeface="Pretendard" pitchFamily="34" charset="0"/>
-                <a:ea typeface="Pretendard" pitchFamily="34" charset="-122"/>
-                <a:cs typeface="Pretendard" pitchFamily="34" charset="-120"/>
-              </a:rPr>
-              <a:t>대지면적</a:t>
-            </a:r>
-            <a:endParaRPr lang="en-US" sz="1400" dirty="0"/>
-          </a:p>
-        </p:txBody>
-      </p:sp>
-      <p:sp>
-        <p:nvSpPr>
-          <p:cNvPr id="17" name="Text 15"/>
-          <p:cNvSpPr/>
-          <p:nvPr/>
-        </p:nvSpPr>
-        <p:spPr>
-          <a:xfrm>
-            <a:off x="3172968" y="2852928"/>
-            <a:ext cx="4251960" cy="402336"/>
-          </a:xfrm>
-          <a:prstGeom prst="rect">
-            <a:avLst/>
-          </a:prstGeom>
-          <a:noFill/>
-          <a:ln/>
-        </p:spPr>
-        <p:txBody>
-          <a:bodyPr wrap="square" lIns="0" tIns="0" rIns="0" bIns="0" rtlCol="0" anchor="ctr"/>
-          <a:lstStyle/>
-          <a:p>
-            <a:pPr indent="0" marL="0">
-              <a:lnSpc>
-                <a:spcPct val="120000"/>
-              </a:lnSpc>
-              <a:buNone/>
-            </a:pPr>
-            <a:r>
-              <a:rPr lang="en-US" sz="1400" b="1" dirty="0">
-                <a:solidFill>
-                  <a:srgbClr val="10161F"/>
-                </a:solidFill>
-                <a:latin typeface="Pretendard" pitchFamily="34" charset="0"/>
-                <a:ea typeface="Pretendard" pitchFamily="34" charset="-122"/>
-                <a:cs typeface="Pretendard" pitchFamily="34" charset="-120"/>
-              </a:rPr>
-              <a:t>1,000㎡ (약 303평(약 1001.7㎡))</a:t>
-            </a:r>
-            <a:endParaRPr lang="en-US" sz="1400" dirty="0"/>
-          </a:p>
-        </p:txBody>
-      </p:sp>
-      <p:sp>
-        <p:nvSpPr>
-          <p:cNvPr id="18" name="Shape 16"/>
-          <p:cNvSpPr/>
-          <p:nvPr/>
-        </p:nvSpPr>
-        <p:spPr>
-          <a:xfrm>
-            <a:off x="566928" y="3255264"/>
-            <a:ext cx="6858000" cy="0"/>
-          </a:xfrm>
-          <a:prstGeom prst="line">
-            <a:avLst/>
-          </a:prstGeom>
-          <a:noFill/>
-          <a:ln w="3810">
-            <a:solidFill>
-              <a:srgbClr val="CBD5E0"/>
-            </a:solidFill>
-            <a:prstDash val="solid"/>
-          </a:ln>
-        </p:spPr>
-      </p:sp>
-      <p:sp>
-        <p:nvSpPr>
-          <p:cNvPr id="19" name="Text 17"/>
-          <p:cNvSpPr/>
-          <p:nvPr/>
-        </p:nvSpPr>
-        <p:spPr>
-          <a:xfrm>
-            <a:off x="566928" y="3255264"/>
-            <a:ext cx="2606040" cy="402336"/>
-          </a:xfrm>
-          <a:prstGeom prst="rect">
-            <a:avLst/>
-          </a:prstGeom>
-          <a:noFill/>
-          <a:ln/>
-        </p:spPr>
-        <p:txBody>
-          <a:bodyPr wrap="square" lIns="0" tIns="0" rIns="0" bIns="0" rtlCol="0" anchor="ctr"/>
-          <a:lstStyle/>
-          <a:p>
-            <a:pPr indent="0" marL="0">
-              <a:lnSpc>
-                <a:spcPct val="120000"/>
-              </a:lnSpc>
-              <a:buNone/>
-            </a:pPr>
-            <a:r>
-              <a:rPr lang="en-US" sz="1400" dirty="0">
-                <a:solidFill>
-                  <a:srgbClr val="718096"/>
-                </a:solidFill>
-                <a:latin typeface="Pretendard" pitchFamily="34" charset="0"/>
-                <a:ea typeface="Pretendard" pitchFamily="34" charset="-122"/>
-                <a:cs typeface="Pretendard" pitchFamily="34" charset="-120"/>
-              </a:rPr>
-              <a:t>용도지역</a:t>
-            </a:r>
-            <a:endParaRPr lang="en-US" sz="1400" dirty="0"/>
-          </a:p>
-        </p:txBody>
-      </p:sp>
-      <p:sp>
-        <p:nvSpPr>
-          <p:cNvPr id="20" name="Text 18"/>
-          <p:cNvSpPr/>
-          <p:nvPr/>
-        </p:nvSpPr>
-        <p:spPr>
-          <a:xfrm>
-            <a:off x="3172968" y="3255264"/>
-            <a:ext cx="4251960" cy="402336"/>
-          </a:xfrm>
-          <a:prstGeom prst="rect">
-            <a:avLst/>
-          </a:prstGeom>
-          <a:noFill/>
-          <a:ln/>
-        </p:spPr>
-        <p:txBody>
-          <a:bodyPr wrap="square" lIns="0" tIns="0" rIns="0" bIns="0" rtlCol="0" anchor="ctr"/>
-          <a:lstStyle/>
-          <a:p>
-            <a:pPr indent="0" marL="0">
-              <a:lnSpc>
-                <a:spcPct val="120000"/>
-              </a:lnSpc>
-              <a:buNone/>
-            </a:pPr>
-            <a:r>
-              <a:rPr lang="en-US" sz="1400" b="1" dirty="0">
-                <a:solidFill>
-                  <a:srgbClr val="10161F"/>
-                </a:solidFill>
-                <a:latin typeface="Pretendard" pitchFamily="34" charset="0"/>
-                <a:ea typeface="Pretendard" pitchFamily="34" charset="-122"/>
-                <a:cs typeface="Pretendard" pitchFamily="34" charset="-120"/>
-              </a:rPr>
-              <a:t>일반상업지역</a:t>
-            </a:r>
-            <a:endParaRPr lang="en-US" sz="1400" dirty="0"/>
-          </a:p>
-        </p:txBody>
-      </p:sp>
-      <p:sp>
-        <p:nvSpPr>
-          <p:cNvPr id="21" name="Shape 19"/>
-          <p:cNvSpPr/>
-          <p:nvPr/>
-        </p:nvSpPr>
-        <p:spPr>
-          <a:xfrm>
-            <a:off x="566928" y="3657600"/>
-            <a:ext cx="6858000" cy="0"/>
-          </a:xfrm>
-          <a:prstGeom prst="line">
-            <a:avLst/>
-          </a:prstGeom>
-          <a:noFill/>
-          <a:ln w="3810">
-            <a:solidFill>
-              <a:srgbClr val="CBD5E0"/>
-            </a:solidFill>
-            <a:prstDash val="solid"/>
-          </a:ln>
-        </p:spPr>
-      </p:sp>
-      <p:sp>
-        <p:nvSpPr>
-          <p:cNvPr id="22" name="Text 20"/>
-          <p:cNvSpPr/>
-          <p:nvPr/>
-        </p:nvSpPr>
-        <p:spPr>
-          <a:xfrm>
-            <a:off x="566928" y="3657600"/>
-            <a:ext cx="2606040" cy="402336"/>
-          </a:xfrm>
-          <a:prstGeom prst="rect">
-            <a:avLst/>
-          </a:prstGeom>
-          <a:noFill/>
-          <a:ln/>
-        </p:spPr>
-        <p:txBody>
-          <a:bodyPr wrap="square" lIns="0" tIns="0" rIns="0" bIns="0" rtlCol="0" anchor="ctr"/>
-          <a:lstStyle/>
-          <a:p>
-            <a:pPr indent="0" marL="0">
-              <a:lnSpc>
-                <a:spcPct val="120000"/>
-              </a:lnSpc>
-              <a:buNone/>
-            </a:pPr>
-            <a:r>
-              <a:rPr lang="en-US" sz="1400" dirty="0">
-                <a:solidFill>
-                  <a:srgbClr val="718096"/>
-                </a:solidFill>
-                <a:latin typeface="Pretendard" pitchFamily="34" charset="0"/>
-                <a:ea typeface="Pretendard" pitchFamily="34" charset="-122"/>
-                <a:cs typeface="Pretendard" pitchFamily="34" charset="-120"/>
-              </a:rPr>
-              <a:t>승강기</a:t>
-            </a:r>
-            <a:endParaRPr lang="en-US" sz="1400" dirty="0"/>
-          </a:p>
-        </p:txBody>
-      </p:sp>
-      <p:sp>
-        <p:nvSpPr>
-          <p:cNvPr id="23" name="Text 21"/>
-          <p:cNvSpPr/>
-          <p:nvPr/>
-        </p:nvSpPr>
-        <p:spPr>
-          <a:xfrm>
-            <a:off x="3172968" y="3657600"/>
-            <a:ext cx="4251960" cy="402336"/>
-          </a:xfrm>
-          <a:prstGeom prst="rect">
-            <a:avLst/>
-          </a:prstGeom>
-          <a:noFill/>
-          <a:ln/>
-        </p:spPr>
-        <p:txBody>
-          <a:bodyPr wrap="square" lIns="0" tIns="0" rIns="0" bIns="0" rtlCol="0" anchor="ctr"/>
-          <a:lstStyle/>
-          <a:p>
-            <a:pPr indent="0" marL="0">
-              <a:lnSpc>
-                <a:spcPct val="120000"/>
-              </a:lnSpc>
-              <a:buNone/>
-            </a:pPr>
-            <a:r>
-              <a:rPr lang="en-US" sz="1400" b="1" dirty="0">
-                <a:solidFill>
-                  <a:srgbClr val="10161F"/>
-                </a:solidFill>
-                <a:latin typeface="Pretendard" pitchFamily="34" charset="0"/>
-                <a:ea typeface="Pretendard" pitchFamily="34" charset="-122"/>
-                <a:cs typeface="Pretendard" pitchFamily="34" charset="-120"/>
-              </a:rPr>
-              <a:t>1대 (15인승 침대용)</a:t>
-            </a:r>
-            <a:endParaRPr lang="en-US" sz="1400" dirty="0"/>
-          </a:p>
-        </p:txBody>
-      </p:sp>
-      <p:sp>
-        <p:nvSpPr>
-          <p:cNvPr id="24" name="Shape 22"/>
-          <p:cNvSpPr/>
-          <p:nvPr/>
-        </p:nvSpPr>
-        <p:spPr>
-          <a:xfrm>
-            <a:off x="566928" y="4059936"/>
-            <a:ext cx="6858000" cy="0"/>
-          </a:xfrm>
-          <a:prstGeom prst="line">
-            <a:avLst/>
-          </a:prstGeom>
-          <a:noFill/>
-          <a:ln w="3810">
-            <a:solidFill>
-              <a:srgbClr val="CBD5E0"/>
-            </a:solidFill>
-            <a:prstDash val="solid"/>
-          </a:ln>
-        </p:spPr>
-      </p:sp>
-      <p:sp>
-        <p:nvSpPr>
-          <p:cNvPr id="25" name="Text 23"/>
-          <p:cNvSpPr/>
-          <p:nvPr/>
-        </p:nvSpPr>
-        <p:spPr>
-          <a:xfrm>
-            <a:off x="566928" y="4059936"/>
-            <a:ext cx="2606040" cy="402336"/>
-          </a:xfrm>
-          <a:prstGeom prst="rect">
-            <a:avLst/>
-          </a:prstGeom>
-          <a:noFill/>
-          <a:ln/>
-        </p:spPr>
-        <p:txBody>
-          <a:bodyPr wrap="square" lIns="0" tIns="0" rIns="0" bIns="0" rtlCol="0" anchor="ctr"/>
-          <a:lstStyle/>
-          <a:p>
-            <a:pPr indent="0" marL="0">
-              <a:lnSpc>
-                <a:spcPct val="120000"/>
-              </a:lnSpc>
-              <a:buNone/>
-            </a:pPr>
-            <a:r>
-              <a:rPr lang="en-US" sz="1400" dirty="0">
-                <a:solidFill>
-                  <a:srgbClr val="718096"/>
-                </a:solidFill>
-                <a:latin typeface="Pretendard" pitchFamily="34" charset="0"/>
-                <a:ea typeface="Pretendard" pitchFamily="34" charset="-122"/>
-                <a:cs typeface="Pretendard" pitchFamily="34" charset="-120"/>
-              </a:rPr>
-              <a:t>주차 대수</a:t>
-            </a:r>
-            <a:endParaRPr lang="en-US" sz="1400" dirty="0"/>
-          </a:p>
-        </p:txBody>
-      </p:sp>
-      <p:sp>
-        <p:nvSpPr>
-          <p:cNvPr id="26" name="Text 24"/>
-          <p:cNvSpPr/>
-          <p:nvPr/>
-        </p:nvSpPr>
-        <p:spPr>
-          <a:xfrm>
-            <a:off x="3172968" y="4059936"/>
-            <a:ext cx="4251960" cy="402336"/>
-          </a:xfrm>
-          <a:prstGeom prst="rect">
-            <a:avLst/>
-          </a:prstGeom>
-          <a:noFill/>
-          <a:ln/>
-        </p:spPr>
-        <p:txBody>
-          <a:bodyPr wrap="square" lIns="0" tIns="0" rIns="0" bIns="0" rtlCol="0" anchor="ctr"/>
-          <a:lstStyle/>
-          <a:p>
-            <a:pPr indent="0" marL="0">
-              <a:lnSpc>
-                <a:spcPct val="120000"/>
-              </a:lnSpc>
-              <a:buNone/>
-            </a:pPr>
-            <a:r>
-              <a:rPr lang="en-US" sz="1400" b="1" dirty="0">
-                <a:solidFill>
-                  <a:srgbClr val="10161F"/>
-                </a:solidFill>
-                <a:latin typeface="Pretendard" pitchFamily="34" charset="0"/>
-                <a:ea typeface="Pretendard" pitchFamily="34" charset="-122"/>
-                <a:cs typeface="Pretendard" pitchFamily="34" charset="-120"/>
-              </a:rPr>
-              <a:t>18대 (자주식 완비)</a:t>
-            </a:r>
-            <a:endParaRPr lang="en-US" sz="1400" dirty="0"/>
-          </a:p>
-        </p:txBody>
-      </p:sp>
-      <p:sp>
-        <p:nvSpPr>
-          <p:cNvPr id="27" name="Shape 25"/>
-          <p:cNvSpPr/>
-          <p:nvPr/>
-        </p:nvSpPr>
-        <p:spPr>
-          <a:xfrm>
-            <a:off x="566928" y="4462272"/>
-            <a:ext cx="6858000" cy="0"/>
-          </a:xfrm>
-          <a:prstGeom prst="line">
-            <a:avLst/>
-          </a:prstGeom>
-          <a:noFill/>
-          <a:ln w="3810">
-            <a:solidFill>
-              <a:srgbClr val="CBD5E0"/>
-            </a:solidFill>
-            <a:prstDash val="solid"/>
-          </a:ln>
-        </p:spPr>
-      </p:sp>
-      <p:sp>
-        <p:nvSpPr>
-          <p:cNvPr id="28" name="Text 26"/>
-          <p:cNvSpPr/>
-          <p:nvPr/>
-        </p:nvSpPr>
-        <p:spPr>
-          <a:xfrm>
-            <a:off x="566928" y="4462272"/>
-            <a:ext cx="2606040" cy="402336"/>
-          </a:xfrm>
-          <a:prstGeom prst="rect">
-            <a:avLst/>
-          </a:prstGeom>
-          <a:noFill/>
-          <a:ln/>
-        </p:spPr>
-        <p:txBody>
-          <a:bodyPr wrap="square" lIns="0" tIns="0" rIns="0" bIns="0" rtlCol="0" anchor="ctr"/>
-          <a:lstStyle/>
-          <a:p>
-            <a:pPr indent="0" marL="0">
-              <a:lnSpc>
-                <a:spcPct val="120000"/>
-              </a:lnSpc>
-              <a:buNone/>
-            </a:pPr>
-            <a:r>
-              <a:rPr lang="en-US" sz="1400" dirty="0">
-                <a:solidFill>
-                  <a:srgbClr val="718096"/>
-                </a:solidFill>
-                <a:latin typeface="Pretendard" pitchFamily="34" charset="0"/>
-                <a:ea typeface="Pretendard" pitchFamily="34" charset="-122"/>
-                <a:cs typeface="Pretendard" pitchFamily="34" charset="-120"/>
-              </a:rPr>
-              <a:t>주구조</a:t>
-            </a:r>
-            <a:endParaRPr lang="en-US" sz="1400" dirty="0"/>
-          </a:p>
-        </p:txBody>
-      </p:sp>
-      <p:sp>
-        <p:nvSpPr>
-          <p:cNvPr id="29" name="Text 27"/>
-          <p:cNvSpPr/>
-          <p:nvPr/>
-        </p:nvSpPr>
-        <p:spPr>
-          <a:xfrm>
-            <a:off x="3172968" y="4462272"/>
-            <a:ext cx="4251960" cy="402336"/>
-          </a:xfrm>
-          <a:prstGeom prst="rect">
-            <a:avLst/>
-          </a:prstGeom>
-          <a:noFill/>
-          <a:ln/>
-        </p:spPr>
-        <p:txBody>
-          <a:bodyPr wrap="square" lIns="0" tIns="0" rIns="0" bIns="0" rtlCol="0" anchor="ctr"/>
-          <a:lstStyle/>
-          <a:p>
-            <a:pPr indent="0" marL="0">
-              <a:lnSpc>
-                <a:spcPct val="120000"/>
-              </a:lnSpc>
-              <a:buNone/>
-            </a:pPr>
-            <a:r>
-              <a:rPr lang="en-US" sz="1400" b="1" dirty="0">
-                <a:solidFill>
-                  <a:srgbClr val="10161F"/>
-                </a:solidFill>
-                <a:latin typeface="Pretendard" pitchFamily="34" charset="0"/>
-                <a:ea typeface="Pretendard" pitchFamily="34" charset="-122"/>
-                <a:cs typeface="Pretendard" pitchFamily="34" charset="-120"/>
-              </a:rPr>
-              <a:t>철근콘크리트구조</a:t>
-            </a:r>
-            <a:endParaRPr lang="en-US" sz="1400" dirty="0"/>
-          </a:p>
-        </p:txBody>
-      </p:sp>
-      <p:sp>
-        <p:nvSpPr>
-          <p:cNvPr id="30" name="Shape 28"/>
-          <p:cNvSpPr/>
-          <p:nvPr/>
-        </p:nvSpPr>
-        <p:spPr>
-          <a:xfrm>
-            <a:off x="566928" y="4864608"/>
-            <a:ext cx="6858000" cy="0"/>
-          </a:xfrm>
-          <a:prstGeom prst="line">
-            <a:avLst/>
-          </a:prstGeom>
-          <a:noFill/>
-          <a:ln w="3810">
-            <a:solidFill>
-              <a:srgbClr val="CBD5E0"/>
-            </a:solidFill>
-            <a:prstDash val="solid"/>
-          </a:ln>
-        </p:spPr>
-      </p:sp>
-      <p:sp>
-        <p:nvSpPr>
-          <p:cNvPr id="31" name="Text 29"/>
-          <p:cNvSpPr/>
-          <p:nvPr/>
-        </p:nvSpPr>
-        <p:spPr>
-          <a:xfrm>
-            <a:off x="566928" y="4864608"/>
-            <a:ext cx="2606040" cy="402336"/>
-          </a:xfrm>
-          <a:prstGeom prst="rect">
-            <a:avLst/>
-          </a:prstGeom>
-          <a:noFill/>
-          <a:ln/>
-        </p:spPr>
-        <p:txBody>
-          <a:bodyPr wrap="square" lIns="0" tIns="0" rIns="0" bIns="0" rtlCol="0" anchor="ctr"/>
-          <a:lstStyle/>
-          <a:p>
-            <a:pPr indent="0" marL="0">
-              <a:lnSpc>
-                <a:spcPct val="120000"/>
-              </a:lnSpc>
-              <a:buNone/>
-            </a:pPr>
-            <a:r>
-              <a:rPr lang="en-US" sz="1400" dirty="0">
-                <a:solidFill>
-                  <a:srgbClr val="718096"/>
-                </a:solidFill>
-                <a:latin typeface="Pretendard" pitchFamily="34" charset="0"/>
-                <a:ea typeface="Pretendard" pitchFamily="34" charset="-122"/>
-                <a:cs typeface="Pretendard" pitchFamily="34" charset="-120"/>
-              </a:rPr>
-              <a:t>매매 희망가</a:t>
-            </a:r>
-            <a:endParaRPr lang="en-US" sz="1400" dirty="0"/>
-          </a:p>
-        </p:txBody>
-      </p:sp>
-      <p:sp>
-        <p:nvSpPr>
-          <p:cNvPr id="32" name="Text 30"/>
-          <p:cNvSpPr/>
-          <p:nvPr/>
-        </p:nvSpPr>
-        <p:spPr>
-          <a:xfrm>
-            <a:off x="3172968" y="4864608"/>
-            <a:ext cx="4251960" cy="402336"/>
-          </a:xfrm>
-          <a:prstGeom prst="rect">
-            <a:avLst/>
-          </a:prstGeom>
-          <a:noFill/>
-          <a:ln/>
-        </p:spPr>
-        <p:txBody>
-          <a:bodyPr wrap="square" lIns="0" tIns="0" rIns="0" bIns="0" rtlCol="0" anchor="ctr"/>
-          <a:lstStyle/>
-          <a:p>
-            <a:pPr indent="0" marL="0">
-              <a:lnSpc>
-                <a:spcPct val="120000"/>
-              </a:lnSpc>
-              <a:buNone/>
-            </a:pPr>
-            <a:r>
-              <a:rPr lang="en-US" sz="1400" b="1" dirty="0">
-                <a:solidFill>
-                  <a:srgbClr val="10161F"/>
-                </a:solidFill>
-                <a:latin typeface="Pretendard" pitchFamily="34" charset="0"/>
-                <a:ea typeface="Pretendard" pitchFamily="34" charset="-122"/>
-                <a:cs typeface="Pretendard" pitchFamily="34" charset="-120"/>
-              </a:rPr>
-              <a:t>240억</a:t>
-            </a:r>
-            <a:endParaRPr lang="en-US" sz="1400" dirty="0"/>
-          </a:p>
-        </p:txBody>
-      </p:sp>
-      <p:sp>
-        <p:nvSpPr>
-          <p:cNvPr id="33" name="Shape 31"/>
           <p:cNvSpPr/>
           <p:nvPr/>
         </p:nvSpPr>
@@ -6525,49 +5861,49 @@
       </p:sp>
       <p:sp>
         <p:nvSpPr>
-          <p:cNvPr id="34" name="Shape 32"/>
+          <p:cNvPr id="10" name="Shape 8"/>
           <p:cNvSpPr/>
           <p:nvPr/>
         </p:nvSpPr>
         <p:spPr>
           <a:xfrm>
             <a:off x="7784287" y="1645920"/>
-            <a:ext cx="3840480" cy="1645920"/>
+            <a:ext cx="3840480" cy="2103120"/>
           </a:xfrm>
           <a:prstGeom prst="roundRect">
             <a:avLst>
-              <a:gd name="adj" fmla="val 3333"/>
+              <a:gd name="adj" fmla="val 2609"/>
             </a:avLst>
           </a:prstGeom>
           <a:solidFill>
-            <a:srgbClr val="BEE3F8"/>
+            <a:srgbClr val="F3EBDA"/>
           </a:solidFill>
           <a:ln/>
         </p:spPr>
       </p:sp>
       <p:sp>
         <p:nvSpPr>
-          <p:cNvPr id="35" name="Shape 33"/>
+          <p:cNvPr id="11" name="Shape 9"/>
           <p:cNvSpPr/>
           <p:nvPr/>
         </p:nvSpPr>
         <p:spPr>
           <a:xfrm>
             <a:off x="7784287" y="1700784"/>
-            <a:ext cx="36576" cy="1536192"/>
+            <a:ext cx="36576" cy="1993392"/>
           </a:xfrm>
           <a:prstGeom prst="rect">
             <a:avLst/>
           </a:prstGeom>
           <a:solidFill>
-            <a:srgbClr val="2B6CB0"/>
+            <a:srgbClr val="977024"/>
           </a:solidFill>
           <a:ln/>
         </p:spPr>
       </p:sp>
       <p:sp>
         <p:nvSpPr>
-          <p:cNvPr id="36" name="Text 34"/>
+          <p:cNvPr id="12" name="Text 10"/>
           <p:cNvSpPr/>
           <p:nvPr/>
         </p:nvSpPr>
@@ -6595,14 +5931,14 @@
       </p:sp>
       <p:sp>
         <p:nvSpPr>
-          <p:cNvPr id="37" name="Text 35"/>
+          <p:cNvPr id="13" name="Text 11"/>
           <p:cNvSpPr/>
           <p:nvPr/>
         </p:nvSpPr>
         <p:spPr>
           <a:xfrm>
             <a:off x="7967167" y="1975104"/>
-            <a:ext cx="3511296" cy="1243584"/>
+            <a:ext cx="3511296" cy="1700784"/>
           </a:xfrm>
           <a:prstGeom prst="rect">
             <a:avLst/>
@@ -6629,7 +5965,7 @@
                 <a:ea typeface="Pretendard" pitchFamily="34" charset="-122"/>
                 <a:cs typeface="Pretendard" pitchFamily="34" charset="-120"/>
               </a:rPr>
-              <a:t>본 매물은 종로권역 입지의 안정적 운영 자산입니다.</a:t>
+              <a:t>{"ok":true,"mocked":true,"extractedFields":{"area_signal":"역삼","asset_type":"오피스빌딩","price_band":"300억","size_signal":"3</a:t>
             </a:r>
             <a:endParaRPr lang="en-US" sz="930" dirty="0"/>
           </a:p>
@@ -6637,7 +5973,7 @@
       </p:sp>
       <p:sp>
         <p:nvSpPr>
-          <p:cNvPr id="38" name="Text 36"/>
+          <p:cNvPr id="14" name="Text 12"/>
           <p:cNvSpPr/>
           <p:nvPr/>
         </p:nvSpPr>
@@ -6676,7 +6012,7 @@
       </p:sp>
       <p:sp>
         <p:nvSpPr>
-          <p:cNvPr id="39" name="Text 37"/>
+          <p:cNvPr id="15" name="Text 13"/>
           <p:cNvSpPr/>
           <p:nvPr/>
         </p:nvSpPr>
@@ -6915,7 +6251,7 @@
                 <a:ea typeface="Pretendard" pitchFamily="34" charset="-122"/>
                 <a:cs typeface="Pretendard" pitchFamily="34" charset="-120"/>
               </a:rPr>
-              <a:t>시장 포지셔닝 및 시세 갭 분석</a:t>
+              <a:t>건축물 개요 및 물리 스펙</a:t>
             </a:r>
             <a:endParaRPr lang="en-US" sz="1100" dirty="0"/>
           </a:p>
@@ -6957,7 +6293,7 @@
                 <a:ea typeface="Pretendard" pitchFamily="34" charset="-122"/>
                 <a:cs typeface="Pretendard" pitchFamily="34" charset="-120"/>
               </a:rPr>
-              <a:t>평당 매매가</a:t>
+              <a:t>{"ok"</a:t>
             </a:r>
             <a:endParaRPr lang="en-US" sz="1400" dirty="0"/>
           </a:p>
@@ -6999,7 +6335,7 @@
                 <a:ea typeface="Pretendard" pitchFamily="34" charset="-122"/>
                 <a:cs typeface="Pretendard" pitchFamily="34" charset="-120"/>
               </a:rPr>
-              <a:t>매각 희망가 기준</a:t>
+              <a:t>true,"mocked":true,"extractedFields":{"area_signal":"역삼","asset_type":"오피스빌딩","price_band":"300억","size_signal":"3000평(약 9917.4㎡)"},"extractedFacts":{"region":"역삼","exactAddressCandidate":"역삼동 742-1","assetType":"오피스빌딩","priceText":"300억","sizeText":"3000평(약 9917.4㎡)","currentUse":"오피스","currentUseSignal":"근린생활시설","leaseSignal":"임대중","vacancySignal":"공실없음","tenantNames":"쿠팡","네이버","unitRentTexts":"301호: 1500만","sellerMotivationText":"자산 효율화","brokerNotes":"초역세권 매물"},"detectedSensitiveFields":"exact_address","tenant_name","ambiguousFields":,"warnings":,"areaSignal":"역삼","assetType":"오피스빌딩","priceBand":"300억","sizeSignal":"3000평(약 9917.4㎡)","dealType":"매각","buildingName":"역삼 센트럴타워","exactAddress":"역삼동 742-1","totalFloorArea":9917.3,"buildYear":2015,"currentUseSignal":"근린생활시설","vacancySignal":"공실 없음","fitSummary":"초역세권 근생 빌딩으로 시행/사옥 매입에 최적화","cautionSummary":"주요 임차 업종 만기 조율 필요","hiddenFields":"exact_address","seller_motivation","confidence":{"areaSignal":"confirmed","assetType":"confirmed","priceBand":"ai_hypothesis","fitSummary":"ai_hypothesis"},"missingData":"sizeSignal","boundaryNote":"본 자료는 실거래 통계 기반 참고치입니다.","buyerType":"법인 사옥형","budgetRange":{"min":50,"max":80,"display":"50억~80억"},"preferredRegions":"강남","성수","assetTypes":"꼬마빌딩","사옥용","purchasePurpose":"사옥용 매입","mustHave":"초역세권","주차","niceToHave":"테라스","루프탑","riskTolerance":"medium","financingNote":"자본금 50% 준비","missingQuestions":"구체적인 입주 시기가 언제인가요?","선호하는 수익률이 있나요?","privacyNotes":"연락처 비공개","fitReasons":"매수자 예산(50-80억)에 부합하는 매물입니다.","요청하신 성수/강남 권역에 해당합니다.","cautionReasons":"요청한 용도와 달리 명도 협의가 다소 필요합니다.","recommendedNextAction":"현장 답사 제안","kakaoMessage":"안녕하세요! 요청하신 조건에 부합하는 추천 매물이 있어 안내해 드립니다. 확인해보시고 피드백 부탁드립니다.","title":"강남 역삼역 초역세권 오피스 사옥용 빌딩 매각","shortSummary":"역삼역 도보 5분 거리의 준신축급 대형 오피스빌딩입니다.","dealPoints":"초역세권","사옥 최적","cautionPoints":"명도 조율 필요","hiddenInfoNotice":"보증금 및 지번은 인가 후 확인 가능","gateMessage":"G1 등급 등록이 필요합니다.","kakaoText":"강남 역삼역 오피스 빌딩 매각 안내입니다.","exactUnitCandidate":"101호","floor":"1층","areaSqmText":"150㎡","spaceType":"office","depositText":"5000만","monthlyRentText":"400만","maintenanceFeeText":"50만","availableFromText":"즉시입주","leaseTermMonthsText":"24","incentivesText":"렌트프리 2개월","restrictions":,"landlordIdentity":"김성수","currentTenant":"스타트업","vacancyReason":"이전 확장","rentNegotiation":"협의 가능","region":"성수동","areaSqm":150,"deposit":5000,"monthlyRent":400,"maintenanceFee":50,"availableFrom":"즉시입주","leaseTermMonths":24,"incentives":{"rentFreeMonths":2,"interiorSupport":"일부 인테리어 지원","freeRentDetail":"렌트프리 2개월 지원"},"shortSummaryLease":"성수역 도보 5분 거리 1층 리테일 상가 매물입니다."}</a:t>
             </a:r>
             <a:endParaRPr lang="en-US" sz="1400" dirty="0"/>
           </a:p>
@@ -7008,113 +6344,6 @@
       <p:sp>
         <p:nvSpPr>
           <p:cNvPr id="9" name="Shape 7"/>
-          <p:cNvSpPr/>
-          <p:nvPr/>
-        </p:nvSpPr>
-        <p:spPr>
-          <a:xfrm>
-            <a:off x="566928" y="2048256"/>
-            <a:ext cx="6858000" cy="0"/>
-          </a:xfrm>
-          <a:prstGeom prst="line">
-            <a:avLst/>
-          </a:prstGeom>
-          <a:noFill/>
-          <a:ln w="3810">
-            <a:solidFill>
-              <a:srgbClr val="CBD5E0"/>
-            </a:solidFill>
-            <a:prstDash val="solid"/>
-          </a:ln>
-        </p:spPr>
-      </p:sp>
-      <p:sp>
-        <p:nvSpPr>
-          <p:cNvPr id="10" name="Text 8"/>
-          <p:cNvSpPr/>
-          <p:nvPr/>
-        </p:nvSpPr>
-        <p:spPr>
-          <a:xfrm>
-            <a:off x="566928" y="2048256"/>
-            <a:ext cx="2606040" cy="402336"/>
-          </a:xfrm>
-          <a:prstGeom prst="rect">
-            <a:avLst/>
-          </a:prstGeom>
-          <a:noFill/>
-          <a:ln/>
-        </p:spPr>
-        <p:txBody>
-          <a:bodyPr wrap="square" lIns="0" tIns="0" rIns="0" bIns="0" rtlCol="0" anchor="ctr"/>
-          <a:lstStyle/>
-          <a:p>
-            <a:pPr indent="0" marL="0">
-              <a:lnSpc>
-                <a:spcPct val="120000"/>
-              </a:lnSpc>
-              <a:buNone/>
-            </a:pPr>
-            <a:r>
-              <a:rPr lang="en-US" sz="1400" dirty="0">
-                <a:solidFill>
-                  <a:srgbClr val="718096"/>
-                </a:solidFill>
-                <a:latin typeface="Pretendard" pitchFamily="34" charset="0"/>
-                <a:ea typeface="Pretendard" pitchFamily="34" charset="-122"/>
-                <a:cs typeface="Pretendard" pitchFamily="34" charset="-120"/>
-              </a:rPr>
-              <a:t>입지 프리미엄</a:t>
-            </a:r>
-            <a:endParaRPr lang="en-US" sz="1400" dirty="0"/>
-          </a:p>
-        </p:txBody>
-      </p:sp>
-      <p:sp>
-        <p:nvSpPr>
-          <p:cNvPr id="11" name="Text 9"/>
-          <p:cNvSpPr/>
-          <p:nvPr/>
-        </p:nvSpPr>
-        <p:spPr>
-          <a:xfrm>
-            <a:off x="3172968" y="2048256"/>
-            <a:ext cx="4251960" cy="402336"/>
-          </a:xfrm>
-          <a:prstGeom prst="rect">
-            <a:avLst/>
-          </a:prstGeom>
-          <a:noFill/>
-          <a:ln/>
-        </p:spPr>
-        <p:txBody>
-          <a:bodyPr wrap="square" lIns="0" tIns="0" rIns="0" bIns="0" rtlCol="0" anchor="ctr"/>
-          <a:lstStyle/>
-          <a:p>
-            <a:pPr indent="0" marL="0">
-              <a:lnSpc>
-                <a:spcPct val="120000"/>
-              </a:lnSpc>
-              <a:buNone/>
-            </a:pPr>
-            <a:r>
-              <a:rPr lang="en-US" sz="1400" b="1" dirty="0">
-                <a:solidFill>
-                  <a:srgbClr val="10161F"/>
-                </a:solidFill>
-                <a:latin typeface="Pretendard" pitchFamily="34" charset="0"/>
-                <a:ea typeface="Pretendard" pitchFamily="34" charset="-122"/>
-                <a:cs typeface="Pretendard" pitchFamily="34" charset="-120"/>
-              </a:rPr>
-              <a:t>입지 및 접근성 우수</a:t>
-            </a:r>
-            <a:endParaRPr lang="en-US" sz="1400" dirty="0"/>
-          </a:p>
-        </p:txBody>
-      </p:sp>
-      <p:sp>
-        <p:nvSpPr>
-          <p:cNvPr id="12" name="Shape 10"/>
           <p:cNvSpPr/>
           <p:nvPr/>
         </p:nvSpPr>
@@ -7137,18 +6366,18 @@
       </p:sp>
       <p:sp>
         <p:nvSpPr>
-          <p:cNvPr id="13" name="Shape 11"/>
+          <p:cNvPr id="10" name="Shape 8"/>
           <p:cNvSpPr/>
           <p:nvPr/>
         </p:nvSpPr>
         <p:spPr>
           <a:xfrm>
             <a:off x="7784287" y="1645920"/>
-            <a:ext cx="3840480" cy="1645920"/>
+            <a:ext cx="3840480" cy="2103120"/>
           </a:xfrm>
           <a:prstGeom prst="roundRect">
             <a:avLst>
-              <a:gd name="adj" fmla="val 3333"/>
+              <a:gd name="adj" fmla="val 2609"/>
             </a:avLst>
           </a:prstGeom>
           <a:solidFill>
@@ -7159,14 +6388,14 @@
       </p:sp>
       <p:sp>
         <p:nvSpPr>
-          <p:cNvPr id="14" name="Shape 12"/>
+          <p:cNvPr id="11" name="Shape 9"/>
           <p:cNvSpPr/>
           <p:nvPr/>
         </p:nvSpPr>
         <p:spPr>
           <a:xfrm>
             <a:off x="7784287" y="1700784"/>
-            <a:ext cx="36576" cy="1536192"/>
+            <a:ext cx="36576" cy="1993392"/>
           </a:xfrm>
           <a:prstGeom prst="rect">
             <a:avLst/>
@@ -7179,7 +6408,7 @@
       </p:sp>
       <p:sp>
         <p:nvSpPr>
-          <p:cNvPr id="15" name="Text 13"/>
+          <p:cNvPr id="12" name="Text 10"/>
           <p:cNvSpPr/>
           <p:nvPr/>
         </p:nvSpPr>
@@ -7207,14 +6436,14 @@
       </p:sp>
       <p:sp>
         <p:nvSpPr>
-          <p:cNvPr id="16" name="Text 14"/>
+          <p:cNvPr id="13" name="Text 11"/>
           <p:cNvSpPr/>
           <p:nvPr/>
         </p:nvSpPr>
         <p:spPr>
           <a:xfrm>
             <a:off x="7967167" y="1975104"/>
-            <a:ext cx="3511296" cy="1243584"/>
+            <a:ext cx="3511296" cy="1700784"/>
           </a:xfrm>
           <a:prstGeom prst="rect">
             <a:avLst/>
@@ -7241,7 +6470,7 @@
                 <a:ea typeface="Pretendard" pitchFamily="34" charset="-122"/>
                 <a:cs typeface="Pretendard" pitchFamily="34" charset="-120"/>
               </a:rPr>
-              <a:t>본 자산의 매각 희망가(240억)를 인근 권역 유사 매물의 거래사례 및 시세와 비교하여 가격 경쟁력을 평가합니다.</a:t>
+              <a:t>{"ok":true,"mocked":true,"extractedFields":{"area_signal":"역삼","asset_type":"오피스빌딩","price_band":"300억","size_signal":"3</a:t>
             </a:r>
             <a:endParaRPr lang="en-US" sz="930" dirty="0"/>
           </a:p>
@@ -7249,56 +6478,14 @@
       </p:sp>
       <p:sp>
         <p:nvSpPr>
-          <p:cNvPr id="17" name="Shape 15"/>
-          <p:cNvSpPr/>
-          <p:nvPr/>
-        </p:nvSpPr>
-        <p:spPr>
-          <a:xfrm>
-            <a:off x="7784287" y="3493008"/>
-            <a:ext cx="3840480" cy="1645920"/>
-          </a:xfrm>
-          <a:prstGeom prst="roundRect">
-            <a:avLst>
-              <a:gd name="adj" fmla="val 3333"/>
-            </a:avLst>
-          </a:prstGeom>
-          <a:solidFill>
-            <a:srgbClr val="BEE3F8"/>
-          </a:solidFill>
-          <a:ln/>
-        </p:spPr>
-      </p:sp>
-      <p:sp>
-        <p:nvSpPr>
-          <p:cNvPr id="18" name="Shape 16"/>
-          <p:cNvSpPr/>
-          <p:nvPr/>
-        </p:nvSpPr>
-        <p:spPr>
-          <a:xfrm>
-            <a:off x="7784287" y="3547872"/>
-            <a:ext cx="36576" cy="1536192"/>
-          </a:xfrm>
-          <a:prstGeom prst="rect">
-            <a:avLst/>
-          </a:prstGeom>
-          <a:solidFill>
-            <a:srgbClr val="2B6CB0"/>
-          </a:solidFill>
-          <a:ln/>
-        </p:spPr>
-      </p:sp>
-      <p:sp>
-        <p:nvSpPr>
-          <p:cNvPr id="19" name="Text 17"/>
-          <p:cNvSpPr/>
-          <p:nvPr/>
-        </p:nvSpPr>
-        <p:spPr>
-          <a:xfrm>
-            <a:off x="7967167" y="3602736"/>
-            <a:ext cx="3511296" cy="201168"/>
+          <p:cNvPr id="14" name="Text 12"/>
+          <p:cNvSpPr/>
+          <p:nvPr/>
+        </p:nvSpPr>
+        <p:spPr>
+          <a:xfrm>
+            <a:off x="566928" y="6382512"/>
+            <a:ext cx="7315200" cy="219456"/>
           </a:xfrm>
           <a:prstGeom prst="rect">
             <a:avLst/>
@@ -7313,85 +6500,15 @@
             <a:pPr indent="0" marL="0">
               <a:buNone/>
             </a:pPr>
-            <a:endParaRPr lang="en-US" sz="1050" dirty="0"/>
-          </a:p>
-        </p:txBody>
-      </p:sp>
-      <p:sp>
-        <p:nvSpPr>
-          <p:cNvPr id="20" name="Text 18"/>
-          <p:cNvSpPr/>
-          <p:nvPr/>
-        </p:nvSpPr>
-        <p:spPr>
-          <a:xfrm>
-            <a:off x="7967167" y="3822192"/>
-            <a:ext cx="3511296" cy="1243584"/>
-          </a:xfrm>
-          <a:prstGeom prst="rect">
-            <a:avLst/>
-          </a:prstGeom>
-          <a:noFill/>
-          <a:ln/>
-        </p:spPr>
-        <p:txBody>
-          <a:bodyPr wrap="square" lIns="0" tIns="0" rIns="0" bIns="0" rtlCol="0" anchor="t"/>
-          <a:lstStyle/>
-          <a:p>
-            <a:pPr indent="0" marL="0">
-              <a:lnSpc>
-                <a:spcPct val="120000"/>
-              </a:lnSpc>
-              <a:buNone/>
-            </a:pPr>
-            <a:r>
-              <a:rPr lang="en-US" sz="930" dirty="0">
-                <a:solidFill>
-                  <a:srgbClr val="10161F"/>
+            <a:r>
+              <a:rPr lang="en-US" sz="800" dirty="0">
+                <a:solidFill>
+                  <a:srgbClr val="718096"/>
                 </a:solidFill>
                 <a:latin typeface="Pretendard" pitchFamily="34" charset="0"/>
                 <a:ea typeface="Pretendard" pitchFamily="34" charset="-122"/>
                 <a:cs typeface="Pretendard" pitchFamily="34" charset="-120"/>
               </a:rPr>
-              <a:t>[참고] 인근 시세 대비 합리적 매각가 형성으로 단기 매매 및 리밸런싱에 적합합니다.</a:t>
-            </a:r>
-            <a:endParaRPr lang="en-US" sz="930" dirty="0"/>
-          </a:p>
-        </p:txBody>
-      </p:sp>
-      <p:sp>
-        <p:nvSpPr>
-          <p:cNvPr id="21" name="Text 19"/>
-          <p:cNvSpPr/>
-          <p:nvPr/>
-        </p:nvSpPr>
-        <p:spPr>
-          <a:xfrm>
-            <a:off x="566928" y="6382512"/>
-            <a:ext cx="7315200" cy="219456"/>
-          </a:xfrm>
-          <a:prstGeom prst="rect">
-            <a:avLst/>
-          </a:prstGeom>
-          <a:noFill/>
-          <a:ln/>
-        </p:spPr>
-        <p:txBody>
-          <a:bodyPr wrap="square" lIns="0" tIns="0" rIns="0" bIns="0" rtlCol="0" anchor="ctr"/>
-          <a:lstStyle/>
-          <a:p>
-            <a:pPr indent="0" marL="0">
-              <a:buNone/>
-            </a:pPr>
-            <a:r>
-              <a:rPr lang="en-US" sz="800" dirty="0">
-                <a:solidFill>
-                  <a:srgbClr val="718096"/>
-                </a:solidFill>
-                <a:latin typeface="Pretendard" pitchFamily="34" charset="0"/>
-                <a:ea typeface="Pretendard" pitchFamily="34" charset="-122"/>
-                <a:cs typeface="Pretendard" pitchFamily="34" charset="-120"/>
-              </a:rPr>
               <a:t>크리딜   |   </a:t>
             </a:r>
             <a:endParaRPr lang="en-US" sz="800" dirty="0"/>
@@ -7400,7 +6517,7 @@
       </p:sp>
       <p:sp>
         <p:nvSpPr>
-          <p:cNvPr id="22" name="Text 20"/>
+          <p:cNvPr id="15" name="Text 13"/>
           <p:cNvSpPr/>
           <p:nvPr/>
         </p:nvSpPr>
@@ -7606,16 +6723,1137 @@
           </a:p>
         </p:txBody>
       </p:sp>
-      <p:sp>
-        <p:nvSpPr>
-          <p:cNvPr id="6" name="Text 4"/>
-          <p:cNvSpPr/>
-          <p:nvPr/>
-        </p:nvSpPr>
-        <p:spPr>
-          <a:xfrm>
-            <a:off x="566928" y="1645920"/>
-            <a:ext cx="4201979" cy="402336"/>
+      <p:graphicFrame>
+        <p:nvGraphicFramePr>
+          <p:cNvPr id="7" name="Table 0"/>
+          <p:cNvGraphicFramePr>
+            <a:graphicFrameLocks noGrp="1"/>
+          </p:cNvGraphicFramePr>
+          <p:nvPr>
+            <p:extLst>
+              <p:ext uri="{D42A27DB-BD31-4B8C-83A1-F6EECF244321}">
+                <p14:modId xmlns:p14="http://schemas.microsoft.com/office/powerpoint/2010/main" val="1579011935"/>
+              </p:ext>
+            </p:extLst>
+          </p:nvPr>
+        </p:nvGraphicFramePr>
+        <p:xfrm>
+          <a:off x="566928" y="1645920"/>
+          <a:ext cx="11057839" cy="914400"/>
+        </p:xfrm>
+        <a:graphic>
+          <a:graphicData uri="http://schemas.openxmlformats.org/drawingml/2006/table">
+            <a:tbl>
+              <a:tblPr/>
+              <a:tblGrid>
+                <a:gridCol w="2551809"/>
+                <a:gridCol w="4253015"/>
+                <a:gridCol w="4253015"/>
+              </a:tblGrid>
+              <a:tr h="457200">
+                <a:tc>
+                  <a:txBody>
+                    <a:bodyPr/>
+                    <a:lstStyle/>
+                    <a:p>
+                      <a:pPr indent="0" marL="0">
+                        <a:buNone/>
+                      </a:pPr>
+                      <a:r>
+                        <a:rPr lang="en-US" sz="1300" b="1" dirty="0">
+                          <a:solidFill>
+                            <a:srgbClr val="718096"/>
+                          </a:solidFill>
+                          <a:latin typeface="Pretendard" pitchFamily="34" charset="0"/>
+                          <a:ea typeface="Pretendard" pitchFamily="34" charset="-122"/>
+                          <a:cs typeface="Pretendard" pitchFamily="34" charset="-120"/>
+                        </a:rPr>
+                        <a:t>구분</a:t>
+                      </a:r>
+                      <a:endParaRPr lang="en-US" sz="1300" dirty="0">
+                        <a:latin typeface="Pretendard" charset="0"/>
+                        <a:ea typeface="Pretendard" charset="0"/>
+                        <a:cs typeface="Pretendard" charset="0"/>
+                      </a:endParaRPr>
+                    </a:p>
+                  </a:txBody>
+                  <a:tcPr marL="50800" marR="50800" marT="25400" marB="25400" anchor="ctr">
+                    <a:lnL w="3810" cap="flat" cmpd="sng" algn="ctr">
+                      <a:solidFill>
+                        <a:srgbClr val="CBD5E0"/>
+                      </a:solidFill>
+                      <a:prstDash val="solid"/>
+                      <a:round/>
+                      <a:headEnd type="none" w="med" len="med"/>
+                      <a:tailEnd type="none" w="med" len="med"/>
+                    </a:lnL>
+                    <a:lnR w="3810" cap="flat" cmpd="sng" algn="ctr">
+                      <a:solidFill>
+                        <a:srgbClr val="CBD5E0"/>
+                      </a:solidFill>
+                      <a:prstDash val="solid"/>
+                      <a:round/>
+                      <a:headEnd type="none" w="med" len="med"/>
+                      <a:tailEnd type="none" w="med" len="med"/>
+                    </a:lnR>
+                    <a:lnT w="3810" cap="flat" cmpd="sng" algn="ctr">
+                      <a:solidFill>
+                        <a:srgbClr val="CBD5E0"/>
+                      </a:solidFill>
+                      <a:prstDash val="solid"/>
+                      <a:round/>
+                      <a:headEnd type="none" w="med" len="med"/>
+                      <a:tailEnd type="none" w="med" len="med"/>
+                    </a:lnT>
+                    <a:lnB w="3810" cap="flat" cmpd="sng" algn="ctr">
+                      <a:solidFill>
+                        <a:srgbClr val="CBD5E0"/>
+                      </a:solidFill>
+                      <a:prstDash val="solid"/>
+                      <a:round/>
+                      <a:headEnd type="none" w="med" len="med"/>
+                      <a:tailEnd type="none" w="med" len="med"/>
+                    </a:lnB>
+                    <a:solidFill>
+                      <a:srgbClr val="F7FAFC"/>
+                    </a:solidFill>
+                  </a:tcPr>
+                </a:tc>
+                <a:tc>
+                  <a:txBody>
+                    <a:bodyPr/>
+                    <a:lstStyle/>
+                    <a:p>
+                      <a:pPr indent="0" marL="0">
+                        <a:buNone/>
+                      </a:pPr>
+                      <a:r>
+                        <a:rPr lang="en-US" sz="1300" b="1" dirty="0">
+                          <a:solidFill>
+                            <a:srgbClr val="718096"/>
+                          </a:solidFill>
+                          <a:latin typeface="Pretendard" pitchFamily="34" charset="0"/>
+                          <a:ea typeface="Pretendard" pitchFamily="34" charset="-122"/>
+                          <a:cs typeface="Pretendard" pitchFamily="34" charset="-120"/>
+                        </a:rPr>
+                        <a:t>타겟 </a:t>
+                      </a:r>
+                      <a:pPr indent="0" marL="0">
+                        <a:buNone/>
+                      </a:pPr>
+                      <a:r>
+                        <a:rPr lang="en-US" sz="1300" b="1" dirty="0">
+                          <a:solidFill>
+                            <a:srgbClr val="718096"/>
+                          </a:solidFill>
+                          <a:latin typeface="Pretendard" pitchFamily="34" charset="0"/>
+                          <a:ea typeface="Pretendard" pitchFamily="34" charset="-122"/>
+                          <a:cs typeface="Pretendard" pitchFamily="34" charset="-120"/>
+                        </a:rPr>
+                        <a:t>수치</a:t>
+                      </a:r>
+                      <a:endParaRPr lang="en-US" sz="1300" dirty="0">
+                        <a:latin typeface="Pretendard" charset="0"/>
+                        <a:ea typeface="Pretendard" charset="0"/>
+                        <a:cs typeface="Pretendard" charset="0"/>
+                      </a:endParaRPr>
+                    </a:p>
+                  </a:txBody>
+                  <a:tcPr marL="50800" marR="50800" marT="25400" marB="25400" anchor="ctr">
+                    <a:lnL w="3810" cap="flat" cmpd="sng" algn="ctr">
+                      <a:solidFill>
+                        <a:srgbClr val="CBD5E0"/>
+                      </a:solidFill>
+                      <a:prstDash val="solid"/>
+                      <a:round/>
+                      <a:headEnd type="none" w="med" len="med"/>
+                      <a:tailEnd type="none" w="med" len="med"/>
+                    </a:lnL>
+                    <a:lnR w="3810" cap="flat" cmpd="sng" algn="ctr">
+                      <a:solidFill>
+                        <a:srgbClr val="CBD5E0"/>
+                      </a:solidFill>
+                      <a:prstDash val="solid"/>
+                      <a:round/>
+                      <a:headEnd type="none" w="med" len="med"/>
+                      <a:tailEnd type="none" w="med" len="med"/>
+                    </a:lnR>
+                    <a:lnT w="3810" cap="flat" cmpd="sng" algn="ctr">
+                      <a:solidFill>
+                        <a:srgbClr val="CBD5E0"/>
+                      </a:solidFill>
+                      <a:prstDash val="solid"/>
+                      <a:round/>
+                      <a:headEnd type="none" w="med" len="med"/>
+                      <a:tailEnd type="none" w="med" len="med"/>
+                    </a:lnT>
+                    <a:lnB w="3810" cap="flat" cmpd="sng" algn="ctr">
+                      <a:solidFill>
+                        <a:srgbClr val="CBD5E0"/>
+                      </a:solidFill>
+                      <a:prstDash val="solid"/>
+                      <a:round/>
+                      <a:headEnd type="none" w="med" len="med"/>
+                      <a:tailEnd type="none" w="med" len="med"/>
+                    </a:lnB>
+                    <a:solidFill>
+                      <a:srgbClr val="F7FAFC"/>
+                    </a:solidFill>
+                  </a:tcPr>
+                </a:tc>
+                <a:tc>
+                  <a:txBody>
+                    <a:bodyPr/>
+                    <a:lstStyle/>
+                    <a:p>
+                      <a:pPr indent="0" marL="0">
+                        <a:buNone/>
+                      </a:pPr>
+                      <a:r>
+                        <a:rPr lang="en-US" sz="1300" b="1" dirty="0">
+                          <a:solidFill>
+                            <a:srgbClr val="718096"/>
+                          </a:solidFill>
+                          <a:latin typeface="Pretendard" pitchFamily="34" charset="0"/>
+                          <a:ea typeface="Pretendard" pitchFamily="34" charset="-122"/>
+                          <a:cs typeface="Pretendard" pitchFamily="34" charset="-120"/>
+                        </a:rPr>
+                        <a:t>비고</a:t>
+                      </a:r>
+                      <a:endParaRPr lang="en-US" sz="1300" dirty="0">
+                        <a:latin typeface="Pretendard" charset="0"/>
+                        <a:ea typeface="Pretendard" charset="0"/>
+                        <a:cs typeface="Pretendard" charset="0"/>
+                      </a:endParaRPr>
+                    </a:p>
+                  </a:txBody>
+                  <a:tcPr marL="50800" marR="50800" marT="25400" marB="25400" anchor="ctr">
+                    <a:lnL w="3810" cap="flat" cmpd="sng" algn="ctr">
+                      <a:solidFill>
+                        <a:srgbClr val="CBD5E0"/>
+                      </a:solidFill>
+                      <a:prstDash val="solid"/>
+                      <a:round/>
+                      <a:headEnd type="none" w="med" len="med"/>
+                      <a:tailEnd type="none" w="med" len="med"/>
+                    </a:lnL>
+                    <a:lnR w="3810" cap="flat" cmpd="sng" algn="ctr">
+                      <a:solidFill>
+                        <a:srgbClr val="CBD5E0"/>
+                      </a:solidFill>
+                      <a:prstDash val="solid"/>
+                      <a:round/>
+                      <a:headEnd type="none" w="med" len="med"/>
+                      <a:tailEnd type="none" w="med" len="med"/>
+                    </a:lnR>
+                    <a:lnT w="3810" cap="flat" cmpd="sng" algn="ctr">
+                      <a:solidFill>
+                        <a:srgbClr val="CBD5E0"/>
+                      </a:solidFill>
+                      <a:prstDash val="solid"/>
+                      <a:round/>
+                      <a:headEnd type="none" w="med" len="med"/>
+                      <a:tailEnd type="none" w="med" len="med"/>
+                    </a:lnT>
+                    <a:lnB w="3810" cap="flat" cmpd="sng" algn="ctr">
+                      <a:solidFill>
+                        <a:srgbClr val="CBD5E0"/>
+                      </a:solidFill>
+                      <a:prstDash val="solid"/>
+                      <a:round/>
+                      <a:headEnd type="none" w="med" len="med"/>
+                      <a:tailEnd type="none" w="med" len="med"/>
+                    </a:lnB>
+                    <a:solidFill>
+                      <a:srgbClr val="F7FAFC"/>
+                    </a:solidFill>
+                  </a:tcPr>
+                </a:tc>
+              </a:tr>
+              <a:tr h="457200">
+                <a:tc>
+                  <a:txBody>
+                    <a:bodyPr/>
+                    <a:lstStyle/>
+                    <a:p>
+                      <a:pPr indent="0" marL="0">
+                        <a:buNone/>
+                      </a:pPr>
+                      <a:r>
+                        <a:rPr lang="en-US" sz="1300" b="1" dirty="0">
+                          <a:solidFill>
+                            <a:srgbClr val="10161F"/>
+                          </a:solidFill>
+                          <a:latin typeface="Pretendard" pitchFamily="34" charset="0"/>
+                          <a:ea typeface="Pretendard" pitchFamily="34" charset="-122"/>
+                          <a:cs typeface="Pretendard" pitchFamily="34" charset="-120"/>
+                        </a:rPr>
+                        <a:t>목표 </a:t>
+                      </a:r>
+                      <a:pPr indent="0" marL="0">
+                        <a:buNone/>
+                      </a:pPr>
+                      <a:r>
+                        <a:rPr lang="en-US" sz="1300" b="1" dirty="0">
+                          <a:solidFill>
+                            <a:srgbClr val="10161F"/>
+                          </a:solidFill>
+                          <a:latin typeface="Pretendard" pitchFamily="34" charset="0"/>
+                          <a:ea typeface="Pretendard" pitchFamily="34" charset="-122"/>
+                          <a:cs typeface="Pretendard" pitchFamily="34" charset="-120"/>
+                        </a:rPr>
+                        <a:t>매각가</a:t>
+                      </a:r>
+                      <a:endParaRPr lang="en-US" sz="1300" dirty="0">
+                        <a:latin typeface="Pretendard" charset="0"/>
+                        <a:ea typeface="Pretendard" charset="0"/>
+                        <a:cs typeface="Pretendard" charset="0"/>
+                      </a:endParaRPr>
+                    </a:p>
+                  </a:txBody>
+                  <a:tcPr marL="50800" marR="50800" marT="25400" marB="25400" anchor="ctr">
+                    <a:lnL w="3810" cap="flat" cmpd="sng" algn="ctr">
+                      <a:solidFill>
+                        <a:srgbClr val="CBD5E0"/>
+                      </a:solidFill>
+                      <a:prstDash val="solid"/>
+                      <a:round/>
+                      <a:headEnd type="none" w="med" len="med"/>
+                      <a:tailEnd type="none" w="med" len="med"/>
+                    </a:lnL>
+                    <a:lnR w="3810" cap="flat" cmpd="sng" algn="ctr">
+                      <a:solidFill>
+                        <a:srgbClr val="CBD5E0"/>
+                      </a:solidFill>
+                      <a:prstDash val="solid"/>
+                      <a:round/>
+                      <a:headEnd type="none" w="med" len="med"/>
+                      <a:tailEnd type="none" w="med" len="med"/>
+                    </a:lnR>
+                    <a:lnT w="3810" cap="flat" cmpd="sng" algn="ctr">
+                      <a:solidFill>
+                        <a:srgbClr val="CBD5E0"/>
+                      </a:solidFill>
+                      <a:prstDash val="solid"/>
+                      <a:round/>
+                      <a:headEnd type="none" w="med" len="med"/>
+                      <a:tailEnd type="none" w="med" len="med"/>
+                    </a:lnT>
+                    <a:lnB w="3810" cap="flat" cmpd="sng" algn="ctr">
+                      <a:solidFill>
+                        <a:srgbClr val="CBD5E0"/>
+                      </a:solidFill>
+                      <a:prstDash val="solid"/>
+                      <a:round/>
+                      <a:headEnd type="none" w="med" len="med"/>
+                      <a:tailEnd type="none" w="med" len="med"/>
+                    </a:lnB>
+                    <a:solidFill>
+                      <a:srgbClr val="FFFFFF"/>
+                    </a:solidFill>
+                  </a:tcPr>
+                </a:tc>
+                <a:tc>
+                  <a:txBody>
+                    <a:bodyPr/>
+                    <a:lstStyle/>
+                    <a:p>
+                      <a:pPr indent="0" marL="0">
+                        <a:buNone/>
+                      </a:pPr>
+                      <a:r>
+                        <a:rPr lang="en-US" sz="1300" dirty="0">
+                          <a:solidFill>
+                            <a:srgbClr val="10161F"/>
+                          </a:solidFill>
+                          <a:latin typeface="Pretendard" pitchFamily="34" charset="0"/>
+                          <a:ea typeface="Pretendard" pitchFamily="34" charset="-122"/>
+                          <a:cs typeface="Pretendard" pitchFamily="34" charset="-120"/>
+                        </a:rPr>
+                        <a:t>주변 </a:t>
+                      </a:r>
+                      <a:pPr indent="0" marL="0">
+                        <a:buNone/>
+                      </a:pPr>
+                      <a:r>
+                        <a:rPr lang="en-US" sz="1300" dirty="0">
+                          <a:solidFill>
+                            <a:srgbClr val="10161F"/>
+                          </a:solidFill>
+                          <a:latin typeface="Pretendard" pitchFamily="34" charset="0"/>
+                          <a:ea typeface="Pretendard" pitchFamily="34" charset="-122"/>
+                          <a:cs typeface="Pretendard" pitchFamily="34" charset="-120"/>
+                        </a:rPr>
+                        <a:t>시세 </a:t>
+                      </a:r>
+                      <a:pPr indent="0" marL="0">
+                        <a:buNone/>
+                      </a:pPr>
+                      <a:r>
+                        <a:rPr lang="en-US" sz="1300" dirty="0">
+                          <a:solidFill>
+                            <a:srgbClr val="10161F"/>
+                          </a:solidFill>
+                          <a:latin typeface="Pretendard" pitchFamily="34" charset="0"/>
+                          <a:ea typeface="Pretendard" pitchFamily="34" charset="-122"/>
+                          <a:cs typeface="Pretendard" pitchFamily="34" charset="-120"/>
+                        </a:rPr>
+                        <a:t>상단 </a:t>
+                      </a:r>
+                      <a:pPr indent="0" marL="0">
+                        <a:buNone/>
+                      </a:pPr>
+                      <a:r>
+                        <a:rPr lang="en-US" sz="1300" dirty="0">
+                          <a:solidFill>
+                            <a:srgbClr val="10161F"/>
+                          </a:solidFill>
+                          <a:latin typeface="Pretendard" pitchFamily="34" charset="0"/>
+                          <a:ea typeface="Pretendard" pitchFamily="34" charset="-122"/>
+                          <a:cs typeface="Pretendard" pitchFamily="34" charset="-120"/>
+                        </a:rPr>
+                        <a:t>추정</a:t>
+                      </a:r>
+                      <a:endParaRPr lang="en-US" sz="1300" dirty="0">
+                        <a:latin typeface="Pretendard" charset="0"/>
+                        <a:ea typeface="Pretendard" charset="0"/>
+                        <a:cs typeface="Pretendard" charset="0"/>
+                      </a:endParaRPr>
+                    </a:p>
+                  </a:txBody>
+                  <a:tcPr marL="50800" marR="50800" marT="25400" marB="25400" anchor="ctr">
+                    <a:lnL w="3810" cap="flat" cmpd="sng" algn="ctr">
+                      <a:solidFill>
+                        <a:srgbClr val="CBD5E0"/>
+                      </a:solidFill>
+                      <a:prstDash val="solid"/>
+                      <a:round/>
+                      <a:headEnd type="none" w="med" len="med"/>
+                      <a:tailEnd type="none" w="med" len="med"/>
+                    </a:lnL>
+                    <a:lnR w="3810" cap="flat" cmpd="sng" algn="ctr">
+                      <a:solidFill>
+                        <a:srgbClr val="CBD5E0"/>
+                      </a:solidFill>
+                      <a:prstDash val="solid"/>
+                      <a:round/>
+                      <a:headEnd type="none" w="med" len="med"/>
+                      <a:tailEnd type="none" w="med" len="med"/>
+                    </a:lnR>
+                    <a:lnT w="3810" cap="flat" cmpd="sng" algn="ctr">
+                      <a:solidFill>
+                        <a:srgbClr val="CBD5E0"/>
+                      </a:solidFill>
+                      <a:prstDash val="solid"/>
+                      <a:round/>
+                      <a:headEnd type="none" w="med" len="med"/>
+                      <a:tailEnd type="none" w="med" len="med"/>
+                    </a:lnT>
+                    <a:lnB w="3810" cap="flat" cmpd="sng" algn="ctr">
+                      <a:solidFill>
+                        <a:srgbClr val="CBD5E0"/>
+                      </a:solidFill>
+                      <a:prstDash val="solid"/>
+                      <a:round/>
+                      <a:headEnd type="none" w="med" len="med"/>
+                      <a:tailEnd type="none" w="med" len="med"/>
+                    </a:lnB>
+                    <a:solidFill>
+                      <a:srgbClr val="FFFFFF"/>
+                    </a:solidFill>
+                  </a:tcPr>
+                </a:tc>
+                <a:tc>
+                  <a:txBody>
+                    <a:bodyPr/>
+                    <a:lstStyle/>
+                    <a:p>
+                      <a:pPr indent="0" marL="0">
+                        <a:buNone/>
+                      </a:pPr>
+                      <a:r>
+                        <a:rPr lang="en-US" sz="1300" dirty="0">
+                          <a:solidFill>
+                            <a:srgbClr val="10161F"/>
+                          </a:solidFill>
+                          <a:latin typeface="Pretendard" pitchFamily="34" charset="0"/>
+                          <a:ea typeface="Pretendard" pitchFamily="34" charset="-122"/>
+                          <a:cs typeface="Pretendard" pitchFamily="34" charset="-120"/>
+                        </a:rPr>
+                        <a:t>리밸런싱 </a:t>
+                      </a:r>
+                      <a:pPr indent="0" marL="0">
+                        <a:buNone/>
+                      </a:pPr>
+                      <a:r>
+                        <a:rPr lang="en-US" sz="1300" dirty="0">
+                          <a:solidFill>
+                            <a:srgbClr val="10161F"/>
+                          </a:solidFill>
+                          <a:latin typeface="Pretendard" pitchFamily="34" charset="0"/>
+                          <a:ea typeface="Pretendard" pitchFamily="34" charset="-122"/>
+                          <a:cs typeface="Pretendard" pitchFamily="34" charset="-120"/>
+                        </a:rPr>
+                        <a:t>타겟</a:t>
+                      </a:r>
+                      <a:endParaRPr lang="en-US" sz="1300" dirty="0">
+                        <a:latin typeface="Pretendard" charset="0"/>
+                        <a:ea typeface="Pretendard" charset="0"/>
+                        <a:cs typeface="Pretendard" charset="0"/>
+                      </a:endParaRPr>
+                    </a:p>
+                  </a:txBody>
+                  <a:tcPr marL="50800" marR="50800" marT="25400" marB="25400" anchor="ctr">
+                    <a:lnL w="3810" cap="flat" cmpd="sng" algn="ctr">
+                      <a:solidFill>
+                        <a:srgbClr val="CBD5E0"/>
+                      </a:solidFill>
+                      <a:prstDash val="solid"/>
+                      <a:round/>
+                      <a:headEnd type="none" w="med" len="med"/>
+                      <a:tailEnd type="none" w="med" len="med"/>
+                    </a:lnL>
+                    <a:lnR w="3810" cap="flat" cmpd="sng" algn="ctr">
+                      <a:solidFill>
+                        <a:srgbClr val="CBD5E0"/>
+                      </a:solidFill>
+                      <a:prstDash val="solid"/>
+                      <a:round/>
+                      <a:headEnd type="none" w="med" len="med"/>
+                      <a:tailEnd type="none" w="med" len="med"/>
+                    </a:lnR>
+                    <a:lnT w="3810" cap="flat" cmpd="sng" algn="ctr">
+                      <a:solidFill>
+                        <a:srgbClr val="CBD5E0"/>
+                      </a:solidFill>
+                      <a:prstDash val="solid"/>
+                      <a:round/>
+                      <a:headEnd type="none" w="med" len="med"/>
+                      <a:tailEnd type="none" w="med" len="med"/>
+                    </a:lnT>
+                    <a:lnB w="3810" cap="flat" cmpd="sng" algn="ctr">
+                      <a:solidFill>
+                        <a:srgbClr val="CBD5E0"/>
+                      </a:solidFill>
+                      <a:prstDash val="solid"/>
+                      <a:round/>
+                      <a:headEnd type="none" w="med" len="med"/>
+                      <a:tailEnd type="none" w="med" len="med"/>
+                    </a:lnB>
+                    <a:solidFill>
+                      <a:srgbClr val="FFFFFF"/>
+                    </a:solidFill>
+                  </a:tcPr>
+                </a:tc>
+              </a:tr>
+              <a:tr h="457200">
+                <a:tc>
+                  <a:txBody>
+                    <a:bodyPr/>
+                    <a:lstStyle/>
+                    <a:p>
+                      <a:pPr indent="0" marL="0">
+                        <a:buNone/>
+                      </a:pPr>
+                      <a:r>
+                        <a:rPr lang="en-US" sz="1300" b="1" dirty="0">
+                          <a:solidFill>
+                            <a:srgbClr val="10161F"/>
+                          </a:solidFill>
+                          <a:latin typeface="Pretendard" pitchFamily="34" charset="0"/>
+                          <a:ea typeface="Pretendard" pitchFamily="34" charset="-122"/>
+                          <a:cs typeface="Pretendard" pitchFamily="34" charset="-120"/>
+                        </a:rPr>
+                        <a:t>목표 </a:t>
+                      </a:r>
+                      <a:pPr indent="0" marL="0">
+                        <a:buNone/>
+                      </a:pPr>
+                      <a:r>
+                        <a:rPr lang="en-US" sz="1300" b="1" dirty="0">
+                          <a:solidFill>
+                            <a:srgbClr val="10161F"/>
+                          </a:solidFill>
+                          <a:latin typeface="Pretendard" pitchFamily="34" charset="0"/>
+                          <a:ea typeface="Pretendard" pitchFamily="34" charset="-122"/>
+                          <a:cs typeface="Pretendard" pitchFamily="34" charset="-120"/>
+                        </a:rPr>
+                        <a:t>시세차익</a:t>
+                      </a:r>
+                      <a:endParaRPr lang="en-US" sz="1300" dirty="0">
+                        <a:latin typeface="Pretendard" charset="0"/>
+                        <a:ea typeface="Pretendard" charset="0"/>
+                        <a:cs typeface="Pretendard" charset="0"/>
+                      </a:endParaRPr>
+                    </a:p>
+                  </a:txBody>
+                  <a:tcPr marL="50800" marR="50800" marT="25400" marB="25400" anchor="ctr">
+                    <a:lnL w="3810" cap="flat" cmpd="sng" algn="ctr">
+                      <a:solidFill>
+                        <a:srgbClr val="CBD5E0"/>
+                      </a:solidFill>
+                      <a:prstDash val="solid"/>
+                      <a:round/>
+                      <a:headEnd type="none" w="med" len="med"/>
+                      <a:tailEnd type="none" w="med" len="med"/>
+                    </a:lnL>
+                    <a:lnR w="3810" cap="flat" cmpd="sng" algn="ctr">
+                      <a:solidFill>
+                        <a:srgbClr val="CBD5E0"/>
+                      </a:solidFill>
+                      <a:prstDash val="solid"/>
+                      <a:round/>
+                      <a:headEnd type="none" w="med" len="med"/>
+                      <a:tailEnd type="none" w="med" len="med"/>
+                    </a:lnR>
+                    <a:lnT w="3810" cap="flat" cmpd="sng" algn="ctr">
+                      <a:solidFill>
+                        <a:srgbClr val="CBD5E0"/>
+                      </a:solidFill>
+                      <a:prstDash val="solid"/>
+                      <a:round/>
+                      <a:headEnd type="none" w="med" len="med"/>
+                      <a:tailEnd type="none" w="med" len="med"/>
+                    </a:lnT>
+                    <a:lnB w="3810" cap="flat" cmpd="sng" algn="ctr">
+                      <a:solidFill>
+                        <a:srgbClr val="CBD5E0"/>
+                      </a:solidFill>
+                      <a:prstDash val="solid"/>
+                      <a:round/>
+                      <a:headEnd type="none" w="med" len="med"/>
+                      <a:tailEnd type="none" w="med" len="med"/>
+                    </a:lnB>
+                    <a:solidFill>
+                      <a:srgbClr val="F7FAFC"/>
+                    </a:solidFill>
+                  </a:tcPr>
+                </a:tc>
+                <a:tc>
+                  <a:txBody>
+                    <a:bodyPr/>
+                    <a:lstStyle/>
+                    <a:p>
+                      <a:pPr indent="0" marL="0">
+                        <a:buNone/>
+                      </a:pPr>
+                      <a:r>
+                        <a:rPr lang="en-US" sz="1300" dirty="0">
+                          <a:solidFill>
+                            <a:srgbClr val="10161F"/>
+                          </a:solidFill>
+                          <a:latin typeface="Pretendard" pitchFamily="34" charset="0"/>
+                          <a:ea typeface="Pretendard" pitchFamily="34" charset="-122"/>
+                          <a:cs typeface="Pretendard" pitchFamily="34" charset="-120"/>
+                        </a:rPr>
+                        <a:t>매수 </a:t>
+                      </a:r>
+                      <a:pPr indent="0" marL="0">
+                        <a:buNone/>
+                      </a:pPr>
+                      <a:r>
+                        <a:rPr lang="en-US" sz="1300" dirty="0">
+                          <a:solidFill>
+                            <a:srgbClr val="10161F"/>
+                          </a:solidFill>
+                          <a:latin typeface="Pretendard" pitchFamily="34" charset="0"/>
+                          <a:ea typeface="Pretendard" pitchFamily="34" charset="-122"/>
+                          <a:cs typeface="Pretendard" pitchFamily="34" charset="-120"/>
+                        </a:rPr>
+                        <a:t>희망가 </a:t>
+                      </a:r>
+                      <a:pPr indent="0" marL="0">
+                        <a:buNone/>
+                      </a:pPr>
+                      <a:r>
+                        <a:rPr lang="en-US" sz="1300" dirty="0">
+                          <a:solidFill>
+                            <a:srgbClr val="10161F"/>
+                          </a:solidFill>
+                          <a:latin typeface="Pretendard" pitchFamily="34" charset="0"/>
+                          <a:ea typeface="Pretendard" pitchFamily="34" charset="-122"/>
+                          <a:cs typeface="Pretendard" pitchFamily="34" charset="-120"/>
+                        </a:rPr>
+                        <a:t>대비 </a:t>
+                      </a:r>
+                      <a:pPr indent="0" marL="0">
+                        <a:buNone/>
+                      </a:pPr>
+                      <a:r>
+                        <a:rPr lang="en-US" sz="1300" dirty="0">
+                          <a:solidFill>
+                            <a:srgbClr val="10161F"/>
+                          </a:solidFill>
+                          <a:latin typeface="Pretendard" pitchFamily="34" charset="0"/>
+                          <a:ea typeface="Pretendard" pitchFamily="34" charset="-122"/>
+                          <a:cs typeface="Pretendard" pitchFamily="34" charset="-120"/>
+                        </a:rPr>
+                        <a:t>갭</a:t>
+                      </a:r>
+                      <a:endParaRPr lang="en-US" sz="1300" dirty="0">
+                        <a:latin typeface="Pretendard" charset="0"/>
+                        <a:ea typeface="Pretendard" charset="0"/>
+                        <a:cs typeface="Pretendard" charset="0"/>
+                      </a:endParaRPr>
+                    </a:p>
+                  </a:txBody>
+                  <a:tcPr marL="50800" marR="50800" marT="25400" marB="25400" anchor="ctr">
+                    <a:lnL w="3810" cap="flat" cmpd="sng" algn="ctr">
+                      <a:solidFill>
+                        <a:srgbClr val="CBD5E0"/>
+                      </a:solidFill>
+                      <a:prstDash val="solid"/>
+                      <a:round/>
+                      <a:headEnd type="none" w="med" len="med"/>
+                      <a:tailEnd type="none" w="med" len="med"/>
+                    </a:lnL>
+                    <a:lnR w="3810" cap="flat" cmpd="sng" algn="ctr">
+                      <a:solidFill>
+                        <a:srgbClr val="CBD5E0"/>
+                      </a:solidFill>
+                      <a:prstDash val="solid"/>
+                      <a:round/>
+                      <a:headEnd type="none" w="med" len="med"/>
+                      <a:tailEnd type="none" w="med" len="med"/>
+                    </a:lnR>
+                    <a:lnT w="3810" cap="flat" cmpd="sng" algn="ctr">
+                      <a:solidFill>
+                        <a:srgbClr val="CBD5E0"/>
+                      </a:solidFill>
+                      <a:prstDash val="solid"/>
+                      <a:round/>
+                      <a:headEnd type="none" w="med" len="med"/>
+                      <a:tailEnd type="none" w="med" len="med"/>
+                    </a:lnT>
+                    <a:lnB w="3810" cap="flat" cmpd="sng" algn="ctr">
+                      <a:solidFill>
+                        <a:srgbClr val="CBD5E0"/>
+                      </a:solidFill>
+                      <a:prstDash val="solid"/>
+                      <a:round/>
+                      <a:headEnd type="none" w="med" len="med"/>
+                      <a:tailEnd type="none" w="med" len="med"/>
+                    </a:lnB>
+                    <a:solidFill>
+                      <a:srgbClr val="F7FAFC"/>
+                    </a:solidFill>
+                  </a:tcPr>
+                </a:tc>
+                <a:tc>
+                  <a:txBody>
+                    <a:bodyPr/>
+                    <a:lstStyle/>
+                    <a:p>
+                      <a:pPr indent="0" marL="0">
+                        <a:buNone/>
+                      </a:pPr>
+                      <a:r>
+                        <a:rPr lang="en-US" sz="1300" dirty="0">
+                          <a:solidFill>
+                            <a:srgbClr val="10161F"/>
+                          </a:solidFill>
+                          <a:latin typeface="Pretendard" pitchFamily="34" charset="0"/>
+                          <a:ea typeface="Pretendard" pitchFamily="34" charset="-122"/>
+                          <a:cs typeface="Pretendard" pitchFamily="34" charset="-120"/>
+                        </a:rPr>
+                        <a:t>자본 </a:t>
+                      </a:r>
+                      <a:pPr indent="0" marL="0">
+                        <a:buNone/>
+                      </a:pPr>
+                      <a:r>
+                        <a:rPr lang="en-US" sz="1300" dirty="0">
+                          <a:solidFill>
+                            <a:srgbClr val="10161F"/>
+                          </a:solidFill>
+                          <a:latin typeface="Pretendard" pitchFamily="34" charset="0"/>
+                          <a:ea typeface="Pretendard" pitchFamily="34" charset="-122"/>
+                          <a:cs typeface="Pretendard" pitchFamily="34" charset="-120"/>
+                        </a:rPr>
+                        <a:t>이득</a:t>
+                      </a:r>
+                      <a:endParaRPr lang="en-US" sz="1300" dirty="0">
+                        <a:latin typeface="Pretendard" charset="0"/>
+                        <a:ea typeface="Pretendard" charset="0"/>
+                        <a:cs typeface="Pretendard" charset="0"/>
+                      </a:endParaRPr>
+                    </a:p>
+                  </a:txBody>
+                  <a:tcPr marL="50800" marR="50800" marT="25400" marB="25400" anchor="ctr">
+                    <a:lnL w="3810" cap="flat" cmpd="sng" algn="ctr">
+                      <a:solidFill>
+                        <a:srgbClr val="CBD5E0"/>
+                      </a:solidFill>
+                      <a:prstDash val="solid"/>
+                      <a:round/>
+                      <a:headEnd type="none" w="med" len="med"/>
+                      <a:tailEnd type="none" w="med" len="med"/>
+                    </a:lnL>
+                    <a:lnR w="3810" cap="flat" cmpd="sng" algn="ctr">
+                      <a:solidFill>
+                        <a:srgbClr val="CBD5E0"/>
+                      </a:solidFill>
+                      <a:prstDash val="solid"/>
+                      <a:round/>
+                      <a:headEnd type="none" w="med" len="med"/>
+                      <a:tailEnd type="none" w="med" len="med"/>
+                    </a:lnR>
+                    <a:lnT w="3810" cap="flat" cmpd="sng" algn="ctr">
+                      <a:solidFill>
+                        <a:srgbClr val="CBD5E0"/>
+                      </a:solidFill>
+                      <a:prstDash val="solid"/>
+                      <a:round/>
+                      <a:headEnd type="none" w="med" len="med"/>
+                      <a:tailEnd type="none" w="med" len="med"/>
+                    </a:lnT>
+                    <a:lnB w="3810" cap="flat" cmpd="sng" algn="ctr">
+                      <a:solidFill>
+                        <a:srgbClr val="CBD5E0"/>
+                      </a:solidFill>
+                      <a:prstDash val="solid"/>
+                      <a:round/>
+                      <a:headEnd type="none" w="med" len="med"/>
+                      <a:tailEnd type="none" w="med" len="med"/>
+                    </a:lnB>
+                    <a:solidFill>
+                      <a:srgbClr val="F7FAFC"/>
+                    </a:solidFill>
+                  </a:tcPr>
+                </a:tc>
+              </a:tr>
+              <a:tr h="457200">
+                <a:tc>
+                  <a:txBody>
+                    <a:bodyPr/>
+                    <a:lstStyle/>
+                    <a:p>
+                      <a:pPr indent="0" marL="0">
+                        <a:buNone/>
+                      </a:pPr>
+                      <a:r>
+                        <a:rPr lang="en-US" sz="1300" b="1" dirty="0">
+                          <a:solidFill>
+                            <a:srgbClr val="10161F"/>
+                          </a:solidFill>
+                          <a:latin typeface="Pretendard" pitchFamily="34" charset="0"/>
+                          <a:ea typeface="Pretendard" pitchFamily="34" charset="-122"/>
+                          <a:cs typeface="Pretendard" pitchFamily="34" charset="-120"/>
+                        </a:rPr>
+                        <a:t>목표 </a:t>
+                      </a:r>
+                      <a:pPr indent="0" marL="0">
+                        <a:buNone/>
+                      </a:pPr>
+                      <a:r>
+                        <a:rPr lang="en-US" sz="1300" b="1" dirty="0">
+                          <a:solidFill>
+                            <a:srgbClr val="10161F"/>
+                          </a:solidFill>
+                          <a:latin typeface="Pretendard" pitchFamily="34" charset="0"/>
+                          <a:ea typeface="Pretendard" pitchFamily="34" charset="-122"/>
+                          <a:cs typeface="Pretendard" pitchFamily="34" charset="-120"/>
+                        </a:rPr>
+                        <a:t>보유기간 </a:t>
+                      </a:r>
+                      <a:pPr indent="0" marL="0">
+                        <a:buNone/>
+                      </a:pPr>
+                      <a:r>
+                        <a:rPr lang="en-US" sz="1300" b="1" dirty="0">
+                          <a:solidFill>
+                            <a:srgbClr val="10161F"/>
+                          </a:solidFill>
+                          <a:latin typeface="Pretendard" pitchFamily="34" charset="0"/>
+                          <a:ea typeface="Pretendard" pitchFamily="34" charset="-122"/>
+                          <a:cs typeface="Pretendard" pitchFamily="34" charset="-120"/>
+                        </a:rPr>
+                        <a:t>수익률 </a:t>
+                      </a:r>
+                      <a:pPr indent="0" marL="0">
+                        <a:buNone/>
+                      </a:pPr>
+                      <a:r>
+                        <a:rPr lang="en-US" sz="1300" b="1" dirty="0">
+                          <a:solidFill>
+                            <a:srgbClr val="10161F"/>
+                          </a:solidFill>
+                          <a:latin typeface="Pretendard" pitchFamily="34" charset="0"/>
+                          <a:ea typeface="Pretendard" pitchFamily="34" charset="-122"/>
+                          <a:cs typeface="Pretendard" pitchFamily="34" charset="-120"/>
+                        </a:rPr>
+                        <a:t>(HPR)</a:t>
+                      </a:r>
+                      <a:endParaRPr lang="en-US" sz="1300" dirty="0">
+                        <a:latin typeface="Pretendard" charset="0"/>
+                        <a:ea typeface="Pretendard" charset="0"/>
+                        <a:cs typeface="Pretendard" charset="0"/>
+                      </a:endParaRPr>
+                    </a:p>
+                  </a:txBody>
+                  <a:tcPr marL="50800" marR="50800" marT="25400" marB="25400" anchor="ctr">
+                    <a:lnL w="3810" cap="flat" cmpd="sng" algn="ctr">
+                      <a:solidFill>
+                        <a:srgbClr val="CBD5E0"/>
+                      </a:solidFill>
+                      <a:prstDash val="solid"/>
+                      <a:round/>
+                      <a:headEnd type="none" w="med" len="med"/>
+                      <a:tailEnd type="none" w="med" len="med"/>
+                    </a:lnL>
+                    <a:lnR w="3810" cap="flat" cmpd="sng" algn="ctr">
+                      <a:solidFill>
+                        <a:srgbClr val="CBD5E0"/>
+                      </a:solidFill>
+                      <a:prstDash val="solid"/>
+                      <a:round/>
+                      <a:headEnd type="none" w="med" len="med"/>
+                      <a:tailEnd type="none" w="med" len="med"/>
+                    </a:lnR>
+                    <a:lnT w="3810" cap="flat" cmpd="sng" algn="ctr">
+                      <a:solidFill>
+                        <a:srgbClr val="CBD5E0"/>
+                      </a:solidFill>
+                      <a:prstDash val="solid"/>
+                      <a:round/>
+                      <a:headEnd type="none" w="med" len="med"/>
+                      <a:tailEnd type="none" w="med" len="med"/>
+                    </a:lnT>
+                    <a:lnB w="3810" cap="flat" cmpd="sng" algn="ctr">
+                      <a:solidFill>
+                        <a:srgbClr val="CBD5E0"/>
+                      </a:solidFill>
+                      <a:prstDash val="solid"/>
+                      <a:round/>
+                      <a:headEnd type="none" w="med" len="med"/>
+                      <a:tailEnd type="none" w="med" len="med"/>
+                    </a:lnB>
+                    <a:solidFill>
+                      <a:srgbClr val="FFFFFF"/>
+                    </a:solidFill>
+                  </a:tcPr>
+                </a:tc>
+                <a:tc>
+                  <a:txBody>
+                    <a:bodyPr/>
+                    <a:lstStyle/>
+                    <a:p>
+                      <a:pPr indent="0" marL="0">
+                        <a:buNone/>
+                      </a:pPr>
+                      <a:r>
+                        <a:rPr lang="en-US" sz="1300" dirty="0">
+                          <a:solidFill>
+                            <a:srgbClr val="10161F"/>
+                          </a:solidFill>
+                          <a:latin typeface="Pretendard" pitchFamily="34" charset="0"/>
+                          <a:ea typeface="Pretendard" pitchFamily="34" charset="-122"/>
+                          <a:cs typeface="Pretendard" pitchFamily="34" charset="-120"/>
+                        </a:rPr>
+                        <a:t>10% </a:t>
+                      </a:r>
+                      <a:pPr indent="0" marL="0">
+                        <a:buNone/>
+                      </a:pPr>
+                      <a:r>
+                        <a:rPr lang="en-US" sz="1300" dirty="0">
+                          <a:solidFill>
+                            <a:srgbClr val="10161F"/>
+                          </a:solidFill>
+                          <a:latin typeface="Pretendard" pitchFamily="34" charset="0"/>
+                          <a:ea typeface="Pretendard" pitchFamily="34" charset="-122"/>
+                          <a:cs typeface="Pretendard" pitchFamily="34" charset="-120"/>
+                        </a:rPr>
+                        <a:t>~ </a:t>
+                      </a:r>
+                      <a:pPr indent="0" marL="0">
+                        <a:buNone/>
+                      </a:pPr>
+                      <a:r>
+                        <a:rPr lang="en-US" sz="1300" dirty="0">
+                          <a:solidFill>
+                            <a:srgbClr val="10161F"/>
+                          </a:solidFill>
+                          <a:latin typeface="Pretendard" pitchFamily="34" charset="0"/>
+                          <a:ea typeface="Pretendard" pitchFamily="34" charset="-122"/>
+                          <a:cs typeface="Pretendard" pitchFamily="34" charset="-120"/>
+                        </a:rPr>
+                        <a:t>20%</a:t>
+                      </a:r>
+                      <a:endParaRPr lang="en-US" sz="1300" dirty="0">
+                        <a:latin typeface="Pretendard" charset="0"/>
+                        <a:ea typeface="Pretendard" charset="0"/>
+                        <a:cs typeface="Pretendard" charset="0"/>
+                      </a:endParaRPr>
+                    </a:p>
+                  </a:txBody>
+                  <a:tcPr marL="50800" marR="50800" marT="25400" marB="25400" anchor="ctr">
+                    <a:lnL w="3810" cap="flat" cmpd="sng" algn="ctr">
+                      <a:solidFill>
+                        <a:srgbClr val="CBD5E0"/>
+                      </a:solidFill>
+                      <a:prstDash val="solid"/>
+                      <a:round/>
+                      <a:headEnd type="none" w="med" len="med"/>
+                      <a:tailEnd type="none" w="med" len="med"/>
+                    </a:lnL>
+                    <a:lnR w="3810" cap="flat" cmpd="sng" algn="ctr">
+                      <a:solidFill>
+                        <a:srgbClr val="CBD5E0"/>
+                      </a:solidFill>
+                      <a:prstDash val="solid"/>
+                      <a:round/>
+                      <a:headEnd type="none" w="med" len="med"/>
+                      <a:tailEnd type="none" w="med" len="med"/>
+                    </a:lnR>
+                    <a:lnT w="3810" cap="flat" cmpd="sng" algn="ctr">
+                      <a:solidFill>
+                        <a:srgbClr val="CBD5E0"/>
+                      </a:solidFill>
+                      <a:prstDash val="solid"/>
+                      <a:round/>
+                      <a:headEnd type="none" w="med" len="med"/>
+                      <a:tailEnd type="none" w="med" len="med"/>
+                    </a:lnT>
+                    <a:lnB w="3810" cap="flat" cmpd="sng" algn="ctr">
+                      <a:solidFill>
+                        <a:srgbClr val="CBD5E0"/>
+                      </a:solidFill>
+                      <a:prstDash val="solid"/>
+                      <a:round/>
+                      <a:headEnd type="none" w="med" len="med"/>
+                      <a:tailEnd type="none" w="med" len="med"/>
+                    </a:lnB>
+                    <a:solidFill>
+                      <a:srgbClr val="FFFFFF"/>
+                    </a:solidFill>
+                  </a:tcPr>
+                </a:tc>
+                <a:tc>
+                  <a:txBody>
+                    <a:bodyPr/>
+                    <a:lstStyle/>
+                    <a:p>
+                      <a:pPr indent="0" marL="0">
+                        <a:buNone/>
+                      </a:pPr>
+                      <a:r>
+                        <a:rPr lang="en-US" sz="1300" dirty="0">
+                          <a:solidFill>
+                            <a:srgbClr val="10161F"/>
+                          </a:solidFill>
+                          <a:latin typeface="Pretendard" pitchFamily="34" charset="0"/>
+                          <a:ea typeface="Pretendard" pitchFamily="34" charset="-122"/>
+                          <a:cs typeface="Pretendard" pitchFamily="34" charset="-120"/>
+                        </a:rPr>
+                        <a:t>보유 </a:t>
+                      </a:r>
+                      <a:pPr indent="0" marL="0">
+                        <a:buNone/>
+                      </a:pPr>
+                      <a:r>
+                        <a:rPr lang="en-US" sz="1300" dirty="0">
+                          <a:solidFill>
+                            <a:srgbClr val="10161F"/>
+                          </a:solidFill>
+                          <a:latin typeface="Pretendard" pitchFamily="34" charset="0"/>
+                          <a:ea typeface="Pretendard" pitchFamily="34" charset="-122"/>
+                          <a:cs typeface="Pretendard" pitchFamily="34" charset="-120"/>
+                        </a:rPr>
+                        <a:t>기간 </a:t>
+                      </a:r>
+                      <a:pPr indent="0" marL="0">
+                        <a:buNone/>
+                      </a:pPr>
+                      <a:r>
+                        <a:rPr lang="en-US" sz="1300" dirty="0">
+                          <a:solidFill>
+                            <a:srgbClr val="10161F"/>
+                          </a:solidFill>
+                          <a:latin typeface="Pretendard" pitchFamily="34" charset="0"/>
+                          <a:ea typeface="Pretendard" pitchFamily="34" charset="-122"/>
+                          <a:cs typeface="Pretendard" pitchFamily="34" charset="-120"/>
+                        </a:rPr>
+                        <a:t>2~3년 </a:t>
+                      </a:r>
+                      <a:pPr indent="0" marL="0">
+                        <a:buNone/>
+                      </a:pPr>
+                      <a:r>
+                        <a:rPr lang="en-US" sz="1300" dirty="0">
+                          <a:solidFill>
+                            <a:srgbClr val="10161F"/>
+                          </a:solidFill>
+                          <a:latin typeface="Pretendard" pitchFamily="34" charset="0"/>
+                          <a:ea typeface="Pretendard" pitchFamily="34" charset="-122"/>
+                          <a:cs typeface="Pretendard" pitchFamily="34" charset="-120"/>
+                        </a:rPr>
+                        <a:t>가정</a:t>
+                      </a:r>
+                      <a:endParaRPr lang="en-US" sz="1300" dirty="0">
+                        <a:latin typeface="Pretendard" charset="0"/>
+                        <a:ea typeface="Pretendard" charset="0"/>
+                        <a:cs typeface="Pretendard" charset="0"/>
+                      </a:endParaRPr>
+                    </a:p>
+                  </a:txBody>
+                  <a:tcPr marL="50800" marR="50800" marT="25400" marB="25400" anchor="ctr">
+                    <a:lnL w="3810" cap="flat" cmpd="sng" algn="ctr">
+                      <a:solidFill>
+                        <a:srgbClr val="CBD5E0"/>
+                      </a:solidFill>
+                      <a:prstDash val="solid"/>
+                      <a:round/>
+                      <a:headEnd type="none" w="med" len="med"/>
+                      <a:tailEnd type="none" w="med" len="med"/>
+                    </a:lnL>
+                    <a:lnR w="3810" cap="flat" cmpd="sng" algn="ctr">
+                      <a:solidFill>
+                        <a:srgbClr val="CBD5E0"/>
+                      </a:solidFill>
+                      <a:prstDash val="solid"/>
+                      <a:round/>
+                      <a:headEnd type="none" w="med" len="med"/>
+                      <a:tailEnd type="none" w="med" len="med"/>
+                    </a:lnR>
+                    <a:lnT w="3810" cap="flat" cmpd="sng" algn="ctr">
+                      <a:solidFill>
+                        <a:srgbClr val="CBD5E0"/>
+                      </a:solidFill>
+                      <a:prstDash val="solid"/>
+                      <a:round/>
+                      <a:headEnd type="none" w="med" len="med"/>
+                      <a:tailEnd type="none" w="med" len="med"/>
+                    </a:lnT>
+                    <a:lnB w="3810" cap="flat" cmpd="sng" algn="ctr">
+                      <a:solidFill>
+                        <a:srgbClr val="CBD5E0"/>
+                      </a:solidFill>
+                      <a:prstDash val="solid"/>
+                      <a:round/>
+                      <a:headEnd type="none" w="med" len="med"/>
+                      <a:tailEnd type="none" w="med" len="med"/>
+                    </a:lnB>
+                    <a:solidFill>
+                      <a:srgbClr val="FFFFFF"/>
+                    </a:solidFill>
+                  </a:tcPr>
+                </a:tc>
+              </a:tr>
+            </a:tbl>
+          </a:graphicData>
+        </a:graphic>
+      </p:graphicFrame>
+      <p:sp>
+        <p:nvSpPr>
+          <p:cNvPr id="7" name="Text 4"/>
+          <p:cNvSpPr/>
+          <p:nvPr/>
+        </p:nvSpPr>
+        <p:spPr>
+          <a:xfrm>
+            <a:off x="566928" y="3621024"/>
+            <a:ext cx="11057839" cy="384048"/>
           </a:xfrm>
           <a:prstGeom prst="rect">
             <a:avLst/>
@@ -7629,35 +7867,35 @@
           <a:p>
             <a:pPr indent="0" marL="0">
               <a:lnSpc>
-                <a:spcPct val="120000"/>
+                <a:spcPct val="125000"/>
               </a:lnSpc>
               <a:buNone/>
             </a:pPr>
             <a:r>
-              <a:rPr lang="en-US" sz="1400" dirty="0">
-                <a:solidFill>
-                  <a:srgbClr val="718096"/>
+              <a:rPr lang="en-US" sz="780" dirty="0">
+                <a:solidFill>
+                  <a:srgbClr val="A0AEC0"/>
                 </a:solidFill>
                 <a:latin typeface="Pretendard" pitchFamily="34" charset="0"/>
                 <a:ea typeface="Pretendard" pitchFamily="34" charset="-122"/>
                 <a:cs typeface="Pretendard" pitchFamily="34" charset="-120"/>
               </a:rPr>
-              <a:t>{"ok"</a:t>
-            </a:r>
-            <a:endParaRPr lang="en-US" sz="1400" dirty="0"/>
-          </a:p>
-        </p:txBody>
-      </p:sp>
-      <p:sp>
-        <p:nvSpPr>
-          <p:cNvPr id="7" name="Text 5"/>
-          <p:cNvSpPr/>
-          <p:nvPr/>
-        </p:nvSpPr>
-        <p:spPr>
-          <a:xfrm>
-            <a:off x="4768907" y="1645920"/>
-            <a:ext cx="6855860" cy="402336"/>
+              <a:t>[참고] 리모델링 또는 밸류업 후 단기 매각(Trading)을 통한 Capital Gain 실현 시나리오입니다.</a:t>
+            </a:r>
+            <a:endParaRPr lang="en-US" sz="780" dirty="0"/>
+          </a:p>
+        </p:txBody>
+      </p:sp>
+      <p:sp>
+        <p:nvSpPr>
+          <p:cNvPr id="8" name="Text 5"/>
+          <p:cNvSpPr/>
+          <p:nvPr/>
+        </p:nvSpPr>
+        <p:spPr>
+          <a:xfrm>
+            <a:off x="566928" y="6382512"/>
+            <a:ext cx="7315200" cy="219456"/>
           </a:xfrm>
           <a:prstGeom prst="rect">
             <a:avLst/>
@@ -7670,59 +7908,17 @@
           <a:lstStyle/>
           <a:p>
             <a:pPr indent="0" marL="0">
-              <a:lnSpc>
-                <a:spcPct val="120000"/>
-              </a:lnSpc>
-              <a:buNone/>
-            </a:pPr>
-            <a:r>
-              <a:rPr lang="en-US" sz="1400" b="1" dirty="0">
-                <a:solidFill>
-                  <a:srgbClr val="10161F"/>
+              <a:buNone/>
+            </a:pPr>
+            <a:r>
+              <a:rPr lang="en-US" sz="800" dirty="0">
+                <a:solidFill>
+                  <a:srgbClr val="718096"/>
                 </a:solidFill>
                 <a:latin typeface="Pretendard" pitchFamily="34" charset="0"/>
                 <a:ea typeface="Pretendard" pitchFamily="34" charset="-122"/>
                 <a:cs typeface="Pretendard" pitchFamily="34" charset="-120"/>
               </a:rPr>
-              <a:t>true,"mocked":true,"extractedFields":{"area_signal":"역삼","asset_type":"오피스빌딩","price_band":"300억","size_signal":"3000평(약 9917.4㎡)"},"extractedFacts":{"region":"역삼","exactAddressCandidate":"역삼동 742-1","assetType":"오피스빌딩","priceText":"300억","sizeText":"3000평(약 9917.4㎡)","currentUse":"오피스","currentUseSignal":"근린생활시설","leaseSignal":"임대중","vacancySignal":"공실없음","tenantNames":"쿠팡","네이버","unitRentTexts":"301호: 1500만","sellerMotivationText":"자산 효율화","brokerNotes":"초역세권 매물"},"detectedSensitiveFields":"exact_address","tenant_name","ambiguousFields":,"warnings":,"areaSignal":"역삼","assetType":"오피스빌딩","priceBand":"300억","sizeSignal":"3000평(약 9917.4㎡)","dealType":"매각","buildingName":"역삼 센트럴타워","exactAddress":"역삼동 742-1","totalFloorArea":9917.3,"buildYear":2015,"currentUseSignal":"근린생활시설","vacancySignal":"공실 없음","fitSummary":"초역세권 근생 빌딩으로 시행/사옥 매입에 최적화","cautionSummary":"주요 임차 업종 만기 조율 필요","hiddenFields":"exact_address","seller_motivation","confidence":{"areaSignal":"confirmed","assetType":"confirmed","priceBand":"ai_hypothesis","fitSummary":"ai_hypothesis"},"missingData":"sizeSignal","boundaryNote":"본 자료는 실거래 통계 기반 참고치입니다.","buyerType":"법인 사옥형","budgetRange":{"min":50,"max":80,"display":"50억~80억"},"preferredRegions":"강남","성수","assetTypes":"꼬마빌딩","사옥용","purchasePurpose":"사옥용 매입","mustHave":"초역세권","주차","niceToHave":"테라스","루프탑","riskTolerance":"medium","financingNote":"자본금 50% 준비","missingQuestions":"구체적인 입주 시기가 언제인가요?","선호하는 수익률이 있나요?","privacyNotes":"연락처 비공개","fitReasons":"매수자 예산(50-80억)에 부합하는 매물입니다.","요청하신 성수/강남 권역에 해당합니다.","cautionReasons":"요청한 용도와 달리 명도 협의가 다소 필요합니다.","recommendedNextAction":"현장 답사 제안","kakaoMessage":"안녕하세요! 요청하신 조건에 부합하는 추천 매물이 있어 안내해 드립니다. 확인해보시고 피드백 부탁드립니다.","title":"강남 역삼역 초역세권 오피스 사옥용 빌딩 매각","shortSummary":"역삼역 도보 5분 거리의 준신축급 대형 오피스빌딩입니다.","dealPoints":"초역세권","사옥 최적","cautionPoints":"명도 조율 필요","hiddenInfoNotice":"보증금 및 지번은 인가 후 확인 가능","gateMessage":"G1 등급 등록이 필요합니다.","kakaoText":"강남 역삼역 오피스 빌딩 매각 안내입니다.","exactUnitCandidate":"101호","floor":"1층","areaSqmText":"150㎡","spaceType":"office","depositText":"5000만","monthlyRentText":"400만","maintenanceFeeText":"50만","availableFromText":"즉시입주","leaseTermMonthsText":"24","incentivesText":"렌트프리 2개월","restrictions":,"landlordIdentity":"김성수","currentTenant":"스타트업","vacancyReason":"이전 확장","rentNegotiation":"협의 가능","region":"성수동","areaSqm":150,"deposit":5000,"monthlyRent":400,"maintenanceFee":50,"availableFrom":"즉시입주","leaseTermMonths":24,"incentives":{"rentFreeMonths":2,"interiorSupport":"일부 인테리어 지원","freeRentDetail":"렌트프리 2개월 지원"},"shortSummaryLease":"성수역 도보 5분 거리 1층 리테일 상가 매물입니다."}</a:t>
-            </a:r>
-            <a:endParaRPr lang="en-US" sz="1400" dirty="0"/>
-          </a:p>
-        </p:txBody>
-      </p:sp>
-      <p:sp>
-        <p:nvSpPr>
-          <p:cNvPr id="8" name="Text 6"/>
-          <p:cNvSpPr/>
-          <p:nvPr/>
-        </p:nvSpPr>
-        <p:spPr>
-          <a:xfrm>
-            <a:off x="566928" y="6382512"/>
-            <a:ext cx="7315200" cy="219456"/>
-          </a:xfrm>
-          <a:prstGeom prst="rect">
-            <a:avLst/>
-          </a:prstGeom>
-          <a:noFill/>
-          <a:ln/>
-        </p:spPr>
-        <p:txBody>
-          <a:bodyPr wrap="square" lIns="0" tIns="0" rIns="0" bIns="0" rtlCol="0" anchor="ctr"/>
-          <a:lstStyle/>
-          <a:p>
-            <a:pPr indent="0" marL="0">
-              <a:buNone/>
-            </a:pPr>
-            <a:r>
-              <a:rPr lang="en-US" sz="800" dirty="0">
-                <a:solidFill>
-                  <a:srgbClr val="718096"/>
-                </a:solidFill>
-                <a:latin typeface="Pretendard" pitchFamily="34" charset="0"/>
-                <a:ea typeface="Pretendard" pitchFamily="34" charset="-122"/>
-                <a:cs typeface="Pretendard" pitchFamily="34" charset="-120"/>
-              </a:rPr>
               <a:t>크리딜   |   </a:t>
             </a:r>
             <a:endParaRPr lang="en-US" sz="800" dirty="0"/>
@@ -7731,7 +7927,7 @@
       </p:sp>
       <p:sp>
         <p:nvSpPr>
-          <p:cNvPr id="9" name="Text 7"/>
+          <p:cNvPr id="9" name="Text 6"/>
           <p:cNvSpPr/>
           <p:nvPr/>
         </p:nvSpPr>
@@ -8389,9 +8585,645 @@
                 <a:ea typeface="Pretendard" pitchFamily="34" charset="-122"/>
                 <a:cs typeface="Pretendard" pitchFamily="34" charset="-120"/>
               </a:rPr>
-              <a:t>밸류업 시나리오 (AI 추정)</a:t>
+              <a:t>3대 핵심 투자 포인트 (Investment Highlights)</a:t>
             </a:r>
             <a:endParaRPr lang="en-US" sz="1100" dirty="0"/>
+          </a:p>
+        </p:txBody>
+      </p:sp>
+      <p:sp>
+        <p:nvSpPr>
+          <p:cNvPr id="7" name="Shape 5"/>
+          <p:cNvSpPr/>
+          <p:nvPr/>
+        </p:nvSpPr>
+        <p:spPr>
+          <a:xfrm>
+            <a:off x="566928" y="1481328"/>
+            <a:ext cx="3472586" cy="2560320"/>
+          </a:xfrm>
+          <a:prstGeom prst="roundRect">
+            <a:avLst>
+              <a:gd name="adj" fmla="val 2857"/>
+            </a:avLst>
+          </a:prstGeom>
+          <a:solidFill>
+            <a:srgbClr val="F7FAFC"/>
+          </a:solidFill>
+          <a:ln w="10160">
+            <a:solidFill>
+              <a:srgbClr val="CBD5E0"/>
+            </a:solidFill>
+            <a:prstDash val="solid"/>
+          </a:ln>
+        </p:spPr>
+      </p:sp>
+      <p:sp>
+        <p:nvSpPr>
+          <p:cNvPr id="8" name="Shape 6"/>
+          <p:cNvSpPr/>
+          <p:nvPr/>
+        </p:nvSpPr>
+        <p:spPr>
+          <a:xfrm>
+            <a:off x="566928" y="1481328"/>
+            <a:ext cx="3472586" cy="54864"/>
+          </a:xfrm>
+          <a:prstGeom prst="rect">
+            <a:avLst/>
+          </a:prstGeom>
+          <a:solidFill>
+            <a:srgbClr val="B98A2E"/>
+          </a:solidFill>
+          <a:ln/>
+        </p:spPr>
+      </p:sp>
+      <p:sp>
+        <p:nvSpPr>
+          <p:cNvPr id="9" name="Shape 7"/>
+          <p:cNvSpPr/>
+          <p:nvPr/>
+        </p:nvSpPr>
+        <p:spPr>
+          <a:xfrm>
+            <a:off x="795528" y="1755648"/>
+            <a:ext cx="475488" cy="292608"/>
+          </a:xfrm>
+          <a:prstGeom prst="roundRect">
+            <a:avLst>
+              <a:gd name="adj" fmla="val 12500"/>
+            </a:avLst>
+          </a:prstGeom>
+          <a:solidFill>
+            <a:srgbClr val="D9B668"/>
+          </a:solidFill>
+          <a:ln/>
+        </p:spPr>
+      </p:sp>
+      <p:sp>
+        <p:nvSpPr>
+          <p:cNvPr id="10" name="Text 8"/>
+          <p:cNvSpPr/>
+          <p:nvPr/>
+        </p:nvSpPr>
+        <p:spPr>
+          <a:xfrm>
+            <a:off x="795528" y="1755648"/>
+            <a:ext cx="475488" cy="292608"/>
+          </a:xfrm>
+          <a:prstGeom prst="rect">
+            <a:avLst/>
+          </a:prstGeom>
+          <a:noFill/>
+          <a:ln/>
+        </p:spPr>
+        <p:txBody>
+          <a:bodyPr wrap="square" lIns="0" tIns="0" rIns="0" bIns="0" rtlCol="0" anchor="ctr"/>
+          <a:lstStyle/>
+          <a:p>
+            <a:pPr algn="ctr" indent="0" marL="0">
+              <a:buNone/>
+            </a:pPr>
+            <a:r>
+              <a:rPr lang="en-US" sz="1100" b="1" dirty="0">
+                <a:solidFill>
+                  <a:srgbClr val="977024"/>
+                </a:solidFill>
+                <a:latin typeface="Arial" pitchFamily="34" charset="0"/>
+                <a:ea typeface="Arial" pitchFamily="34" charset="-122"/>
+                <a:cs typeface="Arial" pitchFamily="34" charset="-120"/>
+              </a:rPr>
+              <a:t>01</a:t>
+            </a:r>
+            <a:endParaRPr lang="en-US" sz="1100" dirty="0"/>
+          </a:p>
+        </p:txBody>
+      </p:sp>
+      <p:sp>
+        <p:nvSpPr>
+          <p:cNvPr id="11" name="Text 9"/>
+          <p:cNvSpPr/>
+          <p:nvPr/>
+        </p:nvSpPr>
+        <p:spPr>
+          <a:xfrm>
+            <a:off x="795528" y="2194560"/>
+            <a:ext cx="3015386" cy="365760"/>
+          </a:xfrm>
+          <a:prstGeom prst="rect">
+            <a:avLst/>
+          </a:prstGeom>
+          <a:noFill/>
+          <a:ln/>
+        </p:spPr>
+        <p:txBody>
+          <a:bodyPr wrap="square" lIns="0" tIns="0" rIns="0" bIns="0" rtlCol="0" anchor="t"/>
+          <a:lstStyle/>
+          <a:p>
+            <a:pPr indent="0" marL="0">
+              <a:buNone/>
+            </a:pPr>
+            <a:r>
+              <a:rPr lang="en-US" sz="1500" b="1" dirty="0">
+                <a:solidFill>
+                  <a:srgbClr val="10161F"/>
+                </a:solidFill>
+                <a:latin typeface="Pretendard" pitchFamily="34" charset="0"/>
+                <a:ea typeface="Pretendard" pitchFamily="34" charset="-122"/>
+                <a:cs typeface="Pretendard" pitchFamily="34" charset="-120"/>
+              </a:rPr>
+              <a:t>원금 안전판 확보</a:t>
+            </a:r>
+            <a:endParaRPr lang="en-US" sz="1500" dirty="0"/>
+          </a:p>
+        </p:txBody>
+      </p:sp>
+      <p:sp>
+        <p:nvSpPr>
+          <p:cNvPr id="12" name="Shape 10"/>
+          <p:cNvSpPr/>
+          <p:nvPr/>
+        </p:nvSpPr>
+        <p:spPr>
+          <a:xfrm>
+            <a:off x="795528" y="2624328"/>
+            <a:ext cx="3015386" cy="0"/>
+          </a:xfrm>
+          <a:prstGeom prst="line">
+            <a:avLst/>
+          </a:prstGeom>
+          <a:noFill/>
+          <a:ln w="6350">
+            <a:solidFill>
+              <a:srgbClr val="CBD5E0"/>
+            </a:solidFill>
+            <a:prstDash val="solid"/>
+          </a:ln>
+        </p:spPr>
+      </p:sp>
+      <p:sp>
+        <p:nvSpPr>
+          <p:cNvPr id="13" name="Text 11"/>
+          <p:cNvSpPr/>
+          <p:nvPr/>
+        </p:nvSpPr>
+        <p:spPr>
+          <a:xfrm>
+            <a:off x="795528" y="2779776"/>
+            <a:ext cx="3015386" cy="1051560"/>
+          </a:xfrm>
+          <a:prstGeom prst="rect">
+            <a:avLst/>
+          </a:prstGeom>
+          <a:noFill/>
+          <a:ln/>
+        </p:spPr>
+        <p:txBody>
+          <a:bodyPr wrap="square" lIns="0" tIns="0" rIns="0" bIns="0" rtlCol="0" anchor="t"/>
+          <a:lstStyle/>
+          <a:p>
+            <a:pPr indent="0" marL="0">
+              <a:lnSpc>
+                <a:spcPct val="130000"/>
+              </a:lnSpc>
+              <a:buNone/>
+            </a:pPr>
+            <a:r>
+              <a:rPr lang="en-US" sz="1200" dirty="0">
+                <a:solidFill>
+                  <a:srgbClr val="10161F"/>
+                </a:solidFill>
+                <a:latin typeface="Pretendard" pitchFamily="34" charset="0"/>
+                <a:ea typeface="Pretendard" pitchFamily="34" charset="-122"/>
+                <a:cs typeface="Pretendard" pitchFamily="34" charset="-120"/>
+              </a:rPr>
+              <a:t>종로권역의 핵심 입지로, 우량한 대지 지분 가치가 하방 경직성을 강력히 지지합니다.</a:t>
+            </a:r>
+            <a:endParaRPr lang="en-US" sz="1200" dirty="0"/>
+          </a:p>
+        </p:txBody>
+      </p:sp>
+      <p:sp>
+        <p:nvSpPr>
+          <p:cNvPr id="14" name="Shape 12"/>
+          <p:cNvSpPr/>
+          <p:nvPr/>
+        </p:nvSpPr>
+        <p:spPr>
+          <a:xfrm>
+            <a:off x="4359554" y="1481328"/>
+            <a:ext cx="3472586" cy="2560320"/>
+          </a:xfrm>
+          <a:prstGeom prst="roundRect">
+            <a:avLst>
+              <a:gd name="adj" fmla="val 2857"/>
+            </a:avLst>
+          </a:prstGeom>
+          <a:solidFill>
+            <a:srgbClr val="F7FAFC"/>
+          </a:solidFill>
+          <a:ln w="10160">
+            <a:solidFill>
+              <a:srgbClr val="CBD5E0"/>
+            </a:solidFill>
+            <a:prstDash val="solid"/>
+          </a:ln>
+        </p:spPr>
+      </p:sp>
+      <p:sp>
+        <p:nvSpPr>
+          <p:cNvPr id="15" name="Shape 13"/>
+          <p:cNvSpPr/>
+          <p:nvPr/>
+        </p:nvSpPr>
+        <p:spPr>
+          <a:xfrm>
+            <a:off x="4359554" y="1481328"/>
+            <a:ext cx="3472586" cy="54864"/>
+          </a:xfrm>
+          <a:prstGeom prst="rect">
+            <a:avLst/>
+          </a:prstGeom>
+          <a:solidFill>
+            <a:srgbClr val="B98A2E"/>
+          </a:solidFill>
+          <a:ln/>
+        </p:spPr>
+      </p:sp>
+      <p:sp>
+        <p:nvSpPr>
+          <p:cNvPr id="16" name="Shape 14"/>
+          <p:cNvSpPr/>
+          <p:nvPr/>
+        </p:nvSpPr>
+        <p:spPr>
+          <a:xfrm>
+            <a:off x="4588154" y="1755648"/>
+            <a:ext cx="475488" cy="292608"/>
+          </a:xfrm>
+          <a:prstGeom prst="roundRect">
+            <a:avLst>
+              <a:gd name="adj" fmla="val 12500"/>
+            </a:avLst>
+          </a:prstGeom>
+          <a:solidFill>
+            <a:srgbClr val="D9B668"/>
+          </a:solidFill>
+          <a:ln/>
+        </p:spPr>
+      </p:sp>
+      <p:sp>
+        <p:nvSpPr>
+          <p:cNvPr id="17" name="Text 15"/>
+          <p:cNvSpPr/>
+          <p:nvPr/>
+        </p:nvSpPr>
+        <p:spPr>
+          <a:xfrm>
+            <a:off x="4588154" y="1755648"/>
+            <a:ext cx="475488" cy="292608"/>
+          </a:xfrm>
+          <a:prstGeom prst="rect">
+            <a:avLst/>
+          </a:prstGeom>
+          <a:noFill/>
+          <a:ln/>
+        </p:spPr>
+        <p:txBody>
+          <a:bodyPr wrap="square" lIns="0" tIns="0" rIns="0" bIns="0" rtlCol="0" anchor="ctr"/>
+          <a:lstStyle/>
+          <a:p>
+            <a:pPr algn="ctr" indent="0" marL="0">
+              <a:buNone/>
+            </a:pPr>
+            <a:r>
+              <a:rPr lang="en-US" sz="1100" b="1" dirty="0">
+                <a:solidFill>
+                  <a:srgbClr val="977024"/>
+                </a:solidFill>
+                <a:latin typeface="Arial" pitchFamily="34" charset="0"/>
+                <a:ea typeface="Arial" pitchFamily="34" charset="-122"/>
+                <a:cs typeface="Arial" pitchFamily="34" charset="-120"/>
+              </a:rPr>
+              <a:t>02</a:t>
+            </a:r>
+            <a:endParaRPr lang="en-US" sz="1100" dirty="0"/>
+          </a:p>
+        </p:txBody>
+      </p:sp>
+      <p:sp>
+        <p:nvSpPr>
+          <p:cNvPr id="18" name="Text 16"/>
+          <p:cNvSpPr/>
+          <p:nvPr/>
+        </p:nvSpPr>
+        <p:spPr>
+          <a:xfrm>
+            <a:off x="4588154" y="2194560"/>
+            <a:ext cx="3015386" cy="365760"/>
+          </a:xfrm>
+          <a:prstGeom prst="rect">
+            <a:avLst/>
+          </a:prstGeom>
+          <a:noFill/>
+          <a:ln/>
+        </p:spPr>
+        <p:txBody>
+          <a:bodyPr wrap="square" lIns="0" tIns="0" rIns="0" bIns="0" rtlCol="0" anchor="t"/>
+          <a:lstStyle/>
+          <a:p>
+            <a:pPr indent="0" marL="0">
+              <a:buNone/>
+            </a:pPr>
+            <a:r>
+              <a:rPr lang="en-US" sz="1500" b="1" dirty="0">
+                <a:solidFill>
+                  <a:srgbClr val="10161F"/>
+                </a:solidFill>
+                <a:latin typeface="Pretendard" pitchFamily="34" charset="0"/>
+                <a:ea typeface="Pretendard" pitchFamily="34" charset="-122"/>
+                <a:cs typeface="Pretendard" pitchFamily="34" charset="-120"/>
+              </a:rPr>
+              <a:t>확실한 월 현금흐름</a:t>
+            </a:r>
+            <a:endParaRPr lang="en-US" sz="1500" dirty="0"/>
+          </a:p>
+        </p:txBody>
+      </p:sp>
+      <p:sp>
+        <p:nvSpPr>
+          <p:cNvPr id="19" name="Shape 17"/>
+          <p:cNvSpPr/>
+          <p:nvPr/>
+        </p:nvSpPr>
+        <p:spPr>
+          <a:xfrm>
+            <a:off x="4588154" y="2624328"/>
+            <a:ext cx="3015386" cy="0"/>
+          </a:xfrm>
+          <a:prstGeom prst="line">
+            <a:avLst/>
+          </a:prstGeom>
+          <a:noFill/>
+          <a:ln w="6350">
+            <a:solidFill>
+              <a:srgbClr val="CBD5E0"/>
+            </a:solidFill>
+            <a:prstDash val="solid"/>
+          </a:ln>
+        </p:spPr>
+      </p:sp>
+      <p:sp>
+        <p:nvSpPr>
+          <p:cNvPr id="20" name="Text 18"/>
+          <p:cNvSpPr/>
+          <p:nvPr/>
+        </p:nvSpPr>
+        <p:spPr>
+          <a:xfrm>
+            <a:off x="4588154" y="2779776"/>
+            <a:ext cx="3015386" cy="1051560"/>
+          </a:xfrm>
+          <a:prstGeom prst="rect">
+            <a:avLst/>
+          </a:prstGeom>
+          <a:noFill/>
+          <a:ln/>
+        </p:spPr>
+        <p:txBody>
+          <a:bodyPr wrap="square" lIns="0" tIns="0" rIns="0" bIns="0" rtlCol="0" anchor="t"/>
+          <a:lstStyle/>
+          <a:p>
+            <a:pPr indent="0" marL="0">
+              <a:lnSpc>
+                <a:spcPct val="130000"/>
+              </a:lnSpc>
+              <a:buNone/>
+            </a:pPr>
+            <a:r>
+              <a:rPr lang="en-US" sz="1200" dirty="0">
+                <a:solidFill>
+                  <a:srgbClr val="10161F"/>
+                </a:solidFill>
+                <a:latin typeface="Pretendard" pitchFamily="34" charset="0"/>
+                <a:ea typeface="Pretendard" pitchFamily="34" charset="-122"/>
+                <a:cs typeface="Pretendard" pitchFamily="34" charset="-120"/>
+              </a:rPr>
+              <a:t>우량 테넌트 만실 운영 및 장기 임대차 구조를 기반으로 매월 안정적인 순영업소득(NOI) 창출이 기대됩니다.</a:t>
+            </a:r>
+            <a:endParaRPr lang="en-US" sz="1200" dirty="0"/>
+          </a:p>
+        </p:txBody>
+      </p:sp>
+      <p:sp>
+        <p:nvSpPr>
+          <p:cNvPr id="21" name="Shape 19"/>
+          <p:cNvSpPr/>
+          <p:nvPr/>
+        </p:nvSpPr>
+        <p:spPr>
+          <a:xfrm>
+            <a:off x="8152181" y="1481328"/>
+            <a:ext cx="3472586" cy="2560320"/>
+          </a:xfrm>
+          <a:prstGeom prst="roundRect">
+            <a:avLst>
+              <a:gd name="adj" fmla="val 2857"/>
+            </a:avLst>
+          </a:prstGeom>
+          <a:solidFill>
+            <a:srgbClr val="F7FAFC"/>
+          </a:solidFill>
+          <a:ln w="10160">
+            <a:solidFill>
+              <a:srgbClr val="CBD5E0"/>
+            </a:solidFill>
+            <a:prstDash val="solid"/>
+          </a:ln>
+        </p:spPr>
+      </p:sp>
+      <p:sp>
+        <p:nvSpPr>
+          <p:cNvPr id="22" name="Shape 20"/>
+          <p:cNvSpPr/>
+          <p:nvPr/>
+        </p:nvSpPr>
+        <p:spPr>
+          <a:xfrm>
+            <a:off x="8152181" y="1481328"/>
+            <a:ext cx="3472586" cy="54864"/>
+          </a:xfrm>
+          <a:prstGeom prst="rect">
+            <a:avLst/>
+          </a:prstGeom>
+          <a:solidFill>
+            <a:srgbClr val="B98A2E"/>
+          </a:solidFill>
+          <a:ln/>
+        </p:spPr>
+      </p:sp>
+      <p:sp>
+        <p:nvSpPr>
+          <p:cNvPr id="23" name="Shape 21"/>
+          <p:cNvSpPr/>
+          <p:nvPr/>
+        </p:nvSpPr>
+        <p:spPr>
+          <a:xfrm>
+            <a:off x="8380781" y="1755648"/>
+            <a:ext cx="475488" cy="292608"/>
+          </a:xfrm>
+          <a:prstGeom prst="roundRect">
+            <a:avLst>
+              <a:gd name="adj" fmla="val 12500"/>
+            </a:avLst>
+          </a:prstGeom>
+          <a:solidFill>
+            <a:srgbClr val="D9B668"/>
+          </a:solidFill>
+          <a:ln/>
+        </p:spPr>
+      </p:sp>
+      <p:sp>
+        <p:nvSpPr>
+          <p:cNvPr id="24" name="Text 22"/>
+          <p:cNvSpPr/>
+          <p:nvPr/>
+        </p:nvSpPr>
+        <p:spPr>
+          <a:xfrm>
+            <a:off x="8380781" y="1755648"/>
+            <a:ext cx="475488" cy="292608"/>
+          </a:xfrm>
+          <a:prstGeom prst="rect">
+            <a:avLst/>
+          </a:prstGeom>
+          <a:noFill/>
+          <a:ln/>
+        </p:spPr>
+        <p:txBody>
+          <a:bodyPr wrap="square" lIns="0" tIns="0" rIns="0" bIns="0" rtlCol="0" anchor="ctr"/>
+          <a:lstStyle/>
+          <a:p>
+            <a:pPr algn="ctr" indent="0" marL="0">
+              <a:buNone/>
+            </a:pPr>
+            <a:r>
+              <a:rPr lang="en-US" sz="1100" b="1" dirty="0">
+                <a:solidFill>
+                  <a:srgbClr val="977024"/>
+                </a:solidFill>
+                <a:latin typeface="Arial" pitchFamily="34" charset="0"/>
+                <a:ea typeface="Arial" pitchFamily="34" charset="-122"/>
+                <a:cs typeface="Arial" pitchFamily="34" charset="-120"/>
+              </a:rPr>
+              <a:t>03</a:t>
+            </a:r>
+            <a:endParaRPr lang="en-US" sz="1100" dirty="0"/>
+          </a:p>
+        </p:txBody>
+      </p:sp>
+      <p:sp>
+        <p:nvSpPr>
+          <p:cNvPr id="25" name="Text 23"/>
+          <p:cNvSpPr/>
+          <p:nvPr/>
+        </p:nvSpPr>
+        <p:spPr>
+          <a:xfrm>
+            <a:off x="8380781" y="2194560"/>
+            <a:ext cx="3015386" cy="365760"/>
+          </a:xfrm>
+          <a:prstGeom prst="rect">
+            <a:avLst/>
+          </a:prstGeom>
+          <a:noFill/>
+          <a:ln/>
+        </p:spPr>
+        <p:txBody>
+          <a:bodyPr wrap="square" lIns="0" tIns="0" rIns="0" bIns="0" rtlCol="0" anchor="t"/>
+          <a:lstStyle/>
+          <a:p>
+            <a:pPr indent="0" marL="0">
+              <a:buNone/>
+            </a:pPr>
+            <a:r>
+              <a:rPr lang="en-US" sz="1500" b="1" dirty="0">
+                <a:solidFill>
+                  <a:srgbClr val="10161F"/>
+                </a:solidFill>
+                <a:latin typeface="Pretendard" pitchFamily="34" charset="0"/>
+                <a:ea typeface="Pretendard" pitchFamily="34" charset="-122"/>
+                <a:cs typeface="Pretendard" pitchFamily="34" charset="-120"/>
+              </a:rPr>
+              <a:t>가치 상승 및 출구 전략</a:t>
+            </a:r>
+            <a:endParaRPr lang="en-US" sz="1500" dirty="0"/>
+          </a:p>
+        </p:txBody>
+      </p:sp>
+      <p:sp>
+        <p:nvSpPr>
+          <p:cNvPr id="26" name="Shape 24"/>
+          <p:cNvSpPr/>
+          <p:nvPr/>
+        </p:nvSpPr>
+        <p:spPr>
+          <a:xfrm>
+            <a:off x="8380781" y="2624328"/>
+            <a:ext cx="3015386" cy="0"/>
+          </a:xfrm>
+          <a:prstGeom prst="line">
+            <a:avLst/>
+          </a:prstGeom>
+          <a:noFill/>
+          <a:ln w="6350">
+            <a:solidFill>
+              <a:srgbClr val="CBD5E0"/>
+            </a:solidFill>
+            <a:prstDash val="solid"/>
+          </a:ln>
+        </p:spPr>
+      </p:sp>
+      <p:sp>
+        <p:nvSpPr>
+          <p:cNvPr id="27" name="Text 25"/>
+          <p:cNvSpPr/>
+          <p:nvPr/>
+        </p:nvSpPr>
+        <p:spPr>
+          <a:xfrm>
+            <a:off x="8380781" y="2779776"/>
+            <a:ext cx="3015386" cy="1051560"/>
+          </a:xfrm>
+          <a:prstGeom prst="rect">
+            <a:avLst/>
+          </a:prstGeom>
+          <a:noFill/>
+          <a:ln/>
+        </p:spPr>
+        <p:txBody>
+          <a:bodyPr wrap="square" lIns="0" tIns="0" rIns="0" bIns="0" rtlCol="0" anchor="t"/>
+          <a:lstStyle/>
+          <a:p>
+            <a:pPr indent="0" marL="0">
+              <a:lnSpc>
+                <a:spcPct val="130000"/>
+              </a:lnSpc>
+              <a:buNone/>
+            </a:pPr>
+            <a:r>
+              <a:rPr lang="en-US" sz="1200" dirty="0">
+                <a:solidFill>
+                  <a:srgbClr val="10161F"/>
+                </a:solidFill>
+                <a:latin typeface="Pretendard" pitchFamily="34" charset="0"/>
+                <a:ea typeface="Pretendard" pitchFamily="34" charset="-122"/>
+                <a:cs typeface="Pretendard" pitchFamily="34" charset="-120"/>
+              </a:rPr>
+              <a:t>현행 공법 여력을 활용한 밸류업 기회와 더불어 향후 권역 지가 상승에 따른 시세차익 실현이 유력합니다.</a:t>
+            </a:r>
+            <a:endParaRPr lang="en-US" sz="1200" dirty="0"/>
           </a:p>
         </p:txBody>
       </p:sp>
@@ -8418,10 +9250,9 @@
             <a:tbl>
               <a:tblPr/>
               <a:tblGrid>
-                <a:gridCol w="2764460"/>
-                <a:gridCol w="2764460"/>
-                <a:gridCol w="2764460"/>
-                <a:gridCol w="2764460"/>
+                <a:gridCol w="3685946"/>
+                <a:gridCol w="3685946"/>
+                <a:gridCol w="3685946"/>
               </a:tblGrid>
               <a:tr h="329184">
                 <a:tc>
@@ -8441,7 +9272,7 @@
                           <a:ea typeface="Pretendard" pitchFamily="34" charset="-122"/>
                           <a:cs typeface="Pretendard" pitchFamily="34" charset="-120"/>
                         </a:rPr>
-                        <a:t>시나리오</a:t>
+                        <a:t>유형</a:t>
                       </a:r>
                       <a:endParaRPr lang="en-US" sz="1050" dirty="0">
                         <a:latin typeface="Pretendard" charset="0"/>
@@ -8509,21 +9340,7 @@
                           <a:ea typeface="Pretendard" pitchFamily="34" charset="-122"/>
                           <a:cs typeface="Pretendard" pitchFamily="34" charset="-120"/>
                         </a:rPr>
-                        <a:t>NOI </a:t>
-                      </a:r>
-                      <a:pPr indent="0" marL="0">
-                        <a:buNone/>
-                      </a:pPr>
-                      <a:r>
-                        <a:rPr lang="en-US" sz="1050" b="1" dirty="0">
-                          <a:solidFill>
-                            <a:srgbClr val="718096"/>
-                          </a:solidFill>
-                          <a:latin typeface="Pretendard" pitchFamily="34" charset="0"/>
-                          <a:ea typeface="Pretendard" pitchFamily="34" charset="-122"/>
-                          <a:cs typeface="Pretendard" pitchFamily="34" charset="-120"/>
-                        </a:rPr>
-                        <a:t>개선</a:t>
+                        <a:t>적합도</a:t>
                       </a:r>
                       <a:endParaRPr lang="en-US" sz="1050" dirty="0">
                         <a:latin typeface="Pretendard" charset="0"/>
@@ -8591,117 +9408,7 @@
                           <a:ea typeface="Pretendard" pitchFamily="34" charset="-122"/>
                           <a:cs typeface="Pretendard" pitchFamily="34" charset="-120"/>
                         </a:rPr>
-                        <a:t>개선 </a:t>
-                      </a:r>
-                      <a:pPr indent="0" marL="0">
-                        <a:buNone/>
-                      </a:pPr>
-                      <a:r>
-                        <a:rPr lang="en-US" sz="1050" b="1" dirty="0">
-                          <a:solidFill>
-                            <a:srgbClr val="718096"/>
-                          </a:solidFill>
-                          <a:latin typeface="Pretendard" pitchFamily="34" charset="0"/>
-                          <a:ea typeface="Pretendard" pitchFamily="34" charset="-122"/>
-                          <a:cs typeface="Pretendard" pitchFamily="34" charset="-120"/>
-                        </a:rPr>
-                        <a:t>Cap </a:t>
-                      </a:r>
-                      <a:pPr indent="0" marL="0">
-                        <a:buNone/>
-                      </a:pPr>
-                      <a:r>
-                        <a:rPr lang="en-US" sz="1050" b="1" dirty="0">
-                          <a:solidFill>
-                            <a:srgbClr val="718096"/>
-                          </a:solidFill>
-                          <a:latin typeface="Pretendard" pitchFamily="34" charset="0"/>
-                          <a:ea typeface="Pretendard" pitchFamily="34" charset="-122"/>
-                          <a:cs typeface="Pretendard" pitchFamily="34" charset="-120"/>
-                        </a:rPr>
-                        <a:t>Rate</a:t>
-                      </a:r>
-                      <a:endParaRPr lang="en-US" sz="1050" dirty="0">
-                        <a:latin typeface="Pretendard" charset="0"/>
-                        <a:ea typeface="Pretendard" charset="0"/>
-                        <a:cs typeface="Pretendard" charset="0"/>
-                      </a:endParaRPr>
-                    </a:p>
-                  </a:txBody>
-                  <a:tcPr marL="50800" marR="50800" marT="25400" marB="25400" anchor="ctr">
-                    <a:lnL w="3810" cap="flat" cmpd="sng" algn="ctr">
-                      <a:solidFill>
-                        <a:srgbClr val="CBD5E0"/>
-                      </a:solidFill>
-                      <a:prstDash val="solid"/>
-                      <a:round/>
-                      <a:headEnd type="none" w="med" len="med"/>
-                      <a:tailEnd type="none" w="med" len="med"/>
-                    </a:lnL>
-                    <a:lnR w="3810" cap="flat" cmpd="sng" algn="ctr">
-                      <a:solidFill>
-                        <a:srgbClr val="CBD5E0"/>
-                      </a:solidFill>
-                      <a:prstDash val="solid"/>
-                      <a:round/>
-                      <a:headEnd type="none" w="med" len="med"/>
-                      <a:tailEnd type="none" w="med" len="med"/>
-                    </a:lnR>
-                    <a:lnT w="3810" cap="flat" cmpd="sng" algn="ctr">
-                      <a:solidFill>
-                        <a:srgbClr val="CBD5E0"/>
-                      </a:solidFill>
-                      <a:prstDash val="solid"/>
-                      <a:round/>
-                      <a:headEnd type="none" w="med" len="med"/>
-                      <a:tailEnd type="none" w="med" len="med"/>
-                    </a:lnT>
-                    <a:lnB w="3810" cap="flat" cmpd="sng" algn="ctr">
-                      <a:solidFill>
-                        <a:srgbClr val="CBD5E0"/>
-                      </a:solidFill>
-                      <a:prstDash val="solid"/>
-                      <a:round/>
-                      <a:headEnd type="none" w="med" len="med"/>
-                      <a:tailEnd type="none" w="med" len="med"/>
-                    </a:lnB>
-                    <a:solidFill>
-                      <a:srgbClr val="F7FAFC"/>
-                    </a:solidFill>
-                  </a:tcPr>
-                </a:tc>
-                <a:tc>
-                  <a:txBody>
-                    <a:bodyPr/>
-                    <a:lstStyle/>
-                    <a:p>
-                      <a:pPr indent="0" marL="0">
-                        <a:buNone/>
-                      </a:pPr>
-                      <a:r>
-                        <a:rPr lang="en-US" sz="1050" b="1" dirty="0">
-                          <a:solidFill>
-                            <a:srgbClr val="718096"/>
-                          </a:solidFill>
-                          <a:latin typeface="Pretendard" pitchFamily="34" charset="0"/>
-                          <a:ea typeface="Pretendard" pitchFamily="34" charset="-122"/>
-                          <a:cs typeface="Pretendard" pitchFamily="34" charset="-120"/>
-                        </a:rPr>
-                        <a:t>투자 </a:t>
-                      </a:r>
-                      <a:pPr indent="0" marL="0">
-                        <a:buNone/>
-                      </a:pPr>
-                      <a:r>
-                        <a:rPr lang="en-US" sz="1050" b="1" dirty="0">
-                          <a:solidFill>
-                            <a:srgbClr val="718096"/>
-                          </a:solidFill>
-                          <a:latin typeface="Pretendard" pitchFamily="34" charset="0"/>
-                          <a:ea typeface="Pretendard" pitchFamily="34" charset="-122"/>
-                          <a:cs typeface="Pretendard" pitchFamily="34" charset="-120"/>
-                        </a:rPr>
-                        <a:t>비용</a:t>
+                        <a:t>이유</a:t>
                       </a:r>
                       <a:endParaRPr lang="en-US" sz="1050" dirty="0">
                         <a:latin typeface="Pretendard" charset="0"/>
@@ -8771,49 +9478,7 @@
                           <a:ea typeface="Pretendard" pitchFamily="34" charset="-122"/>
                           <a:cs typeface="Pretendard" pitchFamily="34" charset="-120"/>
                         </a:rPr>
-                        <a:t>② </a:t>
-                      </a:r>
-                      <a:pPr indent="0" marL="0">
-                        <a:buNone/>
-                      </a:pPr>
-                      <a:r>
-                        <a:rPr lang="en-US" sz="1050" b="1" dirty="0">
-                          <a:solidFill>
-                            <a:srgbClr val="10161F"/>
-                          </a:solidFill>
-                          <a:latin typeface="Pretendard" pitchFamily="34" charset="0"/>
-                          <a:ea typeface="Pretendard" pitchFamily="34" charset="-122"/>
-                          <a:cs typeface="Pretendard" pitchFamily="34" charset="-120"/>
-                        </a:rPr>
-                        <a:t>임대료 </a:t>
-                      </a:r>
-                      <a:pPr indent="0" marL="0">
-                        <a:buNone/>
-                      </a:pPr>
-                      <a:r>
-                        <a:rPr lang="en-US" sz="1050" b="1" dirty="0">
-                          <a:solidFill>
-                            <a:srgbClr val="10161F"/>
-                          </a:solidFill>
-                          <a:latin typeface="Pretendard" pitchFamily="34" charset="0"/>
-                          <a:ea typeface="Pretendard" pitchFamily="34" charset="-122"/>
-                          <a:cs typeface="Pretendard" pitchFamily="34" charset="-120"/>
-                        </a:rPr>
-                        <a:t>현실화 </a:t>
-                      </a:r>
-                      <a:pPr indent="0" marL="0">
-                        <a:buNone/>
-                      </a:pPr>
-                      <a:r>
-                        <a:rPr lang="en-US" sz="1050" b="1" dirty="0">
-                          <a:solidFill>
-                            <a:srgbClr val="10161F"/>
-                          </a:solidFill>
-                          <a:latin typeface="Pretendard" pitchFamily="34" charset="0"/>
-                          <a:ea typeface="Pretendard" pitchFamily="34" charset="-122"/>
-                          <a:cs typeface="Pretendard" pitchFamily="34" charset="-120"/>
-                        </a:rPr>
-                        <a:t>(+5%)</a:t>
+                        <a:t>(임대수익)</a:t>
                       </a:r>
                       <a:endParaRPr lang="en-US" sz="1050" dirty="0">
                         <a:latin typeface="Pretendard" charset="0"/>
@@ -8881,49 +9546,7 @@
                           <a:ea typeface="Pretendard" pitchFamily="34" charset="-122"/>
                           <a:cs typeface="Pretendard" pitchFamily="34" charset="-120"/>
                         </a:rPr>
-                        <a:t>+약 </a:t>
-                      </a:r>
-                      <a:pPr indent="0" marL="0">
-                        <a:buNone/>
-                      </a:pPr>
-                      <a:r>
-                        <a:rPr lang="en-US" sz="1050" dirty="0">
-                          <a:solidFill>
-                            <a:srgbClr val="10161F"/>
-                          </a:solidFill>
-                          <a:latin typeface="Pretendard" pitchFamily="34" charset="0"/>
-                          <a:ea typeface="Pretendard" pitchFamily="34" charset="-122"/>
-                          <a:cs typeface="Pretendard" pitchFamily="34" charset="-120"/>
-                        </a:rPr>
-                        <a:t>0.40억 </a:t>
-                      </a:r>
-                      <a:pPr indent="0" marL="0">
-                        <a:buNone/>
-                      </a:pPr>
-                      <a:r>
-                        <a:rPr lang="en-US" sz="1050" dirty="0">
-                          <a:solidFill>
-                            <a:srgbClr val="10161F"/>
-                          </a:solidFill>
-                          <a:latin typeface="Pretendard" pitchFamily="34" charset="0"/>
-                          <a:ea typeface="Pretendard" pitchFamily="34" charset="-122"/>
-                          <a:cs typeface="Pretendard" pitchFamily="34" charset="-120"/>
-                        </a:rPr>
-                        <a:t>원 </a:t>
-                      </a:r>
-                      <a:pPr indent="0" marL="0">
-                        <a:buNone/>
-                      </a:pPr>
-                      <a:r>
-                        <a:rPr lang="en-US" sz="1050" dirty="0">
-                          <a:solidFill>
-                            <a:srgbClr val="10161F"/>
-                          </a:solidFill>
-                          <a:latin typeface="Pretendard" pitchFamily="34" charset="0"/>
-                          <a:ea typeface="Pretendard" pitchFamily="34" charset="-122"/>
-                          <a:cs typeface="Pretendard" pitchFamily="34" charset="-120"/>
-                        </a:rPr>
-                        <a:t>(+5%)</a:t>
+                        <a:t>★★★★★</a:t>
                       </a:r>
                       <a:endParaRPr lang="en-US" sz="1050" dirty="0">
                         <a:latin typeface="Pretendard" charset="0"/>
@@ -8991,62 +9614,8 @@
                           <a:ea typeface="Pretendard" pitchFamily="34" charset="-122"/>
                           <a:cs typeface="Pretendard" pitchFamily="34" charset="-120"/>
                         </a:rPr>
-                        <a:t>3.48%</a:t>
+                        <a:t>안정 </a:t>
                       </a:r>
-                      <a:endParaRPr lang="en-US" sz="1050" dirty="0">
-                        <a:latin typeface="Pretendard" charset="0"/>
-                        <a:ea typeface="Pretendard" charset="0"/>
-                        <a:cs typeface="Pretendard" charset="0"/>
-                      </a:endParaRPr>
-                    </a:p>
-                  </a:txBody>
-                  <a:tcPr marL="50800" marR="50800" marT="25400" marB="25400" anchor="ctr">
-                    <a:lnL w="3810" cap="flat" cmpd="sng" algn="ctr">
-                      <a:solidFill>
-                        <a:srgbClr val="CBD5E0"/>
-                      </a:solidFill>
-                      <a:prstDash val="solid"/>
-                      <a:round/>
-                      <a:headEnd type="none" w="med" len="med"/>
-                      <a:tailEnd type="none" w="med" len="med"/>
-                    </a:lnL>
-                    <a:lnR w="3810" cap="flat" cmpd="sng" algn="ctr">
-                      <a:solidFill>
-                        <a:srgbClr val="CBD5E0"/>
-                      </a:solidFill>
-                      <a:prstDash val="solid"/>
-                      <a:round/>
-                      <a:headEnd type="none" w="med" len="med"/>
-                      <a:tailEnd type="none" w="med" len="med"/>
-                    </a:lnR>
-                    <a:lnT w="3810" cap="flat" cmpd="sng" algn="ctr">
-                      <a:solidFill>
-                        <a:srgbClr val="CBD5E0"/>
-                      </a:solidFill>
-                      <a:prstDash val="solid"/>
-                      <a:round/>
-                      <a:headEnd type="none" w="med" len="med"/>
-                      <a:tailEnd type="none" w="med" len="med"/>
-                    </a:lnT>
-                    <a:lnB w="3810" cap="flat" cmpd="sng" algn="ctr">
-                      <a:solidFill>
-                        <a:srgbClr val="CBD5E0"/>
-                      </a:solidFill>
-                      <a:prstDash val="solid"/>
-                      <a:round/>
-                      <a:headEnd type="none" w="med" len="med"/>
-                      <a:tailEnd type="none" w="med" len="med"/>
-                    </a:lnB>
-                    <a:solidFill>
-                      <a:srgbClr val="FFFFFF"/>
-                    </a:solidFill>
-                  </a:tcPr>
-                </a:tc>
-                <a:tc>
-                  <a:txBody>
-                    <a:bodyPr/>
-                    <a:lstStyle/>
-                    <a:p>
                       <a:pPr indent="0" marL="0">
                         <a:buNone/>
                       </a:pPr>
@@ -9059,7 +9628,63 @@
                           <a:ea typeface="Pretendard" pitchFamily="34" charset="-122"/>
                           <a:cs typeface="Pretendard" pitchFamily="34" charset="-120"/>
                         </a:rPr>
-                        <a:t>불필요</a:t>
+                        <a:t>MD, </a:t>
+                      </a:r>
+                      <a:pPr indent="0" marL="0">
+                        <a:buNone/>
+                      </a:pPr>
+                      <a:r>
+                        <a:rPr lang="en-US" sz="1050" dirty="0">
+                          <a:solidFill>
+                            <a:srgbClr val="10161F"/>
+                          </a:solidFill>
+                          <a:latin typeface="Pretendard" pitchFamily="34" charset="0"/>
+                          <a:ea typeface="Pretendard" pitchFamily="34" charset="-122"/>
+                          <a:cs typeface="Pretendard" pitchFamily="34" charset="-120"/>
+                        </a:rPr>
+                        <a:t>예측 </a:t>
+                      </a:r>
+                      <a:pPr indent="0" marL="0">
+                        <a:buNone/>
+                      </a:pPr>
+                      <a:r>
+                        <a:rPr lang="en-US" sz="1050" dirty="0">
+                          <a:solidFill>
+                            <a:srgbClr val="10161F"/>
+                          </a:solidFill>
+                          <a:latin typeface="Pretendard" pitchFamily="34" charset="0"/>
+                          <a:ea typeface="Pretendard" pitchFamily="34" charset="-122"/>
+                          <a:cs typeface="Pretendard" pitchFamily="34" charset="-120"/>
+                        </a:rPr>
+                        <a:t>가능한 </a:t>
+                      </a:r>
+                      <a:pPr indent="0" marL="0">
+                        <a:buNone/>
+                      </a:pPr>
+                      <a:r>
+                        <a:rPr lang="en-US" sz="1050" dirty="0">
+                          <a:solidFill>
+                            <a:srgbClr val="10161F"/>
+                          </a:solidFill>
+                          <a:latin typeface="Pretendard" pitchFamily="34" charset="0"/>
+                          <a:ea typeface="Pretendard" pitchFamily="34" charset="-122"/>
+                          <a:cs typeface="Pretendard" pitchFamily="34" charset="-120"/>
+                        </a:rPr>
+                        <a:t>월 </a:t>
+                      </a:r>
+                      <a:pPr indent="0" marL="0">
+                        <a:buNone/>
+                      </a:pPr>
+                      <a:r>
+                        <a:rPr lang="en-US" sz="1050" dirty="0">
+                          <a:solidFill>
+                            <a:srgbClr val="10161F"/>
+                          </a:solidFill>
+                          <a:latin typeface="Pretendard" pitchFamily="34" charset="0"/>
+                          <a:ea typeface="Pretendard" pitchFamily="34" charset="-122"/>
+                          <a:cs typeface="Pretendard" pitchFamily="34" charset="-120"/>
+                        </a:rPr>
+                        <a:t>현금흐름</a:t>
                       </a:r>
                       <a:endParaRPr lang="en-US" sz="1050" dirty="0">
                         <a:latin typeface="Pretendard" charset="0"/>
@@ -9129,7 +9754,7 @@
                           <a:ea typeface="Pretendard" pitchFamily="34" charset="-122"/>
                           <a:cs typeface="Pretendard" pitchFamily="34" charset="-120"/>
                         </a:rPr>
-                        <a:t>③ </a:t>
+                        <a:t>상가 </a:t>
                       </a:r>
                       <a:pPr indent="0" marL="0">
                         <a:buNone/>
@@ -9143,7 +9768,7 @@
                           <a:ea typeface="Pretendard" pitchFamily="34" charset="-122"/>
                           <a:cs typeface="Pretendard" pitchFamily="34" charset="-120"/>
                         </a:rPr>
-                        <a:t>리모델링 </a:t>
+                        <a:t>전문 </a:t>
                       </a:r>
                       <a:pPr indent="0" marL="0">
                         <a:buNone/>
@@ -9157,7 +9782,7 @@
                           <a:ea typeface="Pretendard" pitchFamily="34" charset="-122"/>
                           <a:cs typeface="Pretendard" pitchFamily="34" charset="-120"/>
                         </a:rPr>
-                        <a:t>후 </a:t>
+                        <a:t>임대 </a:t>
                       </a:r>
                       <a:pPr indent="0" marL="0">
                         <a:buNone/>
@@ -9171,21 +9796,7 @@
                           <a:ea typeface="Pretendard" pitchFamily="34" charset="-122"/>
                           <a:cs typeface="Pretendard" pitchFamily="34" charset="-120"/>
                         </a:rPr>
-                        <a:t>임대료 </a:t>
-                      </a:r>
-                      <a:pPr indent="0" marL="0">
-                        <a:buNone/>
-                      </a:pPr>
-                      <a:r>
-                        <a:rPr lang="en-US" sz="1050" b="1" dirty="0">
-                          <a:solidFill>
-                            <a:srgbClr val="10161F"/>
-                          </a:solidFill>
-                          <a:latin typeface="Pretendard" pitchFamily="34" charset="0"/>
-                          <a:ea typeface="Pretendard" pitchFamily="34" charset="-122"/>
-                          <a:cs typeface="Pretendard" pitchFamily="34" charset="-120"/>
-                        </a:rPr>
-                        <a:t>상승</a:t>
+                        <a:t>운영사</a:t>
                       </a:r>
                       <a:endParaRPr lang="en-US" sz="1050" dirty="0">
                         <a:latin typeface="Pretendard" charset="0"/>
@@ -9253,49 +9864,7 @@
                           <a:ea typeface="Pretendard" pitchFamily="34" charset="-122"/>
                           <a:cs typeface="Pretendard" pitchFamily="34" charset="-120"/>
                         </a:rPr>
-                        <a:t>+약 </a:t>
-                      </a:r>
-                      <a:pPr indent="0" marL="0">
-                        <a:buNone/>
-                      </a:pPr>
-                      <a:r>
-                        <a:rPr lang="en-US" sz="1050" dirty="0">
-                          <a:solidFill>
-                            <a:srgbClr val="10161F"/>
-                          </a:solidFill>
-                          <a:latin typeface="Pretendard" pitchFamily="34" charset="0"/>
-                          <a:ea typeface="Pretendard" pitchFamily="34" charset="-122"/>
-                          <a:cs typeface="Pretendard" pitchFamily="34" charset="-120"/>
-                        </a:rPr>
-                        <a:t>0.64억 </a:t>
-                      </a:r>
-                      <a:pPr indent="0" marL="0">
-                        <a:buNone/>
-                      </a:pPr>
-                      <a:r>
-                        <a:rPr lang="en-US" sz="1050" dirty="0">
-                          <a:solidFill>
-                            <a:srgbClr val="10161F"/>
-                          </a:solidFill>
-                          <a:latin typeface="Pretendard" pitchFamily="34" charset="0"/>
-                          <a:ea typeface="Pretendard" pitchFamily="34" charset="-122"/>
-                          <a:cs typeface="Pretendard" pitchFamily="34" charset="-120"/>
-                        </a:rPr>
-                        <a:t>원 </a:t>
-                      </a:r>
-                      <a:pPr indent="0" marL="0">
-                        <a:buNone/>
-                      </a:pPr>
-                      <a:r>
-                        <a:rPr lang="en-US" sz="1050" dirty="0">
-                          <a:solidFill>
-                            <a:srgbClr val="10161F"/>
-                          </a:solidFill>
-                          <a:latin typeface="Pretendard" pitchFamily="34" charset="0"/>
-                          <a:ea typeface="Pretendard" pitchFamily="34" charset="-122"/>
-                          <a:cs typeface="Pretendard" pitchFamily="34" charset="-120"/>
-                        </a:rPr>
-                        <a:t>(+8%)</a:t>
+                        <a:t>★★★★</a:t>
                       </a:r>
                       <a:endParaRPr lang="en-US" sz="1050" dirty="0">
                         <a:latin typeface="Pretendard" charset="0"/>
@@ -9363,75 +9932,7 @@
                           <a:ea typeface="Pretendard" pitchFamily="34" charset="-122"/>
                           <a:cs typeface="Pretendard" pitchFamily="34" charset="-120"/>
                         </a:rPr>
-                        <a:t>3.58%</a:t>
-                      </a:r>
-                      <a:endParaRPr lang="en-US" sz="1050" dirty="0">
-                        <a:latin typeface="Pretendard" charset="0"/>
-                        <a:ea typeface="Pretendard" charset="0"/>
-                        <a:cs typeface="Pretendard" charset="0"/>
-                      </a:endParaRPr>
-                    </a:p>
-                  </a:txBody>
-                  <a:tcPr marL="50800" marR="50800" marT="25400" marB="25400" anchor="ctr">
-                    <a:lnL w="3810" cap="flat" cmpd="sng" algn="ctr">
-                      <a:solidFill>
-                        <a:srgbClr val="CBD5E0"/>
-                      </a:solidFill>
-                      <a:prstDash val="solid"/>
-                      <a:round/>
-                      <a:headEnd type="none" w="med" len="med"/>
-                      <a:tailEnd type="none" w="med" len="med"/>
-                    </a:lnL>
-                    <a:lnR w="3810" cap="flat" cmpd="sng" algn="ctr">
-                      <a:solidFill>
-                        <a:srgbClr val="CBD5E0"/>
-                      </a:solidFill>
-                      <a:prstDash val="solid"/>
-                      <a:round/>
-                      <a:headEnd type="none" w="med" len="med"/>
-                      <a:tailEnd type="none" w="med" len="med"/>
-                    </a:lnR>
-                    <a:lnT w="3810" cap="flat" cmpd="sng" algn="ctr">
-                      <a:solidFill>
-                        <a:srgbClr val="CBD5E0"/>
-                      </a:solidFill>
-                      <a:prstDash val="solid"/>
-                      <a:round/>
-                      <a:headEnd type="none" w="med" len="med"/>
-                      <a:tailEnd type="none" w="med" len="med"/>
-                    </a:lnT>
-                    <a:lnB w="3810" cap="flat" cmpd="sng" algn="ctr">
-                      <a:solidFill>
-                        <a:srgbClr val="CBD5E0"/>
-                      </a:solidFill>
-                      <a:prstDash val="solid"/>
-                      <a:round/>
-                      <a:headEnd type="none" w="med" len="med"/>
-                      <a:tailEnd type="none" w="med" len="med"/>
-                    </a:lnB>
-                    <a:solidFill>
-                      <a:srgbClr val="F7FAFC"/>
-                    </a:solidFill>
-                  </a:tcPr>
-                </a:tc>
-                <a:tc>
-                  <a:txBody>
-                    <a:bodyPr/>
-                    <a:lstStyle/>
-                    <a:p>
-                      <a:pPr indent="0" marL="0">
-                        <a:buNone/>
-                      </a:pPr>
-                      <a:r>
-                        <a:rPr lang="en-US" sz="1050" dirty="0">
-                          <a:solidFill>
-                            <a:srgbClr val="10161F"/>
-                          </a:solidFill>
-                          <a:latin typeface="Pretendard" pitchFamily="34" charset="0"/>
-                          <a:ea typeface="Pretendard" pitchFamily="34" charset="-122"/>
-                          <a:cs typeface="Pretendard" pitchFamily="34" charset="-120"/>
-                        </a:rPr>
-                        <a:t>약 </a:t>
+                        <a:t>MD </a:t>
                       </a:r>
                       <a:pPr indent="0" marL="0">
                         <a:buNone/>
@@ -9445,7 +9946,7 @@
                           <a:ea typeface="Pretendard" pitchFamily="34" charset="-122"/>
                           <a:cs typeface="Pretendard" pitchFamily="34" charset="-120"/>
                         </a:rPr>
-                        <a:t>15.00억 </a:t>
+                        <a:t>관리 </a:t>
                       </a:r>
                       <a:pPr indent="0" marL="0">
                         <a:buNone/>
@@ -9459,7 +9960,49 @@
                           <a:ea typeface="Pretendard" pitchFamily="34" charset="-122"/>
                           <a:cs typeface="Pretendard" pitchFamily="34" charset="-120"/>
                         </a:rPr>
-                        <a:t>원</a:t>
+                        <a:t>노하우 </a:t>
+                      </a:r>
+                      <a:pPr indent="0" marL="0">
+                        <a:buNone/>
+                      </a:pPr>
+                      <a:r>
+                        <a:rPr lang="en-US" sz="1050" dirty="0">
+                          <a:solidFill>
+                            <a:srgbClr val="10161F"/>
+                          </a:solidFill>
+                          <a:latin typeface="Pretendard" pitchFamily="34" charset="0"/>
+                          <a:ea typeface="Pretendard" pitchFamily="34" charset="-122"/>
+                          <a:cs typeface="Pretendard" pitchFamily="34" charset="-120"/>
+                        </a:rPr>
+                        <a:t>보유 </a:t>
+                      </a:r>
+                      <a:pPr indent="0" marL="0">
+                        <a:buNone/>
+                      </a:pPr>
+                      <a:r>
+                        <a:rPr lang="en-US" sz="1050" dirty="0">
+                          <a:solidFill>
+                            <a:srgbClr val="10161F"/>
+                          </a:solidFill>
+                          <a:latin typeface="Pretendard" pitchFamily="34" charset="0"/>
+                          <a:ea typeface="Pretendard" pitchFamily="34" charset="-122"/>
+                          <a:cs typeface="Pretendard" pitchFamily="34" charset="-120"/>
+                        </a:rPr>
+                        <a:t>시 </a:t>
+                      </a:r>
+                      <a:pPr indent="0" marL="0">
+                        <a:buNone/>
+                      </a:pPr>
+                      <a:r>
+                        <a:rPr lang="en-US" sz="1050" dirty="0">
+                          <a:solidFill>
+                            <a:srgbClr val="10161F"/>
+                          </a:solidFill>
+                          <a:latin typeface="Pretendard" pitchFamily="34" charset="0"/>
+                          <a:ea typeface="Pretendard" pitchFamily="34" charset="-122"/>
+                          <a:cs typeface="Pretendard" pitchFamily="34" charset="-120"/>
+                        </a:rPr>
+                        <a:t>최적</a:t>
                       </a:r>
                       <a:endParaRPr lang="en-US" sz="1050" dirty="0">
                         <a:latin typeface="Pretendard" charset="0"/>
@@ -9511,19 +10054,323 @@
                   </a:tcPr>
                 </a:tc>
               </a:tr>
+              <a:tr h="329184">
+                <a:tc>
+                  <a:txBody>
+                    <a:bodyPr/>
+                    <a:lstStyle/>
+                    <a:p>
+                      <a:pPr indent="0" marL="0">
+                        <a:buNone/>
+                      </a:pPr>
+                      <a:r>
+                        <a:rPr lang="en-US" sz="1050" b="1" dirty="0">
+                          <a:solidFill>
+                            <a:srgbClr val="10161F"/>
+                          </a:solidFill>
+                          <a:latin typeface="Pretendard" pitchFamily="34" charset="0"/>
+                          <a:ea typeface="Pretendard" pitchFamily="34" charset="-122"/>
+                          <a:cs typeface="Pretendard" pitchFamily="34" charset="-120"/>
+                        </a:rPr>
+                        <a:t>프랜차이즈 </a:t>
+                      </a:r>
+                      <a:pPr indent="0" marL="0">
+                        <a:buNone/>
+                      </a:pPr>
+                      <a:r>
+                        <a:rPr lang="en-US" sz="1050" b="1" dirty="0">
+                          <a:solidFill>
+                            <a:srgbClr val="10161F"/>
+                          </a:solidFill>
+                          <a:latin typeface="Pretendard" pitchFamily="34" charset="0"/>
+                          <a:ea typeface="Pretendard" pitchFamily="34" charset="-122"/>
+                          <a:cs typeface="Pretendard" pitchFamily="34" charset="-120"/>
+                        </a:rPr>
+                        <a:t>본사 </a:t>
+                      </a:r>
+                      <a:pPr indent="0" marL="0">
+                        <a:buNone/>
+                      </a:pPr>
+                      <a:r>
+                        <a:rPr lang="en-US" sz="1050" b="1" dirty="0">
+                          <a:solidFill>
+                            <a:srgbClr val="10161F"/>
+                          </a:solidFill>
+                          <a:latin typeface="Pretendard" pitchFamily="34" charset="0"/>
+                          <a:ea typeface="Pretendard" pitchFamily="34" charset="-122"/>
+                          <a:cs typeface="Pretendard" pitchFamily="34" charset="-120"/>
+                        </a:rPr>
+                        <a:t>직매장</a:t>
+                      </a:r>
+                      <a:endParaRPr lang="en-US" sz="1050" dirty="0">
+                        <a:latin typeface="Pretendard" charset="0"/>
+                        <a:ea typeface="Pretendard" charset="0"/>
+                        <a:cs typeface="Pretendard" charset="0"/>
+                      </a:endParaRPr>
+                    </a:p>
+                  </a:txBody>
+                  <a:tcPr marL="50800" marR="50800" marT="25400" marB="25400" anchor="ctr">
+                    <a:lnL w="3810" cap="flat" cmpd="sng" algn="ctr">
+                      <a:solidFill>
+                        <a:srgbClr val="CBD5E0"/>
+                      </a:solidFill>
+                      <a:prstDash val="solid"/>
+                      <a:round/>
+                      <a:headEnd type="none" w="med" len="med"/>
+                      <a:tailEnd type="none" w="med" len="med"/>
+                    </a:lnL>
+                    <a:lnR w="3810" cap="flat" cmpd="sng" algn="ctr">
+                      <a:solidFill>
+                        <a:srgbClr val="CBD5E0"/>
+                      </a:solidFill>
+                      <a:prstDash val="solid"/>
+                      <a:round/>
+                      <a:headEnd type="none" w="med" len="med"/>
+                      <a:tailEnd type="none" w="med" len="med"/>
+                    </a:lnR>
+                    <a:lnT w="3810" cap="flat" cmpd="sng" algn="ctr">
+                      <a:solidFill>
+                        <a:srgbClr val="CBD5E0"/>
+                      </a:solidFill>
+                      <a:prstDash val="solid"/>
+                      <a:round/>
+                      <a:headEnd type="none" w="med" len="med"/>
+                      <a:tailEnd type="none" w="med" len="med"/>
+                    </a:lnT>
+                    <a:lnB w="3810" cap="flat" cmpd="sng" algn="ctr">
+                      <a:solidFill>
+                        <a:srgbClr val="CBD5E0"/>
+                      </a:solidFill>
+                      <a:prstDash val="solid"/>
+                      <a:round/>
+                      <a:headEnd type="none" w="med" len="med"/>
+                      <a:tailEnd type="none" w="med" len="med"/>
+                    </a:lnB>
+                    <a:solidFill>
+                      <a:srgbClr val="FFFFFF"/>
+                    </a:solidFill>
+                  </a:tcPr>
+                </a:tc>
+                <a:tc>
+                  <a:txBody>
+                    <a:bodyPr/>
+                    <a:lstStyle/>
+                    <a:p>
+                      <a:pPr indent="0" marL="0">
+                        <a:buNone/>
+                      </a:pPr>
+                      <a:r>
+                        <a:rPr lang="en-US" sz="1050" dirty="0">
+                          <a:solidFill>
+                            <a:srgbClr val="10161F"/>
+                          </a:solidFill>
+                          <a:latin typeface="Pretendard" pitchFamily="34" charset="0"/>
+                          <a:ea typeface="Pretendard" pitchFamily="34" charset="-122"/>
+                          <a:cs typeface="Pretendard" pitchFamily="34" charset="-120"/>
+                        </a:rPr>
+                        <a:t>★★★</a:t>
+                      </a:r>
+                      <a:endParaRPr lang="en-US" sz="1050" dirty="0">
+                        <a:latin typeface="Pretendard" charset="0"/>
+                        <a:ea typeface="Pretendard" charset="0"/>
+                        <a:cs typeface="Pretendard" charset="0"/>
+                      </a:endParaRPr>
+                    </a:p>
+                  </a:txBody>
+                  <a:tcPr marL="50800" marR="50800" marT="25400" marB="25400" anchor="ctr">
+                    <a:lnL w="3810" cap="flat" cmpd="sng" algn="ctr">
+                      <a:solidFill>
+                        <a:srgbClr val="CBD5E0"/>
+                      </a:solidFill>
+                      <a:prstDash val="solid"/>
+                      <a:round/>
+                      <a:headEnd type="none" w="med" len="med"/>
+                      <a:tailEnd type="none" w="med" len="med"/>
+                    </a:lnL>
+                    <a:lnR w="3810" cap="flat" cmpd="sng" algn="ctr">
+                      <a:solidFill>
+                        <a:srgbClr val="CBD5E0"/>
+                      </a:solidFill>
+                      <a:prstDash val="solid"/>
+                      <a:round/>
+                      <a:headEnd type="none" w="med" len="med"/>
+                      <a:tailEnd type="none" w="med" len="med"/>
+                    </a:lnR>
+                    <a:lnT w="3810" cap="flat" cmpd="sng" algn="ctr">
+                      <a:solidFill>
+                        <a:srgbClr val="CBD5E0"/>
+                      </a:solidFill>
+                      <a:prstDash val="solid"/>
+                      <a:round/>
+                      <a:headEnd type="none" w="med" len="med"/>
+                      <a:tailEnd type="none" w="med" len="med"/>
+                    </a:lnT>
+                    <a:lnB w="3810" cap="flat" cmpd="sng" algn="ctr">
+                      <a:solidFill>
+                        <a:srgbClr val="CBD5E0"/>
+                      </a:solidFill>
+                      <a:prstDash val="solid"/>
+                      <a:round/>
+                      <a:headEnd type="none" w="med" len="med"/>
+                      <a:tailEnd type="none" w="med" len="med"/>
+                    </a:lnB>
+                    <a:solidFill>
+                      <a:srgbClr val="FFFFFF"/>
+                    </a:solidFill>
+                  </a:tcPr>
+                </a:tc>
+                <a:tc>
+                  <a:txBody>
+                    <a:bodyPr/>
+                    <a:lstStyle/>
+                    <a:p>
+                      <a:pPr indent="0" marL="0">
+                        <a:buNone/>
+                      </a:pPr>
+                      <a:r>
+                        <a:rPr lang="en-US" sz="1050" dirty="0">
+                          <a:solidFill>
+                            <a:srgbClr val="10161F"/>
+                          </a:solidFill>
+                          <a:latin typeface="Pretendard" pitchFamily="34" charset="0"/>
+                          <a:ea typeface="Pretendard" pitchFamily="34" charset="-122"/>
+                          <a:cs typeface="Pretendard" pitchFamily="34" charset="-120"/>
+                        </a:rPr>
+                        <a:t>브랜드 </a:t>
+                      </a:r>
+                      <a:pPr indent="0" marL="0">
+                        <a:buNone/>
+                      </a:pPr>
+                      <a:r>
+                        <a:rPr lang="en-US" sz="1050" dirty="0">
+                          <a:solidFill>
+                            <a:srgbClr val="10161F"/>
+                          </a:solidFill>
+                          <a:latin typeface="Pretendard" pitchFamily="34" charset="0"/>
+                          <a:ea typeface="Pretendard" pitchFamily="34" charset="-122"/>
+                          <a:cs typeface="Pretendard" pitchFamily="34" charset="-120"/>
+                        </a:rPr>
+                        <a:t>노출 </a:t>
+                      </a:r>
+                      <a:pPr indent="0" marL="0">
+                        <a:buNone/>
+                      </a:pPr>
+                      <a:r>
+                        <a:rPr lang="en-US" sz="1050" dirty="0">
+                          <a:solidFill>
+                            <a:srgbClr val="10161F"/>
+                          </a:solidFill>
+                          <a:latin typeface="Pretendard" pitchFamily="34" charset="0"/>
+                          <a:ea typeface="Pretendard" pitchFamily="34" charset="-122"/>
+                          <a:cs typeface="Pretendard" pitchFamily="34" charset="-120"/>
+                        </a:rPr>
+                        <a:t>+ </a:t>
+                      </a:r>
+                      <a:pPr indent="0" marL="0">
+                        <a:buNone/>
+                      </a:pPr>
+                      <a:r>
+                        <a:rPr lang="en-US" sz="1050" dirty="0">
+                          <a:solidFill>
+                            <a:srgbClr val="10161F"/>
+                          </a:solidFill>
+                          <a:latin typeface="Pretendard" pitchFamily="34" charset="0"/>
+                          <a:ea typeface="Pretendard" pitchFamily="34" charset="-122"/>
+                          <a:cs typeface="Pretendard" pitchFamily="34" charset="-120"/>
+                        </a:rPr>
+                        <a:t>직영 </a:t>
+                      </a:r>
+                      <a:pPr indent="0" marL="0">
+                        <a:buNone/>
+                      </a:pPr>
+                      <a:r>
+                        <a:rPr lang="en-US" sz="1050" dirty="0">
+                          <a:solidFill>
+                            <a:srgbClr val="10161F"/>
+                          </a:solidFill>
+                          <a:latin typeface="Pretendard" pitchFamily="34" charset="0"/>
+                          <a:ea typeface="Pretendard" pitchFamily="34" charset="-122"/>
+                          <a:cs typeface="Pretendard" pitchFamily="34" charset="-120"/>
+                        </a:rPr>
+                        <a:t>운영 </a:t>
+                      </a:r>
+                      <a:pPr indent="0" marL="0">
+                        <a:buNone/>
+                      </a:pPr>
+                      <a:r>
+                        <a:rPr lang="en-US" sz="1050" dirty="0">
+                          <a:solidFill>
+                            <a:srgbClr val="10161F"/>
+                          </a:solidFill>
+                          <a:latin typeface="Pretendard" pitchFamily="34" charset="0"/>
+                          <a:ea typeface="Pretendard" pitchFamily="34" charset="-122"/>
+                          <a:cs typeface="Pretendard" pitchFamily="34" charset="-120"/>
+                        </a:rPr>
+                        <a:t>가능</a:t>
+                      </a:r>
+                      <a:endParaRPr lang="en-US" sz="1050" dirty="0">
+                        <a:latin typeface="Pretendard" charset="0"/>
+                        <a:ea typeface="Pretendard" charset="0"/>
+                        <a:cs typeface="Pretendard" charset="0"/>
+                      </a:endParaRPr>
+                    </a:p>
+                  </a:txBody>
+                  <a:tcPr marL="50800" marR="50800" marT="25400" marB="25400" anchor="ctr">
+                    <a:lnL w="3810" cap="flat" cmpd="sng" algn="ctr">
+                      <a:solidFill>
+                        <a:srgbClr val="CBD5E0"/>
+                      </a:solidFill>
+                      <a:prstDash val="solid"/>
+                      <a:round/>
+                      <a:headEnd type="none" w="med" len="med"/>
+                      <a:tailEnd type="none" w="med" len="med"/>
+                    </a:lnL>
+                    <a:lnR w="3810" cap="flat" cmpd="sng" algn="ctr">
+                      <a:solidFill>
+                        <a:srgbClr val="CBD5E0"/>
+                      </a:solidFill>
+                      <a:prstDash val="solid"/>
+                      <a:round/>
+                      <a:headEnd type="none" w="med" len="med"/>
+                      <a:tailEnd type="none" w="med" len="med"/>
+                    </a:lnR>
+                    <a:lnT w="3810" cap="flat" cmpd="sng" algn="ctr">
+                      <a:solidFill>
+                        <a:srgbClr val="CBD5E0"/>
+                      </a:solidFill>
+                      <a:prstDash val="solid"/>
+                      <a:round/>
+                      <a:headEnd type="none" w="med" len="med"/>
+                      <a:tailEnd type="none" w="med" len="med"/>
+                    </a:lnT>
+                    <a:lnB w="3810" cap="flat" cmpd="sng" algn="ctr">
+                      <a:solidFill>
+                        <a:srgbClr val="CBD5E0"/>
+                      </a:solidFill>
+                      <a:prstDash val="solid"/>
+                      <a:round/>
+                      <a:headEnd type="none" w="med" len="med"/>
+                      <a:tailEnd type="none" w="med" len="med"/>
+                    </a:lnB>
+                    <a:solidFill>
+                      <a:srgbClr val="FFFFFF"/>
+                    </a:solidFill>
+                  </a:tcPr>
+                </a:tc>
+              </a:tr>
             </a:tbl>
           </a:graphicData>
         </a:graphic>
       </p:graphicFrame>
       <p:sp>
         <p:nvSpPr>
-          <p:cNvPr id="8" name="Shape 5"/>
-          <p:cNvSpPr/>
-          <p:nvPr/>
-        </p:nvSpPr>
-        <p:spPr>
-          <a:xfrm>
-            <a:off x="566928" y="5349240"/>
+          <p:cNvPr id="29" name="Shape 26"/>
+          <p:cNvSpPr/>
+          <p:nvPr/>
+        </p:nvSpPr>
+        <p:spPr>
+          <a:xfrm>
+            <a:off x="566928" y="5678424"/>
             <a:ext cx="11057839" cy="804672"/>
           </a:xfrm>
           <a:prstGeom prst="roundRect">
@@ -9544,13 +10391,13 @@
       </p:sp>
       <p:sp>
         <p:nvSpPr>
-          <p:cNvPr id="9" name="Text 6"/>
-          <p:cNvSpPr/>
-          <p:nvPr/>
-        </p:nvSpPr>
-        <p:spPr>
-          <a:xfrm>
-            <a:off x="749808" y="5458968"/>
+          <p:cNvPr id="30" name="Text 27"/>
+          <p:cNvSpPr/>
+          <p:nvPr/>
+        </p:nvSpPr>
+        <p:spPr>
+          <a:xfrm>
+            <a:off x="749808" y="5788152"/>
             <a:ext cx="1691640" cy="256032"/>
           </a:xfrm>
           <a:prstGeom prst="rect">
@@ -9583,13 +10430,13 @@
       </p:sp>
       <p:sp>
         <p:nvSpPr>
-          <p:cNvPr id="10" name="Text 7"/>
-          <p:cNvSpPr/>
-          <p:nvPr/>
-        </p:nvSpPr>
-        <p:spPr>
-          <a:xfrm>
-            <a:off x="2487168" y="5422392"/>
+          <p:cNvPr id="31" name="Text 28"/>
+          <p:cNvSpPr/>
+          <p:nvPr/>
+        </p:nvSpPr>
+        <p:spPr>
+          <a:xfrm>
+            <a:off x="2487168" y="5751576"/>
             <a:ext cx="8954719" cy="658368"/>
           </a:xfrm>
           <a:prstGeom prst="rect">
@@ -9617,7 +10464,7 @@
                 <a:ea typeface="Pretendard" pitchFamily="34" charset="-122"/>
                 <a:cs typeface="Pretendard" pitchFamily="34" charset="-120"/>
               </a:rPr>
-              <a:t>{"ok":true,"mocked":true,"extractedFields":{"area_signal":"역삼","asset_type":"오피스빌딩","price_band":"300억","size_signal":"3000평(약 9917.4㎡)"},"extractedFacts":{"region":"역삼","exactAddressCandidate":"역삼동 742-1","assetType":"오피스빌딩","priceText":"300억","sizeText":"3000평(약 9917.4㎡)","currentUse":"오피스","currentUseSignal":"근린생활시설","leaseSignal":"임대중","vacancySignal":"공실없음","tenantNames":["쿠팡","네이버"],"unitRentTexts":["301호: 1500만"],"sellerMotivationText":"자산 효율화","brokerNotes":["초역세권 매물"]},"detectedSensitiveFields":["exact_address","tenant_name"],"ambiguousFields":[],"warnings":[],"areaSignal":"역삼","assetType":"오피스빌딩","priceBand":"300억","sizeSignal":"3000평(약 9917.4㎡)","dealType":"매각","buildingName":"역삼 센트럴타워","exactAddress":"역삼동 742-1","totalFloorArea":9917.3,"buildYear":2015,"currentUseSignal":"근린생활시설","vacancySignal":"공실 없음","fitSummary":"초역세권 근생 빌딩으로 시행/사옥 매입에 최적화","cautionSummary":"주요 임차 업종 만기 조율 필요","hiddenFields":["exact_address","seller_motivation"],"confidence":{"areaSignal":"confirmed","assetType":"confirmed","priceBand":"ai_hypothesis","fitSummary":"ai_hypothesis"},"missingData":["sizeSignal"],"boundaryNote":"본 자료는 실거래 통계 기반 참고치입니다.","buyerType":"법인 사옥형","budgetRange":{"min":50,"max":80,"display":"50억~80억"},"preferredRegions":["강남","성수"],"assetTypes":["꼬마빌딩","사옥용"],"purchasePurpose":"사옥용 매입","mustHave":["초역세권","주차"],"niceToHave":["테라스","루프탑"],"riskTolerance":"medium","financingNote":"자본금 50% 준비","missingQuestions":["구체적인 입주 시기가 언제인가요?","선호하는 수익률이 있나요?"],"privacyNotes":["연락처 비공개"],"fitReasons":["매수자 예산(50-80억)에 부합하는 매물입니다.","요청하신 성수/강남 권역에 해당합니다."],"cautionReasons":["요청한 용도와 달리 명도 협의가 다소 필요합니다."],"recommendedNextAction":"현장 답사 제안","kakaoMessage":"안녕하세요! 요청하신 조건에 부합하는 추천 매물이 있어 안내해 드립니다. 확인해보시고 피드백 부탁드립니다.","title":"강남 역삼역 초역세권 오피스 사옥용 빌딩 매각","shortSummary":"역삼역 도보 5분 거리의 준신축급 대형 오피스빌딩입니다.","dealPoints":["초역세권","사옥 최적"],"cautionPoints":["명도 조율 필요"],"hiddenInfoNotice":["보증금 및 지번은 인가 후 확인 가능"],"gateMessage":"G1 등급 등록이 필요합니다.","kakaoText":"강남 역삼역 오피스 빌딩 매각 안내입니다.","exactUnitCandidate":"101호","floor":"1층","areaSqmText":"150㎡","spaceType":"office","depositText":"5000만","monthlyRentText":"400만","maintenanceFeeText":"50만","availableFromText":"즉시입주","leaseTermMonthsText":"24","incentivesText":"렌트프리 2개월","restrictions":[],"landlordIdentity":"김성수","currentTenant":"스타트업","vacancyReason":"이전 확장","rentNegotiation":"협의 가능","region":"성수동","areaSqm":150,"deposit":5000,"monthlyRent":400,"maintenanceFee":50,"availableFrom":"즉시입주","leaseTermMonths":24,"incentives":{"rentFreeMonths":2,"interiorSupport":"일부 인테리어 지원","freeRentDetail":"렌트프리 2개월 지원"},"shortSummaryLease":"성수역 도보 5분 거리 1층 리테일 상가 매물입니다."}</a:t>
+              <a:t>[참고] 종합 가치 제안: 종로권역 핵심 상권의 희소성 높은 우량 자산으로, 안정적인 임대 수익과 향후 공법상 밸류업 및 권역 지가 상승에 따른 자본 이득(Capital Gain)을 동시에 실현할 수 있는 전략적 매물입니다.</a:t>
             </a:r>
             <a:endParaRPr lang="en-US" sz="1100" dirty="0"/>
           </a:p>
@@ -9625,7 +10472,7 @@
       </p:sp>
       <p:sp>
         <p:nvSpPr>
-          <p:cNvPr id="11" name="Text 8"/>
+          <p:cNvPr id="32" name="Text 29"/>
           <p:cNvSpPr/>
           <p:nvPr/>
         </p:nvSpPr>
@@ -9664,7 +10511,7 @@
       </p:sp>
       <p:sp>
         <p:nvSpPr>
-          <p:cNvPr id="12" name="Text 9"/>
+          <p:cNvPr id="33" name="Text 30"/>
           <p:cNvSpPr/>
           <p:nvPr/>
         </p:nvSpPr>
@@ -9879,11 +10726,11 @@
         <p:spPr>
           <a:xfrm>
             <a:off x="566928" y="1572768"/>
-            <a:ext cx="11057839" cy="3200400"/>
+            <a:ext cx="2490140" cy="3200400"/>
           </a:xfrm>
           <a:prstGeom prst="roundRect">
             <a:avLst>
-              <a:gd name="adj" fmla="val 1714"/>
+              <a:gd name="adj" fmla="val 2203"/>
             </a:avLst>
           </a:prstGeom>
           <a:solidFill>
@@ -9965,7 +10812,7 @@
         <p:spPr>
           <a:xfrm>
             <a:off x="786384" y="2304288"/>
-            <a:ext cx="10618927" cy="365760"/>
+            <a:ext cx="2051228" cy="365760"/>
           </a:xfrm>
           <a:prstGeom prst="rect">
             <a:avLst/>
@@ -9989,7 +10836,7 @@
                 <a:ea typeface="Pretendard" pitchFamily="34" charset="-122"/>
                 <a:cs typeface="Pretendard" pitchFamily="34" charset="-120"/>
               </a:rPr>
-              <a:t>{"ok"</a:t>
+              <a:t>초기 관심 표명 → 담당자 연락</a:t>
             </a:r>
             <a:endParaRPr lang="en-US" sz="1600" dirty="0"/>
           </a:p>
@@ -10004,7 +10851,7 @@
         <p:spPr>
           <a:xfrm>
             <a:off x="786384" y="2761488"/>
-            <a:ext cx="10618927" cy="1828800"/>
+            <a:ext cx="2051228" cy="1828800"/>
           </a:xfrm>
           <a:prstGeom prst="rect">
             <a:avLst/>
@@ -10019,8 +10866,147 @@
             <a:pPr indent="0" marL="0">
               <a:buNone/>
             </a:pPr>
-            <a:r>
-              <a:rPr lang="en-US" sz="1100" dirty="0">
+            <a:endParaRPr lang="en-US" sz="1100" dirty="0"/>
+          </a:p>
+        </p:txBody>
+      </p:sp>
+      <p:sp>
+        <p:nvSpPr>
+          <p:cNvPr id="11" name="Shape 9"/>
+          <p:cNvSpPr/>
+          <p:nvPr/>
+        </p:nvSpPr>
+        <p:spPr>
+          <a:xfrm>
+            <a:off x="3148508" y="3035808"/>
+            <a:ext cx="182880" cy="274320"/>
+          </a:xfrm>
+          <a:prstGeom prst="rightArrow">
+            <a:avLst/>
+          </a:prstGeom>
+          <a:solidFill>
+            <a:srgbClr val="CBD5E0"/>
+          </a:solidFill>
+          <a:ln w="6350">
+            <a:solidFill>
+              <a:srgbClr val="718096"/>
+            </a:solidFill>
+            <a:prstDash val="solid"/>
+          </a:ln>
+        </p:spPr>
+      </p:sp>
+      <p:sp>
+        <p:nvSpPr>
+          <p:cNvPr id="12" name="Shape 10"/>
+          <p:cNvSpPr/>
+          <p:nvPr/>
+        </p:nvSpPr>
+        <p:spPr>
+          <a:xfrm>
+            <a:off x="3422828" y="1572768"/>
+            <a:ext cx="2490140" cy="3200400"/>
+          </a:xfrm>
+          <a:prstGeom prst="roundRect">
+            <a:avLst>
+              <a:gd name="adj" fmla="val 2203"/>
+            </a:avLst>
+          </a:prstGeom>
+          <a:solidFill>
+            <a:srgbClr val="F7FAFC"/>
+          </a:solidFill>
+          <a:ln w="6350">
+            <a:solidFill>
+              <a:srgbClr val="CBD5E0"/>
+            </a:solidFill>
+            <a:prstDash val="solid"/>
+          </a:ln>
+        </p:spPr>
+      </p:sp>
+      <p:sp>
+        <p:nvSpPr>
+          <p:cNvPr id="13" name="Shape 11"/>
+          <p:cNvSpPr/>
+          <p:nvPr/>
+        </p:nvSpPr>
+        <p:spPr>
+          <a:xfrm>
+            <a:off x="3642284" y="1792224"/>
+            <a:ext cx="384048" cy="384048"/>
+          </a:xfrm>
+          <a:prstGeom prst="ellipse">
+            <a:avLst/>
+          </a:prstGeom>
+          <a:solidFill>
+            <a:srgbClr val="B98A2E"/>
+          </a:solidFill>
+          <a:ln/>
+        </p:spPr>
+      </p:sp>
+      <p:sp>
+        <p:nvSpPr>
+          <p:cNvPr id="14" name="Text 12"/>
+          <p:cNvSpPr/>
+          <p:nvPr/>
+        </p:nvSpPr>
+        <p:spPr>
+          <a:xfrm>
+            <a:off x="3642284" y="1792224"/>
+            <a:ext cx="384048" cy="384048"/>
+          </a:xfrm>
+          <a:prstGeom prst="rect">
+            <a:avLst/>
+          </a:prstGeom>
+          <a:noFill/>
+          <a:ln/>
+        </p:spPr>
+        <p:txBody>
+          <a:bodyPr wrap="square" lIns="0" tIns="0" rIns="0" bIns="0" rtlCol="0" anchor="ctr"/>
+          <a:lstStyle/>
+          <a:p>
+            <a:pPr algn="ctr" indent="0" marL="0">
+              <a:buNone/>
+            </a:pPr>
+            <a:r>
+              <a:rPr lang="en-US" sz="1300" b="1" dirty="0">
+                <a:solidFill>
+                  <a:srgbClr val="FFFFFF"/>
+                </a:solidFill>
+                <a:latin typeface="Arial" pitchFamily="34" charset="0"/>
+                <a:ea typeface="Arial" pitchFamily="34" charset="-122"/>
+                <a:cs typeface="Arial" pitchFamily="34" charset="-120"/>
+              </a:rPr>
+              <a:t>STEP 2</a:t>
+            </a:r>
+            <a:endParaRPr lang="en-US" sz="1300" dirty="0"/>
+          </a:p>
+        </p:txBody>
+      </p:sp>
+      <p:sp>
+        <p:nvSpPr>
+          <p:cNvPr id="15" name="Text 13"/>
+          <p:cNvSpPr/>
+          <p:nvPr/>
+        </p:nvSpPr>
+        <p:spPr>
+          <a:xfrm>
+            <a:off x="3642284" y="2304288"/>
+            <a:ext cx="2051228" cy="365760"/>
+          </a:xfrm>
+          <a:prstGeom prst="rect">
+            <a:avLst/>
+          </a:prstGeom>
+          <a:noFill/>
+          <a:ln/>
+        </p:spPr>
+        <p:txBody>
+          <a:bodyPr wrap="square" rtlCol="0" anchor="ctr"/>
+          <a:lstStyle/>
+          <a:p>
+            <a:pPr indent="0" marL="0">
+              <a:buNone/>
+            </a:pPr>
+            <a:r>
+              <a:rPr lang="en-US" sz="1600" b="1" dirty="0">
                 <a:solidFill>
                   <a:srgbClr val="10161F"/>
                 </a:solidFill>
@@ -10028,22 +11014,122 @@
                 <a:ea typeface="Pretendard" pitchFamily="34" charset="-122"/>
                 <a:cs typeface="Pretendard" pitchFamily="34" charset="-120"/>
               </a:rPr>
-              <a:t>true,"mocked":true,"extractedFields":{"area_signal":"역삼","asset_type":"오피스빌딩","price_band":"300억","size_signal":"3000평(약 9917.4㎡)"},"extractedFacts":{"region":"역삼","exactAddressCandidate":"역삼동 742-1","assetType":"오피스빌딩","priceText":"300억","sizeText":"3000평(약 9917.4㎡)","currentUse":"오피스","currentUseSignal":"근린생활시설","leaseSignal":"임대중","vacancySignal":"공실없음","tenantNames":["쿠팡","네이버"],"unitRentTexts":["301호: 1500만"],"sellerMotivationText":"자산 효율화","brokerNotes":["초역세권 매물"]},"detectedSensitiveFields":["exact_address","tenant_name"],"ambiguousFields":[],"warnings":[],"areaSignal":"역삼","assetType":"오피스빌딩","priceBand":"300억","sizeSignal":"3000평(약 9917.4㎡)","dealType":"매각","buildingName":"역삼 센트럴타워","exactAddress":"역삼동 742-1","totalFloorArea":9917.3,"buildYear":2015,"currentUseSignal":"근린생활시설","vacancySignal":"공실 없음","fitSummary":"초역세권 근생 빌딩으로 시행/사옥 매입에 최적화","cautionSummary":"주요 임차 업종 만기 조율 필요","hiddenFields":["exact_address","seller_motivation"],"confidence":{"areaSignal":"confirmed","assetType":"confirmed","priceBand":"ai_hypothesis","fitSummary":"ai_hypothesis"},"missingData":["sizeSignal"],"boundaryNote":"본 자료는 실거래 통계 기반 참고치입니다.","buyerType":"법인 사옥형","budgetRange":{"min":50,"max":80,"display":"50억~80억"},"preferredRegions":["강남","성수"],"assetTypes":["꼬마빌딩","사옥용"],"purchasePurpose":"사옥용 매입","mustHave":["초역세권","주차"],"niceToHave":["테라스","루프탑"],"riskTolerance":"medium","financingNote":"자본금 50% 준비","missingQuestions":["구체적인 입주 시기가 언제인가요?","선호하는 수익률이 있나요?"],"privacyNotes":["연락처 비공개"],"fitReasons":["매수자 예산(50-80억)에 부합하는 매물입니다.","요청하신 성수/강남 권역에 해당합니다."],"cautionReasons":["요청한 용도와 달리 명도 협의가 다소 필요합니다."],"recommendedNextAction":"현장 답사 제안","kakaoMessage":"안녕하세요! 요청하신 조건에 부합하는 추천 매물이 있어 안내해 드립니다. 확인해보시고 피드백 부탁드립니다.","title":"강남 역삼역 초역세권 오피스 사옥용 빌딩 매각","shortSummary":"역삼역 도보 5분 거리의 준신축급 대형 오피스빌딩입니다.","dealPoints":["초역세권","사옥 최적"],"cautionPoints":["명도 조율 필요"],"hiddenInfoNotice":["보증금 및 지번은 인가 후 확인 가능"],"gateMessage":"G1 등급 등록이 필요합니다.","kakaoText":"강남 역삼역 오피스 빌딩 매각 안내입니다.","exactUnitCandidate":"101호","floor":"1층","areaSqmText":"150㎡","spaceType":"office","depositText":"5000만","monthlyRentText":"400만","maintenanceFeeText":"50만","availableFromText":"즉시입주","leaseTermMonthsText":"24","incentivesText":"렌트프리 2개월","restrictions":[],"landlordIdentity":"김성수","currentTenant":"스타트업","vacancyReason":"이전 확장","rentNegotiation":"협의 가능","region":"성수동","areaSqm":150,"deposit":5000,"monthlyRent":400,"maintenanceFee":50,"availableFrom":"즉시입주","leaseTermMonths":24,"incentives":{"rentFreeMonths":2,"interiorSupport":"일부 인테리어 지원","freeRentDetail":"렌트프리 2개월 지원"},"shortSummaryLease":"성수역 도보 5분 거리 1층 리테일 상가 매물입니다."}</a:t>
-            </a:r>
+              <a:t>NDA 체결 → 임차인 정보 및 임대차계약서 제공</a:t>
+            </a:r>
+            <a:endParaRPr lang="en-US" sz="1600" dirty="0"/>
+          </a:p>
+        </p:txBody>
+      </p:sp>
+      <p:sp>
+        <p:nvSpPr>
+          <p:cNvPr id="16" name="Text 14"/>
+          <p:cNvSpPr/>
+          <p:nvPr/>
+        </p:nvSpPr>
+        <p:spPr>
+          <a:xfrm>
+            <a:off x="3642284" y="2761488"/>
+            <a:ext cx="2051228" cy="1828800"/>
+          </a:xfrm>
+          <a:prstGeom prst="rect">
+            <a:avLst/>
+          </a:prstGeom>
+          <a:noFill/>
+          <a:ln/>
+        </p:spPr>
+        <p:txBody>
+          <a:bodyPr wrap="square" rtlCol="0" anchor="t"/>
+          <a:lstStyle/>
+          <a:p>
+            <a:pPr indent="0" marL="0">
+              <a:buNone/>
+            </a:pPr>
             <a:endParaRPr lang="en-US" sz="1100" dirty="0"/>
           </a:p>
         </p:txBody>
       </p:sp>
       <p:sp>
         <p:nvSpPr>
-          <p:cNvPr id="11" name="Text 9"/>
-          <p:cNvSpPr/>
-          <p:nvPr/>
-        </p:nvSpPr>
-        <p:spPr>
-          <a:xfrm>
-            <a:off x="566928" y="6382512"/>
-            <a:ext cx="7315200" cy="219456"/>
+          <p:cNvPr id="17" name="Shape 15"/>
+          <p:cNvSpPr/>
+          <p:nvPr/>
+        </p:nvSpPr>
+        <p:spPr>
+          <a:xfrm>
+            <a:off x="6004408" y="3035808"/>
+            <a:ext cx="182880" cy="274320"/>
+          </a:xfrm>
+          <a:prstGeom prst="rightArrow">
+            <a:avLst/>
+          </a:prstGeom>
+          <a:solidFill>
+            <a:srgbClr val="CBD5E0"/>
+          </a:solidFill>
+          <a:ln w="6350">
+            <a:solidFill>
+              <a:srgbClr val="718096"/>
+            </a:solidFill>
+            <a:prstDash val="solid"/>
+          </a:ln>
+        </p:spPr>
+      </p:sp>
+      <p:sp>
+        <p:nvSpPr>
+          <p:cNvPr id="18" name="Shape 16"/>
+          <p:cNvSpPr/>
+          <p:nvPr/>
+        </p:nvSpPr>
+        <p:spPr>
+          <a:xfrm>
+            <a:off x="6278728" y="1572768"/>
+            <a:ext cx="2490140" cy="3200400"/>
+          </a:xfrm>
+          <a:prstGeom prst="roundRect">
+            <a:avLst>
+              <a:gd name="adj" fmla="val 2203"/>
+            </a:avLst>
+          </a:prstGeom>
+          <a:solidFill>
+            <a:srgbClr val="F7FAFC"/>
+          </a:solidFill>
+          <a:ln w="6350">
+            <a:solidFill>
+              <a:srgbClr val="CBD5E0"/>
+            </a:solidFill>
+            <a:prstDash val="solid"/>
+          </a:ln>
+        </p:spPr>
+      </p:sp>
+      <p:sp>
+        <p:nvSpPr>
+          <p:cNvPr id="19" name="Shape 17"/>
+          <p:cNvSpPr/>
+          <p:nvPr/>
+        </p:nvSpPr>
+        <p:spPr>
+          <a:xfrm>
+            <a:off x="6498184" y="1792224"/>
+            <a:ext cx="384048" cy="384048"/>
+          </a:xfrm>
+          <a:prstGeom prst="ellipse">
+            <a:avLst/>
+          </a:prstGeom>
+          <a:solidFill>
+            <a:srgbClr val="B98A2E"/>
+          </a:solidFill>
+          <a:ln/>
+        </p:spPr>
+      </p:sp>
+      <p:sp>
+        <p:nvSpPr>
+          <p:cNvPr id="20" name="Text 18"/>
+          <p:cNvSpPr/>
+          <p:nvPr/>
+        </p:nvSpPr>
+        <p:spPr>
+          <a:xfrm>
+            <a:off x="6498184" y="1792224"/>
+            <a:ext cx="384048" cy="384048"/>
           </a:xfrm>
           <a:prstGeom prst="rect">
             <a:avLst/>
@@ -10055,18 +11141,302 @@
           <a:bodyPr wrap="square" lIns="0" tIns="0" rIns="0" bIns="0" rtlCol="0" anchor="ctr"/>
           <a:lstStyle/>
           <a:p>
+            <a:pPr algn="ctr" indent="0" marL="0">
+              <a:buNone/>
+            </a:pPr>
+            <a:r>
+              <a:rPr lang="en-US" sz="1300" b="1" dirty="0">
+                <a:solidFill>
+                  <a:srgbClr val="FFFFFF"/>
+                </a:solidFill>
+                <a:latin typeface="Arial" pitchFamily="34" charset="0"/>
+                <a:ea typeface="Arial" pitchFamily="34" charset="-122"/>
+                <a:cs typeface="Arial" pitchFamily="34" charset="-120"/>
+              </a:rPr>
+              <a:t>STEP 3</a:t>
+            </a:r>
+            <a:endParaRPr lang="en-US" sz="1300" dirty="0"/>
+          </a:p>
+        </p:txBody>
+      </p:sp>
+      <p:sp>
+        <p:nvSpPr>
+          <p:cNvPr id="21" name="Text 19"/>
+          <p:cNvSpPr/>
+          <p:nvPr/>
+        </p:nvSpPr>
+        <p:spPr>
+          <a:xfrm>
+            <a:off x="6498184" y="2304288"/>
+            <a:ext cx="2051228" cy="365760"/>
+          </a:xfrm>
+          <a:prstGeom prst="rect">
+            <a:avLst/>
+          </a:prstGeom>
+          <a:noFill/>
+          <a:ln/>
+        </p:spPr>
+        <p:txBody>
+          <a:bodyPr wrap="square" rtlCol="0" anchor="ctr"/>
+          <a:lstStyle/>
+          <a:p>
             <a:pPr indent="0" marL="0">
               <a:buNone/>
             </a:pPr>
             <a:r>
-              <a:rPr lang="en-US" sz="800" dirty="0">
-                <a:solidFill>
-                  <a:srgbClr val="718096"/>
+              <a:rPr lang="en-US" sz="1600" b="1" dirty="0">
+                <a:solidFill>
+                  <a:srgbClr val="10161F"/>
                 </a:solidFill>
                 <a:latin typeface="Pretendard" pitchFamily="34" charset="0"/>
                 <a:ea typeface="Pretendard" pitchFamily="34" charset="-122"/>
                 <a:cs typeface="Pretendard" pitchFamily="34" charset="-120"/>
               </a:rPr>
+              <a:t>현장 실사 일정 조율 → 건물 컨디션 및 설비 직접 확인</a:t>
+            </a:r>
+            <a:endParaRPr lang="en-US" sz="1600" dirty="0"/>
+          </a:p>
+        </p:txBody>
+      </p:sp>
+      <p:sp>
+        <p:nvSpPr>
+          <p:cNvPr id="22" name="Text 20"/>
+          <p:cNvSpPr/>
+          <p:nvPr/>
+        </p:nvSpPr>
+        <p:spPr>
+          <a:xfrm>
+            <a:off x="6498184" y="2761488"/>
+            <a:ext cx="2051228" cy="1828800"/>
+          </a:xfrm>
+          <a:prstGeom prst="rect">
+            <a:avLst/>
+          </a:prstGeom>
+          <a:noFill/>
+          <a:ln/>
+        </p:spPr>
+        <p:txBody>
+          <a:bodyPr wrap="square" rtlCol="0" anchor="t"/>
+          <a:lstStyle/>
+          <a:p>
+            <a:pPr indent="0" marL="0">
+              <a:buNone/>
+            </a:pPr>
+            <a:endParaRPr lang="en-US" sz="1100" dirty="0"/>
+          </a:p>
+        </p:txBody>
+      </p:sp>
+      <p:sp>
+        <p:nvSpPr>
+          <p:cNvPr id="23" name="Shape 21"/>
+          <p:cNvSpPr/>
+          <p:nvPr/>
+        </p:nvSpPr>
+        <p:spPr>
+          <a:xfrm>
+            <a:off x="8860307" y="3035808"/>
+            <a:ext cx="182880" cy="274320"/>
+          </a:xfrm>
+          <a:prstGeom prst="rightArrow">
+            <a:avLst/>
+          </a:prstGeom>
+          <a:solidFill>
+            <a:srgbClr val="CBD5E0"/>
+          </a:solidFill>
+          <a:ln w="6350">
+            <a:solidFill>
+              <a:srgbClr val="718096"/>
+            </a:solidFill>
+            <a:prstDash val="solid"/>
+          </a:ln>
+        </p:spPr>
+      </p:sp>
+      <p:sp>
+        <p:nvSpPr>
+          <p:cNvPr id="24" name="Shape 22"/>
+          <p:cNvSpPr/>
+          <p:nvPr/>
+        </p:nvSpPr>
+        <p:spPr>
+          <a:xfrm>
+            <a:off x="9134627" y="1572768"/>
+            <a:ext cx="2490140" cy="3200400"/>
+          </a:xfrm>
+          <a:prstGeom prst="roundRect">
+            <a:avLst>
+              <a:gd name="adj" fmla="val 2203"/>
+            </a:avLst>
+          </a:prstGeom>
+          <a:solidFill>
+            <a:srgbClr val="F7FAFC"/>
+          </a:solidFill>
+          <a:ln w="6350">
+            <a:solidFill>
+              <a:srgbClr val="CBD5E0"/>
+            </a:solidFill>
+            <a:prstDash val="solid"/>
+          </a:ln>
+        </p:spPr>
+      </p:sp>
+      <p:sp>
+        <p:nvSpPr>
+          <p:cNvPr id="25" name="Shape 23"/>
+          <p:cNvSpPr/>
+          <p:nvPr/>
+        </p:nvSpPr>
+        <p:spPr>
+          <a:xfrm>
+            <a:off x="9354083" y="1792224"/>
+            <a:ext cx="384048" cy="384048"/>
+          </a:xfrm>
+          <a:prstGeom prst="ellipse">
+            <a:avLst/>
+          </a:prstGeom>
+          <a:solidFill>
+            <a:srgbClr val="B98A2E"/>
+          </a:solidFill>
+          <a:ln/>
+        </p:spPr>
+      </p:sp>
+      <p:sp>
+        <p:nvSpPr>
+          <p:cNvPr id="26" name="Text 24"/>
+          <p:cNvSpPr/>
+          <p:nvPr/>
+        </p:nvSpPr>
+        <p:spPr>
+          <a:xfrm>
+            <a:off x="9354083" y="1792224"/>
+            <a:ext cx="384048" cy="384048"/>
+          </a:xfrm>
+          <a:prstGeom prst="rect">
+            <a:avLst/>
+          </a:prstGeom>
+          <a:noFill/>
+          <a:ln/>
+        </p:spPr>
+        <p:txBody>
+          <a:bodyPr wrap="square" lIns="0" tIns="0" rIns="0" bIns="0" rtlCol="0" anchor="ctr"/>
+          <a:lstStyle/>
+          <a:p>
+            <a:pPr algn="ctr" indent="0" marL="0">
+              <a:buNone/>
+            </a:pPr>
+            <a:r>
+              <a:rPr lang="en-US" sz="1300" b="1" dirty="0">
+                <a:solidFill>
+                  <a:srgbClr val="FFFFFF"/>
+                </a:solidFill>
+                <a:latin typeface="Arial" pitchFamily="34" charset="0"/>
+                <a:ea typeface="Arial" pitchFamily="34" charset="-122"/>
+                <a:cs typeface="Arial" pitchFamily="34" charset="-120"/>
+              </a:rPr>
+              <a:t>STEP 4</a:t>
+            </a:r>
+            <a:endParaRPr lang="en-US" sz="1300" dirty="0"/>
+          </a:p>
+        </p:txBody>
+      </p:sp>
+      <p:sp>
+        <p:nvSpPr>
+          <p:cNvPr id="27" name="Text 25"/>
+          <p:cNvSpPr/>
+          <p:nvPr/>
+        </p:nvSpPr>
+        <p:spPr>
+          <a:xfrm>
+            <a:off x="9354083" y="2304288"/>
+            <a:ext cx="2051228" cy="365760"/>
+          </a:xfrm>
+          <a:prstGeom prst="rect">
+            <a:avLst/>
+          </a:prstGeom>
+          <a:noFill/>
+          <a:ln/>
+        </p:spPr>
+        <p:txBody>
+          <a:bodyPr wrap="square" rtlCol="0" anchor="ctr"/>
+          <a:lstStyle/>
+          <a:p>
+            <a:pPr indent="0" marL="0">
+              <a:buNone/>
+            </a:pPr>
+            <a:r>
+              <a:rPr lang="en-US" sz="1600" b="1" dirty="0">
+                <a:solidFill>
+                  <a:srgbClr val="10161F"/>
+                </a:solidFill>
+                <a:latin typeface="Pretendard" pitchFamily="34" charset="0"/>
+                <a:ea typeface="Pretendard" pitchFamily="34" charset="-122"/>
+                <a:cs typeface="Pretendard" pitchFamily="34" charset="-120"/>
+              </a:rPr>
+              <a:t>LOI(투자의향서) 제출 → 가격 협의 개시</a:t>
+            </a:r>
+            <a:endParaRPr lang="en-US" sz="1600" dirty="0"/>
+          </a:p>
+        </p:txBody>
+      </p:sp>
+      <p:sp>
+        <p:nvSpPr>
+          <p:cNvPr id="28" name="Text 26"/>
+          <p:cNvSpPr/>
+          <p:nvPr/>
+        </p:nvSpPr>
+        <p:spPr>
+          <a:xfrm>
+            <a:off x="9354083" y="2761488"/>
+            <a:ext cx="2051228" cy="1828800"/>
+          </a:xfrm>
+          <a:prstGeom prst="rect">
+            <a:avLst/>
+          </a:prstGeom>
+          <a:noFill/>
+          <a:ln/>
+        </p:spPr>
+        <p:txBody>
+          <a:bodyPr wrap="square" rtlCol="0" anchor="t"/>
+          <a:lstStyle/>
+          <a:p>
+            <a:pPr indent="0" marL="0">
+              <a:buNone/>
+            </a:pPr>
+            <a:endParaRPr lang="en-US" sz="1100" dirty="0"/>
+          </a:p>
+        </p:txBody>
+      </p:sp>
+      <p:sp>
+        <p:nvSpPr>
+          <p:cNvPr id="29" name="Text 27"/>
+          <p:cNvSpPr/>
+          <p:nvPr/>
+        </p:nvSpPr>
+        <p:spPr>
+          <a:xfrm>
+            <a:off x="566928" y="6382512"/>
+            <a:ext cx="7315200" cy="219456"/>
+          </a:xfrm>
+          <a:prstGeom prst="rect">
+            <a:avLst/>
+          </a:prstGeom>
+          <a:noFill/>
+          <a:ln/>
+        </p:spPr>
+        <p:txBody>
+          <a:bodyPr wrap="square" lIns="0" tIns="0" rIns="0" bIns="0" rtlCol="0" anchor="ctr"/>
+          <a:lstStyle/>
+          <a:p>
+            <a:pPr indent="0" marL="0">
+              <a:buNone/>
+            </a:pPr>
+            <a:r>
+              <a:rPr lang="en-US" sz="800" dirty="0">
+                <a:solidFill>
+                  <a:srgbClr val="718096"/>
+                </a:solidFill>
+                <a:latin typeface="Pretendard" pitchFamily="34" charset="0"/>
+                <a:ea typeface="Pretendard" pitchFamily="34" charset="-122"/>
+                <a:cs typeface="Pretendard" pitchFamily="34" charset="-120"/>
+              </a:rPr>
               <a:t>크리딜   |   </a:t>
             </a:r>
             <a:endParaRPr lang="en-US" sz="800" dirty="0"/>
@@ -10075,7 +11445,7 @@
       </p:sp>
       <p:sp>
         <p:nvSpPr>
-          <p:cNvPr id="12" name="Text 10"/>
+          <p:cNvPr id="30" name="Text 28"/>
           <p:cNvSpPr/>
           <p:nvPr/>
         </p:nvSpPr>

--- a/docs/test/stress/e2e-outputs/trading_case15_jongro_family_basic.pptx
+++ b/docs/test/stress/e2e-outputs/trading_case15_jongro_family_basic.pptx
@@ -5160,45 +5160,6 @@
         <p:spPr>
           <a:xfrm>
             <a:off x="6053328" y="1481328"/>
-            <a:ext cx="5571439" cy="237744"/>
-          </a:xfrm>
-          <a:prstGeom prst="rect">
-            <a:avLst/>
-          </a:prstGeom>
-          <a:noFill/>
-          <a:ln/>
-        </p:spPr>
-        <p:txBody>
-          <a:bodyPr wrap="square" lIns="0" tIns="0" rIns="0" bIns="0" rtlCol="0" anchor="ctr"/>
-          <a:lstStyle/>
-          <a:p>
-            <a:pPr indent="0" marL="0">
-              <a:buNone/>
-            </a:pPr>
-            <a:r>
-              <a:rPr lang="en-US" sz="1100" b="1" dirty="0">
-                <a:solidFill>
-                  <a:srgbClr val="10161F"/>
-                </a:solidFill>
-                <a:latin typeface="Pretendard" pitchFamily="34" charset="0"/>
-                <a:ea typeface="Pretendard" pitchFamily="34" charset="-122"/>
-                <a:cs typeface="Pretendard" pitchFamily="34" charset="-120"/>
-              </a:rPr>
-              <a:t>[교통] 교통 및 도로 접근성</a:t>
-            </a:r>
-            <a:endParaRPr lang="en-US" sz="1100" dirty="0"/>
-          </a:p>
-        </p:txBody>
-      </p:sp>
-      <p:sp>
-        <p:nvSpPr>
-          <p:cNvPr id="8" name="Text 5"/>
-          <p:cNvSpPr/>
-          <p:nvPr/>
-        </p:nvSpPr>
-        <p:spPr>
-          <a:xfrm>
-            <a:off x="6053328" y="1801368"/>
             <a:ext cx="2117147" cy="493776"/>
           </a:xfrm>
           <a:prstGeom prst="rect">
@@ -5226,7 +5187,7 @@
                 <a:ea typeface="Pretendard" pitchFamily="34" charset="-122"/>
                 <a:cs typeface="Pretendard" pitchFamily="34" charset="-120"/>
               </a:rPr>
-              <a:t>교통 접근성 상세 정보는 담당 브로커를 통해 확인하</a:t>
+              <a:t>교통 접근성</a:t>
             </a:r>
             <a:endParaRPr lang="en-US" sz="1300" dirty="0"/>
           </a:p>
@@ -5234,13 +5195,13 @@
       </p:sp>
       <p:sp>
         <p:nvSpPr>
-          <p:cNvPr id="9" name="Text 6"/>
-          <p:cNvSpPr/>
-          <p:nvPr/>
-        </p:nvSpPr>
-        <p:spPr>
-          <a:xfrm>
-            <a:off x="8170475" y="1801368"/>
+          <p:cNvPr id="8" name="Text 5"/>
+          <p:cNvSpPr/>
+          <p:nvPr/>
+        </p:nvSpPr>
+        <p:spPr>
+          <a:xfrm>
+            <a:off x="8170475" y="1481328"/>
             <a:ext cx="3454292" cy="493776"/>
           </a:xfrm>
           <a:prstGeom prst="rect">
@@ -5259,70 +5220,16 @@
               </a:lnSpc>
               <a:buNone/>
             </a:pPr>
-            <a:endParaRPr lang="en-US" sz="1300" dirty="0"/>
-          </a:p>
-        </p:txBody>
-      </p:sp>
-      <p:sp>
-        <p:nvSpPr>
-          <p:cNvPr id="10" name="Shape 7"/>
-          <p:cNvSpPr/>
-          <p:nvPr/>
-        </p:nvSpPr>
-        <p:spPr>
-          <a:xfrm>
-            <a:off x="6053328" y="2295144"/>
-            <a:ext cx="5571439" cy="0"/>
-          </a:xfrm>
-          <a:prstGeom prst="line">
-            <a:avLst/>
-          </a:prstGeom>
-          <a:noFill/>
-          <a:ln w="3810">
-            <a:solidFill>
-              <a:srgbClr val="CBD5E0"/>
-            </a:solidFill>
-            <a:prstDash val="solid"/>
-          </a:ln>
-        </p:spPr>
-      </p:sp>
-      <p:sp>
-        <p:nvSpPr>
-          <p:cNvPr id="11" name="Text 8"/>
-          <p:cNvSpPr/>
-          <p:nvPr/>
-        </p:nvSpPr>
-        <p:spPr>
-          <a:xfrm>
-            <a:off x="6053328" y="2295144"/>
-            <a:ext cx="2117147" cy="493776"/>
-          </a:xfrm>
-          <a:prstGeom prst="rect">
-            <a:avLst/>
-          </a:prstGeom>
-          <a:noFill/>
-          <a:ln/>
-        </p:spPr>
-        <p:txBody>
-          <a:bodyPr wrap="square" lIns="0" tIns="0" rIns="0" bIns="0" rtlCol="0" anchor="ctr"/>
-          <a:lstStyle/>
-          <a:p>
-            <a:pPr indent="0" marL="0">
-              <a:lnSpc>
-                <a:spcPct val="120000"/>
-              </a:lnSpc>
-              <a:buNone/>
-            </a:pPr>
-            <a:r>
-              <a:rPr lang="en-US" sz="1300" dirty="0">
-                <a:solidFill>
-                  <a:srgbClr val="718096"/>
+            <a:r>
+              <a:rPr lang="en-US" sz="1300" b="1" dirty="0">
+                <a:solidFill>
+                  <a:srgbClr val="10161F"/>
                 </a:solidFill>
                 <a:latin typeface="Pretendard" pitchFamily="34" charset="0"/>
                 <a:ea typeface="Pretendard" pitchFamily="34" charset="-122"/>
                 <a:cs typeface="Pretendard" pitchFamily="34" charset="-120"/>
               </a:rPr>
-              <a:t>[건물] 주변 상권</a:t>
+              <a:t>{"ok":true,"mocked":true,"extractedFields":{"area_signal":"역삼","asset_type":"오피스빌딩","price_band":"300억","size_signal":"3000평(약 9917.</a:t>
             </a:r>
             <a:endParaRPr lang="en-US" sz="1300" dirty="0"/>
           </a:p>
@@ -5330,14 +5237,14 @@
       </p:sp>
       <p:sp>
         <p:nvSpPr>
-          <p:cNvPr id="12" name="Text 9"/>
-          <p:cNvSpPr/>
-          <p:nvPr/>
-        </p:nvSpPr>
-        <p:spPr>
-          <a:xfrm>
-            <a:off x="8170475" y="2295144"/>
-            <a:ext cx="3454292" cy="493776"/>
+          <p:cNvPr id="9" name="Text 6"/>
+          <p:cNvSpPr/>
+          <p:nvPr/>
+        </p:nvSpPr>
+        <p:spPr>
+          <a:xfrm>
+            <a:off x="566928" y="6382512"/>
+            <a:ext cx="7315200" cy="219456"/>
           </a:xfrm>
           <a:prstGeom prst="rect">
             <a:avLst/>
@@ -5350,197 +5257,98 @@
           <a:lstStyle/>
           <a:p>
             <a:pPr indent="0" marL="0">
-              <a:lnSpc>
-                <a:spcPct val="120000"/>
-              </a:lnSpc>
-              <a:buNone/>
-            </a:pPr>
-            <a:r>
-              <a:rPr lang="en-US" sz="1300" b="1" dirty="0">
-                <a:solidFill>
-                  <a:srgbClr val="10161F"/>
+              <a:buNone/>
+            </a:pPr>
+            <a:r>
+              <a:rPr lang="en-US" sz="800" dirty="0">
+                <a:solidFill>
+                  <a:srgbClr val="718096"/>
                 </a:solidFill>
                 <a:latin typeface="Pretendard" pitchFamily="34" charset="0"/>
                 <a:ea typeface="Pretendard" pitchFamily="34" charset="-122"/>
                 <a:cs typeface="Pretendard" pitchFamily="34" charset="-120"/>
               </a:rPr>
-              <a:t>종로권역 내 주요 비즈니스 및 유동인구 풍부한 상권 입지</a:t>
-            </a:r>
-            <a:endParaRPr lang="en-US" sz="1300" dirty="0"/>
-          </a:p>
-        </p:txBody>
-      </p:sp>
-      <p:sp>
-        <p:nvSpPr>
-          <p:cNvPr id="13" name="Shape 10"/>
-          <p:cNvSpPr/>
-          <p:nvPr/>
-        </p:nvSpPr>
-        <p:spPr>
-          <a:xfrm>
-            <a:off x="6053328" y="2788920"/>
-            <a:ext cx="5571439" cy="0"/>
-          </a:xfrm>
-          <a:prstGeom prst="line">
-            <a:avLst/>
-          </a:prstGeom>
-          <a:noFill/>
-          <a:ln w="3810">
-            <a:solidFill>
-              <a:srgbClr val="CBD5E0"/>
-            </a:solidFill>
-            <a:prstDash val="solid"/>
-          </a:ln>
-        </p:spPr>
-      </p:sp>
-      <p:sp>
-        <p:nvSpPr>
-          <p:cNvPr id="14" name="Text 11"/>
-          <p:cNvSpPr/>
-          <p:nvPr/>
-        </p:nvSpPr>
-        <p:spPr>
-          <a:xfrm>
-            <a:off x="6053328" y="2788920"/>
-            <a:ext cx="2117147" cy="493776"/>
-          </a:xfrm>
-          <a:prstGeom prst="rect">
-            <a:avLst/>
-          </a:prstGeom>
-          <a:noFill/>
-          <a:ln/>
-        </p:spPr>
-        <p:txBody>
-          <a:bodyPr wrap="square" lIns="0" tIns="0" rIns="0" bIns="0" rtlCol="0" anchor="ctr"/>
+              <a:t>크리딜   |   </a:t>
+            </a:r>
+            <a:endParaRPr lang="en-US" sz="800" dirty="0"/>
+          </a:p>
+        </p:txBody>
+      </p:sp>
+      <p:sp>
+        <p:nvSpPr>
+          <p:cNvPr id="10" name="Text 7"/>
+          <p:cNvSpPr/>
+          <p:nvPr/>
+        </p:nvSpPr>
+        <p:spPr>
+          <a:xfrm>
+            <a:off x="10710367" y="6382512"/>
+            <a:ext cx="914400" cy="219456"/>
+          </a:xfrm>
+          <a:prstGeom prst="rect">
+            <a:avLst/>
+          </a:prstGeom>
+          <a:noFill/>
+          <a:ln/>
+        </p:spPr>
+        <p:txBody>
+          <a:bodyPr wrap="square" lIns="0" tIns="0" rIns="0" bIns="0" rtlCol="0" anchor="ctr"/>
+          <a:lstStyle/>
+          <a:p>
+            <a:pPr algn="r" indent="0" marL="0">
+              <a:buNone/>
+            </a:pPr>
+            <a:r>
+              <a:rPr lang="en-US" sz="900" b="1" dirty="0">
+                <a:solidFill>
+                  <a:srgbClr val="B98A2E"/>
+                </a:solidFill>
+                <a:latin typeface="Arial" pitchFamily="34" charset="0"/>
+                <a:ea typeface="Arial" pitchFamily="34" charset="-122"/>
+                <a:cs typeface="Arial" pitchFamily="34" charset="-120"/>
+              </a:rPr>
+              <a:t>3</a:t>
+            </a:r>
+            <a:endParaRPr lang="en-US" sz="900" dirty="0"/>
+          </a:p>
+        </p:txBody>
+      </p:sp>
+      <p:sp>
+        <p:nvSpPr>
+          <p:cNvPr id="11" name="Text 8"/>
+          <p:cNvSpPr/>
+          <p:nvPr/>
+        </p:nvSpPr>
+        <p:spPr>
+          <a:xfrm>
+            <a:off x="566928" y="1481328"/>
+            <a:ext cx="11057839" cy="9692640"/>
+          </a:xfrm>
+          <a:prstGeom prst="rect">
+            <a:avLst/>
+          </a:prstGeom>
+          <a:noFill/>
+          <a:ln/>
+        </p:spPr>
+        <p:txBody>
+          <a:bodyPr wrap="square" lIns="0" tIns="0" rIns="0" bIns="0" rtlCol="0" anchor="t"/>
           <a:lstStyle/>
           <a:p>
             <a:pPr indent="0" marL="0">
-              <a:lnSpc>
-                <a:spcPct val="120000"/>
-              </a:lnSpc>
-              <a:buNone/>
-            </a:pPr>
-            <a:r>
-              <a:rPr lang="en-US" sz="1300" dirty="0">
-                <a:solidFill>
-                  <a:srgbClr val="718096"/>
+              <a:buNone/>
+            </a:pPr>
+            <a:r>
+              <a:rPr lang="en-US" sz="1000" dirty="0">
+                <a:solidFill>
+                  <a:srgbClr val="10161F"/>
                 </a:solidFill>
                 <a:latin typeface="Pretendard" pitchFamily="34" charset="0"/>
                 <a:ea typeface="Pretendard" pitchFamily="34" charset="-122"/>
                 <a:cs typeface="Pretendard" pitchFamily="34" charset="-120"/>
               </a:rPr>
-              <a:t>종로권역 내 우수한 접근성과 높은 가시성을 갖춘 핵</a:t>
-            </a:r>
-            <a:endParaRPr lang="en-US" sz="1300" dirty="0"/>
-          </a:p>
-        </p:txBody>
-      </p:sp>
-      <p:sp>
-        <p:nvSpPr>
-          <p:cNvPr id="15" name="Text 12"/>
-          <p:cNvSpPr/>
-          <p:nvPr/>
-        </p:nvSpPr>
-        <p:spPr>
-          <a:xfrm>
-            <a:off x="8170475" y="2788920"/>
-            <a:ext cx="3454292" cy="493776"/>
-          </a:xfrm>
-          <a:prstGeom prst="rect">
-            <a:avLst/>
-          </a:prstGeom>
-          <a:noFill/>
-          <a:ln/>
-        </p:spPr>
-        <p:txBody>
-          <a:bodyPr wrap="square" lIns="0" tIns="0" rIns="0" bIns="0" rtlCol="0" anchor="ctr"/>
-          <a:lstStyle/>
-          <a:p>
-            <a:pPr indent="0" marL="0">
-              <a:lnSpc>
-                <a:spcPct val="120000"/>
-              </a:lnSpc>
-              <a:buNone/>
-            </a:pPr>
-            <a:endParaRPr lang="en-US" sz="1300" dirty="0"/>
-          </a:p>
-        </p:txBody>
-      </p:sp>
-      <p:sp>
-        <p:nvSpPr>
-          <p:cNvPr id="16" name="Text 13"/>
-          <p:cNvSpPr/>
-          <p:nvPr/>
-        </p:nvSpPr>
-        <p:spPr>
-          <a:xfrm>
-            <a:off x="566928" y="6382512"/>
-            <a:ext cx="7315200" cy="219456"/>
-          </a:xfrm>
-          <a:prstGeom prst="rect">
-            <a:avLst/>
-          </a:prstGeom>
-          <a:noFill/>
-          <a:ln/>
-        </p:spPr>
-        <p:txBody>
-          <a:bodyPr wrap="square" lIns="0" tIns="0" rIns="0" bIns="0" rtlCol="0" anchor="ctr"/>
-          <a:lstStyle/>
-          <a:p>
-            <a:pPr indent="0" marL="0">
-              <a:buNone/>
-            </a:pPr>
-            <a:r>
-              <a:rPr lang="en-US" sz="800" dirty="0">
-                <a:solidFill>
-                  <a:srgbClr val="718096"/>
-                </a:solidFill>
-                <a:latin typeface="Pretendard" pitchFamily="34" charset="0"/>
-                <a:ea typeface="Pretendard" pitchFamily="34" charset="-122"/>
-                <a:cs typeface="Pretendard" pitchFamily="34" charset="-120"/>
-              </a:rPr>
-              <a:t>크리딜   |   </a:t>
-            </a:r>
-            <a:endParaRPr lang="en-US" sz="800" dirty="0"/>
-          </a:p>
-        </p:txBody>
-      </p:sp>
-      <p:sp>
-        <p:nvSpPr>
-          <p:cNvPr id="17" name="Text 14"/>
-          <p:cNvSpPr/>
-          <p:nvPr/>
-        </p:nvSpPr>
-        <p:spPr>
-          <a:xfrm>
-            <a:off x="10710367" y="6382512"/>
-            <a:ext cx="914400" cy="219456"/>
-          </a:xfrm>
-          <a:prstGeom prst="rect">
-            <a:avLst/>
-          </a:prstGeom>
-          <a:noFill/>
-          <a:ln/>
-        </p:spPr>
-        <p:txBody>
-          <a:bodyPr wrap="square" lIns="0" tIns="0" rIns="0" bIns="0" rtlCol="0" anchor="ctr"/>
-          <a:lstStyle/>
-          <a:p>
-            <a:pPr algn="r" indent="0" marL="0">
-              <a:buNone/>
-            </a:pPr>
-            <a:r>
-              <a:rPr lang="en-US" sz="900" b="1" dirty="0">
-                <a:solidFill>
-                  <a:srgbClr val="B98A2E"/>
-                </a:solidFill>
-                <a:latin typeface="Arial" pitchFamily="34" charset="0"/>
-                <a:ea typeface="Arial" pitchFamily="34" charset="-122"/>
-                <a:cs typeface="Arial" pitchFamily="34" charset="-120"/>
-              </a:rPr>
-              <a:t>3</a:t>
-            </a:r>
-            <a:endParaRPr lang="en-US" sz="900" dirty="0"/>
+              <a:t>{"ok":true,"mocked":true,"extractedFields":{"area_signal":"역삼","asset_type":"오피스빌딩","price_band":"300억","size_signal":"3000평(약 9917.4㎡)"},"extractedFacts":{"region":"역삼","exactAddressCandidate":"역삼동 742-1","assetType":"오피스빌딩","priceText":"300억","sizeText":"3000평(약 9917.4㎡)","currentUse":"오피스","currentUseSignal":"근린생활시설","leaseSignal":"임대중","vacancySignal":"공실없음","tenantNames":["쿠팡","네이버"],"unitRentTexts":["301호: 1500만"],"sellerMotivationText":"자산 효율화","brokerNotes":["초역세권 매물"]},"detectedSensitiveFields":["exact_address","tenant_name"],"ambiguousFields":[],"warnings":[],"areaSignal":"역삼","assetType":"오피스빌딩","priceBand":"300억","sizeSignal":"3000평(약 9917.4㎡)","dealType":"매각","buildingName":"역삼 센트럴타워","exactAddress":"역삼동 742-1","totalFloorArea":9917.3,"buildYear":2015,"currentUseSignal":"근린생활시설","vacancySignal":"공실 없음","fitSummary":"초역세권 근생 빌딩으로 시행/사옥 매입에 최적화","cautionSummary":"주요 임차 업종 만기 조율 필요","hiddenFields":["exact_address","seller_motivation"],"confidence":{"areaSignal":"confirmed","assetType":"confirmed","priceBand":"ai_hypothesis","fitSummary":"ai_hypothesis"},"missingData":["sizeSignal"],"boundaryNote":"본 자료는 실거래 통계 기반 참고치입니다.","buyerType":"법인 사옥형","budgetRange":{"min":50,"max":80,"display":"50억~80억"},"preferredRegions":["강남","성수"],"assetTypes":["꼬마빌딩","사옥용"],"purchasePurpose":"사옥용 매입","mustHave":["초역세권","주차"],"niceToHave":["테라스","루프탑"],"riskTolerance":"medium","financingNote":"자본금 50% 준비","missingQuestions":["구체적인 입주 시기가 언제인가요?","선호하는 수익률이 있나요?"],"privacyNotes":["연락처 비공개"],"fitReasons":["매수자 예산(50-80억)에 부합하는 매물입니다.","요청하신 성수/강남 권역에 해당합니다."],"cautionReasons":["요청한 용도와 달리 명도 협의가 다소 필요합니다."],"recommendedNextAction":"현장 답사 제안","kakaoMessage":"안녕하세요! 요청하신 조건에 부합하는 추천 매물이 있어 안내해 드립니다. 확인해보시고 피드백 부탁드립니다.","title":"강남 역삼역 초역세권 오피스 사옥용 빌딩 매각","shortSummary":"역삼역 도보 5분 거리의 준신축급 대형 오피스빌딩입니다.","dealPoints":["초역세권","사옥 최적"],"cautionPoints":["명도 조율 필요"],"hiddenInfoNotice":["보증금 및 지번은 인가 후 확인 가능"],"gateMessage":"G1 등급 등록이 필요합니다.","kakaoText":"강남 역삼역 오피스 빌딩 매각 안내입니다.","exactUnitCandidate":"101호","floor":"1층","areaSqmText":"150㎡","spaceType":"office","depositText":"5000만","monthlyRentText":"400만","maintenanceFeeText":"50만","availableFromText":"즉시입주","leaseTermMonthsText":"24","incentivesText":"렌트프리 2개월","restrictions":[],"landlordIdentity":"김성수","currentTenant":"스타트업","vacancyReason":"이전 확장","rentNegotiation":"협의 가능","region":"성수동","areaSqm":150,"deposit":5000,"monthlyRent":400,"maintenanceFee":50,"availableFrom":"즉시입주","leaseTermMonths":24,"incentives":{"rentFreeMonths":2,"interiorSupport":"일부 인테리어 지원","freeRentDetail":"렌트프리 2개월 지원"},"shortSummaryLease":"성수역 도보 5분 거리 1층 리테일 상가 매물입니다."}</a:t>
+            </a:r>
+            <a:endParaRPr lang="en-US" sz="1000" dirty="0"/>
           </a:p>
         </p:txBody>
       </p:sp>
@@ -6723,1137 +6531,16 @@
           </a:p>
         </p:txBody>
       </p:sp>
-      <p:graphicFrame>
-        <p:nvGraphicFramePr>
-          <p:cNvPr id="7" name="Table 0"/>
-          <p:cNvGraphicFramePr>
-            <a:graphicFrameLocks noGrp="1"/>
-          </p:cNvGraphicFramePr>
-          <p:nvPr>
-            <p:extLst>
-              <p:ext uri="{D42A27DB-BD31-4B8C-83A1-F6EECF244321}">
-                <p14:modId xmlns:p14="http://schemas.microsoft.com/office/powerpoint/2010/main" val="1579011935"/>
-              </p:ext>
-            </p:extLst>
-          </p:nvPr>
-        </p:nvGraphicFramePr>
-        <p:xfrm>
-          <a:off x="566928" y="1645920"/>
-          <a:ext cx="11057839" cy="914400"/>
-        </p:xfrm>
-        <a:graphic>
-          <a:graphicData uri="http://schemas.openxmlformats.org/drawingml/2006/table">
-            <a:tbl>
-              <a:tblPr/>
-              <a:tblGrid>
-                <a:gridCol w="2551809"/>
-                <a:gridCol w="4253015"/>
-                <a:gridCol w="4253015"/>
-              </a:tblGrid>
-              <a:tr h="457200">
-                <a:tc>
-                  <a:txBody>
-                    <a:bodyPr/>
-                    <a:lstStyle/>
-                    <a:p>
-                      <a:pPr indent="0" marL="0">
-                        <a:buNone/>
-                      </a:pPr>
-                      <a:r>
-                        <a:rPr lang="en-US" sz="1300" b="1" dirty="0">
-                          <a:solidFill>
-                            <a:srgbClr val="718096"/>
-                          </a:solidFill>
-                          <a:latin typeface="Pretendard" pitchFamily="34" charset="0"/>
-                          <a:ea typeface="Pretendard" pitchFamily="34" charset="-122"/>
-                          <a:cs typeface="Pretendard" pitchFamily="34" charset="-120"/>
-                        </a:rPr>
-                        <a:t>구분</a:t>
-                      </a:r>
-                      <a:endParaRPr lang="en-US" sz="1300" dirty="0">
-                        <a:latin typeface="Pretendard" charset="0"/>
-                        <a:ea typeface="Pretendard" charset="0"/>
-                        <a:cs typeface="Pretendard" charset="0"/>
-                      </a:endParaRPr>
-                    </a:p>
-                  </a:txBody>
-                  <a:tcPr marL="50800" marR="50800" marT="25400" marB="25400" anchor="ctr">
-                    <a:lnL w="3810" cap="flat" cmpd="sng" algn="ctr">
-                      <a:solidFill>
-                        <a:srgbClr val="CBD5E0"/>
-                      </a:solidFill>
-                      <a:prstDash val="solid"/>
-                      <a:round/>
-                      <a:headEnd type="none" w="med" len="med"/>
-                      <a:tailEnd type="none" w="med" len="med"/>
-                    </a:lnL>
-                    <a:lnR w="3810" cap="flat" cmpd="sng" algn="ctr">
-                      <a:solidFill>
-                        <a:srgbClr val="CBD5E0"/>
-                      </a:solidFill>
-                      <a:prstDash val="solid"/>
-                      <a:round/>
-                      <a:headEnd type="none" w="med" len="med"/>
-                      <a:tailEnd type="none" w="med" len="med"/>
-                    </a:lnR>
-                    <a:lnT w="3810" cap="flat" cmpd="sng" algn="ctr">
-                      <a:solidFill>
-                        <a:srgbClr val="CBD5E0"/>
-                      </a:solidFill>
-                      <a:prstDash val="solid"/>
-                      <a:round/>
-                      <a:headEnd type="none" w="med" len="med"/>
-                      <a:tailEnd type="none" w="med" len="med"/>
-                    </a:lnT>
-                    <a:lnB w="3810" cap="flat" cmpd="sng" algn="ctr">
-                      <a:solidFill>
-                        <a:srgbClr val="CBD5E0"/>
-                      </a:solidFill>
-                      <a:prstDash val="solid"/>
-                      <a:round/>
-                      <a:headEnd type="none" w="med" len="med"/>
-                      <a:tailEnd type="none" w="med" len="med"/>
-                    </a:lnB>
-                    <a:solidFill>
-                      <a:srgbClr val="F7FAFC"/>
-                    </a:solidFill>
-                  </a:tcPr>
-                </a:tc>
-                <a:tc>
-                  <a:txBody>
-                    <a:bodyPr/>
-                    <a:lstStyle/>
-                    <a:p>
-                      <a:pPr indent="0" marL="0">
-                        <a:buNone/>
-                      </a:pPr>
-                      <a:r>
-                        <a:rPr lang="en-US" sz="1300" b="1" dirty="0">
-                          <a:solidFill>
-                            <a:srgbClr val="718096"/>
-                          </a:solidFill>
-                          <a:latin typeface="Pretendard" pitchFamily="34" charset="0"/>
-                          <a:ea typeface="Pretendard" pitchFamily="34" charset="-122"/>
-                          <a:cs typeface="Pretendard" pitchFamily="34" charset="-120"/>
-                        </a:rPr>
-                        <a:t>타겟 </a:t>
-                      </a:r>
-                      <a:pPr indent="0" marL="0">
-                        <a:buNone/>
-                      </a:pPr>
-                      <a:r>
-                        <a:rPr lang="en-US" sz="1300" b="1" dirty="0">
-                          <a:solidFill>
-                            <a:srgbClr val="718096"/>
-                          </a:solidFill>
-                          <a:latin typeface="Pretendard" pitchFamily="34" charset="0"/>
-                          <a:ea typeface="Pretendard" pitchFamily="34" charset="-122"/>
-                          <a:cs typeface="Pretendard" pitchFamily="34" charset="-120"/>
-                        </a:rPr>
-                        <a:t>수치</a:t>
-                      </a:r>
-                      <a:endParaRPr lang="en-US" sz="1300" dirty="0">
-                        <a:latin typeface="Pretendard" charset="0"/>
-                        <a:ea typeface="Pretendard" charset="0"/>
-                        <a:cs typeface="Pretendard" charset="0"/>
-                      </a:endParaRPr>
-                    </a:p>
-                  </a:txBody>
-                  <a:tcPr marL="50800" marR="50800" marT="25400" marB="25400" anchor="ctr">
-                    <a:lnL w="3810" cap="flat" cmpd="sng" algn="ctr">
-                      <a:solidFill>
-                        <a:srgbClr val="CBD5E0"/>
-                      </a:solidFill>
-                      <a:prstDash val="solid"/>
-                      <a:round/>
-                      <a:headEnd type="none" w="med" len="med"/>
-                      <a:tailEnd type="none" w="med" len="med"/>
-                    </a:lnL>
-                    <a:lnR w="3810" cap="flat" cmpd="sng" algn="ctr">
-                      <a:solidFill>
-                        <a:srgbClr val="CBD5E0"/>
-                      </a:solidFill>
-                      <a:prstDash val="solid"/>
-                      <a:round/>
-                      <a:headEnd type="none" w="med" len="med"/>
-                      <a:tailEnd type="none" w="med" len="med"/>
-                    </a:lnR>
-                    <a:lnT w="3810" cap="flat" cmpd="sng" algn="ctr">
-                      <a:solidFill>
-                        <a:srgbClr val="CBD5E0"/>
-                      </a:solidFill>
-                      <a:prstDash val="solid"/>
-                      <a:round/>
-                      <a:headEnd type="none" w="med" len="med"/>
-                      <a:tailEnd type="none" w="med" len="med"/>
-                    </a:lnT>
-                    <a:lnB w="3810" cap="flat" cmpd="sng" algn="ctr">
-                      <a:solidFill>
-                        <a:srgbClr val="CBD5E0"/>
-                      </a:solidFill>
-                      <a:prstDash val="solid"/>
-                      <a:round/>
-                      <a:headEnd type="none" w="med" len="med"/>
-                      <a:tailEnd type="none" w="med" len="med"/>
-                    </a:lnB>
-                    <a:solidFill>
-                      <a:srgbClr val="F7FAFC"/>
-                    </a:solidFill>
-                  </a:tcPr>
-                </a:tc>
-                <a:tc>
-                  <a:txBody>
-                    <a:bodyPr/>
-                    <a:lstStyle/>
-                    <a:p>
-                      <a:pPr indent="0" marL="0">
-                        <a:buNone/>
-                      </a:pPr>
-                      <a:r>
-                        <a:rPr lang="en-US" sz="1300" b="1" dirty="0">
-                          <a:solidFill>
-                            <a:srgbClr val="718096"/>
-                          </a:solidFill>
-                          <a:latin typeface="Pretendard" pitchFamily="34" charset="0"/>
-                          <a:ea typeface="Pretendard" pitchFamily="34" charset="-122"/>
-                          <a:cs typeface="Pretendard" pitchFamily="34" charset="-120"/>
-                        </a:rPr>
-                        <a:t>비고</a:t>
-                      </a:r>
-                      <a:endParaRPr lang="en-US" sz="1300" dirty="0">
-                        <a:latin typeface="Pretendard" charset="0"/>
-                        <a:ea typeface="Pretendard" charset="0"/>
-                        <a:cs typeface="Pretendard" charset="0"/>
-                      </a:endParaRPr>
-                    </a:p>
-                  </a:txBody>
-                  <a:tcPr marL="50800" marR="50800" marT="25400" marB="25400" anchor="ctr">
-                    <a:lnL w="3810" cap="flat" cmpd="sng" algn="ctr">
-                      <a:solidFill>
-                        <a:srgbClr val="CBD5E0"/>
-                      </a:solidFill>
-                      <a:prstDash val="solid"/>
-                      <a:round/>
-                      <a:headEnd type="none" w="med" len="med"/>
-                      <a:tailEnd type="none" w="med" len="med"/>
-                    </a:lnL>
-                    <a:lnR w="3810" cap="flat" cmpd="sng" algn="ctr">
-                      <a:solidFill>
-                        <a:srgbClr val="CBD5E0"/>
-                      </a:solidFill>
-                      <a:prstDash val="solid"/>
-                      <a:round/>
-                      <a:headEnd type="none" w="med" len="med"/>
-                      <a:tailEnd type="none" w="med" len="med"/>
-                    </a:lnR>
-                    <a:lnT w="3810" cap="flat" cmpd="sng" algn="ctr">
-                      <a:solidFill>
-                        <a:srgbClr val="CBD5E0"/>
-                      </a:solidFill>
-                      <a:prstDash val="solid"/>
-                      <a:round/>
-                      <a:headEnd type="none" w="med" len="med"/>
-                      <a:tailEnd type="none" w="med" len="med"/>
-                    </a:lnT>
-                    <a:lnB w="3810" cap="flat" cmpd="sng" algn="ctr">
-                      <a:solidFill>
-                        <a:srgbClr val="CBD5E0"/>
-                      </a:solidFill>
-                      <a:prstDash val="solid"/>
-                      <a:round/>
-                      <a:headEnd type="none" w="med" len="med"/>
-                      <a:tailEnd type="none" w="med" len="med"/>
-                    </a:lnB>
-                    <a:solidFill>
-                      <a:srgbClr val="F7FAFC"/>
-                    </a:solidFill>
-                  </a:tcPr>
-                </a:tc>
-              </a:tr>
-              <a:tr h="457200">
-                <a:tc>
-                  <a:txBody>
-                    <a:bodyPr/>
-                    <a:lstStyle/>
-                    <a:p>
-                      <a:pPr indent="0" marL="0">
-                        <a:buNone/>
-                      </a:pPr>
-                      <a:r>
-                        <a:rPr lang="en-US" sz="1300" b="1" dirty="0">
-                          <a:solidFill>
-                            <a:srgbClr val="10161F"/>
-                          </a:solidFill>
-                          <a:latin typeface="Pretendard" pitchFamily="34" charset="0"/>
-                          <a:ea typeface="Pretendard" pitchFamily="34" charset="-122"/>
-                          <a:cs typeface="Pretendard" pitchFamily="34" charset="-120"/>
-                        </a:rPr>
-                        <a:t>목표 </a:t>
-                      </a:r>
-                      <a:pPr indent="0" marL="0">
-                        <a:buNone/>
-                      </a:pPr>
-                      <a:r>
-                        <a:rPr lang="en-US" sz="1300" b="1" dirty="0">
-                          <a:solidFill>
-                            <a:srgbClr val="10161F"/>
-                          </a:solidFill>
-                          <a:latin typeface="Pretendard" pitchFamily="34" charset="0"/>
-                          <a:ea typeface="Pretendard" pitchFamily="34" charset="-122"/>
-                          <a:cs typeface="Pretendard" pitchFamily="34" charset="-120"/>
-                        </a:rPr>
-                        <a:t>매각가</a:t>
-                      </a:r>
-                      <a:endParaRPr lang="en-US" sz="1300" dirty="0">
-                        <a:latin typeface="Pretendard" charset="0"/>
-                        <a:ea typeface="Pretendard" charset="0"/>
-                        <a:cs typeface="Pretendard" charset="0"/>
-                      </a:endParaRPr>
-                    </a:p>
-                  </a:txBody>
-                  <a:tcPr marL="50800" marR="50800" marT="25400" marB="25400" anchor="ctr">
-                    <a:lnL w="3810" cap="flat" cmpd="sng" algn="ctr">
-                      <a:solidFill>
-                        <a:srgbClr val="CBD5E0"/>
-                      </a:solidFill>
-                      <a:prstDash val="solid"/>
-                      <a:round/>
-                      <a:headEnd type="none" w="med" len="med"/>
-                      <a:tailEnd type="none" w="med" len="med"/>
-                    </a:lnL>
-                    <a:lnR w="3810" cap="flat" cmpd="sng" algn="ctr">
-                      <a:solidFill>
-                        <a:srgbClr val="CBD5E0"/>
-                      </a:solidFill>
-                      <a:prstDash val="solid"/>
-                      <a:round/>
-                      <a:headEnd type="none" w="med" len="med"/>
-                      <a:tailEnd type="none" w="med" len="med"/>
-                    </a:lnR>
-                    <a:lnT w="3810" cap="flat" cmpd="sng" algn="ctr">
-                      <a:solidFill>
-                        <a:srgbClr val="CBD5E0"/>
-                      </a:solidFill>
-                      <a:prstDash val="solid"/>
-                      <a:round/>
-                      <a:headEnd type="none" w="med" len="med"/>
-                      <a:tailEnd type="none" w="med" len="med"/>
-                    </a:lnT>
-                    <a:lnB w="3810" cap="flat" cmpd="sng" algn="ctr">
-                      <a:solidFill>
-                        <a:srgbClr val="CBD5E0"/>
-                      </a:solidFill>
-                      <a:prstDash val="solid"/>
-                      <a:round/>
-                      <a:headEnd type="none" w="med" len="med"/>
-                      <a:tailEnd type="none" w="med" len="med"/>
-                    </a:lnB>
-                    <a:solidFill>
-                      <a:srgbClr val="FFFFFF"/>
-                    </a:solidFill>
-                  </a:tcPr>
-                </a:tc>
-                <a:tc>
-                  <a:txBody>
-                    <a:bodyPr/>
-                    <a:lstStyle/>
-                    <a:p>
-                      <a:pPr indent="0" marL="0">
-                        <a:buNone/>
-                      </a:pPr>
-                      <a:r>
-                        <a:rPr lang="en-US" sz="1300" dirty="0">
-                          <a:solidFill>
-                            <a:srgbClr val="10161F"/>
-                          </a:solidFill>
-                          <a:latin typeface="Pretendard" pitchFamily="34" charset="0"/>
-                          <a:ea typeface="Pretendard" pitchFamily="34" charset="-122"/>
-                          <a:cs typeface="Pretendard" pitchFamily="34" charset="-120"/>
-                        </a:rPr>
-                        <a:t>주변 </a:t>
-                      </a:r>
-                      <a:pPr indent="0" marL="0">
-                        <a:buNone/>
-                      </a:pPr>
-                      <a:r>
-                        <a:rPr lang="en-US" sz="1300" dirty="0">
-                          <a:solidFill>
-                            <a:srgbClr val="10161F"/>
-                          </a:solidFill>
-                          <a:latin typeface="Pretendard" pitchFamily="34" charset="0"/>
-                          <a:ea typeface="Pretendard" pitchFamily="34" charset="-122"/>
-                          <a:cs typeface="Pretendard" pitchFamily="34" charset="-120"/>
-                        </a:rPr>
-                        <a:t>시세 </a:t>
-                      </a:r>
-                      <a:pPr indent="0" marL="0">
-                        <a:buNone/>
-                      </a:pPr>
-                      <a:r>
-                        <a:rPr lang="en-US" sz="1300" dirty="0">
-                          <a:solidFill>
-                            <a:srgbClr val="10161F"/>
-                          </a:solidFill>
-                          <a:latin typeface="Pretendard" pitchFamily="34" charset="0"/>
-                          <a:ea typeface="Pretendard" pitchFamily="34" charset="-122"/>
-                          <a:cs typeface="Pretendard" pitchFamily="34" charset="-120"/>
-                        </a:rPr>
-                        <a:t>상단 </a:t>
-                      </a:r>
-                      <a:pPr indent="0" marL="0">
-                        <a:buNone/>
-                      </a:pPr>
-                      <a:r>
-                        <a:rPr lang="en-US" sz="1300" dirty="0">
-                          <a:solidFill>
-                            <a:srgbClr val="10161F"/>
-                          </a:solidFill>
-                          <a:latin typeface="Pretendard" pitchFamily="34" charset="0"/>
-                          <a:ea typeface="Pretendard" pitchFamily="34" charset="-122"/>
-                          <a:cs typeface="Pretendard" pitchFamily="34" charset="-120"/>
-                        </a:rPr>
-                        <a:t>추정</a:t>
-                      </a:r>
-                      <a:endParaRPr lang="en-US" sz="1300" dirty="0">
-                        <a:latin typeface="Pretendard" charset="0"/>
-                        <a:ea typeface="Pretendard" charset="0"/>
-                        <a:cs typeface="Pretendard" charset="0"/>
-                      </a:endParaRPr>
-                    </a:p>
-                  </a:txBody>
-                  <a:tcPr marL="50800" marR="50800" marT="25400" marB="25400" anchor="ctr">
-                    <a:lnL w="3810" cap="flat" cmpd="sng" algn="ctr">
-                      <a:solidFill>
-                        <a:srgbClr val="CBD5E0"/>
-                      </a:solidFill>
-                      <a:prstDash val="solid"/>
-                      <a:round/>
-                      <a:headEnd type="none" w="med" len="med"/>
-                      <a:tailEnd type="none" w="med" len="med"/>
-                    </a:lnL>
-                    <a:lnR w="3810" cap="flat" cmpd="sng" algn="ctr">
-                      <a:solidFill>
-                        <a:srgbClr val="CBD5E0"/>
-                      </a:solidFill>
-                      <a:prstDash val="solid"/>
-                      <a:round/>
-                      <a:headEnd type="none" w="med" len="med"/>
-                      <a:tailEnd type="none" w="med" len="med"/>
-                    </a:lnR>
-                    <a:lnT w="3810" cap="flat" cmpd="sng" algn="ctr">
-                      <a:solidFill>
-                        <a:srgbClr val="CBD5E0"/>
-                      </a:solidFill>
-                      <a:prstDash val="solid"/>
-                      <a:round/>
-                      <a:headEnd type="none" w="med" len="med"/>
-                      <a:tailEnd type="none" w="med" len="med"/>
-                    </a:lnT>
-                    <a:lnB w="3810" cap="flat" cmpd="sng" algn="ctr">
-                      <a:solidFill>
-                        <a:srgbClr val="CBD5E0"/>
-                      </a:solidFill>
-                      <a:prstDash val="solid"/>
-                      <a:round/>
-                      <a:headEnd type="none" w="med" len="med"/>
-                      <a:tailEnd type="none" w="med" len="med"/>
-                    </a:lnB>
-                    <a:solidFill>
-                      <a:srgbClr val="FFFFFF"/>
-                    </a:solidFill>
-                  </a:tcPr>
-                </a:tc>
-                <a:tc>
-                  <a:txBody>
-                    <a:bodyPr/>
-                    <a:lstStyle/>
-                    <a:p>
-                      <a:pPr indent="0" marL="0">
-                        <a:buNone/>
-                      </a:pPr>
-                      <a:r>
-                        <a:rPr lang="en-US" sz="1300" dirty="0">
-                          <a:solidFill>
-                            <a:srgbClr val="10161F"/>
-                          </a:solidFill>
-                          <a:latin typeface="Pretendard" pitchFamily="34" charset="0"/>
-                          <a:ea typeface="Pretendard" pitchFamily="34" charset="-122"/>
-                          <a:cs typeface="Pretendard" pitchFamily="34" charset="-120"/>
-                        </a:rPr>
-                        <a:t>리밸런싱 </a:t>
-                      </a:r>
-                      <a:pPr indent="0" marL="0">
-                        <a:buNone/>
-                      </a:pPr>
-                      <a:r>
-                        <a:rPr lang="en-US" sz="1300" dirty="0">
-                          <a:solidFill>
-                            <a:srgbClr val="10161F"/>
-                          </a:solidFill>
-                          <a:latin typeface="Pretendard" pitchFamily="34" charset="0"/>
-                          <a:ea typeface="Pretendard" pitchFamily="34" charset="-122"/>
-                          <a:cs typeface="Pretendard" pitchFamily="34" charset="-120"/>
-                        </a:rPr>
-                        <a:t>타겟</a:t>
-                      </a:r>
-                      <a:endParaRPr lang="en-US" sz="1300" dirty="0">
-                        <a:latin typeface="Pretendard" charset="0"/>
-                        <a:ea typeface="Pretendard" charset="0"/>
-                        <a:cs typeface="Pretendard" charset="0"/>
-                      </a:endParaRPr>
-                    </a:p>
-                  </a:txBody>
-                  <a:tcPr marL="50800" marR="50800" marT="25400" marB="25400" anchor="ctr">
-                    <a:lnL w="3810" cap="flat" cmpd="sng" algn="ctr">
-                      <a:solidFill>
-                        <a:srgbClr val="CBD5E0"/>
-                      </a:solidFill>
-                      <a:prstDash val="solid"/>
-                      <a:round/>
-                      <a:headEnd type="none" w="med" len="med"/>
-                      <a:tailEnd type="none" w="med" len="med"/>
-                    </a:lnL>
-                    <a:lnR w="3810" cap="flat" cmpd="sng" algn="ctr">
-                      <a:solidFill>
-                        <a:srgbClr val="CBD5E0"/>
-                      </a:solidFill>
-                      <a:prstDash val="solid"/>
-                      <a:round/>
-                      <a:headEnd type="none" w="med" len="med"/>
-                      <a:tailEnd type="none" w="med" len="med"/>
-                    </a:lnR>
-                    <a:lnT w="3810" cap="flat" cmpd="sng" algn="ctr">
-                      <a:solidFill>
-                        <a:srgbClr val="CBD5E0"/>
-                      </a:solidFill>
-                      <a:prstDash val="solid"/>
-                      <a:round/>
-                      <a:headEnd type="none" w="med" len="med"/>
-                      <a:tailEnd type="none" w="med" len="med"/>
-                    </a:lnT>
-                    <a:lnB w="3810" cap="flat" cmpd="sng" algn="ctr">
-                      <a:solidFill>
-                        <a:srgbClr val="CBD5E0"/>
-                      </a:solidFill>
-                      <a:prstDash val="solid"/>
-                      <a:round/>
-                      <a:headEnd type="none" w="med" len="med"/>
-                      <a:tailEnd type="none" w="med" len="med"/>
-                    </a:lnB>
-                    <a:solidFill>
-                      <a:srgbClr val="FFFFFF"/>
-                    </a:solidFill>
-                  </a:tcPr>
-                </a:tc>
-              </a:tr>
-              <a:tr h="457200">
-                <a:tc>
-                  <a:txBody>
-                    <a:bodyPr/>
-                    <a:lstStyle/>
-                    <a:p>
-                      <a:pPr indent="0" marL="0">
-                        <a:buNone/>
-                      </a:pPr>
-                      <a:r>
-                        <a:rPr lang="en-US" sz="1300" b="1" dirty="0">
-                          <a:solidFill>
-                            <a:srgbClr val="10161F"/>
-                          </a:solidFill>
-                          <a:latin typeface="Pretendard" pitchFamily="34" charset="0"/>
-                          <a:ea typeface="Pretendard" pitchFamily="34" charset="-122"/>
-                          <a:cs typeface="Pretendard" pitchFamily="34" charset="-120"/>
-                        </a:rPr>
-                        <a:t>목표 </a:t>
-                      </a:r>
-                      <a:pPr indent="0" marL="0">
-                        <a:buNone/>
-                      </a:pPr>
-                      <a:r>
-                        <a:rPr lang="en-US" sz="1300" b="1" dirty="0">
-                          <a:solidFill>
-                            <a:srgbClr val="10161F"/>
-                          </a:solidFill>
-                          <a:latin typeface="Pretendard" pitchFamily="34" charset="0"/>
-                          <a:ea typeface="Pretendard" pitchFamily="34" charset="-122"/>
-                          <a:cs typeface="Pretendard" pitchFamily="34" charset="-120"/>
-                        </a:rPr>
-                        <a:t>시세차익</a:t>
-                      </a:r>
-                      <a:endParaRPr lang="en-US" sz="1300" dirty="0">
-                        <a:latin typeface="Pretendard" charset="0"/>
-                        <a:ea typeface="Pretendard" charset="0"/>
-                        <a:cs typeface="Pretendard" charset="0"/>
-                      </a:endParaRPr>
-                    </a:p>
-                  </a:txBody>
-                  <a:tcPr marL="50800" marR="50800" marT="25400" marB="25400" anchor="ctr">
-                    <a:lnL w="3810" cap="flat" cmpd="sng" algn="ctr">
-                      <a:solidFill>
-                        <a:srgbClr val="CBD5E0"/>
-                      </a:solidFill>
-                      <a:prstDash val="solid"/>
-                      <a:round/>
-                      <a:headEnd type="none" w="med" len="med"/>
-                      <a:tailEnd type="none" w="med" len="med"/>
-                    </a:lnL>
-                    <a:lnR w="3810" cap="flat" cmpd="sng" algn="ctr">
-                      <a:solidFill>
-                        <a:srgbClr val="CBD5E0"/>
-                      </a:solidFill>
-                      <a:prstDash val="solid"/>
-                      <a:round/>
-                      <a:headEnd type="none" w="med" len="med"/>
-                      <a:tailEnd type="none" w="med" len="med"/>
-                    </a:lnR>
-                    <a:lnT w="3810" cap="flat" cmpd="sng" algn="ctr">
-                      <a:solidFill>
-                        <a:srgbClr val="CBD5E0"/>
-                      </a:solidFill>
-                      <a:prstDash val="solid"/>
-                      <a:round/>
-                      <a:headEnd type="none" w="med" len="med"/>
-                      <a:tailEnd type="none" w="med" len="med"/>
-                    </a:lnT>
-                    <a:lnB w="3810" cap="flat" cmpd="sng" algn="ctr">
-                      <a:solidFill>
-                        <a:srgbClr val="CBD5E0"/>
-                      </a:solidFill>
-                      <a:prstDash val="solid"/>
-                      <a:round/>
-                      <a:headEnd type="none" w="med" len="med"/>
-                      <a:tailEnd type="none" w="med" len="med"/>
-                    </a:lnB>
-                    <a:solidFill>
-                      <a:srgbClr val="F7FAFC"/>
-                    </a:solidFill>
-                  </a:tcPr>
-                </a:tc>
-                <a:tc>
-                  <a:txBody>
-                    <a:bodyPr/>
-                    <a:lstStyle/>
-                    <a:p>
-                      <a:pPr indent="0" marL="0">
-                        <a:buNone/>
-                      </a:pPr>
-                      <a:r>
-                        <a:rPr lang="en-US" sz="1300" dirty="0">
-                          <a:solidFill>
-                            <a:srgbClr val="10161F"/>
-                          </a:solidFill>
-                          <a:latin typeface="Pretendard" pitchFamily="34" charset="0"/>
-                          <a:ea typeface="Pretendard" pitchFamily="34" charset="-122"/>
-                          <a:cs typeface="Pretendard" pitchFamily="34" charset="-120"/>
-                        </a:rPr>
-                        <a:t>매수 </a:t>
-                      </a:r>
-                      <a:pPr indent="0" marL="0">
-                        <a:buNone/>
-                      </a:pPr>
-                      <a:r>
-                        <a:rPr lang="en-US" sz="1300" dirty="0">
-                          <a:solidFill>
-                            <a:srgbClr val="10161F"/>
-                          </a:solidFill>
-                          <a:latin typeface="Pretendard" pitchFamily="34" charset="0"/>
-                          <a:ea typeface="Pretendard" pitchFamily="34" charset="-122"/>
-                          <a:cs typeface="Pretendard" pitchFamily="34" charset="-120"/>
-                        </a:rPr>
-                        <a:t>희망가 </a:t>
-                      </a:r>
-                      <a:pPr indent="0" marL="0">
-                        <a:buNone/>
-                      </a:pPr>
-                      <a:r>
-                        <a:rPr lang="en-US" sz="1300" dirty="0">
-                          <a:solidFill>
-                            <a:srgbClr val="10161F"/>
-                          </a:solidFill>
-                          <a:latin typeface="Pretendard" pitchFamily="34" charset="0"/>
-                          <a:ea typeface="Pretendard" pitchFamily="34" charset="-122"/>
-                          <a:cs typeface="Pretendard" pitchFamily="34" charset="-120"/>
-                        </a:rPr>
-                        <a:t>대비 </a:t>
-                      </a:r>
-                      <a:pPr indent="0" marL="0">
-                        <a:buNone/>
-                      </a:pPr>
-                      <a:r>
-                        <a:rPr lang="en-US" sz="1300" dirty="0">
-                          <a:solidFill>
-                            <a:srgbClr val="10161F"/>
-                          </a:solidFill>
-                          <a:latin typeface="Pretendard" pitchFamily="34" charset="0"/>
-                          <a:ea typeface="Pretendard" pitchFamily="34" charset="-122"/>
-                          <a:cs typeface="Pretendard" pitchFamily="34" charset="-120"/>
-                        </a:rPr>
-                        <a:t>갭</a:t>
-                      </a:r>
-                      <a:endParaRPr lang="en-US" sz="1300" dirty="0">
-                        <a:latin typeface="Pretendard" charset="0"/>
-                        <a:ea typeface="Pretendard" charset="0"/>
-                        <a:cs typeface="Pretendard" charset="0"/>
-                      </a:endParaRPr>
-                    </a:p>
-                  </a:txBody>
-                  <a:tcPr marL="50800" marR="50800" marT="25400" marB="25400" anchor="ctr">
-                    <a:lnL w="3810" cap="flat" cmpd="sng" algn="ctr">
-                      <a:solidFill>
-                        <a:srgbClr val="CBD5E0"/>
-                      </a:solidFill>
-                      <a:prstDash val="solid"/>
-                      <a:round/>
-                      <a:headEnd type="none" w="med" len="med"/>
-                      <a:tailEnd type="none" w="med" len="med"/>
-                    </a:lnL>
-                    <a:lnR w="3810" cap="flat" cmpd="sng" algn="ctr">
-                      <a:solidFill>
-                        <a:srgbClr val="CBD5E0"/>
-                      </a:solidFill>
-                      <a:prstDash val="solid"/>
-                      <a:round/>
-                      <a:headEnd type="none" w="med" len="med"/>
-                      <a:tailEnd type="none" w="med" len="med"/>
-                    </a:lnR>
-                    <a:lnT w="3810" cap="flat" cmpd="sng" algn="ctr">
-                      <a:solidFill>
-                        <a:srgbClr val="CBD5E0"/>
-                      </a:solidFill>
-                      <a:prstDash val="solid"/>
-                      <a:round/>
-                      <a:headEnd type="none" w="med" len="med"/>
-                      <a:tailEnd type="none" w="med" len="med"/>
-                    </a:lnT>
-                    <a:lnB w="3810" cap="flat" cmpd="sng" algn="ctr">
-                      <a:solidFill>
-                        <a:srgbClr val="CBD5E0"/>
-                      </a:solidFill>
-                      <a:prstDash val="solid"/>
-                      <a:round/>
-                      <a:headEnd type="none" w="med" len="med"/>
-                      <a:tailEnd type="none" w="med" len="med"/>
-                    </a:lnB>
-                    <a:solidFill>
-                      <a:srgbClr val="F7FAFC"/>
-                    </a:solidFill>
-                  </a:tcPr>
-                </a:tc>
-                <a:tc>
-                  <a:txBody>
-                    <a:bodyPr/>
-                    <a:lstStyle/>
-                    <a:p>
-                      <a:pPr indent="0" marL="0">
-                        <a:buNone/>
-                      </a:pPr>
-                      <a:r>
-                        <a:rPr lang="en-US" sz="1300" dirty="0">
-                          <a:solidFill>
-                            <a:srgbClr val="10161F"/>
-                          </a:solidFill>
-                          <a:latin typeface="Pretendard" pitchFamily="34" charset="0"/>
-                          <a:ea typeface="Pretendard" pitchFamily="34" charset="-122"/>
-                          <a:cs typeface="Pretendard" pitchFamily="34" charset="-120"/>
-                        </a:rPr>
-                        <a:t>자본 </a:t>
-                      </a:r>
-                      <a:pPr indent="0" marL="0">
-                        <a:buNone/>
-                      </a:pPr>
-                      <a:r>
-                        <a:rPr lang="en-US" sz="1300" dirty="0">
-                          <a:solidFill>
-                            <a:srgbClr val="10161F"/>
-                          </a:solidFill>
-                          <a:latin typeface="Pretendard" pitchFamily="34" charset="0"/>
-                          <a:ea typeface="Pretendard" pitchFamily="34" charset="-122"/>
-                          <a:cs typeface="Pretendard" pitchFamily="34" charset="-120"/>
-                        </a:rPr>
-                        <a:t>이득</a:t>
-                      </a:r>
-                      <a:endParaRPr lang="en-US" sz="1300" dirty="0">
-                        <a:latin typeface="Pretendard" charset="0"/>
-                        <a:ea typeface="Pretendard" charset="0"/>
-                        <a:cs typeface="Pretendard" charset="0"/>
-                      </a:endParaRPr>
-                    </a:p>
-                  </a:txBody>
-                  <a:tcPr marL="50800" marR="50800" marT="25400" marB="25400" anchor="ctr">
-                    <a:lnL w="3810" cap="flat" cmpd="sng" algn="ctr">
-                      <a:solidFill>
-                        <a:srgbClr val="CBD5E0"/>
-                      </a:solidFill>
-                      <a:prstDash val="solid"/>
-                      <a:round/>
-                      <a:headEnd type="none" w="med" len="med"/>
-                      <a:tailEnd type="none" w="med" len="med"/>
-                    </a:lnL>
-                    <a:lnR w="3810" cap="flat" cmpd="sng" algn="ctr">
-                      <a:solidFill>
-                        <a:srgbClr val="CBD5E0"/>
-                      </a:solidFill>
-                      <a:prstDash val="solid"/>
-                      <a:round/>
-                      <a:headEnd type="none" w="med" len="med"/>
-                      <a:tailEnd type="none" w="med" len="med"/>
-                    </a:lnR>
-                    <a:lnT w="3810" cap="flat" cmpd="sng" algn="ctr">
-                      <a:solidFill>
-                        <a:srgbClr val="CBD5E0"/>
-                      </a:solidFill>
-                      <a:prstDash val="solid"/>
-                      <a:round/>
-                      <a:headEnd type="none" w="med" len="med"/>
-                      <a:tailEnd type="none" w="med" len="med"/>
-                    </a:lnT>
-                    <a:lnB w="3810" cap="flat" cmpd="sng" algn="ctr">
-                      <a:solidFill>
-                        <a:srgbClr val="CBD5E0"/>
-                      </a:solidFill>
-                      <a:prstDash val="solid"/>
-                      <a:round/>
-                      <a:headEnd type="none" w="med" len="med"/>
-                      <a:tailEnd type="none" w="med" len="med"/>
-                    </a:lnB>
-                    <a:solidFill>
-                      <a:srgbClr val="F7FAFC"/>
-                    </a:solidFill>
-                  </a:tcPr>
-                </a:tc>
-              </a:tr>
-              <a:tr h="457200">
-                <a:tc>
-                  <a:txBody>
-                    <a:bodyPr/>
-                    <a:lstStyle/>
-                    <a:p>
-                      <a:pPr indent="0" marL="0">
-                        <a:buNone/>
-                      </a:pPr>
-                      <a:r>
-                        <a:rPr lang="en-US" sz="1300" b="1" dirty="0">
-                          <a:solidFill>
-                            <a:srgbClr val="10161F"/>
-                          </a:solidFill>
-                          <a:latin typeface="Pretendard" pitchFamily="34" charset="0"/>
-                          <a:ea typeface="Pretendard" pitchFamily="34" charset="-122"/>
-                          <a:cs typeface="Pretendard" pitchFamily="34" charset="-120"/>
-                        </a:rPr>
-                        <a:t>목표 </a:t>
-                      </a:r>
-                      <a:pPr indent="0" marL="0">
-                        <a:buNone/>
-                      </a:pPr>
-                      <a:r>
-                        <a:rPr lang="en-US" sz="1300" b="1" dirty="0">
-                          <a:solidFill>
-                            <a:srgbClr val="10161F"/>
-                          </a:solidFill>
-                          <a:latin typeface="Pretendard" pitchFamily="34" charset="0"/>
-                          <a:ea typeface="Pretendard" pitchFamily="34" charset="-122"/>
-                          <a:cs typeface="Pretendard" pitchFamily="34" charset="-120"/>
-                        </a:rPr>
-                        <a:t>보유기간 </a:t>
-                      </a:r>
-                      <a:pPr indent="0" marL="0">
-                        <a:buNone/>
-                      </a:pPr>
-                      <a:r>
-                        <a:rPr lang="en-US" sz="1300" b="1" dirty="0">
-                          <a:solidFill>
-                            <a:srgbClr val="10161F"/>
-                          </a:solidFill>
-                          <a:latin typeface="Pretendard" pitchFamily="34" charset="0"/>
-                          <a:ea typeface="Pretendard" pitchFamily="34" charset="-122"/>
-                          <a:cs typeface="Pretendard" pitchFamily="34" charset="-120"/>
-                        </a:rPr>
-                        <a:t>수익률 </a:t>
-                      </a:r>
-                      <a:pPr indent="0" marL="0">
-                        <a:buNone/>
-                      </a:pPr>
-                      <a:r>
-                        <a:rPr lang="en-US" sz="1300" b="1" dirty="0">
-                          <a:solidFill>
-                            <a:srgbClr val="10161F"/>
-                          </a:solidFill>
-                          <a:latin typeface="Pretendard" pitchFamily="34" charset="0"/>
-                          <a:ea typeface="Pretendard" pitchFamily="34" charset="-122"/>
-                          <a:cs typeface="Pretendard" pitchFamily="34" charset="-120"/>
-                        </a:rPr>
-                        <a:t>(HPR)</a:t>
-                      </a:r>
-                      <a:endParaRPr lang="en-US" sz="1300" dirty="0">
-                        <a:latin typeface="Pretendard" charset="0"/>
-                        <a:ea typeface="Pretendard" charset="0"/>
-                        <a:cs typeface="Pretendard" charset="0"/>
-                      </a:endParaRPr>
-                    </a:p>
-                  </a:txBody>
-                  <a:tcPr marL="50800" marR="50800" marT="25400" marB="25400" anchor="ctr">
-                    <a:lnL w="3810" cap="flat" cmpd="sng" algn="ctr">
-                      <a:solidFill>
-                        <a:srgbClr val="CBD5E0"/>
-                      </a:solidFill>
-                      <a:prstDash val="solid"/>
-                      <a:round/>
-                      <a:headEnd type="none" w="med" len="med"/>
-                      <a:tailEnd type="none" w="med" len="med"/>
-                    </a:lnL>
-                    <a:lnR w="3810" cap="flat" cmpd="sng" algn="ctr">
-                      <a:solidFill>
-                        <a:srgbClr val="CBD5E0"/>
-                      </a:solidFill>
-                      <a:prstDash val="solid"/>
-                      <a:round/>
-                      <a:headEnd type="none" w="med" len="med"/>
-                      <a:tailEnd type="none" w="med" len="med"/>
-                    </a:lnR>
-                    <a:lnT w="3810" cap="flat" cmpd="sng" algn="ctr">
-                      <a:solidFill>
-                        <a:srgbClr val="CBD5E0"/>
-                      </a:solidFill>
-                      <a:prstDash val="solid"/>
-                      <a:round/>
-                      <a:headEnd type="none" w="med" len="med"/>
-                      <a:tailEnd type="none" w="med" len="med"/>
-                    </a:lnT>
-                    <a:lnB w="3810" cap="flat" cmpd="sng" algn="ctr">
-                      <a:solidFill>
-                        <a:srgbClr val="CBD5E0"/>
-                      </a:solidFill>
-                      <a:prstDash val="solid"/>
-                      <a:round/>
-                      <a:headEnd type="none" w="med" len="med"/>
-                      <a:tailEnd type="none" w="med" len="med"/>
-                    </a:lnB>
-                    <a:solidFill>
-                      <a:srgbClr val="FFFFFF"/>
-                    </a:solidFill>
-                  </a:tcPr>
-                </a:tc>
-                <a:tc>
-                  <a:txBody>
-                    <a:bodyPr/>
-                    <a:lstStyle/>
-                    <a:p>
-                      <a:pPr indent="0" marL="0">
-                        <a:buNone/>
-                      </a:pPr>
-                      <a:r>
-                        <a:rPr lang="en-US" sz="1300" dirty="0">
-                          <a:solidFill>
-                            <a:srgbClr val="10161F"/>
-                          </a:solidFill>
-                          <a:latin typeface="Pretendard" pitchFamily="34" charset="0"/>
-                          <a:ea typeface="Pretendard" pitchFamily="34" charset="-122"/>
-                          <a:cs typeface="Pretendard" pitchFamily="34" charset="-120"/>
-                        </a:rPr>
-                        <a:t>10% </a:t>
-                      </a:r>
-                      <a:pPr indent="0" marL="0">
-                        <a:buNone/>
-                      </a:pPr>
-                      <a:r>
-                        <a:rPr lang="en-US" sz="1300" dirty="0">
-                          <a:solidFill>
-                            <a:srgbClr val="10161F"/>
-                          </a:solidFill>
-                          <a:latin typeface="Pretendard" pitchFamily="34" charset="0"/>
-                          <a:ea typeface="Pretendard" pitchFamily="34" charset="-122"/>
-                          <a:cs typeface="Pretendard" pitchFamily="34" charset="-120"/>
-                        </a:rPr>
-                        <a:t>~ </a:t>
-                      </a:r>
-                      <a:pPr indent="0" marL="0">
-                        <a:buNone/>
-                      </a:pPr>
-                      <a:r>
-                        <a:rPr lang="en-US" sz="1300" dirty="0">
-                          <a:solidFill>
-                            <a:srgbClr val="10161F"/>
-                          </a:solidFill>
-                          <a:latin typeface="Pretendard" pitchFamily="34" charset="0"/>
-                          <a:ea typeface="Pretendard" pitchFamily="34" charset="-122"/>
-                          <a:cs typeface="Pretendard" pitchFamily="34" charset="-120"/>
-                        </a:rPr>
-                        <a:t>20%</a:t>
-                      </a:r>
-                      <a:endParaRPr lang="en-US" sz="1300" dirty="0">
-                        <a:latin typeface="Pretendard" charset="0"/>
-                        <a:ea typeface="Pretendard" charset="0"/>
-                        <a:cs typeface="Pretendard" charset="0"/>
-                      </a:endParaRPr>
-                    </a:p>
-                  </a:txBody>
-                  <a:tcPr marL="50800" marR="50800" marT="25400" marB="25400" anchor="ctr">
-                    <a:lnL w="3810" cap="flat" cmpd="sng" algn="ctr">
-                      <a:solidFill>
-                        <a:srgbClr val="CBD5E0"/>
-                      </a:solidFill>
-                      <a:prstDash val="solid"/>
-                      <a:round/>
-                      <a:headEnd type="none" w="med" len="med"/>
-                      <a:tailEnd type="none" w="med" len="med"/>
-                    </a:lnL>
-                    <a:lnR w="3810" cap="flat" cmpd="sng" algn="ctr">
-                      <a:solidFill>
-                        <a:srgbClr val="CBD5E0"/>
-                      </a:solidFill>
-                      <a:prstDash val="solid"/>
-                      <a:round/>
-                      <a:headEnd type="none" w="med" len="med"/>
-                      <a:tailEnd type="none" w="med" len="med"/>
-                    </a:lnR>
-                    <a:lnT w="3810" cap="flat" cmpd="sng" algn="ctr">
-                      <a:solidFill>
-                        <a:srgbClr val="CBD5E0"/>
-                      </a:solidFill>
-                      <a:prstDash val="solid"/>
-                      <a:round/>
-                      <a:headEnd type="none" w="med" len="med"/>
-                      <a:tailEnd type="none" w="med" len="med"/>
-                    </a:lnT>
-                    <a:lnB w="3810" cap="flat" cmpd="sng" algn="ctr">
-                      <a:solidFill>
-                        <a:srgbClr val="CBD5E0"/>
-                      </a:solidFill>
-                      <a:prstDash val="solid"/>
-                      <a:round/>
-                      <a:headEnd type="none" w="med" len="med"/>
-                      <a:tailEnd type="none" w="med" len="med"/>
-                    </a:lnB>
-                    <a:solidFill>
-                      <a:srgbClr val="FFFFFF"/>
-                    </a:solidFill>
-                  </a:tcPr>
-                </a:tc>
-                <a:tc>
-                  <a:txBody>
-                    <a:bodyPr/>
-                    <a:lstStyle/>
-                    <a:p>
-                      <a:pPr indent="0" marL="0">
-                        <a:buNone/>
-                      </a:pPr>
-                      <a:r>
-                        <a:rPr lang="en-US" sz="1300" dirty="0">
-                          <a:solidFill>
-                            <a:srgbClr val="10161F"/>
-                          </a:solidFill>
-                          <a:latin typeface="Pretendard" pitchFamily="34" charset="0"/>
-                          <a:ea typeface="Pretendard" pitchFamily="34" charset="-122"/>
-                          <a:cs typeface="Pretendard" pitchFamily="34" charset="-120"/>
-                        </a:rPr>
-                        <a:t>보유 </a:t>
-                      </a:r>
-                      <a:pPr indent="0" marL="0">
-                        <a:buNone/>
-                      </a:pPr>
-                      <a:r>
-                        <a:rPr lang="en-US" sz="1300" dirty="0">
-                          <a:solidFill>
-                            <a:srgbClr val="10161F"/>
-                          </a:solidFill>
-                          <a:latin typeface="Pretendard" pitchFamily="34" charset="0"/>
-                          <a:ea typeface="Pretendard" pitchFamily="34" charset="-122"/>
-                          <a:cs typeface="Pretendard" pitchFamily="34" charset="-120"/>
-                        </a:rPr>
-                        <a:t>기간 </a:t>
-                      </a:r>
-                      <a:pPr indent="0" marL="0">
-                        <a:buNone/>
-                      </a:pPr>
-                      <a:r>
-                        <a:rPr lang="en-US" sz="1300" dirty="0">
-                          <a:solidFill>
-                            <a:srgbClr val="10161F"/>
-                          </a:solidFill>
-                          <a:latin typeface="Pretendard" pitchFamily="34" charset="0"/>
-                          <a:ea typeface="Pretendard" pitchFamily="34" charset="-122"/>
-                          <a:cs typeface="Pretendard" pitchFamily="34" charset="-120"/>
-                        </a:rPr>
-                        <a:t>2~3년 </a:t>
-                      </a:r>
-                      <a:pPr indent="0" marL="0">
-                        <a:buNone/>
-                      </a:pPr>
-                      <a:r>
-                        <a:rPr lang="en-US" sz="1300" dirty="0">
-                          <a:solidFill>
-                            <a:srgbClr val="10161F"/>
-                          </a:solidFill>
-                          <a:latin typeface="Pretendard" pitchFamily="34" charset="0"/>
-                          <a:ea typeface="Pretendard" pitchFamily="34" charset="-122"/>
-                          <a:cs typeface="Pretendard" pitchFamily="34" charset="-120"/>
-                        </a:rPr>
-                        <a:t>가정</a:t>
-                      </a:r>
-                      <a:endParaRPr lang="en-US" sz="1300" dirty="0">
-                        <a:latin typeface="Pretendard" charset="0"/>
-                        <a:ea typeface="Pretendard" charset="0"/>
-                        <a:cs typeface="Pretendard" charset="0"/>
-                      </a:endParaRPr>
-                    </a:p>
-                  </a:txBody>
-                  <a:tcPr marL="50800" marR="50800" marT="25400" marB="25400" anchor="ctr">
-                    <a:lnL w="3810" cap="flat" cmpd="sng" algn="ctr">
-                      <a:solidFill>
-                        <a:srgbClr val="CBD5E0"/>
-                      </a:solidFill>
-                      <a:prstDash val="solid"/>
-                      <a:round/>
-                      <a:headEnd type="none" w="med" len="med"/>
-                      <a:tailEnd type="none" w="med" len="med"/>
-                    </a:lnL>
-                    <a:lnR w="3810" cap="flat" cmpd="sng" algn="ctr">
-                      <a:solidFill>
-                        <a:srgbClr val="CBD5E0"/>
-                      </a:solidFill>
-                      <a:prstDash val="solid"/>
-                      <a:round/>
-                      <a:headEnd type="none" w="med" len="med"/>
-                      <a:tailEnd type="none" w="med" len="med"/>
-                    </a:lnR>
-                    <a:lnT w="3810" cap="flat" cmpd="sng" algn="ctr">
-                      <a:solidFill>
-                        <a:srgbClr val="CBD5E0"/>
-                      </a:solidFill>
-                      <a:prstDash val="solid"/>
-                      <a:round/>
-                      <a:headEnd type="none" w="med" len="med"/>
-                      <a:tailEnd type="none" w="med" len="med"/>
-                    </a:lnT>
-                    <a:lnB w="3810" cap="flat" cmpd="sng" algn="ctr">
-                      <a:solidFill>
-                        <a:srgbClr val="CBD5E0"/>
-                      </a:solidFill>
-                      <a:prstDash val="solid"/>
-                      <a:round/>
-                      <a:headEnd type="none" w="med" len="med"/>
-                      <a:tailEnd type="none" w="med" len="med"/>
-                    </a:lnB>
-                    <a:solidFill>
-                      <a:srgbClr val="FFFFFF"/>
-                    </a:solidFill>
-                  </a:tcPr>
-                </a:tc>
-              </a:tr>
-            </a:tbl>
-          </a:graphicData>
-        </a:graphic>
-      </p:graphicFrame>
-      <p:sp>
-        <p:nvSpPr>
-          <p:cNvPr id="7" name="Text 4"/>
-          <p:cNvSpPr/>
-          <p:nvPr/>
-        </p:nvSpPr>
-        <p:spPr>
-          <a:xfrm>
-            <a:off x="566928" y="3621024"/>
-            <a:ext cx="11057839" cy="384048"/>
+      <p:sp>
+        <p:nvSpPr>
+          <p:cNvPr id="6" name="Text 4"/>
+          <p:cNvSpPr/>
+          <p:nvPr/>
+        </p:nvSpPr>
+        <p:spPr>
+          <a:xfrm>
+            <a:off x="566928" y="1645920"/>
+            <a:ext cx="4201979" cy="402336"/>
           </a:xfrm>
           <a:prstGeom prst="rect">
             <a:avLst/>
@@ -7867,35 +6554,35 @@
           <a:p>
             <a:pPr indent="0" marL="0">
               <a:lnSpc>
-                <a:spcPct val="125000"/>
+                <a:spcPct val="120000"/>
               </a:lnSpc>
               <a:buNone/>
             </a:pPr>
             <a:r>
-              <a:rPr lang="en-US" sz="780" dirty="0">
-                <a:solidFill>
-                  <a:srgbClr val="A0AEC0"/>
+              <a:rPr lang="en-US" sz="1400" dirty="0">
+                <a:solidFill>
+                  <a:srgbClr val="718096"/>
                 </a:solidFill>
                 <a:latin typeface="Pretendard" pitchFamily="34" charset="0"/>
                 <a:ea typeface="Pretendard" pitchFamily="34" charset="-122"/>
                 <a:cs typeface="Pretendard" pitchFamily="34" charset="-120"/>
               </a:rPr>
-              <a:t>[참고] 리모델링 또는 밸류업 후 단기 매각(Trading)을 통한 Capital Gain 실현 시나리오입니다.</a:t>
-            </a:r>
-            <a:endParaRPr lang="en-US" sz="780" dirty="0"/>
-          </a:p>
-        </p:txBody>
-      </p:sp>
-      <p:sp>
-        <p:nvSpPr>
-          <p:cNvPr id="8" name="Text 5"/>
-          <p:cNvSpPr/>
-          <p:nvPr/>
-        </p:nvSpPr>
-        <p:spPr>
-          <a:xfrm>
-            <a:off x="566928" y="6382512"/>
-            <a:ext cx="7315200" cy="219456"/>
+              <a:t>{"ok"</a:t>
+            </a:r>
+            <a:endParaRPr lang="en-US" sz="1400" dirty="0"/>
+          </a:p>
+        </p:txBody>
+      </p:sp>
+      <p:sp>
+        <p:nvSpPr>
+          <p:cNvPr id="7" name="Text 5"/>
+          <p:cNvSpPr/>
+          <p:nvPr/>
+        </p:nvSpPr>
+        <p:spPr>
+          <a:xfrm>
+            <a:off x="4768907" y="1645920"/>
+            <a:ext cx="6855860" cy="402336"/>
           </a:xfrm>
           <a:prstGeom prst="rect">
             <a:avLst/>
@@ -7908,17 +6595,59 @@
           <a:lstStyle/>
           <a:p>
             <a:pPr indent="0" marL="0">
-              <a:buNone/>
-            </a:pPr>
-            <a:r>
-              <a:rPr lang="en-US" sz="800" dirty="0">
-                <a:solidFill>
-                  <a:srgbClr val="718096"/>
+              <a:lnSpc>
+                <a:spcPct val="120000"/>
+              </a:lnSpc>
+              <a:buNone/>
+            </a:pPr>
+            <a:r>
+              <a:rPr lang="en-US" sz="1400" b="1" dirty="0">
+                <a:solidFill>
+                  <a:srgbClr val="10161F"/>
                 </a:solidFill>
                 <a:latin typeface="Pretendard" pitchFamily="34" charset="0"/>
                 <a:ea typeface="Pretendard" pitchFamily="34" charset="-122"/>
                 <a:cs typeface="Pretendard" pitchFamily="34" charset="-120"/>
               </a:rPr>
+              <a:t>true,"mocked":true,"extractedFields":{"area_signal":"역삼","asset_type":"오피스빌딩","price_band":"300억","size_signal":"3000평(약 9917.4㎡)"},"extractedFacts":{"region":"역삼","exactAddressCandidate":"역삼동 742-1","assetType":"오피스빌딩","priceText":"300억","sizeText":"3000평(약 9917.4㎡)","currentUse":"오피스","currentUseSignal":"근린생활시설","leaseSignal":"임대중","vacancySignal":"공실없음","tenantNames":"쿠팡","네이버","unitRentTexts":"301호: 1500만","sellerMotivationText":"자산 효율화","brokerNotes":"초역세권 매물"},"detectedSensitiveFields":"exact_address","tenant_name","ambiguousFields":,"warnings":,"areaSignal":"역삼","assetType":"오피스빌딩","priceBand":"300억","sizeSignal":"3000평(약 9917.4㎡)","dealType":"매각","buildingName":"역삼 센트럴타워","exactAddress":"역삼동 742-1","totalFloorArea":9917.3,"buildYear":2015,"currentUseSignal":"근린생활시설","vacancySignal":"공실 없음","fitSummary":"초역세권 근생 빌딩으로 시행/사옥 매입에 최적화","cautionSummary":"주요 임차 업종 만기 조율 필요","hiddenFields":"exact_address","seller_motivation","confidence":{"areaSignal":"confirmed","assetType":"confirmed","priceBand":"ai_hypothesis","fitSummary":"ai_hypothesis"},"missingData":"sizeSignal","boundaryNote":"본 자료는 실거래 통계 기반 참고치입니다.","buyerType":"법인 사옥형","budgetRange":{"min":50,"max":80,"display":"50억~80억"},"preferredRegions":"강남","성수","assetTypes":"꼬마빌딩","사옥용","purchasePurpose":"사옥용 매입","mustHave":"초역세권","주차","niceToHave":"테라스","루프탑","riskTolerance":"medium","financingNote":"자본금 50% 준비","missingQuestions":"구체적인 입주 시기가 언제인가요?","선호하는 수익률이 있나요?","privacyNotes":"연락처 비공개","fitReasons":"매수자 예산(50-80억)에 부합하는 매물입니다.","요청하신 성수/강남 권역에 해당합니다.","cautionReasons":"요청한 용도와 달리 명도 협의가 다소 필요합니다.","recommendedNextAction":"현장 답사 제안","kakaoMessage":"안녕하세요! 요청하신 조건에 부합하는 추천 매물이 있어 안내해 드립니다. 확인해보시고 피드백 부탁드립니다.","title":"강남 역삼역 초역세권 오피스 사옥용 빌딩 매각","shortSummary":"역삼역 도보 5분 거리의 준신축급 대형 오피스빌딩입니다.","dealPoints":"초역세권","사옥 최적","cautionPoints":"명도 조율 필요","hiddenInfoNotice":"보증금 및 지번은 인가 후 확인 가능","gateMessage":"G1 등급 등록이 필요합니다.","kakaoText":"강남 역삼역 오피스 빌딩 매각 안내입니다.","exactUnitCandidate":"101호","floor":"1층","areaSqmText":"150㎡","spaceType":"office","depositText":"5000만","monthlyRentText":"400만","maintenanceFeeText":"50만","availableFromText":"즉시입주","leaseTermMonthsText":"24","incentivesText":"렌트프리 2개월","restrictions":,"landlordIdentity":"김성수","currentTenant":"스타트업","vacancyReason":"이전 확장","rentNegotiation":"협의 가능","region":"성수동","areaSqm":150,"deposit":5000,"monthlyRent":400,"maintenanceFee":50,"availableFrom":"즉시입주","leaseTermMonths":24,"incentives":{"rentFreeMonths":2,"interiorSupport":"일부 인테리어 지원","freeRentDetail":"렌트프리 2개월 지원"},"shortSummaryLease":"성수역 도보 5분 거리 1층 리테일 상가 매물입니다."}</a:t>
+            </a:r>
+            <a:endParaRPr lang="en-US" sz="1400" dirty="0"/>
+          </a:p>
+        </p:txBody>
+      </p:sp>
+      <p:sp>
+        <p:nvSpPr>
+          <p:cNvPr id="8" name="Text 6"/>
+          <p:cNvSpPr/>
+          <p:nvPr/>
+        </p:nvSpPr>
+        <p:spPr>
+          <a:xfrm>
+            <a:off x="566928" y="6382512"/>
+            <a:ext cx="7315200" cy="219456"/>
+          </a:xfrm>
+          <a:prstGeom prst="rect">
+            <a:avLst/>
+          </a:prstGeom>
+          <a:noFill/>
+          <a:ln/>
+        </p:spPr>
+        <p:txBody>
+          <a:bodyPr wrap="square" lIns="0" tIns="0" rIns="0" bIns="0" rtlCol="0" anchor="ctr"/>
+          <a:lstStyle/>
+          <a:p>
+            <a:pPr indent="0" marL="0">
+              <a:buNone/>
+            </a:pPr>
+            <a:r>
+              <a:rPr lang="en-US" sz="800" dirty="0">
+                <a:solidFill>
+                  <a:srgbClr val="718096"/>
+                </a:solidFill>
+                <a:latin typeface="Pretendard" pitchFamily="34" charset="0"/>
+                <a:ea typeface="Pretendard" pitchFamily="34" charset="-122"/>
+                <a:cs typeface="Pretendard" pitchFamily="34" charset="-120"/>
+              </a:rPr>
               <a:t>크리딜   |   </a:t>
             </a:r>
             <a:endParaRPr lang="en-US" sz="800" dirty="0"/>
@@ -7927,7 +6656,7 @@
       </p:sp>
       <p:sp>
         <p:nvSpPr>
-          <p:cNvPr id="9" name="Text 6"/>
+          <p:cNvPr id="9" name="Text 7"/>
           <p:cNvSpPr/>
           <p:nvPr/>
         </p:nvSpPr>
@@ -8142,11 +6871,11 @@
         <p:spPr>
           <a:xfrm>
             <a:off x="566928" y="1417320"/>
-            <a:ext cx="11057839" cy="3611880"/>
+            <a:ext cx="3515258" cy="3657600"/>
           </a:xfrm>
           <a:prstGeom prst="roundRect">
             <a:avLst>
-              <a:gd name="adj" fmla="val 1519"/>
+              <a:gd name="adj" fmla="val 1561"/>
             </a:avLst>
           </a:prstGeom>
           <a:solidFill>
@@ -8169,7 +6898,7 @@
         <p:spPr>
           <a:xfrm>
             <a:off x="566928" y="1417320"/>
-            <a:ext cx="11057839" cy="45720"/>
+            <a:ext cx="3515258" cy="45720"/>
           </a:xfrm>
           <a:prstGeom prst="rect">
             <a:avLst/>
@@ -8189,7 +6918,7 @@
         <p:spPr>
           <a:xfrm>
             <a:off x="795528" y="1618488"/>
-            <a:ext cx="10600639" cy="292608"/>
+            <a:ext cx="3058058" cy="292608"/>
           </a:xfrm>
           <a:prstGeom prst="rect">
             <a:avLst/>
@@ -8213,7 +6942,7 @@
                 <a:ea typeface="Pretendard" pitchFamily="34" charset="-122"/>
                 <a:cs typeface="Pretendard" pitchFamily="34" charset="-120"/>
               </a:rPr>
-              <a:t>용도 리스크</a:t>
+              <a:t>건물 물리적 상태</a:t>
             </a:r>
             <a:endParaRPr lang="en-US" sz="1350" dirty="0"/>
           </a:p>
@@ -8227,8 +6956,8 @@
         </p:nvSpPr>
         <p:spPr>
           <a:xfrm>
-            <a:off x="795528" y="1911096"/>
-            <a:ext cx="10600639" cy="402336"/>
+            <a:off x="795528" y="1947672"/>
+            <a:ext cx="3058058" cy="365760"/>
           </a:xfrm>
           <a:prstGeom prst="rect">
             <a:avLst/>
@@ -8246,7 +6975,7 @@
               <a:buNone/>
             </a:pPr>
             <a:r>
-              <a:rPr lang="en-US" sz="1350" b="1" dirty="0">
+              <a:rPr lang="en-US" sz="1250" b="1" dirty="0">
                 <a:solidFill>
                   <a:srgbClr val="10161F"/>
                 </a:solidFill>
@@ -8254,9 +6983,9 @@
                 <a:ea typeface="Pretendard" pitchFamily="34" charset="-122"/>
                 <a:cs typeface="Pretendard" pitchFamily="34" charset="-120"/>
               </a:rPr>
-              <a:t>—</a:t>
-            </a:r>
-            <a:endParaRPr lang="en-US" sz="1350" dirty="0"/>
+              <a:t>2017년 준공 신축급 상태 (누수/균열 결함 없음)</a:t>
+            </a:r>
+            <a:endParaRPr lang="en-US" sz="1250" dirty="0"/>
           </a:p>
         </p:txBody>
       </p:sp>
@@ -8269,7 +6998,7 @@
         <p:spPr>
           <a:xfrm>
             <a:off x="795528" y="2377440"/>
-            <a:ext cx="10600639" cy="2560320"/>
+            <a:ext cx="3058058" cy="2606040"/>
           </a:xfrm>
           <a:prstGeom prst="rect">
             <a:avLst/>
@@ -8291,7 +7020,7 @@
               <a:buChar char="•"/>
             </a:pPr>
             <a:r>
-              <a:rPr lang="en-US" sz="1200" dirty="0">
+              <a:rPr lang="en-US" sz="1100" dirty="0">
                 <a:solidFill>
                   <a:srgbClr val="10161F"/>
                 </a:solidFill>
@@ -8299,22 +7028,69 @@
                 <a:ea typeface="Pretendard" pitchFamily="34" charset="-122"/>
                 <a:cs typeface="Pretendard" pitchFamily="34" charset="-120"/>
               </a:rPr>
-              <a:t>{"ok":true,"mocked":true,"extractedFields":{"area_signal":"역삼","asset_type":"오피스빌딩","price_band":"300억","size_signal":"3000평(약 9917.4㎡)"},"extractedFacts":{"region":"역삼","exactAddressCandidate":"역삼동 7</a:t>
-            </a:r>
-            <a:endParaRPr lang="en-US" sz="1200" dirty="0"/>
-          </a:p>
-        </p:txBody>
-      </p:sp>
-      <p:sp>
-        <p:nvSpPr>
-          <p:cNvPr id="11" name="Text 9"/>
-          <p:cNvSpPr/>
-          <p:nvPr/>
-        </p:nvSpPr>
-        <p:spPr>
-          <a:xfrm>
-            <a:off x="566928" y="6382512"/>
-            <a:ext cx="7315200" cy="219456"/>
+              <a:t>준공 10년 미만으로 대규모 수선비용 발생 가능성 낮음</a:t>
+            </a:r>
+            <a:endParaRPr lang="en-US" sz="1100" dirty="0"/>
+          </a:p>
+        </p:txBody>
+      </p:sp>
+      <p:sp>
+        <p:nvSpPr>
+          <p:cNvPr id="11" name="Shape 9"/>
+          <p:cNvSpPr/>
+          <p:nvPr/>
+        </p:nvSpPr>
+        <p:spPr>
+          <a:xfrm>
+            <a:off x="4338218" y="1417320"/>
+            <a:ext cx="3515258" cy="3657600"/>
+          </a:xfrm>
+          <a:prstGeom prst="roundRect">
+            <a:avLst>
+              <a:gd name="adj" fmla="val 1561"/>
+            </a:avLst>
+          </a:prstGeom>
+          <a:solidFill>
+            <a:srgbClr val="F7FAFC"/>
+          </a:solidFill>
+          <a:ln w="6350">
+            <a:solidFill>
+              <a:srgbClr val="CBD5E0"/>
+            </a:solidFill>
+            <a:prstDash val="solid"/>
+          </a:ln>
+        </p:spPr>
+      </p:sp>
+      <p:sp>
+        <p:nvSpPr>
+          <p:cNvPr id="12" name="Shape 10"/>
+          <p:cNvSpPr/>
+          <p:nvPr/>
+        </p:nvSpPr>
+        <p:spPr>
+          <a:xfrm>
+            <a:off x="4338218" y="1417320"/>
+            <a:ext cx="3515258" cy="45720"/>
+          </a:xfrm>
+          <a:prstGeom prst="rect">
+            <a:avLst/>
+          </a:prstGeom>
+          <a:solidFill>
+            <a:srgbClr val="B98A2E"/>
+          </a:solidFill>
+          <a:ln/>
+        </p:spPr>
+      </p:sp>
+      <p:sp>
+        <p:nvSpPr>
+          <p:cNvPr id="13" name="Text 11"/>
+          <p:cNvSpPr/>
+          <p:nvPr/>
+        </p:nvSpPr>
+        <p:spPr>
+          <a:xfrm>
+            <a:off x="4566818" y="1618488"/>
+            <a:ext cx="3058058" cy="292608"/>
           </a:xfrm>
           <a:prstGeom prst="rect">
             <a:avLst/>
@@ -8330,14 +7106,377 @@
               <a:buNone/>
             </a:pPr>
             <a:r>
-              <a:rPr lang="en-US" sz="800" dirty="0">
-                <a:solidFill>
-                  <a:srgbClr val="718096"/>
+              <a:rPr lang="en-US" sz="1350" b="1" dirty="0">
+                <a:solidFill>
+                  <a:srgbClr val="977024"/>
                 </a:solidFill>
                 <a:latin typeface="Pretendard" pitchFamily="34" charset="0"/>
                 <a:ea typeface="Pretendard" pitchFamily="34" charset="-122"/>
                 <a:cs typeface="Pretendard" pitchFamily="34" charset="-120"/>
               </a:rPr>
+              <a:t>승강기 및 설비</a:t>
+            </a:r>
+            <a:endParaRPr lang="en-US" sz="1350" dirty="0"/>
+          </a:p>
+        </p:txBody>
+      </p:sp>
+      <p:sp>
+        <p:nvSpPr>
+          <p:cNvPr id="14" name="Text 12"/>
+          <p:cNvSpPr/>
+          <p:nvPr/>
+        </p:nvSpPr>
+        <p:spPr>
+          <a:xfrm>
+            <a:off x="4566818" y="1947672"/>
+            <a:ext cx="3058058" cy="365760"/>
+          </a:xfrm>
+          <a:prstGeom prst="rect">
+            <a:avLst/>
+          </a:prstGeom>
+          <a:noFill/>
+          <a:ln/>
+        </p:spPr>
+        <p:txBody>
+          <a:bodyPr wrap="square" lIns="0" tIns="0" rIns="0" bIns="0" rtlCol="0" anchor="ctr">
+            <a:normAutofit/>
+          </a:bodyPr>
+          <a:lstStyle/>
+          <a:p>
+            <a:pPr indent="0" marL="0">
+              <a:buNone/>
+            </a:pPr>
+            <a:r>
+              <a:rPr lang="en-US" sz="1250" b="1" dirty="0">
+                <a:solidFill>
+                  <a:srgbClr val="10161F"/>
+                </a:solidFill>
+                <a:latin typeface="Pretendard" pitchFamily="34" charset="0"/>
+                <a:ea typeface="Pretendard" pitchFamily="34" charset="-122"/>
+                <a:cs typeface="Pretendard" pitchFamily="34" charset="-120"/>
+              </a:rPr>
+              <a:t>15인승 침대용 승강기 및 냉난방 설비 양호</a:t>
+            </a:r>
+            <a:endParaRPr lang="en-US" sz="1250" dirty="0"/>
+          </a:p>
+        </p:txBody>
+      </p:sp>
+      <p:sp>
+        <p:nvSpPr>
+          <p:cNvPr id="15" name="Text 13"/>
+          <p:cNvSpPr/>
+          <p:nvPr/>
+        </p:nvSpPr>
+        <p:spPr>
+          <a:xfrm>
+            <a:off x="4566818" y="2377440"/>
+            <a:ext cx="3058058" cy="2606040"/>
+          </a:xfrm>
+          <a:prstGeom prst="rect">
+            <a:avLst/>
+          </a:prstGeom>
+          <a:noFill/>
+          <a:ln/>
+        </p:spPr>
+        <p:txBody>
+          <a:bodyPr wrap="square" lIns="0" tIns="0" rIns="0" bIns="0" rtlCol="0" anchor="t">
+            <a:normAutofit/>
+          </a:bodyPr>
+          <a:lstStyle/>
+          <a:p>
+            <a:pPr marL="342900" indent="-342900">
+              <a:lnSpc>
+                <a:spcPct val="125000"/>
+              </a:lnSpc>
+              <a:buSzPct val="100000"/>
+              <a:buChar char="•"/>
+            </a:pPr>
+            <a:r>
+              <a:rPr lang="en-US" sz="1100" dirty="0">
+                <a:solidFill>
+                  <a:srgbClr val="10161F"/>
+                </a:solidFill>
+                <a:latin typeface="Pretendard" pitchFamily="34" charset="0"/>
+                <a:ea typeface="Pretendard" pitchFamily="34" charset="-122"/>
+                <a:cs typeface="Pretendard" pitchFamily="34" charset="-120"/>
+              </a:rPr>
+              <a:t>주기적 정기 점검 계약 유지로 관리 리스크 최소화</a:t>
+            </a:r>
+            <a:endParaRPr lang="en-US" sz="1100" dirty="0"/>
+          </a:p>
+        </p:txBody>
+      </p:sp>
+      <p:sp>
+        <p:nvSpPr>
+          <p:cNvPr id="16" name="Shape 14"/>
+          <p:cNvSpPr/>
+          <p:nvPr/>
+        </p:nvSpPr>
+        <p:spPr>
+          <a:xfrm>
+            <a:off x="8109509" y="1417320"/>
+            <a:ext cx="3515258" cy="3657600"/>
+          </a:xfrm>
+          <a:prstGeom prst="roundRect">
+            <a:avLst>
+              <a:gd name="adj" fmla="val 1561"/>
+            </a:avLst>
+          </a:prstGeom>
+          <a:solidFill>
+            <a:srgbClr val="F7FAFC"/>
+          </a:solidFill>
+          <a:ln w="6350">
+            <a:solidFill>
+              <a:srgbClr val="CBD5E0"/>
+            </a:solidFill>
+            <a:prstDash val="solid"/>
+          </a:ln>
+        </p:spPr>
+      </p:sp>
+      <p:sp>
+        <p:nvSpPr>
+          <p:cNvPr id="17" name="Shape 15"/>
+          <p:cNvSpPr/>
+          <p:nvPr/>
+        </p:nvSpPr>
+        <p:spPr>
+          <a:xfrm>
+            <a:off x="8109509" y="1417320"/>
+            <a:ext cx="3515258" cy="45720"/>
+          </a:xfrm>
+          <a:prstGeom prst="rect">
+            <a:avLst/>
+          </a:prstGeom>
+          <a:solidFill>
+            <a:srgbClr val="B98A2E"/>
+          </a:solidFill>
+          <a:ln/>
+        </p:spPr>
+      </p:sp>
+      <p:sp>
+        <p:nvSpPr>
+          <p:cNvPr id="18" name="Text 16"/>
+          <p:cNvSpPr/>
+          <p:nvPr/>
+        </p:nvSpPr>
+        <p:spPr>
+          <a:xfrm>
+            <a:off x="8338109" y="1618488"/>
+            <a:ext cx="3058058" cy="292608"/>
+          </a:xfrm>
+          <a:prstGeom prst="rect">
+            <a:avLst/>
+          </a:prstGeom>
+          <a:noFill/>
+          <a:ln/>
+        </p:spPr>
+        <p:txBody>
+          <a:bodyPr wrap="square" lIns="0" tIns="0" rIns="0" bIns="0" rtlCol="0" anchor="ctr"/>
+          <a:lstStyle/>
+          <a:p>
+            <a:pPr indent="0" marL="0">
+              <a:buNone/>
+            </a:pPr>
+            <a:r>
+              <a:rPr lang="en-US" sz="1350" b="1" dirty="0">
+                <a:solidFill>
+                  <a:srgbClr val="977024"/>
+                </a:solidFill>
+                <a:latin typeface="Pretendard" pitchFamily="34" charset="0"/>
+                <a:ea typeface="Pretendard" pitchFamily="34" charset="-122"/>
+                <a:cs typeface="Pretendard" pitchFamily="34" charset="-120"/>
+              </a:rPr>
+              <a:t>임차인 이탈 위험</a:t>
+            </a:r>
+            <a:endParaRPr lang="en-US" sz="1350" dirty="0"/>
+          </a:p>
+        </p:txBody>
+      </p:sp>
+      <p:sp>
+        <p:nvSpPr>
+          <p:cNvPr id="19" name="Text 17"/>
+          <p:cNvSpPr/>
+          <p:nvPr/>
+        </p:nvSpPr>
+        <p:spPr>
+          <a:xfrm>
+            <a:off x="8338109" y="1947672"/>
+            <a:ext cx="3058058" cy="365760"/>
+          </a:xfrm>
+          <a:prstGeom prst="rect">
+            <a:avLst/>
+          </a:prstGeom>
+          <a:noFill/>
+          <a:ln/>
+        </p:spPr>
+        <p:txBody>
+          <a:bodyPr wrap="square" lIns="0" tIns="0" rIns="0" bIns="0" rtlCol="0" anchor="ctr">
+            <a:normAutofit/>
+          </a:bodyPr>
+          <a:lstStyle/>
+          <a:p>
+            <a:pPr indent="0" marL="0">
+              <a:buNone/>
+            </a:pPr>
+            <a:r>
+              <a:rPr lang="en-US" sz="1250" b="1" dirty="0">
+                <a:solidFill>
+                  <a:srgbClr val="10161F"/>
+                </a:solidFill>
+                <a:latin typeface="Pretendard" pitchFamily="34" charset="0"/>
+                <a:ea typeface="Pretendard" pitchFamily="34" charset="-122"/>
+                <a:cs typeface="Pretendard" pitchFamily="34" charset="-120"/>
+              </a:rPr>
+              <a:t>병의원/약국 인테리어 투자비(호실당 5억↑) 존속</a:t>
+            </a:r>
+            <a:endParaRPr lang="en-US" sz="1250" dirty="0"/>
+          </a:p>
+        </p:txBody>
+      </p:sp>
+      <p:sp>
+        <p:nvSpPr>
+          <p:cNvPr id="20" name="Text 18"/>
+          <p:cNvSpPr/>
+          <p:nvPr/>
+        </p:nvSpPr>
+        <p:spPr>
+          <a:xfrm>
+            <a:off x="8338109" y="2377440"/>
+            <a:ext cx="3058058" cy="2606040"/>
+          </a:xfrm>
+          <a:prstGeom prst="rect">
+            <a:avLst/>
+          </a:prstGeom>
+          <a:noFill/>
+          <a:ln/>
+        </p:spPr>
+        <p:txBody>
+          <a:bodyPr wrap="square" lIns="0" tIns="0" rIns="0" bIns="0" rtlCol="0" anchor="t">
+            <a:normAutofit/>
+          </a:bodyPr>
+          <a:lstStyle/>
+          <a:p>
+            <a:pPr marL="342900" indent="-342900">
+              <a:lnSpc>
+                <a:spcPct val="125000"/>
+              </a:lnSpc>
+              <a:buSzPct val="100000"/>
+              <a:buChar char="•"/>
+            </a:pPr>
+            <a:r>
+              <a:rPr lang="en-US" sz="1100" dirty="0">
+                <a:solidFill>
+                  <a:srgbClr val="10161F"/>
+                </a:solidFill>
+                <a:latin typeface="Pretendard" pitchFamily="34" charset="0"/>
+                <a:ea typeface="Pretendard" pitchFamily="34" charset="-122"/>
+                <a:cs typeface="Pretendard" pitchFamily="34" charset="-120"/>
+              </a:rPr>
+              <a:t>WALE 3.5년 확보 및 만기 6개월 전 재계약 협상 개시</a:t>
+            </a:r>
+            <a:endParaRPr lang="en-US" sz="1100" dirty="0"/>
+          </a:p>
+        </p:txBody>
+      </p:sp>
+      <p:sp>
+        <p:nvSpPr>
+          <p:cNvPr id="21" name="Shape 19"/>
+          <p:cNvSpPr/>
+          <p:nvPr/>
+        </p:nvSpPr>
+        <p:spPr>
+          <a:xfrm>
+            <a:off x="566928" y="5193792"/>
+            <a:ext cx="11057839" cy="621792"/>
+          </a:xfrm>
+          <a:prstGeom prst="roundRect">
+            <a:avLst>
+              <a:gd name="adj" fmla="val 8824"/>
+            </a:avLst>
+          </a:prstGeom>
+          <a:solidFill>
+            <a:srgbClr val="F7FAFC"/>
+          </a:solidFill>
+          <a:ln w="6350">
+            <a:solidFill>
+              <a:srgbClr val="CBD5E0"/>
+            </a:solidFill>
+            <a:prstDash val="solid"/>
+          </a:ln>
+        </p:spPr>
+      </p:sp>
+      <p:sp>
+        <p:nvSpPr>
+          <p:cNvPr id="22" name="Text 20"/>
+          <p:cNvSpPr/>
+          <p:nvPr/>
+        </p:nvSpPr>
+        <p:spPr>
+          <a:xfrm>
+            <a:off x="795528" y="5193792"/>
+            <a:ext cx="10600639" cy="621792"/>
+          </a:xfrm>
+          <a:prstGeom prst="rect">
+            <a:avLst/>
+          </a:prstGeom>
+          <a:noFill/>
+          <a:ln/>
+        </p:spPr>
+        <p:txBody>
+          <a:bodyPr wrap="square" lIns="0" tIns="0" rIns="0" bIns="0" rtlCol="0" anchor="ctr"/>
+          <a:lstStyle/>
+          <a:p>
+            <a:pPr indent="0" marL="0">
+              <a:buNone/>
+            </a:pPr>
+            <a:r>
+              <a:rPr lang="en-US" sz="1100" dirty="0">
+                <a:solidFill>
+                  <a:srgbClr val="10161F"/>
+                </a:solidFill>
+                <a:latin typeface="Pretendard" pitchFamily="34" charset="0"/>
+                <a:ea typeface="Pretendard" pitchFamily="34" charset="-122"/>
+                <a:cs typeface="Pretendard" pitchFamily="34" charset="-120"/>
+              </a:rPr>
+              <a:t>실사 총평: 자산의 물리적·권리적 하자가 없으며, 세부 임대차 계약서 및 등기사항증명서는 LOI 접수 후 원본 열람 가능합니다.</a:t>
+            </a:r>
+            <a:endParaRPr lang="en-US" sz="1100" dirty="0"/>
+          </a:p>
+        </p:txBody>
+      </p:sp>
+      <p:sp>
+        <p:nvSpPr>
+          <p:cNvPr id="23" name="Text 21"/>
+          <p:cNvSpPr/>
+          <p:nvPr/>
+        </p:nvSpPr>
+        <p:spPr>
+          <a:xfrm>
+            <a:off x="566928" y="6382512"/>
+            <a:ext cx="7315200" cy="219456"/>
+          </a:xfrm>
+          <a:prstGeom prst="rect">
+            <a:avLst/>
+          </a:prstGeom>
+          <a:noFill/>
+          <a:ln/>
+        </p:spPr>
+        <p:txBody>
+          <a:bodyPr wrap="square" lIns="0" tIns="0" rIns="0" bIns="0" rtlCol="0" anchor="ctr"/>
+          <a:lstStyle/>
+          <a:p>
+            <a:pPr indent="0" marL="0">
+              <a:buNone/>
+            </a:pPr>
+            <a:r>
+              <a:rPr lang="en-US" sz="800" dirty="0">
+                <a:solidFill>
+                  <a:srgbClr val="718096"/>
+                </a:solidFill>
+                <a:latin typeface="Pretendard" pitchFamily="34" charset="0"/>
+                <a:ea typeface="Pretendard" pitchFamily="34" charset="-122"/>
+                <a:cs typeface="Pretendard" pitchFamily="34" charset="-120"/>
+              </a:rPr>
               <a:t>크리딜   |   </a:t>
             </a:r>
             <a:endParaRPr lang="en-US" sz="800" dirty="0"/>
@@ -8346,7 +7485,7 @@
       </p:sp>
       <p:sp>
         <p:nvSpPr>
-          <p:cNvPr id="12" name="Text 10"/>
+          <p:cNvPr id="24" name="Text 22"/>
           <p:cNvSpPr/>
           <p:nvPr/>
         </p:nvSpPr>
@@ -8585,645 +7724,9 @@
                 <a:ea typeface="Pretendard" pitchFamily="34" charset="-122"/>
                 <a:cs typeface="Pretendard" pitchFamily="34" charset="-120"/>
               </a:rPr>
-              <a:t>3대 핵심 투자 포인트 (Investment Highlights)</a:t>
+              <a:t>밸류업 시나리오 (AI 추정)</a:t>
             </a:r>
             <a:endParaRPr lang="en-US" sz="1100" dirty="0"/>
-          </a:p>
-        </p:txBody>
-      </p:sp>
-      <p:sp>
-        <p:nvSpPr>
-          <p:cNvPr id="7" name="Shape 5"/>
-          <p:cNvSpPr/>
-          <p:nvPr/>
-        </p:nvSpPr>
-        <p:spPr>
-          <a:xfrm>
-            <a:off x="566928" y="1481328"/>
-            <a:ext cx="3472586" cy="2560320"/>
-          </a:xfrm>
-          <a:prstGeom prst="roundRect">
-            <a:avLst>
-              <a:gd name="adj" fmla="val 2857"/>
-            </a:avLst>
-          </a:prstGeom>
-          <a:solidFill>
-            <a:srgbClr val="F7FAFC"/>
-          </a:solidFill>
-          <a:ln w="10160">
-            <a:solidFill>
-              <a:srgbClr val="CBD5E0"/>
-            </a:solidFill>
-            <a:prstDash val="solid"/>
-          </a:ln>
-        </p:spPr>
-      </p:sp>
-      <p:sp>
-        <p:nvSpPr>
-          <p:cNvPr id="8" name="Shape 6"/>
-          <p:cNvSpPr/>
-          <p:nvPr/>
-        </p:nvSpPr>
-        <p:spPr>
-          <a:xfrm>
-            <a:off x="566928" y="1481328"/>
-            <a:ext cx="3472586" cy="54864"/>
-          </a:xfrm>
-          <a:prstGeom prst="rect">
-            <a:avLst/>
-          </a:prstGeom>
-          <a:solidFill>
-            <a:srgbClr val="B98A2E"/>
-          </a:solidFill>
-          <a:ln/>
-        </p:spPr>
-      </p:sp>
-      <p:sp>
-        <p:nvSpPr>
-          <p:cNvPr id="9" name="Shape 7"/>
-          <p:cNvSpPr/>
-          <p:nvPr/>
-        </p:nvSpPr>
-        <p:spPr>
-          <a:xfrm>
-            <a:off x="795528" y="1755648"/>
-            <a:ext cx="475488" cy="292608"/>
-          </a:xfrm>
-          <a:prstGeom prst="roundRect">
-            <a:avLst>
-              <a:gd name="adj" fmla="val 12500"/>
-            </a:avLst>
-          </a:prstGeom>
-          <a:solidFill>
-            <a:srgbClr val="D9B668"/>
-          </a:solidFill>
-          <a:ln/>
-        </p:spPr>
-      </p:sp>
-      <p:sp>
-        <p:nvSpPr>
-          <p:cNvPr id="10" name="Text 8"/>
-          <p:cNvSpPr/>
-          <p:nvPr/>
-        </p:nvSpPr>
-        <p:spPr>
-          <a:xfrm>
-            <a:off x="795528" y="1755648"/>
-            <a:ext cx="475488" cy="292608"/>
-          </a:xfrm>
-          <a:prstGeom prst="rect">
-            <a:avLst/>
-          </a:prstGeom>
-          <a:noFill/>
-          <a:ln/>
-        </p:spPr>
-        <p:txBody>
-          <a:bodyPr wrap="square" lIns="0" tIns="0" rIns="0" bIns="0" rtlCol="0" anchor="ctr"/>
-          <a:lstStyle/>
-          <a:p>
-            <a:pPr algn="ctr" indent="0" marL="0">
-              <a:buNone/>
-            </a:pPr>
-            <a:r>
-              <a:rPr lang="en-US" sz="1100" b="1" dirty="0">
-                <a:solidFill>
-                  <a:srgbClr val="977024"/>
-                </a:solidFill>
-                <a:latin typeface="Arial" pitchFamily="34" charset="0"/>
-                <a:ea typeface="Arial" pitchFamily="34" charset="-122"/>
-                <a:cs typeface="Arial" pitchFamily="34" charset="-120"/>
-              </a:rPr>
-              <a:t>01</a:t>
-            </a:r>
-            <a:endParaRPr lang="en-US" sz="1100" dirty="0"/>
-          </a:p>
-        </p:txBody>
-      </p:sp>
-      <p:sp>
-        <p:nvSpPr>
-          <p:cNvPr id="11" name="Text 9"/>
-          <p:cNvSpPr/>
-          <p:nvPr/>
-        </p:nvSpPr>
-        <p:spPr>
-          <a:xfrm>
-            <a:off x="795528" y="2194560"/>
-            <a:ext cx="3015386" cy="365760"/>
-          </a:xfrm>
-          <a:prstGeom prst="rect">
-            <a:avLst/>
-          </a:prstGeom>
-          <a:noFill/>
-          <a:ln/>
-        </p:spPr>
-        <p:txBody>
-          <a:bodyPr wrap="square" lIns="0" tIns="0" rIns="0" bIns="0" rtlCol="0" anchor="t"/>
-          <a:lstStyle/>
-          <a:p>
-            <a:pPr indent="0" marL="0">
-              <a:buNone/>
-            </a:pPr>
-            <a:r>
-              <a:rPr lang="en-US" sz="1500" b="1" dirty="0">
-                <a:solidFill>
-                  <a:srgbClr val="10161F"/>
-                </a:solidFill>
-                <a:latin typeface="Pretendard" pitchFamily="34" charset="0"/>
-                <a:ea typeface="Pretendard" pitchFamily="34" charset="-122"/>
-                <a:cs typeface="Pretendard" pitchFamily="34" charset="-120"/>
-              </a:rPr>
-              <a:t>원금 안전판 확보</a:t>
-            </a:r>
-            <a:endParaRPr lang="en-US" sz="1500" dirty="0"/>
-          </a:p>
-        </p:txBody>
-      </p:sp>
-      <p:sp>
-        <p:nvSpPr>
-          <p:cNvPr id="12" name="Shape 10"/>
-          <p:cNvSpPr/>
-          <p:nvPr/>
-        </p:nvSpPr>
-        <p:spPr>
-          <a:xfrm>
-            <a:off x="795528" y="2624328"/>
-            <a:ext cx="3015386" cy="0"/>
-          </a:xfrm>
-          <a:prstGeom prst="line">
-            <a:avLst/>
-          </a:prstGeom>
-          <a:noFill/>
-          <a:ln w="6350">
-            <a:solidFill>
-              <a:srgbClr val="CBD5E0"/>
-            </a:solidFill>
-            <a:prstDash val="solid"/>
-          </a:ln>
-        </p:spPr>
-      </p:sp>
-      <p:sp>
-        <p:nvSpPr>
-          <p:cNvPr id="13" name="Text 11"/>
-          <p:cNvSpPr/>
-          <p:nvPr/>
-        </p:nvSpPr>
-        <p:spPr>
-          <a:xfrm>
-            <a:off x="795528" y="2779776"/>
-            <a:ext cx="3015386" cy="1051560"/>
-          </a:xfrm>
-          <a:prstGeom prst="rect">
-            <a:avLst/>
-          </a:prstGeom>
-          <a:noFill/>
-          <a:ln/>
-        </p:spPr>
-        <p:txBody>
-          <a:bodyPr wrap="square" lIns="0" tIns="0" rIns="0" bIns="0" rtlCol="0" anchor="t"/>
-          <a:lstStyle/>
-          <a:p>
-            <a:pPr indent="0" marL="0">
-              <a:lnSpc>
-                <a:spcPct val="130000"/>
-              </a:lnSpc>
-              <a:buNone/>
-            </a:pPr>
-            <a:r>
-              <a:rPr lang="en-US" sz="1200" dirty="0">
-                <a:solidFill>
-                  <a:srgbClr val="10161F"/>
-                </a:solidFill>
-                <a:latin typeface="Pretendard" pitchFamily="34" charset="0"/>
-                <a:ea typeface="Pretendard" pitchFamily="34" charset="-122"/>
-                <a:cs typeface="Pretendard" pitchFamily="34" charset="-120"/>
-              </a:rPr>
-              <a:t>종로권역의 핵심 입지로, 우량한 대지 지분 가치가 하방 경직성을 강력히 지지합니다.</a:t>
-            </a:r>
-            <a:endParaRPr lang="en-US" sz="1200" dirty="0"/>
-          </a:p>
-        </p:txBody>
-      </p:sp>
-      <p:sp>
-        <p:nvSpPr>
-          <p:cNvPr id="14" name="Shape 12"/>
-          <p:cNvSpPr/>
-          <p:nvPr/>
-        </p:nvSpPr>
-        <p:spPr>
-          <a:xfrm>
-            <a:off x="4359554" y="1481328"/>
-            <a:ext cx="3472586" cy="2560320"/>
-          </a:xfrm>
-          <a:prstGeom prst="roundRect">
-            <a:avLst>
-              <a:gd name="adj" fmla="val 2857"/>
-            </a:avLst>
-          </a:prstGeom>
-          <a:solidFill>
-            <a:srgbClr val="F7FAFC"/>
-          </a:solidFill>
-          <a:ln w="10160">
-            <a:solidFill>
-              <a:srgbClr val="CBD5E0"/>
-            </a:solidFill>
-            <a:prstDash val="solid"/>
-          </a:ln>
-        </p:spPr>
-      </p:sp>
-      <p:sp>
-        <p:nvSpPr>
-          <p:cNvPr id="15" name="Shape 13"/>
-          <p:cNvSpPr/>
-          <p:nvPr/>
-        </p:nvSpPr>
-        <p:spPr>
-          <a:xfrm>
-            <a:off x="4359554" y="1481328"/>
-            <a:ext cx="3472586" cy="54864"/>
-          </a:xfrm>
-          <a:prstGeom prst="rect">
-            <a:avLst/>
-          </a:prstGeom>
-          <a:solidFill>
-            <a:srgbClr val="B98A2E"/>
-          </a:solidFill>
-          <a:ln/>
-        </p:spPr>
-      </p:sp>
-      <p:sp>
-        <p:nvSpPr>
-          <p:cNvPr id="16" name="Shape 14"/>
-          <p:cNvSpPr/>
-          <p:nvPr/>
-        </p:nvSpPr>
-        <p:spPr>
-          <a:xfrm>
-            <a:off x="4588154" y="1755648"/>
-            <a:ext cx="475488" cy="292608"/>
-          </a:xfrm>
-          <a:prstGeom prst="roundRect">
-            <a:avLst>
-              <a:gd name="adj" fmla="val 12500"/>
-            </a:avLst>
-          </a:prstGeom>
-          <a:solidFill>
-            <a:srgbClr val="D9B668"/>
-          </a:solidFill>
-          <a:ln/>
-        </p:spPr>
-      </p:sp>
-      <p:sp>
-        <p:nvSpPr>
-          <p:cNvPr id="17" name="Text 15"/>
-          <p:cNvSpPr/>
-          <p:nvPr/>
-        </p:nvSpPr>
-        <p:spPr>
-          <a:xfrm>
-            <a:off x="4588154" y="1755648"/>
-            <a:ext cx="475488" cy="292608"/>
-          </a:xfrm>
-          <a:prstGeom prst="rect">
-            <a:avLst/>
-          </a:prstGeom>
-          <a:noFill/>
-          <a:ln/>
-        </p:spPr>
-        <p:txBody>
-          <a:bodyPr wrap="square" lIns="0" tIns="0" rIns="0" bIns="0" rtlCol="0" anchor="ctr"/>
-          <a:lstStyle/>
-          <a:p>
-            <a:pPr algn="ctr" indent="0" marL="0">
-              <a:buNone/>
-            </a:pPr>
-            <a:r>
-              <a:rPr lang="en-US" sz="1100" b="1" dirty="0">
-                <a:solidFill>
-                  <a:srgbClr val="977024"/>
-                </a:solidFill>
-                <a:latin typeface="Arial" pitchFamily="34" charset="0"/>
-                <a:ea typeface="Arial" pitchFamily="34" charset="-122"/>
-                <a:cs typeface="Arial" pitchFamily="34" charset="-120"/>
-              </a:rPr>
-              <a:t>02</a:t>
-            </a:r>
-            <a:endParaRPr lang="en-US" sz="1100" dirty="0"/>
-          </a:p>
-        </p:txBody>
-      </p:sp>
-      <p:sp>
-        <p:nvSpPr>
-          <p:cNvPr id="18" name="Text 16"/>
-          <p:cNvSpPr/>
-          <p:nvPr/>
-        </p:nvSpPr>
-        <p:spPr>
-          <a:xfrm>
-            <a:off x="4588154" y="2194560"/>
-            <a:ext cx="3015386" cy="365760"/>
-          </a:xfrm>
-          <a:prstGeom prst="rect">
-            <a:avLst/>
-          </a:prstGeom>
-          <a:noFill/>
-          <a:ln/>
-        </p:spPr>
-        <p:txBody>
-          <a:bodyPr wrap="square" lIns="0" tIns="0" rIns="0" bIns="0" rtlCol="0" anchor="t"/>
-          <a:lstStyle/>
-          <a:p>
-            <a:pPr indent="0" marL="0">
-              <a:buNone/>
-            </a:pPr>
-            <a:r>
-              <a:rPr lang="en-US" sz="1500" b="1" dirty="0">
-                <a:solidFill>
-                  <a:srgbClr val="10161F"/>
-                </a:solidFill>
-                <a:latin typeface="Pretendard" pitchFamily="34" charset="0"/>
-                <a:ea typeface="Pretendard" pitchFamily="34" charset="-122"/>
-                <a:cs typeface="Pretendard" pitchFamily="34" charset="-120"/>
-              </a:rPr>
-              <a:t>확실한 월 현금흐름</a:t>
-            </a:r>
-            <a:endParaRPr lang="en-US" sz="1500" dirty="0"/>
-          </a:p>
-        </p:txBody>
-      </p:sp>
-      <p:sp>
-        <p:nvSpPr>
-          <p:cNvPr id="19" name="Shape 17"/>
-          <p:cNvSpPr/>
-          <p:nvPr/>
-        </p:nvSpPr>
-        <p:spPr>
-          <a:xfrm>
-            <a:off x="4588154" y="2624328"/>
-            <a:ext cx="3015386" cy="0"/>
-          </a:xfrm>
-          <a:prstGeom prst="line">
-            <a:avLst/>
-          </a:prstGeom>
-          <a:noFill/>
-          <a:ln w="6350">
-            <a:solidFill>
-              <a:srgbClr val="CBD5E0"/>
-            </a:solidFill>
-            <a:prstDash val="solid"/>
-          </a:ln>
-        </p:spPr>
-      </p:sp>
-      <p:sp>
-        <p:nvSpPr>
-          <p:cNvPr id="20" name="Text 18"/>
-          <p:cNvSpPr/>
-          <p:nvPr/>
-        </p:nvSpPr>
-        <p:spPr>
-          <a:xfrm>
-            <a:off x="4588154" y="2779776"/>
-            <a:ext cx="3015386" cy="1051560"/>
-          </a:xfrm>
-          <a:prstGeom prst="rect">
-            <a:avLst/>
-          </a:prstGeom>
-          <a:noFill/>
-          <a:ln/>
-        </p:spPr>
-        <p:txBody>
-          <a:bodyPr wrap="square" lIns="0" tIns="0" rIns="0" bIns="0" rtlCol="0" anchor="t"/>
-          <a:lstStyle/>
-          <a:p>
-            <a:pPr indent="0" marL="0">
-              <a:lnSpc>
-                <a:spcPct val="130000"/>
-              </a:lnSpc>
-              <a:buNone/>
-            </a:pPr>
-            <a:r>
-              <a:rPr lang="en-US" sz="1200" dirty="0">
-                <a:solidFill>
-                  <a:srgbClr val="10161F"/>
-                </a:solidFill>
-                <a:latin typeface="Pretendard" pitchFamily="34" charset="0"/>
-                <a:ea typeface="Pretendard" pitchFamily="34" charset="-122"/>
-                <a:cs typeface="Pretendard" pitchFamily="34" charset="-120"/>
-              </a:rPr>
-              <a:t>우량 테넌트 만실 운영 및 장기 임대차 구조를 기반으로 매월 안정적인 순영업소득(NOI) 창출이 기대됩니다.</a:t>
-            </a:r>
-            <a:endParaRPr lang="en-US" sz="1200" dirty="0"/>
-          </a:p>
-        </p:txBody>
-      </p:sp>
-      <p:sp>
-        <p:nvSpPr>
-          <p:cNvPr id="21" name="Shape 19"/>
-          <p:cNvSpPr/>
-          <p:nvPr/>
-        </p:nvSpPr>
-        <p:spPr>
-          <a:xfrm>
-            <a:off x="8152181" y="1481328"/>
-            <a:ext cx="3472586" cy="2560320"/>
-          </a:xfrm>
-          <a:prstGeom prst="roundRect">
-            <a:avLst>
-              <a:gd name="adj" fmla="val 2857"/>
-            </a:avLst>
-          </a:prstGeom>
-          <a:solidFill>
-            <a:srgbClr val="F7FAFC"/>
-          </a:solidFill>
-          <a:ln w="10160">
-            <a:solidFill>
-              <a:srgbClr val="CBD5E0"/>
-            </a:solidFill>
-            <a:prstDash val="solid"/>
-          </a:ln>
-        </p:spPr>
-      </p:sp>
-      <p:sp>
-        <p:nvSpPr>
-          <p:cNvPr id="22" name="Shape 20"/>
-          <p:cNvSpPr/>
-          <p:nvPr/>
-        </p:nvSpPr>
-        <p:spPr>
-          <a:xfrm>
-            <a:off x="8152181" y="1481328"/>
-            <a:ext cx="3472586" cy="54864"/>
-          </a:xfrm>
-          <a:prstGeom prst="rect">
-            <a:avLst/>
-          </a:prstGeom>
-          <a:solidFill>
-            <a:srgbClr val="B98A2E"/>
-          </a:solidFill>
-          <a:ln/>
-        </p:spPr>
-      </p:sp>
-      <p:sp>
-        <p:nvSpPr>
-          <p:cNvPr id="23" name="Shape 21"/>
-          <p:cNvSpPr/>
-          <p:nvPr/>
-        </p:nvSpPr>
-        <p:spPr>
-          <a:xfrm>
-            <a:off x="8380781" y="1755648"/>
-            <a:ext cx="475488" cy="292608"/>
-          </a:xfrm>
-          <a:prstGeom prst="roundRect">
-            <a:avLst>
-              <a:gd name="adj" fmla="val 12500"/>
-            </a:avLst>
-          </a:prstGeom>
-          <a:solidFill>
-            <a:srgbClr val="D9B668"/>
-          </a:solidFill>
-          <a:ln/>
-        </p:spPr>
-      </p:sp>
-      <p:sp>
-        <p:nvSpPr>
-          <p:cNvPr id="24" name="Text 22"/>
-          <p:cNvSpPr/>
-          <p:nvPr/>
-        </p:nvSpPr>
-        <p:spPr>
-          <a:xfrm>
-            <a:off x="8380781" y="1755648"/>
-            <a:ext cx="475488" cy="292608"/>
-          </a:xfrm>
-          <a:prstGeom prst="rect">
-            <a:avLst/>
-          </a:prstGeom>
-          <a:noFill/>
-          <a:ln/>
-        </p:spPr>
-        <p:txBody>
-          <a:bodyPr wrap="square" lIns="0" tIns="0" rIns="0" bIns="0" rtlCol="0" anchor="ctr"/>
-          <a:lstStyle/>
-          <a:p>
-            <a:pPr algn="ctr" indent="0" marL="0">
-              <a:buNone/>
-            </a:pPr>
-            <a:r>
-              <a:rPr lang="en-US" sz="1100" b="1" dirty="0">
-                <a:solidFill>
-                  <a:srgbClr val="977024"/>
-                </a:solidFill>
-                <a:latin typeface="Arial" pitchFamily="34" charset="0"/>
-                <a:ea typeface="Arial" pitchFamily="34" charset="-122"/>
-                <a:cs typeface="Arial" pitchFamily="34" charset="-120"/>
-              </a:rPr>
-              <a:t>03</a:t>
-            </a:r>
-            <a:endParaRPr lang="en-US" sz="1100" dirty="0"/>
-          </a:p>
-        </p:txBody>
-      </p:sp>
-      <p:sp>
-        <p:nvSpPr>
-          <p:cNvPr id="25" name="Text 23"/>
-          <p:cNvSpPr/>
-          <p:nvPr/>
-        </p:nvSpPr>
-        <p:spPr>
-          <a:xfrm>
-            <a:off x="8380781" y="2194560"/>
-            <a:ext cx="3015386" cy="365760"/>
-          </a:xfrm>
-          <a:prstGeom prst="rect">
-            <a:avLst/>
-          </a:prstGeom>
-          <a:noFill/>
-          <a:ln/>
-        </p:spPr>
-        <p:txBody>
-          <a:bodyPr wrap="square" lIns="0" tIns="0" rIns="0" bIns="0" rtlCol="0" anchor="t"/>
-          <a:lstStyle/>
-          <a:p>
-            <a:pPr indent="0" marL="0">
-              <a:buNone/>
-            </a:pPr>
-            <a:r>
-              <a:rPr lang="en-US" sz="1500" b="1" dirty="0">
-                <a:solidFill>
-                  <a:srgbClr val="10161F"/>
-                </a:solidFill>
-                <a:latin typeface="Pretendard" pitchFamily="34" charset="0"/>
-                <a:ea typeface="Pretendard" pitchFamily="34" charset="-122"/>
-                <a:cs typeface="Pretendard" pitchFamily="34" charset="-120"/>
-              </a:rPr>
-              <a:t>가치 상승 및 출구 전략</a:t>
-            </a:r>
-            <a:endParaRPr lang="en-US" sz="1500" dirty="0"/>
-          </a:p>
-        </p:txBody>
-      </p:sp>
-      <p:sp>
-        <p:nvSpPr>
-          <p:cNvPr id="26" name="Shape 24"/>
-          <p:cNvSpPr/>
-          <p:nvPr/>
-        </p:nvSpPr>
-        <p:spPr>
-          <a:xfrm>
-            <a:off x="8380781" y="2624328"/>
-            <a:ext cx="3015386" cy="0"/>
-          </a:xfrm>
-          <a:prstGeom prst="line">
-            <a:avLst/>
-          </a:prstGeom>
-          <a:noFill/>
-          <a:ln w="6350">
-            <a:solidFill>
-              <a:srgbClr val="CBD5E0"/>
-            </a:solidFill>
-            <a:prstDash val="solid"/>
-          </a:ln>
-        </p:spPr>
-      </p:sp>
-      <p:sp>
-        <p:nvSpPr>
-          <p:cNvPr id="27" name="Text 25"/>
-          <p:cNvSpPr/>
-          <p:nvPr/>
-        </p:nvSpPr>
-        <p:spPr>
-          <a:xfrm>
-            <a:off x="8380781" y="2779776"/>
-            <a:ext cx="3015386" cy="1051560"/>
-          </a:xfrm>
-          <a:prstGeom prst="rect">
-            <a:avLst/>
-          </a:prstGeom>
-          <a:noFill/>
-          <a:ln/>
-        </p:spPr>
-        <p:txBody>
-          <a:bodyPr wrap="square" lIns="0" tIns="0" rIns="0" bIns="0" rtlCol="0" anchor="t"/>
-          <a:lstStyle/>
-          <a:p>
-            <a:pPr indent="0" marL="0">
-              <a:lnSpc>
-                <a:spcPct val="130000"/>
-              </a:lnSpc>
-              <a:buNone/>
-            </a:pPr>
-            <a:r>
-              <a:rPr lang="en-US" sz="1200" dirty="0">
-                <a:solidFill>
-                  <a:srgbClr val="10161F"/>
-                </a:solidFill>
-                <a:latin typeface="Pretendard" pitchFamily="34" charset="0"/>
-                <a:ea typeface="Pretendard" pitchFamily="34" charset="-122"/>
-                <a:cs typeface="Pretendard" pitchFamily="34" charset="-120"/>
-              </a:rPr>
-              <a:t>현행 공법 여력을 활용한 밸류업 기회와 더불어 향후 권역 지가 상승에 따른 시세차익 실현이 유력합니다.</a:t>
-            </a:r>
-            <a:endParaRPr lang="en-US" sz="1200" dirty="0"/>
           </a:p>
         </p:txBody>
       </p:sp>
@@ -9250,9 +7753,10 @@
             <a:tbl>
               <a:tblPr/>
               <a:tblGrid>
-                <a:gridCol w="3685946"/>
-                <a:gridCol w="3685946"/>
-                <a:gridCol w="3685946"/>
+                <a:gridCol w="2764460"/>
+                <a:gridCol w="2764460"/>
+                <a:gridCol w="2764460"/>
+                <a:gridCol w="2764460"/>
               </a:tblGrid>
               <a:tr h="329184">
                 <a:tc>
@@ -9272,7 +7776,7 @@
                           <a:ea typeface="Pretendard" pitchFamily="34" charset="-122"/>
                           <a:cs typeface="Pretendard" pitchFamily="34" charset="-120"/>
                         </a:rPr>
-                        <a:t>유형</a:t>
+                        <a:t>시나리오</a:t>
                       </a:r>
                       <a:endParaRPr lang="en-US" sz="1050" dirty="0">
                         <a:latin typeface="Pretendard" charset="0"/>
@@ -9340,7 +7844,21 @@
                           <a:ea typeface="Pretendard" pitchFamily="34" charset="-122"/>
                           <a:cs typeface="Pretendard" pitchFamily="34" charset="-120"/>
                         </a:rPr>
-                        <a:t>적합도</a:t>
+                        <a:t>NOI </a:t>
+                      </a:r>
+                      <a:pPr indent="0" marL="0">
+                        <a:buNone/>
+                      </a:pPr>
+                      <a:r>
+                        <a:rPr lang="en-US" sz="1050" b="1" dirty="0">
+                          <a:solidFill>
+                            <a:srgbClr val="718096"/>
+                          </a:solidFill>
+                          <a:latin typeface="Pretendard" pitchFamily="34" charset="0"/>
+                          <a:ea typeface="Pretendard" pitchFamily="34" charset="-122"/>
+                          <a:cs typeface="Pretendard" pitchFamily="34" charset="-120"/>
+                        </a:rPr>
+                        <a:t>개선</a:t>
                       </a:r>
                       <a:endParaRPr lang="en-US" sz="1050" dirty="0">
                         <a:latin typeface="Pretendard" charset="0"/>
@@ -9408,7 +7926,117 @@
                           <a:ea typeface="Pretendard" pitchFamily="34" charset="-122"/>
                           <a:cs typeface="Pretendard" pitchFamily="34" charset="-120"/>
                         </a:rPr>
-                        <a:t>이유</a:t>
+                        <a:t>개선 </a:t>
+                      </a:r>
+                      <a:pPr indent="0" marL="0">
+                        <a:buNone/>
+                      </a:pPr>
+                      <a:r>
+                        <a:rPr lang="en-US" sz="1050" b="1" dirty="0">
+                          <a:solidFill>
+                            <a:srgbClr val="718096"/>
+                          </a:solidFill>
+                          <a:latin typeface="Pretendard" pitchFamily="34" charset="0"/>
+                          <a:ea typeface="Pretendard" pitchFamily="34" charset="-122"/>
+                          <a:cs typeface="Pretendard" pitchFamily="34" charset="-120"/>
+                        </a:rPr>
+                        <a:t>Cap </a:t>
+                      </a:r>
+                      <a:pPr indent="0" marL="0">
+                        <a:buNone/>
+                      </a:pPr>
+                      <a:r>
+                        <a:rPr lang="en-US" sz="1050" b="1" dirty="0">
+                          <a:solidFill>
+                            <a:srgbClr val="718096"/>
+                          </a:solidFill>
+                          <a:latin typeface="Pretendard" pitchFamily="34" charset="0"/>
+                          <a:ea typeface="Pretendard" pitchFamily="34" charset="-122"/>
+                          <a:cs typeface="Pretendard" pitchFamily="34" charset="-120"/>
+                        </a:rPr>
+                        <a:t>Rate</a:t>
+                      </a:r>
+                      <a:endParaRPr lang="en-US" sz="1050" dirty="0">
+                        <a:latin typeface="Pretendard" charset="0"/>
+                        <a:ea typeface="Pretendard" charset="0"/>
+                        <a:cs typeface="Pretendard" charset="0"/>
+                      </a:endParaRPr>
+                    </a:p>
+                  </a:txBody>
+                  <a:tcPr marL="50800" marR="50800" marT="25400" marB="25400" anchor="ctr">
+                    <a:lnL w="3810" cap="flat" cmpd="sng" algn="ctr">
+                      <a:solidFill>
+                        <a:srgbClr val="CBD5E0"/>
+                      </a:solidFill>
+                      <a:prstDash val="solid"/>
+                      <a:round/>
+                      <a:headEnd type="none" w="med" len="med"/>
+                      <a:tailEnd type="none" w="med" len="med"/>
+                    </a:lnL>
+                    <a:lnR w="3810" cap="flat" cmpd="sng" algn="ctr">
+                      <a:solidFill>
+                        <a:srgbClr val="CBD5E0"/>
+                      </a:solidFill>
+                      <a:prstDash val="solid"/>
+                      <a:round/>
+                      <a:headEnd type="none" w="med" len="med"/>
+                      <a:tailEnd type="none" w="med" len="med"/>
+                    </a:lnR>
+                    <a:lnT w="3810" cap="flat" cmpd="sng" algn="ctr">
+                      <a:solidFill>
+                        <a:srgbClr val="CBD5E0"/>
+                      </a:solidFill>
+                      <a:prstDash val="solid"/>
+                      <a:round/>
+                      <a:headEnd type="none" w="med" len="med"/>
+                      <a:tailEnd type="none" w="med" len="med"/>
+                    </a:lnT>
+                    <a:lnB w="3810" cap="flat" cmpd="sng" algn="ctr">
+                      <a:solidFill>
+                        <a:srgbClr val="CBD5E0"/>
+                      </a:solidFill>
+                      <a:prstDash val="solid"/>
+                      <a:round/>
+                      <a:headEnd type="none" w="med" len="med"/>
+                      <a:tailEnd type="none" w="med" len="med"/>
+                    </a:lnB>
+                    <a:solidFill>
+                      <a:srgbClr val="F7FAFC"/>
+                    </a:solidFill>
+                  </a:tcPr>
+                </a:tc>
+                <a:tc>
+                  <a:txBody>
+                    <a:bodyPr/>
+                    <a:lstStyle/>
+                    <a:p>
+                      <a:pPr indent="0" marL="0">
+                        <a:buNone/>
+                      </a:pPr>
+                      <a:r>
+                        <a:rPr lang="en-US" sz="1050" b="1" dirty="0">
+                          <a:solidFill>
+                            <a:srgbClr val="718096"/>
+                          </a:solidFill>
+                          <a:latin typeface="Pretendard" pitchFamily="34" charset="0"/>
+                          <a:ea typeface="Pretendard" pitchFamily="34" charset="-122"/>
+                          <a:cs typeface="Pretendard" pitchFamily="34" charset="-120"/>
+                        </a:rPr>
+                        <a:t>투자 </a:t>
+                      </a:r>
+                      <a:pPr indent="0" marL="0">
+                        <a:buNone/>
+                      </a:pPr>
+                      <a:r>
+                        <a:rPr lang="en-US" sz="1050" b="1" dirty="0">
+                          <a:solidFill>
+                            <a:srgbClr val="718096"/>
+                          </a:solidFill>
+                          <a:latin typeface="Pretendard" pitchFamily="34" charset="0"/>
+                          <a:ea typeface="Pretendard" pitchFamily="34" charset="-122"/>
+                          <a:cs typeface="Pretendard" pitchFamily="34" charset="-120"/>
+                        </a:rPr>
+                        <a:t>비용</a:t>
                       </a:r>
                       <a:endParaRPr lang="en-US" sz="1050" dirty="0">
                         <a:latin typeface="Pretendard" charset="0"/>
@@ -9478,7 +8106,49 @@
                           <a:ea typeface="Pretendard" pitchFamily="34" charset="-122"/>
                           <a:cs typeface="Pretendard" pitchFamily="34" charset="-120"/>
                         </a:rPr>
-                        <a:t>(임대수익)</a:t>
+                        <a:t>② </a:t>
+                      </a:r>
+                      <a:pPr indent="0" marL="0">
+                        <a:buNone/>
+                      </a:pPr>
+                      <a:r>
+                        <a:rPr lang="en-US" sz="1050" b="1" dirty="0">
+                          <a:solidFill>
+                            <a:srgbClr val="10161F"/>
+                          </a:solidFill>
+                          <a:latin typeface="Pretendard" pitchFamily="34" charset="0"/>
+                          <a:ea typeface="Pretendard" pitchFamily="34" charset="-122"/>
+                          <a:cs typeface="Pretendard" pitchFamily="34" charset="-120"/>
+                        </a:rPr>
+                        <a:t>임대료 </a:t>
+                      </a:r>
+                      <a:pPr indent="0" marL="0">
+                        <a:buNone/>
+                      </a:pPr>
+                      <a:r>
+                        <a:rPr lang="en-US" sz="1050" b="1" dirty="0">
+                          <a:solidFill>
+                            <a:srgbClr val="10161F"/>
+                          </a:solidFill>
+                          <a:latin typeface="Pretendard" pitchFamily="34" charset="0"/>
+                          <a:ea typeface="Pretendard" pitchFamily="34" charset="-122"/>
+                          <a:cs typeface="Pretendard" pitchFamily="34" charset="-120"/>
+                        </a:rPr>
+                        <a:t>현실화 </a:t>
+                      </a:r>
+                      <a:pPr indent="0" marL="0">
+                        <a:buNone/>
+                      </a:pPr>
+                      <a:r>
+                        <a:rPr lang="en-US" sz="1050" b="1" dirty="0">
+                          <a:solidFill>
+                            <a:srgbClr val="10161F"/>
+                          </a:solidFill>
+                          <a:latin typeface="Pretendard" pitchFamily="34" charset="0"/>
+                          <a:ea typeface="Pretendard" pitchFamily="34" charset="-122"/>
+                          <a:cs typeface="Pretendard" pitchFamily="34" charset="-120"/>
+                        </a:rPr>
+                        <a:t>(+5%)</a:t>
                       </a:r>
                       <a:endParaRPr lang="en-US" sz="1050" dirty="0">
                         <a:latin typeface="Pretendard" charset="0"/>
@@ -9546,7 +8216,49 @@
                           <a:ea typeface="Pretendard" pitchFamily="34" charset="-122"/>
                           <a:cs typeface="Pretendard" pitchFamily="34" charset="-120"/>
                         </a:rPr>
-                        <a:t>★★★★★</a:t>
+                        <a:t>+약 </a:t>
+                      </a:r>
+                      <a:pPr indent="0" marL="0">
+                        <a:buNone/>
+                      </a:pPr>
+                      <a:r>
+                        <a:rPr lang="en-US" sz="1050" dirty="0">
+                          <a:solidFill>
+                            <a:srgbClr val="10161F"/>
+                          </a:solidFill>
+                          <a:latin typeface="Pretendard" pitchFamily="34" charset="0"/>
+                          <a:ea typeface="Pretendard" pitchFamily="34" charset="-122"/>
+                          <a:cs typeface="Pretendard" pitchFamily="34" charset="-120"/>
+                        </a:rPr>
+                        <a:t>0.40억 </a:t>
+                      </a:r>
+                      <a:pPr indent="0" marL="0">
+                        <a:buNone/>
+                      </a:pPr>
+                      <a:r>
+                        <a:rPr lang="en-US" sz="1050" dirty="0">
+                          <a:solidFill>
+                            <a:srgbClr val="10161F"/>
+                          </a:solidFill>
+                          <a:latin typeface="Pretendard" pitchFamily="34" charset="0"/>
+                          <a:ea typeface="Pretendard" pitchFamily="34" charset="-122"/>
+                          <a:cs typeface="Pretendard" pitchFamily="34" charset="-120"/>
+                        </a:rPr>
+                        <a:t>원 </a:t>
+                      </a:r>
+                      <a:pPr indent="0" marL="0">
+                        <a:buNone/>
+                      </a:pPr>
+                      <a:r>
+                        <a:rPr lang="en-US" sz="1050" dirty="0">
+                          <a:solidFill>
+                            <a:srgbClr val="10161F"/>
+                          </a:solidFill>
+                          <a:latin typeface="Pretendard" pitchFamily="34" charset="0"/>
+                          <a:ea typeface="Pretendard" pitchFamily="34" charset="-122"/>
+                          <a:cs typeface="Pretendard" pitchFamily="34" charset="-120"/>
+                        </a:rPr>
+                        <a:t>(+5%)</a:t>
                       </a:r>
                       <a:endParaRPr lang="en-US" sz="1050" dirty="0">
                         <a:latin typeface="Pretendard" charset="0"/>
@@ -9614,8 +8326,62 @@
                           <a:ea typeface="Pretendard" pitchFamily="34" charset="-122"/>
                           <a:cs typeface="Pretendard" pitchFamily="34" charset="-120"/>
                         </a:rPr>
-                        <a:t>안정 </a:t>
+                        <a:t>3.48%</a:t>
                       </a:r>
+                      <a:endParaRPr lang="en-US" sz="1050" dirty="0">
+                        <a:latin typeface="Pretendard" charset="0"/>
+                        <a:ea typeface="Pretendard" charset="0"/>
+                        <a:cs typeface="Pretendard" charset="0"/>
+                      </a:endParaRPr>
+                    </a:p>
+                  </a:txBody>
+                  <a:tcPr marL="50800" marR="50800" marT="25400" marB="25400" anchor="ctr">
+                    <a:lnL w="3810" cap="flat" cmpd="sng" algn="ctr">
+                      <a:solidFill>
+                        <a:srgbClr val="CBD5E0"/>
+                      </a:solidFill>
+                      <a:prstDash val="solid"/>
+                      <a:round/>
+                      <a:headEnd type="none" w="med" len="med"/>
+                      <a:tailEnd type="none" w="med" len="med"/>
+                    </a:lnL>
+                    <a:lnR w="3810" cap="flat" cmpd="sng" algn="ctr">
+                      <a:solidFill>
+                        <a:srgbClr val="CBD5E0"/>
+                      </a:solidFill>
+                      <a:prstDash val="solid"/>
+                      <a:round/>
+                      <a:headEnd type="none" w="med" len="med"/>
+                      <a:tailEnd type="none" w="med" len="med"/>
+                    </a:lnR>
+                    <a:lnT w="3810" cap="flat" cmpd="sng" algn="ctr">
+                      <a:solidFill>
+                        <a:srgbClr val="CBD5E0"/>
+                      </a:solidFill>
+                      <a:prstDash val="solid"/>
+                      <a:round/>
+                      <a:headEnd type="none" w="med" len="med"/>
+                      <a:tailEnd type="none" w="med" len="med"/>
+                    </a:lnT>
+                    <a:lnB w="3810" cap="flat" cmpd="sng" algn="ctr">
+                      <a:solidFill>
+                        <a:srgbClr val="CBD5E0"/>
+                      </a:solidFill>
+                      <a:prstDash val="solid"/>
+                      <a:round/>
+                      <a:headEnd type="none" w="med" len="med"/>
+                      <a:tailEnd type="none" w="med" len="med"/>
+                    </a:lnB>
+                    <a:solidFill>
+                      <a:srgbClr val="FFFFFF"/>
+                    </a:solidFill>
+                  </a:tcPr>
+                </a:tc>
+                <a:tc>
+                  <a:txBody>
+                    <a:bodyPr/>
+                    <a:lstStyle/>
+                    <a:p>
                       <a:pPr indent="0" marL="0">
                         <a:buNone/>
                       </a:pPr>
@@ -9628,63 +8394,7 @@
                           <a:ea typeface="Pretendard" pitchFamily="34" charset="-122"/>
                           <a:cs typeface="Pretendard" pitchFamily="34" charset="-120"/>
                         </a:rPr>
-                        <a:t>MD, </a:t>
-                      </a:r>
-                      <a:pPr indent="0" marL="0">
-                        <a:buNone/>
-                      </a:pPr>
-                      <a:r>
-                        <a:rPr lang="en-US" sz="1050" dirty="0">
-                          <a:solidFill>
-                            <a:srgbClr val="10161F"/>
-                          </a:solidFill>
-                          <a:latin typeface="Pretendard" pitchFamily="34" charset="0"/>
-                          <a:ea typeface="Pretendard" pitchFamily="34" charset="-122"/>
-                          <a:cs typeface="Pretendard" pitchFamily="34" charset="-120"/>
-                        </a:rPr>
-                        <a:t>예측 </a:t>
-                      </a:r>
-                      <a:pPr indent="0" marL="0">
-                        <a:buNone/>
-                      </a:pPr>
-                      <a:r>
-                        <a:rPr lang="en-US" sz="1050" dirty="0">
-                          <a:solidFill>
-                            <a:srgbClr val="10161F"/>
-                          </a:solidFill>
-                          <a:latin typeface="Pretendard" pitchFamily="34" charset="0"/>
-                          <a:ea typeface="Pretendard" pitchFamily="34" charset="-122"/>
-                          <a:cs typeface="Pretendard" pitchFamily="34" charset="-120"/>
-                        </a:rPr>
-                        <a:t>가능한 </a:t>
-                      </a:r>
-                      <a:pPr indent="0" marL="0">
-                        <a:buNone/>
-                      </a:pPr>
-                      <a:r>
-                        <a:rPr lang="en-US" sz="1050" dirty="0">
-                          <a:solidFill>
-                            <a:srgbClr val="10161F"/>
-                          </a:solidFill>
-                          <a:latin typeface="Pretendard" pitchFamily="34" charset="0"/>
-                          <a:ea typeface="Pretendard" pitchFamily="34" charset="-122"/>
-                          <a:cs typeface="Pretendard" pitchFamily="34" charset="-120"/>
-                        </a:rPr>
-                        <a:t>월 </a:t>
-                      </a:r>
-                      <a:pPr indent="0" marL="0">
-                        <a:buNone/>
-                      </a:pPr>
-                      <a:r>
-                        <a:rPr lang="en-US" sz="1050" dirty="0">
-                          <a:solidFill>
-                            <a:srgbClr val="10161F"/>
-                          </a:solidFill>
-                          <a:latin typeface="Pretendard" pitchFamily="34" charset="0"/>
-                          <a:ea typeface="Pretendard" pitchFamily="34" charset="-122"/>
-                          <a:cs typeface="Pretendard" pitchFamily="34" charset="-120"/>
-                        </a:rPr>
-                        <a:t>현금흐름</a:t>
+                        <a:t>불필요</a:t>
                       </a:r>
                       <a:endParaRPr lang="en-US" sz="1050" dirty="0">
                         <a:latin typeface="Pretendard" charset="0"/>
@@ -9754,7 +8464,7 @@
                           <a:ea typeface="Pretendard" pitchFamily="34" charset="-122"/>
                           <a:cs typeface="Pretendard" pitchFamily="34" charset="-120"/>
                         </a:rPr>
-                        <a:t>상가 </a:t>
+                        <a:t>③ </a:t>
                       </a:r>
                       <a:pPr indent="0" marL="0">
                         <a:buNone/>
@@ -9768,7 +8478,7 @@
                           <a:ea typeface="Pretendard" pitchFamily="34" charset="-122"/>
                           <a:cs typeface="Pretendard" pitchFamily="34" charset="-120"/>
                         </a:rPr>
-                        <a:t>전문 </a:t>
+                        <a:t>리모델링 </a:t>
                       </a:r>
                       <a:pPr indent="0" marL="0">
                         <a:buNone/>
@@ -9782,7 +8492,7 @@
                           <a:ea typeface="Pretendard" pitchFamily="34" charset="-122"/>
                           <a:cs typeface="Pretendard" pitchFamily="34" charset="-120"/>
                         </a:rPr>
-                        <a:t>임대 </a:t>
+                        <a:t>후 </a:t>
                       </a:r>
                       <a:pPr indent="0" marL="0">
                         <a:buNone/>
@@ -9796,7 +8506,21 @@
                           <a:ea typeface="Pretendard" pitchFamily="34" charset="-122"/>
                           <a:cs typeface="Pretendard" pitchFamily="34" charset="-120"/>
                         </a:rPr>
-                        <a:t>운영사</a:t>
+                        <a:t>임대료 </a:t>
+                      </a:r>
+                      <a:pPr indent="0" marL="0">
+                        <a:buNone/>
+                      </a:pPr>
+                      <a:r>
+                        <a:rPr lang="en-US" sz="1050" b="1" dirty="0">
+                          <a:solidFill>
+                            <a:srgbClr val="10161F"/>
+                          </a:solidFill>
+                          <a:latin typeface="Pretendard" pitchFamily="34" charset="0"/>
+                          <a:ea typeface="Pretendard" pitchFamily="34" charset="-122"/>
+                          <a:cs typeface="Pretendard" pitchFamily="34" charset="-120"/>
+                        </a:rPr>
+                        <a:t>상승</a:t>
                       </a:r>
                       <a:endParaRPr lang="en-US" sz="1050" dirty="0">
                         <a:latin typeface="Pretendard" charset="0"/>
@@ -9864,7 +8588,49 @@
                           <a:ea typeface="Pretendard" pitchFamily="34" charset="-122"/>
                           <a:cs typeface="Pretendard" pitchFamily="34" charset="-120"/>
                         </a:rPr>
-                        <a:t>★★★★</a:t>
+                        <a:t>+약 </a:t>
+                      </a:r>
+                      <a:pPr indent="0" marL="0">
+                        <a:buNone/>
+                      </a:pPr>
+                      <a:r>
+                        <a:rPr lang="en-US" sz="1050" dirty="0">
+                          <a:solidFill>
+                            <a:srgbClr val="10161F"/>
+                          </a:solidFill>
+                          <a:latin typeface="Pretendard" pitchFamily="34" charset="0"/>
+                          <a:ea typeface="Pretendard" pitchFamily="34" charset="-122"/>
+                          <a:cs typeface="Pretendard" pitchFamily="34" charset="-120"/>
+                        </a:rPr>
+                        <a:t>0.64억 </a:t>
+                      </a:r>
+                      <a:pPr indent="0" marL="0">
+                        <a:buNone/>
+                      </a:pPr>
+                      <a:r>
+                        <a:rPr lang="en-US" sz="1050" dirty="0">
+                          <a:solidFill>
+                            <a:srgbClr val="10161F"/>
+                          </a:solidFill>
+                          <a:latin typeface="Pretendard" pitchFamily="34" charset="0"/>
+                          <a:ea typeface="Pretendard" pitchFamily="34" charset="-122"/>
+                          <a:cs typeface="Pretendard" pitchFamily="34" charset="-120"/>
+                        </a:rPr>
+                        <a:t>원 </a:t>
+                      </a:r>
+                      <a:pPr indent="0" marL="0">
+                        <a:buNone/>
+                      </a:pPr>
+                      <a:r>
+                        <a:rPr lang="en-US" sz="1050" dirty="0">
+                          <a:solidFill>
+                            <a:srgbClr val="10161F"/>
+                          </a:solidFill>
+                          <a:latin typeface="Pretendard" pitchFamily="34" charset="0"/>
+                          <a:ea typeface="Pretendard" pitchFamily="34" charset="-122"/>
+                          <a:cs typeface="Pretendard" pitchFamily="34" charset="-120"/>
+                        </a:rPr>
+                        <a:t>(+8%)</a:t>
                       </a:r>
                       <a:endParaRPr lang="en-US" sz="1050" dirty="0">
                         <a:latin typeface="Pretendard" charset="0"/>
@@ -9932,7 +8698,75 @@
                           <a:ea typeface="Pretendard" pitchFamily="34" charset="-122"/>
                           <a:cs typeface="Pretendard" pitchFamily="34" charset="-120"/>
                         </a:rPr>
-                        <a:t>MD </a:t>
+                        <a:t>3.58%</a:t>
+                      </a:r>
+                      <a:endParaRPr lang="en-US" sz="1050" dirty="0">
+                        <a:latin typeface="Pretendard" charset="0"/>
+                        <a:ea typeface="Pretendard" charset="0"/>
+                        <a:cs typeface="Pretendard" charset="0"/>
+                      </a:endParaRPr>
+                    </a:p>
+                  </a:txBody>
+                  <a:tcPr marL="50800" marR="50800" marT="25400" marB="25400" anchor="ctr">
+                    <a:lnL w="3810" cap="flat" cmpd="sng" algn="ctr">
+                      <a:solidFill>
+                        <a:srgbClr val="CBD5E0"/>
+                      </a:solidFill>
+                      <a:prstDash val="solid"/>
+                      <a:round/>
+                      <a:headEnd type="none" w="med" len="med"/>
+                      <a:tailEnd type="none" w="med" len="med"/>
+                    </a:lnL>
+                    <a:lnR w="3810" cap="flat" cmpd="sng" algn="ctr">
+                      <a:solidFill>
+                        <a:srgbClr val="CBD5E0"/>
+                      </a:solidFill>
+                      <a:prstDash val="solid"/>
+                      <a:round/>
+                      <a:headEnd type="none" w="med" len="med"/>
+                      <a:tailEnd type="none" w="med" len="med"/>
+                    </a:lnR>
+                    <a:lnT w="3810" cap="flat" cmpd="sng" algn="ctr">
+                      <a:solidFill>
+                        <a:srgbClr val="CBD5E0"/>
+                      </a:solidFill>
+                      <a:prstDash val="solid"/>
+                      <a:round/>
+                      <a:headEnd type="none" w="med" len="med"/>
+                      <a:tailEnd type="none" w="med" len="med"/>
+                    </a:lnT>
+                    <a:lnB w="3810" cap="flat" cmpd="sng" algn="ctr">
+                      <a:solidFill>
+                        <a:srgbClr val="CBD5E0"/>
+                      </a:solidFill>
+                      <a:prstDash val="solid"/>
+                      <a:round/>
+                      <a:headEnd type="none" w="med" len="med"/>
+                      <a:tailEnd type="none" w="med" len="med"/>
+                    </a:lnB>
+                    <a:solidFill>
+                      <a:srgbClr val="F7FAFC"/>
+                    </a:solidFill>
+                  </a:tcPr>
+                </a:tc>
+                <a:tc>
+                  <a:txBody>
+                    <a:bodyPr/>
+                    <a:lstStyle/>
+                    <a:p>
+                      <a:pPr indent="0" marL="0">
+                        <a:buNone/>
+                      </a:pPr>
+                      <a:r>
+                        <a:rPr lang="en-US" sz="1050" dirty="0">
+                          <a:solidFill>
+                            <a:srgbClr val="10161F"/>
+                          </a:solidFill>
+                          <a:latin typeface="Pretendard" pitchFamily="34" charset="0"/>
+                          <a:ea typeface="Pretendard" pitchFamily="34" charset="-122"/>
+                          <a:cs typeface="Pretendard" pitchFamily="34" charset="-120"/>
+                        </a:rPr>
+                        <a:t>약 </a:t>
                       </a:r>
                       <a:pPr indent="0" marL="0">
                         <a:buNone/>
@@ -9946,7 +8780,7 @@
                           <a:ea typeface="Pretendard" pitchFamily="34" charset="-122"/>
                           <a:cs typeface="Pretendard" pitchFamily="34" charset="-120"/>
                         </a:rPr>
-                        <a:t>관리 </a:t>
+                        <a:t>15.00억 </a:t>
                       </a:r>
                       <a:pPr indent="0" marL="0">
                         <a:buNone/>
@@ -9960,49 +8794,7 @@
                           <a:ea typeface="Pretendard" pitchFamily="34" charset="-122"/>
                           <a:cs typeface="Pretendard" pitchFamily="34" charset="-120"/>
                         </a:rPr>
-                        <a:t>노하우 </a:t>
-                      </a:r>
-                      <a:pPr indent="0" marL="0">
-                        <a:buNone/>
-                      </a:pPr>
-                      <a:r>
-                        <a:rPr lang="en-US" sz="1050" dirty="0">
-                          <a:solidFill>
-                            <a:srgbClr val="10161F"/>
-                          </a:solidFill>
-                          <a:latin typeface="Pretendard" pitchFamily="34" charset="0"/>
-                          <a:ea typeface="Pretendard" pitchFamily="34" charset="-122"/>
-                          <a:cs typeface="Pretendard" pitchFamily="34" charset="-120"/>
-                        </a:rPr>
-                        <a:t>보유 </a:t>
-                      </a:r>
-                      <a:pPr indent="0" marL="0">
-                        <a:buNone/>
-                      </a:pPr>
-                      <a:r>
-                        <a:rPr lang="en-US" sz="1050" dirty="0">
-                          <a:solidFill>
-                            <a:srgbClr val="10161F"/>
-                          </a:solidFill>
-                          <a:latin typeface="Pretendard" pitchFamily="34" charset="0"/>
-                          <a:ea typeface="Pretendard" pitchFamily="34" charset="-122"/>
-                          <a:cs typeface="Pretendard" pitchFamily="34" charset="-120"/>
-                        </a:rPr>
-                        <a:t>시 </a:t>
-                      </a:r>
-                      <a:pPr indent="0" marL="0">
-                        <a:buNone/>
-                      </a:pPr>
-                      <a:r>
-                        <a:rPr lang="en-US" sz="1050" dirty="0">
-                          <a:solidFill>
-                            <a:srgbClr val="10161F"/>
-                          </a:solidFill>
-                          <a:latin typeface="Pretendard" pitchFamily="34" charset="0"/>
-                          <a:ea typeface="Pretendard" pitchFamily="34" charset="-122"/>
-                          <a:cs typeface="Pretendard" pitchFamily="34" charset="-120"/>
-                        </a:rPr>
-                        <a:t>최적</a:t>
+                        <a:t>원</a:t>
                       </a:r>
                       <a:endParaRPr lang="en-US" sz="1050" dirty="0">
                         <a:latin typeface="Pretendard" charset="0"/>
@@ -10054,323 +8846,19 @@
                   </a:tcPr>
                 </a:tc>
               </a:tr>
-              <a:tr h="329184">
-                <a:tc>
-                  <a:txBody>
-                    <a:bodyPr/>
-                    <a:lstStyle/>
-                    <a:p>
-                      <a:pPr indent="0" marL="0">
-                        <a:buNone/>
-                      </a:pPr>
-                      <a:r>
-                        <a:rPr lang="en-US" sz="1050" b="1" dirty="0">
-                          <a:solidFill>
-                            <a:srgbClr val="10161F"/>
-                          </a:solidFill>
-                          <a:latin typeface="Pretendard" pitchFamily="34" charset="0"/>
-                          <a:ea typeface="Pretendard" pitchFamily="34" charset="-122"/>
-                          <a:cs typeface="Pretendard" pitchFamily="34" charset="-120"/>
-                        </a:rPr>
-                        <a:t>프랜차이즈 </a:t>
-                      </a:r>
-                      <a:pPr indent="0" marL="0">
-                        <a:buNone/>
-                      </a:pPr>
-                      <a:r>
-                        <a:rPr lang="en-US" sz="1050" b="1" dirty="0">
-                          <a:solidFill>
-                            <a:srgbClr val="10161F"/>
-                          </a:solidFill>
-                          <a:latin typeface="Pretendard" pitchFamily="34" charset="0"/>
-                          <a:ea typeface="Pretendard" pitchFamily="34" charset="-122"/>
-                          <a:cs typeface="Pretendard" pitchFamily="34" charset="-120"/>
-                        </a:rPr>
-                        <a:t>본사 </a:t>
-                      </a:r>
-                      <a:pPr indent="0" marL="0">
-                        <a:buNone/>
-                      </a:pPr>
-                      <a:r>
-                        <a:rPr lang="en-US" sz="1050" b="1" dirty="0">
-                          <a:solidFill>
-                            <a:srgbClr val="10161F"/>
-                          </a:solidFill>
-                          <a:latin typeface="Pretendard" pitchFamily="34" charset="0"/>
-                          <a:ea typeface="Pretendard" pitchFamily="34" charset="-122"/>
-                          <a:cs typeface="Pretendard" pitchFamily="34" charset="-120"/>
-                        </a:rPr>
-                        <a:t>직매장</a:t>
-                      </a:r>
-                      <a:endParaRPr lang="en-US" sz="1050" dirty="0">
-                        <a:latin typeface="Pretendard" charset="0"/>
-                        <a:ea typeface="Pretendard" charset="0"/>
-                        <a:cs typeface="Pretendard" charset="0"/>
-                      </a:endParaRPr>
-                    </a:p>
-                  </a:txBody>
-                  <a:tcPr marL="50800" marR="50800" marT="25400" marB="25400" anchor="ctr">
-                    <a:lnL w="3810" cap="flat" cmpd="sng" algn="ctr">
-                      <a:solidFill>
-                        <a:srgbClr val="CBD5E0"/>
-                      </a:solidFill>
-                      <a:prstDash val="solid"/>
-                      <a:round/>
-                      <a:headEnd type="none" w="med" len="med"/>
-                      <a:tailEnd type="none" w="med" len="med"/>
-                    </a:lnL>
-                    <a:lnR w="3810" cap="flat" cmpd="sng" algn="ctr">
-                      <a:solidFill>
-                        <a:srgbClr val="CBD5E0"/>
-                      </a:solidFill>
-                      <a:prstDash val="solid"/>
-                      <a:round/>
-                      <a:headEnd type="none" w="med" len="med"/>
-                      <a:tailEnd type="none" w="med" len="med"/>
-                    </a:lnR>
-                    <a:lnT w="3810" cap="flat" cmpd="sng" algn="ctr">
-                      <a:solidFill>
-                        <a:srgbClr val="CBD5E0"/>
-                      </a:solidFill>
-                      <a:prstDash val="solid"/>
-                      <a:round/>
-                      <a:headEnd type="none" w="med" len="med"/>
-                      <a:tailEnd type="none" w="med" len="med"/>
-                    </a:lnT>
-                    <a:lnB w="3810" cap="flat" cmpd="sng" algn="ctr">
-                      <a:solidFill>
-                        <a:srgbClr val="CBD5E0"/>
-                      </a:solidFill>
-                      <a:prstDash val="solid"/>
-                      <a:round/>
-                      <a:headEnd type="none" w="med" len="med"/>
-                      <a:tailEnd type="none" w="med" len="med"/>
-                    </a:lnB>
-                    <a:solidFill>
-                      <a:srgbClr val="FFFFFF"/>
-                    </a:solidFill>
-                  </a:tcPr>
-                </a:tc>
-                <a:tc>
-                  <a:txBody>
-                    <a:bodyPr/>
-                    <a:lstStyle/>
-                    <a:p>
-                      <a:pPr indent="0" marL="0">
-                        <a:buNone/>
-                      </a:pPr>
-                      <a:r>
-                        <a:rPr lang="en-US" sz="1050" dirty="0">
-                          <a:solidFill>
-                            <a:srgbClr val="10161F"/>
-                          </a:solidFill>
-                          <a:latin typeface="Pretendard" pitchFamily="34" charset="0"/>
-                          <a:ea typeface="Pretendard" pitchFamily="34" charset="-122"/>
-                          <a:cs typeface="Pretendard" pitchFamily="34" charset="-120"/>
-                        </a:rPr>
-                        <a:t>★★★</a:t>
-                      </a:r>
-                      <a:endParaRPr lang="en-US" sz="1050" dirty="0">
-                        <a:latin typeface="Pretendard" charset="0"/>
-                        <a:ea typeface="Pretendard" charset="0"/>
-                        <a:cs typeface="Pretendard" charset="0"/>
-                      </a:endParaRPr>
-                    </a:p>
-                  </a:txBody>
-                  <a:tcPr marL="50800" marR="50800" marT="25400" marB="25400" anchor="ctr">
-                    <a:lnL w="3810" cap="flat" cmpd="sng" algn="ctr">
-                      <a:solidFill>
-                        <a:srgbClr val="CBD5E0"/>
-                      </a:solidFill>
-                      <a:prstDash val="solid"/>
-                      <a:round/>
-                      <a:headEnd type="none" w="med" len="med"/>
-                      <a:tailEnd type="none" w="med" len="med"/>
-                    </a:lnL>
-                    <a:lnR w="3810" cap="flat" cmpd="sng" algn="ctr">
-                      <a:solidFill>
-                        <a:srgbClr val="CBD5E0"/>
-                      </a:solidFill>
-                      <a:prstDash val="solid"/>
-                      <a:round/>
-                      <a:headEnd type="none" w="med" len="med"/>
-                      <a:tailEnd type="none" w="med" len="med"/>
-                    </a:lnR>
-                    <a:lnT w="3810" cap="flat" cmpd="sng" algn="ctr">
-                      <a:solidFill>
-                        <a:srgbClr val="CBD5E0"/>
-                      </a:solidFill>
-                      <a:prstDash val="solid"/>
-                      <a:round/>
-                      <a:headEnd type="none" w="med" len="med"/>
-                      <a:tailEnd type="none" w="med" len="med"/>
-                    </a:lnT>
-                    <a:lnB w="3810" cap="flat" cmpd="sng" algn="ctr">
-                      <a:solidFill>
-                        <a:srgbClr val="CBD5E0"/>
-                      </a:solidFill>
-                      <a:prstDash val="solid"/>
-                      <a:round/>
-                      <a:headEnd type="none" w="med" len="med"/>
-                      <a:tailEnd type="none" w="med" len="med"/>
-                    </a:lnB>
-                    <a:solidFill>
-                      <a:srgbClr val="FFFFFF"/>
-                    </a:solidFill>
-                  </a:tcPr>
-                </a:tc>
-                <a:tc>
-                  <a:txBody>
-                    <a:bodyPr/>
-                    <a:lstStyle/>
-                    <a:p>
-                      <a:pPr indent="0" marL="0">
-                        <a:buNone/>
-                      </a:pPr>
-                      <a:r>
-                        <a:rPr lang="en-US" sz="1050" dirty="0">
-                          <a:solidFill>
-                            <a:srgbClr val="10161F"/>
-                          </a:solidFill>
-                          <a:latin typeface="Pretendard" pitchFamily="34" charset="0"/>
-                          <a:ea typeface="Pretendard" pitchFamily="34" charset="-122"/>
-                          <a:cs typeface="Pretendard" pitchFamily="34" charset="-120"/>
-                        </a:rPr>
-                        <a:t>브랜드 </a:t>
-                      </a:r>
-                      <a:pPr indent="0" marL="0">
-                        <a:buNone/>
-                      </a:pPr>
-                      <a:r>
-                        <a:rPr lang="en-US" sz="1050" dirty="0">
-                          <a:solidFill>
-                            <a:srgbClr val="10161F"/>
-                          </a:solidFill>
-                          <a:latin typeface="Pretendard" pitchFamily="34" charset="0"/>
-                          <a:ea typeface="Pretendard" pitchFamily="34" charset="-122"/>
-                          <a:cs typeface="Pretendard" pitchFamily="34" charset="-120"/>
-                        </a:rPr>
-                        <a:t>노출 </a:t>
-                      </a:r>
-                      <a:pPr indent="0" marL="0">
-                        <a:buNone/>
-                      </a:pPr>
-                      <a:r>
-                        <a:rPr lang="en-US" sz="1050" dirty="0">
-                          <a:solidFill>
-                            <a:srgbClr val="10161F"/>
-                          </a:solidFill>
-                          <a:latin typeface="Pretendard" pitchFamily="34" charset="0"/>
-                          <a:ea typeface="Pretendard" pitchFamily="34" charset="-122"/>
-                          <a:cs typeface="Pretendard" pitchFamily="34" charset="-120"/>
-                        </a:rPr>
-                        <a:t>+ </a:t>
-                      </a:r>
-                      <a:pPr indent="0" marL="0">
-                        <a:buNone/>
-                      </a:pPr>
-                      <a:r>
-                        <a:rPr lang="en-US" sz="1050" dirty="0">
-                          <a:solidFill>
-                            <a:srgbClr val="10161F"/>
-                          </a:solidFill>
-                          <a:latin typeface="Pretendard" pitchFamily="34" charset="0"/>
-                          <a:ea typeface="Pretendard" pitchFamily="34" charset="-122"/>
-                          <a:cs typeface="Pretendard" pitchFamily="34" charset="-120"/>
-                        </a:rPr>
-                        <a:t>직영 </a:t>
-                      </a:r>
-                      <a:pPr indent="0" marL="0">
-                        <a:buNone/>
-                      </a:pPr>
-                      <a:r>
-                        <a:rPr lang="en-US" sz="1050" dirty="0">
-                          <a:solidFill>
-                            <a:srgbClr val="10161F"/>
-                          </a:solidFill>
-                          <a:latin typeface="Pretendard" pitchFamily="34" charset="0"/>
-                          <a:ea typeface="Pretendard" pitchFamily="34" charset="-122"/>
-                          <a:cs typeface="Pretendard" pitchFamily="34" charset="-120"/>
-                        </a:rPr>
-                        <a:t>운영 </a:t>
-                      </a:r>
-                      <a:pPr indent="0" marL="0">
-                        <a:buNone/>
-                      </a:pPr>
-                      <a:r>
-                        <a:rPr lang="en-US" sz="1050" dirty="0">
-                          <a:solidFill>
-                            <a:srgbClr val="10161F"/>
-                          </a:solidFill>
-                          <a:latin typeface="Pretendard" pitchFamily="34" charset="0"/>
-                          <a:ea typeface="Pretendard" pitchFamily="34" charset="-122"/>
-                          <a:cs typeface="Pretendard" pitchFamily="34" charset="-120"/>
-                        </a:rPr>
-                        <a:t>가능</a:t>
-                      </a:r>
-                      <a:endParaRPr lang="en-US" sz="1050" dirty="0">
-                        <a:latin typeface="Pretendard" charset="0"/>
-                        <a:ea typeface="Pretendard" charset="0"/>
-                        <a:cs typeface="Pretendard" charset="0"/>
-                      </a:endParaRPr>
-                    </a:p>
-                  </a:txBody>
-                  <a:tcPr marL="50800" marR="50800" marT="25400" marB="25400" anchor="ctr">
-                    <a:lnL w="3810" cap="flat" cmpd="sng" algn="ctr">
-                      <a:solidFill>
-                        <a:srgbClr val="CBD5E0"/>
-                      </a:solidFill>
-                      <a:prstDash val="solid"/>
-                      <a:round/>
-                      <a:headEnd type="none" w="med" len="med"/>
-                      <a:tailEnd type="none" w="med" len="med"/>
-                    </a:lnL>
-                    <a:lnR w="3810" cap="flat" cmpd="sng" algn="ctr">
-                      <a:solidFill>
-                        <a:srgbClr val="CBD5E0"/>
-                      </a:solidFill>
-                      <a:prstDash val="solid"/>
-                      <a:round/>
-                      <a:headEnd type="none" w="med" len="med"/>
-                      <a:tailEnd type="none" w="med" len="med"/>
-                    </a:lnR>
-                    <a:lnT w="3810" cap="flat" cmpd="sng" algn="ctr">
-                      <a:solidFill>
-                        <a:srgbClr val="CBD5E0"/>
-                      </a:solidFill>
-                      <a:prstDash val="solid"/>
-                      <a:round/>
-                      <a:headEnd type="none" w="med" len="med"/>
-                      <a:tailEnd type="none" w="med" len="med"/>
-                    </a:lnT>
-                    <a:lnB w="3810" cap="flat" cmpd="sng" algn="ctr">
-                      <a:solidFill>
-                        <a:srgbClr val="CBD5E0"/>
-                      </a:solidFill>
-                      <a:prstDash val="solid"/>
-                      <a:round/>
-                      <a:headEnd type="none" w="med" len="med"/>
-                      <a:tailEnd type="none" w="med" len="med"/>
-                    </a:lnB>
-                    <a:solidFill>
-                      <a:srgbClr val="FFFFFF"/>
-                    </a:solidFill>
-                  </a:tcPr>
-                </a:tc>
-              </a:tr>
             </a:tbl>
           </a:graphicData>
         </a:graphic>
       </p:graphicFrame>
       <p:sp>
         <p:nvSpPr>
-          <p:cNvPr id="29" name="Shape 26"/>
-          <p:cNvSpPr/>
-          <p:nvPr/>
-        </p:nvSpPr>
-        <p:spPr>
-          <a:xfrm>
-            <a:off x="566928" y="5678424"/>
+          <p:cNvPr id="8" name="Shape 5"/>
+          <p:cNvSpPr/>
+          <p:nvPr/>
+        </p:nvSpPr>
+        <p:spPr>
+          <a:xfrm>
+            <a:off x="566928" y="5349240"/>
             <a:ext cx="11057839" cy="804672"/>
           </a:xfrm>
           <a:prstGeom prst="roundRect">
@@ -10391,13 +8879,13 @@
       </p:sp>
       <p:sp>
         <p:nvSpPr>
-          <p:cNvPr id="30" name="Text 27"/>
-          <p:cNvSpPr/>
-          <p:nvPr/>
-        </p:nvSpPr>
-        <p:spPr>
-          <a:xfrm>
-            <a:off x="749808" y="5788152"/>
+          <p:cNvPr id="9" name="Text 6"/>
+          <p:cNvSpPr/>
+          <p:nvPr/>
+        </p:nvSpPr>
+        <p:spPr>
+          <a:xfrm>
+            <a:off x="749808" y="5458968"/>
             <a:ext cx="1691640" cy="256032"/>
           </a:xfrm>
           <a:prstGeom prst="rect">
@@ -10430,13 +8918,13 @@
       </p:sp>
       <p:sp>
         <p:nvSpPr>
-          <p:cNvPr id="31" name="Text 28"/>
-          <p:cNvSpPr/>
-          <p:nvPr/>
-        </p:nvSpPr>
-        <p:spPr>
-          <a:xfrm>
-            <a:off x="2487168" y="5751576"/>
+          <p:cNvPr id="10" name="Text 7"/>
+          <p:cNvSpPr/>
+          <p:nvPr/>
+        </p:nvSpPr>
+        <p:spPr>
+          <a:xfrm>
+            <a:off x="2487168" y="5422392"/>
             <a:ext cx="8954719" cy="658368"/>
           </a:xfrm>
           <a:prstGeom prst="rect">
@@ -10464,7 +8952,7 @@
                 <a:ea typeface="Pretendard" pitchFamily="34" charset="-122"/>
                 <a:cs typeface="Pretendard" pitchFamily="34" charset="-120"/>
               </a:rPr>
-              <a:t>[참고] 종합 가치 제안: 종로권역 핵심 상권의 희소성 높은 우량 자산으로, 안정적인 임대 수익과 향후 공법상 밸류업 및 권역 지가 상승에 따른 자본 이득(Capital Gain)을 동시에 실현할 수 있는 전략적 매물입니다.</a:t>
+              <a:t>{"ok":true,"mocked":true,"extractedFields":{"area_signal":"역삼","asset_type":"오피스빌딩","price_band":"300억","size_signal":"3000평(약 9917.4㎡)"},"extractedFacts":{"region":"역삼","exactAddressCandidate":"역삼동 742-1","assetType":"오피스빌딩","priceText":"300억","sizeText":"3000평(약 9917.4㎡)","currentUse":"오피스","currentUseSignal":"근린생활시설","leaseSignal":"임대중","vacancySignal":"공실없음","tenantNames":["쿠팡","네이버"],"unitRentTexts":["301호: 1500만"],"sellerMotivationText":"자산 효율화","brokerNotes":["초역세권 매물"]},"detectedSensitiveFields":["exact_address","tenant_name"],"ambiguousFields":[],"warnings":[],"areaSignal":"역삼","assetType":"오피스빌딩","priceBand":"300억","sizeSignal":"3000평(약 9917.4㎡)","dealType":"매각","buildingName":"역삼 센트럴타워","exactAddress":"역삼동 742-1","totalFloorArea":9917.3,"buildYear":2015,"currentUseSignal":"근린생활시설","vacancySignal":"공실 없음","fitSummary":"초역세권 근생 빌딩으로 시행/사옥 매입에 최적화","cautionSummary":"주요 임차 업종 만기 조율 필요","hiddenFields":["exact_address","seller_motivation"],"confidence":{"areaSignal":"confirmed","assetType":"confirmed","priceBand":"ai_hypothesis","fitSummary":"ai_hypothesis"},"missingData":["sizeSignal"],"boundaryNote":"본 자료는 실거래 통계 기반 참고치입니다.","buyerType":"법인 사옥형","budgetRange":{"min":50,"max":80,"display":"50억~80억"},"preferredRegions":["강남","성수"],"assetTypes":["꼬마빌딩","사옥용"],"purchasePurpose":"사옥용 매입","mustHave":["초역세권","주차"],"niceToHave":["테라스","루프탑"],"riskTolerance":"medium","financingNote":"자본금 50% 준비","missingQuestions":["구체적인 입주 시기가 언제인가요?","선호하는 수익률이 있나요?"],"privacyNotes":["연락처 비공개"],"fitReasons":["매수자 예산(50-80억)에 부합하는 매물입니다.","요청하신 성수/강남 권역에 해당합니다."],"cautionReasons":["요청한 용도와 달리 명도 협의가 다소 필요합니다."],"recommendedNextAction":"현장 답사 제안","kakaoMessage":"안녕하세요! 요청하신 조건에 부합하는 추천 매물이 있어 안내해 드립니다. 확인해보시고 피드백 부탁드립니다.","title":"강남 역삼역 초역세권 오피스 사옥용 빌딩 매각","shortSummary":"역삼역 도보 5분 거리의 준신축급 대형 오피스빌딩입니다.","dealPoints":["초역세권","사옥 최적"],"cautionPoints":["명도 조율 필요"],"hiddenInfoNotice":["보증금 및 지번은 인가 후 확인 가능"],"gateMessage":"G1 등급 등록이 필요합니다.","kakaoText":"강남 역삼역 오피스 빌딩 매각 안내입니다.","exactUnitCandidate":"101호","floor":"1층","areaSqmText":"150㎡","spaceType":"office","depositText":"5000만","monthlyRentText":"400만","maintenanceFeeText":"50만","availableFromText":"즉시입주","leaseTermMonthsText":"24","incentivesText":"렌트프리 2개월","restrictions":[],"landlordIdentity":"김성수","currentTenant":"스타트업","vacancyReason":"이전 확장","rentNegotiation":"협의 가능","region":"성수동","areaSqm":150,"deposit":5000,"monthlyRent":400,"maintenanceFee":50,"availableFrom":"즉시입주","leaseTermMonths":24,"incentives":{"rentFreeMonths":2,"interiorSupport":"일부 인테리어 지원","freeRentDetail":"렌트프리 2개월 지원"},"shortSummaryLease":"성수역 도보 5분 거리 1층 리테일 상가 매물입니다."}</a:t>
             </a:r>
             <a:endParaRPr lang="en-US" sz="1100" dirty="0"/>
           </a:p>
@@ -10472,7 +8960,7 @@
       </p:sp>
       <p:sp>
         <p:nvSpPr>
-          <p:cNvPr id="32" name="Text 29"/>
+          <p:cNvPr id="11" name="Text 8"/>
           <p:cNvSpPr/>
           <p:nvPr/>
         </p:nvSpPr>
@@ -10511,7 +8999,7 @@
       </p:sp>
       <p:sp>
         <p:nvSpPr>
-          <p:cNvPr id="33" name="Text 30"/>
+          <p:cNvPr id="12" name="Text 9"/>
           <p:cNvSpPr/>
           <p:nvPr/>
         </p:nvSpPr>

--- a/docs/test/stress/e2e-outputs/trading_case15_jongro_family_basic.pptx
+++ b/docs/test/stress/e2e-outputs/trading_case15_jongro_family_basic.pptx
@@ -1905,7 +1905,7 @@
                 <a:ea typeface="Arial" pitchFamily="34" charset="-122"/>
                 <a:cs typeface="Arial" pitchFamily="34" charset="-120"/>
               </a:rPr>
-              <a:t>BASIC IM</a:t>
+              <a:t>INVESTMENT MEMORANDUM</a:t>
             </a:r>
             <a:endParaRPr lang="en-US" sz="1000" dirty="0"/>
           </a:p>
@@ -3988,7 +3988,7 @@
                 <a:ea typeface="Pretendard" pitchFamily="34" charset="-122"/>
                 <a:cs typeface="Pretendard" pitchFamily="34" charset="-120"/>
               </a:rPr>
-              <a:t>종로권역 내 올근생빌딩, 매각 희망가 240억. 입지·임대차 현황을 감안할 때 투자 검토 가치가 있는 물건입니다.</a:t>
+              <a:t>종로권역 소재 올근생빌딩, 희망가 240억 투자 검토 자료입니다.</a:t>
             </a:r>
             <a:endParaRPr lang="en-US" sz="1500" dirty="0"/>
           </a:p>
@@ -4610,7 +4610,7 @@
                 <a:ea typeface="Pretendard" pitchFamily="34" charset="-122"/>
                 <a:cs typeface="Pretendard" pitchFamily="34" charset="-120"/>
               </a:rPr>
-              <a:t>원금 안전판: 종로권역 핵심 입지 및 우량 대지 지분 가치로 하방 경직성 확보</a:t>
+              <a:t>입지 가치: 종로권역 소재 자산으로 중장기 자산 가치 및 안정적 수요 검토</a:t>
             </a:r>
             <a:endParaRPr lang="en-US" sz="1150" dirty="0"/>
           </a:p>
@@ -4742,7 +4742,7 @@
                 <a:ea typeface="Pretendard" pitchFamily="34" charset="-122"/>
                 <a:cs typeface="Pretendard" pitchFamily="34" charset="-120"/>
               </a:rPr>
-              <a:t>수익 안정성: 매각 희망가 240억 대비 안정적인 월 임대수익 창출 구조</a:t>
+              <a:t>임대 구조: 240억 수준의 가격대 및 현 임대차 기반의 현금흐름 분석</a:t>
             </a:r>
             <a:endParaRPr lang="en-US" sz="1150" dirty="0"/>
           </a:p>
@@ -4874,7 +4874,7 @@
                 <a:ea typeface="Pretendard" pitchFamily="34" charset="-122"/>
                 <a:cs typeface="Pretendard" pitchFamily="34" charset="-120"/>
               </a:rPr>
-              <a:t>미래 가치: 향후 권역 지가 상승 및 공법상 잔여 용적률 활용 밸류업 기회</a:t>
+              <a:t>실사 점검: 계약서 및 공부 확인을 통한 권리관계·물리적 상태 정밀 진단</a:t>
             </a:r>
             <a:endParaRPr lang="en-US" sz="1150" dirty="0"/>
           </a:p>
@@ -5346,7 +5346,7 @@
                 <a:ea typeface="Pretendard" pitchFamily="34" charset="-122"/>
                 <a:cs typeface="Pretendard" pitchFamily="34" charset="-120"/>
               </a:rPr>
-              <a:t>{"ok":true,"mocked":true,"extractedFields":{"area_signal":"역삼","asset_type":"오피스빌딩","price_band":"300억","size_signal":"3000평(약 9917.4㎡)"},"extractedFacts":{"region":"역삼","exactAddressCandidate":"역삼동 742-1","assetType":"오피스빌딩","priceText":"300억","sizeText":"3000평(약 9917.4㎡)","currentUse":"오피스","currentUseSignal":"근린생활시설","leaseSignal":"임대중","vacancySignal":"공실없음","tenantNames":["쿠팡","네이버"],"unitRentTexts":["301호: 1500만"],"sellerMotivationText":"자산 효율화","brokerNotes":["초역세권 매물"]},"detectedSensitiveFields":["exact_address","tenant_name"],"ambiguousFields":[],"warnings":[],"areaSignal":"역삼","assetType":"오피스빌딩","priceBand":"300억","sizeSignal":"3000평(약 9917.4㎡)","dealType":"매각","buildingName":"역삼 센트럴타워","exactAddress":"역삼동 742-1","totalFloorArea":9917.3,"buildYear":2015,"currentUseSignal":"근린생활시설","vacancySignal":"공실 없음","fitSummary":"초역세권 근생 빌딩으로 시행/사옥 매입에 최적화","cautionSummary":"주요 임차 업종 만기 조율 필요","hiddenFields":["exact_address","seller_motivation"],"confidence":{"areaSignal":"confirmed","assetType":"confirmed","priceBand":"ai_hypothesis","fitSummary":"ai_hypothesis"},"missingData":["sizeSignal"],"boundaryNote":"본 자료는 실거래 통계 기반 참고치입니다.","buyerType":"법인 사옥형","budgetRange":{"min":50,"max":80,"display":"50억~80억"},"preferredRegions":["강남","성수"],"assetTypes":["꼬마빌딩","사옥용"],"purchasePurpose":"사옥용 매입","mustHave":["초역세권","주차"],"niceToHave":["테라스","루프탑"],"riskTolerance":"medium","financingNote":"자본금 50% 준비","missingQuestions":["구체적인 입주 시기가 언제인가요?","선호하는 수익률이 있나요?"],"privacyNotes":["연락처 비공개"],"fitReasons":["매수자 예산(50-80억)에 부합하는 매물입니다.","요청하신 성수/강남 권역에 해당합니다."],"cautionReasons":["요청한 용도와 달리 명도 협의가 다소 필요합니다."],"recommendedNextAction":"현장 답사 제안","kakaoMessage":"안녕하세요! 요청하신 조건에 부합하는 추천 매물이 있어 안내해 드립니다. 확인해보시고 피드백 부탁드립니다.","title":"강남 역삼역 초역세권 오피스 사옥용 빌딩 매각","shortSummary":"역삼역 도보 5분 거리의 준신축급 대형 오피스빌딩입니다.","dealPoints":["초역세권","사옥 최적"],"cautionPoints":["명도 조율 필요"],"hiddenInfoNotice":["보증금 및 지번은 인가 후 확인 가능"],"gateMessage":"G1 등급 등록이 필요합니다.","kakaoText":"강남 역삼역 오피스 빌딩 매각 안내입니다.","exactUnitCandidate":"101호","floor":"1층","areaSqmText":"150㎡","spaceType":"office","depositText":"5000만","monthlyRentText":"400만","maintenanceFeeText":"50만","availableFromText":"즉시입주","leaseTermMonthsText":"24","incentivesText":"렌트프리 2개월","restrictions":[],"landlordIdentity":"김성수","currentTenant":"스타트업","vacancyReason":"이전 확장","rentNegotiation":"협의 가능","region":"성수동","areaSqm":150,"deposit":5000,"monthlyRent":400,"maintenanceFee":50,"availableFrom":"즉시입주","leaseTermMonths":24,"incentives":{"rentFreeMonths":2,"interiorSupport":"일부 인테리어 지원","freeRentDetail":"렌트프리 2개월 지원"},"shortSummaryLease":"성수역 도보 5분 거리 1층 리테일 상가 매물입니다."}</a:t>
+              <a:t>{"ok":true,"mocked":true,"extractedFields":{"area_signal":"역삼","asset_type":"오피스빌딩","price_band":"300억","size_signal":"3000평(약 9917.4㎡)"},"extractedFacts":{"region":"역삼","exactAddressCandidate":"역삼동 742-1","assetType":"오피스빌딩","priceText":"300억","sizeText":"3000평(약 9917.4㎡)","currentUse":"오피스","currentUseSignal":"근린생활시설","leaseSignal":"임대중","vacancySignal":"공실없음","tenantNames":["쿠팡","네이버"],"unitRentTexts":["301호: 1500만"],"sellerMotivationText":"자산 효율화","brokerNotes":["초역세권 매물"]},"detectedSensitiveFields":["exact_address","tenant_name"],"ambiguousFields":[],"warnings":[],"areaSignal":"역삼","assetType":"오피스빌딩","priceBand":"300억","sizeSignal":"3000평(약 9917.4㎡)","dealType":"매각","buildingName":"역삼 센트럴타워","exactAddress":"역삼동 742-1","totalFloorArea":9917.3,"buildYear":2015,"currentUseSignal":"근린생활시설","vacancySignal":"공실 없음","fitSummary":"초역세권 근생 빌딩으로 시행/사옥 매입에 최적화","cautionSummary":"주요 임차인 만기 조율 필요","hiddenFields":["exact_address","seller_motivation"],"confidence":{"areaSignal":"confirmed","assetType":"confirmed","priceBand":"ai_hypothesis","fitSummary":"ai_hypothesis"},"missingData":["sizeSignal"],"boundaryNote":"본 자료는 실거래 통계 기반 참고치입니다.","buyerType":"법인 사옥형","budgetRange":{"min":50,"max":80,"display":"50억~80억"},"preferredRegions":["강남","성수"],"assetTypes":["꼬마빌딩","사옥용"],"purchasePurpose":"사옥용 매입","mustHave":["초역세권","주차"],"niceToHave":["테라스","루프탑"],"riskTolerance":"medium","financingNote":"자본금 50% 준비","missingQuestions":["구체적인 입주 시기가 언제인가요?","선호하는 수익률이 있나요?"],"privacyNotes":["연락처 비공개"],"fitReasons":["매수자 예산(50-80억)에 부합하는 매물입니다.","요청하신 성수/강남 권역에 해당합니다."],"cautionReasons":["요청한 용도와 달리 명도 협의가 다소 필요합니다."],"recommendedNextAction":"현장 답사 제안","kakaoMessage":"안녕하세요! 요청하신 조건에 부합하는 추천 매물이 있어 안내해 드립니다. 확인해보시고 피드백 부탁드립니다.","title":"강남 역삼역 초역세권 오피스 사옥용 빌딩 매각","shortSummary":"역삼역 도보 5분 거리의 준신축급 대형 오피스빌딩입니다.","dealPoints":["초역세권","사옥 최적"],"cautionPoints":["명도 조율 필요"],"hiddenInfoNotice":["보증금 및 지번은 인가 후 확인 가능"],"gateMessage":"G1 등급 등록이 필요합니다.","kakaoText":"강남 역삼역 오피스 빌딩 매각 안내입니다.","exactUnitCandidate":"101호","floor":"1층","areaSqmText":"150㎡","spaceType":"office","depositText":"5000만","monthlyRentText":"400만","maintenanceFeeText":"50만","availableFromText":"즉시입주","leaseTermMonthsText":"24","incentivesText":"렌트프리 2개월","restrictions":[],"landlordIdentity":"김성수","currentTenant":"스타트업","vacancyReason":"이전 확장","rentNegotiation":"협의 가능","region":"성수동","areaSqm":150,"deposit":5000,"monthlyRent":400,"maintenanceFee":50,"availableFrom":"즉시입주","leaseTermMonths":24,"incentives":{"rentFreeMonths":2,"interiorSupport":"일부 인테리어 지원","freeRentDetail":"렌트프리 2개월 지원"},"shortSummaryLease":"성수역 도보 5분 거리 1층 리테일 상가 매물입니다."}</a:t>
             </a:r>
             <a:endParaRPr lang="en-US" sz="1000" dirty="0"/>
           </a:p>
@@ -5596,7 +5596,7 @@
                 <a:ea typeface="Pretendard" pitchFamily="34" charset="-122"/>
                 <a:cs typeface="Pretendard" pitchFamily="34" charset="-120"/>
               </a:rPr>
-              <a:t>{"ok"</a:t>
+              <a:t>주요 용도</a:t>
             </a:r>
             <a:endParaRPr lang="en-US" sz="1400" dirty="0"/>
           </a:p>
@@ -5638,7 +5638,7 @@
                 <a:ea typeface="Pretendard" pitchFamily="34" charset="-122"/>
                 <a:cs typeface="Pretendard" pitchFamily="34" charset="-120"/>
               </a:rPr>
-              <a:t>true,"mocked":true,"extractedFields":{"area_signal":"역삼","asset_type":"오피스빌딩","price_band":"300억","size_signal":"3000평(약 9917.4㎡)"},"extractedFacts":{"region":"역삼","exactAddressCandidate":"역삼동 742-1","assetType":"오피스빌딩","priceText":"300억","sizeText":"3000평(약 9917.4㎡)","currentUse":"오피스","currentUseSignal":"근린생활시설","leaseSignal":"임대중","vacancySignal":"공실없음","tenantNames":"쿠팡","네이버","unitRentTexts":"301호: 1500만","sellerMotivationText":"자산 효율화","brokerNotes":"초역세권 매물"},"detectedSensitiveFields":"exact_address","tenant_name","ambiguousFields":,"warnings":,"areaSignal":"역삼","assetType":"오피스빌딩","priceBand":"300억","sizeSignal":"3000평(약 9917.4㎡)","dealType":"매각","buildingName":"역삼 센트럴타워","exactAddress":"역삼동 742-1","totalFloorArea":9917.3,"buildYear":2015,"currentUseSignal":"근린생활시설","vacancySignal":"공실 없음","fitSummary":"초역세권 근생 빌딩으로 시행/사옥 매입에 최적화","cautionSummary":"주요 임차 업종 만기 조율 필요","hiddenFields":"exact_address","seller_motivation","confidence":{"areaSignal":"confirmed","assetType":"confirmed","priceBand":"ai_hypothesis","fitSummary":"ai_hypothesis"},"missingData":"sizeSignal","boundaryNote":"본 자료는 실거래 통계 기반 참고치입니다.","buyerType":"법인 사옥형","budgetRange":{"min":50,"max":80,"display":"50억~80억"},"preferredRegions":"강남","성수","assetTypes":"꼬마빌딩","사옥용","purchasePurpose":"사옥용 매입","mustHave":"초역세권","주차","niceToHave":"테라스","루프탑","riskTolerance":"medium","financingNote":"자본금 50% 준비","missingQuestions":"구체적인 입주 시기가 언제인가요?","선호하는 수익률이 있나요?","privacyNotes":"연락처 비공개","fitReasons":"매수자 예산(50-80억)에 부합하는 매물입니다.","요청하신 성수/강남 권역에 해당합니다.","cautionReasons":"요청한 용도와 달리 명도 협의가 다소 필요합니다.","recommendedNextAction":"현장 답사 제안","kakaoMessage":"안녕하세요! 요청하신 조건에 부합하는 추천 매물이 있어 안내해 드립니다. 확인해보시고 피드백 부탁드립니다.","title":"강남 역삼역 초역세권 오피스 사옥용 빌딩 매각","shortSummary":"역삼역 도보 5분 거리의 준신축급 대형 오피스빌딩입니다.","dealPoints":"초역세권","사옥 최적","cautionPoints":"명도 조율 필요","hiddenInfoNotice":"보증금 및 지번은 인가 후 확인 가능","gateMessage":"G1 등급 등록이 필요합니다.","kakaoText":"강남 역삼역 오피스 빌딩 매각 안내입니다.","exactUnitCandidate":"101호","floor":"1층","areaSqmText":"150㎡","spaceType":"office","depositText":"5000만","monthlyRentText":"400만","maintenanceFeeText":"50만","availableFromText":"즉시입주","leaseTermMonthsText":"24","incentivesText":"렌트프리 2개월","restrictions":,"landlordIdentity":"김성수","currentTenant":"스타트업","vacancyReason":"이전 확장","rentNegotiation":"협의 가능","region":"성수동","areaSqm":150,"deposit":5000,"monthlyRent":400,"maintenanceFee":50,"availableFrom":"즉시입주","leaseTermMonths":24,"incentives":{"rentFreeMonths":2,"interiorSupport":"일부 인테리어 지원","freeRentDetail":"렌트프리 2개월 지원"},"shortSummaryLease":"성수역 도보 5분 거리 1층 리테일 상가 매물입니다."}</a:t>
+              <a:t>확인 필요</a:t>
             </a:r>
             <a:endParaRPr lang="en-US" sz="1400" dirty="0"/>
           </a:p>
@@ -5647,6 +5647,434 @@
       <p:sp>
         <p:nvSpPr>
           <p:cNvPr id="9" name="Shape 7"/>
+          <p:cNvSpPr/>
+          <p:nvPr/>
+        </p:nvSpPr>
+        <p:spPr>
+          <a:xfrm>
+            <a:off x="566928" y="2048256"/>
+            <a:ext cx="6858000" cy="0"/>
+          </a:xfrm>
+          <a:prstGeom prst="line">
+            <a:avLst/>
+          </a:prstGeom>
+          <a:noFill/>
+          <a:ln w="3810">
+            <a:solidFill>
+              <a:srgbClr val="CBD5E0"/>
+            </a:solidFill>
+            <a:prstDash val="solid"/>
+          </a:ln>
+        </p:spPr>
+      </p:sp>
+      <p:sp>
+        <p:nvSpPr>
+          <p:cNvPr id="10" name="Text 8"/>
+          <p:cNvSpPr/>
+          <p:nvPr/>
+        </p:nvSpPr>
+        <p:spPr>
+          <a:xfrm>
+            <a:off x="566928" y="2048256"/>
+            <a:ext cx="2606040" cy="402336"/>
+          </a:xfrm>
+          <a:prstGeom prst="rect">
+            <a:avLst/>
+          </a:prstGeom>
+          <a:noFill/>
+          <a:ln/>
+        </p:spPr>
+        <p:txBody>
+          <a:bodyPr wrap="square" lIns="0" tIns="0" rIns="0" bIns="0" rtlCol="0" anchor="ctr"/>
+          <a:lstStyle/>
+          <a:p>
+            <a:pPr indent="0" marL="0">
+              <a:lnSpc>
+                <a:spcPct val="120000"/>
+              </a:lnSpc>
+              <a:buNone/>
+            </a:pPr>
+            <a:r>
+              <a:rPr lang="en-US" sz="1400" dirty="0">
+                <a:solidFill>
+                  <a:srgbClr val="718096"/>
+                </a:solidFill>
+                <a:latin typeface="Pretendard" pitchFamily="34" charset="0"/>
+                <a:ea typeface="Pretendard" pitchFamily="34" charset="-122"/>
+                <a:cs typeface="Pretendard" pitchFamily="34" charset="-120"/>
+              </a:rPr>
+              <a:t>연면적</a:t>
+            </a:r>
+            <a:endParaRPr lang="en-US" sz="1400" dirty="0"/>
+          </a:p>
+        </p:txBody>
+      </p:sp>
+      <p:sp>
+        <p:nvSpPr>
+          <p:cNvPr id="11" name="Text 9"/>
+          <p:cNvSpPr/>
+          <p:nvPr/>
+        </p:nvSpPr>
+        <p:spPr>
+          <a:xfrm>
+            <a:off x="3172968" y="2048256"/>
+            <a:ext cx="4251960" cy="402336"/>
+          </a:xfrm>
+          <a:prstGeom prst="rect">
+            <a:avLst/>
+          </a:prstGeom>
+          <a:noFill/>
+          <a:ln/>
+        </p:spPr>
+        <p:txBody>
+          <a:bodyPr wrap="square" lIns="0" tIns="0" rIns="0" bIns="0" rtlCol="0" anchor="ctr"/>
+          <a:lstStyle/>
+          <a:p>
+            <a:pPr indent="0" marL="0">
+              <a:lnSpc>
+                <a:spcPct val="120000"/>
+              </a:lnSpc>
+              <a:buNone/>
+            </a:pPr>
+            <a:r>
+              <a:rPr lang="en-US" sz="1400" b="1" dirty="0">
+                <a:solidFill>
+                  <a:srgbClr val="10161F"/>
+                </a:solidFill>
+                <a:latin typeface="Pretendard" pitchFamily="34" charset="0"/>
+                <a:ea typeface="Pretendard" pitchFamily="34" charset="-122"/>
+                <a:cs typeface="Pretendard" pitchFamily="34" charset="-120"/>
+              </a:rPr>
+              <a:t>5,000㎡ (약 1513평(약 5001.7㎡))</a:t>
+            </a:r>
+            <a:endParaRPr lang="en-US" sz="1400" dirty="0"/>
+          </a:p>
+        </p:txBody>
+      </p:sp>
+      <p:sp>
+        <p:nvSpPr>
+          <p:cNvPr id="12" name="Shape 10"/>
+          <p:cNvSpPr/>
+          <p:nvPr/>
+        </p:nvSpPr>
+        <p:spPr>
+          <a:xfrm>
+            <a:off x="566928" y="2450592"/>
+            <a:ext cx="6858000" cy="0"/>
+          </a:xfrm>
+          <a:prstGeom prst="line">
+            <a:avLst/>
+          </a:prstGeom>
+          <a:noFill/>
+          <a:ln w="3810">
+            <a:solidFill>
+              <a:srgbClr val="CBD5E0"/>
+            </a:solidFill>
+            <a:prstDash val="solid"/>
+          </a:ln>
+        </p:spPr>
+      </p:sp>
+      <p:sp>
+        <p:nvSpPr>
+          <p:cNvPr id="13" name="Text 11"/>
+          <p:cNvSpPr/>
+          <p:nvPr/>
+        </p:nvSpPr>
+        <p:spPr>
+          <a:xfrm>
+            <a:off x="566928" y="2450592"/>
+            <a:ext cx="2606040" cy="402336"/>
+          </a:xfrm>
+          <a:prstGeom prst="rect">
+            <a:avLst/>
+          </a:prstGeom>
+          <a:noFill/>
+          <a:ln/>
+        </p:spPr>
+        <p:txBody>
+          <a:bodyPr wrap="square" lIns="0" tIns="0" rIns="0" bIns="0" rtlCol="0" anchor="ctr"/>
+          <a:lstStyle/>
+          <a:p>
+            <a:pPr indent="0" marL="0">
+              <a:lnSpc>
+                <a:spcPct val="120000"/>
+              </a:lnSpc>
+              <a:buNone/>
+            </a:pPr>
+            <a:r>
+              <a:rPr lang="en-US" sz="1400" dirty="0">
+                <a:solidFill>
+                  <a:srgbClr val="718096"/>
+                </a:solidFill>
+                <a:latin typeface="Pretendard" pitchFamily="34" charset="0"/>
+                <a:ea typeface="Pretendard" pitchFamily="34" charset="-122"/>
+                <a:cs typeface="Pretendard" pitchFamily="34" charset="-120"/>
+              </a:rPr>
+              <a:t>대지면적</a:t>
+            </a:r>
+            <a:endParaRPr lang="en-US" sz="1400" dirty="0"/>
+          </a:p>
+        </p:txBody>
+      </p:sp>
+      <p:sp>
+        <p:nvSpPr>
+          <p:cNvPr id="14" name="Text 12"/>
+          <p:cNvSpPr/>
+          <p:nvPr/>
+        </p:nvSpPr>
+        <p:spPr>
+          <a:xfrm>
+            <a:off x="3172968" y="2450592"/>
+            <a:ext cx="4251960" cy="402336"/>
+          </a:xfrm>
+          <a:prstGeom prst="rect">
+            <a:avLst/>
+          </a:prstGeom>
+          <a:noFill/>
+          <a:ln/>
+        </p:spPr>
+        <p:txBody>
+          <a:bodyPr wrap="square" lIns="0" tIns="0" rIns="0" bIns="0" rtlCol="0" anchor="ctr"/>
+          <a:lstStyle/>
+          <a:p>
+            <a:pPr indent="0" marL="0">
+              <a:lnSpc>
+                <a:spcPct val="120000"/>
+              </a:lnSpc>
+              <a:buNone/>
+            </a:pPr>
+            <a:r>
+              <a:rPr lang="en-US" sz="1400" b="1" dirty="0">
+                <a:solidFill>
+                  <a:srgbClr val="10161F"/>
+                </a:solidFill>
+                <a:latin typeface="Pretendard" pitchFamily="34" charset="0"/>
+                <a:ea typeface="Pretendard" pitchFamily="34" charset="-122"/>
+                <a:cs typeface="Pretendard" pitchFamily="34" charset="-120"/>
+              </a:rPr>
+              <a:t>1,000㎡ (약 303평(약 1001.7㎡))</a:t>
+            </a:r>
+            <a:endParaRPr lang="en-US" sz="1400" dirty="0"/>
+          </a:p>
+        </p:txBody>
+      </p:sp>
+      <p:sp>
+        <p:nvSpPr>
+          <p:cNvPr id="15" name="Shape 13"/>
+          <p:cNvSpPr/>
+          <p:nvPr/>
+        </p:nvSpPr>
+        <p:spPr>
+          <a:xfrm>
+            <a:off x="566928" y="2852928"/>
+            <a:ext cx="6858000" cy="0"/>
+          </a:xfrm>
+          <a:prstGeom prst="line">
+            <a:avLst/>
+          </a:prstGeom>
+          <a:noFill/>
+          <a:ln w="3810">
+            <a:solidFill>
+              <a:srgbClr val="CBD5E0"/>
+            </a:solidFill>
+            <a:prstDash val="solid"/>
+          </a:ln>
+        </p:spPr>
+      </p:sp>
+      <p:sp>
+        <p:nvSpPr>
+          <p:cNvPr id="16" name="Text 14"/>
+          <p:cNvSpPr/>
+          <p:nvPr/>
+        </p:nvSpPr>
+        <p:spPr>
+          <a:xfrm>
+            <a:off x="566928" y="2852928"/>
+            <a:ext cx="2606040" cy="402336"/>
+          </a:xfrm>
+          <a:prstGeom prst="rect">
+            <a:avLst/>
+          </a:prstGeom>
+          <a:noFill/>
+          <a:ln/>
+        </p:spPr>
+        <p:txBody>
+          <a:bodyPr wrap="square" lIns="0" tIns="0" rIns="0" bIns="0" rtlCol="0" anchor="ctr"/>
+          <a:lstStyle/>
+          <a:p>
+            <a:pPr indent="0" marL="0">
+              <a:lnSpc>
+                <a:spcPct val="120000"/>
+              </a:lnSpc>
+              <a:buNone/>
+            </a:pPr>
+            <a:r>
+              <a:rPr lang="en-US" sz="1400" dirty="0">
+                <a:solidFill>
+                  <a:srgbClr val="718096"/>
+                </a:solidFill>
+                <a:latin typeface="Pretendard" pitchFamily="34" charset="0"/>
+                <a:ea typeface="Pretendard" pitchFamily="34" charset="-122"/>
+                <a:cs typeface="Pretendard" pitchFamily="34" charset="-120"/>
+              </a:rPr>
+              <a:t>용도지역</a:t>
+            </a:r>
+            <a:endParaRPr lang="en-US" sz="1400" dirty="0"/>
+          </a:p>
+        </p:txBody>
+      </p:sp>
+      <p:sp>
+        <p:nvSpPr>
+          <p:cNvPr id="17" name="Text 15"/>
+          <p:cNvSpPr/>
+          <p:nvPr/>
+        </p:nvSpPr>
+        <p:spPr>
+          <a:xfrm>
+            <a:off x="3172968" y="2852928"/>
+            <a:ext cx="4251960" cy="402336"/>
+          </a:xfrm>
+          <a:prstGeom prst="rect">
+            <a:avLst/>
+          </a:prstGeom>
+          <a:noFill/>
+          <a:ln/>
+        </p:spPr>
+        <p:txBody>
+          <a:bodyPr wrap="square" lIns="0" tIns="0" rIns="0" bIns="0" rtlCol="0" anchor="ctr"/>
+          <a:lstStyle/>
+          <a:p>
+            <a:pPr indent="0" marL="0">
+              <a:lnSpc>
+                <a:spcPct val="120000"/>
+              </a:lnSpc>
+              <a:buNone/>
+            </a:pPr>
+            <a:r>
+              <a:rPr lang="en-US" sz="1400" b="1" dirty="0">
+                <a:solidFill>
+                  <a:srgbClr val="10161F"/>
+                </a:solidFill>
+                <a:latin typeface="Pretendard" pitchFamily="34" charset="0"/>
+                <a:ea typeface="Pretendard" pitchFamily="34" charset="-122"/>
+                <a:cs typeface="Pretendard" pitchFamily="34" charset="-120"/>
+              </a:rPr>
+              <a:t>일반상업지역</a:t>
+            </a:r>
+            <a:endParaRPr lang="en-US" sz="1400" dirty="0"/>
+          </a:p>
+        </p:txBody>
+      </p:sp>
+      <p:sp>
+        <p:nvSpPr>
+          <p:cNvPr id="18" name="Shape 16"/>
+          <p:cNvSpPr/>
+          <p:nvPr/>
+        </p:nvSpPr>
+        <p:spPr>
+          <a:xfrm>
+            <a:off x="566928" y="3255264"/>
+            <a:ext cx="6858000" cy="0"/>
+          </a:xfrm>
+          <a:prstGeom prst="line">
+            <a:avLst/>
+          </a:prstGeom>
+          <a:noFill/>
+          <a:ln w="3810">
+            <a:solidFill>
+              <a:srgbClr val="CBD5E0"/>
+            </a:solidFill>
+            <a:prstDash val="solid"/>
+          </a:ln>
+        </p:spPr>
+      </p:sp>
+      <p:sp>
+        <p:nvSpPr>
+          <p:cNvPr id="19" name="Text 17"/>
+          <p:cNvSpPr/>
+          <p:nvPr/>
+        </p:nvSpPr>
+        <p:spPr>
+          <a:xfrm>
+            <a:off x="566928" y="3255264"/>
+            <a:ext cx="2606040" cy="402336"/>
+          </a:xfrm>
+          <a:prstGeom prst="rect">
+            <a:avLst/>
+          </a:prstGeom>
+          <a:noFill/>
+          <a:ln/>
+        </p:spPr>
+        <p:txBody>
+          <a:bodyPr wrap="square" lIns="0" tIns="0" rIns="0" bIns="0" rtlCol="0" anchor="ctr"/>
+          <a:lstStyle/>
+          <a:p>
+            <a:pPr indent="0" marL="0">
+              <a:lnSpc>
+                <a:spcPct val="120000"/>
+              </a:lnSpc>
+              <a:buNone/>
+            </a:pPr>
+            <a:r>
+              <a:rPr lang="en-US" sz="1400" dirty="0">
+                <a:solidFill>
+                  <a:srgbClr val="718096"/>
+                </a:solidFill>
+                <a:latin typeface="Pretendard" pitchFamily="34" charset="0"/>
+                <a:ea typeface="Pretendard" pitchFamily="34" charset="-122"/>
+                <a:cs typeface="Pretendard" pitchFamily="34" charset="-120"/>
+              </a:rPr>
+              <a:t>매매 희망가</a:t>
+            </a:r>
+            <a:endParaRPr lang="en-US" sz="1400" dirty="0"/>
+          </a:p>
+        </p:txBody>
+      </p:sp>
+      <p:sp>
+        <p:nvSpPr>
+          <p:cNvPr id="20" name="Text 18"/>
+          <p:cNvSpPr/>
+          <p:nvPr/>
+        </p:nvSpPr>
+        <p:spPr>
+          <a:xfrm>
+            <a:off x="3172968" y="3255264"/>
+            <a:ext cx="4251960" cy="402336"/>
+          </a:xfrm>
+          <a:prstGeom prst="rect">
+            <a:avLst/>
+          </a:prstGeom>
+          <a:noFill/>
+          <a:ln/>
+        </p:spPr>
+        <p:txBody>
+          <a:bodyPr wrap="square" lIns="0" tIns="0" rIns="0" bIns="0" rtlCol="0" anchor="ctr"/>
+          <a:lstStyle/>
+          <a:p>
+            <a:pPr indent="0" marL="0">
+              <a:lnSpc>
+                <a:spcPct val="120000"/>
+              </a:lnSpc>
+              <a:buNone/>
+            </a:pPr>
+            <a:r>
+              <a:rPr lang="en-US" sz="1400" b="1" dirty="0">
+                <a:solidFill>
+                  <a:srgbClr val="10161F"/>
+                </a:solidFill>
+                <a:latin typeface="Pretendard" pitchFamily="34" charset="0"/>
+                <a:ea typeface="Pretendard" pitchFamily="34" charset="-122"/>
+                <a:cs typeface="Pretendard" pitchFamily="34" charset="-120"/>
+              </a:rPr>
+              <a:t>240억</a:t>
+            </a:r>
+            <a:endParaRPr lang="en-US" sz="1400" dirty="0"/>
+          </a:p>
+        </p:txBody>
+      </p:sp>
+      <p:sp>
+        <p:nvSpPr>
+          <p:cNvPr id="21" name="Shape 19"/>
           <p:cNvSpPr/>
           <p:nvPr/>
         </p:nvSpPr>
@@ -5669,7 +6097,7 @@
       </p:sp>
       <p:sp>
         <p:nvSpPr>
-          <p:cNvPr id="10" name="Shape 8"/>
+          <p:cNvPr id="22" name="Shape 20"/>
           <p:cNvSpPr/>
           <p:nvPr/>
         </p:nvSpPr>
@@ -5684,14 +6112,14 @@
             </a:avLst>
           </a:prstGeom>
           <a:solidFill>
-            <a:srgbClr val="F3EBDA"/>
+            <a:srgbClr val="BEE3F8"/>
           </a:solidFill>
           <a:ln/>
         </p:spPr>
       </p:sp>
       <p:sp>
         <p:nvSpPr>
-          <p:cNvPr id="11" name="Shape 9"/>
+          <p:cNvPr id="23" name="Shape 21"/>
           <p:cNvSpPr/>
           <p:nvPr/>
         </p:nvSpPr>
@@ -5704,14 +6132,14 @@
             <a:avLst/>
           </a:prstGeom>
           <a:solidFill>
-            <a:srgbClr val="977024"/>
+            <a:srgbClr val="2B6CB0"/>
           </a:solidFill>
           <a:ln/>
         </p:spPr>
       </p:sp>
       <p:sp>
         <p:nvSpPr>
-          <p:cNvPr id="12" name="Text 10"/>
+          <p:cNvPr id="24" name="Text 22"/>
           <p:cNvSpPr/>
           <p:nvPr/>
         </p:nvSpPr>
@@ -5733,13 +6161,24 @@
             <a:pPr indent="0" marL="0">
               <a:buNone/>
             </a:pPr>
+            <a:r>
+              <a:rPr lang="en-US" sz="1050" b="1" dirty="0">
+                <a:solidFill>
+                  <a:srgbClr val="2B6CB0"/>
+                </a:solidFill>
+                <a:latin typeface="Pretendard" pitchFamily="34" charset="0"/>
+                <a:ea typeface="Pretendard" pitchFamily="34" charset="-122"/>
+                <a:cs typeface="Pretendard" pitchFamily="34" charset="-120"/>
+              </a:rPr>
+              <a:t>토지 및 건물 분석 포인트</a:t>
+            </a:r>
             <a:endParaRPr lang="en-US" sz="1050" dirty="0"/>
           </a:p>
         </p:txBody>
       </p:sp>
       <p:sp>
         <p:nvSpPr>
-          <p:cNvPr id="13" name="Text 11"/>
+          <p:cNvPr id="25" name="Text 23"/>
           <p:cNvSpPr/>
           <p:nvPr/>
         </p:nvSpPr>
@@ -5758,11 +6197,12 @@
           <a:bodyPr wrap="square" lIns="0" tIns="0" rIns="0" bIns="0" rtlCol="0" anchor="t"/>
           <a:lstStyle/>
           <a:p>
-            <a:pPr indent="0" marL="0">
+            <a:pPr marL="342900" indent="-342900">
               <a:lnSpc>
                 <a:spcPct val="120000"/>
               </a:lnSpc>
-              <a:buNone/>
+              <a:buSzPct val="100000"/>
+              <a:buChar char="•"/>
             </a:pPr>
             <a:r>
               <a:rPr lang="en-US" sz="930" dirty="0">
@@ -5773,45 +6213,253 @@
                 <a:ea typeface="Pretendard" pitchFamily="34" charset="-122"/>
                 <a:cs typeface="Pretendard" pitchFamily="34" charset="-120"/>
               </a:rPr>
-              <a:t>{"ok":true,"mocked":true,"extractedFields":{"area_signal":"역삼","asset_type":"오피스빌딩","price_band":"300억","size_signal":"3</a:t>
+              <a:t>물건 접면 도로 및 교통 여건은 현장 확인 사항입니다</a:t>
             </a:r>
             <a:endParaRPr lang="en-US" sz="930" dirty="0"/>
           </a:p>
-        </p:txBody>
-      </p:sp>
-      <p:sp>
-        <p:nvSpPr>
-          <p:cNvPr id="14" name="Text 12"/>
-          <p:cNvSpPr/>
-          <p:nvPr/>
-        </p:nvSpPr>
-        <p:spPr>
-          <a:xfrm>
-            <a:off x="566928" y="6382512"/>
-            <a:ext cx="7315200" cy="219456"/>
-          </a:xfrm>
-          <a:prstGeom prst="rect">
-            <a:avLst/>
-          </a:prstGeom>
-          <a:noFill/>
-          <a:ln/>
-        </p:spPr>
-        <p:txBody>
-          <a:bodyPr wrap="square" lIns="0" tIns="0" rIns="0" bIns="0" rtlCol="0" anchor="ctr"/>
-          <a:lstStyle/>
-          <a:p>
-            <a:pPr indent="0" marL="0">
-              <a:buNone/>
-            </a:pPr>
-            <a:r>
-              <a:rPr lang="en-US" sz="800" dirty="0">
-                <a:solidFill>
-                  <a:srgbClr val="718096"/>
+          <a:p>
+            <a:pPr marL="342900" indent="-342900">
+              <a:lnSpc>
+                <a:spcPct val="120000"/>
+              </a:lnSpc>
+              <a:buSzPct val="100000"/>
+              <a:buChar char="•"/>
+            </a:pPr>
+            <a:r>
+              <a:rPr lang="en-US" sz="930" dirty="0">
+                <a:solidFill>
+                  <a:srgbClr val="10161F"/>
                 </a:solidFill>
                 <a:latin typeface="Pretendard" pitchFamily="34" charset="0"/>
                 <a:ea typeface="Pretendard" pitchFamily="34" charset="-122"/>
                 <a:cs typeface="Pretendard" pitchFamily="34" charset="-120"/>
               </a:rPr>
+              <a:t>상세 건물 제원은 실사 자료를 참조하시기 바랍니다</a:t>
+            </a:r>
+            <a:endParaRPr lang="en-US" sz="930" dirty="0"/>
+          </a:p>
+          <a:p>
+            <a:pPr marL="342900" indent="-342900">
+              <a:lnSpc>
+                <a:spcPct val="120000"/>
+              </a:lnSpc>
+              <a:buSzPct val="100000"/>
+              <a:buChar char="•"/>
+            </a:pPr>
+            <a:r>
+              <a:rPr lang="en-US" sz="930" dirty="0">
+                <a:solidFill>
+                  <a:srgbClr val="10161F"/>
+                </a:solidFill>
+                <a:latin typeface="Pretendard" pitchFamily="34" charset="0"/>
+                <a:ea typeface="Pretendard" pitchFamily="34" charset="-122"/>
+                <a:cs typeface="Pretendard" pitchFamily="34" charset="-120"/>
+              </a:rPr>
+              <a:t>건물 현황 및 규모는 첨부 대장을 기준으로 합니다</a:t>
+            </a:r>
+            <a:endParaRPr lang="en-US" sz="930" dirty="0"/>
+          </a:p>
+        </p:txBody>
+      </p:sp>
+      <p:sp>
+        <p:nvSpPr>
+          <p:cNvPr id="26" name="Shape 24"/>
+          <p:cNvSpPr/>
+          <p:nvPr/>
+        </p:nvSpPr>
+        <p:spPr>
+          <a:xfrm>
+            <a:off x="7784287" y="3977640"/>
+            <a:ext cx="3840480" cy="2148840"/>
+          </a:xfrm>
+          <a:prstGeom prst="roundRect">
+            <a:avLst>
+              <a:gd name="adj" fmla="val 2553"/>
+            </a:avLst>
+          </a:prstGeom>
+          <a:solidFill>
+            <a:srgbClr val="BEE3F8"/>
+          </a:solidFill>
+          <a:ln/>
+        </p:spPr>
+      </p:sp>
+      <p:sp>
+        <p:nvSpPr>
+          <p:cNvPr id="27" name="Shape 25"/>
+          <p:cNvSpPr/>
+          <p:nvPr/>
+        </p:nvSpPr>
+        <p:spPr>
+          <a:xfrm>
+            <a:off x="7784287" y="4032504"/>
+            <a:ext cx="36576" cy="2039112"/>
+          </a:xfrm>
+          <a:prstGeom prst="rect">
+            <a:avLst/>
+          </a:prstGeom>
+          <a:solidFill>
+            <a:srgbClr val="2B6CB0"/>
+          </a:solidFill>
+          <a:ln/>
+        </p:spPr>
+      </p:sp>
+      <p:sp>
+        <p:nvSpPr>
+          <p:cNvPr id="28" name="Text 26"/>
+          <p:cNvSpPr/>
+          <p:nvPr/>
+        </p:nvSpPr>
+        <p:spPr>
+          <a:xfrm>
+            <a:off x="7967167" y="4087368"/>
+            <a:ext cx="3511296" cy="201168"/>
+          </a:xfrm>
+          <a:prstGeom prst="rect">
+            <a:avLst/>
+          </a:prstGeom>
+          <a:noFill/>
+          <a:ln/>
+        </p:spPr>
+        <p:txBody>
+          <a:bodyPr wrap="square" lIns="0" tIns="0" rIns="0" bIns="0" rtlCol="0" anchor="ctr"/>
+          <a:lstStyle/>
+          <a:p>
+            <a:pPr indent="0" marL="0">
+              <a:buNone/>
+            </a:pPr>
+            <a:r>
+              <a:rPr lang="en-US" sz="1050" b="1" dirty="0">
+                <a:solidFill>
+                  <a:srgbClr val="2B6CB0"/>
+                </a:solidFill>
+                <a:latin typeface="Pretendard" pitchFamily="34" charset="0"/>
+                <a:ea typeface="Pretendard" pitchFamily="34" charset="-122"/>
+                <a:cs typeface="Pretendard" pitchFamily="34" charset="-120"/>
+              </a:rPr>
+              <a:t>물건 실사 및 관리 상태</a:t>
+            </a:r>
+            <a:endParaRPr lang="en-US" sz="1050" dirty="0"/>
+          </a:p>
+        </p:txBody>
+      </p:sp>
+      <p:sp>
+        <p:nvSpPr>
+          <p:cNvPr id="29" name="Text 27"/>
+          <p:cNvSpPr/>
+          <p:nvPr/>
+        </p:nvSpPr>
+        <p:spPr>
+          <a:xfrm>
+            <a:off x="7967167" y="4306824"/>
+            <a:ext cx="3511296" cy="1746504"/>
+          </a:xfrm>
+          <a:prstGeom prst="rect">
+            <a:avLst/>
+          </a:prstGeom>
+          <a:noFill/>
+          <a:ln/>
+        </p:spPr>
+        <p:txBody>
+          <a:bodyPr wrap="square" lIns="0" tIns="0" rIns="0" bIns="0" rtlCol="0" anchor="t"/>
+          <a:lstStyle/>
+          <a:p>
+            <a:pPr marL="342900" indent="-342900">
+              <a:lnSpc>
+                <a:spcPct val="120000"/>
+              </a:lnSpc>
+              <a:buSzPct val="100000"/>
+              <a:buChar char="•"/>
+            </a:pPr>
+            <a:r>
+              <a:rPr lang="en-US" sz="930" dirty="0">
+                <a:solidFill>
+                  <a:srgbClr val="10161F"/>
+                </a:solidFill>
+                <a:latin typeface="Pretendard" pitchFamily="34" charset="0"/>
+                <a:ea typeface="Pretendard" pitchFamily="34" charset="-122"/>
+                <a:cs typeface="Pretendard" pitchFamily="34" charset="-120"/>
+              </a:rPr>
+              <a:t>건물 상태 및 설비 현황은 실사 보고서를 참조하십시오</a:t>
+            </a:r>
+            <a:endParaRPr lang="en-US" sz="930" dirty="0"/>
+          </a:p>
+          <a:p>
+            <a:pPr marL="342900" indent="-342900">
+              <a:lnSpc>
+                <a:spcPct val="120000"/>
+              </a:lnSpc>
+              <a:buSzPct val="100000"/>
+              <a:buChar char="•"/>
+            </a:pPr>
+            <a:r>
+              <a:rPr lang="en-US" sz="930" dirty="0">
+                <a:solidFill>
+                  <a:srgbClr val="10161F"/>
+                </a:solidFill>
+                <a:latin typeface="Pretendard" pitchFamily="34" charset="0"/>
+                <a:ea typeface="Pretendard" pitchFamily="34" charset="-122"/>
+                <a:cs typeface="Pretendard" pitchFamily="34" charset="-120"/>
+              </a:rPr>
+              <a:t>자금 조달 및 대출 조건은 금융 자문 후 확정됩니다</a:t>
+            </a:r>
+            <a:endParaRPr lang="en-US" sz="930" dirty="0"/>
+          </a:p>
+          <a:p>
+            <a:pPr marL="342900" indent="-342900">
+              <a:lnSpc>
+                <a:spcPct val="120000"/>
+              </a:lnSpc>
+              <a:buSzPct val="100000"/>
+              <a:buChar char="•"/>
+            </a:pPr>
+            <a:r>
+              <a:rPr lang="en-US" sz="930" dirty="0">
+                <a:solidFill>
+                  <a:srgbClr val="10161F"/>
+                </a:solidFill>
+                <a:latin typeface="Pretendard" pitchFamily="34" charset="0"/>
+                <a:ea typeface="Pretendard" pitchFamily="34" charset="-122"/>
+                <a:cs typeface="Pretendard" pitchFamily="34" charset="-120"/>
+              </a:rPr>
+              <a:t>상세 실사 단계에서 구체적인 계약 조건 및 세무 검토가 진행됩니다</a:t>
+            </a:r>
+            <a:endParaRPr lang="en-US" sz="930" dirty="0"/>
+          </a:p>
+        </p:txBody>
+      </p:sp>
+      <p:sp>
+        <p:nvSpPr>
+          <p:cNvPr id="30" name="Text 28"/>
+          <p:cNvSpPr/>
+          <p:nvPr/>
+        </p:nvSpPr>
+        <p:spPr>
+          <a:xfrm>
+            <a:off x="566928" y="6382512"/>
+            <a:ext cx="7315200" cy="219456"/>
+          </a:xfrm>
+          <a:prstGeom prst="rect">
+            <a:avLst/>
+          </a:prstGeom>
+          <a:noFill/>
+          <a:ln/>
+        </p:spPr>
+        <p:txBody>
+          <a:bodyPr wrap="square" lIns="0" tIns="0" rIns="0" bIns="0" rtlCol="0" anchor="ctr"/>
+          <a:lstStyle/>
+          <a:p>
+            <a:pPr indent="0" marL="0">
+              <a:buNone/>
+            </a:pPr>
+            <a:r>
+              <a:rPr lang="en-US" sz="800" dirty="0">
+                <a:solidFill>
+                  <a:srgbClr val="718096"/>
+                </a:solidFill>
+                <a:latin typeface="Pretendard" pitchFamily="34" charset="0"/>
+                <a:ea typeface="Pretendard" pitchFamily="34" charset="-122"/>
+                <a:cs typeface="Pretendard" pitchFamily="34" charset="-120"/>
+              </a:rPr>
               <a:t>크리딜   |   </a:t>
             </a:r>
             <a:endParaRPr lang="en-US" sz="800" dirty="0"/>
@@ -5820,7 +6468,7 @@
       </p:sp>
       <p:sp>
         <p:nvSpPr>
-          <p:cNvPr id="15" name="Text 13"/>
+          <p:cNvPr id="31" name="Text 29"/>
           <p:cNvSpPr/>
           <p:nvPr/>
         </p:nvSpPr>
@@ -6143,7 +6791,7 @@
                 <a:ea typeface="Pretendard" pitchFamily="34" charset="-122"/>
                 <a:cs typeface="Pretendard" pitchFamily="34" charset="-120"/>
               </a:rPr>
-              <a:t>true,"mocked":true,"extractedFields":{"area_signal":"역삼","asset_type":"오피스빌딩","price_band":"300억","size_signal":"3000평(약 9917.4㎡)"},"extractedFacts":{"region":"역삼","exactAddressCandidate":"역삼동 742-1","assetType":"오피스빌딩","priceText":"300억","sizeText":"3000평(약 9917.4㎡)","currentUse":"오피스","currentUseSignal":"근린생활시설","leaseSignal":"임대중","vacancySignal":"공실없음","tenantNames":"쿠팡","네이버","unitRentTexts":"301호: 1500만","sellerMotivationText":"자산 효율화","brokerNotes":"초역세권 매물"},"detectedSensitiveFields":"exact_address","tenant_name","ambiguousFields":,"warnings":,"areaSignal":"역삼","assetType":"오피스빌딩","priceBand":"300억","sizeSignal":"3000평(약 9917.4㎡)","dealType":"매각","buildingName":"역삼 센트럴타워","exactAddress":"역삼동 742-1","totalFloorArea":9917.3,"buildYear":2015,"currentUseSignal":"근린생활시설","vacancySignal":"공실 없음","fitSummary":"초역세권 근생 빌딩으로 시행/사옥 매입에 최적화","cautionSummary":"주요 임차 업종 만기 조율 필요","hiddenFields":"exact_address","seller_motivation","confidence":{"areaSignal":"confirmed","assetType":"confirmed","priceBand":"ai_hypothesis","fitSummary":"ai_hypothesis"},"missingData":"sizeSignal","boundaryNote":"본 자료는 실거래 통계 기반 참고치입니다.","buyerType":"법인 사옥형","budgetRange":{"min":50,"max":80,"display":"50억~80억"},"preferredRegions":"강남","성수","assetTypes":"꼬마빌딩","사옥용","purchasePurpose":"사옥용 매입","mustHave":"초역세권","주차","niceToHave":"테라스","루프탑","riskTolerance":"medium","financingNote":"자본금 50% 준비","missingQuestions":"구체적인 입주 시기가 언제인가요?","선호하는 수익률이 있나요?","privacyNotes":"연락처 비공개","fitReasons":"매수자 예산(50-80억)에 부합하는 매물입니다.","요청하신 성수/강남 권역에 해당합니다.","cautionReasons":"요청한 용도와 달리 명도 협의가 다소 필요합니다.","recommendedNextAction":"현장 답사 제안","kakaoMessage":"안녕하세요! 요청하신 조건에 부합하는 추천 매물이 있어 안내해 드립니다. 확인해보시고 피드백 부탁드립니다.","title":"강남 역삼역 초역세권 오피스 사옥용 빌딩 매각","shortSummary":"역삼역 도보 5분 거리의 준신축급 대형 오피스빌딩입니다.","dealPoints":"초역세권","사옥 최적","cautionPoints":"명도 조율 필요","hiddenInfoNotice":"보증금 및 지번은 인가 후 확인 가능","gateMessage":"G1 등급 등록이 필요합니다.","kakaoText":"강남 역삼역 오피스 빌딩 매각 안내입니다.","exactUnitCandidate":"101호","floor":"1층","areaSqmText":"150㎡","spaceType":"office","depositText":"5000만","monthlyRentText":"400만","maintenanceFeeText":"50만","availableFromText":"즉시입주","leaseTermMonthsText":"24","incentivesText":"렌트프리 2개월","restrictions":,"landlordIdentity":"김성수","currentTenant":"스타트업","vacancyReason":"이전 확장","rentNegotiation":"협의 가능","region":"성수동","areaSqm":150,"deposit":5000,"monthlyRent":400,"maintenanceFee":50,"availableFrom":"즉시입주","leaseTermMonths":24,"incentives":{"rentFreeMonths":2,"interiorSupport":"일부 인테리어 지원","freeRentDetail":"렌트프리 2개월 지원"},"shortSummaryLease":"성수역 도보 5분 거리 1층 리테일 상가 매물입니다."}</a:t>
+              <a:t>true,"mocked":true,"extractedFields":{"area_signal":"역삼","asset_type":"오피스빌딩","price_band":"300억","size_signal":"3000평(약 9917.4㎡)"},"extractedFacts":{"region":"역삼","exactAddressCandidate":"역삼동 742-1","assetType":"오피스빌딩","priceText":"300억","sizeText":"3000평(약 9917.4㎡)","currentUse":"오피스","currentUseSignal":"근린생활시설","leaseSignal":"임대중","vacancySignal":"공실없음","tenantNames":"쿠팡","네이버","unitRentTexts":"301호: 1500만","sellerMotivationText":"자산 효율화","brokerNotes":"초역세권 매물"},"detectedSensitiveFields":"exact_address","tenant_name","ambiguousFields":,"warnings":,"areaSignal":"역삼","assetType":"오피스빌딩","priceBand":"300억","sizeSignal":"3000평(약 9917.4㎡)","dealType":"매각","buildingName":"역삼 센트럴타워","exactAddress":"역삼동 742-1","totalFloorArea":9917.3,"buildYear":2015,"currentUseSignal":"근린생활시설","vacancySignal":"공실 없음","fitSummary":"초역세권 근생 빌딩으로 시행/사옥 매입에 최적화","cautionSummary":"주요 임차인 만기 조율 필요","hiddenFields":"exact_address","seller_motivation","confidence":{"areaSignal":"confirmed","assetType":"confirmed","priceBand":"ai_hypothesis","fitSummary":"ai_hypothesis"},"missingData":"sizeSignal","boundaryNote":"본 자료는 실거래 통계 기반 참고치입니다.","buyerType":"법인 사옥형","budgetRange":{"min":50,"max":80,"display":"50억~80억"},"preferredRegions":"강남","성수","assetTypes":"꼬마빌딩","사옥용","purchasePurpose":"사옥용 매입","mustHave":"초역세권","주차","niceToHave":"테라스","루프탑","riskTolerance":"medium","financingNote":"자본금 50% 준비","missingQuestions":"구체적인 입주 시기가 언제인가요?","선호하는 수익률이 있나요?","privacyNotes":"연락처 비공개","fitReasons":"매수자 예산(50-80억)에 부합하는 매물입니다.","요청하신 성수/강남 권역에 해당합니다.","cautionReasons":"요청한 용도와 달리 명도 협의가 다소 필요합니다.","recommendedNextAction":"현장 답사 제안","kakaoMessage":"안녕하세요! 요청하신 조건에 부합하는 추천 매물이 있어 안내해 드립니다. 확인해보시고 피드백 부탁드립니다.","title":"강남 역삼역 초역세권 오피스 사옥용 빌딩 매각","shortSummary":"역삼역 도보 5분 거리의 준신축급 대형 오피스빌딩입니다.","dealPoints":"초역세권","사옥 최적","cautionPoints":"명도 조율 필요","hiddenInfoNotice":"보증금 및 지번은 인가 후 확인 가능","gateMessage":"G1 등급 등록이 필요합니다.","kakaoText":"강남 역삼역 오피스 빌딩 매각 안내입니다.","exactUnitCandidate":"101호","floor":"1층","areaSqmText":"150㎡","spaceType":"office","depositText":"5000만","monthlyRentText":"400만","maintenanceFeeText":"50만","availableFromText":"즉시입주","leaseTermMonthsText":"24","incentivesText":"렌트프리 2개월","restrictions":,"landlordIdentity":"김성수","currentTenant":"스타트업","vacancyReason":"이전 확장","rentNegotiation":"협의 가능","region":"성수동","areaSqm":150,"deposit":5000,"monthlyRent":400,"maintenanceFee":50,"availableFrom":"즉시입주","leaseTermMonths":24,"incentives":{"rentFreeMonths":2,"interiorSupport":"일부 인테리어 지원","freeRentDetail":"렌트프리 2개월 지원"},"shortSummaryLease":"성수역 도보 5분 거리 1층 리테일 상가 매물입니다."}</a:t>
             </a:r>
             <a:endParaRPr lang="en-US" sz="1400" dirty="0"/>
           </a:p>
@@ -6531,16 +7179,1165 @@
           </a:p>
         </p:txBody>
       </p:sp>
-      <p:sp>
-        <p:nvSpPr>
-          <p:cNvPr id="6" name="Text 4"/>
-          <p:cNvSpPr/>
-          <p:nvPr/>
-        </p:nvSpPr>
-        <p:spPr>
-          <a:xfrm>
-            <a:off x="566928" y="1645920"/>
-            <a:ext cx="4201979" cy="402336"/>
+      <p:graphicFrame>
+        <p:nvGraphicFramePr>
+          <p:cNvPr id="7" name="Table 0"/>
+          <p:cNvGraphicFramePr>
+            <a:graphicFrameLocks noGrp="1"/>
+          </p:cNvGraphicFramePr>
+          <p:nvPr>
+            <p:extLst>
+              <p:ext uri="{D42A27DB-BD31-4B8C-83A1-F6EECF244321}">
+                <p14:modId xmlns:p14="http://schemas.microsoft.com/office/powerpoint/2010/main" val="1579011935"/>
+              </p:ext>
+            </p:extLst>
+          </p:nvPr>
+        </p:nvGraphicFramePr>
+        <p:xfrm>
+          <a:off x="566928" y="1645920"/>
+          <a:ext cx="11057839" cy="914400"/>
+        </p:xfrm>
+        <a:graphic>
+          <a:graphicData uri="http://schemas.openxmlformats.org/drawingml/2006/table">
+            <a:tbl>
+              <a:tblPr/>
+              <a:tblGrid>
+                <a:gridCol w="2551809"/>
+                <a:gridCol w="4253015"/>
+                <a:gridCol w="4253015"/>
+              </a:tblGrid>
+              <a:tr h="438912">
+                <a:tc>
+                  <a:txBody>
+                    <a:bodyPr/>
+                    <a:lstStyle/>
+                    <a:p>
+                      <a:pPr indent="0" marL="0">
+                        <a:buNone/>
+                      </a:pPr>
+                      <a:r>
+                        <a:rPr lang="en-US" sz="1300" b="1" dirty="0">
+                          <a:solidFill>
+                            <a:srgbClr val="718096"/>
+                          </a:solidFill>
+                          <a:latin typeface="Pretendard" pitchFamily="34" charset="0"/>
+                          <a:ea typeface="Pretendard" pitchFamily="34" charset="-122"/>
+                          <a:cs typeface="Pretendard" pitchFamily="34" charset="-120"/>
+                        </a:rPr>
+                        <a:t>구분</a:t>
+                      </a:r>
+                      <a:endParaRPr lang="en-US" sz="1300" dirty="0">
+                        <a:latin typeface="Pretendard" charset="0"/>
+                        <a:ea typeface="Pretendard" charset="0"/>
+                        <a:cs typeface="Pretendard" charset="0"/>
+                      </a:endParaRPr>
+                    </a:p>
+                  </a:txBody>
+                  <a:tcPr marL="50800" marR="50800" marT="25400" marB="25400" anchor="ctr">
+                    <a:lnL w="3810" cap="flat" cmpd="sng" algn="ctr">
+                      <a:solidFill>
+                        <a:srgbClr val="CBD5E0"/>
+                      </a:solidFill>
+                      <a:prstDash val="solid"/>
+                      <a:round/>
+                      <a:headEnd type="none" w="med" len="med"/>
+                      <a:tailEnd type="none" w="med" len="med"/>
+                    </a:lnL>
+                    <a:lnR w="3810" cap="flat" cmpd="sng" algn="ctr">
+                      <a:solidFill>
+                        <a:srgbClr val="CBD5E0"/>
+                      </a:solidFill>
+                      <a:prstDash val="solid"/>
+                      <a:round/>
+                      <a:headEnd type="none" w="med" len="med"/>
+                      <a:tailEnd type="none" w="med" len="med"/>
+                    </a:lnR>
+                    <a:lnT w="3810" cap="flat" cmpd="sng" algn="ctr">
+                      <a:solidFill>
+                        <a:srgbClr val="CBD5E0"/>
+                      </a:solidFill>
+                      <a:prstDash val="solid"/>
+                      <a:round/>
+                      <a:headEnd type="none" w="med" len="med"/>
+                      <a:tailEnd type="none" w="med" len="med"/>
+                    </a:lnT>
+                    <a:lnB w="3810" cap="flat" cmpd="sng" algn="ctr">
+                      <a:solidFill>
+                        <a:srgbClr val="CBD5E0"/>
+                      </a:solidFill>
+                      <a:prstDash val="solid"/>
+                      <a:round/>
+                      <a:headEnd type="none" w="med" len="med"/>
+                      <a:tailEnd type="none" w="med" len="med"/>
+                    </a:lnB>
+                    <a:solidFill>
+                      <a:srgbClr val="F7FAFC"/>
+                    </a:solidFill>
+                  </a:tcPr>
+                </a:tc>
+                <a:tc>
+                  <a:txBody>
+                    <a:bodyPr/>
+                    <a:lstStyle/>
+                    <a:p>
+                      <a:pPr indent="0" marL="0">
+                        <a:buNone/>
+                      </a:pPr>
+                      <a:r>
+                        <a:rPr lang="en-US" sz="1300" b="1" dirty="0">
+                          <a:solidFill>
+                            <a:srgbClr val="718096"/>
+                          </a:solidFill>
+                          <a:latin typeface="Pretendard" pitchFamily="34" charset="0"/>
+                          <a:ea typeface="Pretendard" pitchFamily="34" charset="-122"/>
+                          <a:cs typeface="Pretendard" pitchFamily="34" charset="-120"/>
+                        </a:rPr>
+                        <a:t>타겟 </a:t>
+                      </a:r>
+                      <a:pPr indent="0" marL="0">
+                        <a:buNone/>
+                      </a:pPr>
+                      <a:r>
+                        <a:rPr lang="en-US" sz="1300" b="1" dirty="0">
+                          <a:solidFill>
+                            <a:srgbClr val="718096"/>
+                          </a:solidFill>
+                          <a:latin typeface="Pretendard" pitchFamily="34" charset="0"/>
+                          <a:ea typeface="Pretendard" pitchFamily="34" charset="-122"/>
+                          <a:cs typeface="Pretendard" pitchFamily="34" charset="-120"/>
+                        </a:rPr>
+                        <a:t>수치</a:t>
+                      </a:r>
+                      <a:endParaRPr lang="en-US" sz="1300" dirty="0">
+                        <a:latin typeface="Pretendard" charset="0"/>
+                        <a:ea typeface="Pretendard" charset="0"/>
+                        <a:cs typeface="Pretendard" charset="0"/>
+                      </a:endParaRPr>
+                    </a:p>
+                  </a:txBody>
+                  <a:tcPr marL="50800" marR="50800" marT="25400" marB="25400" anchor="ctr">
+                    <a:lnL w="3810" cap="flat" cmpd="sng" algn="ctr">
+                      <a:solidFill>
+                        <a:srgbClr val="CBD5E0"/>
+                      </a:solidFill>
+                      <a:prstDash val="solid"/>
+                      <a:round/>
+                      <a:headEnd type="none" w="med" len="med"/>
+                      <a:tailEnd type="none" w="med" len="med"/>
+                    </a:lnL>
+                    <a:lnR w="3810" cap="flat" cmpd="sng" algn="ctr">
+                      <a:solidFill>
+                        <a:srgbClr val="CBD5E0"/>
+                      </a:solidFill>
+                      <a:prstDash val="solid"/>
+                      <a:round/>
+                      <a:headEnd type="none" w="med" len="med"/>
+                      <a:tailEnd type="none" w="med" len="med"/>
+                    </a:lnR>
+                    <a:lnT w="3810" cap="flat" cmpd="sng" algn="ctr">
+                      <a:solidFill>
+                        <a:srgbClr val="CBD5E0"/>
+                      </a:solidFill>
+                      <a:prstDash val="solid"/>
+                      <a:round/>
+                      <a:headEnd type="none" w="med" len="med"/>
+                      <a:tailEnd type="none" w="med" len="med"/>
+                    </a:lnT>
+                    <a:lnB w="3810" cap="flat" cmpd="sng" algn="ctr">
+                      <a:solidFill>
+                        <a:srgbClr val="CBD5E0"/>
+                      </a:solidFill>
+                      <a:prstDash val="solid"/>
+                      <a:round/>
+                      <a:headEnd type="none" w="med" len="med"/>
+                      <a:tailEnd type="none" w="med" len="med"/>
+                    </a:lnB>
+                    <a:solidFill>
+                      <a:srgbClr val="F7FAFC"/>
+                    </a:solidFill>
+                  </a:tcPr>
+                </a:tc>
+                <a:tc>
+                  <a:txBody>
+                    <a:bodyPr/>
+                    <a:lstStyle/>
+                    <a:p>
+                      <a:pPr indent="0" marL="0">
+                        <a:buNone/>
+                      </a:pPr>
+                      <a:r>
+                        <a:rPr lang="en-US" sz="1300" b="1" dirty="0">
+                          <a:solidFill>
+                            <a:srgbClr val="718096"/>
+                          </a:solidFill>
+                          <a:latin typeface="Pretendard" pitchFamily="34" charset="0"/>
+                          <a:ea typeface="Pretendard" pitchFamily="34" charset="-122"/>
+                          <a:cs typeface="Pretendard" pitchFamily="34" charset="-120"/>
+                        </a:rPr>
+                        <a:t>비고</a:t>
+                      </a:r>
+                      <a:endParaRPr lang="en-US" sz="1300" dirty="0">
+                        <a:latin typeface="Pretendard" charset="0"/>
+                        <a:ea typeface="Pretendard" charset="0"/>
+                        <a:cs typeface="Pretendard" charset="0"/>
+                      </a:endParaRPr>
+                    </a:p>
+                  </a:txBody>
+                  <a:tcPr marL="50800" marR="50800" marT="25400" marB="25400" anchor="ctr">
+                    <a:lnL w="3810" cap="flat" cmpd="sng" algn="ctr">
+                      <a:solidFill>
+                        <a:srgbClr val="CBD5E0"/>
+                      </a:solidFill>
+                      <a:prstDash val="solid"/>
+                      <a:round/>
+                      <a:headEnd type="none" w="med" len="med"/>
+                      <a:tailEnd type="none" w="med" len="med"/>
+                    </a:lnL>
+                    <a:lnR w="3810" cap="flat" cmpd="sng" algn="ctr">
+                      <a:solidFill>
+                        <a:srgbClr val="CBD5E0"/>
+                      </a:solidFill>
+                      <a:prstDash val="solid"/>
+                      <a:round/>
+                      <a:headEnd type="none" w="med" len="med"/>
+                      <a:tailEnd type="none" w="med" len="med"/>
+                    </a:lnR>
+                    <a:lnT w="3810" cap="flat" cmpd="sng" algn="ctr">
+                      <a:solidFill>
+                        <a:srgbClr val="CBD5E0"/>
+                      </a:solidFill>
+                      <a:prstDash val="solid"/>
+                      <a:round/>
+                      <a:headEnd type="none" w="med" len="med"/>
+                      <a:tailEnd type="none" w="med" len="med"/>
+                    </a:lnT>
+                    <a:lnB w="3810" cap="flat" cmpd="sng" algn="ctr">
+                      <a:solidFill>
+                        <a:srgbClr val="CBD5E0"/>
+                      </a:solidFill>
+                      <a:prstDash val="solid"/>
+                      <a:round/>
+                      <a:headEnd type="none" w="med" len="med"/>
+                      <a:tailEnd type="none" w="med" len="med"/>
+                    </a:lnB>
+                    <a:solidFill>
+                      <a:srgbClr val="F7FAFC"/>
+                    </a:solidFill>
+                  </a:tcPr>
+                </a:tc>
+              </a:tr>
+              <a:tr h="438912">
+                <a:tc>
+                  <a:txBody>
+                    <a:bodyPr/>
+                    <a:lstStyle/>
+                    <a:p>
+                      <a:pPr indent="0" marL="0">
+                        <a:buNone/>
+                      </a:pPr>
+                      <a:r>
+                        <a:rPr lang="en-US" sz="1300" b="1" dirty="0">
+                          <a:solidFill>
+                            <a:srgbClr val="10161F"/>
+                          </a:solidFill>
+                          <a:latin typeface="Pretendard" pitchFamily="34" charset="0"/>
+                          <a:ea typeface="Pretendard" pitchFamily="34" charset="-122"/>
+                          <a:cs typeface="Pretendard" pitchFamily="34" charset="-120"/>
+                        </a:rPr>
+                        <a:t>목표 </a:t>
+                      </a:r>
+                      <a:pPr indent="0" marL="0">
+                        <a:buNone/>
+                      </a:pPr>
+                      <a:r>
+                        <a:rPr lang="en-US" sz="1300" b="1" dirty="0">
+                          <a:solidFill>
+                            <a:srgbClr val="10161F"/>
+                          </a:solidFill>
+                          <a:latin typeface="Pretendard" pitchFamily="34" charset="0"/>
+                          <a:ea typeface="Pretendard" pitchFamily="34" charset="-122"/>
+                          <a:cs typeface="Pretendard" pitchFamily="34" charset="-120"/>
+                        </a:rPr>
+                        <a:t>매각가</a:t>
+                      </a:r>
+                      <a:endParaRPr lang="en-US" sz="1300" dirty="0">
+                        <a:latin typeface="Pretendard" charset="0"/>
+                        <a:ea typeface="Pretendard" charset="0"/>
+                        <a:cs typeface="Pretendard" charset="0"/>
+                      </a:endParaRPr>
+                    </a:p>
+                  </a:txBody>
+                  <a:tcPr marL="50800" marR="50800" marT="25400" marB="25400" anchor="ctr">
+                    <a:lnL w="3810" cap="flat" cmpd="sng" algn="ctr">
+                      <a:solidFill>
+                        <a:srgbClr val="CBD5E0"/>
+                      </a:solidFill>
+                      <a:prstDash val="solid"/>
+                      <a:round/>
+                      <a:headEnd type="none" w="med" len="med"/>
+                      <a:tailEnd type="none" w="med" len="med"/>
+                    </a:lnL>
+                    <a:lnR w="3810" cap="flat" cmpd="sng" algn="ctr">
+                      <a:solidFill>
+                        <a:srgbClr val="CBD5E0"/>
+                      </a:solidFill>
+                      <a:prstDash val="solid"/>
+                      <a:round/>
+                      <a:headEnd type="none" w="med" len="med"/>
+                      <a:tailEnd type="none" w="med" len="med"/>
+                    </a:lnR>
+                    <a:lnT w="3810" cap="flat" cmpd="sng" algn="ctr">
+                      <a:solidFill>
+                        <a:srgbClr val="CBD5E0"/>
+                      </a:solidFill>
+                      <a:prstDash val="solid"/>
+                      <a:round/>
+                      <a:headEnd type="none" w="med" len="med"/>
+                      <a:tailEnd type="none" w="med" len="med"/>
+                    </a:lnT>
+                    <a:lnB w="3810" cap="flat" cmpd="sng" algn="ctr">
+                      <a:solidFill>
+                        <a:srgbClr val="CBD5E0"/>
+                      </a:solidFill>
+                      <a:prstDash val="solid"/>
+                      <a:round/>
+                      <a:headEnd type="none" w="med" len="med"/>
+                      <a:tailEnd type="none" w="med" len="med"/>
+                    </a:lnB>
+                    <a:solidFill>
+                      <a:srgbClr val="FFFFFF"/>
+                    </a:solidFill>
+                  </a:tcPr>
+                </a:tc>
+                <a:tc>
+                  <a:txBody>
+                    <a:bodyPr/>
+                    <a:lstStyle/>
+                    <a:p>
+                      <a:pPr indent="0" marL="0">
+                        <a:buNone/>
+                      </a:pPr>
+                      <a:r>
+                        <a:rPr lang="en-US" sz="1300" dirty="0">
+                          <a:solidFill>
+                            <a:srgbClr val="10161F"/>
+                          </a:solidFill>
+                          <a:latin typeface="Pretendard" pitchFamily="34" charset="0"/>
+                          <a:ea typeface="Pretendard" pitchFamily="34" charset="-122"/>
+                          <a:cs typeface="Pretendard" pitchFamily="34" charset="-120"/>
+                        </a:rPr>
+                        <a:t>주변 </a:t>
+                      </a:r>
+                      <a:pPr indent="0" marL="0">
+                        <a:buNone/>
+                      </a:pPr>
+                      <a:r>
+                        <a:rPr lang="en-US" sz="1300" dirty="0">
+                          <a:solidFill>
+                            <a:srgbClr val="10161F"/>
+                          </a:solidFill>
+                          <a:latin typeface="Pretendard" pitchFamily="34" charset="0"/>
+                          <a:ea typeface="Pretendard" pitchFamily="34" charset="-122"/>
+                          <a:cs typeface="Pretendard" pitchFamily="34" charset="-120"/>
+                        </a:rPr>
+                        <a:t>시세 </a:t>
+                      </a:r>
+                      <a:pPr indent="0" marL="0">
+                        <a:buNone/>
+                      </a:pPr>
+                      <a:r>
+                        <a:rPr lang="en-US" sz="1300" dirty="0">
+                          <a:solidFill>
+                            <a:srgbClr val="10161F"/>
+                          </a:solidFill>
+                          <a:latin typeface="Pretendard" pitchFamily="34" charset="0"/>
+                          <a:ea typeface="Pretendard" pitchFamily="34" charset="-122"/>
+                          <a:cs typeface="Pretendard" pitchFamily="34" charset="-120"/>
+                        </a:rPr>
+                        <a:t>상단 </a:t>
+                      </a:r>
+                      <a:pPr indent="0" marL="0">
+                        <a:buNone/>
+                      </a:pPr>
+                      <a:r>
+                        <a:rPr lang="en-US" sz="1300" dirty="0">
+                          <a:solidFill>
+                            <a:srgbClr val="10161F"/>
+                          </a:solidFill>
+                          <a:latin typeface="Pretendard" pitchFamily="34" charset="0"/>
+                          <a:ea typeface="Pretendard" pitchFamily="34" charset="-122"/>
+                          <a:cs typeface="Pretendard" pitchFamily="34" charset="-120"/>
+                        </a:rPr>
+                        <a:t>추정</a:t>
+                      </a:r>
+                      <a:endParaRPr lang="en-US" sz="1300" dirty="0">
+                        <a:latin typeface="Pretendard" charset="0"/>
+                        <a:ea typeface="Pretendard" charset="0"/>
+                        <a:cs typeface="Pretendard" charset="0"/>
+                      </a:endParaRPr>
+                    </a:p>
+                  </a:txBody>
+                  <a:tcPr marL="50800" marR="50800" marT="25400" marB="25400" anchor="ctr">
+                    <a:lnL w="3810" cap="flat" cmpd="sng" algn="ctr">
+                      <a:solidFill>
+                        <a:srgbClr val="CBD5E0"/>
+                      </a:solidFill>
+                      <a:prstDash val="solid"/>
+                      <a:round/>
+                      <a:headEnd type="none" w="med" len="med"/>
+                      <a:tailEnd type="none" w="med" len="med"/>
+                    </a:lnL>
+                    <a:lnR w="3810" cap="flat" cmpd="sng" algn="ctr">
+                      <a:solidFill>
+                        <a:srgbClr val="CBD5E0"/>
+                      </a:solidFill>
+                      <a:prstDash val="solid"/>
+                      <a:round/>
+                      <a:headEnd type="none" w="med" len="med"/>
+                      <a:tailEnd type="none" w="med" len="med"/>
+                    </a:lnR>
+                    <a:lnT w="3810" cap="flat" cmpd="sng" algn="ctr">
+                      <a:solidFill>
+                        <a:srgbClr val="CBD5E0"/>
+                      </a:solidFill>
+                      <a:prstDash val="solid"/>
+                      <a:round/>
+                      <a:headEnd type="none" w="med" len="med"/>
+                      <a:tailEnd type="none" w="med" len="med"/>
+                    </a:lnT>
+                    <a:lnB w="3810" cap="flat" cmpd="sng" algn="ctr">
+                      <a:solidFill>
+                        <a:srgbClr val="CBD5E0"/>
+                      </a:solidFill>
+                      <a:prstDash val="solid"/>
+                      <a:round/>
+                      <a:headEnd type="none" w="med" len="med"/>
+                      <a:tailEnd type="none" w="med" len="med"/>
+                    </a:lnB>
+                    <a:solidFill>
+                      <a:srgbClr val="FFFFFF"/>
+                    </a:solidFill>
+                  </a:tcPr>
+                </a:tc>
+                <a:tc>
+                  <a:txBody>
+                    <a:bodyPr/>
+                    <a:lstStyle/>
+                    <a:p>
+                      <a:pPr indent="0" marL="0">
+                        <a:buNone/>
+                      </a:pPr>
+                      <a:r>
+                        <a:rPr lang="en-US" sz="1300" dirty="0">
+                          <a:solidFill>
+                            <a:srgbClr val="10161F"/>
+                          </a:solidFill>
+                          <a:latin typeface="Pretendard" pitchFamily="34" charset="0"/>
+                          <a:ea typeface="Pretendard" pitchFamily="34" charset="-122"/>
+                          <a:cs typeface="Pretendard" pitchFamily="34" charset="-120"/>
+                        </a:rPr>
+                        <a:t>리밸런싱 </a:t>
+                      </a:r>
+                      <a:pPr indent="0" marL="0">
+                        <a:buNone/>
+                      </a:pPr>
+                      <a:r>
+                        <a:rPr lang="en-US" sz="1300" dirty="0">
+                          <a:solidFill>
+                            <a:srgbClr val="10161F"/>
+                          </a:solidFill>
+                          <a:latin typeface="Pretendard" pitchFamily="34" charset="0"/>
+                          <a:ea typeface="Pretendard" pitchFamily="34" charset="-122"/>
+                          <a:cs typeface="Pretendard" pitchFamily="34" charset="-120"/>
+                        </a:rPr>
+                        <a:t>타겟</a:t>
+                      </a:r>
+                      <a:endParaRPr lang="en-US" sz="1300" dirty="0">
+                        <a:latin typeface="Pretendard" charset="0"/>
+                        <a:ea typeface="Pretendard" charset="0"/>
+                        <a:cs typeface="Pretendard" charset="0"/>
+                      </a:endParaRPr>
+                    </a:p>
+                  </a:txBody>
+                  <a:tcPr marL="50800" marR="50800" marT="25400" marB="25400" anchor="ctr">
+                    <a:lnL w="3810" cap="flat" cmpd="sng" algn="ctr">
+                      <a:solidFill>
+                        <a:srgbClr val="CBD5E0"/>
+                      </a:solidFill>
+                      <a:prstDash val="solid"/>
+                      <a:round/>
+                      <a:headEnd type="none" w="med" len="med"/>
+                      <a:tailEnd type="none" w="med" len="med"/>
+                    </a:lnL>
+                    <a:lnR w="3810" cap="flat" cmpd="sng" algn="ctr">
+                      <a:solidFill>
+                        <a:srgbClr val="CBD5E0"/>
+                      </a:solidFill>
+                      <a:prstDash val="solid"/>
+                      <a:round/>
+                      <a:headEnd type="none" w="med" len="med"/>
+                      <a:tailEnd type="none" w="med" len="med"/>
+                    </a:lnR>
+                    <a:lnT w="3810" cap="flat" cmpd="sng" algn="ctr">
+                      <a:solidFill>
+                        <a:srgbClr val="CBD5E0"/>
+                      </a:solidFill>
+                      <a:prstDash val="solid"/>
+                      <a:round/>
+                      <a:headEnd type="none" w="med" len="med"/>
+                      <a:tailEnd type="none" w="med" len="med"/>
+                    </a:lnT>
+                    <a:lnB w="3810" cap="flat" cmpd="sng" algn="ctr">
+                      <a:solidFill>
+                        <a:srgbClr val="CBD5E0"/>
+                      </a:solidFill>
+                      <a:prstDash val="solid"/>
+                      <a:round/>
+                      <a:headEnd type="none" w="med" len="med"/>
+                      <a:tailEnd type="none" w="med" len="med"/>
+                    </a:lnB>
+                    <a:solidFill>
+                      <a:srgbClr val="FFFFFF"/>
+                    </a:solidFill>
+                  </a:tcPr>
+                </a:tc>
+              </a:tr>
+              <a:tr h="438912">
+                <a:tc>
+                  <a:txBody>
+                    <a:bodyPr/>
+                    <a:lstStyle/>
+                    <a:p>
+                      <a:pPr indent="0" marL="0">
+                        <a:buNone/>
+                      </a:pPr>
+                      <a:r>
+                        <a:rPr lang="en-US" sz="1300" b="1" dirty="0">
+                          <a:solidFill>
+                            <a:srgbClr val="10161F"/>
+                          </a:solidFill>
+                          <a:latin typeface="Pretendard" pitchFamily="34" charset="0"/>
+                          <a:ea typeface="Pretendard" pitchFamily="34" charset="-122"/>
+                          <a:cs typeface="Pretendard" pitchFamily="34" charset="-120"/>
+                        </a:rPr>
+                        <a:t>목표 </a:t>
+                      </a:r>
+                      <a:pPr indent="0" marL="0">
+                        <a:buNone/>
+                      </a:pPr>
+                      <a:r>
+                        <a:rPr lang="en-US" sz="1300" b="1" dirty="0">
+                          <a:solidFill>
+                            <a:srgbClr val="10161F"/>
+                          </a:solidFill>
+                          <a:latin typeface="Pretendard" pitchFamily="34" charset="0"/>
+                          <a:ea typeface="Pretendard" pitchFamily="34" charset="-122"/>
+                          <a:cs typeface="Pretendard" pitchFamily="34" charset="-120"/>
+                        </a:rPr>
+                        <a:t>시세차익</a:t>
+                      </a:r>
+                      <a:endParaRPr lang="en-US" sz="1300" dirty="0">
+                        <a:latin typeface="Pretendard" charset="0"/>
+                        <a:ea typeface="Pretendard" charset="0"/>
+                        <a:cs typeface="Pretendard" charset="0"/>
+                      </a:endParaRPr>
+                    </a:p>
+                  </a:txBody>
+                  <a:tcPr marL="50800" marR="50800" marT="25400" marB="25400" anchor="ctr">
+                    <a:lnL w="3810" cap="flat" cmpd="sng" algn="ctr">
+                      <a:solidFill>
+                        <a:srgbClr val="CBD5E0"/>
+                      </a:solidFill>
+                      <a:prstDash val="solid"/>
+                      <a:round/>
+                      <a:headEnd type="none" w="med" len="med"/>
+                      <a:tailEnd type="none" w="med" len="med"/>
+                    </a:lnL>
+                    <a:lnR w="3810" cap="flat" cmpd="sng" algn="ctr">
+                      <a:solidFill>
+                        <a:srgbClr val="CBD5E0"/>
+                      </a:solidFill>
+                      <a:prstDash val="solid"/>
+                      <a:round/>
+                      <a:headEnd type="none" w="med" len="med"/>
+                      <a:tailEnd type="none" w="med" len="med"/>
+                    </a:lnR>
+                    <a:lnT w="3810" cap="flat" cmpd="sng" algn="ctr">
+                      <a:solidFill>
+                        <a:srgbClr val="CBD5E0"/>
+                      </a:solidFill>
+                      <a:prstDash val="solid"/>
+                      <a:round/>
+                      <a:headEnd type="none" w="med" len="med"/>
+                      <a:tailEnd type="none" w="med" len="med"/>
+                    </a:lnT>
+                    <a:lnB w="3810" cap="flat" cmpd="sng" algn="ctr">
+                      <a:solidFill>
+                        <a:srgbClr val="CBD5E0"/>
+                      </a:solidFill>
+                      <a:prstDash val="solid"/>
+                      <a:round/>
+                      <a:headEnd type="none" w="med" len="med"/>
+                      <a:tailEnd type="none" w="med" len="med"/>
+                    </a:lnB>
+                    <a:solidFill>
+                      <a:srgbClr val="F7FAFC"/>
+                    </a:solidFill>
+                  </a:tcPr>
+                </a:tc>
+                <a:tc>
+                  <a:txBody>
+                    <a:bodyPr/>
+                    <a:lstStyle/>
+                    <a:p>
+                      <a:pPr indent="0" marL="0">
+                        <a:buNone/>
+                      </a:pPr>
+                      <a:r>
+                        <a:rPr lang="en-US" sz="1300" dirty="0">
+                          <a:solidFill>
+                            <a:srgbClr val="10161F"/>
+                          </a:solidFill>
+                          <a:latin typeface="Pretendard" pitchFamily="34" charset="0"/>
+                          <a:ea typeface="Pretendard" pitchFamily="34" charset="-122"/>
+                          <a:cs typeface="Pretendard" pitchFamily="34" charset="-120"/>
+                        </a:rPr>
+                        <a:t>매수 </a:t>
+                      </a:r>
+                      <a:pPr indent="0" marL="0">
+                        <a:buNone/>
+                      </a:pPr>
+                      <a:r>
+                        <a:rPr lang="en-US" sz="1300" dirty="0">
+                          <a:solidFill>
+                            <a:srgbClr val="10161F"/>
+                          </a:solidFill>
+                          <a:latin typeface="Pretendard" pitchFamily="34" charset="0"/>
+                          <a:ea typeface="Pretendard" pitchFamily="34" charset="-122"/>
+                          <a:cs typeface="Pretendard" pitchFamily="34" charset="-120"/>
+                        </a:rPr>
+                        <a:t>희망가 </a:t>
+                      </a:r>
+                      <a:pPr indent="0" marL="0">
+                        <a:buNone/>
+                      </a:pPr>
+                      <a:r>
+                        <a:rPr lang="en-US" sz="1300" dirty="0">
+                          <a:solidFill>
+                            <a:srgbClr val="10161F"/>
+                          </a:solidFill>
+                          <a:latin typeface="Pretendard" pitchFamily="34" charset="0"/>
+                          <a:ea typeface="Pretendard" pitchFamily="34" charset="-122"/>
+                          <a:cs typeface="Pretendard" pitchFamily="34" charset="-120"/>
+                        </a:rPr>
+                        <a:t>대비 </a:t>
+                      </a:r>
+                      <a:pPr indent="0" marL="0">
+                        <a:buNone/>
+                      </a:pPr>
+                      <a:r>
+                        <a:rPr lang="en-US" sz="1300" dirty="0">
+                          <a:solidFill>
+                            <a:srgbClr val="10161F"/>
+                          </a:solidFill>
+                          <a:latin typeface="Pretendard" pitchFamily="34" charset="0"/>
+                          <a:ea typeface="Pretendard" pitchFamily="34" charset="-122"/>
+                          <a:cs typeface="Pretendard" pitchFamily="34" charset="-120"/>
+                        </a:rPr>
+                        <a:t>갭</a:t>
+                      </a:r>
+                      <a:endParaRPr lang="en-US" sz="1300" dirty="0">
+                        <a:latin typeface="Pretendard" charset="0"/>
+                        <a:ea typeface="Pretendard" charset="0"/>
+                        <a:cs typeface="Pretendard" charset="0"/>
+                      </a:endParaRPr>
+                    </a:p>
+                  </a:txBody>
+                  <a:tcPr marL="50800" marR="50800" marT="25400" marB="25400" anchor="ctr">
+                    <a:lnL w="3810" cap="flat" cmpd="sng" algn="ctr">
+                      <a:solidFill>
+                        <a:srgbClr val="CBD5E0"/>
+                      </a:solidFill>
+                      <a:prstDash val="solid"/>
+                      <a:round/>
+                      <a:headEnd type="none" w="med" len="med"/>
+                      <a:tailEnd type="none" w="med" len="med"/>
+                    </a:lnL>
+                    <a:lnR w="3810" cap="flat" cmpd="sng" algn="ctr">
+                      <a:solidFill>
+                        <a:srgbClr val="CBD5E0"/>
+                      </a:solidFill>
+                      <a:prstDash val="solid"/>
+                      <a:round/>
+                      <a:headEnd type="none" w="med" len="med"/>
+                      <a:tailEnd type="none" w="med" len="med"/>
+                    </a:lnR>
+                    <a:lnT w="3810" cap="flat" cmpd="sng" algn="ctr">
+                      <a:solidFill>
+                        <a:srgbClr val="CBD5E0"/>
+                      </a:solidFill>
+                      <a:prstDash val="solid"/>
+                      <a:round/>
+                      <a:headEnd type="none" w="med" len="med"/>
+                      <a:tailEnd type="none" w="med" len="med"/>
+                    </a:lnT>
+                    <a:lnB w="3810" cap="flat" cmpd="sng" algn="ctr">
+                      <a:solidFill>
+                        <a:srgbClr val="CBD5E0"/>
+                      </a:solidFill>
+                      <a:prstDash val="solid"/>
+                      <a:round/>
+                      <a:headEnd type="none" w="med" len="med"/>
+                      <a:tailEnd type="none" w="med" len="med"/>
+                    </a:lnB>
+                    <a:solidFill>
+                      <a:srgbClr val="F7FAFC"/>
+                    </a:solidFill>
+                  </a:tcPr>
+                </a:tc>
+                <a:tc>
+                  <a:txBody>
+                    <a:bodyPr/>
+                    <a:lstStyle/>
+                    <a:p>
+                      <a:pPr indent="0" marL="0">
+                        <a:buNone/>
+                      </a:pPr>
+                      <a:r>
+                        <a:rPr lang="en-US" sz="1300" dirty="0">
+                          <a:solidFill>
+                            <a:srgbClr val="10161F"/>
+                          </a:solidFill>
+                          <a:latin typeface="Pretendard" pitchFamily="34" charset="0"/>
+                          <a:ea typeface="Pretendard" pitchFamily="34" charset="-122"/>
+                          <a:cs typeface="Pretendard" pitchFamily="34" charset="-120"/>
+                        </a:rPr>
+                        <a:t>자본 </a:t>
+                      </a:r>
+                      <a:pPr indent="0" marL="0">
+                        <a:buNone/>
+                      </a:pPr>
+                      <a:r>
+                        <a:rPr lang="en-US" sz="1300" dirty="0">
+                          <a:solidFill>
+                            <a:srgbClr val="10161F"/>
+                          </a:solidFill>
+                          <a:latin typeface="Pretendard" pitchFamily="34" charset="0"/>
+                          <a:ea typeface="Pretendard" pitchFamily="34" charset="-122"/>
+                          <a:cs typeface="Pretendard" pitchFamily="34" charset="-120"/>
+                        </a:rPr>
+                        <a:t>이득</a:t>
+                      </a:r>
+                      <a:endParaRPr lang="en-US" sz="1300" dirty="0">
+                        <a:latin typeface="Pretendard" charset="0"/>
+                        <a:ea typeface="Pretendard" charset="0"/>
+                        <a:cs typeface="Pretendard" charset="0"/>
+                      </a:endParaRPr>
+                    </a:p>
+                  </a:txBody>
+                  <a:tcPr marL="50800" marR="50800" marT="25400" marB="25400" anchor="ctr">
+                    <a:lnL w="3810" cap="flat" cmpd="sng" algn="ctr">
+                      <a:solidFill>
+                        <a:srgbClr val="CBD5E0"/>
+                      </a:solidFill>
+                      <a:prstDash val="solid"/>
+                      <a:round/>
+                      <a:headEnd type="none" w="med" len="med"/>
+                      <a:tailEnd type="none" w="med" len="med"/>
+                    </a:lnL>
+                    <a:lnR w="3810" cap="flat" cmpd="sng" algn="ctr">
+                      <a:solidFill>
+                        <a:srgbClr val="CBD5E0"/>
+                      </a:solidFill>
+                      <a:prstDash val="solid"/>
+                      <a:round/>
+                      <a:headEnd type="none" w="med" len="med"/>
+                      <a:tailEnd type="none" w="med" len="med"/>
+                    </a:lnR>
+                    <a:lnT w="3810" cap="flat" cmpd="sng" algn="ctr">
+                      <a:solidFill>
+                        <a:srgbClr val="CBD5E0"/>
+                      </a:solidFill>
+                      <a:prstDash val="solid"/>
+                      <a:round/>
+                      <a:headEnd type="none" w="med" len="med"/>
+                      <a:tailEnd type="none" w="med" len="med"/>
+                    </a:lnT>
+                    <a:lnB w="3810" cap="flat" cmpd="sng" algn="ctr">
+                      <a:solidFill>
+                        <a:srgbClr val="CBD5E0"/>
+                      </a:solidFill>
+                      <a:prstDash val="solid"/>
+                      <a:round/>
+                      <a:headEnd type="none" w="med" len="med"/>
+                      <a:tailEnd type="none" w="med" len="med"/>
+                    </a:lnB>
+                    <a:solidFill>
+                      <a:srgbClr val="F7FAFC"/>
+                    </a:solidFill>
+                  </a:tcPr>
+                </a:tc>
+              </a:tr>
+              <a:tr h="438912">
+                <a:tc>
+                  <a:txBody>
+                    <a:bodyPr/>
+                    <a:lstStyle/>
+                    <a:p>
+                      <a:pPr indent="0" marL="0">
+                        <a:buNone/>
+                      </a:pPr>
+                      <a:r>
+                        <a:rPr lang="en-US" sz="1300" b="1" dirty="0">
+                          <a:solidFill>
+                            <a:srgbClr val="10161F"/>
+                          </a:solidFill>
+                          <a:latin typeface="Pretendard" pitchFamily="34" charset="0"/>
+                          <a:ea typeface="Pretendard" pitchFamily="34" charset="-122"/>
+                          <a:cs typeface="Pretendard" pitchFamily="34" charset="-120"/>
+                        </a:rPr>
+                        <a:t>목표 </a:t>
+                      </a:r>
+                      <a:pPr indent="0" marL="0">
+                        <a:buNone/>
+                      </a:pPr>
+                      <a:r>
+                        <a:rPr lang="en-US" sz="1300" b="1" dirty="0">
+                          <a:solidFill>
+                            <a:srgbClr val="10161F"/>
+                          </a:solidFill>
+                          <a:latin typeface="Pretendard" pitchFamily="34" charset="0"/>
+                          <a:ea typeface="Pretendard" pitchFamily="34" charset="-122"/>
+                          <a:cs typeface="Pretendard" pitchFamily="34" charset="-120"/>
+                        </a:rPr>
+                        <a:t>보유기간 </a:t>
+                      </a:r>
+                      <a:pPr indent="0" marL="0">
+                        <a:buNone/>
+                      </a:pPr>
+                      <a:r>
+                        <a:rPr lang="en-US" sz="1300" b="1" dirty="0">
+                          <a:solidFill>
+                            <a:srgbClr val="10161F"/>
+                          </a:solidFill>
+                          <a:latin typeface="Pretendard" pitchFamily="34" charset="0"/>
+                          <a:ea typeface="Pretendard" pitchFamily="34" charset="-122"/>
+                          <a:cs typeface="Pretendard" pitchFamily="34" charset="-120"/>
+                        </a:rPr>
+                        <a:t>수익률 </a:t>
+                      </a:r>
+                      <a:pPr indent="0" marL="0">
+                        <a:buNone/>
+                      </a:pPr>
+                      <a:r>
+                        <a:rPr lang="en-US" sz="1300" b="1" dirty="0">
+                          <a:solidFill>
+                            <a:srgbClr val="10161F"/>
+                          </a:solidFill>
+                          <a:latin typeface="Pretendard" pitchFamily="34" charset="0"/>
+                          <a:ea typeface="Pretendard" pitchFamily="34" charset="-122"/>
+                          <a:cs typeface="Pretendard" pitchFamily="34" charset="-120"/>
+                        </a:rPr>
+                        <a:t>(HPR)</a:t>
+                      </a:r>
+                      <a:endParaRPr lang="en-US" sz="1300" dirty="0">
+                        <a:latin typeface="Pretendard" charset="0"/>
+                        <a:ea typeface="Pretendard" charset="0"/>
+                        <a:cs typeface="Pretendard" charset="0"/>
+                      </a:endParaRPr>
+                    </a:p>
+                  </a:txBody>
+                  <a:tcPr marL="50800" marR="50800" marT="25400" marB="25400" anchor="ctr">
+                    <a:lnL w="3810" cap="flat" cmpd="sng" algn="ctr">
+                      <a:solidFill>
+                        <a:srgbClr val="CBD5E0"/>
+                      </a:solidFill>
+                      <a:prstDash val="solid"/>
+                      <a:round/>
+                      <a:headEnd type="none" w="med" len="med"/>
+                      <a:tailEnd type="none" w="med" len="med"/>
+                    </a:lnL>
+                    <a:lnR w="3810" cap="flat" cmpd="sng" algn="ctr">
+                      <a:solidFill>
+                        <a:srgbClr val="CBD5E0"/>
+                      </a:solidFill>
+                      <a:prstDash val="solid"/>
+                      <a:round/>
+                      <a:headEnd type="none" w="med" len="med"/>
+                      <a:tailEnd type="none" w="med" len="med"/>
+                    </a:lnR>
+                    <a:lnT w="3810" cap="flat" cmpd="sng" algn="ctr">
+                      <a:solidFill>
+                        <a:srgbClr val="CBD5E0"/>
+                      </a:solidFill>
+                      <a:prstDash val="solid"/>
+                      <a:round/>
+                      <a:headEnd type="none" w="med" len="med"/>
+                      <a:tailEnd type="none" w="med" len="med"/>
+                    </a:lnT>
+                    <a:lnB w="3810" cap="flat" cmpd="sng" algn="ctr">
+                      <a:solidFill>
+                        <a:srgbClr val="CBD5E0"/>
+                      </a:solidFill>
+                      <a:prstDash val="solid"/>
+                      <a:round/>
+                      <a:headEnd type="none" w="med" len="med"/>
+                      <a:tailEnd type="none" w="med" len="med"/>
+                    </a:lnB>
+                    <a:solidFill>
+                      <a:srgbClr val="FFFFFF"/>
+                    </a:solidFill>
+                  </a:tcPr>
+                </a:tc>
+                <a:tc>
+                  <a:txBody>
+                    <a:bodyPr/>
+                    <a:lstStyle/>
+                    <a:p>
+                      <a:pPr indent="0" marL="0">
+                        <a:buNone/>
+                      </a:pPr>
+                      <a:r>
+                        <a:rPr lang="en-US" sz="1300" dirty="0">
+                          <a:solidFill>
+                            <a:srgbClr val="10161F"/>
+                          </a:solidFill>
+                          <a:latin typeface="Pretendard" pitchFamily="34" charset="0"/>
+                          <a:ea typeface="Pretendard" pitchFamily="34" charset="-122"/>
+                          <a:cs typeface="Pretendard" pitchFamily="34" charset="-120"/>
+                        </a:rPr>
+                        <a:t>산출 </a:t>
+                      </a:r>
+                      <a:pPr indent="0" marL="0">
+                        <a:buNone/>
+                      </a:pPr>
+                      <a:r>
+                        <a:rPr lang="en-US" sz="1300" dirty="0">
+                          <a:solidFill>
+                            <a:srgbClr val="10161F"/>
+                          </a:solidFill>
+                          <a:latin typeface="Pretendard" pitchFamily="34" charset="0"/>
+                          <a:ea typeface="Pretendard" pitchFamily="34" charset="-122"/>
+                          <a:cs typeface="Pretendard" pitchFamily="34" charset="-120"/>
+                        </a:rPr>
+                        <a:t>불가 </a:t>
+                      </a:r>
+                      <a:pPr indent="0" marL="0">
+                        <a:buNone/>
+                      </a:pPr>
+                      <a:r>
+                        <a:rPr lang="en-US" sz="1300" dirty="0">
+                          <a:solidFill>
+                            <a:srgbClr val="10161F"/>
+                          </a:solidFill>
+                          <a:latin typeface="Pretendard" pitchFamily="34" charset="0"/>
+                          <a:ea typeface="Pretendard" pitchFamily="34" charset="-122"/>
+                          <a:cs typeface="Pretendard" pitchFamily="34" charset="-120"/>
+                        </a:rPr>
+                        <a:t>(매도가 </a:t>
+                      </a:r>
+                      <a:pPr indent="0" marL="0">
+                        <a:buNone/>
+                      </a:pPr>
+                      <a:r>
+                        <a:rPr lang="en-US" sz="1300" dirty="0">
+                          <a:solidFill>
+                            <a:srgbClr val="10161F"/>
+                          </a:solidFill>
+                          <a:latin typeface="Pretendard" pitchFamily="34" charset="0"/>
+                          <a:ea typeface="Pretendard" pitchFamily="34" charset="-122"/>
+                          <a:cs typeface="Pretendard" pitchFamily="34" charset="-120"/>
+                        </a:rPr>
+                        <a:t>데이터 </a:t>
+                      </a:r>
+                      <a:pPr indent="0" marL="0">
+                        <a:buNone/>
+                      </a:pPr>
+                      <a:r>
+                        <a:rPr lang="en-US" sz="1300" dirty="0">
+                          <a:solidFill>
+                            <a:srgbClr val="10161F"/>
+                          </a:solidFill>
+                          <a:latin typeface="Pretendard" pitchFamily="34" charset="0"/>
+                          <a:ea typeface="Pretendard" pitchFamily="34" charset="-122"/>
+                          <a:cs typeface="Pretendard" pitchFamily="34" charset="-120"/>
+                        </a:rPr>
+                        <a:t>부족)</a:t>
+                      </a:r>
+                      <a:endParaRPr lang="en-US" sz="1300" dirty="0">
+                        <a:latin typeface="Pretendard" charset="0"/>
+                        <a:ea typeface="Pretendard" charset="0"/>
+                        <a:cs typeface="Pretendard" charset="0"/>
+                      </a:endParaRPr>
+                    </a:p>
+                  </a:txBody>
+                  <a:tcPr marL="50800" marR="50800" marT="25400" marB="25400" anchor="ctr">
+                    <a:lnL w="3810" cap="flat" cmpd="sng" algn="ctr">
+                      <a:solidFill>
+                        <a:srgbClr val="CBD5E0"/>
+                      </a:solidFill>
+                      <a:prstDash val="solid"/>
+                      <a:round/>
+                      <a:headEnd type="none" w="med" len="med"/>
+                      <a:tailEnd type="none" w="med" len="med"/>
+                    </a:lnL>
+                    <a:lnR w="3810" cap="flat" cmpd="sng" algn="ctr">
+                      <a:solidFill>
+                        <a:srgbClr val="CBD5E0"/>
+                      </a:solidFill>
+                      <a:prstDash val="solid"/>
+                      <a:round/>
+                      <a:headEnd type="none" w="med" len="med"/>
+                      <a:tailEnd type="none" w="med" len="med"/>
+                    </a:lnR>
+                    <a:lnT w="3810" cap="flat" cmpd="sng" algn="ctr">
+                      <a:solidFill>
+                        <a:srgbClr val="CBD5E0"/>
+                      </a:solidFill>
+                      <a:prstDash val="solid"/>
+                      <a:round/>
+                      <a:headEnd type="none" w="med" len="med"/>
+                      <a:tailEnd type="none" w="med" len="med"/>
+                    </a:lnT>
+                    <a:lnB w="3810" cap="flat" cmpd="sng" algn="ctr">
+                      <a:solidFill>
+                        <a:srgbClr val="CBD5E0"/>
+                      </a:solidFill>
+                      <a:prstDash val="solid"/>
+                      <a:round/>
+                      <a:headEnd type="none" w="med" len="med"/>
+                      <a:tailEnd type="none" w="med" len="med"/>
+                    </a:lnB>
+                    <a:solidFill>
+                      <a:srgbClr val="FFFFFF"/>
+                    </a:solidFill>
+                  </a:tcPr>
+                </a:tc>
+                <a:tc>
+                  <a:txBody>
+                    <a:bodyPr/>
+                    <a:lstStyle/>
+                    <a:p>
+                      <a:pPr indent="0" marL="0">
+                        <a:buNone/>
+                      </a:pPr>
+                      <a:r>
+                        <a:rPr lang="en-US" sz="1300" dirty="0">
+                          <a:solidFill>
+                            <a:srgbClr val="10161F"/>
+                          </a:solidFill>
+                          <a:latin typeface="Pretendard" pitchFamily="34" charset="0"/>
+                          <a:ea typeface="Pretendard" pitchFamily="34" charset="-122"/>
+                          <a:cs typeface="Pretendard" pitchFamily="34" charset="-120"/>
+                        </a:rPr>
+                        <a:t>보유 </a:t>
+                      </a:r>
+                      <a:pPr indent="0" marL="0">
+                        <a:buNone/>
+                      </a:pPr>
+                      <a:r>
+                        <a:rPr lang="en-US" sz="1300" dirty="0">
+                          <a:solidFill>
+                            <a:srgbClr val="10161F"/>
+                          </a:solidFill>
+                          <a:latin typeface="Pretendard" pitchFamily="34" charset="0"/>
+                          <a:ea typeface="Pretendard" pitchFamily="34" charset="-122"/>
+                          <a:cs typeface="Pretendard" pitchFamily="34" charset="-120"/>
+                        </a:rPr>
+                        <a:t>기간 </a:t>
+                      </a:r>
+                      <a:pPr indent="0" marL="0">
+                        <a:buNone/>
+                      </a:pPr>
+                      <a:r>
+                        <a:rPr lang="en-US" sz="1300" dirty="0">
+                          <a:solidFill>
+                            <a:srgbClr val="10161F"/>
+                          </a:solidFill>
+                          <a:latin typeface="Pretendard" pitchFamily="34" charset="0"/>
+                          <a:ea typeface="Pretendard" pitchFamily="34" charset="-122"/>
+                          <a:cs typeface="Pretendard" pitchFamily="34" charset="-120"/>
+                        </a:rPr>
+                        <a:t>2~3년 </a:t>
+                      </a:r>
+                      <a:pPr indent="0" marL="0">
+                        <a:buNone/>
+                      </a:pPr>
+                      <a:r>
+                        <a:rPr lang="en-US" sz="1300" dirty="0">
+                          <a:solidFill>
+                            <a:srgbClr val="10161F"/>
+                          </a:solidFill>
+                          <a:latin typeface="Pretendard" pitchFamily="34" charset="0"/>
+                          <a:ea typeface="Pretendard" pitchFamily="34" charset="-122"/>
+                          <a:cs typeface="Pretendard" pitchFamily="34" charset="-120"/>
+                        </a:rPr>
+                        <a:t>가정</a:t>
+                      </a:r>
+                      <a:endParaRPr lang="en-US" sz="1300" dirty="0">
+                        <a:latin typeface="Pretendard" charset="0"/>
+                        <a:ea typeface="Pretendard" charset="0"/>
+                        <a:cs typeface="Pretendard" charset="0"/>
+                      </a:endParaRPr>
+                    </a:p>
+                  </a:txBody>
+                  <a:tcPr marL="50800" marR="50800" marT="25400" marB="25400" anchor="ctr">
+                    <a:lnL w="3810" cap="flat" cmpd="sng" algn="ctr">
+                      <a:solidFill>
+                        <a:srgbClr val="CBD5E0"/>
+                      </a:solidFill>
+                      <a:prstDash val="solid"/>
+                      <a:round/>
+                      <a:headEnd type="none" w="med" len="med"/>
+                      <a:tailEnd type="none" w="med" len="med"/>
+                    </a:lnL>
+                    <a:lnR w="3810" cap="flat" cmpd="sng" algn="ctr">
+                      <a:solidFill>
+                        <a:srgbClr val="CBD5E0"/>
+                      </a:solidFill>
+                      <a:prstDash val="solid"/>
+                      <a:round/>
+                      <a:headEnd type="none" w="med" len="med"/>
+                      <a:tailEnd type="none" w="med" len="med"/>
+                    </a:lnR>
+                    <a:lnT w="3810" cap="flat" cmpd="sng" algn="ctr">
+                      <a:solidFill>
+                        <a:srgbClr val="CBD5E0"/>
+                      </a:solidFill>
+                      <a:prstDash val="solid"/>
+                      <a:round/>
+                      <a:headEnd type="none" w="med" len="med"/>
+                      <a:tailEnd type="none" w="med" len="med"/>
+                    </a:lnT>
+                    <a:lnB w="3810" cap="flat" cmpd="sng" algn="ctr">
+                      <a:solidFill>
+                        <a:srgbClr val="CBD5E0"/>
+                      </a:solidFill>
+                      <a:prstDash val="solid"/>
+                      <a:round/>
+                      <a:headEnd type="none" w="med" len="med"/>
+                      <a:tailEnd type="none" w="med" len="med"/>
+                    </a:lnB>
+                    <a:solidFill>
+                      <a:srgbClr val="FFFFFF"/>
+                    </a:solidFill>
+                  </a:tcPr>
+                </a:tc>
+              </a:tr>
+            </a:tbl>
+          </a:graphicData>
+        </a:graphic>
+      </p:graphicFrame>
+      <p:sp>
+        <p:nvSpPr>
+          <p:cNvPr id="7" name="Text 4"/>
+          <p:cNvSpPr/>
+          <p:nvPr/>
+        </p:nvSpPr>
+        <p:spPr>
+          <a:xfrm>
+            <a:off x="566928" y="6382512"/>
+            <a:ext cx="7315200" cy="219456"/>
           </a:xfrm>
           <a:prstGeom prst="rect">
             <a:avLst/>
@@ -6553,13 +8350,10 @@
           <a:lstStyle/>
           <a:p>
             <a:pPr indent="0" marL="0">
-              <a:lnSpc>
-                <a:spcPct val="120000"/>
-              </a:lnSpc>
-              <a:buNone/>
-            </a:pPr>
-            <a:r>
-              <a:rPr lang="en-US" sz="1400" dirty="0">
+              <a:buNone/>
+            </a:pPr>
+            <a:r>
+              <a:rPr lang="en-US" sz="800" dirty="0">
                 <a:solidFill>
                   <a:srgbClr val="718096"/>
                 </a:solidFill>
@@ -6567,87 +8361,6 @@
                 <a:ea typeface="Pretendard" pitchFamily="34" charset="-122"/>
                 <a:cs typeface="Pretendard" pitchFamily="34" charset="-120"/>
               </a:rPr>
-              <a:t>{"ok"</a:t>
-            </a:r>
-            <a:endParaRPr lang="en-US" sz="1400" dirty="0"/>
-          </a:p>
-        </p:txBody>
-      </p:sp>
-      <p:sp>
-        <p:nvSpPr>
-          <p:cNvPr id="7" name="Text 5"/>
-          <p:cNvSpPr/>
-          <p:nvPr/>
-        </p:nvSpPr>
-        <p:spPr>
-          <a:xfrm>
-            <a:off x="4768907" y="1645920"/>
-            <a:ext cx="6855860" cy="402336"/>
-          </a:xfrm>
-          <a:prstGeom prst="rect">
-            <a:avLst/>
-          </a:prstGeom>
-          <a:noFill/>
-          <a:ln/>
-        </p:spPr>
-        <p:txBody>
-          <a:bodyPr wrap="square" lIns="0" tIns="0" rIns="0" bIns="0" rtlCol="0" anchor="ctr"/>
-          <a:lstStyle/>
-          <a:p>
-            <a:pPr indent="0" marL="0">
-              <a:lnSpc>
-                <a:spcPct val="120000"/>
-              </a:lnSpc>
-              <a:buNone/>
-            </a:pPr>
-            <a:r>
-              <a:rPr lang="en-US" sz="1400" b="1" dirty="0">
-                <a:solidFill>
-                  <a:srgbClr val="10161F"/>
-                </a:solidFill>
-                <a:latin typeface="Pretendard" pitchFamily="34" charset="0"/>
-                <a:ea typeface="Pretendard" pitchFamily="34" charset="-122"/>
-                <a:cs typeface="Pretendard" pitchFamily="34" charset="-120"/>
-              </a:rPr>
-              <a:t>true,"mocked":true,"extractedFields":{"area_signal":"역삼","asset_type":"오피스빌딩","price_band":"300억","size_signal":"3000평(약 9917.4㎡)"},"extractedFacts":{"region":"역삼","exactAddressCandidate":"역삼동 742-1","assetType":"오피스빌딩","priceText":"300억","sizeText":"3000평(약 9917.4㎡)","currentUse":"오피스","currentUseSignal":"근린생활시설","leaseSignal":"임대중","vacancySignal":"공실없음","tenantNames":"쿠팡","네이버","unitRentTexts":"301호: 1500만","sellerMotivationText":"자산 효율화","brokerNotes":"초역세권 매물"},"detectedSensitiveFields":"exact_address","tenant_name","ambiguousFields":,"warnings":,"areaSignal":"역삼","assetType":"오피스빌딩","priceBand":"300억","sizeSignal":"3000평(약 9917.4㎡)","dealType":"매각","buildingName":"역삼 센트럴타워","exactAddress":"역삼동 742-1","totalFloorArea":9917.3,"buildYear":2015,"currentUseSignal":"근린생활시설","vacancySignal":"공실 없음","fitSummary":"초역세권 근생 빌딩으로 시행/사옥 매입에 최적화","cautionSummary":"주요 임차 업종 만기 조율 필요","hiddenFields":"exact_address","seller_motivation","confidence":{"areaSignal":"confirmed","assetType":"confirmed","priceBand":"ai_hypothesis","fitSummary":"ai_hypothesis"},"missingData":"sizeSignal","boundaryNote":"본 자료는 실거래 통계 기반 참고치입니다.","buyerType":"법인 사옥형","budgetRange":{"min":50,"max":80,"display":"50억~80억"},"preferredRegions":"강남","성수","assetTypes":"꼬마빌딩","사옥용","purchasePurpose":"사옥용 매입","mustHave":"초역세권","주차","niceToHave":"테라스","루프탑","riskTolerance":"medium","financingNote":"자본금 50% 준비","missingQuestions":"구체적인 입주 시기가 언제인가요?","선호하는 수익률이 있나요?","privacyNotes":"연락처 비공개","fitReasons":"매수자 예산(50-80억)에 부합하는 매물입니다.","요청하신 성수/강남 권역에 해당합니다.","cautionReasons":"요청한 용도와 달리 명도 협의가 다소 필요합니다.","recommendedNextAction":"현장 답사 제안","kakaoMessage":"안녕하세요! 요청하신 조건에 부합하는 추천 매물이 있어 안내해 드립니다. 확인해보시고 피드백 부탁드립니다.","title":"강남 역삼역 초역세권 오피스 사옥용 빌딩 매각","shortSummary":"역삼역 도보 5분 거리의 준신축급 대형 오피스빌딩입니다.","dealPoints":"초역세권","사옥 최적","cautionPoints":"명도 조율 필요","hiddenInfoNotice":"보증금 및 지번은 인가 후 확인 가능","gateMessage":"G1 등급 등록이 필요합니다.","kakaoText":"강남 역삼역 오피스 빌딩 매각 안내입니다.","exactUnitCandidate":"101호","floor":"1층","areaSqmText":"150㎡","spaceType":"office","depositText":"5000만","monthlyRentText":"400만","maintenanceFeeText":"50만","availableFromText":"즉시입주","leaseTermMonthsText":"24","incentivesText":"렌트프리 2개월","restrictions":,"landlordIdentity":"김성수","currentTenant":"스타트업","vacancyReason":"이전 확장","rentNegotiation":"협의 가능","region":"성수동","areaSqm":150,"deposit":5000,"monthlyRent":400,"maintenanceFee":50,"availableFrom":"즉시입주","leaseTermMonths":24,"incentives":{"rentFreeMonths":2,"interiorSupport":"일부 인테리어 지원","freeRentDetail":"렌트프리 2개월 지원"},"shortSummaryLease":"성수역 도보 5분 거리 1층 리테일 상가 매물입니다."}</a:t>
-            </a:r>
-            <a:endParaRPr lang="en-US" sz="1400" dirty="0"/>
-          </a:p>
-        </p:txBody>
-      </p:sp>
-      <p:sp>
-        <p:nvSpPr>
-          <p:cNvPr id="8" name="Text 6"/>
-          <p:cNvSpPr/>
-          <p:nvPr/>
-        </p:nvSpPr>
-        <p:spPr>
-          <a:xfrm>
-            <a:off x="566928" y="6382512"/>
-            <a:ext cx="7315200" cy="219456"/>
-          </a:xfrm>
-          <a:prstGeom prst="rect">
-            <a:avLst/>
-          </a:prstGeom>
-          <a:noFill/>
-          <a:ln/>
-        </p:spPr>
-        <p:txBody>
-          <a:bodyPr wrap="square" lIns="0" tIns="0" rIns="0" bIns="0" rtlCol="0" anchor="ctr"/>
-          <a:lstStyle/>
-          <a:p>
-            <a:pPr indent="0" marL="0">
-              <a:buNone/>
-            </a:pPr>
-            <a:r>
-              <a:rPr lang="en-US" sz="800" dirty="0">
-                <a:solidFill>
-                  <a:srgbClr val="718096"/>
-                </a:solidFill>
-                <a:latin typeface="Pretendard" pitchFamily="34" charset="0"/>
-                <a:ea typeface="Pretendard" pitchFamily="34" charset="-122"/>
-                <a:cs typeface="Pretendard" pitchFamily="34" charset="-120"/>
-              </a:rPr>
               <a:t>크리딜   |   </a:t>
             </a:r>
             <a:endParaRPr lang="en-US" sz="800" dirty="0"/>
@@ -6656,7 +8369,7 @@
       </p:sp>
       <p:sp>
         <p:nvSpPr>
-          <p:cNvPr id="9" name="Text 7"/>
+          <p:cNvPr id="8" name="Text 5"/>
           <p:cNvSpPr/>
           <p:nvPr/>
         </p:nvSpPr>
@@ -6871,11 +8584,11 @@
         <p:spPr>
           <a:xfrm>
             <a:off x="566928" y="1417320"/>
-            <a:ext cx="3515258" cy="3657600"/>
+            <a:ext cx="11057839" cy="3657600"/>
           </a:xfrm>
           <a:prstGeom prst="roundRect">
             <a:avLst>
-              <a:gd name="adj" fmla="val 1561"/>
+              <a:gd name="adj" fmla="val 1500"/>
             </a:avLst>
           </a:prstGeom>
           <a:solidFill>
@@ -6898,7 +8611,7 @@
         <p:spPr>
           <a:xfrm>
             <a:off x="566928" y="1417320"/>
-            <a:ext cx="3515258" cy="45720"/>
+            <a:ext cx="11057839" cy="45720"/>
           </a:xfrm>
           <a:prstGeom prst="rect">
             <a:avLst/>
@@ -6918,7 +8631,7 @@
         <p:spPr>
           <a:xfrm>
             <a:off x="795528" y="1618488"/>
-            <a:ext cx="3058058" cy="292608"/>
+            <a:ext cx="10600639" cy="292608"/>
           </a:xfrm>
           <a:prstGeom prst="rect">
             <a:avLst/>
@@ -6942,7 +8655,7 @@
                 <a:ea typeface="Pretendard" pitchFamily="34" charset="-122"/>
                 <a:cs typeface="Pretendard" pitchFamily="34" charset="-120"/>
               </a:rPr>
-              <a:t>건물 물리적 상태</a:t>
+              <a:t>용도 리스크</a:t>
             </a:r>
             <a:endParaRPr lang="en-US" sz="1350" dirty="0"/>
           </a:p>
@@ -6957,7 +8670,7 @@
         <p:spPr>
           <a:xfrm>
             <a:off x="795528" y="1947672"/>
-            <a:ext cx="3058058" cy="365760"/>
+            <a:ext cx="10600639" cy="365760"/>
           </a:xfrm>
           <a:prstGeom prst="rect">
             <a:avLst/>
@@ -6983,7 +8696,7 @@
                 <a:ea typeface="Pretendard" pitchFamily="34" charset="-122"/>
                 <a:cs typeface="Pretendard" pitchFamily="34" charset="-120"/>
               </a:rPr>
-              <a:t>2017년 준공 신축급 상태 (누수/균열 결함 없음)</a:t>
+              <a:t>—</a:t>
             </a:r>
             <a:endParaRPr lang="en-US" sz="1250" dirty="0"/>
           </a:p>
@@ -6998,7 +8711,7 @@
         <p:spPr>
           <a:xfrm>
             <a:off x="795528" y="2377440"/>
-            <a:ext cx="3058058" cy="2606040"/>
+            <a:ext cx="10600639" cy="2606040"/>
           </a:xfrm>
           <a:prstGeom prst="rect">
             <a:avLst/>
@@ -7028,7 +8741,7 @@
                 <a:ea typeface="Pretendard" pitchFamily="34" charset="-122"/>
                 <a:cs typeface="Pretendard" pitchFamily="34" charset="-120"/>
               </a:rPr>
-              <a:t>준공 10년 미만으로 대규모 수선비용 발생 가능성 낮음</a:t>
+              <a:t>{"ok":true,"mocked":true,"extractedFields":{"area_signal":"역삼","asset_type":"오피스빌딩","price_band":"300억","size_signal":"3000평(약 9917.4㎡)"},"extractedFacts":{"region":"역삼","exactAddressCandidate":"역삼동 7</a:t>
             </a:r>
             <a:endParaRPr lang="en-US" sz="1100" dirty="0"/>
           </a:p>
@@ -7042,12 +8755,12 @@
         </p:nvSpPr>
         <p:spPr>
           <a:xfrm>
-            <a:off x="4338218" y="1417320"/>
-            <a:ext cx="3515258" cy="3657600"/>
+            <a:off x="566928" y="5193792"/>
+            <a:ext cx="11057839" cy="621792"/>
           </a:xfrm>
           <a:prstGeom prst="roundRect">
             <a:avLst>
-              <a:gd name="adj" fmla="val 1561"/>
+              <a:gd name="adj" fmla="val 8824"/>
             </a:avLst>
           </a:prstGeom>
           <a:solidFill>
@@ -7063,34 +8776,14 @@
       </p:sp>
       <p:sp>
         <p:nvSpPr>
-          <p:cNvPr id="12" name="Shape 10"/>
-          <p:cNvSpPr/>
-          <p:nvPr/>
-        </p:nvSpPr>
-        <p:spPr>
-          <a:xfrm>
-            <a:off x="4338218" y="1417320"/>
-            <a:ext cx="3515258" cy="45720"/>
-          </a:xfrm>
-          <a:prstGeom prst="rect">
-            <a:avLst/>
-          </a:prstGeom>
-          <a:solidFill>
-            <a:srgbClr val="B98A2E"/>
-          </a:solidFill>
-          <a:ln/>
-        </p:spPr>
-      </p:sp>
-      <p:sp>
-        <p:nvSpPr>
-          <p:cNvPr id="13" name="Text 11"/>
-          <p:cNvSpPr/>
-          <p:nvPr/>
-        </p:nvSpPr>
-        <p:spPr>
-          <a:xfrm>
-            <a:off x="4566818" y="1618488"/>
-            <a:ext cx="3058058" cy="292608"/>
+          <p:cNvPr id="12" name="Text 10"/>
+          <p:cNvSpPr/>
+          <p:nvPr/>
+        </p:nvSpPr>
+        <p:spPr>
+          <a:xfrm>
+            <a:off x="795528" y="5193792"/>
+            <a:ext cx="10600639" cy="621792"/>
           </a:xfrm>
           <a:prstGeom prst="rect">
             <a:avLst/>
@@ -7106,377 +8799,53 @@
               <a:buNone/>
             </a:pPr>
             <a:r>
-              <a:rPr lang="en-US" sz="1350" b="1" dirty="0">
-                <a:solidFill>
-                  <a:srgbClr val="977024"/>
+              <a:rPr lang="en-US" sz="1100" dirty="0">
+                <a:solidFill>
+                  <a:srgbClr val="10161F"/>
                 </a:solidFill>
                 <a:latin typeface="Pretendard" pitchFamily="34" charset="0"/>
                 <a:ea typeface="Pretendard" pitchFamily="34" charset="-122"/>
                 <a:cs typeface="Pretendard" pitchFamily="34" charset="-120"/>
               </a:rPr>
-              <a:t>승강기 및 설비</a:t>
-            </a:r>
-            <a:endParaRPr lang="en-US" sz="1350" dirty="0"/>
-          </a:p>
-        </p:txBody>
-      </p:sp>
-      <p:sp>
-        <p:nvSpPr>
-          <p:cNvPr id="14" name="Text 12"/>
-          <p:cNvSpPr/>
-          <p:nvPr/>
-        </p:nvSpPr>
-        <p:spPr>
-          <a:xfrm>
-            <a:off x="4566818" y="1947672"/>
-            <a:ext cx="3058058" cy="365760"/>
-          </a:xfrm>
-          <a:prstGeom prst="rect">
-            <a:avLst/>
-          </a:prstGeom>
-          <a:noFill/>
-          <a:ln/>
-        </p:spPr>
-        <p:txBody>
-          <a:bodyPr wrap="square" lIns="0" tIns="0" rIns="0" bIns="0" rtlCol="0" anchor="ctr">
-            <a:normAutofit/>
-          </a:bodyPr>
+              <a:t>※ 본 리스크 체크는 공부 및 브로커 확인 기반이며, 매수 전 전문 실사팀(변호사/건축사)을 통한 정밀 실사가 필요합니다.</a:t>
+            </a:r>
+            <a:endParaRPr lang="en-US" sz="1100" dirty="0"/>
+          </a:p>
+        </p:txBody>
+      </p:sp>
+      <p:sp>
+        <p:nvSpPr>
+          <p:cNvPr id="13" name="Text 11"/>
+          <p:cNvSpPr/>
+          <p:nvPr/>
+        </p:nvSpPr>
+        <p:spPr>
+          <a:xfrm>
+            <a:off x="566928" y="6382512"/>
+            <a:ext cx="7315200" cy="219456"/>
+          </a:xfrm>
+          <a:prstGeom prst="rect">
+            <a:avLst/>
+          </a:prstGeom>
+          <a:noFill/>
+          <a:ln/>
+        </p:spPr>
+        <p:txBody>
+          <a:bodyPr wrap="square" lIns="0" tIns="0" rIns="0" bIns="0" rtlCol="0" anchor="ctr"/>
           <a:lstStyle/>
           <a:p>
             <a:pPr indent="0" marL="0">
               <a:buNone/>
             </a:pPr>
             <a:r>
-              <a:rPr lang="en-US" sz="1250" b="1" dirty="0">
-                <a:solidFill>
-                  <a:srgbClr val="10161F"/>
+              <a:rPr lang="en-US" sz="800" dirty="0">
+                <a:solidFill>
+                  <a:srgbClr val="718096"/>
                 </a:solidFill>
                 <a:latin typeface="Pretendard" pitchFamily="34" charset="0"/>
                 <a:ea typeface="Pretendard" pitchFamily="34" charset="-122"/>
                 <a:cs typeface="Pretendard" pitchFamily="34" charset="-120"/>
               </a:rPr>
-              <a:t>15인승 침대용 승강기 및 냉난방 설비 양호</a:t>
-            </a:r>
-            <a:endParaRPr lang="en-US" sz="1250" dirty="0"/>
-          </a:p>
-        </p:txBody>
-      </p:sp>
-      <p:sp>
-        <p:nvSpPr>
-          <p:cNvPr id="15" name="Text 13"/>
-          <p:cNvSpPr/>
-          <p:nvPr/>
-        </p:nvSpPr>
-        <p:spPr>
-          <a:xfrm>
-            <a:off x="4566818" y="2377440"/>
-            <a:ext cx="3058058" cy="2606040"/>
-          </a:xfrm>
-          <a:prstGeom prst="rect">
-            <a:avLst/>
-          </a:prstGeom>
-          <a:noFill/>
-          <a:ln/>
-        </p:spPr>
-        <p:txBody>
-          <a:bodyPr wrap="square" lIns="0" tIns="0" rIns="0" bIns="0" rtlCol="0" anchor="t">
-            <a:normAutofit/>
-          </a:bodyPr>
-          <a:lstStyle/>
-          <a:p>
-            <a:pPr marL="342900" indent="-342900">
-              <a:lnSpc>
-                <a:spcPct val="125000"/>
-              </a:lnSpc>
-              <a:buSzPct val="100000"/>
-              <a:buChar char="•"/>
-            </a:pPr>
-            <a:r>
-              <a:rPr lang="en-US" sz="1100" dirty="0">
-                <a:solidFill>
-                  <a:srgbClr val="10161F"/>
-                </a:solidFill>
-                <a:latin typeface="Pretendard" pitchFamily="34" charset="0"/>
-                <a:ea typeface="Pretendard" pitchFamily="34" charset="-122"/>
-                <a:cs typeface="Pretendard" pitchFamily="34" charset="-120"/>
-              </a:rPr>
-              <a:t>주기적 정기 점검 계약 유지로 관리 리스크 최소화</a:t>
-            </a:r>
-            <a:endParaRPr lang="en-US" sz="1100" dirty="0"/>
-          </a:p>
-        </p:txBody>
-      </p:sp>
-      <p:sp>
-        <p:nvSpPr>
-          <p:cNvPr id="16" name="Shape 14"/>
-          <p:cNvSpPr/>
-          <p:nvPr/>
-        </p:nvSpPr>
-        <p:spPr>
-          <a:xfrm>
-            <a:off x="8109509" y="1417320"/>
-            <a:ext cx="3515258" cy="3657600"/>
-          </a:xfrm>
-          <a:prstGeom prst="roundRect">
-            <a:avLst>
-              <a:gd name="adj" fmla="val 1561"/>
-            </a:avLst>
-          </a:prstGeom>
-          <a:solidFill>
-            <a:srgbClr val="F7FAFC"/>
-          </a:solidFill>
-          <a:ln w="6350">
-            <a:solidFill>
-              <a:srgbClr val="CBD5E0"/>
-            </a:solidFill>
-            <a:prstDash val="solid"/>
-          </a:ln>
-        </p:spPr>
-      </p:sp>
-      <p:sp>
-        <p:nvSpPr>
-          <p:cNvPr id="17" name="Shape 15"/>
-          <p:cNvSpPr/>
-          <p:nvPr/>
-        </p:nvSpPr>
-        <p:spPr>
-          <a:xfrm>
-            <a:off x="8109509" y="1417320"/>
-            <a:ext cx="3515258" cy="45720"/>
-          </a:xfrm>
-          <a:prstGeom prst="rect">
-            <a:avLst/>
-          </a:prstGeom>
-          <a:solidFill>
-            <a:srgbClr val="B98A2E"/>
-          </a:solidFill>
-          <a:ln/>
-        </p:spPr>
-      </p:sp>
-      <p:sp>
-        <p:nvSpPr>
-          <p:cNvPr id="18" name="Text 16"/>
-          <p:cNvSpPr/>
-          <p:nvPr/>
-        </p:nvSpPr>
-        <p:spPr>
-          <a:xfrm>
-            <a:off x="8338109" y="1618488"/>
-            <a:ext cx="3058058" cy="292608"/>
-          </a:xfrm>
-          <a:prstGeom prst="rect">
-            <a:avLst/>
-          </a:prstGeom>
-          <a:noFill/>
-          <a:ln/>
-        </p:spPr>
-        <p:txBody>
-          <a:bodyPr wrap="square" lIns="0" tIns="0" rIns="0" bIns="0" rtlCol="0" anchor="ctr"/>
-          <a:lstStyle/>
-          <a:p>
-            <a:pPr indent="0" marL="0">
-              <a:buNone/>
-            </a:pPr>
-            <a:r>
-              <a:rPr lang="en-US" sz="1350" b="1" dirty="0">
-                <a:solidFill>
-                  <a:srgbClr val="977024"/>
-                </a:solidFill>
-                <a:latin typeface="Pretendard" pitchFamily="34" charset="0"/>
-                <a:ea typeface="Pretendard" pitchFamily="34" charset="-122"/>
-                <a:cs typeface="Pretendard" pitchFamily="34" charset="-120"/>
-              </a:rPr>
-              <a:t>임차인 이탈 위험</a:t>
-            </a:r>
-            <a:endParaRPr lang="en-US" sz="1350" dirty="0"/>
-          </a:p>
-        </p:txBody>
-      </p:sp>
-      <p:sp>
-        <p:nvSpPr>
-          <p:cNvPr id="19" name="Text 17"/>
-          <p:cNvSpPr/>
-          <p:nvPr/>
-        </p:nvSpPr>
-        <p:spPr>
-          <a:xfrm>
-            <a:off x="8338109" y="1947672"/>
-            <a:ext cx="3058058" cy="365760"/>
-          </a:xfrm>
-          <a:prstGeom prst="rect">
-            <a:avLst/>
-          </a:prstGeom>
-          <a:noFill/>
-          <a:ln/>
-        </p:spPr>
-        <p:txBody>
-          <a:bodyPr wrap="square" lIns="0" tIns="0" rIns="0" bIns="0" rtlCol="0" anchor="ctr">
-            <a:normAutofit/>
-          </a:bodyPr>
-          <a:lstStyle/>
-          <a:p>
-            <a:pPr indent="0" marL="0">
-              <a:buNone/>
-            </a:pPr>
-            <a:r>
-              <a:rPr lang="en-US" sz="1250" b="1" dirty="0">
-                <a:solidFill>
-                  <a:srgbClr val="10161F"/>
-                </a:solidFill>
-                <a:latin typeface="Pretendard" pitchFamily="34" charset="0"/>
-                <a:ea typeface="Pretendard" pitchFamily="34" charset="-122"/>
-                <a:cs typeface="Pretendard" pitchFamily="34" charset="-120"/>
-              </a:rPr>
-              <a:t>병의원/약국 인테리어 투자비(호실당 5억↑) 존속</a:t>
-            </a:r>
-            <a:endParaRPr lang="en-US" sz="1250" dirty="0"/>
-          </a:p>
-        </p:txBody>
-      </p:sp>
-      <p:sp>
-        <p:nvSpPr>
-          <p:cNvPr id="20" name="Text 18"/>
-          <p:cNvSpPr/>
-          <p:nvPr/>
-        </p:nvSpPr>
-        <p:spPr>
-          <a:xfrm>
-            <a:off x="8338109" y="2377440"/>
-            <a:ext cx="3058058" cy="2606040"/>
-          </a:xfrm>
-          <a:prstGeom prst="rect">
-            <a:avLst/>
-          </a:prstGeom>
-          <a:noFill/>
-          <a:ln/>
-        </p:spPr>
-        <p:txBody>
-          <a:bodyPr wrap="square" lIns="0" tIns="0" rIns="0" bIns="0" rtlCol="0" anchor="t">
-            <a:normAutofit/>
-          </a:bodyPr>
-          <a:lstStyle/>
-          <a:p>
-            <a:pPr marL="342900" indent="-342900">
-              <a:lnSpc>
-                <a:spcPct val="125000"/>
-              </a:lnSpc>
-              <a:buSzPct val="100000"/>
-              <a:buChar char="•"/>
-            </a:pPr>
-            <a:r>
-              <a:rPr lang="en-US" sz="1100" dirty="0">
-                <a:solidFill>
-                  <a:srgbClr val="10161F"/>
-                </a:solidFill>
-                <a:latin typeface="Pretendard" pitchFamily="34" charset="0"/>
-                <a:ea typeface="Pretendard" pitchFamily="34" charset="-122"/>
-                <a:cs typeface="Pretendard" pitchFamily="34" charset="-120"/>
-              </a:rPr>
-              <a:t>WALE 3.5년 확보 및 만기 6개월 전 재계약 협상 개시</a:t>
-            </a:r>
-            <a:endParaRPr lang="en-US" sz="1100" dirty="0"/>
-          </a:p>
-        </p:txBody>
-      </p:sp>
-      <p:sp>
-        <p:nvSpPr>
-          <p:cNvPr id="21" name="Shape 19"/>
-          <p:cNvSpPr/>
-          <p:nvPr/>
-        </p:nvSpPr>
-        <p:spPr>
-          <a:xfrm>
-            <a:off x="566928" y="5193792"/>
-            <a:ext cx="11057839" cy="621792"/>
-          </a:xfrm>
-          <a:prstGeom prst="roundRect">
-            <a:avLst>
-              <a:gd name="adj" fmla="val 8824"/>
-            </a:avLst>
-          </a:prstGeom>
-          <a:solidFill>
-            <a:srgbClr val="F7FAFC"/>
-          </a:solidFill>
-          <a:ln w="6350">
-            <a:solidFill>
-              <a:srgbClr val="CBD5E0"/>
-            </a:solidFill>
-            <a:prstDash val="solid"/>
-          </a:ln>
-        </p:spPr>
-      </p:sp>
-      <p:sp>
-        <p:nvSpPr>
-          <p:cNvPr id="22" name="Text 20"/>
-          <p:cNvSpPr/>
-          <p:nvPr/>
-        </p:nvSpPr>
-        <p:spPr>
-          <a:xfrm>
-            <a:off x="795528" y="5193792"/>
-            <a:ext cx="10600639" cy="621792"/>
-          </a:xfrm>
-          <a:prstGeom prst="rect">
-            <a:avLst/>
-          </a:prstGeom>
-          <a:noFill/>
-          <a:ln/>
-        </p:spPr>
-        <p:txBody>
-          <a:bodyPr wrap="square" lIns="0" tIns="0" rIns="0" bIns="0" rtlCol="0" anchor="ctr"/>
-          <a:lstStyle/>
-          <a:p>
-            <a:pPr indent="0" marL="0">
-              <a:buNone/>
-            </a:pPr>
-            <a:r>
-              <a:rPr lang="en-US" sz="1100" dirty="0">
-                <a:solidFill>
-                  <a:srgbClr val="10161F"/>
-                </a:solidFill>
-                <a:latin typeface="Pretendard" pitchFamily="34" charset="0"/>
-                <a:ea typeface="Pretendard" pitchFamily="34" charset="-122"/>
-                <a:cs typeface="Pretendard" pitchFamily="34" charset="-120"/>
-              </a:rPr>
-              <a:t>실사 총평: 자산의 물리적·권리적 하자가 없으며, 세부 임대차 계약서 및 등기사항증명서는 LOI 접수 후 원본 열람 가능합니다.</a:t>
-            </a:r>
-            <a:endParaRPr lang="en-US" sz="1100" dirty="0"/>
-          </a:p>
-        </p:txBody>
-      </p:sp>
-      <p:sp>
-        <p:nvSpPr>
-          <p:cNvPr id="23" name="Text 21"/>
-          <p:cNvSpPr/>
-          <p:nvPr/>
-        </p:nvSpPr>
-        <p:spPr>
-          <a:xfrm>
-            <a:off x="566928" y="6382512"/>
-            <a:ext cx="7315200" cy="219456"/>
-          </a:xfrm>
-          <a:prstGeom prst="rect">
-            <a:avLst/>
-          </a:prstGeom>
-          <a:noFill/>
-          <a:ln/>
-        </p:spPr>
-        <p:txBody>
-          <a:bodyPr wrap="square" lIns="0" tIns="0" rIns="0" bIns="0" rtlCol="0" anchor="ctr"/>
-          <a:lstStyle/>
-          <a:p>
-            <a:pPr indent="0" marL="0">
-              <a:buNone/>
-            </a:pPr>
-            <a:r>
-              <a:rPr lang="en-US" sz="800" dirty="0">
-                <a:solidFill>
-                  <a:srgbClr val="718096"/>
-                </a:solidFill>
-                <a:latin typeface="Pretendard" pitchFamily="34" charset="0"/>
-                <a:ea typeface="Pretendard" pitchFamily="34" charset="-122"/>
-                <a:cs typeface="Pretendard" pitchFamily="34" charset="-120"/>
-              </a:rPr>
               <a:t>크리딜   |   </a:t>
             </a:r>
             <a:endParaRPr lang="en-US" sz="800" dirty="0"/>
@@ -7485,7 +8854,7 @@
       </p:sp>
       <p:sp>
         <p:nvSpPr>
-          <p:cNvPr id="24" name="Text 22"/>
+          <p:cNvPr id="14" name="Text 12"/>
           <p:cNvSpPr/>
           <p:nvPr/>
         </p:nvSpPr>
@@ -7691,45 +9060,6 @@
           </a:p>
         </p:txBody>
       </p:sp>
-      <p:sp>
-        <p:nvSpPr>
-          <p:cNvPr id="6" name="Text 4"/>
-          <p:cNvSpPr/>
-          <p:nvPr/>
-        </p:nvSpPr>
-        <p:spPr>
-          <a:xfrm>
-            <a:off x="1133856" y="1005840"/>
-            <a:ext cx="10490911" cy="237744"/>
-          </a:xfrm>
-          <a:prstGeom prst="rect">
-            <a:avLst/>
-          </a:prstGeom>
-          <a:noFill/>
-          <a:ln/>
-        </p:spPr>
-        <p:txBody>
-          <a:bodyPr wrap="square" lIns="0" tIns="0" rIns="0" bIns="0" rtlCol="0" anchor="ctr"/>
-          <a:lstStyle/>
-          <a:p>
-            <a:pPr indent="0" marL="0">
-              <a:buNone/>
-            </a:pPr>
-            <a:r>
-              <a:rPr lang="en-US" sz="1100" dirty="0">
-                <a:solidFill>
-                  <a:srgbClr val="718096"/>
-                </a:solidFill>
-                <a:latin typeface="Pretendard" pitchFamily="34" charset="0"/>
-                <a:ea typeface="Pretendard" pitchFamily="34" charset="-122"/>
-                <a:cs typeface="Pretendard" pitchFamily="34" charset="-120"/>
-              </a:rPr>
-              <a:t>밸류업 시나리오 (AI 추정)</a:t>
-            </a:r>
-            <a:endParaRPr lang="en-US" sz="1100" dirty="0"/>
-          </a:p>
-        </p:txBody>
-      </p:sp>
       <p:graphicFrame>
         <p:nvGraphicFramePr>
           <p:cNvPr id="9" name="Table 0"/>
@@ -7745,7 +9075,7 @@
           </p:nvPr>
         </p:nvGraphicFramePr>
         <p:xfrm>
-          <a:off x="566928" y="4178808"/>
+          <a:off x="566928" y="4023360"/>
           <a:ext cx="11057839" cy="914400"/>
         </p:xfrm>
         <a:graphic>
@@ -8852,13 +10182,13 @@
       </p:graphicFrame>
       <p:sp>
         <p:nvSpPr>
-          <p:cNvPr id="8" name="Shape 5"/>
-          <p:cNvSpPr/>
-          <p:nvPr/>
-        </p:nvSpPr>
-        <p:spPr>
-          <a:xfrm>
-            <a:off x="566928" y="5349240"/>
+          <p:cNvPr id="7" name="Shape 4"/>
+          <p:cNvSpPr/>
+          <p:nvPr/>
+        </p:nvSpPr>
+        <p:spPr>
+          <a:xfrm>
+            <a:off x="566928" y="5193792"/>
             <a:ext cx="11057839" cy="804672"/>
           </a:xfrm>
           <a:prstGeom prst="roundRect">
@@ -8879,13 +10209,13 @@
       </p:sp>
       <p:sp>
         <p:nvSpPr>
-          <p:cNvPr id="9" name="Text 6"/>
-          <p:cNvSpPr/>
-          <p:nvPr/>
-        </p:nvSpPr>
-        <p:spPr>
-          <a:xfrm>
-            <a:off x="749808" y="5458968"/>
+          <p:cNvPr id="8" name="Text 5"/>
+          <p:cNvSpPr/>
+          <p:nvPr/>
+        </p:nvSpPr>
+        <p:spPr>
+          <a:xfrm>
+            <a:off x="749808" y="5303520"/>
             <a:ext cx="1691640" cy="256032"/>
           </a:xfrm>
           <a:prstGeom prst="rect">
@@ -8918,13 +10248,13 @@
       </p:sp>
       <p:sp>
         <p:nvSpPr>
-          <p:cNvPr id="10" name="Text 7"/>
-          <p:cNvSpPr/>
-          <p:nvPr/>
-        </p:nvSpPr>
-        <p:spPr>
-          <a:xfrm>
-            <a:off x="2487168" y="5422392"/>
+          <p:cNvPr id="9" name="Text 6"/>
+          <p:cNvSpPr/>
+          <p:nvPr/>
+        </p:nvSpPr>
+        <p:spPr>
+          <a:xfrm>
+            <a:off x="2487168" y="5266944"/>
             <a:ext cx="8954719" cy="658368"/>
           </a:xfrm>
           <a:prstGeom prst="rect">
@@ -8952,7 +10282,7 @@
                 <a:ea typeface="Pretendard" pitchFamily="34" charset="-122"/>
                 <a:cs typeface="Pretendard" pitchFamily="34" charset="-120"/>
               </a:rPr>
-              <a:t>{"ok":true,"mocked":true,"extractedFields":{"area_signal":"역삼","asset_type":"오피스빌딩","price_band":"300억","size_signal":"3000평(약 9917.4㎡)"},"extractedFacts":{"region":"역삼","exactAddressCandidate":"역삼동 742-1","assetType":"오피스빌딩","priceText":"300억","sizeText":"3000평(약 9917.4㎡)","currentUse":"오피스","currentUseSignal":"근린생활시설","leaseSignal":"임대중","vacancySignal":"공실없음","tenantNames":["쿠팡","네이버"],"unitRentTexts":["301호: 1500만"],"sellerMotivationText":"자산 효율화","brokerNotes":["초역세권 매물"]},"detectedSensitiveFields":["exact_address","tenant_name"],"ambiguousFields":[],"warnings":[],"areaSignal":"역삼","assetType":"오피스빌딩","priceBand":"300억","sizeSignal":"3000평(약 9917.4㎡)","dealType":"매각","buildingName":"역삼 센트럴타워","exactAddress":"역삼동 742-1","totalFloorArea":9917.3,"buildYear":2015,"currentUseSignal":"근린생활시설","vacancySignal":"공실 없음","fitSummary":"초역세권 근생 빌딩으로 시행/사옥 매입에 최적화","cautionSummary":"주요 임차 업종 만기 조율 필요","hiddenFields":["exact_address","seller_motivation"],"confidence":{"areaSignal":"confirmed","assetType":"confirmed","priceBand":"ai_hypothesis","fitSummary":"ai_hypothesis"},"missingData":["sizeSignal"],"boundaryNote":"본 자료는 실거래 통계 기반 참고치입니다.","buyerType":"법인 사옥형","budgetRange":{"min":50,"max":80,"display":"50억~80억"},"preferredRegions":["강남","성수"],"assetTypes":["꼬마빌딩","사옥용"],"purchasePurpose":"사옥용 매입","mustHave":["초역세권","주차"],"niceToHave":["테라스","루프탑"],"riskTolerance":"medium","financingNote":"자본금 50% 준비","missingQuestions":["구체적인 입주 시기가 언제인가요?","선호하는 수익률이 있나요?"],"privacyNotes":["연락처 비공개"],"fitReasons":["매수자 예산(50-80억)에 부합하는 매물입니다.","요청하신 성수/강남 권역에 해당합니다."],"cautionReasons":["요청한 용도와 달리 명도 협의가 다소 필요합니다."],"recommendedNextAction":"현장 답사 제안","kakaoMessage":"안녕하세요! 요청하신 조건에 부합하는 추천 매물이 있어 안내해 드립니다. 확인해보시고 피드백 부탁드립니다.","title":"강남 역삼역 초역세권 오피스 사옥용 빌딩 매각","shortSummary":"역삼역 도보 5분 거리의 준신축급 대형 오피스빌딩입니다.","dealPoints":["초역세권","사옥 최적"],"cautionPoints":["명도 조율 필요"],"hiddenInfoNotice":["보증금 및 지번은 인가 후 확인 가능"],"gateMessage":"G1 등급 등록이 필요합니다.","kakaoText":"강남 역삼역 오피스 빌딩 매각 안내입니다.","exactUnitCandidate":"101호","floor":"1층","areaSqmText":"150㎡","spaceType":"office","depositText":"5000만","monthlyRentText":"400만","maintenanceFeeText":"50만","availableFromText":"즉시입주","leaseTermMonthsText":"24","incentivesText":"렌트프리 2개월","restrictions":[],"landlordIdentity":"김성수","currentTenant":"스타트업","vacancyReason":"이전 확장","rentNegotiation":"협의 가능","region":"성수동","areaSqm":150,"deposit":5000,"monthlyRent":400,"maintenanceFee":50,"availableFrom":"즉시입주","leaseTermMonths":24,"incentives":{"rentFreeMonths":2,"interiorSupport":"일부 인테리어 지원","freeRentDetail":"렌트프리 2개월 지원"},"shortSummaryLease":"성수역 도보 5분 거리 1층 리테일 상가 매물입니다."}</a:t>
+              <a:t>{"ok":true,"mocked":true,"extractedFields":{"area_signal":"역삼","asset_type":"오피스빌딩","price_band":"300억","size_signal":"3000평(약 9917.4㎡)"},"extractedFacts":{"region":"역삼","exactAddressCandidate":"역삼동 742-1","assetType":"오피스빌딩","priceText":"300억","sizeText":"3000평(약 9917.4㎡)","currentUse":"오피스","currentUseSignal":"근린생활시설","leaseSignal":"임대중","vacancySignal":"공실없음","tenantNames":["쿠팡","네이버"],"unitRentTexts":["301호: 1500만"],"sellerMotivationText":"자산 효율화","brokerNotes":["초역세권 매물"]},"detectedSensitiveFields":["exact_address","tenant_name"],"ambiguousFields":[],"warnings":[],"areaSignal":"역삼","assetType":"오피스빌딩","priceBand":"300억","sizeSignal":"3000평(약 9917.4㎡)","dealType":"매각","buildingName":"역삼 센트럴타워","exactAddress":"역삼동 742-1","totalFloorArea":9917.3,"buildYear":2015,"currentUseSignal":"근린생활시설","vacancySignal":"공실 없음","fitSummary":"초역세권 근생 빌딩으로 시행/사옥 매입에 최적화","cautionSummary":"주요 임차인 만기 조율 필요","hiddenFields":["exact_address","seller_motivation"],"confidence":{"areaSignal":"confirmed","assetType":"confirmed","priceBand":"ai_hypothesis","fitSummary":"ai_hypothesis"},"missingData":["sizeSignal"],"boundaryNote":"본 자료는 실거래 통계 기반 참고치입니다.","buyerType":"법인 사옥형","budgetRange":{"min":50,"max":80,"display":"50억~80억"},"preferredRegions":["강남","성수"],"assetTypes":["꼬마빌딩","사옥용"],"purchasePurpose":"사옥용 매입","mustHave":["초역세권","주차"],"niceToHave":["테라스","루프탑"],"riskTolerance":"medium","financingNote":"자본금 50% 준비","missingQuestions":["구체적인 입주 시기가 언제인가요?","선호하는 수익률이 있나요?"],"privacyNotes":["연락처 비공개"],"fitReasons":["매수자 예산(50-80억)에 부합하는 매물입니다.","요청하신 성수/강남 권역에 해당합니다."],"cautionReasons":["요청한 용도와 달리 명도 협의가 다소 필요합니다."],"recommendedNextAction":"현장 답사 제안","kakaoMessage":"안녕하세요! 요청하신 조건에 부합하는 추천 매물이 있어 안내해 드립니다. 확인해보시고 피드백 부탁드립니다.","title":"강남 역삼역 초역세권 오피스 사옥용 빌딩 매각","shortSummary":"역삼역 도보 5분 거리의 준신축급 대형 오피스빌딩입니다.","dealPoints":["초역세권","사옥 최적"],"cautionPoints":["명도 조율 필요"],"hiddenInfoNotice":["보증금 및 지번은 인가 후 확인 가능"],"gateMessage":"G1 등급 등록이 필요합니다.","kakaoText":"강남 역삼역 오피스 빌딩 매각 안내입니다.","exactUnitCandidate":"101호","floor":"1층","areaSqmText":"150㎡","spaceType":"office","depositText":"5000만","monthlyRentText":"400만","maintenanceFeeText":"50만","availableFromText":"즉시입주","leaseTermMonthsText":"24","incentivesText":"렌트프리 2개월","restrictions":[],"landlordIdentity":"김성수","currentTenant":"스타트업","vacancyReason":"이전 확장","rentNegotiation":"협의 가능","region":"성수동","areaSqm":150,"deposit":5000,"monthlyRent":400,"maintenanceFee":50,"availableFrom":"즉시입주","leaseTermMonths":24,"incentives":{"rentFreeMonths":2,"interiorSupport":"일부 인테리어 지원","freeRentDetail":"렌트프리 2개월 지원"},"shortSummaryLease":"성수역 도보 5분 거리 1층 리테일 상가 매물입니다."} ### 밸류업 시나리오 (AI 추정)</a:t>
             </a:r>
             <a:endParaRPr lang="en-US" sz="1100" dirty="0"/>
           </a:p>
@@ -8960,7 +10290,7 @@
       </p:sp>
       <p:sp>
         <p:nvSpPr>
-          <p:cNvPr id="11" name="Text 8"/>
+          <p:cNvPr id="10" name="Text 7"/>
           <p:cNvSpPr/>
           <p:nvPr/>
         </p:nvSpPr>
@@ -8999,7 +10329,7 @@
       </p:sp>
       <p:sp>
         <p:nvSpPr>
-          <p:cNvPr id="12" name="Text 9"/>
+          <p:cNvPr id="11" name="Text 8"/>
           <p:cNvSpPr/>
           <p:nvPr/>
         </p:nvSpPr>
@@ -9214,11 +10544,11 @@
         <p:spPr>
           <a:xfrm>
             <a:off x="566928" y="1572768"/>
-            <a:ext cx="2490140" cy="3200400"/>
+            <a:ext cx="11057839" cy="3200400"/>
           </a:xfrm>
           <a:prstGeom prst="roundRect">
             <a:avLst>
-              <a:gd name="adj" fmla="val 2203"/>
+              <a:gd name="adj" fmla="val 1714"/>
             </a:avLst>
           </a:prstGeom>
           <a:solidFill>
@@ -9241,7 +10571,7 @@
         <p:spPr>
           <a:xfrm>
             <a:off x="786384" y="1792224"/>
-            <a:ext cx="384048" cy="384048"/>
+            <a:ext cx="438912" cy="438912"/>
           </a:xfrm>
           <a:prstGeom prst="ellipse">
             <a:avLst/>
@@ -9261,7 +10591,7 @@
         <p:spPr>
           <a:xfrm>
             <a:off x="786384" y="1792224"/>
-            <a:ext cx="384048" cy="384048"/>
+            <a:ext cx="438912" cy="438912"/>
           </a:xfrm>
           <a:prstGeom prst="rect">
             <a:avLst/>
@@ -9277,7 +10607,7 @@
               <a:buNone/>
             </a:pPr>
             <a:r>
-              <a:rPr lang="en-US" sz="1300" b="1" dirty="0">
+              <a:rPr lang="en-US" sz="1400" b="1" dirty="0">
                 <a:solidFill>
                   <a:srgbClr val="FFFFFF"/>
                 </a:solidFill>
@@ -9285,9 +10615,9 @@
                 <a:ea typeface="Arial" pitchFamily="34" charset="-122"/>
                 <a:cs typeface="Arial" pitchFamily="34" charset="-120"/>
               </a:rPr>
-              <a:t>STEP 1</a:t>
-            </a:r>
-            <a:endParaRPr lang="en-US" sz="1300" dirty="0"/>
+              <a:t>01</a:t>
+            </a:r>
+            <a:endParaRPr lang="en-US" sz="1400" dirty="0"/>
           </a:p>
         </p:txBody>
       </p:sp>
@@ -9300,7 +10630,7 @@
         <p:spPr>
           <a:xfrm>
             <a:off x="786384" y="2304288"/>
-            <a:ext cx="2051228" cy="365760"/>
+            <a:ext cx="10618927" cy="365760"/>
           </a:xfrm>
           <a:prstGeom prst="rect">
             <a:avLst/>
@@ -9324,7 +10654,7 @@
                 <a:ea typeface="Pretendard" pitchFamily="34" charset="-122"/>
                 <a:cs typeface="Pretendard" pitchFamily="34" charset="-120"/>
               </a:rPr>
-              <a:t>초기 관심 표명 → 담당자 연락</a:t>
+              <a:t>1단계</a:t>
             </a:r>
             <a:endParaRPr lang="en-US" sz="1600" dirty="0"/>
           </a:p>
@@ -9339,7 +10669,7 @@
         <p:spPr>
           <a:xfrm>
             <a:off x="786384" y="2761488"/>
-            <a:ext cx="2051228" cy="1828800"/>
+            <a:ext cx="10618927" cy="1828800"/>
           </a:xfrm>
           <a:prstGeom prst="rect">
             <a:avLst/>
@@ -9354,147 +10684,8 @@
             <a:pPr indent="0" marL="0">
               <a:buNone/>
             </a:pPr>
-            <a:endParaRPr lang="en-US" sz="1100" dirty="0"/>
-          </a:p>
-        </p:txBody>
-      </p:sp>
-      <p:sp>
-        <p:nvSpPr>
-          <p:cNvPr id="11" name="Shape 9"/>
-          <p:cNvSpPr/>
-          <p:nvPr/>
-        </p:nvSpPr>
-        <p:spPr>
-          <a:xfrm>
-            <a:off x="3148508" y="3035808"/>
-            <a:ext cx="182880" cy="274320"/>
-          </a:xfrm>
-          <a:prstGeom prst="rightArrow">
-            <a:avLst/>
-          </a:prstGeom>
-          <a:solidFill>
-            <a:srgbClr val="CBD5E0"/>
-          </a:solidFill>
-          <a:ln w="6350">
-            <a:solidFill>
-              <a:srgbClr val="718096"/>
-            </a:solidFill>
-            <a:prstDash val="solid"/>
-          </a:ln>
-        </p:spPr>
-      </p:sp>
-      <p:sp>
-        <p:nvSpPr>
-          <p:cNvPr id="12" name="Shape 10"/>
-          <p:cNvSpPr/>
-          <p:nvPr/>
-        </p:nvSpPr>
-        <p:spPr>
-          <a:xfrm>
-            <a:off x="3422828" y="1572768"/>
-            <a:ext cx="2490140" cy="3200400"/>
-          </a:xfrm>
-          <a:prstGeom prst="roundRect">
-            <a:avLst>
-              <a:gd name="adj" fmla="val 2203"/>
-            </a:avLst>
-          </a:prstGeom>
-          <a:solidFill>
-            <a:srgbClr val="F7FAFC"/>
-          </a:solidFill>
-          <a:ln w="6350">
-            <a:solidFill>
-              <a:srgbClr val="CBD5E0"/>
-            </a:solidFill>
-            <a:prstDash val="solid"/>
-          </a:ln>
-        </p:spPr>
-      </p:sp>
-      <p:sp>
-        <p:nvSpPr>
-          <p:cNvPr id="13" name="Shape 11"/>
-          <p:cNvSpPr/>
-          <p:nvPr/>
-        </p:nvSpPr>
-        <p:spPr>
-          <a:xfrm>
-            <a:off x="3642284" y="1792224"/>
-            <a:ext cx="384048" cy="384048"/>
-          </a:xfrm>
-          <a:prstGeom prst="ellipse">
-            <a:avLst/>
-          </a:prstGeom>
-          <a:solidFill>
-            <a:srgbClr val="B98A2E"/>
-          </a:solidFill>
-          <a:ln/>
-        </p:spPr>
-      </p:sp>
-      <p:sp>
-        <p:nvSpPr>
-          <p:cNvPr id="14" name="Text 12"/>
-          <p:cNvSpPr/>
-          <p:nvPr/>
-        </p:nvSpPr>
-        <p:spPr>
-          <a:xfrm>
-            <a:off x="3642284" y="1792224"/>
-            <a:ext cx="384048" cy="384048"/>
-          </a:xfrm>
-          <a:prstGeom prst="rect">
-            <a:avLst/>
-          </a:prstGeom>
-          <a:noFill/>
-          <a:ln/>
-        </p:spPr>
-        <p:txBody>
-          <a:bodyPr wrap="square" lIns="0" tIns="0" rIns="0" bIns="0" rtlCol="0" anchor="ctr"/>
-          <a:lstStyle/>
-          <a:p>
-            <a:pPr algn="ctr" indent="0" marL="0">
-              <a:buNone/>
-            </a:pPr>
-            <a:r>
-              <a:rPr lang="en-US" sz="1300" b="1" dirty="0">
-                <a:solidFill>
-                  <a:srgbClr val="FFFFFF"/>
-                </a:solidFill>
-                <a:latin typeface="Arial" pitchFamily="34" charset="0"/>
-                <a:ea typeface="Arial" pitchFamily="34" charset="-122"/>
-                <a:cs typeface="Arial" pitchFamily="34" charset="-120"/>
-              </a:rPr>
-              <a:t>STEP 2</a:t>
-            </a:r>
-            <a:endParaRPr lang="en-US" sz="1300" dirty="0"/>
-          </a:p>
-        </p:txBody>
-      </p:sp>
-      <p:sp>
-        <p:nvSpPr>
-          <p:cNvPr id="15" name="Text 13"/>
-          <p:cNvSpPr/>
-          <p:nvPr/>
-        </p:nvSpPr>
-        <p:spPr>
-          <a:xfrm>
-            <a:off x="3642284" y="2304288"/>
-            <a:ext cx="2051228" cy="365760"/>
-          </a:xfrm>
-          <a:prstGeom prst="rect">
-            <a:avLst/>
-          </a:prstGeom>
-          <a:noFill/>
-          <a:ln/>
-        </p:spPr>
-        <p:txBody>
-          <a:bodyPr wrap="square" rtlCol="0" anchor="ctr"/>
-          <a:lstStyle/>
-          <a:p>
-            <a:pPr indent="0" marL="0">
-              <a:buNone/>
-            </a:pPr>
-            <a:r>
-              <a:rPr lang="en-US" sz="1600" b="1" dirty="0">
+            <a:r>
+              <a:rPr lang="en-US" sz="1100" dirty="0">
                 <a:solidFill>
                   <a:srgbClr val="10161F"/>
                 </a:solidFill>
@@ -9502,177 +10693,16 @@
                 <a:ea typeface="Pretendard" pitchFamily="34" charset="-122"/>
                 <a:cs typeface="Pretendard" pitchFamily="34" charset="-120"/>
               </a:rPr>
-              <a:t>NDA 체결 → 임차인 정보 및 임대차계약서 제공</a:t>
-            </a:r>
-            <a:endParaRPr lang="en-US" sz="1600" dirty="0"/>
-          </a:p>
-        </p:txBody>
-      </p:sp>
-      <p:sp>
-        <p:nvSpPr>
-          <p:cNvPr id="16" name="Text 14"/>
-          <p:cNvSpPr/>
-          <p:nvPr/>
-        </p:nvSpPr>
-        <p:spPr>
-          <a:xfrm>
-            <a:off x="3642284" y="2761488"/>
-            <a:ext cx="2051228" cy="1828800"/>
-          </a:xfrm>
-          <a:prstGeom prst="rect">
-            <a:avLst/>
-          </a:prstGeom>
-          <a:noFill/>
-          <a:ln/>
-        </p:spPr>
-        <p:txBody>
-          <a:bodyPr wrap="square" rtlCol="0" anchor="t"/>
-          <a:lstStyle/>
+              <a:t>{"ok"</a:t>
+            </a:r>
+            <a:endParaRPr lang="en-US" sz="1100" dirty="0"/>
+          </a:p>
           <a:p>
             <a:pPr indent="0" marL="0">
               <a:buNone/>
             </a:pPr>
-            <a:endParaRPr lang="en-US" sz="1100" dirty="0"/>
-          </a:p>
-        </p:txBody>
-      </p:sp>
-      <p:sp>
-        <p:nvSpPr>
-          <p:cNvPr id="17" name="Shape 15"/>
-          <p:cNvSpPr/>
-          <p:nvPr/>
-        </p:nvSpPr>
-        <p:spPr>
-          <a:xfrm>
-            <a:off x="6004408" y="3035808"/>
-            <a:ext cx="182880" cy="274320"/>
-          </a:xfrm>
-          <a:prstGeom prst="rightArrow">
-            <a:avLst/>
-          </a:prstGeom>
-          <a:solidFill>
-            <a:srgbClr val="CBD5E0"/>
-          </a:solidFill>
-          <a:ln w="6350">
-            <a:solidFill>
-              <a:srgbClr val="718096"/>
-            </a:solidFill>
-            <a:prstDash val="solid"/>
-          </a:ln>
-        </p:spPr>
-      </p:sp>
-      <p:sp>
-        <p:nvSpPr>
-          <p:cNvPr id="18" name="Shape 16"/>
-          <p:cNvSpPr/>
-          <p:nvPr/>
-        </p:nvSpPr>
-        <p:spPr>
-          <a:xfrm>
-            <a:off x="6278728" y="1572768"/>
-            <a:ext cx="2490140" cy="3200400"/>
-          </a:xfrm>
-          <a:prstGeom prst="roundRect">
-            <a:avLst>
-              <a:gd name="adj" fmla="val 2203"/>
-            </a:avLst>
-          </a:prstGeom>
-          <a:solidFill>
-            <a:srgbClr val="F7FAFC"/>
-          </a:solidFill>
-          <a:ln w="6350">
-            <a:solidFill>
-              <a:srgbClr val="CBD5E0"/>
-            </a:solidFill>
-            <a:prstDash val="solid"/>
-          </a:ln>
-        </p:spPr>
-      </p:sp>
-      <p:sp>
-        <p:nvSpPr>
-          <p:cNvPr id="19" name="Shape 17"/>
-          <p:cNvSpPr/>
-          <p:nvPr/>
-        </p:nvSpPr>
-        <p:spPr>
-          <a:xfrm>
-            <a:off x="6498184" y="1792224"/>
-            <a:ext cx="384048" cy="384048"/>
-          </a:xfrm>
-          <a:prstGeom prst="ellipse">
-            <a:avLst/>
-          </a:prstGeom>
-          <a:solidFill>
-            <a:srgbClr val="B98A2E"/>
-          </a:solidFill>
-          <a:ln/>
-        </p:spPr>
-      </p:sp>
-      <p:sp>
-        <p:nvSpPr>
-          <p:cNvPr id="20" name="Text 18"/>
-          <p:cNvSpPr/>
-          <p:nvPr/>
-        </p:nvSpPr>
-        <p:spPr>
-          <a:xfrm>
-            <a:off x="6498184" y="1792224"/>
-            <a:ext cx="384048" cy="384048"/>
-          </a:xfrm>
-          <a:prstGeom prst="rect">
-            <a:avLst/>
-          </a:prstGeom>
-          <a:noFill/>
-          <a:ln/>
-        </p:spPr>
-        <p:txBody>
-          <a:bodyPr wrap="square" lIns="0" tIns="0" rIns="0" bIns="0" rtlCol="0" anchor="ctr"/>
-          <a:lstStyle/>
-          <a:p>
-            <a:pPr algn="ctr" indent="0" marL="0">
-              <a:buNone/>
-            </a:pPr>
-            <a:r>
-              <a:rPr lang="en-US" sz="1300" b="1" dirty="0">
-                <a:solidFill>
-                  <a:srgbClr val="FFFFFF"/>
-                </a:solidFill>
-                <a:latin typeface="Arial" pitchFamily="34" charset="0"/>
-                <a:ea typeface="Arial" pitchFamily="34" charset="-122"/>
-                <a:cs typeface="Arial" pitchFamily="34" charset="-120"/>
-              </a:rPr>
-              <a:t>STEP 3</a:t>
-            </a:r>
-            <a:endParaRPr lang="en-US" sz="1300" dirty="0"/>
-          </a:p>
-        </p:txBody>
-      </p:sp>
-      <p:sp>
-        <p:nvSpPr>
-          <p:cNvPr id="21" name="Text 19"/>
-          <p:cNvSpPr/>
-          <p:nvPr/>
-        </p:nvSpPr>
-        <p:spPr>
-          <a:xfrm>
-            <a:off x="6498184" y="2304288"/>
-            <a:ext cx="2051228" cy="365760"/>
-          </a:xfrm>
-          <a:prstGeom prst="rect">
-            <a:avLst/>
-          </a:prstGeom>
-          <a:noFill/>
-          <a:ln/>
-        </p:spPr>
-        <p:txBody>
-          <a:bodyPr wrap="square" rtlCol="0" anchor="ctr"/>
-          <a:lstStyle/>
-          <a:p>
-            <a:pPr indent="0" marL="0">
-              <a:buNone/>
-            </a:pPr>
-            <a:r>
-              <a:rPr lang="en-US" sz="1600" b="1" dirty="0">
+            <a:r>
+              <a:rPr lang="en-US" sz="1100" dirty="0">
                 <a:solidFill>
                   <a:srgbClr val="10161F"/>
                 </a:solidFill>
@@ -9680,251 +10710,45 @@
                 <a:ea typeface="Pretendard" pitchFamily="34" charset="-122"/>
                 <a:cs typeface="Pretendard" pitchFamily="34" charset="-120"/>
               </a:rPr>
-              <a:t>현장 실사 일정 조율 → 건물 컨디션 및 설비 직접 확인</a:t>
-            </a:r>
-            <a:endParaRPr lang="en-US" sz="1600" dirty="0"/>
-          </a:p>
-        </p:txBody>
-      </p:sp>
-      <p:sp>
-        <p:nvSpPr>
-          <p:cNvPr id="22" name="Text 20"/>
-          <p:cNvSpPr/>
-          <p:nvPr/>
-        </p:nvSpPr>
-        <p:spPr>
-          <a:xfrm>
-            <a:off x="6498184" y="2761488"/>
-            <a:ext cx="2051228" cy="1828800"/>
-          </a:xfrm>
-          <a:prstGeom prst="rect">
-            <a:avLst/>
-          </a:prstGeom>
-          <a:noFill/>
-          <a:ln/>
-        </p:spPr>
-        <p:txBody>
-          <a:bodyPr wrap="square" rtlCol="0" anchor="t"/>
+              <a:t>true,"mocked":true,"extractedFields":{"area_signal":"역삼","asset_type":"오피스빌딩","price_band":"300억","size_signal":"3000평(약 9917.4㎡)"},"extractedFacts":{"region":"역삼","exactAddressCandidate":"역삼동 742-1","assetType":"오피스빌딩","priceText":"300억","sizeText":"3000평(약 9917.4㎡)","currentUse":"오피스","currentUseSignal":"근린생활시설","leaseSignal":"임대중","vacancySignal":"공실없음","tenantNames":["쿠팡","네이버"],"unitRentTexts":["301호: 1500만"],"sellerMotivationText":"자산 효율화","brokerNotes":["초역세권 매물"]},"detectedSensitiveFields":["exact_address","tenant_name"],"ambiguousFields":[],"warnings":[],"areaSignal":"역삼","assetType":"오피스빌딩","priceBand":"300억","sizeSignal":"3000평(약 9917.4㎡)","dealType":"매각","buildingName":"역삼 센트럴타워","exactAddress":"역삼동 742-1","totalFloorArea":9917.3,"buildYear":2015,"currentUseSignal":"근린생활시설","vacancySignal":"공실 없음","fitSummary":"초역세권 근생 빌딩으로 시행/사옥 매입에 최적화","cautionSummary":"주요 임차인 만기 조율 필요","hiddenFields":["exact_address","seller_motivation"],"confidence":{"areaSignal":"confirmed","assetType":"confirmed","priceBand":"ai_hypothesis","fitSummary":"ai_hypothesis"},"missingData":["sizeSignal"],"boundaryNote":"본 자료는 실거래 통계 기반 참고치입니다.","buyerType":"법인 사옥형","budgetRange":{"min":50,"max":80,"display":"50억~80억"},"preferredRegions":["강남","성수"],"assetTypes":["꼬마빌딩","사옥용"],"purchasePurpose":"사옥용 매입","mustHave":["초역세권","주차"],"niceToHave":["테라스","루프탑"],"riskTolerance":"medium","financingNote":"자본금 50% 준비","missingQuestions":["구체적인 입주 시기가 언제인가요?","선호하는 수익률이 있나요?"],"privacyNotes":["연락처 비공개"],"fitReasons":["매수자 예산(50-80억)에 부합하는 매물입니다.","요청하신 성수/강남 권역에 해당합니다."],"cautionReasons":["요청한 용도와 달리 명도 협의가 다소 필요합니다."],"recommendedNextAction":"현장 답사 제안","kakaoMessage":"안녕하세요! 요청하신 조건에 부합하는 추천 매물이 있어 안내해 드립니다. 확인해보시고 피드백 부탁드립니다.","title":"강남 역삼역 초역세권 오피스 사옥용 빌딩 매각","shortSummary":"역삼역 도보 5분 거리의 준신축급 대형 오피스빌딩입니다.","dealPoints":["초역세권","사옥 최적"],"cautionPoints":["명도 조율 필요"],"hiddenInfoNotice":["보증금 및 지번은 인가 후 확인 가능"],"gateMessage":"G1 등급 등록이 필요합니다.","kakaoText":"강남 역삼역 오피스 빌딩 매각 안내입니다.","exactUnitCandidate":"101호","floor":"1층","areaSqmText":"150㎡","spaceType":"office","depositText":"5000만","monthlyRentText":"400만","maintenanceFeeText":"50만","availableFromText":"즉시입주","leaseTermMonthsText":"24","incentivesText":"렌트프리 2개월","restrictions":[],"landlordIdentity":"김성수","currentTenant":"스타트업","vacancyReason":"이전 확장","rentNegotiation":"협의 가능","region":"성수동","areaSqm":150,"deposit":5000,"monthlyRent":400,"maintenanceFee":50,"availableFrom":"즉시입주","leaseTermMonths":24,"incentives":{"rentFreeMonths":2,"interiorSupport":"일부 인테리어 지원","freeRentDetail":"렌트프리 2개월 지원"},"shortSummaryLease":"성수역 도보 5분 거리 1층 리테일 상가 매물입니다."}</a:t>
+            </a:r>
+            <a:endParaRPr lang="en-US" sz="1100" dirty="0"/>
+          </a:p>
+        </p:txBody>
+      </p:sp>
+      <p:sp>
+        <p:nvSpPr>
+          <p:cNvPr id="11" name="Text 9"/>
+          <p:cNvSpPr/>
+          <p:nvPr/>
+        </p:nvSpPr>
+        <p:spPr>
+          <a:xfrm>
+            <a:off x="566928" y="6382512"/>
+            <a:ext cx="7315200" cy="219456"/>
+          </a:xfrm>
+          <a:prstGeom prst="rect">
+            <a:avLst/>
+          </a:prstGeom>
+          <a:noFill/>
+          <a:ln/>
+        </p:spPr>
+        <p:txBody>
+          <a:bodyPr wrap="square" lIns="0" tIns="0" rIns="0" bIns="0" rtlCol="0" anchor="ctr"/>
           <a:lstStyle/>
           <a:p>
             <a:pPr indent="0" marL="0">
               <a:buNone/>
             </a:pPr>
-            <a:endParaRPr lang="en-US" sz="1100" dirty="0"/>
-          </a:p>
-        </p:txBody>
-      </p:sp>
-      <p:sp>
-        <p:nvSpPr>
-          <p:cNvPr id="23" name="Shape 21"/>
-          <p:cNvSpPr/>
-          <p:nvPr/>
-        </p:nvSpPr>
-        <p:spPr>
-          <a:xfrm>
-            <a:off x="8860307" y="3035808"/>
-            <a:ext cx="182880" cy="274320"/>
-          </a:xfrm>
-          <a:prstGeom prst="rightArrow">
-            <a:avLst/>
-          </a:prstGeom>
-          <a:solidFill>
-            <a:srgbClr val="CBD5E0"/>
-          </a:solidFill>
-          <a:ln w="6350">
-            <a:solidFill>
-              <a:srgbClr val="718096"/>
-            </a:solidFill>
-            <a:prstDash val="solid"/>
-          </a:ln>
-        </p:spPr>
-      </p:sp>
-      <p:sp>
-        <p:nvSpPr>
-          <p:cNvPr id="24" name="Shape 22"/>
-          <p:cNvSpPr/>
-          <p:nvPr/>
-        </p:nvSpPr>
-        <p:spPr>
-          <a:xfrm>
-            <a:off x="9134627" y="1572768"/>
-            <a:ext cx="2490140" cy="3200400"/>
-          </a:xfrm>
-          <a:prstGeom prst="roundRect">
-            <a:avLst>
-              <a:gd name="adj" fmla="val 2203"/>
-            </a:avLst>
-          </a:prstGeom>
-          <a:solidFill>
-            <a:srgbClr val="F7FAFC"/>
-          </a:solidFill>
-          <a:ln w="6350">
-            <a:solidFill>
-              <a:srgbClr val="CBD5E0"/>
-            </a:solidFill>
-            <a:prstDash val="solid"/>
-          </a:ln>
-        </p:spPr>
-      </p:sp>
-      <p:sp>
-        <p:nvSpPr>
-          <p:cNvPr id="25" name="Shape 23"/>
-          <p:cNvSpPr/>
-          <p:nvPr/>
-        </p:nvSpPr>
-        <p:spPr>
-          <a:xfrm>
-            <a:off x="9354083" y="1792224"/>
-            <a:ext cx="384048" cy="384048"/>
-          </a:xfrm>
-          <a:prstGeom prst="ellipse">
-            <a:avLst/>
-          </a:prstGeom>
-          <a:solidFill>
-            <a:srgbClr val="B98A2E"/>
-          </a:solidFill>
-          <a:ln/>
-        </p:spPr>
-      </p:sp>
-      <p:sp>
-        <p:nvSpPr>
-          <p:cNvPr id="26" name="Text 24"/>
-          <p:cNvSpPr/>
-          <p:nvPr/>
-        </p:nvSpPr>
-        <p:spPr>
-          <a:xfrm>
-            <a:off x="9354083" y="1792224"/>
-            <a:ext cx="384048" cy="384048"/>
-          </a:xfrm>
-          <a:prstGeom prst="rect">
-            <a:avLst/>
-          </a:prstGeom>
-          <a:noFill/>
-          <a:ln/>
-        </p:spPr>
-        <p:txBody>
-          <a:bodyPr wrap="square" lIns="0" tIns="0" rIns="0" bIns="0" rtlCol="0" anchor="ctr"/>
-          <a:lstStyle/>
-          <a:p>
-            <a:pPr algn="ctr" indent="0" marL="0">
-              <a:buNone/>
-            </a:pPr>
-            <a:r>
-              <a:rPr lang="en-US" sz="1300" b="1" dirty="0">
-                <a:solidFill>
-                  <a:srgbClr val="FFFFFF"/>
-                </a:solidFill>
-                <a:latin typeface="Arial" pitchFamily="34" charset="0"/>
-                <a:ea typeface="Arial" pitchFamily="34" charset="-122"/>
-                <a:cs typeface="Arial" pitchFamily="34" charset="-120"/>
-              </a:rPr>
-              <a:t>STEP 4</a:t>
-            </a:r>
-            <a:endParaRPr lang="en-US" sz="1300" dirty="0"/>
-          </a:p>
-        </p:txBody>
-      </p:sp>
-      <p:sp>
-        <p:nvSpPr>
-          <p:cNvPr id="27" name="Text 25"/>
-          <p:cNvSpPr/>
-          <p:nvPr/>
-        </p:nvSpPr>
-        <p:spPr>
-          <a:xfrm>
-            <a:off x="9354083" y="2304288"/>
-            <a:ext cx="2051228" cy="365760"/>
-          </a:xfrm>
-          <a:prstGeom prst="rect">
-            <a:avLst/>
-          </a:prstGeom>
-          <a:noFill/>
-          <a:ln/>
-        </p:spPr>
-        <p:txBody>
-          <a:bodyPr wrap="square" rtlCol="0" anchor="ctr"/>
-          <a:lstStyle/>
-          <a:p>
-            <a:pPr indent="0" marL="0">
-              <a:buNone/>
-            </a:pPr>
-            <a:r>
-              <a:rPr lang="en-US" sz="1600" b="1" dirty="0">
-                <a:solidFill>
-                  <a:srgbClr val="10161F"/>
+            <a:r>
+              <a:rPr lang="en-US" sz="800" dirty="0">
+                <a:solidFill>
+                  <a:srgbClr val="718096"/>
                 </a:solidFill>
                 <a:latin typeface="Pretendard" pitchFamily="34" charset="0"/>
                 <a:ea typeface="Pretendard" pitchFamily="34" charset="-122"/>
                 <a:cs typeface="Pretendard" pitchFamily="34" charset="-120"/>
               </a:rPr>
-              <a:t>LOI(투자의향서) 제출 → 가격 협의 개시</a:t>
-            </a:r>
-            <a:endParaRPr lang="en-US" sz="1600" dirty="0"/>
-          </a:p>
-        </p:txBody>
-      </p:sp>
-      <p:sp>
-        <p:nvSpPr>
-          <p:cNvPr id="28" name="Text 26"/>
-          <p:cNvSpPr/>
-          <p:nvPr/>
-        </p:nvSpPr>
-        <p:spPr>
-          <a:xfrm>
-            <a:off x="9354083" y="2761488"/>
-            <a:ext cx="2051228" cy="1828800"/>
-          </a:xfrm>
-          <a:prstGeom prst="rect">
-            <a:avLst/>
-          </a:prstGeom>
-          <a:noFill/>
-          <a:ln/>
-        </p:spPr>
-        <p:txBody>
-          <a:bodyPr wrap="square" rtlCol="0" anchor="t"/>
-          <a:lstStyle/>
-          <a:p>
-            <a:pPr indent="0" marL="0">
-              <a:buNone/>
-            </a:pPr>
-            <a:endParaRPr lang="en-US" sz="1100" dirty="0"/>
-          </a:p>
-        </p:txBody>
-      </p:sp>
-      <p:sp>
-        <p:nvSpPr>
-          <p:cNvPr id="29" name="Text 27"/>
-          <p:cNvSpPr/>
-          <p:nvPr/>
-        </p:nvSpPr>
-        <p:spPr>
-          <a:xfrm>
-            <a:off x="566928" y="6382512"/>
-            <a:ext cx="7315200" cy="219456"/>
-          </a:xfrm>
-          <a:prstGeom prst="rect">
-            <a:avLst/>
-          </a:prstGeom>
-          <a:noFill/>
-          <a:ln/>
-        </p:spPr>
-        <p:txBody>
-          <a:bodyPr wrap="square" lIns="0" tIns="0" rIns="0" bIns="0" rtlCol="0" anchor="ctr"/>
-          <a:lstStyle/>
-          <a:p>
-            <a:pPr indent="0" marL="0">
-              <a:buNone/>
-            </a:pPr>
-            <a:r>
-              <a:rPr lang="en-US" sz="800" dirty="0">
-                <a:solidFill>
-                  <a:srgbClr val="718096"/>
-                </a:solidFill>
-                <a:latin typeface="Pretendard" pitchFamily="34" charset="0"/>
-                <a:ea typeface="Pretendard" pitchFamily="34" charset="-122"/>
-                <a:cs typeface="Pretendard" pitchFamily="34" charset="-120"/>
-              </a:rPr>
               <a:t>크리딜   |   </a:t>
             </a:r>
             <a:endParaRPr lang="en-US" sz="800" dirty="0"/>
@@ -9933,7 +10757,7 @@
       </p:sp>
       <p:sp>
         <p:nvSpPr>
-          <p:cNvPr id="30" name="Text 28"/>
+          <p:cNvPr id="12" name="Text 10"/>
           <p:cNvSpPr/>
           <p:nvPr/>
         </p:nvSpPr>

--- a/docs/test/stress/e2e-outputs/trading_case15_jongro_family_basic.pptx
+++ b/docs/test/stress/e2e-outputs/trading_case15_jongro_family_basic.pptx
@@ -5596,7 +5596,7 @@
                 <a:ea typeface="Pretendard" pitchFamily="34" charset="-122"/>
                 <a:cs typeface="Pretendard" pitchFamily="34" charset="-120"/>
               </a:rPr>
-              <a:t>주요 용도</a:t>
+              <a:t>{"ok"</a:t>
             </a:r>
             <a:endParaRPr lang="en-US" sz="1400" dirty="0"/>
           </a:p>
@@ -5638,7 +5638,7 @@
                 <a:ea typeface="Pretendard" pitchFamily="34" charset="-122"/>
                 <a:cs typeface="Pretendard" pitchFamily="34" charset="-120"/>
               </a:rPr>
-              <a:t>확인 필요</a:t>
+              <a:t>true,"mocked":true,"extractedFields":{"area_signal":"역삼","asset_type":"오피스빌딩","price_band":"300억","size_signal":"3000평(약 9917.4㎡)"},"extractedFacts":{"region":"역삼","exactAddressCandidate":"역삼동 742-1","assetType":"오피스빌딩","priceText":"300억","sizeText":"3000평(약 9917.4㎡)","currentUse":"오피스","currentUseSignal":"근린생활시설","leaseSignal":"임대중","vacancySignal":"공실없음","tenantNames":"쿠팡","네이버","unitRentTexts":"301호: 1500만","sellerMotivationText":"자산 효율화","brokerNotes":"초역세권 매물"},"detectedSensitiveFields":"exact_address","tenant_name","ambiguousFields":,"warnings":,"areaSignal":"역삼","assetType":"오피스빌딩","priceBand":"300억","sizeSignal":"3000평(약 9917.4㎡)","dealType":"매각","buildingName":"역삼 센트럴타워","exactAddress":"역삼동 742-1","totalFloorArea":9917.3,"buildYear":2015,"currentUseSignal":"근린생활시설","vacancySignal":"공실 없음","fitSummary":"초역세권 근생 빌딩으로 시행/사옥 매입에 최적화","cautionSummary":"주요 임차인 만기 조율 필요","hiddenFields":"exact_address","seller_motivation","confidence":{"areaSignal":"confirmed","assetType":"confirmed","priceBand":"ai_hypothesis","fitSummary":"ai_hypothesis"},"missingData":"sizeSignal","boundaryNote":"본 자료는 실거래 통계 기반 참고치입니다.","buyerType":"법인 사옥형","budgetRange":{"min":50,"max":80,"display":"50억~80억"},"preferredRegions":"강남","성수","assetTypes":"꼬마빌딩","사옥용","purchasePurpose":"사옥용 매입","mustHave":"초역세권","주차","niceToHave":"테라스","루프탑","riskTolerance":"medium","financingNote":"자본금 50% 준비","missingQuestions":"구체적인 입주 시기가 언제인가요?","선호하는 수익률이 있나요?","privacyNotes":"연락처 비공개","fitReasons":"매수자 예산(50-80억)에 부합하는 매물입니다.","요청하신 성수/강남 권역에 해당합니다.","cautionReasons":"요청한 용도와 달리 명도 협의가 다소 필요합니다.","recommendedNextAction":"현장 답사 제안","kakaoMessage":"안녕하세요! 요청하신 조건에 부합하는 추천 매물이 있어 안내해 드립니다. 확인해보시고 피드백 부탁드립니다.","title":"강남 역삼역 초역세권 오피스 사옥용 빌딩 매각","shortSummary":"역삼역 도보 5분 거리의 준신축급 대형 오피스빌딩입니다.","dealPoints":"초역세권","사옥 최적","cautionPoints":"명도 조율 필요","hiddenInfoNotice":"보증금 및 지번은 인가 후 확인 가능","gateMessage":"G1 등급 등록이 필요합니다.","kakaoText":"강남 역삼역 오피스 빌딩 매각 안내입니다.","exactUnitCandidate":"101호","floor":"1층","areaSqmText":"150㎡","spaceType":"office","depositText":"5000만","monthlyRentText":"400만","maintenanceFeeText":"50만","availableFromText":"즉시입주","leaseTermMonthsText":"24","incentivesText":"렌트프리 2개월","restrictions":,"landlordIdentity":"김성수","currentTenant":"스타트업","vacancyReason":"이전 확장","rentNegotiation":"협의 가능","region":"성수동","areaSqm":150,"deposit":5000,"monthlyRent":400,"maintenanceFee":50,"availableFrom":"즉시입주","leaseTermMonths":24,"incentives":{"rentFreeMonths":2,"interiorSupport":"일부 인테리어 지원","freeRentDetail":"렌트프리 2개월 지원"},"shortSummaryLease":"성수역 도보 5분 거리 1층 리테일 상가 매물입니다."}</a:t>
             </a:r>
             <a:endParaRPr lang="en-US" sz="1400" dirty="0"/>
           </a:p>
@@ -5647,434 +5647,6 @@
       <p:sp>
         <p:nvSpPr>
           <p:cNvPr id="9" name="Shape 7"/>
-          <p:cNvSpPr/>
-          <p:nvPr/>
-        </p:nvSpPr>
-        <p:spPr>
-          <a:xfrm>
-            <a:off x="566928" y="2048256"/>
-            <a:ext cx="6858000" cy="0"/>
-          </a:xfrm>
-          <a:prstGeom prst="line">
-            <a:avLst/>
-          </a:prstGeom>
-          <a:noFill/>
-          <a:ln w="3810">
-            <a:solidFill>
-              <a:srgbClr val="CBD5E0"/>
-            </a:solidFill>
-            <a:prstDash val="solid"/>
-          </a:ln>
-        </p:spPr>
-      </p:sp>
-      <p:sp>
-        <p:nvSpPr>
-          <p:cNvPr id="10" name="Text 8"/>
-          <p:cNvSpPr/>
-          <p:nvPr/>
-        </p:nvSpPr>
-        <p:spPr>
-          <a:xfrm>
-            <a:off x="566928" y="2048256"/>
-            <a:ext cx="2606040" cy="402336"/>
-          </a:xfrm>
-          <a:prstGeom prst="rect">
-            <a:avLst/>
-          </a:prstGeom>
-          <a:noFill/>
-          <a:ln/>
-        </p:spPr>
-        <p:txBody>
-          <a:bodyPr wrap="square" lIns="0" tIns="0" rIns="0" bIns="0" rtlCol="0" anchor="ctr"/>
-          <a:lstStyle/>
-          <a:p>
-            <a:pPr indent="0" marL="0">
-              <a:lnSpc>
-                <a:spcPct val="120000"/>
-              </a:lnSpc>
-              <a:buNone/>
-            </a:pPr>
-            <a:r>
-              <a:rPr lang="en-US" sz="1400" dirty="0">
-                <a:solidFill>
-                  <a:srgbClr val="718096"/>
-                </a:solidFill>
-                <a:latin typeface="Pretendard" pitchFamily="34" charset="0"/>
-                <a:ea typeface="Pretendard" pitchFamily="34" charset="-122"/>
-                <a:cs typeface="Pretendard" pitchFamily="34" charset="-120"/>
-              </a:rPr>
-              <a:t>연면적</a:t>
-            </a:r>
-            <a:endParaRPr lang="en-US" sz="1400" dirty="0"/>
-          </a:p>
-        </p:txBody>
-      </p:sp>
-      <p:sp>
-        <p:nvSpPr>
-          <p:cNvPr id="11" name="Text 9"/>
-          <p:cNvSpPr/>
-          <p:nvPr/>
-        </p:nvSpPr>
-        <p:spPr>
-          <a:xfrm>
-            <a:off x="3172968" y="2048256"/>
-            <a:ext cx="4251960" cy="402336"/>
-          </a:xfrm>
-          <a:prstGeom prst="rect">
-            <a:avLst/>
-          </a:prstGeom>
-          <a:noFill/>
-          <a:ln/>
-        </p:spPr>
-        <p:txBody>
-          <a:bodyPr wrap="square" lIns="0" tIns="0" rIns="0" bIns="0" rtlCol="0" anchor="ctr"/>
-          <a:lstStyle/>
-          <a:p>
-            <a:pPr indent="0" marL="0">
-              <a:lnSpc>
-                <a:spcPct val="120000"/>
-              </a:lnSpc>
-              <a:buNone/>
-            </a:pPr>
-            <a:r>
-              <a:rPr lang="en-US" sz="1400" b="1" dirty="0">
-                <a:solidFill>
-                  <a:srgbClr val="10161F"/>
-                </a:solidFill>
-                <a:latin typeface="Pretendard" pitchFamily="34" charset="0"/>
-                <a:ea typeface="Pretendard" pitchFamily="34" charset="-122"/>
-                <a:cs typeface="Pretendard" pitchFamily="34" charset="-120"/>
-              </a:rPr>
-              <a:t>5,000㎡ (약 1513평(약 5001.7㎡))</a:t>
-            </a:r>
-            <a:endParaRPr lang="en-US" sz="1400" dirty="0"/>
-          </a:p>
-        </p:txBody>
-      </p:sp>
-      <p:sp>
-        <p:nvSpPr>
-          <p:cNvPr id="12" name="Shape 10"/>
-          <p:cNvSpPr/>
-          <p:nvPr/>
-        </p:nvSpPr>
-        <p:spPr>
-          <a:xfrm>
-            <a:off x="566928" y="2450592"/>
-            <a:ext cx="6858000" cy="0"/>
-          </a:xfrm>
-          <a:prstGeom prst="line">
-            <a:avLst/>
-          </a:prstGeom>
-          <a:noFill/>
-          <a:ln w="3810">
-            <a:solidFill>
-              <a:srgbClr val="CBD5E0"/>
-            </a:solidFill>
-            <a:prstDash val="solid"/>
-          </a:ln>
-        </p:spPr>
-      </p:sp>
-      <p:sp>
-        <p:nvSpPr>
-          <p:cNvPr id="13" name="Text 11"/>
-          <p:cNvSpPr/>
-          <p:nvPr/>
-        </p:nvSpPr>
-        <p:spPr>
-          <a:xfrm>
-            <a:off x="566928" y="2450592"/>
-            <a:ext cx="2606040" cy="402336"/>
-          </a:xfrm>
-          <a:prstGeom prst="rect">
-            <a:avLst/>
-          </a:prstGeom>
-          <a:noFill/>
-          <a:ln/>
-        </p:spPr>
-        <p:txBody>
-          <a:bodyPr wrap="square" lIns="0" tIns="0" rIns="0" bIns="0" rtlCol="0" anchor="ctr"/>
-          <a:lstStyle/>
-          <a:p>
-            <a:pPr indent="0" marL="0">
-              <a:lnSpc>
-                <a:spcPct val="120000"/>
-              </a:lnSpc>
-              <a:buNone/>
-            </a:pPr>
-            <a:r>
-              <a:rPr lang="en-US" sz="1400" dirty="0">
-                <a:solidFill>
-                  <a:srgbClr val="718096"/>
-                </a:solidFill>
-                <a:latin typeface="Pretendard" pitchFamily="34" charset="0"/>
-                <a:ea typeface="Pretendard" pitchFamily="34" charset="-122"/>
-                <a:cs typeface="Pretendard" pitchFamily="34" charset="-120"/>
-              </a:rPr>
-              <a:t>대지면적</a:t>
-            </a:r>
-            <a:endParaRPr lang="en-US" sz="1400" dirty="0"/>
-          </a:p>
-        </p:txBody>
-      </p:sp>
-      <p:sp>
-        <p:nvSpPr>
-          <p:cNvPr id="14" name="Text 12"/>
-          <p:cNvSpPr/>
-          <p:nvPr/>
-        </p:nvSpPr>
-        <p:spPr>
-          <a:xfrm>
-            <a:off x="3172968" y="2450592"/>
-            <a:ext cx="4251960" cy="402336"/>
-          </a:xfrm>
-          <a:prstGeom prst="rect">
-            <a:avLst/>
-          </a:prstGeom>
-          <a:noFill/>
-          <a:ln/>
-        </p:spPr>
-        <p:txBody>
-          <a:bodyPr wrap="square" lIns="0" tIns="0" rIns="0" bIns="0" rtlCol="0" anchor="ctr"/>
-          <a:lstStyle/>
-          <a:p>
-            <a:pPr indent="0" marL="0">
-              <a:lnSpc>
-                <a:spcPct val="120000"/>
-              </a:lnSpc>
-              <a:buNone/>
-            </a:pPr>
-            <a:r>
-              <a:rPr lang="en-US" sz="1400" b="1" dirty="0">
-                <a:solidFill>
-                  <a:srgbClr val="10161F"/>
-                </a:solidFill>
-                <a:latin typeface="Pretendard" pitchFamily="34" charset="0"/>
-                <a:ea typeface="Pretendard" pitchFamily="34" charset="-122"/>
-                <a:cs typeface="Pretendard" pitchFamily="34" charset="-120"/>
-              </a:rPr>
-              <a:t>1,000㎡ (약 303평(약 1001.7㎡))</a:t>
-            </a:r>
-            <a:endParaRPr lang="en-US" sz="1400" dirty="0"/>
-          </a:p>
-        </p:txBody>
-      </p:sp>
-      <p:sp>
-        <p:nvSpPr>
-          <p:cNvPr id="15" name="Shape 13"/>
-          <p:cNvSpPr/>
-          <p:nvPr/>
-        </p:nvSpPr>
-        <p:spPr>
-          <a:xfrm>
-            <a:off x="566928" y="2852928"/>
-            <a:ext cx="6858000" cy="0"/>
-          </a:xfrm>
-          <a:prstGeom prst="line">
-            <a:avLst/>
-          </a:prstGeom>
-          <a:noFill/>
-          <a:ln w="3810">
-            <a:solidFill>
-              <a:srgbClr val="CBD5E0"/>
-            </a:solidFill>
-            <a:prstDash val="solid"/>
-          </a:ln>
-        </p:spPr>
-      </p:sp>
-      <p:sp>
-        <p:nvSpPr>
-          <p:cNvPr id="16" name="Text 14"/>
-          <p:cNvSpPr/>
-          <p:nvPr/>
-        </p:nvSpPr>
-        <p:spPr>
-          <a:xfrm>
-            <a:off x="566928" y="2852928"/>
-            <a:ext cx="2606040" cy="402336"/>
-          </a:xfrm>
-          <a:prstGeom prst="rect">
-            <a:avLst/>
-          </a:prstGeom>
-          <a:noFill/>
-          <a:ln/>
-        </p:spPr>
-        <p:txBody>
-          <a:bodyPr wrap="square" lIns="0" tIns="0" rIns="0" bIns="0" rtlCol="0" anchor="ctr"/>
-          <a:lstStyle/>
-          <a:p>
-            <a:pPr indent="0" marL="0">
-              <a:lnSpc>
-                <a:spcPct val="120000"/>
-              </a:lnSpc>
-              <a:buNone/>
-            </a:pPr>
-            <a:r>
-              <a:rPr lang="en-US" sz="1400" dirty="0">
-                <a:solidFill>
-                  <a:srgbClr val="718096"/>
-                </a:solidFill>
-                <a:latin typeface="Pretendard" pitchFamily="34" charset="0"/>
-                <a:ea typeface="Pretendard" pitchFamily="34" charset="-122"/>
-                <a:cs typeface="Pretendard" pitchFamily="34" charset="-120"/>
-              </a:rPr>
-              <a:t>용도지역</a:t>
-            </a:r>
-            <a:endParaRPr lang="en-US" sz="1400" dirty="0"/>
-          </a:p>
-        </p:txBody>
-      </p:sp>
-      <p:sp>
-        <p:nvSpPr>
-          <p:cNvPr id="17" name="Text 15"/>
-          <p:cNvSpPr/>
-          <p:nvPr/>
-        </p:nvSpPr>
-        <p:spPr>
-          <a:xfrm>
-            <a:off x="3172968" y="2852928"/>
-            <a:ext cx="4251960" cy="402336"/>
-          </a:xfrm>
-          <a:prstGeom prst="rect">
-            <a:avLst/>
-          </a:prstGeom>
-          <a:noFill/>
-          <a:ln/>
-        </p:spPr>
-        <p:txBody>
-          <a:bodyPr wrap="square" lIns="0" tIns="0" rIns="0" bIns="0" rtlCol="0" anchor="ctr"/>
-          <a:lstStyle/>
-          <a:p>
-            <a:pPr indent="0" marL="0">
-              <a:lnSpc>
-                <a:spcPct val="120000"/>
-              </a:lnSpc>
-              <a:buNone/>
-            </a:pPr>
-            <a:r>
-              <a:rPr lang="en-US" sz="1400" b="1" dirty="0">
-                <a:solidFill>
-                  <a:srgbClr val="10161F"/>
-                </a:solidFill>
-                <a:latin typeface="Pretendard" pitchFamily="34" charset="0"/>
-                <a:ea typeface="Pretendard" pitchFamily="34" charset="-122"/>
-                <a:cs typeface="Pretendard" pitchFamily="34" charset="-120"/>
-              </a:rPr>
-              <a:t>일반상업지역</a:t>
-            </a:r>
-            <a:endParaRPr lang="en-US" sz="1400" dirty="0"/>
-          </a:p>
-        </p:txBody>
-      </p:sp>
-      <p:sp>
-        <p:nvSpPr>
-          <p:cNvPr id="18" name="Shape 16"/>
-          <p:cNvSpPr/>
-          <p:nvPr/>
-        </p:nvSpPr>
-        <p:spPr>
-          <a:xfrm>
-            <a:off x="566928" y="3255264"/>
-            <a:ext cx="6858000" cy="0"/>
-          </a:xfrm>
-          <a:prstGeom prst="line">
-            <a:avLst/>
-          </a:prstGeom>
-          <a:noFill/>
-          <a:ln w="3810">
-            <a:solidFill>
-              <a:srgbClr val="CBD5E0"/>
-            </a:solidFill>
-            <a:prstDash val="solid"/>
-          </a:ln>
-        </p:spPr>
-      </p:sp>
-      <p:sp>
-        <p:nvSpPr>
-          <p:cNvPr id="19" name="Text 17"/>
-          <p:cNvSpPr/>
-          <p:nvPr/>
-        </p:nvSpPr>
-        <p:spPr>
-          <a:xfrm>
-            <a:off x="566928" y="3255264"/>
-            <a:ext cx="2606040" cy="402336"/>
-          </a:xfrm>
-          <a:prstGeom prst="rect">
-            <a:avLst/>
-          </a:prstGeom>
-          <a:noFill/>
-          <a:ln/>
-        </p:spPr>
-        <p:txBody>
-          <a:bodyPr wrap="square" lIns="0" tIns="0" rIns="0" bIns="0" rtlCol="0" anchor="ctr"/>
-          <a:lstStyle/>
-          <a:p>
-            <a:pPr indent="0" marL="0">
-              <a:lnSpc>
-                <a:spcPct val="120000"/>
-              </a:lnSpc>
-              <a:buNone/>
-            </a:pPr>
-            <a:r>
-              <a:rPr lang="en-US" sz="1400" dirty="0">
-                <a:solidFill>
-                  <a:srgbClr val="718096"/>
-                </a:solidFill>
-                <a:latin typeface="Pretendard" pitchFamily="34" charset="0"/>
-                <a:ea typeface="Pretendard" pitchFamily="34" charset="-122"/>
-                <a:cs typeface="Pretendard" pitchFamily="34" charset="-120"/>
-              </a:rPr>
-              <a:t>매매 희망가</a:t>
-            </a:r>
-            <a:endParaRPr lang="en-US" sz="1400" dirty="0"/>
-          </a:p>
-        </p:txBody>
-      </p:sp>
-      <p:sp>
-        <p:nvSpPr>
-          <p:cNvPr id="20" name="Text 18"/>
-          <p:cNvSpPr/>
-          <p:nvPr/>
-        </p:nvSpPr>
-        <p:spPr>
-          <a:xfrm>
-            <a:off x="3172968" y="3255264"/>
-            <a:ext cx="4251960" cy="402336"/>
-          </a:xfrm>
-          <a:prstGeom prst="rect">
-            <a:avLst/>
-          </a:prstGeom>
-          <a:noFill/>
-          <a:ln/>
-        </p:spPr>
-        <p:txBody>
-          <a:bodyPr wrap="square" lIns="0" tIns="0" rIns="0" bIns="0" rtlCol="0" anchor="ctr"/>
-          <a:lstStyle/>
-          <a:p>
-            <a:pPr indent="0" marL="0">
-              <a:lnSpc>
-                <a:spcPct val="120000"/>
-              </a:lnSpc>
-              <a:buNone/>
-            </a:pPr>
-            <a:r>
-              <a:rPr lang="en-US" sz="1400" b="1" dirty="0">
-                <a:solidFill>
-                  <a:srgbClr val="10161F"/>
-                </a:solidFill>
-                <a:latin typeface="Pretendard" pitchFamily="34" charset="0"/>
-                <a:ea typeface="Pretendard" pitchFamily="34" charset="-122"/>
-                <a:cs typeface="Pretendard" pitchFamily="34" charset="-120"/>
-              </a:rPr>
-              <a:t>240억</a:t>
-            </a:r>
-            <a:endParaRPr lang="en-US" sz="1400" dirty="0"/>
-          </a:p>
-        </p:txBody>
-      </p:sp>
-      <p:sp>
-        <p:nvSpPr>
-          <p:cNvPr id="21" name="Shape 19"/>
           <p:cNvSpPr/>
           <p:nvPr/>
         </p:nvSpPr>
@@ -6097,7 +5669,7 @@
       </p:sp>
       <p:sp>
         <p:nvSpPr>
-          <p:cNvPr id="22" name="Shape 20"/>
+          <p:cNvPr id="10" name="Shape 8"/>
           <p:cNvSpPr/>
           <p:nvPr/>
         </p:nvSpPr>
@@ -6112,14 +5684,14 @@
             </a:avLst>
           </a:prstGeom>
           <a:solidFill>
-            <a:srgbClr val="BEE3F8"/>
+            <a:srgbClr val="F3EBDA"/>
           </a:solidFill>
           <a:ln/>
         </p:spPr>
       </p:sp>
       <p:sp>
         <p:nvSpPr>
-          <p:cNvPr id="23" name="Shape 21"/>
+          <p:cNvPr id="11" name="Shape 9"/>
           <p:cNvSpPr/>
           <p:nvPr/>
         </p:nvSpPr>
@@ -6132,14 +5704,14 @@
             <a:avLst/>
           </a:prstGeom>
           <a:solidFill>
-            <a:srgbClr val="2B6CB0"/>
+            <a:srgbClr val="977024"/>
           </a:solidFill>
           <a:ln/>
         </p:spPr>
       </p:sp>
       <p:sp>
         <p:nvSpPr>
-          <p:cNvPr id="24" name="Text 22"/>
+          <p:cNvPr id="12" name="Text 10"/>
           <p:cNvSpPr/>
           <p:nvPr/>
         </p:nvSpPr>
@@ -6161,305 +5733,85 @@
             <a:pPr indent="0" marL="0">
               <a:buNone/>
             </a:pPr>
-            <a:r>
-              <a:rPr lang="en-US" sz="1050" b="1" dirty="0">
-                <a:solidFill>
-                  <a:srgbClr val="2B6CB0"/>
+            <a:endParaRPr lang="en-US" sz="1050" dirty="0"/>
+          </a:p>
+        </p:txBody>
+      </p:sp>
+      <p:sp>
+        <p:nvSpPr>
+          <p:cNvPr id="13" name="Text 11"/>
+          <p:cNvSpPr/>
+          <p:nvPr/>
+        </p:nvSpPr>
+        <p:spPr>
+          <a:xfrm>
+            <a:off x="7967167" y="1975104"/>
+            <a:ext cx="3511296" cy="1700784"/>
+          </a:xfrm>
+          <a:prstGeom prst="rect">
+            <a:avLst/>
+          </a:prstGeom>
+          <a:noFill/>
+          <a:ln/>
+        </p:spPr>
+        <p:txBody>
+          <a:bodyPr wrap="square" lIns="0" tIns="0" rIns="0" bIns="0" rtlCol="0" anchor="t"/>
+          <a:lstStyle/>
+          <a:p>
+            <a:pPr indent="0" marL="0">
+              <a:lnSpc>
+                <a:spcPct val="120000"/>
+              </a:lnSpc>
+              <a:buNone/>
+            </a:pPr>
+            <a:r>
+              <a:rPr lang="en-US" sz="930" dirty="0">
+                <a:solidFill>
+                  <a:srgbClr val="10161F"/>
                 </a:solidFill>
                 <a:latin typeface="Pretendard" pitchFamily="34" charset="0"/>
                 <a:ea typeface="Pretendard" pitchFamily="34" charset="-122"/>
                 <a:cs typeface="Pretendard" pitchFamily="34" charset="-120"/>
               </a:rPr>
-              <a:t>토지 및 건물 분석 포인트</a:t>
-            </a:r>
-            <a:endParaRPr lang="en-US" sz="1050" dirty="0"/>
-          </a:p>
-        </p:txBody>
-      </p:sp>
-      <p:sp>
-        <p:nvSpPr>
-          <p:cNvPr id="25" name="Text 23"/>
-          <p:cNvSpPr/>
-          <p:nvPr/>
-        </p:nvSpPr>
-        <p:spPr>
-          <a:xfrm>
-            <a:off x="7967167" y="1975104"/>
-            <a:ext cx="3511296" cy="1700784"/>
-          </a:xfrm>
-          <a:prstGeom prst="rect">
-            <a:avLst/>
-          </a:prstGeom>
-          <a:noFill/>
-          <a:ln/>
-        </p:spPr>
-        <p:txBody>
-          <a:bodyPr wrap="square" lIns="0" tIns="0" rIns="0" bIns="0" rtlCol="0" anchor="t"/>
-          <a:lstStyle/>
-          <a:p>
-            <a:pPr marL="342900" indent="-342900">
-              <a:lnSpc>
-                <a:spcPct val="120000"/>
-              </a:lnSpc>
-              <a:buSzPct val="100000"/>
-              <a:buChar char="•"/>
-            </a:pPr>
-            <a:r>
-              <a:rPr lang="en-US" sz="930" dirty="0">
-                <a:solidFill>
-                  <a:srgbClr val="10161F"/>
+              <a:t>{"ok":true,"mocked":true,"extractedFields":{"area_signal":"역삼","asset_type":"오피스빌딩","price_band":"300억","size_signal":"3</a:t>
+            </a:r>
+            <a:endParaRPr lang="en-US" sz="930" dirty="0"/>
+          </a:p>
+        </p:txBody>
+      </p:sp>
+      <p:sp>
+        <p:nvSpPr>
+          <p:cNvPr id="14" name="Text 12"/>
+          <p:cNvSpPr/>
+          <p:nvPr/>
+        </p:nvSpPr>
+        <p:spPr>
+          <a:xfrm>
+            <a:off x="566928" y="6382512"/>
+            <a:ext cx="7315200" cy="219456"/>
+          </a:xfrm>
+          <a:prstGeom prst="rect">
+            <a:avLst/>
+          </a:prstGeom>
+          <a:noFill/>
+          <a:ln/>
+        </p:spPr>
+        <p:txBody>
+          <a:bodyPr wrap="square" lIns="0" tIns="0" rIns="0" bIns="0" rtlCol="0" anchor="ctr"/>
+          <a:lstStyle/>
+          <a:p>
+            <a:pPr indent="0" marL="0">
+              <a:buNone/>
+            </a:pPr>
+            <a:r>
+              <a:rPr lang="en-US" sz="800" dirty="0">
+                <a:solidFill>
+                  <a:srgbClr val="718096"/>
                 </a:solidFill>
                 <a:latin typeface="Pretendard" pitchFamily="34" charset="0"/>
                 <a:ea typeface="Pretendard" pitchFamily="34" charset="-122"/>
                 <a:cs typeface="Pretendard" pitchFamily="34" charset="-120"/>
               </a:rPr>
-              <a:t>물건 접면 도로 및 교통 여건은 현장 확인 사항입니다</a:t>
-            </a:r>
-            <a:endParaRPr lang="en-US" sz="930" dirty="0"/>
-          </a:p>
-          <a:p>
-            <a:pPr marL="342900" indent="-342900">
-              <a:lnSpc>
-                <a:spcPct val="120000"/>
-              </a:lnSpc>
-              <a:buSzPct val="100000"/>
-              <a:buChar char="•"/>
-            </a:pPr>
-            <a:r>
-              <a:rPr lang="en-US" sz="930" dirty="0">
-                <a:solidFill>
-                  <a:srgbClr val="10161F"/>
-                </a:solidFill>
-                <a:latin typeface="Pretendard" pitchFamily="34" charset="0"/>
-                <a:ea typeface="Pretendard" pitchFamily="34" charset="-122"/>
-                <a:cs typeface="Pretendard" pitchFamily="34" charset="-120"/>
-              </a:rPr>
-              <a:t>상세 건물 제원은 실사 자료를 참조하시기 바랍니다</a:t>
-            </a:r>
-            <a:endParaRPr lang="en-US" sz="930" dirty="0"/>
-          </a:p>
-          <a:p>
-            <a:pPr marL="342900" indent="-342900">
-              <a:lnSpc>
-                <a:spcPct val="120000"/>
-              </a:lnSpc>
-              <a:buSzPct val="100000"/>
-              <a:buChar char="•"/>
-            </a:pPr>
-            <a:r>
-              <a:rPr lang="en-US" sz="930" dirty="0">
-                <a:solidFill>
-                  <a:srgbClr val="10161F"/>
-                </a:solidFill>
-                <a:latin typeface="Pretendard" pitchFamily="34" charset="0"/>
-                <a:ea typeface="Pretendard" pitchFamily="34" charset="-122"/>
-                <a:cs typeface="Pretendard" pitchFamily="34" charset="-120"/>
-              </a:rPr>
-              <a:t>건물 현황 및 규모는 첨부 대장을 기준으로 합니다</a:t>
-            </a:r>
-            <a:endParaRPr lang="en-US" sz="930" dirty="0"/>
-          </a:p>
-        </p:txBody>
-      </p:sp>
-      <p:sp>
-        <p:nvSpPr>
-          <p:cNvPr id="26" name="Shape 24"/>
-          <p:cNvSpPr/>
-          <p:nvPr/>
-        </p:nvSpPr>
-        <p:spPr>
-          <a:xfrm>
-            <a:off x="7784287" y="3977640"/>
-            <a:ext cx="3840480" cy="2148840"/>
-          </a:xfrm>
-          <a:prstGeom prst="roundRect">
-            <a:avLst>
-              <a:gd name="adj" fmla="val 2553"/>
-            </a:avLst>
-          </a:prstGeom>
-          <a:solidFill>
-            <a:srgbClr val="BEE3F8"/>
-          </a:solidFill>
-          <a:ln/>
-        </p:spPr>
-      </p:sp>
-      <p:sp>
-        <p:nvSpPr>
-          <p:cNvPr id="27" name="Shape 25"/>
-          <p:cNvSpPr/>
-          <p:nvPr/>
-        </p:nvSpPr>
-        <p:spPr>
-          <a:xfrm>
-            <a:off x="7784287" y="4032504"/>
-            <a:ext cx="36576" cy="2039112"/>
-          </a:xfrm>
-          <a:prstGeom prst="rect">
-            <a:avLst/>
-          </a:prstGeom>
-          <a:solidFill>
-            <a:srgbClr val="2B6CB0"/>
-          </a:solidFill>
-          <a:ln/>
-        </p:spPr>
-      </p:sp>
-      <p:sp>
-        <p:nvSpPr>
-          <p:cNvPr id="28" name="Text 26"/>
-          <p:cNvSpPr/>
-          <p:nvPr/>
-        </p:nvSpPr>
-        <p:spPr>
-          <a:xfrm>
-            <a:off x="7967167" y="4087368"/>
-            <a:ext cx="3511296" cy="201168"/>
-          </a:xfrm>
-          <a:prstGeom prst="rect">
-            <a:avLst/>
-          </a:prstGeom>
-          <a:noFill/>
-          <a:ln/>
-        </p:spPr>
-        <p:txBody>
-          <a:bodyPr wrap="square" lIns="0" tIns="0" rIns="0" bIns="0" rtlCol="0" anchor="ctr"/>
-          <a:lstStyle/>
-          <a:p>
-            <a:pPr indent="0" marL="0">
-              <a:buNone/>
-            </a:pPr>
-            <a:r>
-              <a:rPr lang="en-US" sz="1050" b="1" dirty="0">
-                <a:solidFill>
-                  <a:srgbClr val="2B6CB0"/>
-                </a:solidFill>
-                <a:latin typeface="Pretendard" pitchFamily="34" charset="0"/>
-                <a:ea typeface="Pretendard" pitchFamily="34" charset="-122"/>
-                <a:cs typeface="Pretendard" pitchFamily="34" charset="-120"/>
-              </a:rPr>
-              <a:t>물건 실사 및 관리 상태</a:t>
-            </a:r>
-            <a:endParaRPr lang="en-US" sz="1050" dirty="0"/>
-          </a:p>
-        </p:txBody>
-      </p:sp>
-      <p:sp>
-        <p:nvSpPr>
-          <p:cNvPr id="29" name="Text 27"/>
-          <p:cNvSpPr/>
-          <p:nvPr/>
-        </p:nvSpPr>
-        <p:spPr>
-          <a:xfrm>
-            <a:off x="7967167" y="4306824"/>
-            <a:ext cx="3511296" cy="1746504"/>
-          </a:xfrm>
-          <a:prstGeom prst="rect">
-            <a:avLst/>
-          </a:prstGeom>
-          <a:noFill/>
-          <a:ln/>
-        </p:spPr>
-        <p:txBody>
-          <a:bodyPr wrap="square" lIns="0" tIns="0" rIns="0" bIns="0" rtlCol="0" anchor="t"/>
-          <a:lstStyle/>
-          <a:p>
-            <a:pPr marL="342900" indent="-342900">
-              <a:lnSpc>
-                <a:spcPct val="120000"/>
-              </a:lnSpc>
-              <a:buSzPct val="100000"/>
-              <a:buChar char="•"/>
-            </a:pPr>
-            <a:r>
-              <a:rPr lang="en-US" sz="930" dirty="0">
-                <a:solidFill>
-                  <a:srgbClr val="10161F"/>
-                </a:solidFill>
-                <a:latin typeface="Pretendard" pitchFamily="34" charset="0"/>
-                <a:ea typeface="Pretendard" pitchFamily="34" charset="-122"/>
-                <a:cs typeface="Pretendard" pitchFamily="34" charset="-120"/>
-              </a:rPr>
-              <a:t>건물 상태 및 설비 현황은 실사 보고서를 참조하십시오</a:t>
-            </a:r>
-            <a:endParaRPr lang="en-US" sz="930" dirty="0"/>
-          </a:p>
-          <a:p>
-            <a:pPr marL="342900" indent="-342900">
-              <a:lnSpc>
-                <a:spcPct val="120000"/>
-              </a:lnSpc>
-              <a:buSzPct val="100000"/>
-              <a:buChar char="•"/>
-            </a:pPr>
-            <a:r>
-              <a:rPr lang="en-US" sz="930" dirty="0">
-                <a:solidFill>
-                  <a:srgbClr val="10161F"/>
-                </a:solidFill>
-                <a:latin typeface="Pretendard" pitchFamily="34" charset="0"/>
-                <a:ea typeface="Pretendard" pitchFamily="34" charset="-122"/>
-                <a:cs typeface="Pretendard" pitchFamily="34" charset="-120"/>
-              </a:rPr>
-              <a:t>자금 조달 및 대출 조건은 금융 자문 후 확정됩니다</a:t>
-            </a:r>
-            <a:endParaRPr lang="en-US" sz="930" dirty="0"/>
-          </a:p>
-          <a:p>
-            <a:pPr marL="342900" indent="-342900">
-              <a:lnSpc>
-                <a:spcPct val="120000"/>
-              </a:lnSpc>
-              <a:buSzPct val="100000"/>
-              <a:buChar char="•"/>
-            </a:pPr>
-            <a:r>
-              <a:rPr lang="en-US" sz="930" dirty="0">
-                <a:solidFill>
-                  <a:srgbClr val="10161F"/>
-                </a:solidFill>
-                <a:latin typeface="Pretendard" pitchFamily="34" charset="0"/>
-                <a:ea typeface="Pretendard" pitchFamily="34" charset="-122"/>
-                <a:cs typeface="Pretendard" pitchFamily="34" charset="-120"/>
-              </a:rPr>
-              <a:t>상세 실사 단계에서 구체적인 계약 조건 및 세무 검토가 진행됩니다</a:t>
-            </a:r>
-            <a:endParaRPr lang="en-US" sz="930" dirty="0"/>
-          </a:p>
-        </p:txBody>
-      </p:sp>
-      <p:sp>
-        <p:nvSpPr>
-          <p:cNvPr id="30" name="Text 28"/>
-          <p:cNvSpPr/>
-          <p:nvPr/>
-        </p:nvSpPr>
-        <p:spPr>
-          <a:xfrm>
-            <a:off x="566928" y="6382512"/>
-            <a:ext cx="7315200" cy="219456"/>
-          </a:xfrm>
-          <a:prstGeom prst="rect">
-            <a:avLst/>
-          </a:prstGeom>
-          <a:noFill/>
-          <a:ln/>
-        </p:spPr>
-        <p:txBody>
-          <a:bodyPr wrap="square" lIns="0" tIns="0" rIns="0" bIns="0" rtlCol="0" anchor="ctr"/>
-          <a:lstStyle/>
-          <a:p>
-            <a:pPr indent="0" marL="0">
-              <a:buNone/>
-            </a:pPr>
-            <a:r>
-              <a:rPr lang="en-US" sz="800" dirty="0">
-                <a:solidFill>
-                  <a:srgbClr val="718096"/>
-                </a:solidFill>
-                <a:latin typeface="Pretendard" pitchFamily="34" charset="0"/>
-                <a:ea typeface="Pretendard" pitchFamily="34" charset="-122"/>
-                <a:cs typeface="Pretendard" pitchFamily="34" charset="-120"/>
-              </a:rPr>
               <a:t>크리딜   |   </a:t>
             </a:r>
             <a:endParaRPr lang="en-US" sz="800" dirty="0"/>
@@ -6468,7 +5820,7 @@
       </p:sp>
       <p:sp>
         <p:nvSpPr>
-          <p:cNvPr id="31" name="Text 29"/>
+          <p:cNvPr id="15" name="Text 13"/>
           <p:cNvSpPr/>
           <p:nvPr/>
         </p:nvSpPr>
@@ -7179,1165 +6531,16 @@
           </a:p>
         </p:txBody>
       </p:sp>
-      <p:graphicFrame>
-        <p:nvGraphicFramePr>
-          <p:cNvPr id="7" name="Table 0"/>
-          <p:cNvGraphicFramePr>
-            <a:graphicFrameLocks noGrp="1"/>
-          </p:cNvGraphicFramePr>
-          <p:nvPr>
-            <p:extLst>
-              <p:ext uri="{D42A27DB-BD31-4B8C-83A1-F6EECF244321}">
-                <p14:modId xmlns:p14="http://schemas.microsoft.com/office/powerpoint/2010/main" val="1579011935"/>
-              </p:ext>
-            </p:extLst>
-          </p:nvPr>
-        </p:nvGraphicFramePr>
-        <p:xfrm>
-          <a:off x="566928" y="1645920"/>
-          <a:ext cx="11057839" cy="914400"/>
-        </p:xfrm>
-        <a:graphic>
-          <a:graphicData uri="http://schemas.openxmlformats.org/drawingml/2006/table">
-            <a:tbl>
-              <a:tblPr/>
-              <a:tblGrid>
-                <a:gridCol w="2551809"/>
-                <a:gridCol w="4253015"/>
-                <a:gridCol w="4253015"/>
-              </a:tblGrid>
-              <a:tr h="438912">
-                <a:tc>
-                  <a:txBody>
-                    <a:bodyPr/>
-                    <a:lstStyle/>
-                    <a:p>
-                      <a:pPr indent="0" marL="0">
-                        <a:buNone/>
-                      </a:pPr>
-                      <a:r>
-                        <a:rPr lang="en-US" sz="1300" b="1" dirty="0">
-                          <a:solidFill>
-                            <a:srgbClr val="718096"/>
-                          </a:solidFill>
-                          <a:latin typeface="Pretendard" pitchFamily="34" charset="0"/>
-                          <a:ea typeface="Pretendard" pitchFamily="34" charset="-122"/>
-                          <a:cs typeface="Pretendard" pitchFamily="34" charset="-120"/>
-                        </a:rPr>
-                        <a:t>구분</a:t>
-                      </a:r>
-                      <a:endParaRPr lang="en-US" sz="1300" dirty="0">
-                        <a:latin typeface="Pretendard" charset="0"/>
-                        <a:ea typeface="Pretendard" charset="0"/>
-                        <a:cs typeface="Pretendard" charset="0"/>
-                      </a:endParaRPr>
-                    </a:p>
-                  </a:txBody>
-                  <a:tcPr marL="50800" marR="50800" marT="25400" marB="25400" anchor="ctr">
-                    <a:lnL w="3810" cap="flat" cmpd="sng" algn="ctr">
-                      <a:solidFill>
-                        <a:srgbClr val="CBD5E0"/>
-                      </a:solidFill>
-                      <a:prstDash val="solid"/>
-                      <a:round/>
-                      <a:headEnd type="none" w="med" len="med"/>
-                      <a:tailEnd type="none" w="med" len="med"/>
-                    </a:lnL>
-                    <a:lnR w="3810" cap="flat" cmpd="sng" algn="ctr">
-                      <a:solidFill>
-                        <a:srgbClr val="CBD5E0"/>
-                      </a:solidFill>
-                      <a:prstDash val="solid"/>
-                      <a:round/>
-                      <a:headEnd type="none" w="med" len="med"/>
-                      <a:tailEnd type="none" w="med" len="med"/>
-                    </a:lnR>
-                    <a:lnT w="3810" cap="flat" cmpd="sng" algn="ctr">
-                      <a:solidFill>
-                        <a:srgbClr val="CBD5E0"/>
-                      </a:solidFill>
-                      <a:prstDash val="solid"/>
-                      <a:round/>
-                      <a:headEnd type="none" w="med" len="med"/>
-                      <a:tailEnd type="none" w="med" len="med"/>
-                    </a:lnT>
-                    <a:lnB w="3810" cap="flat" cmpd="sng" algn="ctr">
-                      <a:solidFill>
-                        <a:srgbClr val="CBD5E0"/>
-                      </a:solidFill>
-                      <a:prstDash val="solid"/>
-                      <a:round/>
-                      <a:headEnd type="none" w="med" len="med"/>
-                      <a:tailEnd type="none" w="med" len="med"/>
-                    </a:lnB>
-                    <a:solidFill>
-                      <a:srgbClr val="F7FAFC"/>
-                    </a:solidFill>
-                  </a:tcPr>
-                </a:tc>
-                <a:tc>
-                  <a:txBody>
-                    <a:bodyPr/>
-                    <a:lstStyle/>
-                    <a:p>
-                      <a:pPr indent="0" marL="0">
-                        <a:buNone/>
-                      </a:pPr>
-                      <a:r>
-                        <a:rPr lang="en-US" sz="1300" b="1" dirty="0">
-                          <a:solidFill>
-                            <a:srgbClr val="718096"/>
-                          </a:solidFill>
-                          <a:latin typeface="Pretendard" pitchFamily="34" charset="0"/>
-                          <a:ea typeface="Pretendard" pitchFamily="34" charset="-122"/>
-                          <a:cs typeface="Pretendard" pitchFamily="34" charset="-120"/>
-                        </a:rPr>
-                        <a:t>타겟 </a:t>
-                      </a:r>
-                      <a:pPr indent="0" marL="0">
-                        <a:buNone/>
-                      </a:pPr>
-                      <a:r>
-                        <a:rPr lang="en-US" sz="1300" b="1" dirty="0">
-                          <a:solidFill>
-                            <a:srgbClr val="718096"/>
-                          </a:solidFill>
-                          <a:latin typeface="Pretendard" pitchFamily="34" charset="0"/>
-                          <a:ea typeface="Pretendard" pitchFamily="34" charset="-122"/>
-                          <a:cs typeface="Pretendard" pitchFamily="34" charset="-120"/>
-                        </a:rPr>
-                        <a:t>수치</a:t>
-                      </a:r>
-                      <a:endParaRPr lang="en-US" sz="1300" dirty="0">
-                        <a:latin typeface="Pretendard" charset="0"/>
-                        <a:ea typeface="Pretendard" charset="0"/>
-                        <a:cs typeface="Pretendard" charset="0"/>
-                      </a:endParaRPr>
-                    </a:p>
-                  </a:txBody>
-                  <a:tcPr marL="50800" marR="50800" marT="25400" marB="25400" anchor="ctr">
-                    <a:lnL w="3810" cap="flat" cmpd="sng" algn="ctr">
-                      <a:solidFill>
-                        <a:srgbClr val="CBD5E0"/>
-                      </a:solidFill>
-                      <a:prstDash val="solid"/>
-                      <a:round/>
-                      <a:headEnd type="none" w="med" len="med"/>
-                      <a:tailEnd type="none" w="med" len="med"/>
-                    </a:lnL>
-                    <a:lnR w="3810" cap="flat" cmpd="sng" algn="ctr">
-                      <a:solidFill>
-                        <a:srgbClr val="CBD5E0"/>
-                      </a:solidFill>
-                      <a:prstDash val="solid"/>
-                      <a:round/>
-                      <a:headEnd type="none" w="med" len="med"/>
-                      <a:tailEnd type="none" w="med" len="med"/>
-                    </a:lnR>
-                    <a:lnT w="3810" cap="flat" cmpd="sng" algn="ctr">
-                      <a:solidFill>
-                        <a:srgbClr val="CBD5E0"/>
-                      </a:solidFill>
-                      <a:prstDash val="solid"/>
-                      <a:round/>
-                      <a:headEnd type="none" w="med" len="med"/>
-                      <a:tailEnd type="none" w="med" len="med"/>
-                    </a:lnT>
-                    <a:lnB w="3810" cap="flat" cmpd="sng" algn="ctr">
-                      <a:solidFill>
-                        <a:srgbClr val="CBD5E0"/>
-                      </a:solidFill>
-                      <a:prstDash val="solid"/>
-                      <a:round/>
-                      <a:headEnd type="none" w="med" len="med"/>
-                      <a:tailEnd type="none" w="med" len="med"/>
-                    </a:lnB>
-                    <a:solidFill>
-                      <a:srgbClr val="F7FAFC"/>
-                    </a:solidFill>
-                  </a:tcPr>
-                </a:tc>
-                <a:tc>
-                  <a:txBody>
-                    <a:bodyPr/>
-                    <a:lstStyle/>
-                    <a:p>
-                      <a:pPr indent="0" marL="0">
-                        <a:buNone/>
-                      </a:pPr>
-                      <a:r>
-                        <a:rPr lang="en-US" sz="1300" b="1" dirty="0">
-                          <a:solidFill>
-                            <a:srgbClr val="718096"/>
-                          </a:solidFill>
-                          <a:latin typeface="Pretendard" pitchFamily="34" charset="0"/>
-                          <a:ea typeface="Pretendard" pitchFamily="34" charset="-122"/>
-                          <a:cs typeface="Pretendard" pitchFamily="34" charset="-120"/>
-                        </a:rPr>
-                        <a:t>비고</a:t>
-                      </a:r>
-                      <a:endParaRPr lang="en-US" sz="1300" dirty="0">
-                        <a:latin typeface="Pretendard" charset="0"/>
-                        <a:ea typeface="Pretendard" charset="0"/>
-                        <a:cs typeface="Pretendard" charset="0"/>
-                      </a:endParaRPr>
-                    </a:p>
-                  </a:txBody>
-                  <a:tcPr marL="50800" marR="50800" marT="25400" marB="25400" anchor="ctr">
-                    <a:lnL w="3810" cap="flat" cmpd="sng" algn="ctr">
-                      <a:solidFill>
-                        <a:srgbClr val="CBD5E0"/>
-                      </a:solidFill>
-                      <a:prstDash val="solid"/>
-                      <a:round/>
-                      <a:headEnd type="none" w="med" len="med"/>
-                      <a:tailEnd type="none" w="med" len="med"/>
-                    </a:lnL>
-                    <a:lnR w="3810" cap="flat" cmpd="sng" algn="ctr">
-                      <a:solidFill>
-                        <a:srgbClr val="CBD5E0"/>
-                      </a:solidFill>
-                      <a:prstDash val="solid"/>
-                      <a:round/>
-                      <a:headEnd type="none" w="med" len="med"/>
-                      <a:tailEnd type="none" w="med" len="med"/>
-                    </a:lnR>
-                    <a:lnT w="3810" cap="flat" cmpd="sng" algn="ctr">
-                      <a:solidFill>
-                        <a:srgbClr val="CBD5E0"/>
-                      </a:solidFill>
-                      <a:prstDash val="solid"/>
-                      <a:round/>
-                      <a:headEnd type="none" w="med" len="med"/>
-                      <a:tailEnd type="none" w="med" len="med"/>
-                    </a:lnT>
-                    <a:lnB w="3810" cap="flat" cmpd="sng" algn="ctr">
-                      <a:solidFill>
-                        <a:srgbClr val="CBD5E0"/>
-                      </a:solidFill>
-                      <a:prstDash val="solid"/>
-                      <a:round/>
-                      <a:headEnd type="none" w="med" len="med"/>
-                      <a:tailEnd type="none" w="med" len="med"/>
-                    </a:lnB>
-                    <a:solidFill>
-                      <a:srgbClr val="F7FAFC"/>
-                    </a:solidFill>
-                  </a:tcPr>
-                </a:tc>
-              </a:tr>
-              <a:tr h="438912">
-                <a:tc>
-                  <a:txBody>
-                    <a:bodyPr/>
-                    <a:lstStyle/>
-                    <a:p>
-                      <a:pPr indent="0" marL="0">
-                        <a:buNone/>
-                      </a:pPr>
-                      <a:r>
-                        <a:rPr lang="en-US" sz="1300" b="1" dirty="0">
-                          <a:solidFill>
-                            <a:srgbClr val="10161F"/>
-                          </a:solidFill>
-                          <a:latin typeface="Pretendard" pitchFamily="34" charset="0"/>
-                          <a:ea typeface="Pretendard" pitchFamily="34" charset="-122"/>
-                          <a:cs typeface="Pretendard" pitchFamily="34" charset="-120"/>
-                        </a:rPr>
-                        <a:t>목표 </a:t>
-                      </a:r>
-                      <a:pPr indent="0" marL="0">
-                        <a:buNone/>
-                      </a:pPr>
-                      <a:r>
-                        <a:rPr lang="en-US" sz="1300" b="1" dirty="0">
-                          <a:solidFill>
-                            <a:srgbClr val="10161F"/>
-                          </a:solidFill>
-                          <a:latin typeface="Pretendard" pitchFamily="34" charset="0"/>
-                          <a:ea typeface="Pretendard" pitchFamily="34" charset="-122"/>
-                          <a:cs typeface="Pretendard" pitchFamily="34" charset="-120"/>
-                        </a:rPr>
-                        <a:t>매각가</a:t>
-                      </a:r>
-                      <a:endParaRPr lang="en-US" sz="1300" dirty="0">
-                        <a:latin typeface="Pretendard" charset="0"/>
-                        <a:ea typeface="Pretendard" charset="0"/>
-                        <a:cs typeface="Pretendard" charset="0"/>
-                      </a:endParaRPr>
-                    </a:p>
-                  </a:txBody>
-                  <a:tcPr marL="50800" marR="50800" marT="25400" marB="25400" anchor="ctr">
-                    <a:lnL w="3810" cap="flat" cmpd="sng" algn="ctr">
-                      <a:solidFill>
-                        <a:srgbClr val="CBD5E0"/>
-                      </a:solidFill>
-                      <a:prstDash val="solid"/>
-                      <a:round/>
-                      <a:headEnd type="none" w="med" len="med"/>
-                      <a:tailEnd type="none" w="med" len="med"/>
-                    </a:lnL>
-                    <a:lnR w="3810" cap="flat" cmpd="sng" algn="ctr">
-                      <a:solidFill>
-                        <a:srgbClr val="CBD5E0"/>
-                      </a:solidFill>
-                      <a:prstDash val="solid"/>
-                      <a:round/>
-                      <a:headEnd type="none" w="med" len="med"/>
-                      <a:tailEnd type="none" w="med" len="med"/>
-                    </a:lnR>
-                    <a:lnT w="3810" cap="flat" cmpd="sng" algn="ctr">
-                      <a:solidFill>
-                        <a:srgbClr val="CBD5E0"/>
-                      </a:solidFill>
-                      <a:prstDash val="solid"/>
-                      <a:round/>
-                      <a:headEnd type="none" w="med" len="med"/>
-                      <a:tailEnd type="none" w="med" len="med"/>
-                    </a:lnT>
-                    <a:lnB w="3810" cap="flat" cmpd="sng" algn="ctr">
-                      <a:solidFill>
-                        <a:srgbClr val="CBD5E0"/>
-                      </a:solidFill>
-                      <a:prstDash val="solid"/>
-                      <a:round/>
-                      <a:headEnd type="none" w="med" len="med"/>
-                      <a:tailEnd type="none" w="med" len="med"/>
-                    </a:lnB>
-                    <a:solidFill>
-                      <a:srgbClr val="FFFFFF"/>
-                    </a:solidFill>
-                  </a:tcPr>
-                </a:tc>
-                <a:tc>
-                  <a:txBody>
-                    <a:bodyPr/>
-                    <a:lstStyle/>
-                    <a:p>
-                      <a:pPr indent="0" marL="0">
-                        <a:buNone/>
-                      </a:pPr>
-                      <a:r>
-                        <a:rPr lang="en-US" sz="1300" dirty="0">
-                          <a:solidFill>
-                            <a:srgbClr val="10161F"/>
-                          </a:solidFill>
-                          <a:latin typeface="Pretendard" pitchFamily="34" charset="0"/>
-                          <a:ea typeface="Pretendard" pitchFamily="34" charset="-122"/>
-                          <a:cs typeface="Pretendard" pitchFamily="34" charset="-120"/>
-                        </a:rPr>
-                        <a:t>주변 </a:t>
-                      </a:r>
-                      <a:pPr indent="0" marL="0">
-                        <a:buNone/>
-                      </a:pPr>
-                      <a:r>
-                        <a:rPr lang="en-US" sz="1300" dirty="0">
-                          <a:solidFill>
-                            <a:srgbClr val="10161F"/>
-                          </a:solidFill>
-                          <a:latin typeface="Pretendard" pitchFamily="34" charset="0"/>
-                          <a:ea typeface="Pretendard" pitchFamily="34" charset="-122"/>
-                          <a:cs typeface="Pretendard" pitchFamily="34" charset="-120"/>
-                        </a:rPr>
-                        <a:t>시세 </a:t>
-                      </a:r>
-                      <a:pPr indent="0" marL="0">
-                        <a:buNone/>
-                      </a:pPr>
-                      <a:r>
-                        <a:rPr lang="en-US" sz="1300" dirty="0">
-                          <a:solidFill>
-                            <a:srgbClr val="10161F"/>
-                          </a:solidFill>
-                          <a:latin typeface="Pretendard" pitchFamily="34" charset="0"/>
-                          <a:ea typeface="Pretendard" pitchFamily="34" charset="-122"/>
-                          <a:cs typeface="Pretendard" pitchFamily="34" charset="-120"/>
-                        </a:rPr>
-                        <a:t>상단 </a:t>
-                      </a:r>
-                      <a:pPr indent="0" marL="0">
-                        <a:buNone/>
-                      </a:pPr>
-                      <a:r>
-                        <a:rPr lang="en-US" sz="1300" dirty="0">
-                          <a:solidFill>
-                            <a:srgbClr val="10161F"/>
-                          </a:solidFill>
-                          <a:latin typeface="Pretendard" pitchFamily="34" charset="0"/>
-                          <a:ea typeface="Pretendard" pitchFamily="34" charset="-122"/>
-                          <a:cs typeface="Pretendard" pitchFamily="34" charset="-120"/>
-                        </a:rPr>
-                        <a:t>추정</a:t>
-                      </a:r>
-                      <a:endParaRPr lang="en-US" sz="1300" dirty="0">
-                        <a:latin typeface="Pretendard" charset="0"/>
-                        <a:ea typeface="Pretendard" charset="0"/>
-                        <a:cs typeface="Pretendard" charset="0"/>
-                      </a:endParaRPr>
-                    </a:p>
-                  </a:txBody>
-                  <a:tcPr marL="50800" marR="50800" marT="25400" marB="25400" anchor="ctr">
-                    <a:lnL w="3810" cap="flat" cmpd="sng" algn="ctr">
-                      <a:solidFill>
-                        <a:srgbClr val="CBD5E0"/>
-                      </a:solidFill>
-                      <a:prstDash val="solid"/>
-                      <a:round/>
-                      <a:headEnd type="none" w="med" len="med"/>
-                      <a:tailEnd type="none" w="med" len="med"/>
-                    </a:lnL>
-                    <a:lnR w="3810" cap="flat" cmpd="sng" algn="ctr">
-                      <a:solidFill>
-                        <a:srgbClr val="CBD5E0"/>
-                      </a:solidFill>
-                      <a:prstDash val="solid"/>
-                      <a:round/>
-                      <a:headEnd type="none" w="med" len="med"/>
-                      <a:tailEnd type="none" w="med" len="med"/>
-                    </a:lnR>
-                    <a:lnT w="3810" cap="flat" cmpd="sng" algn="ctr">
-                      <a:solidFill>
-                        <a:srgbClr val="CBD5E0"/>
-                      </a:solidFill>
-                      <a:prstDash val="solid"/>
-                      <a:round/>
-                      <a:headEnd type="none" w="med" len="med"/>
-                      <a:tailEnd type="none" w="med" len="med"/>
-                    </a:lnT>
-                    <a:lnB w="3810" cap="flat" cmpd="sng" algn="ctr">
-                      <a:solidFill>
-                        <a:srgbClr val="CBD5E0"/>
-                      </a:solidFill>
-                      <a:prstDash val="solid"/>
-                      <a:round/>
-                      <a:headEnd type="none" w="med" len="med"/>
-                      <a:tailEnd type="none" w="med" len="med"/>
-                    </a:lnB>
-                    <a:solidFill>
-                      <a:srgbClr val="FFFFFF"/>
-                    </a:solidFill>
-                  </a:tcPr>
-                </a:tc>
-                <a:tc>
-                  <a:txBody>
-                    <a:bodyPr/>
-                    <a:lstStyle/>
-                    <a:p>
-                      <a:pPr indent="0" marL="0">
-                        <a:buNone/>
-                      </a:pPr>
-                      <a:r>
-                        <a:rPr lang="en-US" sz="1300" dirty="0">
-                          <a:solidFill>
-                            <a:srgbClr val="10161F"/>
-                          </a:solidFill>
-                          <a:latin typeface="Pretendard" pitchFamily="34" charset="0"/>
-                          <a:ea typeface="Pretendard" pitchFamily="34" charset="-122"/>
-                          <a:cs typeface="Pretendard" pitchFamily="34" charset="-120"/>
-                        </a:rPr>
-                        <a:t>리밸런싱 </a:t>
-                      </a:r>
-                      <a:pPr indent="0" marL="0">
-                        <a:buNone/>
-                      </a:pPr>
-                      <a:r>
-                        <a:rPr lang="en-US" sz="1300" dirty="0">
-                          <a:solidFill>
-                            <a:srgbClr val="10161F"/>
-                          </a:solidFill>
-                          <a:latin typeface="Pretendard" pitchFamily="34" charset="0"/>
-                          <a:ea typeface="Pretendard" pitchFamily="34" charset="-122"/>
-                          <a:cs typeface="Pretendard" pitchFamily="34" charset="-120"/>
-                        </a:rPr>
-                        <a:t>타겟</a:t>
-                      </a:r>
-                      <a:endParaRPr lang="en-US" sz="1300" dirty="0">
-                        <a:latin typeface="Pretendard" charset="0"/>
-                        <a:ea typeface="Pretendard" charset="0"/>
-                        <a:cs typeface="Pretendard" charset="0"/>
-                      </a:endParaRPr>
-                    </a:p>
-                  </a:txBody>
-                  <a:tcPr marL="50800" marR="50800" marT="25400" marB="25400" anchor="ctr">
-                    <a:lnL w="3810" cap="flat" cmpd="sng" algn="ctr">
-                      <a:solidFill>
-                        <a:srgbClr val="CBD5E0"/>
-                      </a:solidFill>
-                      <a:prstDash val="solid"/>
-                      <a:round/>
-                      <a:headEnd type="none" w="med" len="med"/>
-                      <a:tailEnd type="none" w="med" len="med"/>
-                    </a:lnL>
-                    <a:lnR w="3810" cap="flat" cmpd="sng" algn="ctr">
-                      <a:solidFill>
-                        <a:srgbClr val="CBD5E0"/>
-                      </a:solidFill>
-                      <a:prstDash val="solid"/>
-                      <a:round/>
-                      <a:headEnd type="none" w="med" len="med"/>
-                      <a:tailEnd type="none" w="med" len="med"/>
-                    </a:lnR>
-                    <a:lnT w="3810" cap="flat" cmpd="sng" algn="ctr">
-                      <a:solidFill>
-                        <a:srgbClr val="CBD5E0"/>
-                      </a:solidFill>
-                      <a:prstDash val="solid"/>
-                      <a:round/>
-                      <a:headEnd type="none" w="med" len="med"/>
-                      <a:tailEnd type="none" w="med" len="med"/>
-                    </a:lnT>
-                    <a:lnB w="3810" cap="flat" cmpd="sng" algn="ctr">
-                      <a:solidFill>
-                        <a:srgbClr val="CBD5E0"/>
-                      </a:solidFill>
-                      <a:prstDash val="solid"/>
-                      <a:round/>
-                      <a:headEnd type="none" w="med" len="med"/>
-                      <a:tailEnd type="none" w="med" len="med"/>
-                    </a:lnB>
-                    <a:solidFill>
-                      <a:srgbClr val="FFFFFF"/>
-                    </a:solidFill>
-                  </a:tcPr>
-                </a:tc>
-              </a:tr>
-              <a:tr h="438912">
-                <a:tc>
-                  <a:txBody>
-                    <a:bodyPr/>
-                    <a:lstStyle/>
-                    <a:p>
-                      <a:pPr indent="0" marL="0">
-                        <a:buNone/>
-                      </a:pPr>
-                      <a:r>
-                        <a:rPr lang="en-US" sz="1300" b="1" dirty="0">
-                          <a:solidFill>
-                            <a:srgbClr val="10161F"/>
-                          </a:solidFill>
-                          <a:latin typeface="Pretendard" pitchFamily="34" charset="0"/>
-                          <a:ea typeface="Pretendard" pitchFamily="34" charset="-122"/>
-                          <a:cs typeface="Pretendard" pitchFamily="34" charset="-120"/>
-                        </a:rPr>
-                        <a:t>목표 </a:t>
-                      </a:r>
-                      <a:pPr indent="0" marL="0">
-                        <a:buNone/>
-                      </a:pPr>
-                      <a:r>
-                        <a:rPr lang="en-US" sz="1300" b="1" dirty="0">
-                          <a:solidFill>
-                            <a:srgbClr val="10161F"/>
-                          </a:solidFill>
-                          <a:latin typeface="Pretendard" pitchFamily="34" charset="0"/>
-                          <a:ea typeface="Pretendard" pitchFamily="34" charset="-122"/>
-                          <a:cs typeface="Pretendard" pitchFamily="34" charset="-120"/>
-                        </a:rPr>
-                        <a:t>시세차익</a:t>
-                      </a:r>
-                      <a:endParaRPr lang="en-US" sz="1300" dirty="0">
-                        <a:latin typeface="Pretendard" charset="0"/>
-                        <a:ea typeface="Pretendard" charset="0"/>
-                        <a:cs typeface="Pretendard" charset="0"/>
-                      </a:endParaRPr>
-                    </a:p>
-                  </a:txBody>
-                  <a:tcPr marL="50800" marR="50800" marT="25400" marB="25400" anchor="ctr">
-                    <a:lnL w="3810" cap="flat" cmpd="sng" algn="ctr">
-                      <a:solidFill>
-                        <a:srgbClr val="CBD5E0"/>
-                      </a:solidFill>
-                      <a:prstDash val="solid"/>
-                      <a:round/>
-                      <a:headEnd type="none" w="med" len="med"/>
-                      <a:tailEnd type="none" w="med" len="med"/>
-                    </a:lnL>
-                    <a:lnR w="3810" cap="flat" cmpd="sng" algn="ctr">
-                      <a:solidFill>
-                        <a:srgbClr val="CBD5E0"/>
-                      </a:solidFill>
-                      <a:prstDash val="solid"/>
-                      <a:round/>
-                      <a:headEnd type="none" w="med" len="med"/>
-                      <a:tailEnd type="none" w="med" len="med"/>
-                    </a:lnR>
-                    <a:lnT w="3810" cap="flat" cmpd="sng" algn="ctr">
-                      <a:solidFill>
-                        <a:srgbClr val="CBD5E0"/>
-                      </a:solidFill>
-                      <a:prstDash val="solid"/>
-                      <a:round/>
-                      <a:headEnd type="none" w="med" len="med"/>
-                      <a:tailEnd type="none" w="med" len="med"/>
-                    </a:lnT>
-                    <a:lnB w="3810" cap="flat" cmpd="sng" algn="ctr">
-                      <a:solidFill>
-                        <a:srgbClr val="CBD5E0"/>
-                      </a:solidFill>
-                      <a:prstDash val="solid"/>
-                      <a:round/>
-                      <a:headEnd type="none" w="med" len="med"/>
-                      <a:tailEnd type="none" w="med" len="med"/>
-                    </a:lnB>
-                    <a:solidFill>
-                      <a:srgbClr val="F7FAFC"/>
-                    </a:solidFill>
-                  </a:tcPr>
-                </a:tc>
-                <a:tc>
-                  <a:txBody>
-                    <a:bodyPr/>
-                    <a:lstStyle/>
-                    <a:p>
-                      <a:pPr indent="0" marL="0">
-                        <a:buNone/>
-                      </a:pPr>
-                      <a:r>
-                        <a:rPr lang="en-US" sz="1300" dirty="0">
-                          <a:solidFill>
-                            <a:srgbClr val="10161F"/>
-                          </a:solidFill>
-                          <a:latin typeface="Pretendard" pitchFamily="34" charset="0"/>
-                          <a:ea typeface="Pretendard" pitchFamily="34" charset="-122"/>
-                          <a:cs typeface="Pretendard" pitchFamily="34" charset="-120"/>
-                        </a:rPr>
-                        <a:t>매수 </a:t>
-                      </a:r>
-                      <a:pPr indent="0" marL="0">
-                        <a:buNone/>
-                      </a:pPr>
-                      <a:r>
-                        <a:rPr lang="en-US" sz="1300" dirty="0">
-                          <a:solidFill>
-                            <a:srgbClr val="10161F"/>
-                          </a:solidFill>
-                          <a:latin typeface="Pretendard" pitchFamily="34" charset="0"/>
-                          <a:ea typeface="Pretendard" pitchFamily="34" charset="-122"/>
-                          <a:cs typeface="Pretendard" pitchFamily="34" charset="-120"/>
-                        </a:rPr>
-                        <a:t>희망가 </a:t>
-                      </a:r>
-                      <a:pPr indent="0" marL="0">
-                        <a:buNone/>
-                      </a:pPr>
-                      <a:r>
-                        <a:rPr lang="en-US" sz="1300" dirty="0">
-                          <a:solidFill>
-                            <a:srgbClr val="10161F"/>
-                          </a:solidFill>
-                          <a:latin typeface="Pretendard" pitchFamily="34" charset="0"/>
-                          <a:ea typeface="Pretendard" pitchFamily="34" charset="-122"/>
-                          <a:cs typeface="Pretendard" pitchFamily="34" charset="-120"/>
-                        </a:rPr>
-                        <a:t>대비 </a:t>
-                      </a:r>
-                      <a:pPr indent="0" marL="0">
-                        <a:buNone/>
-                      </a:pPr>
-                      <a:r>
-                        <a:rPr lang="en-US" sz="1300" dirty="0">
-                          <a:solidFill>
-                            <a:srgbClr val="10161F"/>
-                          </a:solidFill>
-                          <a:latin typeface="Pretendard" pitchFamily="34" charset="0"/>
-                          <a:ea typeface="Pretendard" pitchFamily="34" charset="-122"/>
-                          <a:cs typeface="Pretendard" pitchFamily="34" charset="-120"/>
-                        </a:rPr>
-                        <a:t>갭</a:t>
-                      </a:r>
-                      <a:endParaRPr lang="en-US" sz="1300" dirty="0">
-                        <a:latin typeface="Pretendard" charset="0"/>
-                        <a:ea typeface="Pretendard" charset="0"/>
-                        <a:cs typeface="Pretendard" charset="0"/>
-                      </a:endParaRPr>
-                    </a:p>
-                  </a:txBody>
-                  <a:tcPr marL="50800" marR="50800" marT="25400" marB="25400" anchor="ctr">
-                    <a:lnL w="3810" cap="flat" cmpd="sng" algn="ctr">
-                      <a:solidFill>
-                        <a:srgbClr val="CBD5E0"/>
-                      </a:solidFill>
-                      <a:prstDash val="solid"/>
-                      <a:round/>
-                      <a:headEnd type="none" w="med" len="med"/>
-                      <a:tailEnd type="none" w="med" len="med"/>
-                    </a:lnL>
-                    <a:lnR w="3810" cap="flat" cmpd="sng" algn="ctr">
-                      <a:solidFill>
-                        <a:srgbClr val="CBD5E0"/>
-                      </a:solidFill>
-                      <a:prstDash val="solid"/>
-                      <a:round/>
-                      <a:headEnd type="none" w="med" len="med"/>
-                      <a:tailEnd type="none" w="med" len="med"/>
-                    </a:lnR>
-                    <a:lnT w="3810" cap="flat" cmpd="sng" algn="ctr">
-                      <a:solidFill>
-                        <a:srgbClr val="CBD5E0"/>
-                      </a:solidFill>
-                      <a:prstDash val="solid"/>
-                      <a:round/>
-                      <a:headEnd type="none" w="med" len="med"/>
-                      <a:tailEnd type="none" w="med" len="med"/>
-                    </a:lnT>
-                    <a:lnB w="3810" cap="flat" cmpd="sng" algn="ctr">
-                      <a:solidFill>
-                        <a:srgbClr val="CBD5E0"/>
-                      </a:solidFill>
-                      <a:prstDash val="solid"/>
-                      <a:round/>
-                      <a:headEnd type="none" w="med" len="med"/>
-                      <a:tailEnd type="none" w="med" len="med"/>
-                    </a:lnB>
-                    <a:solidFill>
-                      <a:srgbClr val="F7FAFC"/>
-                    </a:solidFill>
-                  </a:tcPr>
-                </a:tc>
-                <a:tc>
-                  <a:txBody>
-                    <a:bodyPr/>
-                    <a:lstStyle/>
-                    <a:p>
-                      <a:pPr indent="0" marL="0">
-                        <a:buNone/>
-                      </a:pPr>
-                      <a:r>
-                        <a:rPr lang="en-US" sz="1300" dirty="0">
-                          <a:solidFill>
-                            <a:srgbClr val="10161F"/>
-                          </a:solidFill>
-                          <a:latin typeface="Pretendard" pitchFamily="34" charset="0"/>
-                          <a:ea typeface="Pretendard" pitchFamily="34" charset="-122"/>
-                          <a:cs typeface="Pretendard" pitchFamily="34" charset="-120"/>
-                        </a:rPr>
-                        <a:t>자본 </a:t>
-                      </a:r>
-                      <a:pPr indent="0" marL="0">
-                        <a:buNone/>
-                      </a:pPr>
-                      <a:r>
-                        <a:rPr lang="en-US" sz="1300" dirty="0">
-                          <a:solidFill>
-                            <a:srgbClr val="10161F"/>
-                          </a:solidFill>
-                          <a:latin typeface="Pretendard" pitchFamily="34" charset="0"/>
-                          <a:ea typeface="Pretendard" pitchFamily="34" charset="-122"/>
-                          <a:cs typeface="Pretendard" pitchFamily="34" charset="-120"/>
-                        </a:rPr>
-                        <a:t>이득</a:t>
-                      </a:r>
-                      <a:endParaRPr lang="en-US" sz="1300" dirty="0">
-                        <a:latin typeface="Pretendard" charset="0"/>
-                        <a:ea typeface="Pretendard" charset="0"/>
-                        <a:cs typeface="Pretendard" charset="0"/>
-                      </a:endParaRPr>
-                    </a:p>
-                  </a:txBody>
-                  <a:tcPr marL="50800" marR="50800" marT="25400" marB="25400" anchor="ctr">
-                    <a:lnL w="3810" cap="flat" cmpd="sng" algn="ctr">
-                      <a:solidFill>
-                        <a:srgbClr val="CBD5E0"/>
-                      </a:solidFill>
-                      <a:prstDash val="solid"/>
-                      <a:round/>
-                      <a:headEnd type="none" w="med" len="med"/>
-                      <a:tailEnd type="none" w="med" len="med"/>
-                    </a:lnL>
-                    <a:lnR w="3810" cap="flat" cmpd="sng" algn="ctr">
-                      <a:solidFill>
-                        <a:srgbClr val="CBD5E0"/>
-                      </a:solidFill>
-                      <a:prstDash val="solid"/>
-                      <a:round/>
-                      <a:headEnd type="none" w="med" len="med"/>
-                      <a:tailEnd type="none" w="med" len="med"/>
-                    </a:lnR>
-                    <a:lnT w="3810" cap="flat" cmpd="sng" algn="ctr">
-                      <a:solidFill>
-                        <a:srgbClr val="CBD5E0"/>
-                      </a:solidFill>
-                      <a:prstDash val="solid"/>
-                      <a:round/>
-                      <a:headEnd type="none" w="med" len="med"/>
-                      <a:tailEnd type="none" w="med" len="med"/>
-                    </a:lnT>
-                    <a:lnB w="3810" cap="flat" cmpd="sng" algn="ctr">
-                      <a:solidFill>
-                        <a:srgbClr val="CBD5E0"/>
-                      </a:solidFill>
-                      <a:prstDash val="solid"/>
-                      <a:round/>
-                      <a:headEnd type="none" w="med" len="med"/>
-                      <a:tailEnd type="none" w="med" len="med"/>
-                    </a:lnB>
-                    <a:solidFill>
-                      <a:srgbClr val="F7FAFC"/>
-                    </a:solidFill>
-                  </a:tcPr>
-                </a:tc>
-              </a:tr>
-              <a:tr h="438912">
-                <a:tc>
-                  <a:txBody>
-                    <a:bodyPr/>
-                    <a:lstStyle/>
-                    <a:p>
-                      <a:pPr indent="0" marL="0">
-                        <a:buNone/>
-                      </a:pPr>
-                      <a:r>
-                        <a:rPr lang="en-US" sz="1300" b="1" dirty="0">
-                          <a:solidFill>
-                            <a:srgbClr val="10161F"/>
-                          </a:solidFill>
-                          <a:latin typeface="Pretendard" pitchFamily="34" charset="0"/>
-                          <a:ea typeface="Pretendard" pitchFamily="34" charset="-122"/>
-                          <a:cs typeface="Pretendard" pitchFamily="34" charset="-120"/>
-                        </a:rPr>
-                        <a:t>목표 </a:t>
-                      </a:r>
-                      <a:pPr indent="0" marL="0">
-                        <a:buNone/>
-                      </a:pPr>
-                      <a:r>
-                        <a:rPr lang="en-US" sz="1300" b="1" dirty="0">
-                          <a:solidFill>
-                            <a:srgbClr val="10161F"/>
-                          </a:solidFill>
-                          <a:latin typeface="Pretendard" pitchFamily="34" charset="0"/>
-                          <a:ea typeface="Pretendard" pitchFamily="34" charset="-122"/>
-                          <a:cs typeface="Pretendard" pitchFamily="34" charset="-120"/>
-                        </a:rPr>
-                        <a:t>보유기간 </a:t>
-                      </a:r>
-                      <a:pPr indent="0" marL="0">
-                        <a:buNone/>
-                      </a:pPr>
-                      <a:r>
-                        <a:rPr lang="en-US" sz="1300" b="1" dirty="0">
-                          <a:solidFill>
-                            <a:srgbClr val="10161F"/>
-                          </a:solidFill>
-                          <a:latin typeface="Pretendard" pitchFamily="34" charset="0"/>
-                          <a:ea typeface="Pretendard" pitchFamily="34" charset="-122"/>
-                          <a:cs typeface="Pretendard" pitchFamily="34" charset="-120"/>
-                        </a:rPr>
-                        <a:t>수익률 </a:t>
-                      </a:r>
-                      <a:pPr indent="0" marL="0">
-                        <a:buNone/>
-                      </a:pPr>
-                      <a:r>
-                        <a:rPr lang="en-US" sz="1300" b="1" dirty="0">
-                          <a:solidFill>
-                            <a:srgbClr val="10161F"/>
-                          </a:solidFill>
-                          <a:latin typeface="Pretendard" pitchFamily="34" charset="0"/>
-                          <a:ea typeface="Pretendard" pitchFamily="34" charset="-122"/>
-                          <a:cs typeface="Pretendard" pitchFamily="34" charset="-120"/>
-                        </a:rPr>
-                        <a:t>(HPR)</a:t>
-                      </a:r>
-                      <a:endParaRPr lang="en-US" sz="1300" dirty="0">
-                        <a:latin typeface="Pretendard" charset="0"/>
-                        <a:ea typeface="Pretendard" charset="0"/>
-                        <a:cs typeface="Pretendard" charset="0"/>
-                      </a:endParaRPr>
-                    </a:p>
-                  </a:txBody>
-                  <a:tcPr marL="50800" marR="50800" marT="25400" marB="25400" anchor="ctr">
-                    <a:lnL w="3810" cap="flat" cmpd="sng" algn="ctr">
-                      <a:solidFill>
-                        <a:srgbClr val="CBD5E0"/>
-                      </a:solidFill>
-                      <a:prstDash val="solid"/>
-                      <a:round/>
-                      <a:headEnd type="none" w="med" len="med"/>
-                      <a:tailEnd type="none" w="med" len="med"/>
-                    </a:lnL>
-                    <a:lnR w="3810" cap="flat" cmpd="sng" algn="ctr">
-                      <a:solidFill>
-                        <a:srgbClr val="CBD5E0"/>
-                      </a:solidFill>
-                      <a:prstDash val="solid"/>
-                      <a:round/>
-                      <a:headEnd type="none" w="med" len="med"/>
-                      <a:tailEnd type="none" w="med" len="med"/>
-                    </a:lnR>
-                    <a:lnT w="3810" cap="flat" cmpd="sng" algn="ctr">
-                      <a:solidFill>
-                        <a:srgbClr val="CBD5E0"/>
-                      </a:solidFill>
-                      <a:prstDash val="solid"/>
-                      <a:round/>
-                      <a:headEnd type="none" w="med" len="med"/>
-                      <a:tailEnd type="none" w="med" len="med"/>
-                    </a:lnT>
-                    <a:lnB w="3810" cap="flat" cmpd="sng" algn="ctr">
-                      <a:solidFill>
-                        <a:srgbClr val="CBD5E0"/>
-                      </a:solidFill>
-                      <a:prstDash val="solid"/>
-                      <a:round/>
-                      <a:headEnd type="none" w="med" len="med"/>
-                      <a:tailEnd type="none" w="med" len="med"/>
-                    </a:lnB>
-                    <a:solidFill>
-                      <a:srgbClr val="FFFFFF"/>
-                    </a:solidFill>
-                  </a:tcPr>
-                </a:tc>
-                <a:tc>
-                  <a:txBody>
-                    <a:bodyPr/>
-                    <a:lstStyle/>
-                    <a:p>
-                      <a:pPr indent="0" marL="0">
-                        <a:buNone/>
-                      </a:pPr>
-                      <a:r>
-                        <a:rPr lang="en-US" sz="1300" dirty="0">
-                          <a:solidFill>
-                            <a:srgbClr val="10161F"/>
-                          </a:solidFill>
-                          <a:latin typeface="Pretendard" pitchFamily="34" charset="0"/>
-                          <a:ea typeface="Pretendard" pitchFamily="34" charset="-122"/>
-                          <a:cs typeface="Pretendard" pitchFamily="34" charset="-120"/>
-                        </a:rPr>
-                        <a:t>산출 </a:t>
-                      </a:r>
-                      <a:pPr indent="0" marL="0">
-                        <a:buNone/>
-                      </a:pPr>
-                      <a:r>
-                        <a:rPr lang="en-US" sz="1300" dirty="0">
-                          <a:solidFill>
-                            <a:srgbClr val="10161F"/>
-                          </a:solidFill>
-                          <a:latin typeface="Pretendard" pitchFamily="34" charset="0"/>
-                          <a:ea typeface="Pretendard" pitchFamily="34" charset="-122"/>
-                          <a:cs typeface="Pretendard" pitchFamily="34" charset="-120"/>
-                        </a:rPr>
-                        <a:t>불가 </a:t>
-                      </a:r>
-                      <a:pPr indent="0" marL="0">
-                        <a:buNone/>
-                      </a:pPr>
-                      <a:r>
-                        <a:rPr lang="en-US" sz="1300" dirty="0">
-                          <a:solidFill>
-                            <a:srgbClr val="10161F"/>
-                          </a:solidFill>
-                          <a:latin typeface="Pretendard" pitchFamily="34" charset="0"/>
-                          <a:ea typeface="Pretendard" pitchFamily="34" charset="-122"/>
-                          <a:cs typeface="Pretendard" pitchFamily="34" charset="-120"/>
-                        </a:rPr>
-                        <a:t>(매도가 </a:t>
-                      </a:r>
-                      <a:pPr indent="0" marL="0">
-                        <a:buNone/>
-                      </a:pPr>
-                      <a:r>
-                        <a:rPr lang="en-US" sz="1300" dirty="0">
-                          <a:solidFill>
-                            <a:srgbClr val="10161F"/>
-                          </a:solidFill>
-                          <a:latin typeface="Pretendard" pitchFamily="34" charset="0"/>
-                          <a:ea typeface="Pretendard" pitchFamily="34" charset="-122"/>
-                          <a:cs typeface="Pretendard" pitchFamily="34" charset="-120"/>
-                        </a:rPr>
-                        <a:t>데이터 </a:t>
-                      </a:r>
-                      <a:pPr indent="0" marL="0">
-                        <a:buNone/>
-                      </a:pPr>
-                      <a:r>
-                        <a:rPr lang="en-US" sz="1300" dirty="0">
-                          <a:solidFill>
-                            <a:srgbClr val="10161F"/>
-                          </a:solidFill>
-                          <a:latin typeface="Pretendard" pitchFamily="34" charset="0"/>
-                          <a:ea typeface="Pretendard" pitchFamily="34" charset="-122"/>
-                          <a:cs typeface="Pretendard" pitchFamily="34" charset="-120"/>
-                        </a:rPr>
-                        <a:t>부족)</a:t>
-                      </a:r>
-                      <a:endParaRPr lang="en-US" sz="1300" dirty="0">
-                        <a:latin typeface="Pretendard" charset="0"/>
-                        <a:ea typeface="Pretendard" charset="0"/>
-                        <a:cs typeface="Pretendard" charset="0"/>
-                      </a:endParaRPr>
-                    </a:p>
-                  </a:txBody>
-                  <a:tcPr marL="50800" marR="50800" marT="25400" marB="25400" anchor="ctr">
-                    <a:lnL w="3810" cap="flat" cmpd="sng" algn="ctr">
-                      <a:solidFill>
-                        <a:srgbClr val="CBD5E0"/>
-                      </a:solidFill>
-                      <a:prstDash val="solid"/>
-                      <a:round/>
-                      <a:headEnd type="none" w="med" len="med"/>
-                      <a:tailEnd type="none" w="med" len="med"/>
-                    </a:lnL>
-                    <a:lnR w="3810" cap="flat" cmpd="sng" algn="ctr">
-                      <a:solidFill>
-                        <a:srgbClr val="CBD5E0"/>
-                      </a:solidFill>
-                      <a:prstDash val="solid"/>
-                      <a:round/>
-                      <a:headEnd type="none" w="med" len="med"/>
-                      <a:tailEnd type="none" w="med" len="med"/>
-                    </a:lnR>
-                    <a:lnT w="3810" cap="flat" cmpd="sng" algn="ctr">
-                      <a:solidFill>
-                        <a:srgbClr val="CBD5E0"/>
-                      </a:solidFill>
-                      <a:prstDash val="solid"/>
-                      <a:round/>
-                      <a:headEnd type="none" w="med" len="med"/>
-                      <a:tailEnd type="none" w="med" len="med"/>
-                    </a:lnT>
-                    <a:lnB w="3810" cap="flat" cmpd="sng" algn="ctr">
-                      <a:solidFill>
-                        <a:srgbClr val="CBD5E0"/>
-                      </a:solidFill>
-                      <a:prstDash val="solid"/>
-                      <a:round/>
-                      <a:headEnd type="none" w="med" len="med"/>
-                      <a:tailEnd type="none" w="med" len="med"/>
-                    </a:lnB>
-                    <a:solidFill>
-                      <a:srgbClr val="FFFFFF"/>
-                    </a:solidFill>
-                  </a:tcPr>
-                </a:tc>
-                <a:tc>
-                  <a:txBody>
-                    <a:bodyPr/>
-                    <a:lstStyle/>
-                    <a:p>
-                      <a:pPr indent="0" marL="0">
-                        <a:buNone/>
-                      </a:pPr>
-                      <a:r>
-                        <a:rPr lang="en-US" sz="1300" dirty="0">
-                          <a:solidFill>
-                            <a:srgbClr val="10161F"/>
-                          </a:solidFill>
-                          <a:latin typeface="Pretendard" pitchFamily="34" charset="0"/>
-                          <a:ea typeface="Pretendard" pitchFamily="34" charset="-122"/>
-                          <a:cs typeface="Pretendard" pitchFamily="34" charset="-120"/>
-                        </a:rPr>
-                        <a:t>보유 </a:t>
-                      </a:r>
-                      <a:pPr indent="0" marL="0">
-                        <a:buNone/>
-                      </a:pPr>
-                      <a:r>
-                        <a:rPr lang="en-US" sz="1300" dirty="0">
-                          <a:solidFill>
-                            <a:srgbClr val="10161F"/>
-                          </a:solidFill>
-                          <a:latin typeface="Pretendard" pitchFamily="34" charset="0"/>
-                          <a:ea typeface="Pretendard" pitchFamily="34" charset="-122"/>
-                          <a:cs typeface="Pretendard" pitchFamily="34" charset="-120"/>
-                        </a:rPr>
-                        <a:t>기간 </a:t>
-                      </a:r>
-                      <a:pPr indent="0" marL="0">
-                        <a:buNone/>
-                      </a:pPr>
-                      <a:r>
-                        <a:rPr lang="en-US" sz="1300" dirty="0">
-                          <a:solidFill>
-                            <a:srgbClr val="10161F"/>
-                          </a:solidFill>
-                          <a:latin typeface="Pretendard" pitchFamily="34" charset="0"/>
-                          <a:ea typeface="Pretendard" pitchFamily="34" charset="-122"/>
-                          <a:cs typeface="Pretendard" pitchFamily="34" charset="-120"/>
-                        </a:rPr>
-                        <a:t>2~3년 </a:t>
-                      </a:r>
-                      <a:pPr indent="0" marL="0">
-                        <a:buNone/>
-                      </a:pPr>
-                      <a:r>
-                        <a:rPr lang="en-US" sz="1300" dirty="0">
-                          <a:solidFill>
-                            <a:srgbClr val="10161F"/>
-                          </a:solidFill>
-                          <a:latin typeface="Pretendard" pitchFamily="34" charset="0"/>
-                          <a:ea typeface="Pretendard" pitchFamily="34" charset="-122"/>
-                          <a:cs typeface="Pretendard" pitchFamily="34" charset="-120"/>
-                        </a:rPr>
-                        <a:t>가정</a:t>
-                      </a:r>
-                      <a:endParaRPr lang="en-US" sz="1300" dirty="0">
-                        <a:latin typeface="Pretendard" charset="0"/>
-                        <a:ea typeface="Pretendard" charset="0"/>
-                        <a:cs typeface="Pretendard" charset="0"/>
-                      </a:endParaRPr>
-                    </a:p>
-                  </a:txBody>
-                  <a:tcPr marL="50800" marR="50800" marT="25400" marB="25400" anchor="ctr">
-                    <a:lnL w="3810" cap="flat" cmpd="sng" algn="ctr">
-                      <a:solidFill>
-                        <a:srgbClr val="CBD5E0"/>
-                      </a:solidFill>
-                      <a:prstDash val="solid"/>
-                      <a:round/>
-                      <a:headEnd type="none" w="med" len="med"/>
-                      <a:tailEnd type="none" w="med" len="med"/>
-                    </a:lnL>
-                    <a:lnR w="3810" cap="flat" cmpd="sng" algn="ctr">
-                      <a:solidFill>
-                        <a:srgbClr val="CBD5E0"/>
-                      </a:solidFill>
-                      <a:prstDash val="solid"/>
-                      <a:round/>
-                      <a:headEnd type="none" w="med" len="med"/>
-                      <a:tailEnd type="none" w="med" len="med"/>
-                    </a:lnR>
-                    <a:lnT w="3810" cap="flat" cmpd="sng" algn="ctr">
-                      <a:solidFill>
-                        <a:srgbClr val="CBD5E0"/>
-                      </a:solidFill>
-                      <a:prstDash val="solid"/>
-                      <a:round/>
-                      <a:headEnd type="none" w="med" len="med"/>
-                      <a:tailEnd type="none" w="med" len="med"/>
-                    </a:lnT>
-                    <a:lnB w="3810" cap="flat" cmpd="sng" algn="ctr">
-                      <a:solidFill>
-                        <a:srgbClr val="CBD5E0"/>
-                      </a:solidFill>
-                      <a:prstDash val="solid"/>
-                      <a:round/>
-                      <a:headEnd type="none" w="med" len="med"/>
-                      <a:tailEnd type="none" w="med" len="med"/>
-                    </a:lnB>
-                    <a:solidFill>
-                      <a:srgbClr val="FFFFFF"/>
-                    </a:solidFill>
-                  </a:tcPr>
-                </a:tc>
-              </a:tr>
-            </a:tbl>
-          </a:graphicData>
-        </a:graphic>
-      </p:graphicFrame>
-      <p:sp>
-        <p:nvSpPr>
-          <p:cNvPr id="7" name="Text 4"/>
-          <p:cNvSpPr/>
-          <p:nvPr/>
-        </p:nvSpPr>
-        <p:spPr>
-          <a:xfrm>
-            <a:off x="566928" y="6382512"/>
-            <a:ext cx="7315200" cy="219456"/>
+      <p:sp>
+        <p:nvSpPr>
+          <p:cNvPr id="6" name="Text 4"/>
+          <p:cNvSpPr/>
+          <p:nvPr/>
+        </p:nvSpPr>
+        <p:spPr>
+          <a:xfrm>
+            <a:off x="566928" y="1645920"/>
+            <a:ext cx="4201979" cy="402336"/>
           </a:xfrm>
           <a:prstGeom prst="rect">
             <a:avLst/>
@@ -8350,10 +6553,13 @@
           <a:lstStyle/>
           <a:p>
             <a:pPr indent="0" marL="0">
-              <a:buNone/>
-            </a:pPr>
-            <a:r>
-              <a:rPr lang="en-US" sz="800" dirty="0">
+              <a:lnSpc>
+                <a:spcPct val="120000"/>
+              </a:lnSpc>
+              <a:buNone/>
+            </a:pPr>
+            <a:r>
+              <a:rPr lang="en-US" sz="1400" dirty="0">
                 <a:solidFill>
                   <a:srgbClr val="718096"/>
                 </a:solidFill>
@@ -8361,6 +6567,87 @@
                 <a:ea typeface="Pretendard" pitchFamily="34" charset="-122"/>
                 <a:cs typeface="Pretendard" pitchFamily="34" charset="-120"/>
               </a:rPr>
+              <a:t>{"ok"</a:t>
+            </a:r>
+            <a:endParaRPr lang="en-US" sz="1400" dirty="0"/>
+          </a:p>
+        </p:txBody>
+      </p:sp>
+      <p:sp>
+        <p:nvSpPr>
+          <p:cNvPr id="7" name="Text 5"/>
+          <p:cNvSpPr/>
+          <p:nvPr/>
+        </p:nvSpPr>
+        <p:spPr>
+          <a:xfrm>
+            <a:off x="4768907" y="1645920"/>
+            <a:ext cx="6855860" cy="402336"/>
+          </a:xfrm>
+          <a:prstGeom prst="rect">
+            <a:avLst/>
+          </a:prstGeom>
+          <a:noFill/>
+          <a:ln/>
+        </p:spPr>
+        <p:txBody>
+          <a:bodyPr wrap="square" lIns="0" tIns="0" rIns="0" bIns="0" rtlCol="0" anchor="ctr"/>
+          <a:lstStyle/>
+          <a:p>
+            <a:pPr indent="0" marL="0">
+              <a:lnSpc>
+                <a:spcPct val="120000"/>
+              </a:lnSpc>
+              <a:buNone/>
+            </a:pPr>
+            <a:r>
+              <a:rPr lang="en-US" sz="1400" b="1" dirty="0">
+                <a:solidFill>
+                  <a:srgbClr val="10161F"/>
+                </a:solidFill>
+                <a:latin typeface="Pretendard" pitchFamily="34" charset="0"/>
+                <a:ea typeface="Pretendard" pitchFamily="34" charset="-122"/>
+                <a:cs typeface="Pretendard" pitchFamily="34" charset="-120"/>
+              </a:rPr>
+              <a:t>true,"mocked":true,"extractedFields":{"area_signal":"역삼","asset_type":"오피스빌딩","price_band":"300억","size_signal":"3000평(약 9917.4㎡)"},"extractedFacts":{"region":"역삼","exactAddressCandidate":"역삼동 742-1","assetType":"오피스빌딩","priceText":"300억","sizeText":"3000평(약 9917.4㎡)","currentUse":"오피스","currentUseSignal":"근린생활시설","leaseSignal":"임대중","vacancySignal":"공실없음","tenantNames":"쿠팡","네이버","unitRentTexts":"301호: 1500만","sellerMotivationText":"자산 효율화","brokerNotes":"초역세권 매물"},"detectedSensitiveFields":"exact_address","tenant_name","ambiguousFields":,"warnings":,"areaSignal":"역삼","assetType":"오피스빌딩","priceBand":"300억","sizeSignal":"3000평(약 9917.4㎡)","dealType":"매각","buildingName":"역삼 센트럴타워","exactAddress":"역삼동 742-1","totalFloorArea":9917.3,"buildYear":2015,"currentUseSignal":"근린생활시설","vacancySignal":"공실 없음","fitSummary":"초역세권 근생 빌딩으로 시행/사옥 매입에 최적화","cautionSummary":"주요 임차인 만기 조율 필요","hiddenFields":"exact_address","seller_motivation","confidence":{"areaSignal":"confirmed","assetType":"confirmed","priceBand":"ai_hypothesis","fitSummary":"ai_hypothesis"},"missingData":"sizeSignal","boundaryNote":"본 자료는 실거래 통계 기반 참고치입니다.","buyerType":"법인 사옥형","budgetRange":{"min":50,"max":80,"display":"50억~80억"},"preferredRegions":"강남","성수","assetTypes":"꼬마빌딩","사옥용","purchasePurpose":"사옥용 매입","mustHave":"초역세권","주차","niceToHave":"테라스","루프탑","riskTolerance":"medium","financingNote":"자본금 50% 준비","missingQuestions":"구체적인 입주 시기가 언제인가요?","선호하는 수익률이 있나요?","privacyNotes":"연락처 비공개","fitReasons":"매수자 예산(50-80억)에 부합하는 매물입니다.","요청하신 성수/강남 권역에 해당합니다.","cautionReasons":"요청한 용도와 달리 명도 협의가 다소 필요합니다.","recommendedNextAction":"현장 답사 제안","kakaoMessage":"안녕하세요! 요청하신 조건에 부합하는 추천 매물이 있어 안내해 드립니다. 확인해보시고 피드백 부탁드립니다.","title":"강남 역삼역 초역세권 오피스 사옥용 빌딩 매각","shortSummary":"역삼역 도보 5분 거리의 준신축급 대형 오피스빌딩입니다.","dealPoints":"초역세권","사옥 최적","cautionPoints":"명도 조율 필요","hiddenInfoNotice":"보증금 및 지번은 인가 후 확인 가능","gateMessage":"G1 등급 등록이 필요합니다.","kakaoText":"강남 역삼역 오피스 빌딩 매각 안내입니다.","exactUnitCandidate":"101호","floor":"1층","areaSqmText":"150㎡","spaceType":"office","depositText":"5000만","monthlyRentText":"400만","maintenanceFeeText":"50만","availableFromText":"즉시입주","leaseTermMonthsText":"24","incentivesText":"렌트프리 2개월","restrictions":,"landlordIdentity":"김성수","currentTenant":"스타트업","vacancyReason":"이전 확장","rentNegotiation":"협의 가능","region":"성수동","areaSqm":150,"deposit":5000,"monthlyRent":400,"maintenanceFee":50,"availableFrom":"즉시입주","leaseTermMonths":24,"incentives":{"rentFreeMonths":2,"interiorSupport":"일부 인테리어 지원","freeRentDetail":"렌트프리 2개월 지원"},"shortSummaryLease":"성수역 도보 5분 거리 1층 리테일 상가 매물입니다."}</a:t>
+            </a:r>
+            <a:endParaRPr lang="en-US" sz="1400" dirty="0"/>
+          </a:p>
+        </p:txBody>
+      </p:sp>
+      <p:sp>
+        <p:nvSpPr>
+          <p:cNvPr id="8" name="Text 6"/>
+          <p:cNvSpPr/>
+          <p:nvPr/>
+        </p:nvSpPr>
+        <p:spPr>
+          <a:xfrm>
+            <a:off x="566928" y="6382512"/>
+            <a:ext cx="7315200" cy="219456"/>
+          </a:xfrm>
+          <a:prstGeom prst="rect">
+            <a:avLst/>
+          </a:prstGeom>
+          <a:noFill/>
+          <a:ln/>
+        </p:spPr>
+        <p:txBody>
+          <a:bodyPr wrap="square" lIns="0" tIns="0" rIns="0" bIns="0" rtlCol="0" anchor="ctr"/>
+          <a:lstStyle/>
+          <a:p>
+            <a:pPr indent="0" marL="0">
+              <a:buNone/>
+            </a:pPr>
+            <a:r>
+              <a:rPr lang="en-US" sz="800" dirty="0">
+                <a:solidFill>
+                  <a:srgbClr val="718096"/>
+                </a:solidFill>
+                <a:latin typeface="Pretendard" pitchFamily="34" charset="0"/>
+                <a:ea typeface="Pretendard" pitchFamily="34" charset="-122"/>
+                <a:cs typeface="Pretendard" pitchFamily="34" charset="-120"/>
+              </a:rPr>
               <a:t>크리딜   |   </a:t>
             </a:r>
             <a:endParaRPr lang="en-US" sz="800" dirty="0"/>
@@ -8369,7 +6656,7 @@
       </p:sp>
       <p:sp>
         <p:nvSpPr>
-          <p:cNvPr id="8" name="Text 5"/>
+          <p:cNvPr id="9" name="Text 7"/>
           <p:cNvSpPr/>
           <p:nvPr/>
         </p:nvSpPr>
@@ -8902,13 +7189,6 @@
 <file path=ppt/slides/slide8.xml><?xml version="1.0" encoding="utf-8"?>
 <p:sld xmlns:a="http://schemas.openxmlformats.org/drawingml/2006/main" xmlns:r="http://schemas.openxmlformats.org/officeDocument/2006/relationships" xmlns:p="http://schemas.openxmlformats.org/presentationml/2006/main">
   <p:cSld name="Slide 8">
-    <p:bg>
-      <p:bgPr>
-        <a:solidFill>
-          <a:srgbClr val="FFFFFF"/>
-        </a:solidFill>
-      </p:bgPr>
-    </p:bg>
     <p:spTree>
       <p:nvGrpSpPr>
         <p:cNvPr id="1" name=""/>
@@ -9015,7 +7295,7 @@
                 <a:ea typeface="Arial" pitchFamily="34" charset="-122"/>
                 <a:cs typeface="Arial" pitchFamily="34" charset="-120"/>
               </a:rPr>
-              <a:t>Thesis</a:t>
+              <a:t>Checklist</a:t>
             </a:r>
             <a:endParaRPr lang="en-US" sz="950" dirty="0"/>
           </a:p>
@@ -9054,1273 +7334,101 @@
                 <a:ea typeface="Pretendard" pitchFamily="34" charset="-122"/>
                 <a:cs typeface="Pretendard" pitchFamily="34" charset="-120"/>
               </a:rPr>
-              <a:t>왜 지금 이 건물을 사야 하는가</a:t>
+              <a:t>섹션 상세</a:t>
             </a:r>
             <a:endParaRPr lang="en-US" sz="2300" dirty="0"/>
           </a:p>
         </p:txBody>
       </p:sp>
-      <p:graphicFrame>
-        <p:nvGraphicFramePr>
-          <p:cNvPr id="9" name="Table 0"/>
-          <p:cNvGraphicFramePr>
-            <a:graphicFrameLocks noGrp="1"/>
-          </p:cNvGraphicFramePr>
-          <p:nvPr>
-            <p:extLst>
-              <p:ext uri="{D42A27DB-BD31-4B8C-83A1-F6EECF244321}">
-                <p14:modId xmlns:p14="http://schemas.microsoft.com/office/powerpoint/2010/main" val="1579011935"/>
-              </p:ext>
-            </p:extLst>
-          </p:nvPr>
-        </p:nvGraphicFramePr>
-        <p:xfrm>
-          <a:off x="566928" y="4023360"/>
-          <a:ext cx="11057839" cy="914400"/>
-        </p:xfrm>
-        <a:graphic>
-          <a:graphicData uri="http://schemas.openxmlformats.org/drawingml/2006/table">
-            <a:tbl>
-              <a:tblPr/>
-              <a:tblGrid>
-                <a:gridCol w="2764460"/>
-                <a:gridCol w="2764460"/>
-                <a:gridCol w="2764460"/>
-                <a:gridCol w="2764460"/>
-              </a:tblGrid>
-              <a:tr h="329184">
-                <a:tc>
-                  <a:txBody>
-                    <a:bodyPr/>
-                    <a:lstStyle/>
-                    <a:p>
-                      <a:pPr indent="0" marL="0">
-                        <a:buNone/>
-                      </a:pPr>
-                      <a:r>
-                        <a:rPr lang="en-US" sz="1050" b="1" dirty="0">
-                          <a:solidFill>
-                            <a:srgbClr val="718096"/>
-                          </a:solidFill>
-                          <a:latin typeface="Pretendard" pitchFamily="34" charset="0"/>
-                          <a:ea typeface="Pretendard" pitchFamily="34" charset="-122"/>
-                          <a:cs typeface="Pretendard" pitchFamily="34" charset="-120"/>
-                        </a:rPr>
-                        <a:t>시나리오</a:t>
-                      </a:r>
-                      <a:endParaRPr lang="en-US" sz="1050" dirty="0">
-                        <a:latin typeface="Pretendard" charset="0"/>
-                        <a:ea typeface="Pretendard" charset="0"/>
-                        <a:cs typeface="Pretendard" charset="0"/>
-                      </a:endParaRPr>
-                    </a:p>
-                  </a:txBody>
-                  <a:tcPr marL="50800" marR="50800" marT="25400" marB="25400" anchor="ctr">
-                    <a:lnL w="3810" cap="flat" cmpd="sng" algn="ctr">
-                      <a:solidFill>
-                        <a:srgbClr val="CBD5E0"/>
-                      </a:solidFill>
-                      <a:prstDash val="solid"/>
-                      <a:round/>
-                      <a:headEnd type="none" w="med" len="med"/>
-                      <a:tailEnd type="none" w="med" len="med"/>
-                    </a:lnL>
-                    <a:lnR w="3810" cap="flat" cmpd="sng" algn="ctr">
-                      <a:solidFill>
-                        <a:srgbClr val="CBD5E0"/>
-                      </a:solidFill>
-                      <a:prstDash val="solid"/>
-                      <a:round/>
-                      <a:headEnd type="none" w="med" len="med"/>
-                      <a:tailEnd type="none" w="med" len="med"/>
-                    </a:lnR>
-                    <a:lnT w="3810" cap="flat" cmpd="sng" algn="ctr">
-                      <a:solidFill>
-                        <a:srgbClr val="CBD5E0"/>
-                      </a:solidFill>
-                      <a:prstDash val="solid"/>
-                      <a:round/>
-                      <a:headEnd type="none" w="med" len="med"/>
-                      <a:tailEnd type="none" w="med" len="med"/>
-                    </a:lnT>
-                    <a:lnB w="3810" cap="flat" cmpd="sng" algn="ctr">
-                      <a:solidFill>
-                        <a:srgbClr val="CBD5E0"/>
-                      </a:solidFill>
-                      <a:prstDash val="solid"/>
-                      <a:round/>
-                      <a:headEnd type="none" w="med" len="med"/>
-                      <a:tailEnd type="none" w="med" len="med"/>
-                    </a:lnB>
-                    <a:solidFill>
-                      <a:srgbClr val="F7FAFC"/>
-                    </a:solidFill>
-                  </a:tcPr>
-                </a:tc>
-                <a:tc>
-                  <a:txBody>
-                    <a:bodyPr/>
-                    <a:lstStyle/>
-                    <a:p>
-                      <a:pPr indent="0" marL="0">
-                        <a:buNone/>
-                      </a:pPr>
-                      <a:r>
-                        <a:rPr lang="en-US" sz="1050" b="1" dirty="0">
-                          <a:solidFill>
-                            <a:srgbClr val="718096"/>
-                          </a:solidFill>
-                          <a:latin typeface="Pretendard" pitchFamily="34" charset="0"/>
-                          <a:ea typeface="Pretendard" pitchFamily="34" charset="-122"/>
-                          <a:cs typeface="Pretendard" pitchFamily="34" charset="-120"/>
-                        </a:rPr>
-                        <a:t>NOI </a:t>
-                      </a:r>
-                      <a:pPr indent="0" marL="0">
-                        <a:buNone/>
-                      </a:pPr>
-                      <a:r>
-                        <a:rPr lang="en-US" sz="1050" b="1" dirty="0">
-                          <a:solidFill>
-                            <a:srgbClr val="718096"/>
-                          </a:solidFill>
-                          <a:latin typeface="Pretendard" pitchFamily="34" charset="0"/>
-                          <a:ea typeface="Pretendard" pitchFamily="34" charset="-122"/>
-                          <a:cs typeface="Pretendard" pitchFamily="34" charset="-120"/>
-                        </a:rPr>
-                        <a:t>개선</a:t>
-                      </a:r>
-                      <a:endParaRPr lang="en-US" sz="1050" dirty="0">
-                        <a:latin typeface="Pretendard" charset="0"/>
-                        <a:ea typeface="Pretendard" charset="0"/>
-                        <a:cs typeface="Pretendard" charset="0"/>
-                      </a:endParaRPr>
-                    </a:p>
-                  </a:txBody>
-                  <a:tcPr marL="50800" marR="50800" marT="25400" marB="25400" anchor="ctr">
-                    <a:lnL w="3810" cap="flat" cmpd="sng" algn="ctr">
-                      <a:solidFill>
-                        <a:srgbClr val="CBD5E0"/>
-                      </a:solidFill>
-                      <a:prstDash val="solid"/>
-                      <a:round/>
-                      <a:headEnd type="none" w="med" len="med"/>
-                      <a:tailEnd type="none" w="med" len="med"/>
-                    </a:lnL>
-                    <a:lnR w="3810" cap="flat" cmpd="sng" algn="ctr">
-                      <a:solidFill>
-                        <a:srgbClr val="CBD5E0"/>
-                      </a:solidFill>
-                      <a:prstDash val="solid"/>
-                      <a:round/>
-                      <a:headEnd type="none" w="med" len="med"/>
-                      <a:tailEnd type="none" w="med" len="med"/>
-                    </a:lnR>
-                    <a:lnT w="3810" cap="flat" cmpd="sng" algn="ctr">
-                      <a:solidFill>
-                        <a:srgbClr val="CBD5E0"/>
-                      </a:solidFill>
-                      <a:prstDash val="solid"/>
-                      <a:round/>
-                      <a:headEnd type="none" w="med" len="med"/>
-                      <a:tailEnd type="none" w="med" len="med"/>
-                    </a:lnT>
-                    <a:lnB w="3810" cap="flat" cmpd="sng" algn="ctr">
-                      <a:solidFill>
-                        <a:srgbClr val="CBD5E0"/>
-                      </a:solidFill>
-                      <a:prstDash val="solid"/>
-                      <a:round/>
-                      <a:headEnd type="none" w="med" len="med"/>
-                      <a:tailEnd type="none" w="med" len="med"/>
-                    </a:lnB>
-                    <a:solidFill>
-                      <a:srgbClr val="F7FAFC"/>
-                    </a:solidFill>
-                  </a:tcPr>
-                </a:tc>
-                <a:tc>
-                  <a:txBody>
-                    <a:bodyPr/>
-                    <a:lstStyle/>
-                    <a:p>
-                      <a:pPr indent="0" marL="0">
-                        <a:buNone/>
-                      </a:pPr>
-                      <a:r>
-                        <a:rPr lang="en-US" sz="1050" b="1" dirty="0">
-                          <a:solidFill>
-                            <a:srgbClr val="718096"/>
-                          </a:solidFill>
-                          <a:latin typeface="Pretendard" pitchFamily="34" charset="0"/>
-                          <a:ea typeface="Pretendard" pitchFamily="34" charset="-122"/>
-                          <a:cs typeface="Pretendard" pitchFamily="34" charset="-120"/>
-                        </a:rPr>
-                        <a:t>개선 </a:t>
-                      </a:r>
-                      <a:pPr indent="0" marL="0">
-                        <a:buNone/>
-                      </a:pPr>
-                      <a:r>
-                        <a:rPr lang="en-US" sz="1050" b="1" dirty="0">
-                          <a:solidFill>
-                            <a:srgbClr val="718096"/>
-                          </a:solidFill>
-                          <a:latin typeface="Pretendard" pitchFamily="34" charset="0"/>
-                          <a:ea typeface="Pretendard" pitchFamily="34" charset="-122"/>
-                          <a:cs typeface="Pretendard" pitchFamily="34" charset="-120"/>
-                        </a:rPr>
-                        <a:t>Cap </a:t>
-                      </a:r>
-                      <a:pPr indent="0" marL="0">
-                        <a:buNone/>
-                      </a:pPr>
-                      <a:r>
-                        <a:rPr lang="en-US" sz="1050" b="1" dirty="0">
-                          <a:solidFill>
-                            <a:srgbClr val="718096"/>
-                          </a:solidFill>
-                          <a:latin typeface="Pretendard" pitchFamily="34" charset="0"/>
-                          <a:ea typeface="Pretendard" pitchFamily="34" charset="-122"/>
-                          <a:cs typeface="Pretendard" pitchFamily="34" charset="-120"/>
-                        </a:rPr>
-                        <a:t>Rate</a:t>
-                      </a:r>
-                      <a:endParaRPr lang="en-US" sz="1050" dirty="0">
-                        <a:latin typeface="Pretendard" charset="0"/>
-                        <a:ea typeface="Pretendard" charset="0"/>
-                        <a:cs typeface="Pretendard" charset="0"/>
-                      </a:endParaRPr>
-                    </a:p>
-                  </a:txBody>
-                  <a:tcPr marL="50800" marR="50800" marT="25400" marB="25400" anchor="ctr">
-                    <a:lnL w="3810" cap="flat" cmpd="sng" algn="ctr">
-                      <a:solidFill>
-                        <a:srgbClr val="CBD5E0"/>
-                      </a:solidFill>
-                      <a:prstDash val="solid"/>
-                      <a:round/>
-                      <a:headEnd type="none" w="med" len="med"/>
-                      <a:tailEnd type="none" w="med" len="med"/>
-                    </a:lnL>
-                    <a:lnR w="3810" cap="flat" cmpd="sng" algn="ctr">
-                      <a:solidFill>
-                        <a:srgbClr val="CBD5E0"/>
-                      </a:solidFill>
-                      <a:prstDash val="solid"/>
-                      <a:round/>
-                      <a:headEnd type="none" w="med" len="med"/>
-                      <a:tailEnd type="none" w="med" len="med"/>
-                    </a:lnR>
-                    <a:lnT w="3810" cap="flat" cmpd="sng" algn="ctr">
-                      <a:solidFill>
-                        <a:srgbClr val="CBD5E0"/>
-                      </a:solidFill>
-                      <a:prstDash val="solid"/>
-                      <a:round/>
-                      <a:headEnd type="none" w="med" len="med"/>
-                      <a:tailEnd type="none" w="med" len="med"/>
-                    </a:lnT>
-                    <a:lnB w="3810" cap="flat" cmpd="sng" algn="ctr">
-                      <a:solidFill>
-                        <a:srgbClr val="CBD5E0"/>
-                      </a:solidFill>
-                      <a:prstDash val="solid"/>
-                      <a:round/>
-                      <a:headEnd type="none" w="med" len="med"/>
-                      <a:tailEnd type="none" w="med" len="med"/>
-                    </a:lnB>
-                    <a:solidFill>
-                      <a:srgbClr val="F7FAFC"/>
-                    </a:solidFill>
-                  </a:tcPr>
-                </a:tc>
-                <a:tc>
-                  <a:txBody>
-                    <a:bodyPr/>
-                    <a:lstStyle/>
-                    <a:p>
-                      <a:pPr indent="0" marL="0">
-                        <a:buNone/>
-                      </a:pPr>
-                      <a:r>
-                        <a:rPr lang="en-US" sz="1050" b="1" dirty="0">
-                          <a:solidFill>
-                            <a:srgbClr val="718096"/>
-                          </a:solidFill>
-                          <a:latin typeface="Pretendard" pitchFamily="34" charset="0"/>
-                          <a:ea typeface="Pretendard" pitchFamily="34" charset="-122"/>
-                          <a:cs typeface="Pretendard" pitchFamily="34" charset="-120"/>
-                        </a:rPr>
-                        <a:t>투자 </a:t>
-                      </a:r>
-                      <a:pPr indent="0" marL="0">
-                        <a:buNone/>
-                      </a:pPr>
-                      <a:r>
-                        <a:rPr lang="en-US" sz="1050" b="1" dirty="0">
-                          <a:solidFill>
-                            <a:srgbClr val="718096"/>
-                          </a:solidFill>
-                          <a:latin typeface="Pretendard" pitchFamily="34" charset="0"/>
-                          <a:ea typeface="Pretendard" pitchFamily="34" charset="-122"/>
-                          <a:cs typeface="Pretendard" pitchFamily="34" charset="-120"/>
-                        </a:rPr>
-                        <a:t>비용</a:t>
-                      </a:r>
-                      <a:endParaRPr lang="en-US" sz="1050" dirty="0">
-                        <a:latin typeface="Pretendard" charset="0"/>
-                        <a:ea typeface="Pretendard" charset="0"/>
-                        <a:cs typeface="Pretendard" charset="0"/>
-                      </a:endParaRPr>
-                    </a:p>
-                  </a:txBody>
-                  <a:tcPr marL="50800" marR="50800" marT="25400" marB="25400" anchor="ctr">
-                    <a:lnL w="3810" cap="flat" cmpd="sng" algn="ctr">
-                      <a:solidFill>
-                        <a:srgbClr val="CBD5E0"/>
-                      </a:solidFill>
-                      <a:prstDash val="solid"/>
-                      <a:round/>
-                      <a:headEnd type="none" w="med" len="med"/>
-                      <a:tailEnd type="none" w="med" len="med"/>
-                    </a:lnL>
-                    <a:lnR w="3810" cap="flat" cmpd="sng" algn="ctr">
-                      <a:solidFill>
-                        <a:srgbClr val="CBD5E0"/>
-                      </a:solidFill>
-                      <a:prstDash val="solid"/>
-                      <a:round/>
-                      <a:headEnd type="none" w="med" len="med"/>
-                      <a:tailEnd type="none" w="med" len="med"/>
-                    </a:lnR>
-                    <a:lnT w="3810" cap="flat" cmpd="sng" algn="ctr">
-                      <a:solidFill>
-                        <a:srgbClr val="CBD5E0"/>
-                      </a:solidFill>
-                      <a:prstDash val="solid"/>
-                      <a:round/>
-                      <a:headEnd type="none" w="med" len="med"/>
-                      <a:tailEnd type="none" w="med" len="med"/>
-                    </a:lnT>
-                    <a:lnB w="3810" cap="flat" cmpd="sng" algn="ctr">
-                      <a:solidFill>
-                        <a:srgbClr val="CBD5E0"/>
-                      </a:solidFill>
-                      <a:prstDash val="solid"/>
-                      <a:round/>
-                      <a:headEnd type="none" w="med" len="med"/>
-                      <a:tailEnd type="none" w="med" len="med"/>
-                    </a:lnB>
-                    <a:solidFill>
-                      <a:srgbClr val="F7FAFC"/>
-                    </a:solidFill>
-                  </a:tcPr>
-                </a:tc>
-              </a:tr>
-              <a:tr h="329184">
-                <a:tc>
-                  <a:txBody>
-                    <a:bodyPr/>
-                    <a:lstStyle/>
-                    <a:p>
-                      <a:pPr indent="0" marL="0">
-                        <a:buNone/>
-                      </a:pPr>
-                      <a:r>
-                        <a:rPr lang="en-US" sz="1050" b="1" dirty="0">
-                          <a:solidFill>
-                            <a:srgbClr val="10161F"/>
-                          </a:solidFill>
-                          <a:latin typeface="Pretendard" pitchFamily="34" charset="0"/>
-                          <a:ea typeface="Pretendard" pitchFamily="34" charset="-122"/>
-                          <a:cs typeface="Pretendard" pitchFamily="34" charset="-120"/>
-                        </a:rPr>
-                        <a:t>② </a:t>
-                      </a:r>
-                      <a:pPr indent="0" marL="0">
-                        <a:buNone/>
-                      </a:pPr>
-                      <a:r>
-                        <a:rPr lang="en-US" sz="1050" b="1" dirty="0">
-                          <a:solidFill>
-                            <a:srgbClr val="10161F"/>
-                          </a:solidFill>
-                          <a:latin typeface="Pretendard" pitchFamily="34" charset="0"/>
-                          <a:ea typeface="Pretendard" pitchFamily="34" charset="-122"/>
-                          <a:cs typeface="Pretendard" pitchFamily="34" charset="-120"/>
-                        </a:rPr>
-                        <a:t>임대료 </a:t>
-                      </a:r>
-                      <a:pPr indent="0" marL="0">
-                        <a:buNone/>
-                      </a:pPr>
-                      <a:r>
-                        <a:rPr lang="en-US" sz="1050" b="1" dirty="0">
-                          <a:solidFill>
-                            <a:srgbClr val="10161F"/>
-                          </a:solidFill>
-                          <a:latin typeface="Pretendard" pitchFamily="34" charset="0"/>
-                          <a:ea typeface="Pretendard" pitchFamily="34" charset="-122"/>
-                          <a:cs typeface="Pretendard" pitchFamily="34" charset="-120"/>
-                        </a:rPr>
-                        <a:t>현실화 </a:t>
-                      </a:r>
-                      <a:pPr indent="0" marL="0">
-                        <a:buNone/>
-                      </a:pPr>
-                      <a:r>
-                        <a:rPr lang="en-US" sz="1050" b="1" dirty="0">
-                          <a:solidFill>
-                            <a:srgbClr val="10161F"/>
-                          </a:solidFill>
-                          <a:latin typeface="Pretendard" pitchFamily="34" charset="0"/>
-                          <a:ea typeface="Pretendard" pitchFamily="34" charset="-122"/>
-                          <a:cs typeface="Pretendard" pitchFamily="34" charset="-120"/>
-                        </a:rPr>
-                        <a:t>(+5%)</a:t>
-                      </a:r>
-                      <a:endParaRPr lang="en-US" sz="1050" dirty="0">
-                        <a:latin typeface="Pretendard" charset="0"/>
-                        <a:ea typeface="Pretendard" charset="0"/>
-                        <a:cs typeface="Pretendard" charset="0"/>
-                      </a:endParaRPr>
-                    </a:p>
-                  </a:txBody>
-                  <a:tcPr marL="50800" marR="50800" marT="25400" marB="25400" anchor="ctr">
-                    <a:lnL w="3810" cap="flat" cmpd="sng" algn="ctr">
-                      <a:solidFill>
-                        <a:srgbClr val="CBD5E0"/>
-                      </a:solidFill>
-                      <a:prstDash val="solid"/>
-                      <a:round/>
-                      <a:headEnd type="none" w="med" len="med"/>
-                      <a:tailEnd type="none" w="med" len="med"/>
-                    </a:lnL>
-                    <a:lnR w="3810" cap="flat" cmpd="sng" algn="ctr">
-                      <a:solidFill>
-                        <a:srgbClr val="CBD5E0"/>
-                      </a:solidFill>
-                      <a:prstDash val="solid"/>
-                      <a:round/>
-                      <a:headEnd type="none" w="med" len="med"/>
-                      <a:tailEnd type="none" w="med" len="med"/>
-                    </a:lnR>
-                    <a:lnT w="3810" cap="flat" cmpd="sng" algn="ctr">
-                      <a:solidFill>
-                        <a:srgbClr val="CBD5E0"/>
-                      </a:solidFill>
-                      <a:prstDash val="solid"/>
-                      <a:round/>
-                      <a:headEnd type="none" w="med" len="med"/>
-                      <a:tailEnd type="none" w="med" len="med"/>
-                    </a:lnT>
-                    <a:lnB w="3810" cap="flat" cmpd="sng" algn="ctr">
-                      <a:solidFill>
-                        <a:srgbClr val="CBD5E0"/>
-                      </a:solidFill>
-                      <a:prstDash val="solid"/>
-                      <a:round/>
-                      <a:headEnd type="none" w="med" len="med"/>
-                      <a:tailEnd type="none" w="med" len="med"/>
-                    </a:lnB>
-                    <a:solidFill>
-                      <a:srgbClr val="FFFFFF"/>
-                    </a:solidFill>
-                  </a:tcPr>
-                </a:tc>
-                <a:tc>
-                  <a:txBody>
-                    <a:bodyPr/>
-                    <a:lstStyle/>
-                    <a:p>
-                      <a:pPr indent="0" marL="0">
-                        <a:buNone/>
-                      </a:pPr>
-                      <a:r>
-                        <a:rPr lang="en-US" sz="1050" dirty="0">
-                          <a:solidFill>
-                            <a:srgbClr val="10161F"/>
-                          </a:solidFill>
-                          <a:latin typeface="Pretendard" pitchFamily="34" charset="0"/>
-                          <a:ea typeface="Pretendard" pitchFamily="34" charset="-122"/>
-                          <a:cs typeface="Pretendard" pitchFamily="34" charset="-120"/>
-                        </a:rPr>
-                        <a:t>+약 </a:t>
-                      </a:r>
-                      <a:pPr indent="0" marL="0">
-                        <a:buNone/>
-                      </a:pPr>
-                      <a:r>
-                        <a:rPr lang="en-US" sz="1050" dirty="0">
-                          <a:solidFill>
-                            <a:srgbClr val="10161F"/>
-                          </a:solidFill>
-                          <a:latin typeface="Pretendard" pitchFamily="34" charset="0"/>
-                          <a:ea typeface="Pretendard" pitchFamily="34" charset="-122"/>
-                          <a:cs typeface="Pretendard" pitchFamily="34" charset="-120"/>
-                        </a:rPr>
-                        <a:t>0.40억 </a:t>
-                      </a:r>
-                      <a:pPr indent="0" marL="0">
-                        <a:buNone/>
-                      </a:pPr>
-                      <a:r>
-                        <a:rPr lang="en-US" sz="1050" dirty="0">
-                          <a:solidFill>
-                            <a:srgbClr val="10161F"/>
-                          </a:solidFill>
-                          <a:latin typeface="Pretendard" pitchFamily="34" charset="0"/>
-                          <a:ea typeface="Pretendard" pitchFamily="34" charset="-122"/>
-                          <a:cs typeface="Pretendard" pitchFamily="34" charset="-120"/>
-                        </a:rPr>
-                        <a:t>원 </a:t>
-                      </a:r>
-                      <a:pPr indent="0" marL="0">
-                        <a:buNone/>
-                      </a:pPr>
-                      <a:r>
-                        <a:rPr lang="en-US" sz="1050" dirty="0">
-                          <a:solidFill>
-                            <a:srgbClr val="10161F"/>
-                          </a:solidFill>
-                          <a:latin typeface="Pretendard" pitchFamily="34" charset="0"/>
-                          <a:ea typeface="Pretendard" pitchFamily="34" charset="-122"/>
-                          <a:cs typeface="Pretendard" pitchFamily="34" charset="-120"/>
-                        </a:rPr>
-                        <a:t>(+5%)</a:t>
-                      </a:r>
-                      <a:endParaRPr lang="en-US" sz="1050" dirty="0">
-                        <a:latin typeface="Pretendard" charset="0"/>
-                        <a:ea typeface="Pretendard" charset="0"/>
-                        <a:cs typeface="Pretendard" charset="0"/>
-                      </a:endParaRPr>
-                    </a:p>
-                  </a:txBody>
-                  <a:tcPr marL="50800" marR="50800" marT="25400" marB="25400" anchor="ctr">
-                    <a:lnL w="3810" cap="flat" cmpd="sng" algn="ctr">
-                      <a:solidFill>
-                        <a:srgbClr val="CBD5E0"/>
-                      </a:solidFill>
-                      <a:prstDash val="solid"/>
-                      <a:round/>
-                      <a:headEnd type="none" w="med" len="med"/>
-                      <a:tailEnd type="none" w="med" len="med"/>
-                    </a:lnL>
-                    <a:lnR w="3810" cap="flat" cmpd="sng" algn="ctr">
-                      <a:solidFill>
-                        <a:srgbClr val="CBD5E0"/>
-                      </a:solidFill>
-                      <a:prstDash val="solid"/>
-                      <a:round/>
-                      <a:headEnd type="none" w="med" len="med"/>
-                      <a:tailEnd type="none" w="med" len="med"/>
-                    </a:lnR>
-                    <a:lnT w="3810" cap="flat" cmpd="sng" algn="ctr">
-                      <a:solidFill>
-                        <a:srgbClr val="CBD5E0"/>
-                      </a:solidFill>
-                      <a:prstDash val="solid"/>
-                      <a:round/>
-                      <a:headEnd type="none" w="med" len="med"/>
-                      <a:tailEnd type="none" w="med" len="med"/>
-                    </a:lnT>
-                    <a:lnB w="3810" cap="flat" cmpd="sng" algn="ctr">
-                      <a:solidFill>
-                        <a:srgbClr val="CBD5E0"/>
-                      </a:solidFill>
-                      <a:prstDash val="solid"/>
-                      <a:round/>
-                      <a:headEnd type="none" w="med" len="med"/>
-                      <a:tailEnd type="none" w="med" len="med"/>
-                    </a:lnB>
-                    <a:solidFill>
-                      <a:srgbClr val="FFFFFF"/>
-                    </a:solidFill>
-                  </a:tcPr>
-                </a:tc>
-                <a:tc>
-                  <a:txBody>
-                    <a:bodyPr/>
-                    <a:lstStyle/>
-                    <a:p>
-                      <a:pPr indent="0" marL="0">
-                        <a:buNone/>
-                      </a:pPr>
-                      <a:r>
-                        <a:rPr lang="en-US" sz="1050" dirty="0">
-                          <a:solidFill>
-                            <a:srgbClr val="10161F"/>
-                          </a:solidFill>
-                          <a:latin typeface="Pretendard" pitchFamily="34" charset="0"/>
-                          <a:ea typeface="Pretendard" pitchFamily="34" charset="-122"/>
-                          <a:cs typeface="Pretendard" pitchFamily="34" charset="-120"/>
-                        </a:rPr>
-                        <a:t>3.48%</a:t>
-                      </a:r>
-                      <a:endParaRPr lang="en-US" sz="1050" dirty="0">
-                        <a:latin typeface="Pretendard" charset="0"/>
-                        <a:ea typeface="Pretendard" charset="0"/>
-                        <a:cs typeface="Pretendard" charset="0"/>
-                      </a:endParaRPr>
-                    </a:p>
-                  </a:txBody>
-                  <a:tcPr marL="50800" marR="50800" marT="25400" marB="25400" anchor="ctr">
-                    <a:lnL w="3810" cap="flat" cmpd="sng" algn="ctr">
-                      <a:solidFill>
-                        <a:srgbClr val="CBD5E0"/>
-                      </a:solidFill>
-                      <a:prstDash val="solid"/>
-                      <a:round/>
-                      <a:headEnd type="none" w="med" len="med"/>
-                      <a:tailEnd type="none" w="med" len="med"/>
-                    </a:lnL>
-                    <a:lnR w="3810" cap="flat" cmpd="sng" algn="ctr">
-                      <a:solidFill>
-                        <a:srgbClr val="CBD5E0"/>
-                      </a:solidFill>
-                      <a:prstDash val="solid"/>
-                      <a:round/>
-                      <a:headEnd type="none" w="med" len="med"/>
-                      <a:tailEnd type="none" w="med" len="med"/>
-                    </a:lnR>
-                    <a:lnT w="3810" cap="flat" cmpd="sng" algn="ctr">
-                      <a:solidFill>
-                        <a:srgbClr val="CBD5E0"/>
-                      </a:solidFill>
-                      <a:prstDash val="solid"/>
-                      <a:round/>
-                      <a:headEnd type="none" w="med" len="med"/>
-                      <a:tailEnd type="none" w="med" len="med"/>
-                    </a:lnT>
-                    <a:lnB w="3810" cap="flat" cmpd="sng" algn="ctr">
-                      <a:solidFill>
-                        <a:srgbClr val="CBD5E0"/>
-                      </a:solidFill>
-                      <a:prstDash val="solid"/>
-                      <a:round/>
-                      <a:headEnd type="none" w="med" len="med"/>
-                      <a:tailEnd type="none" w="med" len="med"/>
-                    </a:lnB>
-                    <a:solidFill>
-                      <a:srgbClr val="FFFFFF"/>
-                    </a:solidFill>
-                  </a:tcPr>
-                </a:tc>
-                <a:tc>
-                  <a:txBody>
-                    <a:bodyPr/>
-                    <a:lstStyle/>
-                    <a:p>
-                      <a:pPr indent="0" marL="0">
-                        <a:buNone/>
-                      </a:pPr>
-                      <a:r>
-                        <a:rPr lang="en-US" sz="1050" dirty="0">
-                          <a:solidFill>
-                            <a:srgbClr val="10161F"/>
-                          </a:solidFill>
-                          <a:latin typeface="Pretendard" pitchFamily="34" charset="0"/>
-                          <a:ea typeface="Pretendard" pitchFamily="34" charset="-122"/>
-                          <a:cs typeface="Pretendard" pitchFamily="34" charset="-120"/>
-                        </a:rPr>
-                        <a:t>불필요</a:t>
-                      </a:r>
-                      <a:endParaRPr lang="en-US" sz="1050" dirty="0">
-                        <a:latin typeface="Pretendard" charset="0"/>
-                        <a:ea typeface="Pretendard" charset="0"/>
-                        <a:cs typeface="Pretendard" charset="0"/>
-                      </a:endParaRPr>
-                    </a:p>
-                  </a:txBody>
-                  <a:tcPr marL="50800" marR="50800" marT="25400" marB="25400" anchor="ctr">
-                    <a:lnL w="3810" cap="flat" cmpd="sng" algn="ctr">
-                      <a:solidFill>
-                        <a:srgbClr val="CBD5E0"/>
-                      </a:solidFill>
-                      <a:prstDash val="solid"/>
-                      <a:round/>
-                      <a:headEnd type="none" w="med" len="med"/>
-                      <a:tailEnd type="none" w="med" len="med"/>
-                    </a:lnL>
-                    <a:lnR w="3810" cap="flat" cmpd="sng" algn="ctr">
-                      <a:solidFill>
-                        <a:srgbClr val="CBD5E0"/>
-                      </a:solidFill>
-                      <a:prstDash val="solid"/>
-                      <a:round/>
-                      <a:headEnd type="none" w="med" len="med"/>
-                      <a:tailEnd type="none" w="med" len="med"/>
-                    </a:lnR>
-                    <a:lnT w="3810" cap="flat" cmpd="sng" algn="ctr">
-                      <a:solidFill>
-                        <a:srgbClr val="CBD5E0"/>
-                      </a:solidFill>
-                      <a:prstDash val="solid"/>
-                      <a:round/>
-                      <a:headEnd type="none" w="med" len="med"/>
-                      <a:tailEnd type="none" w="med" len="med"/>
-                    </a:lnT>
-                    <a:lnB w="3810" cap="flat" cmpd="sng" algn="ctr">
-                      <a:solidFill>
-                        <a:srgbClr val="CBD5E0"/>
-                      </a:solidFill>
-                      <a:prstDash val="solid"/>
-                      <a:round/>
-                      <a:headEnd type="none" w="med" len="med"/>
-                      <a:tailEnd type="none" w="med" len="med"/>
-                    </a:lnB>
-                    <a:solidFill>
-                      <a:srgbClr val="FFFFFF"/>
-                    </a:solidFill>
-                  </a:tcPr>
-                </a:tc>
-              </a:tr>
-              <a:tr h="329184">
-                <a:tc>
-                  <a:txBody>
-                    <a:bodyPr/>
-                    <a:lstStyle/>
-                    <a:p>
-                      <a:pPr indent="0" marL="0">
-                        <a:buNone/>
-                      </a:pPr>
-                      <a:r>
-                        <a:rPr lang="en-US" sz="1050" b="1" dirty="0">
-                          <a:solidFill>
-                            <a:srgbClr val="10161F"/>
-                          </a:solidFill>
-                          <a:latin typeface="Pretendard" pitchFamily="34" charset="0"/>
-                          <a:ea typeface="Pretendard" pitchFamily="34" charset="-122"/>
-                          <a:cs typeface="Pretendard" pitchFamily="34" charset="-120"/>
-                        </a:rPr>
-                        <a:t>③ </a:t>
-                      </a:r>
-                      <a:pPr indent="0" marL="0">
-                        <a:buNone/>
-                      </a:pPr>
-                      <a:r>
-                        <a:rPr lang="en-US" sz="1050" b="1" dirty="0">
-                          <a:solidFill>
-                            <a:srgbClr val="10161F"/>
-                          </a:solidFill>
-                          <a:latin typeface="Pretendard" pitchFamily="34" charset="0"/>
-                          <a:ea typeface="Pretendard" pitchFamily="34" charset="-122"/>
-                          <a:cs typeface="Pretendard" pitchFamily="34" charset="-120"/>
-                        </a:rPr>
-                        <a:t>리모델링 </a:t>
-                      </a:r>
-                      <a:pPr indent="0" marL="0">
-                        <a:buNone/>
-                      </a:pPr>
-                      <a:r>
-                        <a:rPr lang="en-US" sz="1050" b="1" dirty="0">
-                          <a:solidFill>
-                            <a:srgbClr val="10161F"/>
-                          </a:solidFill>
-                          <a:latin typeface="Pretendard" pitchFamily="34" charset="0"/>
-                          <a:ea typeface="Pretendard" pitchFamily="34" charset="-122"/>
-                          <a:cs typeface="Pretendard" pitchFamily="34" charset="-120"/>
-                        </a:rPr>
-                        <a:t>후 </a:t>
-                      </a:r>
-                      <a:pPr indent="0" marL="0">
-                        <a:buNone/>
-                      </a:pPr>
-                      <a:r>
-                        <a:rPr lang="en-US" sz="1050" b="1" dirty="0">
-                          <a:solidFill>
-                            <a:srgbClr val="10161F"/>
-                          </a:solidFill>
-                          <a:latin typeface="Pretendard" pitchFamily="34" charset="0"/>
-                          <a:ea typeface="Pretendard" pitchFamily="34" charset="-122"/>
-                          <a:cs typeface="Pretendard" pitchFamily="34" charset="-120"/>
-                        </a:rPr>
-                        <a:t>임대료 </a:t>
-                      </a:r>
-                      <a:pPr indent="0" marL="0">
-                        <a:buNone/>
-                      </a:pPr>
-                      <a:r>
-                        <a:rPr lang="en-US" sz="1050" b="1" dirty="0">
-                          <a:solidFill>
-                            <a:srgbClr val="10161F"/>
-                          </a:solidFill>
-                          <a:latin typeface="Pretendard" pitchFamily="34" charset="0"/>
-                          <a:ea typeface="Pretendard" pitchFamily="34" charset="-122"/>
-                          <a:cs typeface="Pretendard" pitchFamily="34" charset="-120"/>
-                        </a:rPr>
-                        <a:t>상승</a:t>
-                      </a:r>
-                      <a:endParaRPr lang="en-US" sz="1050" dirty="0">
-                        <a:latin typeface="Pretendard" charset="0"/>
-                        <a:ea typeface="Pretendard" charset="0"/>
-                        <a:cs typeface="Pretendard" charset="0"/>
-                      </a:endParaRPr>
-                    </a:p>
-                  </a:txBody>
-                  <a:tcPr marL="50800" marR="50800" marT="25400" marB="25400" anchor="ctr">
-                    <a:lnL w="3810" cap="flat" cmpd="sng" algn="ctr">
-                      <a:solidFill>
-                        <a:srgbClr val="CBD5E0"/>
-                      </a:solidFill>
-                      <a:prstDash val="solid"/>
-                      <a:round/>
-                      <a:headEnd type="none" w="med" len="med"/>
-                      <a:tailEnd type="none" w="med" len="med"/>
-                    </a:lnL>
-                    <a:lnR w="3810" cap="flat" cmpd="sng" algn="ctr">
-                      <a:solidFill>
-                        <a:srgbClr val="CBD5E0"/>
-                      </a:solidFill>
-                      <a:prstDash val="solid"/>
-                      <a:round/>
-                      <a:headEnd type="none" w="med" len="med"/>
-                      <a:tailEnd type="none" w="med" len="med"/>
-                    </a:lnR>
-                    <a:lnT w="3810" cap="flat" cmpd="sng" algn="ctr">
-                      <a:solidFill>
-                        <a:srgbClr val="CBD5E0"/>
-                      </a:solidFill>
-                      <a:prstDash val="solid"/>
-                      <a:round/>
-                      <a:headEnd type="none" w="med" len="med"/>
-                      <a:tailEnd type="none" w="med" len="med"/>
-                    </a:lnT>
-                    <a:lnB w="3810" cap="flat" cmpd="sng" algn="ctr">
-                      <a:solidFill>
-                        <a:srgbClr val="CBD5E0"/>
-                      </a:solidFill>
-                      <a:prstDash val="solid"/>
-                      <a:round/>
-                      <a:headEnd type="none" w="med" len="med"/>
-                      <a:tailEnd type="none" w="med" len="med"/>
-                    </a:lnB>
-                    <a:solidFill>
-                      <a:srgbClr val="F7FAFC"/>
-                    </a:solidFill>
-                  </a:tcPr>
-                </a:tc>
-                <a:tc>
-                  <a:txBody>
-                    <a:bodyPr/>
-                    <a:lstStyle/>
-                    <a:p>
-                      <a:pPr indent="0" marL="0">
-                        <a:buNone/>
-                      </a:pPr>
-                      <a:r>
-                        <a:rPr lang="en-US" sz="1050" dirty="0">
-                          <a:solidFill>
-                            <a:srgbClr val="10161F"/>
-                          </a:solidFill>
-                          <a:latin typeface="Pretendard" pitchFamily="34" charset="0"/>
-                          <a:ea typeface="Pretendard" pitchFamily="34" charset="-122"/>
-                          <a:cs typeface="Pretendard" pitchFamily="34" charset="-120"/>
-                        </a:rPr>
-                        <a:t>+약 </a:t>
-                      </a:r>
-                      <a:pPr indent="0" marL="0">
-                        <a:buNone/>
-                      </a:pPr>
-                      <a:r>
-                        <a:rPr lang="en-US" sz="1050" dirty="0">
-                          <a:solidFill>
-                            <a:srgbClr val="10161F"/>
-                          </a:solidFill>
-                          <a:latin typeface="Pretendard" pitchFamily="34" charset="0"/>
-                          <a:ea typeface="Pretendard" pitchFamily="34" charset="-122"/>
-                          <a:cs typeface="Pretendard" pitchFamily="34" charset="-120"/>
-                        </a:rPr>
-                        <a:t>0.64억 </a:t>
-                      </a:r>
-                      <a:pPr indent="0" marL="0">
-                        <a:buNone/>
-                      </a:pPr>
-                      <a:r>
-                        <a:rPr lang="en-US" sz="1050" dirty="0">
-                          <a:solidFill>
-                            <a:srgbClr val="10161F"/>
-                          </a:solidFill>
-                          <a:latin typeface="Pretendard" pitchFamily="34" charset="0"/>
-                          <a:ea typeface="Pretendard" pitchFamily="34" charset="-122"/>
-                          <a:cs typeface="Pretendard" pitchFamily="34" charset="-120"/>
-                        </a:rPr>
-                        <a:t>원 </a:t>
-                      </a:r>
-                      <a:pPr indent="0" marL="0">
-                        <a:buNone/>
-                      </a:pPr>
-                      <a:r>
-                        <a:rPr lang="en-US" sz="1050" dirty="0">
-                          <a:solidFill>
-                            <a:srgbClr val="10161F"/>
-                          </a:solidFill>
-                          <a:latin typeface="Pretendard" pitchFamily="34" charset="0"/>
-                          <a:ea typeface="Pretendard" pitchFamily="34" charset="-122"/>
-                          <a:cs typeface="Pretendard" pitchFamily="34" charset="-120"/>
-                        </a:rPr>
-                        <a:t>(+8%)</a:t>
-                      </a:r>
-                      <a:endParaRPr lang="en-US" sz="1050" dirty="0">
-                        <a:latin typeface="Pretendard" charset="0"/>
-                        <a:ea typeface="Pretendard" charset="0"/>
-                        <a:cs typeface="Pretendard" charset="0"/>
-                      </a:endParaRPr>
-                    </a:p>
-                  </a:txBody>
-                  <a:tcPr marL="50800" marR="50800" marT="25400" marB="25400" anchor="ctr">
-                    <a:lnL w="3810" cap="flat" cmpd="sng" algn="ctr">
-                      <a:solidFill>
-                        <a:srgbClr val="CBD5E0"/>
-                      </a:solidFill>
-                      <a:prstDash val="solid"/>
-                      <a:round/>
-                      <a:headEnd type="none" w="med" len="med"/>
-                      <a:tailEnd type="none" w="med" len="med"/>
-                    </a:lnL>
-                    <a:lnR w="3810" cap="flat" cmpd="sng" algn="ctr">
-                      <a:solidFill>
-                        <a:srgbClr val="CBD5E0"/>
-                      </a:solidFill>
-                      <a:prstDash val="solid"/>
-                      <a:round/>
-                      <a:headEnd type="none" w="med" len="med"/>
-                      <a:tailEnd type="none" w="med" len="med"/>
-                    </a:lnR>
-                    <a:lnT w="3810" cap="flat" cmpd="sng" algn="ctr">
-                      <a:solidFill>
-                        <a:srgbClr val="CBD5E0"/>
-                      </a:solidFill>
-                      <a:prstDash val="solid"/>
-                      <a:round/>
-                      <a:headEnd type="none" w="med" len="med"/>
-                      <a:tailEnd type="none" w="med" len="med"/>
-                    </a:lnT>
-                    <a:lnB w="3810" cap="flat" cmpd="sng" algn="ctr">
-                      <a:solidFill>
-                        <a:srgbClr val="CBD5E0"/>
-                      </a:solidFill>
-                      <a:prstDash val="solid"/>
-                      <a:round/>
-                      <a:headEnd type="none" w="med" len="med"/>
-                      <a:tailEnd type="none" w="med" len="med"/>
-                    </a:lnB>
-                    <a:solidFill>
-                      <a:srgbClr val="F7FAFC"/>
-                    </a:solidFill>
-                  </a:tcPr>
-                </a:tc>
-                <a:tc>
-                  <a:txBody>
-                    <a:bodyPr/>
-                    <a:lstStyle/>
-                    <a:p>
-                      <a:pPr indent="0" marL="0">
-                        <a:buNone/>
-                      </a:pPr>
-                      <a:r>
-                        <a:rPr lang="en-US" sz="1050" dirty="0">
-                          <a:solidFill>
-                            <a:srgbClr val="10161F"/>
-                          </a:solidFill>
-                          <a:latin typeface="Pretendard" pitchFamily="34" charset="0"/>
-                          <a:ea typeface="Pretendard" pitchFamily="34" charset="-122"/>
-                          <a:cs typeface="Pretendard" pitchFamily="34" charset="-120"/>
-                        </a:rPr>
-                        <a:t>3.58%</a:t>
-                      </a:r>
-                      <a:endParaRPr lang="en-US" sz="1050" dirty="0">
-                        <a:latin typeface="Pretendard" charset="0"/>
-                        <a:ea typeface="Pretendard" charset="0"/>
-                        <a:cs typeface="Pretendard" charset="0"/>
-                      </a:endParaRPr>
-                    </a:p>
-                  </a:txBody>
-                  <a:tcPr marL="50800" marR="50800" marT="25400" marB="25400" anchor="ctr">
-                    <a:lnL w="3810" cap="flat" cmpd="sng" algn="ctr">
-                      <a:solidFill>
-                        <a:srgbClr val="CBD5E0"/>
-                      </a:solidFill>
-                      <a:prstDash val="solid"/>
-                      <a:round/>
-                      <a:headEnd type="none" w="med" len="med"/>
-                      <a:tailEnd type="none" w="med" len="med"/>
-                    </a:lnL>
-                    <a:lnR w="3810" cap="flat" cmpd="sng" algn="ctr">
-                      <a:solidFill>
-                        <a:srgbClr val="CBD5E0"/>
-                      </a:solidFill>
-                      <a:prstDash val="solid"/>
-                      <a:round/>
-                      <a:headEnd type="none" w="med" len="med"/>
-                      <a:tailEnd type="none" w="med" len="med"/>
-                    </a:lnR>
-                    <a:lnT w="3810" cap="flat" cmpd="sng" algn="ctr">
-                      <a:solidFill>
-                        <a:srgbClr val="CBD5E0"/>
-                      </a:solidFill>
-                      <a:prstDash val="solid"/>
-                      <a:round/>
-                      <a:headEnd type="none" w="med" len="med"/>
-                      <a:tailEnd type="none" w="med" len="med"/>
-                    </a:lnT>
-                    <a:lnB w="3810" cap="flat" cmpd="sng" algn="ctr">
-                      <a:solidFill>
-                        <a:srgbClr val="CBD5E0"/>
-                      </a:solidFill>
-                      <a:prstDash val="solid"/>
-                      <a:round/>
-                      <a:headEnd type="none" w="med" len="med"/>
-                      <a:tailEnd type="none" w="med" len="med"/>
-                    </a:lnB>
-                    <a:solidFill>
-                      <a:srgbClr val="F7FAFC"/>
-                    </a:solidFill>
-                  </a:tcPr>
-                </a:tc>
-                <a:tc>
-                  <a:txBody>
-                    <a:bodyPr/>
-                    <a:lstStyle/>
-                    <a:p>
-                      <a:pPr indent="0" marL="0">
-                        <a:buNone/>
-                      </a:pPr>
-                      <a:r>
-                        <a:rPr lang="en-US" sz="1050" dirty="0">
-                          <a:solidFill>
-                            <a:srgbClr val="10161F"/>
-                          </a:solidFill>
-                          <a:latin typeface="Pretendard" pitchFamily="34" charset="0"/>
-                          <a:ea typeface="Pretendard" pitchFamily="34" charset="-122"/>
-                          <a:cs typeface="Pretendard" pitchFamily="34" charset="-120"/>
-                        </a:rPr>
-                        <a:t>약 </a:t>
-                      </a:r>
-                      <a:pPr indent="0" marL="0">
-                        <a:buNone/>
-                      </a:pPr>
-                      <a:r>
-                        <a:rPr lang="en-US" sz="1050" dirty="0">
-                          <a:solidFill>
-                            <a:srgbClr val="10161F"/>
-                          </a:solidFill>
-                          <a:latin typeface="Pretendard" pitchFamily="34" charset="0"/>
-                          <a:ea typeface="Pretendard" pitchFamily="34" charset="-122"/>
-                          <a:cs typeface="Pretendard" pitchFamily="34" charset="-120"/>
-                        </a:rPr>
-                        <a:t>15.00억 </a:t>
-                      </a:r>
-                      <a:pPr indent="0" marL="0">
-                        <a:buNone/>
-                      </a:pPr>
-                      <a:r>
-                        <a:rPr lang="en-US" sz="1050" dirty="0">
-                          <a:solidFill>
-                            <a:srgbClr val="10161F"/>
-                          </a:solidFill>
-                          <a:latin typeface="Pretendard" pitchFamily="34" charset="0"/>
-                          <a:ea typeface="Pretendard" pitchFamily="34" charset="-122"/>
-                          <a:cs typeface="Pretendard" pitchFamily="34" charset="-120"/>
-                        </a:rPr>
-                        <a:t>원</a:t>
-                      </a:r>
-                      <a:endParaRPr lang="en-US" sz="1050" dirty="0">
-                        <a:latin typeface="Pretendard" charset="0"/>
-                        <a:ea typeface="Pretendard" charset="0"/>
-                        <a:cs typeface="Pretendard" charset="0"/>
-                      </a:endParaRPr>
-                    </a:p>
-                  </a:txBody>
-                  <a:tcPr marL="50800" marR="50800" marT="25400" marB="25400" anchor="ctr">
-                    <a:lnL w="3810" cap="flat" cmpd="sng" algn="ctr">
-                      <a:solidFill>
-                        <a:srgbClr val="CBD5E0"/>
-                      </a:solidFill>
-                      <a:prstDash val="solid"/>
-                      <a:round/>
-                      <a:headEnd type="none" w="med" len="med"/>
-                      <a:tailEnd type="none" w="med" len="med"/>
-                    </a:lnL>
-                    <a:lnR w="3810" cap="flat" cmpd="sng" algn="ctr">
-                      <a:solidFill>
-                        <a:srgbClr val="CBD5E0"/>
-                      </a:solidFill>
-                      <a:prstDash val="solid"/>
-                      <a:round/>
-                      <a:headEnd type="none" w="med" len="med"/>
-                      <a:tailEnd type="none" w="med" len="med"/>
-                    </a:lnR>
-                    <a:lnT w="3810" cap="flat" cmpd="sng" algn="ctr">
-                      <a:solidFill>
-                        <a:srgbClr val="CBD5E0"/>
-                      </a:solidFill>
-                      <a:prstDash val="solid"/>
-                      <a:round/>
-                      <a:headEnd type="none" w="med" len="med"/>
-                      <a:tailEnd type="none" w="med" len="med"/>
-                    </a:lnT>
-                    <a:lnB w="3810" cap="flat" cmpd="sng" algn="ctr">
-                      <a:solidFill>
-                        <a:srgbClr val="CBD5E0"/>
-                      </a:solidFill>
-                      <a:prstDash val="solid"/>
-                      <a:round/>
-                      <a:headEnd type="none" w="med" len="med"/>
-                      <a:tailEnd type="none" w="med" len="med"/>
-                    </a:lnB>
-                    <a:solidFill>
-                      <a:srgbClr val="F7FAFC"/>
-                    </a:solidFill>
-                  </a:tcPr>
-                </a:tc>
-              </a:tr>
-            </a:tbl>
-          </a:graphicData>
-        </a:graphic>
-      </p:graphicFrame>
-      <p:sp>
-        <p:nvSpPr>
-          <p:cNvPr id="7" name="Shape 4"/>
-          <p:cNvSpPr/>
-          <p:nvPr/>
-        </p:nvSpPr>
-        <p:spPr>
-          <a:xfrm>
-            <a:off x="566928" y="5193792"/>
-            <a:ext cx="11057839" cy="804672"/>
-          </a:xfrm>
-          <a:prstGeom prst="roundRect">
-            <a:avLst>
-              <a:gd name="adj" fmla="val 6818"/>
-            </a:avLst>
-          </a:prstGeom>
-          <a:solidFill>
-            <a:srgbClr val="F3EBDA"/>
-          </a:solidFill>
-          <a:ln w="10160">
-            <a:solidFill>
-              <a:srgbClr val="D9B668"/>
-            </a:solidFill>
-            <a:prstDash val="solid"/>
-          </a:ln>
-        </p:spPr>
-      </p:sp>
-      <p:sp>
-        <p:nvSpPr>
-          <p:cNvPr id="8" name="Text 5"/>
-          <p:cNvSpPr/>
-          <p:nvPr/>
-        </p:nvSpPr>
-        <p:spPr>
-          <a:xfrm>
-            <a:off x="749808" y="5303520"/>
-            <a:ext cx="1691640" cy="256032"/>
-          </a:xfrm>
-          <a:prstGeom prst="rect">
-            <a:avLst/>
-          </a:prstGeom>
-          <a:noFill/>
-          <a:ln/>
-        </p:spPr>
-        <p:txBody>
-          <a:bodyPr wrap="square" lIns="0" tIns="0" rIns="0" bIns="0" rtlCol="0" anchor="ctr"/>
+      <p:sp>
+        <p:nvSpPr>
+          <p:cNvPr id="6" name="Text 4"/>
+          <p:cNvSpPr/>
+          <p:nvPr/>
+        </p:nvSpPr>
+        <p:spPr>
+          <a:xfrm>
+            <a:off x="566928" y="1517904"/>
+            <a:ext cx="6492240" cy="274320"/>
+          </a:xfrm>
+          <a:prstGeom prst="rect">
+            <a:avLst/>
+          </a:prstGeom>
+          <a:noFill/>
+          <a:ln/>
+        </p:spPr>
+        <p:txBody>
+          <a:bodyPr wrap="square" rtlCol="0" anchor="ctr"/>
           <a:lstStyle/>
           <a:p>
             <a:pPr indent="0" marL="0">
               <a:buNone/>
             </a:pPr>
-            <a:r>
-              <a:rPr lang="en-US" sz="1050" b="1" dirty="0">
-                <a:solidFill>
-                  <a:srgbClr val="977024"/>
+            <a:endParaRPr lang="en-US" sz="1400" dirty="0"/>
+          </a:p>
+        </p:txBody>
+      </p:sp>
+      <p:sp>
+        <p:nvSpPr>
+          <p:cNvPr id="7" name="Text 5"/>
+          <p:cNvSpPr/>
+          <p:nvPr/>
+        </p:nvSpPr>
+        <p:spPr>
+          <a:xfrm>
+            <a:off x="566928" y="1874520"/>
+            <a:ext cx="6492240" cy="182880"/>
+          </a:xfrm>
+          <a:prstGeom prst="rect">
+            <a:avLst/>
+          </a:prstGeom>
+          <a:noFill/>
+          <a:ln/>
+        </p:spPr>
+        <p:txBody>
+          <a:bodyPr wrap="square" rtlCol="0" anchor="ctr"/>
+          <a:lstStyle/>
+          <a:p>
+            <a:pPr indent="0" marL="0">
+              <a:buNone/>
+            </a:pPr>
+            <a:endParaRPr lang="en-US" sz="900" dirty="0"/>
+          </a:p>
+        </p:txBody>
+      </p:sp>
+      <p:sp>
+        <p:nvSpPr>
+          <p:cNvPr id="8" name="Text 6"/>
+          <p:cNvSpPr/>
+          <p:nvPr/>
+        </p:nvSpPr>
+        <p:spPr>
+          <a:xfrm>
+            <a:off x="566928" y="6382512"/>
+            <a:ext cx="7315200" cy="219456"/>
+          </a:xfrm>
+          <a:prstGeom prst="rect">
+            <a:avLst/>
+          </a:prstGeom>
+          <a:noFill/>
+          <a:ln/>
+        </p:spPr>
+        <p:txBody>
+          <a:bodyPr wrap="square" lIns="0" tIns="0" rIns="0" bIns="0" rtlCol="0" anchor="ctr"/>
+          <a:lstStyle/>
+          <a:p>
+            <a:pPr indent="0" marL="0">
+              <a:buNone/>
+            </a:pPr>
+            <a:r>
+              <a:rPr lang="en-US" sz="800" dirty="0">
+                <a:solidFill>
+                  <a:srgbClr val="718096"/>
                 </a:solidFill>
                 <a:latin typeface="Pretendard" pitchFamily="34" charset="0"/>
                 <a:ea typeface="Pretendard" pitchFamily="34" charset="-122"/>
                 <a:cs typeface="Pretendard" pitchFamily="34" charset="-120"/>
               </a:rPr>
-              <a:t>종합 가치 제안</a:t>
-            </a:r>
-            <a:endParaRPr lang="en-US" sz="1050" dirty="0"/>
-          </a:p>
-        </p:txBody>
-      </p:sp>
-      <p:sp>
-        <p:nvSpPr>
-          <p:cNvPr id="9" name="Text 6"/>
-          <p:cNvSpPr/>
-          <p:nvPr/>
-        </p:nvSpPr>
-        <p:spPr>
-          <a:xfrm>
-            <a:off x="2487168" y="5266944"/>
-            <a:ext cx="8954719" cy="658368"/>
-          </a:xfrm>
-          <a:prstGeom prst="rect">
-            <a:avLst/>
-          </a:prstGeom>
-          <a:noFill/>
-          <a:ln/>
-        </p:spPr>
-        <p:txBody>
-          <a:bodyPr wrap="square" lIns="0" tIns="0" rIns="0" bIns="0" rtlCol="0" anchor="ctr"/>
-          <a:lstStyle/>
-          <a:p>
-            <a:pPr indent="0" marL="0">
-              <a:lnSpc>
-                <a:spcPct val="125000"/>
-              </a:lnSpc>
-              <a:buNone/>
-            </a:pPr>
-            <a:r>
-              <a:rPr lang="en-US" sz="1100" dirty="0">
-                <a:solidFill>
-                  <a:srgbClr val="10161F"/>
-                </a:solidFill>
-                <a:latin typeface="Pretendard" pitchFamily="34" charset="0"/>
-                <a:ea typeface="Pretendard" pitchFamily="34" charset="-122"/>
-                <a:cs typeface="Pretendard" pitchFamily="34" charset="-120"/>
-              </a:rPr>
-              <a:t>{"ok":true,"mocked":true,"extractedFields":{"area_signal":"역삼","asset_type":"오피스빌딩","price_band":"300억","size_signal":"3000평(약 9917.4㎡)"},"extractedFacts":{"region":"역삼","exactAddressCandidate":"역삼동 742-1","assetType":"오피스빌딩","priceText":"300억","sizeText":"3000평(약 9917.4㎡)","currentUse":"오피스","currentUseSignal":"근린생활시설","leaseSignal":"임대중","vacancySignal":"공실없음","tenantNames":["쿠팡","네이버"],"unitRentTexts":["301호: 1500만"],"sellerMotivationText":"자산 효율화","brokerNotes":["초역세권 매물"]},"detectedSensitiveFields":["exact_address","tenant_name"],"ambiguousFields":[],"warnings":[],"areaSignal":"역삼","assetType":"오피스빌딩","priceBand":"300억","sizeSignal":"3000평(약 9917.4㎡)","dealType":"매각","buildingName":"역삼 센트럴타워","exactAddress":"역삼동 742-1","totalFloorArea":9917.3,"buildYear":2015,"currentUseSignal":"근린생활시설","vacancySignal":"공실 없음","fitSummary":"초역세권 근생 빌딩으로 시행/사옥 매입에 최적화","cautionSummary":"주요 임차인 만기 조율 필요","hiddenFields":["exact_address","seller_motivation"],"confidence":{"areaSignal":"confirmed","assetType":"confirmed","priceBand":"ai_hypothesis","fitSummary":"ai_hypothesis"},"missingData":["sizeSignal"],"boundaryNote":"본 자료는 실거래 통계 기반 참고치입니다.","buyerType":"법인 사옥형","budgetRange":{"min":50,"max":80,"display":"50억~80억"},"preferredRegions":["강남","성수"],"assetTypes":["꼬마빌딩","사옥용"],"purchasePurpose":"사옥용 매입","mustHave":["초역세권","주차"],"niceToHave":["테라스","루프탑"],"riskTolerance":"medium","financingNote":"자본금 50% 준비","missingQuestions":["구체적인 입주 시기가 언제인가요?","선호하는 수익률이 있나요?"],"privacyNotes":["연락처 비공개"],"fitReasons":["매수자 예산(50-80억)에 부합하는 매물입니다.","요청하신 성수/강남 권역에 해당합니다."],"cautionReasons":["요청한 용도와 달리 명도 협의가 다소 필요합니다."],"recommendedNextAction":"현장 답사 제안","kakaoMessage":"안녕하세요! 요청하신 조건에 부합하는 추천 매물이 있어 안내해 드립니다. 확인해보시고 피드백 부탁드립니다.","title":"강남 역삼역 초역세권 오피스 사옥용 빌딩 매각","shortSummary":"역삼역 도보 5분 거리의 준신축급 대형 오피스빌딩입니다.","dealPoints":["초역세권","사옥 최적"],"cautionPoints":["명도 조율 필요"],"hiddenInfoNotice":["보증금 및 지번은 인가 후 확인 가능"],"gateMessage":"G1 등급 등록이 필요합니다.","kakaoText":"강남 역삼역 오피스 빌딩 매각 안내입니다.","exactUnitCandidate":"101호","floor":"1층","areaSqmText":"150㎡","spaceType":"office","depositText":"5000만","monthlyRentText":"400만","maintenanceFeeText":"50만","availableFromText":"즉시입주","leaseTermMonthsText":"24","incentivesText":"렌트프리 2개월","restrictions":[],"landlordIdentity":"김성수","currentTenant":"스타트업","vacancyReason":"이전 확장","rentNegotiation":"협의 가능","region":"성수동","areaSqm":150,"deposit":5000,"monthlyRent":400,"maintenanceFee":50,"availableFrom":"즉시입주","leaseTermMonths":24,"incentives":{"rentFreeMonths":2,"interiorSupport":"일부 인테리어 지원","freeRentDetail":"렌트프리 2개월 지원"},"shortSummaryLease":"성수역 도보 5분 거리 1층 리테일 상가 매물입니다."} ### 밸류업 시나리오 (AI 추정)</a:t>
-            </a:r>
-            <a:endParaRPr lang="en-US" sz="1100" dirty="0"/>
-          </a:p>
-        </p:txBody>
-      </p:sp>
-      <p:sp>
-        <p:nvSpPr>
-          <p:cNvPr id="10" name="Text 7"/>
-          <p:cNvSpPr/>
-          <p:nvPr/>
-        </p:nvSpPr>
-        <p:spPr>
-          <a:xfrm>
-            <a:off x="566928" y="6382512"/>
-            <a:ext cx="7315200" cy="219456"/>
-          </a:xfrm>
-          <a:prstGeom prst="rect">
-            <a:avLst/>
-          </a:prstGeom>
-          <a:noFill/>
-          <a:ln/>
-        </p:spPr>
-        <p:txBody>
-          <a:bodyPr wrap="square" lIns="0" tIns="0" rIns="0" bIns="0" rtlCol="0" anchor="ctr"/>
-          <a:lstStyle/>
-          <a:p>
-            <a:pPr indent="0" marL="0">
-              <a:buNone/>
-            </a:pPr>
-            <a:r>
-              <a:rPr lang="en-US" sz="800" dirty="0">
-                <a:solidFill>
-                  <a:srgbClr val="718096"/>
-                </a:solidFill>
-                <a:latin typeface="Pretendard" pitchFamily="34" charset="0"/>
-                <a:ea typeface="Pretendard" pitchFamily="34" charset="-122"/>
-                <a:cs typeface="Pretendard" pitchFamily="34" charset="-120"/>
-              </a:rPr>
               <a:t>크리딜   |   </a:t>
             </a:r>
             <a:endParaRPr lang="en-US" sz="800" dirty="0"/>
@@ -10329,7 +7437,7 @@
       </p:sp>
       <p:sp>
         <p:nvSpPr>
-          <p:cNvPr id="11" name="Text 8"/>
+          <p:cNvPr id="9" name="Text 7"/>
           <p:cNvSpPr/>
           <p:nvPr/>
         </p:nvSpPr>
@@ -10544,11 +7652,11 @@
         <p:spPr>
           <a:xfrm>
             <a:off x="566928" y="1572768"/>
-            <a:ext cx="11057839" cy="3200400"/>
+            <a:ext cx="2490140" cy="3200400"/>
           </a:xfrm>
           <a:prstGeom prst="roundRect">
             <a:avLst>
-              <a:gd name="adj" fmla="val 1714"/>
+              <a:gd name="adj" fmla="val 2203"/>
             </a:avLst>
           </a:prstGeom>
           <a:solidFill>
@@ -10630,7 +7738,7 @@
         <p:spPr>
           <a:xfrm>
             <a:off x="786384" y="2304288"/>
-            <a:ext cx="10618927" cy="365760"/>
+            <a:ext cx="2051228" cy="365760"/>
           </a:xfrm>
           <a:prstGeom prst="rect">
             <a:avLst/>
@@ -10669,7 +7777,7 @@
         <p:spPr>
           <a:xfrm>
             <a:off x="786384" y="2761488"/>
-            <a:ext cx="10618927" cy="1828800"/>
+            <a:ext cx="2051228" cy="1828800"/>
           </a:xfrm>
           <a:prstGeom prst="rect">
             <a:avLst/>
@@ -10693,16 +7801,149 @@
                 <a:ea typeface="Pretendard" pitchFamily="34" charset="-122"/>
                 <a:cs typeface="Pretendard" pitchFamily="34" charset="-120"/>
               </a:rPr>
-              <a:t>{"ok"</a:t>
+              <a:t>초기 관심 표명 → 담당자 연락</a:t>
             </a:r>
             <a:endParaRPr lang="en-US" sz="1100" dirty="0"/>
           </a:p>
+        </p:txBody>
+      </p:sp>
+      <p:sp>
+        <p:nvSpPr>
+          <p:cNvPr id="11" name="Shape 9"/>
+          <p:cNvSpPr/>
+          <p:nvPr/>
+        </p:nvSpPr>
+        <p:spPr>
+          <a:xfrm>
+            <a:off x="3148508" y="3035808"/>
+            <a:ext cx="182880" cy="274320"/>
+          </a:xfrm>
+          <a:prstGeom prst="rightArrow">
+            <a:avLst/>
+          </a:prstGeom>
+          <a:solidFill>
+            <a:srgbClr val="CBD5E0"/>
+          </a:solidFill>
+          <a:ln w="6350">
+            <a:solidFill>
+              <a:srgbClr val="718096"/>
+            </a:solidFill>
+            <a:prstDash val="solid"/>
+          </a:ln>
+        </p:spPr>
+      </p:sp>
+      <p:sp>
+        <p:nvSpPr>
+          <p:cNvPr id="12" name="Shape 10"/>
+          <p:cNvSpPr/>
+          <p:nvPr/>
+        </p:nvSpPr>
+        <p:spPr>
+          <a:xfrm>
+            <a:off x="3422828" y="1572768"/>
+            <a:ext cx="2490140" cy="3200400"/>
+          </a:xfrm>
+          <a:prstGeom prst="roundRect">
+            <a:avLst>
+              <a:gd name="adj" fmla="val 2203"/>
+            </a:avLst>
+          </a:prstGeom>
+          <a:solidFill>
+            <a:srgbClr val="F7FAFC"/>
+          </a:solidFill>
+          <a:ln w="6350">
+            <a:solidFill>
+              <a:srgbClr val="CBD5E0"/>
+            </a:solidFill>
+            <a:prstDash val="solid"/>
+          </a:ln>
+        </p:spPr>
+      </p:sp>
+      <p:sp>
+        <p:nvSpPr>
+          <p:cNvPr id="13" name="Shape 11"/>
+          <p:cNvSpPr/>
+          <p:nvPr/>
+        </p:nvSpPr>
+        <p:spPr>
+          <a:xfrm>
+            <a:off x="3642284" y="1792224"/>
+            <a:ext cx="438912" cy="438912"/>
+          </a:xfrm>
+          <a:prstGeom prst="ellipse">
+            <a:avLst/>
+          </a:prstGeom>
+          <a:solidFill>
+            <a:srgbClr val="B98A2E"/>
+          </a:solidFill>
+          <a:ln/>
+        </p:spPr>
+      </p:sp>
+      <p:sp>
+        <p:nvSpPr>
+          <p:cNvPr id="14" name="Text 12"/>
+          <p:cNvSpPr/>
+          <p:nvPr/>
+        </p:nvSpPr>
+        <p:spPr>
+          <a:xfrm>
+            <a:off x="3642284" y="1792224"/>
+            <a:ext cx="438912" cy="438912"/>
+          </a:xfrm>
+          <a:prstGeom prst="rect">
+            <a:avLst/>
+          </a:prstGeom>
+          <a:noFill/>
+          <a:ln/>
+        </p:spPr>
+        <p:txBody>
+          <a:bodyPr wrap="square" lIns="0" tIns="0" rIns="0" bIns="0" rtlCol="0" anchor="ctr"/>
+          <a:lstStyle/>
+          <a:p>
+            <a:pPr algn="ctr" indent="0" marL="0">
+              <a:buNone/>
+            </a:pPr>
+            <a:r>
+              <a:rPr lang="en-US" sz="1400" b="1" dirty="0">
+                <a:solidFill>
+                  <a:srgbClr val="FFFFFF"/>
+                </a:solidFill>
+                <a:latin typeface="Arial" pitchFamily="34" charset="0"/>
+                <a:ea typeface="Arial" pitchFamily="34" charset="-122"/>
+                <a:cs typeface="Arial" pitchFamily="34" charset="-120"/>
+              </a:rPr>
+              <a:t>02</a:t>
+            </a:r>
+            <a:endParaRPr lang="en-US" sz="1400" dirty="0"/>
+          </a:p>
+        </p:txBody>
+      </p:sp>
+      <p:sp>
+        <p:nvSpPr>
+          <p:cNvPr id="15" name="Text 13"/>
+          <p:cNvSpPr/>
+          <p:nvPr/>
+        </p:nvSpPr>
+        <p:spPr>
+          <a:xfrm>
+            <a:off x="3642284" y="2304288"/>
+            <a:ext cx="2051228" cy="365760"/>
+          </a:xfrm>
+          <a:prstGeom prst="rect">
+            <a:avLst/>
+          </a:prstGeom>
+          <a:noFill/>
+          <a:ln/>
+        </p:spPr>
+        <p:txBody>
+          <a:bodyPr wrap="square" rtlCol="0" anchor="ctr"/>
+          <a:lstStyle/>
           <a:p>
             <a:pPr indent="0" marL="0">
               <a:buNone/>
             </a:pPr>
             <a:r>
-              <a:rPr lang="en-US" sz="1100" dirty="0">
+              <a:rPr lang="en-US" sz="1600" b="1" dirty="0">
                 <a:solidFill>
                   <a:srgbClr val="10161F"/>
                 </a:solidFill>
@@ -10710,45 +7951,462 @@
                 <a:ea typeface="Pretendard" pitchFamily="34" charset="-122"/>
                 <a:cs typeface="Pretendard" pitchFamily="34" charset="-120"/>
               </a:rPr>
-              <a:t>true,"mocked":true,"extractedFields":{"area_signal":"역삼","asset_type":"오피스빌딩","price_band":"300억","size_signal":"3000평(약 9917.4㎡)"},"extractedFacts":{"region":"역삼","exactAddressCandidate":"역삼동 742-1","assetType":"오피스빌딩","priceText":"300억","sizeText":"3000평(약 9917.4㎡)","currentUse":"오피스","currentUseSignal":"근린생활시설","leaseSignal":"임대중","vacancySignal":"공실없음","tenantNames":["쿠팡","네이버"],"unitRentTexts":["301호: 1500만"],"sellerMotivationText":"자산 효율화","brokerNotes":["초역세권 매물"]},"detectedSensitiveFields":["exact_address","tenant_name"],"ambiguousFields":[],"warnings":[],"areaSignal":"역삼","assetType":"오피스빌딩","priceBand":"300억","sizeSignal":"3000평(약 9917.4㎡)","dealType":"매각","buildingName":"역삼 센트럴타워","exactAddress":"역삼동 742-1","totalFloorArea":9917.3,"buildYear":2015,"currentUseSignal":"근린생활시설","vacancySignal":"공실 없음","fitSummary":"초역세권 근생 빌딩으로 시행/사옥 매입에 최적화","cautionSummary":"주요 임차인 만기 조율 필요","hiddenFields":["exact_address","seller_motivation"],"confidence":{"areaSignal":"confirmed","assetType":"confirmed","priceBand":"ai_hypothesis","fitSummary":"ai_hypothesis"},"missingData":["sizeSignal"],"boundaryNote":"본 자료는 실거래 통계 기반 참고치입니다.","buyerType":"법인 사옥형","budgetRange":{"min":50,"max":80,"display":"50억~80억"},"preferredRegions":["강남","성수"],"assetTypes":["꼬마빌딩","사옥용"],"purchasePurpose":"사옥용 매입","mustHave":["초역세권","주차"],"niceToHave":["테라스","루프탑"],"riskTolerance":"medium","financingNote":"자본금 50% 준비","missingQuestions":["구체적인 입주 시기가 언제인가요?","선호하는 수익률이 있나요?"],"privacyNotes":["연락처 비공개"],"fitReasons":["매수자 예산(50-80억)에 부합하는 매물입니다.","요청하신 성수/강남 권역에 해당합니다."],"cautionReasons":["요청한 용도와 달리 명도 협의가 다소 필요합니다."],"recommendedNextAction":"현장 답사 제안","kakaoMessage":"안녕하세요! 요청하신 조건에 부합하는 추천 매물이 있어 안내해 드립니다. 확인해보시고 피드백 부탁드립니다.","title":"강남 역삼역 초역세권 오피스 사옥용 빌딩 매각","shortSummary":"역삼역 도보 5분 거리의 준신축급 대형 오피스빌딩입니다.","dealPoints":["초역세권","사옥 최적"],"cautionPoints":["명도 조율 필요"],"hiddenInfoNotice":["보증금 및 지번은 인가 후 확인 가능"],"gateMessage":"G1 등급 등록이 필요합니다.","kakaoText":"강남 역삼역 오피스 빌딩 매각 안내입니다.","exactUnitCandidate":"101호","floor":"1층","areaSqmText":"150㎡","spaceType":"office","depositText":"5000만","monthlyRentText":"400만","maintenanceFeeText":"50만","availableFromText":"즉시입주","leaseTermMonthsText":"24","incentivesText":"렌트프리 2개월","restrictions":[],"landlordIdentity":"김성수","currentTenant":"스타트업","vacancyReason":"이전 확장","rentNegotiation":"협의 가능","region":"성수동","areaSqm":150,"deposit":5000,"monthlyRent":400,"maintenanceFee":50,"availableFrom":"즉시입주","leaseTermMonths":24,"incentives":{"rentFreeMonths":2,"interiorSupport":"일부 인테리어 지원","freeRentDetail":"렌트프리 2개월 지원"},"shortSummaryLease":"성수역 도보 5분 거리 1층 리테일 상가 매물입니다."}</a:t>
-            </a:r>
-            <a:endParaRPr lang="en-US" sz="1100" dirty="0"/>
-          </a:p>
-        </p:txBody>
-      </p:sp>
-      <p:sp>
-        <p:nvSpPr>
-          <p:cNvPr id="11" name="Text 9"/>
-          <p:cNvSpPr/>
-          <p:nvPr/>
-        </p:nvSpPr>
-        <p:spPr>
-          <a:xfrm>
-            <a:off x="566928" y="6382512"/>
-            <a:ext cx="7315200" cy="219456"/>
-          </a:xfrm>
-          <a:prstGeom prst="rect">
-            <a:avLst/>
-          </a:prstGeom>
-          <a:noFill/>
-          <a:ln/>
-        </p:spPr>
-        <p:txBody>
-          <a:bodyPr wrap="square" lIns="0" tIns="0" rIns="0" bIns="0" rtlCol="0" anchor="ctr"/>
+              <a:t>2단계</a:t>
+            </a:r>
+            <a:endParaRPr lang="en-US" sz="1600" dirty="0"/>
+          </a:p>
+        </p:txBody>
+      </p:sp>
+      <p:sp>
+        <p:nvSpPr>
+          <p:cNvPr id="16" name="Text 14"/>
+          <p:cNvSpPr/>
+          <p:nvPr/>
+        </p:nvSpPr>
+        <p:spPr>
+          <a:xfrm>
+            <a:off x="3642284" y="2761488"/>
+            <a:ext cx="2051228" cy="1828800"/>
+          </a:xfrm>
+          <a:prstGeom prst="rect">
+            <a:avLst/>
+          </a:prstGeom>
+          <a:noFill/>
+          <a:ln/>
+        </p:spPr>
+        <p:txBody>
+          <a:bodyPr wrap="square" rtlCol="0" anchor="t"/>
           <a:lstStyle/>
           <a:p>
             <a:pPr indent="0" marL="0">
               <a:buNone/>
             </a:pPr>
             <a:r>
-              <a:rPr lang="en-US" sz="800" dirty="0">
-                <a:solidFill>
-                  <a:srgbClr val="718096"/>
+              <a:rPr lang="en-US" sz="1100" dirty="0">
+                <a:solidFill>
+                  <a:srgbClr val="10161F"/>
                 </a:solidFill>
                 <a:latin typeface="Pretendard" pitchFamily="34" charset="0"/>
                 <a:ea typeface="Pretendard" pitchFamily="34" charset="-122"/>
                 <a:cs typeface="Pretendard" pitchFamily="34" charset="-120"/>
               </a:rPr>
+              <a:t>NDA 체결 → 임차인 정보 및 임대차계약서 제공</a:t>
+            </a:r>
+            <a:endParaRPr lang="en-US" sz="1100" dirty="0"/>
+          </a:p>
+        </p:txBody>
+      </p:sp>
+      <p:sp>
+        <p:nvSpPr>
+          <p:cNvPr id="17" name="Shape 15"/>
+          <p:cNvSpPr/>
+          <p:nvPr/>
+        </p:nvSpPr>
+        <p:spPr>
+          <a:xfrm>
+            <a:off x="6004408" y="3035808"/>
+            <a:ext cx="182880" cy="274320"/>
+          </a:xfrm>
+          <a:prstGeom prst="rightArrow">
+            <a:avLst/>
+          </a:prstGeom>
+          <a:solidFill>
+            <a:srgbClr val="CBD5E0"/>
+          </a:solidFill>
+          <a:ln w="6350">
+            <a:solidFill>
+              <a:srgbClr val="718096"/>
+            </a:solidFill>
+            <a:prstDash val="solid"/>
+          </a:ln>
+        </p:spPr>
+      </p:sp>
+      <p:sp>
+        <p:nvSpPr>
+          <p:cNvPr id="18" name="Shape 16"/>
+          <p:cNvSpPr/>
+          <p:nvPr/>
+        </p:nvSpPr>
+        <p:spPr>
+          <a:xfrm>
+            <a:off x="6278728" y="1572768"/>
+            <a:ext cx="2490140" cy="3200400"/>
+          </a:xfrm>
+          <a:prstGeom prst="roundRect">
+            <a:avLst>
+              <a:gd name="adj" fmla="val 2203"/>
+            </a:avLst>
+          </a:prstGeom>
+          <a:solidFill>
+            <a:srgbClr val="F7FAFC"/>
+          </a:solidFill>
+          <a:ln w="6350">
+            <a:solidFill>
+              <a:srgbClr val="CBD5E0"/>
+            </a:solidFill>
+            <a:prstDash val="solid"/>
+          </a:ln>
+        </p:spPr>
+      </p:sp>
+      <p:sp>
+        <p:nvSpPr>
+          <p:cNvPr id="19" name="Shape 17"/>
+          <p:cNvSpPr/>
+          <p:nvPr/>
+        </p:nvSpPr>
+        <p:spPr>
+          <a:xfrm>
+            <a:off x="6498184" y="1792224"/>
+            <a:ext cx="438912" cy="438912"/>
+          </a:xfrm>
+          <a:prstGeom prst="ellipse">
+            <a:avLst/>
+          </a:prstGeom>
+          <a:solidFill>
+            <a:srgbClr val="B98A2E"/>
+          </a:solidFill>
+          <a:ln/>
+        </p:spPr>
+      </p:sp>
+      <p:sp>
+        <p:nvSpPr>
+          <p:cNvPr id="20" name="Text 18"/>
+          <p:cNvSpPr/>
+          <p:nvPr/>
+        </p:nvSpPr>
+        <p:spPr>
+          <a:xfrm>
+            <a:off x="6498184" y="1792224"/>
+            <a:ext cx="438912" cy="438912"/>
+          </a:xfrm>
+          <a:prstGeom prst="rect">
+            <a:avLst/>
+          </a:prstGeom>
+          <a:noFill/>
+          <a:ln/>
+        </p:spPr>
+        <p:txBody>
+          <a:bodyPr wrap="square" lIns="0" tIns="0" rIns="0" bIns="0" rtlCol="0" anchor="ctr"/>
+          <a:lstStyle/>
+          <a:p>
+            <a:pPr algn="ctr" indent="0" marL="0">
+              <a:buNone/>
+            </a:pPr>
+            <a:r>
+              <a:rPr lang="en-US" sz="1400" b="1" dirty="0">
+                <a:solidFill>
+                  <a:srgbClr val="FFFFFF"/>
+                </a:solidFill>
+                <a:latin typeface="Arial" pitchFamily="34" charset="0"/>
+                <a:ea typeface="Arial" pitchFamily="34" charset="-122"/>
+                <a:cs typeface="Arial" pitchFamily="34" charset="-120"/>
+              </a:rPr>
+              <a:t>03</a:t>
+            </a:r>
+            <a:endParaRPr lang="en-US" sz="1400" dirty="0"/>
+          </a:p>
+        </p:txBody>
+      </p:sp>
+      <p:sp>
+        <p:nvSpPr>
+          <p:cNvPr id="21" name="Text 19"/>
+          <p:cNvSpPr/>
+          <p:nvPr/>
+        </p:nvSpPr>
+        <p:spPr>
+          <a:xfrm>
+            <a:off x="6498184" y="2304288"/>
+            <a:ext cx="2051228" cy="365760"/>
+          </a:xfrm>
+          <a:prstGeom prst="rect">
+            <a:avLst/>
+          </a:prstGeom>
+          <a:noFill/>
+          <a:ln/>
+        </p:spPr>
+        <p:txBody>
+          <a:bodyPr wrap="square" rtlCol="0" anchor="ctr"/>
+          <a:lstStyle/>
+          <a:p>
+            <a:pPr indent="0" marL="0">
+              <a:buNone/>
+            </a:pPr>
+            <a:r>
+              <a:rPr lang="en-US" sz="1600" b="1" dirty="0">
+                <a:solidFill>
+                  <a:srgbClr val="10161F"/>
+                </a:solidFill>
+                <a:latin typeface="Pretendard" pitchFamily="34" charset="0"/>
+                <a:ea typeface="Pretendard" pitchFamily="34" charset="-122"/>
+                <a:cs typeface="Pretendard" pitchFamily="34" charset="-120"/>
+              </a:rPr>
+              <a:t>3단계</a:t>
+            </a:r>
+            <a:endParaRPr lang="en-US" sz="1600" dirty="0"/>
+          </a:p>
+        </p:txBody>
+      </p:sp>
+      <p:sp>
+        <p:nvSpPr>
+          <p:cNvPr id="22" name="Text 20"/>
+          <p:cNvSpPr/>
+          <p:nvPr/>
+        </p:nvSpPr>
+        <p:spPr>
+          <a:xfrm>
+            <a:off x="6498184" y="2761488"/>
+            <a:ext cx="2051228" cy="1828800"/>
+          </a:xfrm>
+          <a:prstGeom prst="rect">
+            <a:avLst/>
+          </a:prstGeom>
+          <a:noFill/>
+          <a:ln/>
+        </p:spPr>
+        <p:txBody>
+          <a:bodyPr wrap="square" rtlCol="0" anchor="t"/>
+          <a:lstStyle/>
+          <a:p>
+            <a:pPr indent="0" marL="0">
+              <a:buNone/>
+            </a:pPr>
+            <a:r>
+              <a:rPr lang="en-US" sz="1100" dirty="0">
+                <a:solidFill>
+                  <a:srgbClr val="10161F"/>
+                </a:solidFill>
+                <a:latin typeface="Pretendard" pitchFamily="34" charset="0"/>
+                <a:ea typeface="Pretendard" pitchFamily="34" charset="-122"/>
+                <a:cs typeface="Pretendard" pitchFamily="34" charset="-120"/>
+              </a:rPr>
+              <a:t>현장 실사 일정 조율 → 건물 컨디션 및 설비 직접 확인</a:t>
+            </a:r>
+            <a:endParaRPr lang="en-US" sz="1100" dirty="0"/>
+          </a:p>
+        </p:txBody>
+      </p:sp>
+      <p:sp>
+        <p:nvSpPr>
+          <p:cNvPr id="23" name="Shape 21"/>
+          <p:cNvSpPr/>
+          <p:nvPr/>
+        </p:nvSpPr>
+        <p:spPr>
+          <a:xfrm>
+            <a:off x="8860307" y="3035808"/>
+            <a:ext cx="182880" cy="274320"/>
+          </a:xfrm>
+          <a:prstGeom prst="rightArrow">
+            <a:avLst/>
+          </a:prstGeom>
+          <a:solidFill>
+            <a:srgbClr val="CBD5E0"/>
+          </a:solidFill>
+          <a:ln w="6350">
+            <a:solidFill>
+              <a:srgbClr val="718096"/>
+            </a:solidFill>
+            <a:prstDash val="solid"/>
+          </a:ln>
+        </p:spPr>
+      </p:sp>
+      <p:sp>
+        <p:nvSpPr>
+          <p:cNvPr id="24" name="Shape 22"/>
+          <p:cNvSpPr/>
+          <p:nvPr/>
+        </p:nvSpPr>
+        <p:spPr>
+          <a:xfrm>
+            <a:off x="9134627" y="1572768"/>
+            <a:ext cx="2490140" cy="3200400"/>
+          </a:xfrm>
+          <a:prstGeom prst="roundRect">
+            <a:avLst>
+              <a:gd name="adj" fmla="val 2203"/>
+            </a:avLst>
+          </a:prstGeom>
+          <a:solidFill>
+            <a:srgbClr val="F7FAFC"/>
+          </a:solidFill>
+          <a:ln w="6350">
+            <a:solidFill>
+              <a:srgbClr val="CBD5E0"/>
+            </a:solidFill>
+            <a:prstDash val="solid"/>
+          </a:ln>
+        </p:spPr>
+      </p:sp>
+      <p:sp>
+        <p:nvSpPr>
+          <p:cNvPr id="25" name="Shape 23"/>
+          <p:cNvSpPr/>
+          <p:nvPr/>
+        </p:nvSpPr>
+        <p:spPr>
+          <a:xfrm>
+            <a:off x="9354083" y="1792224"/>
+            <a:ext cx="438912" cy="438912"/>
+          </a:xfrm>
+          <a:prstGeom prst="ellipse">
+            <a:avLst/>
+          </a:prstGeom>
+          <a:solidFill>
+            <a:srgbClr val="B98A2E"/>
+          </a:solidFill>
+          <a:ln/>
+        </p:spPr>
+      </p:sp>
+      <p:sp>
+        <p:nvSpPr>
+          <p:cNvPr id="26" name="Text 24"/>
+          <p:cNvSpPr/>
+          <p:nvPr/>
+        </p:nvSpPr>
+        <p:spPr>
+          <a:xfrm>
+            <a:off x="9354083" y="1792224"/>
+            <a:ext cx="438912" cy="438912"/>
+          </a:xfrm>
+          <a:prstGeom prst="rect">
+            <a:avLst/>
+          </a:prstGeom>
+          <a:noFill/>
+          <a:ln/>
+        </p:spPr>
+        <p:txBody>
+          <a:bodyPr wrap="square" lIns="0" tIns="0" rIns="0" bIns="0" rtlCol="0" anchor="ctr"/>
+          <a:lstStyle/>
+          <a:p>
+            <a:pPr algn="ctr" indent="0" marL="0">
+              <a:buNone/>
+            </a:pPr>
+            <a:r>
+              <a:rPr lang="en-US" sz="1400" b="1" dirty="0">
+                <a:solidFill>
+                  <a:srgbClr val="FFFFFF"/>
+                </a:solidFill>
+                <a:latin typeface="Arial" pitchFamily="34" charset="0"/>
+                <a:ea typeface="Arial" pitchFamily="34" charset="-122"/>
+                <a:cs typeface="Arial" pitchFamily="34" charset="-120"/>
+              </a:rPr>
+              <a:t>04</a:t>
+            </a:r>
+            <a:endParaRPr lang="en-US" sz="1400" dirty="0"/>
+          </a:p>
+        </p:txBody>
+      </p:sp>
+      <p:sp>
+        <p:nvSpPr>
+          <p:cNvPr id="27" name="Text 25"/>
+          <p:cNvSpPr/>
+          <p:nvPr/>
+        </p:nvSpPr>
+        <p:spPr>
+          <a:xfrm>
+            <a:off x="9354083" y="2304288"/>
+            <a:ext cx="2051228" cy="365760"/>
+          </a:xfrm>
+          <a:prstGeom prst="rect">
+            <a:avLst/>
+          </a:prstGeom>
+          <a:noFill/>
+          <a:ln/>
+        </p:spPr>
+        <p:txBody>
+          <a:bodyPr wrap="square" rtlCol="0" anchor="ctr"/>
+          <a:lstStyle/>
+          <a:p>
+            <a:pPr indent="0" marL="0">
+              <a:buNone/>
+            </a:pPr>
+            <a:r>
+              <a:rPr lang="en-US" sz="1600" b="1" dirty="0">
+                <a:solidFill>
+                  <a:srgbClr val="10161F"/>
+                </a:solidFill>
+                <a:latin typeface="Pretendard" pitchFamily="34" charset="0"/>
+                <a:ea typeface="Pretendard" pitchFamily="34" charset="-122"/>
+                <a:cs typeface="Pretendard" pitchFamily="34" charset="-120"/>
+              </a:rPr>
+              <a:t>4단계</a:t>
+            </a:r>
+            <a:endParaRPr lang="en-US" sz="1600" dirty="0"/>
+          </a:p>
+        </p:txBody>
+      </p:sp>
+      <p:sp>
+        <p:nvSpPr>
+          <p:cNvPr id="28" name="Text 26"/>
+          <p:cNvSpPr/>
+          <p:nvPr/>
+        </p:nvSpPr>
+        <p:spPr>
+          <a:xfrm>
+            <a:off x="9354083" y="2761488"/>
+            <a:ext cx="2051228" cy="1828800"/>
+          </a:xfrm>
+          <a:prstGeom prst="rect">
+            <a:avLst/>
+          </a:prstGeom>
+          <a:noFill/>
+          <a:ln/>
+        </p:spPr>
+        <p:txBody>
+          <a:bodyPr wrap="square" rtlCol="0" anchor="t"/>
+          <a:lstStyle/>
+          <a:p>
+            <a:pPr indent="0" marL="0">
+              <a:buNone/>
+            </a:pPr>
+            <a:r>
+              <a:rPr lang="en-US" sz="1100" dirty="0">
+                <a:solidFill>
+                  <a:srgbClr val="10161F"/>
+                </a:solidFill>
+                <a:latin typeface="Pretendard" pitchFamily="34" charset="0"/>
+                <a:ea typeface="Pretendard" pitchFamily="34" charset="-122"/>
+                <a:cs typeface="Pretendard" pitchFamily="34" charset="-120"/>
+              </a:rPr>
+              <a:t>LOI(투자의향서) 제출 → 가격 협의 개시</a:t>
+            </a:r>
+            <a:endParaRPr lang="en-US" sz="1100" dirty="0"/>
+          </a:p>
+        </p:txBody>
+      </p:sp>
+      <p:sp>
+        <p:nvSpPr>
+          <p:cNvPr id="29" name="Text 27"/>
+          <p:cNvSpPr/>
+          <p:nvPr/>
+        </p:nvSpPr>
+        <p:spPr>
+          <a:xfrm>
+            <a:off x="566928" y="6382512"/>
+            <a:ext cx="7315200" cy="219456"/>
+          </a:xfrm>
+          <a:prstGeom prst="rect">
+            <a:avLst/>
+          </a:prstGeom>
+          <a:noFill/>
+          <a:ln/>
+        </p:spPr>
+        <p:txBody>
+          <a:bodyPr wrap="square" lIns="0" tIns="0" rIns="0" bIns="0" rtlCol="0" anchor="ctr"/>
+          <a:lstStyle/>
+          <a:p>
+            <a:pPr indent="0" marL="0">
+              <a:buNone/>
+            </a:pPr>
+            <a:r>
+              <a:rPr lang="en-US" sz="800" dirty="0">
+                <a:solidFill>
+                  <a:srgbClr val="718096"/>
+                </a:solidFill>
+                <a:latin typeface="Pretendard" pitchFamily="34" charset="0"/>
+                <a:ea typeface="Pretendard" pitchFamily="34" charset="-122"/>
+                <a:cs typeface="Pretendard" pitchFamily="34" charset="-120"/>
+              </a:rPr>
               <a:t>크리딜   |   </a:t>
             </a:r>
             <a:endParaRPr lang="en-US" sz="800" dirty="0"/>
@@ -10757,7 +8415,7 @@
       </p:sp>
       <p:sp>
         <p:nvSpPr>
-          <p:cNvPr id="12" name="Text 10"/>
+          <p:cNvPr id="30" name="Text 28"/>
           <p:cNvSpPr/>
           <p:nvPr/>
         </p:nvSpPr>

--- a/docs/test/stress/e2e-outputs/trading_case15_jongro_family_basic.pptx
+++ b/docs/test/stress/e2e-outputs/trading_case15_jongro_family_basic.pptx
@@ -15,9 +15,13 @@
     <p:sldId id="263" r:id="rId9"/>
     <p:sldId id="264" r:id="rId10"/>
     <p:sldId id="265" r:id="rId11"/>
+    <p:sldId id="266" r:id="rId12"/>
+    <p:sldId id="267" r:id="rId13"/>
+    <p:sldId id="268" r:id="rId14"/>
+    <p:sldId id="269" r:id="rId15"/>
   </p:sldIdLst>
   <p:notesMasterIdLst>
-    <p:notesMasterId r:id="rId12"/>
+    <p:notesMasterId r:id="rId16"/>
   </p:notesMasterIdLst>
   <p:sldSz cx="12192000" cy="6858000"/>
   <p:notesSz cx="6858000" cy="12192000"/>
@@ -623,6 +627,358 @@
             <a:fld id="{F7021451-1387-4CA6-816F-3879F97B5CBC}" type="slidenum">
               <a:rPr lang="en-US"/>
               <a:t>10</a:t>
+            </a:fld>
+            <a:endParaRPr lang="en-US"/>
+          </a:p>
+        </p:txBody>
+      </p:sp>
+    </p:spTree>
+    <p:extLst>
+      <p:ext uri="{BB962C8B-B14F-4D97-AF65-F5344CB8AC3E}">
+        <p14:creationId xmlns:p14="http://schemas.microsoft.com/office/powerpoint/2010/main" val="1024086991"/>
+      </p:ext>
+    </p:extLst>
+  </p:cSld>
+  <p:clrMapOvr>
+    <a:masterClrMapping/>
+  </p:clrMapOvr>
+</p:notes>
+</file>
+
+<file path=ppt/notesSlides/notesSlide11.xml><?xml version="1.0" encoding="utf-8"?>
+<p:notes xmlns:a="http://schemas.openxmlformats.org/drawingml/2006/main" xmlns:r="http://schemas.openxmlformats.org/officeDocument/2006/relationships" xmlns:p="http://schemas.openxmlformats.org/presentationml/2006/main">
+  <p:cSld>
+    <p:spTree>
+      <p:nvGrpSpPr>
+        <p:cNvPr id="1" name=""/>
+        <p:cNvGrpSpPr/>
+        <p:nvPr/>
+      </p:nvGrpSpPr>
+      <p:grpSpPr>
+        <a:xfrm>
+          <a:off x="0" y="0"/>
+          <a:ext cx="0" cy="0"/>
+          <a:chOff x="0" y="0"/>
+          <a:chExt cx="0" cy="0"/>
+        </a:xfrm>
+      </p:grpSpPr>
+      <p:sp>
+        <p:nvSpPr>
+          <p:cNvPr id="2" name="Slide Image Placeholder 1"/>
+          <p:cNvSpPr>
+            <a:spLocks noGrp="1" noRot="1" noChangeAspect="1"/>
+          </p:cNvSpPr>
+          <p:nvPr>
+            <p:ph type="sldImg"/>
+          </p:nvPr>
+        </p:nvSpPr>
+        <p:spPr/>
+      </p:sp>
+      <p:sp>
+        <p:nvSpPr>
+          <p:cNvPr id="3" name="Notes Placeholder 2"/>
+          <p:cNvSpPr>
+            <a:spLocks noGrp="1"/>
+          </p:cNvSpPr>
+          <p:nvPr>
+            <p:ph type="body" idx="1"/>
+          </p:nvPr>
+        </p:nvSpPr>
+        <p:spPr/>
+        <p:txBody>
+          <a:bodyPr/>
+          <a:lstStyle/>
+          <a:p>
+            <a:r>
+              <a:rPr lang="en-US" dirty="0"/>
+              <a:t/>
+            </a:r>
+            <a:endParaRPr lang="en-US" dirty="0"/>
+          </a:p>
+        </p:txBody>
+      </p:sp>
+      <p:sp>
+        <p:nvSpPr>
+          <p:cNvPr id="4" name="Slide Number Placeholder 3"/>
+          <p:cNvSpPr>
+            <a:spLocks noGrp="1"/>
+          </p:cNvSpPr>
+          <p:nvPr>
+            <p:ph type="sldNum" sz="quarter" idx="10"/>
+          </p:nvPr>
+        </p:nvSpPr>
+        <p:spPr/>
+        <p:txBody>
+          <a:bodyPr/>
+          <a:lstStyle/>
+          <a:p>
+            <a:fld id="{F7021451-1387-4CA6-816F-3879F97B5CBC}" type="slidenum">
+              <a:rPr lang="en-US"/>
+              <a:t>11</a:t>
+            </a:fld>
+            <a:endParaRPr lang="en-US"/>
+          </a:p>
+        </p:txBody>
+      </p:sp>
+    </p:spTree>
+    <p:extLst>
+      <p:ext uri="{BB962C8B-B14F-4D97-AF65-F5344CB8AC3E}">
+        <p14:creationId xmlns:p14="http://schemas.microsoft.com/office/powerpoint/2010/main" val="1024086991"/>
+      </p:ext>
+    </p:extLst>
+  </p:cSld>
+  <p:clrMapOvr>
+    <a:masterClrMapping/>
+  </p:clrMapOvr>
+</p:notes>
+</file>
+
+<file path=ppt/notesSlides/notesSlide12.xml><?xml version="1.0" encoding="utf-8"?>
+<p:notes xmlns:a="http://schemas.openxmlformats.org/drawingml/2006/main" xmlns:r="http://schemas.openxmlformats.org/officeDocument/2006/relationships" xmlns:p="http://schemas.openxmlformats.org/presentationml/2006/main">
+  <p:cSld>
+    <p:spTree>
+      <p:nvGrpSpPr>
+        <p:cNvPr id="1" name=""/>
+        <p:cNvGrpSpPr/>
+        <p:nvPr/>
+      </p:nvGrpSpPr>
+      <p:grpSpPr>
+        <a:xfrm>
+          <a:off x="0" y="0"/>
+          <a:ext cx="0" cy="0"/>
+          <a:chOff x="0" y="0"/>
+          <a:chExt cx="0" cy="0"/>
+        </a:xfrm>
+      </p:grpSpPr>
+      <p:sp>
+        <p:nvSpPr>
+          <p:cNvPr id="2" name="Slide Image Placeholder 1"/>
+          <p:cNvSpPr>
+            <a:spLocks noGrp="1" noRot="1" noChangeAspect="1"/>
+          </p:cNvSpPr>
+          <p:nvPr>
+            <p:ph type="sldImg"/>
+          </p:nvPr>
+        </p:nvSpPr>
+        <p:spPr/>
+      </p:sp>
+      <p:sp>
+        <p:nvSpPr>
+          <p:cNvPr id="3" name="Notes Placeholder 2"/>
+          <p:cNvSpPr>
+            <a:spLocks noGrp="1"/>
+          </p:cNvSpPr>
+          <p:nvPr>
+            <p:ph type="body" idx="1"/>
+          </p:nvPr>
+        </p:nvSpPr>
+        <p:spPr/>
+        <p:txBody>
+          <a:bodyPr/>
+          <a:lstStyle/>
+          <a:p>
+            <a:r>
+              <a:rPr lang="en-US" dirty="0"/>
+              <a:t/>
+            </a:r>
+            <a:endParaRPr lang="en-US" dirty="0"/>
+          </a:p>
+        </p:txBody>
+      </p:sp>
+      <p:sp>
+        <p:nvSpPr>
+          <p:cNvPr id="4" name="Slide Number Placeholder 3"/>
+          <p:cNvSpPr>
+            <a:spLocks noGrp="1"/>
+          </p:cNvSpPr>
+          <p:nvPr>
+            <p:ph type="sldNum" sz="quarter" idx="10"/>
+          </p:nvPr>
+        </p:nvSpPr>
+        <p:spPr/>
+        <p:txBody>
+          <a:bodyPr/>
+          <a:lstStyle/>
+          <a:p>
+            <a:fld id="{F7021451-1387-4CA6-816F-3879F97B5CBC}" type="slidenum">
+              <a:rPr lang="en-US"/>
+              <a:t>12</a:t>
+            </a:fld>
+            <a:endParaRPr lang="en-US"/>
+          </a:p>
+        </p:txBody>
+      </p:sp>
+    </p:spTree>
+    <p:extLst>
+      <p:ext uri="{BB962C8B-B14F-4D97-AF65-F5344CB8AC3E}">
+        <p14:creationId xmlns:p14="http://schemas.microsoft.com/office/powerpoint/2010/main" val="1024086991"/>
+      </p:ext>
+    </p:extLst>
+  </p:cSld>
+  <p:clrMapOvr>
+    <a:masterClrMapping/>
+  </p:clrMapOvr>
+</p:notes>
+</file>
+
+<file path=ppt/notesSlides/notesSlide13.xml><?xml version="1.0" encoding="utf-8"?>
+<p:notes xmlns:a="http://schemas.openxmlformats.org/drawingml/2006/main" xmlns:r="http://schemas.openxmlformats.org/officeDocument/2006/relationships" xmlns:p="http://schemas.openxmlformats.org/presentationml/2006/main">
+  <p:cSld>
+    <p:spTree>
+      <p:nvGrpSpPr>
+        <p:cNvPr id="1" name=""/>
+        <p:cNvGrpSpPr/>
+        <p:nvPr/>
+      </p:nvGrpSpPr>
+      <p:grpSpPr>
+        <a:xfrm>
+          <a:off x="0" y="0"/>
+          <a:ext cx="0" cy="0"/>
+          <a:chOff x="0" y="0"/>
+          <a:chExt cx="0" cy="0"/>
+        </a:xfrm>
+      </p:grpSpPr>
+      <p:sp>
+        <p:nvSpPr>
+          <p:cNvPr id="2" name="Slide Image Placeholder 1"/>
+          <p:cNvSpPr>
+            <a:spLocks noGrp="1" noRot="1" noChangeAspect="1"/>
+          </p:cNvSpPr>
+          <p:nvPr>
+            <p:ph type="sldImg"/>
+          </p:nvPr>
+        </p:nvSpPr>
+        <p:spPr/>
+      </p:sp>
+      <p:sp>
+        <p:nvSpPr>
+          <p:cNvPr id="3" name="Notes Placeholder 2"/>
+          <p:cNvSpPr>
+            <a:spLocks noGrp="1"/>
+          </p:cNvSpPr>
+          <p:nvPr>
+            <p:ph type="body" idx="1"/>
+          </p:nvPr>
+        </p:nvSpPr>
+        <p:spPr/>
+        <p:txBody>
+          <a:bodyPr/>
+          <a:lstStyle/>
+          <a:p>
+            <a:r>
+              <a:rPr lang="en-US" dirty="0"/>
+              <a:t/>
+            </a:r>
+            <a:endParaRPr lang="en-US" dirty="0"/>
+          </a:p>
+        </p:txBody>
+      </p:sp>
+      <p:sp>
+        <p:nvSpPr>
+          <p:cNvPr id="4" name="Slide Number Placeholder 3"/>
+          <p:cNvSpPr>
+            <a:spLocks noGrp="1"/>
+          </p:cNvSpPr>
+          <p:nvPr>
+            <p:ph type="sldNum" sz="quarter" idx="10"/>
+          </p:nvPr>
+        </p:nvSpPr>
+        <p:spPr/>
+        <p:txBody>
+          <a:bodyPr/>
+          <a:lstStyle/>
+          <a:p>
+            <a:fld id="{F7021451-1387-4CA6-816F-3879F97B5CBC}" type="slidenum">
+              <a:rPr lang="en-US"/>
+              <a:t>13</a:t>
+            </a:fld>
+            <a:endParaRPr lang="en-US"/>
+          </a:p>
+        </p:txBody>
+      </p:sp>
+    </p:spTree>
+    <p:extLst>
+      <p:ext uri="{BB962C8B-B14F-4D97-AF65-F5344CB8AC3E}">
+        <p14:creationId xmlns:p14="http://schemas.microsoft.com/office/powerpoint/2010/main" val="1024086991"/>
+      </p:ext>
+    </p:extLst>
+  </p:cSld>
+  <p:clrMapOvr>
+    <a:masterClrMapping/>
+  </p:clrMapOvr>
+</p:notes>
+</file>
+
+<file path=ppt/notesSlides/notesSlide14.xml><?xml version="1.0" encoding="utf-8"?>
+<p:notes xmlns:a="http://schemas.openxmlformats.org/drawingml/2006/main" xmlns:r="http://schemas.openxmlformats.org/officeDocument/2006/relationships" xmlns:p="http://schemas.openxmlformats.org/presentationml/2006/main">
+  <p:cSld>
+    <p:spTree>
+      <p:nvGrpSpPr>
+        <p:cNvPr id="1" name=""/>
+        <p:cNvGrpSpPr/>
+        <p:nvPr/>
+      </p:nvGrpSpPr>
+      <p:grpSpPr>
+        <a:xfrm>
+          <a:off x="0" y="0"/>
+          <a:ext cx="0" cy="0"/>
+          <a:chOff x="0" y="0"/>
+          <a:chExt cx="0" cy="0"/>
+        </a:xfrm>
+      </p:grpSpPr>
+      <p:sp>
+        <p:nvSpPr>
+          <p:cNvPr id="2" name="Slide Image Placeholder 1"/>
+          <p:cNvSpPr>
+            <a:spLocks noGrp="1" noRot="1" noChangeAspect="1"/>
+          </p:cNvSpPr>
+          <p:nvPr>
+            <p:ph type="sldImg"/>
+          </p:nvPr>
+        </p:nvSpPr>
+        <p:spPr/>
+      </p:sp>
+      <p:sp>
+        <p:nvSpPr>
+          <p:cNvPr id="3" name="Notes Placeholder 2"/>
+          <p:cNvSpPr>
+            <a:spLocks noGrp="1"/>
+          </p:cNvSpPr>
+          <p:nvPr>
+            <p:ph type="body" idx="1"/>
+          </p:nvPr>
+        </p:nvSpPr>
+        <p:spPr/>
+        <p:txBody>
+          <a:bodyPr/>
+          <a:lstStyle/>
+          <a:p>
+            <a:r>
+              <a:rPr lang="en-US" dirty="0"/>
+              <a:t/>
+            </a:r>
+            <a:endParaRPr lang="en-US" dirty="0"/>
+          </a:p>
+        </p:txBody>
+      </p:sp>
+      <p:sp>
+        <p:nvSpPr>
+          <p:cNvPr id="4" name="Slide Number Placeholder 3"/>
+          <p:cNvSpPr>
+            <a:spLocks noGrp="1"/>
+          </p:cNvSpPr>
+          <p:nvPr>
+            <p:ph type="sldNum" sz="quarter" idx="10"/>
+          </p:nvPr>
+        </p:nvSpPr>
+        <p:spPr/>
+        <p:txBody>
+          <a:bodyPr/>
+          <a:lstStyle/>
+          <a:p>
+            <a:fld id="{F7021451-1387-4CA6-816F-3879F97B5CBC}" type="slidenum">
+              <a:rPr lang="en-US"/>
+              <a:t>14</a:t>
             </a:fld>
             <a:endParaRPr lang="en-US"/>
           </a:p>
@@ -2201,7 +2557,7 @@
             <a:pPr indent="0" marL="0">
               <a:buNone/>
             </a:pPr>
-            <a:endParaRPr lang="en-US" sz="850" dirty="0"/>
+            <a:endParaRPr lang="en-US" sz="900" dirty="0"/>
           </a:p>
         </p:txBody>
       </p:sp>
@@ -2294,6 +2650,4334 @@
 <file path=ppt/slides/slide10.xml><?xml version="1.0" encoding="utf-8"?>
 <p:sld xmlns:a="http://schemas.openxmlformats.org/drawingml/2006/main" xmlns:r="http://schemas.openxmlformats.org/officeDocument/2006/relationships" xmlns:p="http://schemas.openxmlformats.org/presentationml/2006/main">
   <p:cSld name="Slide 10">
+    <p:bg>
+      <p:bgPr>
+        <a:solidFill>
+          <a:srgbClr val="FFFFFF"/>
+        </a:solidFill>
+      </p:bgPr>
+    </p:bg>
+    <p:spTree>
+      <p:nvGrpSpPr>
+        <p:cNvPr id="1" name=""/>
+        <p:cNvGrpSpPr/>
+        <p:nvPr/>
+      </p:nvGrpSpPr>
+      <p:grpSpPr>
+        <a:xfrm>
+          <a:off x="0" y="0"/>
+          <a:ext cx="0" cy="0"/>
+          <a:chOff x="0" y="0"/>
+          <a:chExt cx="0" cy="0"/>
+        </a:xfrm>
+      </p:grpSpPr>
+      <p:sp>
+        <p:nvSpPr>
+          <p:cNvPr id="2" name="Shape 0"/>
+          <p:cNvSpPr/>
+          <p:nvPr/>
+        </p:nvSpPr>
+        <p:spPr>
+          <a:xfrm>
+            <a:off x="566928" y="457200"/>
+            <a:ext cx="384048" cy="384048"/>
+          </a:xfrm>
+          <a:prstGeom prst="ellipse">
+            <a:avLst/>
+          </a:prstGeom>
+          <a:solidFill>
+            <a:srgbClr val="B98A2E"/>
+          </a:solidFill>
+          <a:ln/>
+        </p:spPr>
+      </p:sp>
+      <p:sp>
+        <p:nvSpPr>
+          <p:cNvPr id="3" name="Text 1"/>
+          <p:cNvSpPr/>
+          <p:nvPr/>
+        </p:nvSpPr>
+        <p:spPr>
+          <a:xfrm>
+            <a:off x="566928" y="457200"/>
+            <a:ext cx="384048" cy="384048"/>
+          </a:xfrm>
+          <a:prstGeom prst="rect">
+            <a:avLst/>
+          </a:prstGeom>
+          <a:noFill/>
+          <a:ln/>
+        </p:spPr>
+        <p:txBody>
+          <a:bodyPr wrap="square" lIns="0" tIns="0" rIns="0" bIns="0" rtlCol="0" anchor="ctr"/>
+          <a:lstStyle/>
+          <a:p>
+            <a:pPr algn="ctr" indent="0" marL="0">
+              <a:buNone/>
+            </a:pPr>
+            <a:r>
+              <a:rPr lang="en-US" sz="1300" b="1" dirty="0">
+                <a:solidFill>
+                  <a:srgbClr val="FFFFFF"/>
+                </a:solidFill>
+                <a:latin typeface="Arial" pitchFamily="34" charset="0"/>
+                <a:ea typeface="Arial" pitchFamily="34" charset="-122"/>
+                <a:cs typeface="Arial" pitchFamily="34" charset="-120"/>
+              </a:rPr>
+              <a:t>09</a:t>
+            </a:r>
+            <a:endParaRPr lang="en-US" sz="1300" dirty="0"/>
+          </a:p>
+        </p:txBody>
+      </p:sp>
+      <p:sp>
+        <p:nvSpPr>
+          <p:cNvPr id="4" name="Text 2"/>
+          <p:cNvSpPr/>
+          <p:nvPr/>
+        </p:nvSpPr>
+        <p:spPr>
+          <a:xfrm>
+            <a:off x="1133856" y="457200"/>
+            <a:ext cx="10490911" cy="182880"/>
+          </a:xfrm>
+          <a:prstGeom prst="rect">
+            <a:avLst/>
+          </a:prstGeom>
+          <a:noFill/>
+          <a:ln/>
+        </p:spPr>
+        <p:txBody>
+          <a:bodyPr wrap="square" lIns="0" tIns="0" rIns="0" bIns="0" rtlCol="0" anchor="ctr"/>
+          <a:lstStyle/>
+          <a:p>
+            <a:pPr indent="0" marL="0">
+              <a:buNone/>
+            </a:pPr>
+            <a:r>
+              <a:rPr lang="en-US" sz="950" b="1" spc="200" kern="0" dirty="0">
+                <a:solidFill>
+                  <a:srgbClr val="B98A2E"/>
+                </a:solidFill>
+                <a:latin typeface="Arial" pitchFamily="34" charset="0"/>
+                <a:ea typeface="Arial" pitchFamily="34" charset="-122"/>
+                <a:cs typeface="Arial" pitchFamily="34" charset="-120"/>
+              </a:rPr>
+              <a:t>Capital</a:t>
+            </a:r>
+            <a:endParaRPr lang="en-US" sz="950" dirty="0"/>
+          </a:p>
+        </p:txBody>
+      </p:sp>
+      <p:sp>
+        <p:nvSpPr>
+          <p:cNvPr id="5" name="Text 3"/>
+          <p:cNvSpPr/>
+          <p:nvPr/>
+        </p:nvSpPr>
+        <p:spPr>
+          <a:xfrm>
+            <a:off x="1133856" y="640080"/>
+            <a:ext cx="10490911" cy="365760"/>
+          </a:xfrm>
+          <a:prstGeom prst="rect">
+            <a:avLst/>
+          </a:prstGeom>
+          <a:noFill/>
+          <a:ln/>
+        </p:spPr>
+        <p:txBody>
+          <a:bodyPr wrap="square" lIns="0" tIns="0" rIns="0" bIns="0" rtlCol="0" anchor="ctr"/>
+          <a:lstStyle/>
+          <a:p>
+            <a:pPr indent="0" marL="0">
+              <a:buNone/>
+            </a:pPr>
+            <a:r>
+              <a:rPr lang="en-US" sz="2300" b="1" dirty="0">
+                <a:solidFill>
+                  <a:srgbClr val="10161F"/>
+                </a:solidFill>
+                <a:latin typeface="Pretendard" pitchFamily="34" charset="0"/>
+                <a:ea typeface="Pretendard" pitchFamily="34" charset="-122"/>
+                <a:cs typeface="Pretendard" pitchFamily="34" charset="-120"/>
+              </a:rPr>
+              <a:t>투자 및 자본 조달 구조 분석</a:t>
+            </a:r>
+            <a:endParaRPr lang="en-US" sz="2300" dirty="0"/>
+          </a:p>
+        </p:txBody>
+      </p:sp>
+      <p:sp>
+        <p:nvSpPr>
+          <p:cNvPr id="6" name="Shape 4"/>
+          <p:cNvSpPr/>
+          <p:nvPr/>
+        </p:nvSpPr>
+        <p:spPr>
+          <a:xfrm>
+            <a:off x="566928" y="1417320"/>
+            <a:ext cx="5391760" cy="4389120"/>
+          </a:xfrm>
+          <a:prstGeom prst="roundRect">
+            <a:avLst>
+              <a:gd name="adj" fmla="val 1250"/>
+            </a:avLst>
+          </a:prstGeom>
+          <a:solidFill>
+            <a:srgbClr val="F7FAFC"/>
+          </a:solidFill>
+          <a:ln w="6350">
+            <a:solidFill>
+              <a:srgbClr val="CBD5E0"/>
+            </a:solidFill>
+            <a:prstDash val="solid"/>
+          </a:ln>
+        </p:spPr>
+      </p:sp>
+      <p:sp>
+        <p:nvSpPr>
+          <p:cNvPr id="7" name="Text 5"/>
+          <p:cNvSpPr/>
+          <p:nvPr/>
+        </p:nvSpPr>
+        <p:spPr>
+          <a:xfrm>
+            <a:off x="795528" y="1618488"/>
+            <a:ext cx="4934560" cy="320040"/>
+          </a:xfrm>
+          <a:prstGeom prst="rect">
+            <a:avLst/>
+          </a:prstGeom>
+          <a:noFill/>
+          <a:ln/>
+        </p:spPr>
+        <p:txBody>
+          <a:bodyPr wrap="square" lIns="0" tIns="0" rIns="0" bIns="0" rtlCol="0" anchor="ctr"/>
+          <a:lstStyle/>
+          <a:p>
+            <a:pPr indent="0" marL="0">
+              <a:buNone/>
+            </a:pPr>
+            <a:r>
+              <a:rPr lang="en-US" sz="1350" b="1" dirty="0">
+                <a:solidFill>
+                  <a:srgbClr val="977024"/>
+                </a:solidFill>
+                <a:latin typeface="Pretendard" pitchFamily="34" charset="0"/>
+                <a:ea typeface="Pretendard" pitchFamily="34" charset="-122"/>
+                <a:cs typeface="Pretendard" pitchFamily="34" charset="-120"/>
+              </a:rPr>
+              <a:t>1. 총취득원가 및 자기자본 소요</a:t>
+            </a:r>
+            <a:endParaRPr lang="en-US" sz="1350" dirty="0"/>
+          </a:p>
+        </p:txBody>
+      </p:sp>
+      <p:sp>
+        <p:nvSpPr>
+          <p:cNvPr id="8" name="Text 6"/>
+          <p:cNvSpPr/>
+          <p:nvPr/>
+        </p:nvSpPr>
+        <p:spPr>
+          <a:xfrm>
+            <a:off x="795528" y="2011680"/>
+            <a:ext cx="1875133" cy="475488"/>
+          </a:xfrm>
+          <a:prstGeom prst="rect">
+            <a:avLst/>
+          </a:prstGeom>
+          <a:noFill/>
+          <a:ln/>
+        </p:spPr>
+        <p:txBody>
+          <a:bodyPr wrap="square" lIns="0" tIns="0" rIns="0" bIns="0" rtlCol="0" anchor="ctr"/>
+          <a:lstStyle/>
+          <a:p>
+            <a:pPr indent="0" marL="0">
+              <a:lnSpc>
+                <a:spcPct val="120000"/>
+              </a:lnSpc>
+              <a:buNone/>
+            </a:pPr>
+            <a:r>
+              <a:rPr lang="en-US" sz="1150" dirty="0">
+                <a:solidFill>
+                  <a:srgbClr val="718096"/>
+                </a:solidFill>
+                <a:latin typeface="Pretendard" pitchFamily="34" charset="0"/>
+                <a:ea typeface="Pretendard" pitchFamily="34" charset="-122"/>
+                <a:cs typeface="Pretendard" pitchFamily="34" charset="-120"/>
+              </a:rPr>
+              <a:t>매매 희망가 (A)</a:t>
+            </a:r>
+            <a:endParaRPr lang="en-US" sz="1150" dirty="0"/>
+          </a:p>
+        </p:txBody>
+      </p:sp>
+      <p:sp>
+        <p:nvSpPr>
+          <p:cNvPr id="9" name="Text 7"/>
+          <p:cNvSpPr/>
+          <p:nvPr/>
+        </p:nvSpPr>
+        <p:spPr>
+          <a:xfrm>
+            <a:off x="2670661" y="2011680"/>
+            <a:ext cx="3059427" cy="475488"/>
+          </a:xfrm>
+          <a:prstGeom prst="rect">
+            <a:avLst/>
+          </a:prstGeom>
+          <a:noFill/>
+          <a:ln/>
+        </p:spPr>
+        <p:txBody>
+          <a:bodyPr wrap="square" lIns="0" tIns="0" rIns="0" bIns="0" rtlCol="0" anchor="ctr"/>
+          <a:lstStyle/>
+          <a:p>
+            <a:pPr indent="0" marL="0">
+              <a:lnSpc>
+                <a:spcPct val="120000"/>
+              </a:lnSpc>
+              <a:buNone/>
+            </a:pPr>
+            <a:r>
+              <a:rPr lang="en-US" sz="1150" b="1" dirty="0">
+                <a:solidFill>
+                  <a:srgbClr val="10161F"/>
+                </a:solidFill>
+                <a:latin typeface="Pretendard" pitchFamily="34" charset="0"/>
+                <a:ea typeface="Pretendard" pitchFamily="34" charset="-122"/>
+                <a:cs typeface="Pretendard" pitchFamily="34" charset="-120"/>
+              </a:rPr>
+              <a:t>240.0억 원</a:t>
+            </a:r>
+            <a:endParaRPr lang="en-US" sz="1150" dirty="0"/>
+          </a:p>
+        </p:txBody>
+      </p:sp>
+      <p:sp>
+        <p:nvSpPr>
+          <p:cNvPr id="10" name="Shape 8"/>
+          <p:cNvSpPr/>
+          <p:nvPr/>
+        </p:nvSpPr>
+        <p:spPr>
+          <a:xfrm>
+            <a:off x="795528" y="2487168"/>
+            <a:ext cx="4934560" cy="0"/>
+          </a:xfrm>
+          <a:prstGeom prst="line">
+            <a:avLst/>
+          </a:prstGeom>
+          <a:noFill/>
+          <a:ln w="3810">
+            <a:solidFill>
+              <a:srgbClr val="CBD5E0"/>
+            </a:solidFill>
+            <a:prstDash val="solid"/>
+          </a:ln>
+        </p:spPr>
+      </p:sp>
+      <p:sp>
+        <p:nvSpPr>
+          <p:cNvPr id="11" name="Text 9"/>
+          <p:cNvSpPr/>
+          <p:nvPr/>
+        </p:nvSpPr>
+        <p:spPr>
+          <a:xfrm>
+            <a:off x="795528" y="2487168"/>
+            <a:ext cx="1875133" cy="475488"/>
+          </a:xfrm>
+          <a:prstGeom prst="rect">
+            <a:avLst/>
+          </a:prstGeom>
+          <a:noFill/>
+          <a:ln/>
+        </p:spPr>
+        <p:txBody>
+          <a:bodyPr wrap="square" lIns="0" tIns="0" rIns="0" bIns="0" rtlCol="0" anchor="ctr"/>
+          <a:lstStyle/>
+          <a:p>
+            <a:pPr indent="0" marL="0">
+              <a:lnSpc>
+                <a:spcPct val="120000"/>
+              </a:lnSpc>
+              <a:buNone/>
+            </a:pPr>
+            <a:r>
+              <a:rPr lang="en-US" sz="1150" dirty="0">
+                <a:solidFill>
+                  <a:srgbClr val="718096"/>
+                </a:solidFill>
+                <a:latin typeface="Pretendard" pitchFamily="34" charset="0"/>
+                <a:ea typeface="Pretendard" pitchFamily="34" charset="-122"/>
+                <a:cs typeface="Pretendard" pitchFamily="34" charset="-120"/>
+              </a:rPr>
+              <a:t>취득세 (4.6% 법정)</a:t>
+            </a:r>
+            <a:endParaRPr lang="en-US" sz="1150" dirty="0"/>
+          </a:p>
+        </p:txBody>
+      </p:sp>
+      <p:sp>
+        <p:nvSpPr>
+          <p:cNvPr id="12" name="Text 10"/>
+          <p:cNvSpPr/>
+          <p:nvPr/>
+        </p:nvSpPr>
+        <p:spPr>
+          <a:xfrm>
+            <a:off x="2670661" y="2487168"/>
+            <a:ext cx="3059427" cy="475488"/>
+          </a:xfrm>
+          <a:prstGeom prst="rect">
+            <a:avLst/>
+          </a:prstGeom>
+          <a:noFill/>
+          <a:ln/>
+        </p:spPr>
+        <p:txBody>
+          <a:bodyPr wrap="square" lIns="0" tIns="0" rIns="0" bIns="0" rtlCol="0" anchor="ctr"/>
+          <a:lstStyle/>
+          <a:p>
+            <a:pPr indent="0" marL="0">
+              <a:lnSpc>
+                <a:spcPct val="120000"/>
+              </a:lnSpc>
+              <a:buNone/>
+            </a:pPr>
+            <a:r>
+              <a:rPr lang="en-US" sz="1150" b="1" dirty="0">
+                <a:solidFill>
+                  <a:srgbClr val="10161F"/>
+                </a:solidFill>
+                <a:latin typeface="Pretendard" pitchFamily="34" charset="0"/>
+                <a:ea typeface="Pretendard" pitchFamily="34" charset="-122"/>
+                <a:cs typeface="Pretendard" pitchFamily="34" charset="-120"/>
+              </a:rPr>
+              <a:t>11.04억 원</a:t>
+            </a:r>
+            <a:endParaRPr lang="en-US" sz="1150" dirty="0"/>
+          </a:p>
+        </p:txBody>
+      </p:sp>
+      <p:sp>
+        <p:nvSpPr>
+          <p:cNvPr id="13" name="Shape 11"/>
+          <p:cNvSpPr/>
+          <p:nvPr/>
+        </p:nvSpPr>
+        <p:spPr>
+          <a:xfrm>
+            <a:off x="795528" y="2962656"/>
+            <a:ext cx="4934560" cy="0"/>
+          </a:xfrm>
+          <a:prstGeom prst="line">
+            <a:avLst/>
+          </a:prstGeom>
+          <a:noFill/>
+          <a:ln w="3810">
+            <a:solidFill>
+              <a:srgbClr val="CBD5E0"/>
+            </a:solidFill>
+            <a:prstDash val="solid"/>
+          </a:ln>
+        </p:spPr>
+      </p:sp>
+      <p:sp>
+        <p:nvSpPr>
+          <p:cNvPr id="14" name="Text 12"/>
+          <p:cNvSpPr/>
+          <p:nvPr/>
+        </p:nvSpPr>
+        <p:spPr>
+          <a:xfrm>
+            <a:off x="795528" y="2962656"/>
+            <a:ext cx="1875133" cy="475488"/>
+          </a:xfrm>
+          <a:prstGeom prst="rect">
+            <a:avLst/>
+          </a:prstGeom>
+          <a:noFill/>
+          <a:ln/>
+        </p:spPr>
+        <p:txBody>
+          <a:bodyPr wrap="square" lIns="0" tIns="0" rIns="0" bIns="0" rtlCol="0" anchor="ctr"/>
+          <a:lstStyle/>
+          <a:p>
+            <a:pPr indent="0" marL="0">
+              <a:lnSpc>
+                <a:spcPct val="120000"/>
+              </a:lnSpc>
+              <a:buNone/>
+            </a:pPr>
+            <a:r>
+              <a:rPr lang="en-US" sz="1150" dirty="0">
+                <a:solidFill>
+                  <a:srgbClr val="718096"/>
+                </a:solidFill>
+                <a:latin typeface="Pretendard" pitchFamily="34" charset="0"/>
+                <a:ea typeface="Pretendard" pitchFamily="34" charset="-122"/>
+                <a:cs typeface="Pretendard" pitchFamily="34" charset="-120"/>
+              </a:rPr>
+              <a:t>중개보수 (0.9% 한도)</a:t>
+            </a:r>
+            <a:endParaRPr lang="en-US" sz="1150" dirty="0"/>
+          </a:p>
+        </p:txBody>
+      </p:sp>
+      <p:sp>
+        <p:nvSpPr>
+          <p:cNvPr id="15" name="Text 13"/>
+          <p:cNvSpPr/>
+          <p:nvPr/>
+        </p:nvSpPr>
+        <p:spPr>
+          <a:xfrm>
+            <a:off x="2670661" y="2962656"/>
+            <a:ext cx="3059427" cy="475488"/>
+          </a:xfrm>
+          <a:prstGeom prst="rect">
+            <a:avLst/>
+          </a:prstGeom>
+          <a:noFill/>
+          <a:ln/>
+        </p:spPr>
+        <p:txBody>
+          <a:bodyPr wrap="square" lIns="0" tIns="0" rIns="0" bIns="0" rtlCol="0" anchor="ctr"/>
+          <a:lstStyle/>
+          <a:p>
+            <a:pPr indent="0" marL="0">
+              <a:lnSpc>
+                <a:spcPct val="120000"/>
+              </a:lnSpc>
+              <a:buNone/>
+            </a:pPr>
+            <a:r>
+              <a:rPr lang="en-US" sz="1150" b="1" dirty="0">
+                <a:solidFill>
+                  <a:srgbClr val="10161F"/>
+                </a:solidFill>
+                <a:latin typeface="Pretendard" pitchFamily="34" charset="0"/>
+                <a:ea typeface="Pretendard" pitchFamily="34" charset="-122"/>
+                <a:cs typeface="Pretendard" pitchFamily="34" charset="-120"/>
+              </a:rPr>
+              <a:t>2.16억 원</a:t>
+            </a:r>
+            <a:endParaRPr lang="en-US" sz="1150" dirty="0"/>
+          </a:p>
+        </p:txBody>
+      </p:sp>
+      <p:sp>
+        <p:nvSpPr>
+          <p:cNvPr id="16" name="Shape 14"/>
+          <p:cNvSpPr/>
+          <p:nvPr/>
+        </p:nvSpPr>
+        <p:spPr>
+          <a:xfrm>
+            <a:off x="795528" y="3438144"/>
+            <a:ext cx="4934560" cy="0"/>
+          </a:xfrm>
+          <a:prstGeom prst="line">
+            <a:avLst/>
+          </a:prstGeom>
+          <a:noFill/>
+          <a:ln w="3810">
+            <a:solidFill>
+              <a:srgbClr val="CBD5E0"/>
+            </a:solidFill>
+            <a:prstDash val="solid"/>
+          </a:ln>
+        </p:spPr>
+      </p:sp>
+      <p:sp>
+        <p:nvSpPr>
+          <p:cNvPr id="17" name="Text 15"/>
+          <p:cNvSpPr/>
+          <p:nvPr/>
+        </p:nvSpPr>
+        <p:spPr>
+          <a:xfrm>
+            <a:off x="795528" y="3438144"/>
+            <a:ext cx="1875133" cy="475488"/>
+          </a:xfrm>
+          <a:prstGeom prst="rect">
+            <a:avLst/>
+          </a:prstGeom>
+          <a:noFill/>
+          <a:ln/>
+        </p:spPr>
+        <p:txBody>
+          <a:bodyPr wrap="square" lIns="0" tIns="0" rIns="0" bIns="0" rtlCol="0" anchor="ctr"/>
+          <a:lstStyle/>
+          <a:p>
+            <a:pPr indent="0" marL="0">
+              <a:lnSpc>
+                <a:spcPct val="120000"/>
+              </a:lnSpc>
+              <a:buNone/>
+            </a:pPr>
+            <a:r>
+              <a:rPr lang="en-US" sz="1150" dirty="0">
+                <a:solidFill>
+                  <a:srgbClr val="718096"/>
+                </a:solidFill>
+                <a:latin typeface="Pretendard" pitchFamily="34" charset="0"/>
+                <a:ea typeface="Pretendard" pitchFamily="34" charset="-122"/>
+                <a:cs typeface="Pretendard" pitchFamily="34" charset="-120"/>
+              </a:rPr>
+              <a:t>총취득원가 (A + 세/비용)</a:t>
+            </a:r>
+            <a:endParaRPr lang="en-US" sz="1150" dirty="0"/>
+          </a:p>
+        </p:txBody>
+      </p:sp>
+      <p:sp>
+        <p:nvSpPr>
+          <p:cNvPr id="18" name="Text 16"/>
+          <p:cNvSpPr/>
+          <p:nvPr/>
+        </p:nvSpPr>
+        <p:spPr>
+          <a:xfrm>
+            <a:off x="2670661" y="3438144"/>
+            <a:ext cx="3059427" cy="475488"/>
+          </a:xfrm>
+          <a:prstGeom prst="rect">
+            <a:avLst/>
+          </a:prstGeom>
+          <a:noFill/>
+          <a:ln/>
+        </p:spPr>
+        <p:txBody>
+          <a:bodyPr wrap="square" lIns="0" tIns="0" rIns="0" bIns="0" rtlCol="0" anchor="ctr"/>
+          <a:lstStyle/>
+          <a:p>
+            <a:pPr indent="0" marL="0">
+              <a:lnSpc>
+                <a:spcPct val="120000"/>
+              </a:lnSpc>
+              <a:buNone/>
+            </a:pPr>
+            <a:r>
+              <a:rPr lang="en-US" sz="1150" b="1" dirty="0">
+                <a:solidFill>
+                  <a:srgbClr val="10161F"/>
+                </a:solidFill>
+                <a:latin typeface="Pretendard" pitchFamily="34" charset="0"/>
+                <a:ea typeface="Pretendard" pitchFamily="34" charset="-122"/>
+                <a:cs typeface="Pretendard" pitchFamily="34" charset="-120"/>
+              </a:rPr>
+              <a:t>253.2억 원</a:t>
+            </a:r>
+            <a:endParaRPr lang="en-US" sz="1150" dirty="0"/>
+          </a:p>
+        </p:txBody>
+      </p:sp>
+      <p:sp>
+        <p:nvSpPr>
+          <p:cNvPr id="19" name="Shape 17"/>
+          <p:cNvSpPr/>
+          <p:nvPr/>
+        </p:nvSpPr>
+        <p:spPr>
+          <a:xfrm>
+            <a:off x="795528" y="3913632"/>
+            <a:ext cx="4934560" cy="0"/>
+          </a:xfrm>
+          <a:prstGeom prst="line">
+            <a:avLst/>
+          </a:prstGeom>
+          <a:noFill/>
+          <a:ln w="3810">
+            <a:solidFill>
+              <a:srgbClr val="CBD5E0"/>
+            </a:solidFill>
+            <a:prstDash val="solid"/>
+          </a:ln>
+        </p:spPr>
+      </p:sp>
+      <p:sp>
+        <p:nvSpPr>
+          <p:cNvPr id="20" name="Text 18"/>
+          <p:cNvSpPr/>
+          <p:nvPr/>
+        </p:nvSpPr>
+        <p:spPr>
+          <a:xfrm>
+            <a:off x="795528" y="3913632"/>
+            <a:ext cx="1875133" cy="475488"/>
+          </a:xfrm>
+          <a:prstGeom prst="rect">
+            <a:avLst/>
+          </a:prstGeom>
+          <a:noFill/>
+          <a:ln/>
+        </p:spPr>
+        <p:txBody>
+          <a:bodyPr wrap="square" lIns="0" tIns="0" rIns="0" bIns="0" rtlCol="0" anchor="ctr"/>
+          <a:lstStyle/>
+          <a:p>
+            <a:pPr indent="0" marL="0">
+              <a:lnSpc>
+                <a:spcPct val="120000"/>
+              </a:lnSpc>
+              <a:buNone/>
+            </a:pPr>
+            <a:r>
+              <a:rPr lang="en-US" sz="1150" dirty="0">
+                <a:solidFill>
+                  <a:srgbClr val="718096"/>
+                </a:solidFill>
+                <a:latin typeface="Pretendard" pitchFamily="34" charset="0"/>
+                <a:ea typeface="Pretendard" pitchFamily="34" charset="-122"/>
+                <a:cs typeface="Pretendard" pitchFamily="34" charset="-120"/>
+              </a:rPr>
+              <a:t>(-) 임대보증금 승계</a:t>
+            </a:r>
+            <a:endParaRPr lang="en-US" sz="1150" dirty="0"/>
+          </a:p>
+        </p:txBody>
+      </p:sp>
+      <p:sp>
+        <p:nvSpPr>
+          <p:cNvPr id="21" name="Text 19"/>
+          <p:cNvSpPr/>
+          <p:nvPr/>
+        </p:nvSpPr>
+        <p:spPr>
+          <a:xfrm>
+            <a:off x="2670661" y="3913632"/>
+            <a:ext cx="3059427" cy="475488"/>
+          </a:xfrm>
+          <a:prstGeom prst="rect">
+            <a:avLst/>
+          </a:prstGeom>
+          <a:noFill/>
+          <a:ln/>
+        </p:spPr>
+        <p:txBody>
+          <a:bodyPr wrap="square" lIns="0" tIns="0" rIns="0" bIns="0" rtlCol="0" anchor="ctr"/>
+          <a:lstStyle/>
+          <a:p>
+            <a:pPr indent="0" marL="0">
+              <a:lnSpc>
+                <a:spcPct val="120000"/>
+              </a:lnSpc>
+              <a:buNone/>
+            </a:pPr>
+            <a:r>
+              <a:rPr lang="en-US" sz="1150" b="1" dirty="0">
+                <a:solidFill>
+                  <a:srgbClr val="10161F"/>
+                </a:solidFill>
+                <a:latin typeface="Pretendard" pitchFamily="34" charset="0"/>
+                <a:ea typeface="Pretendard" pitchFamily="34" charset="-122"/>
+                <a:cs typeface="Pretendard" pitchFamily="34" charset="-120"/>
+              </a:rPr>
+              <a:t>12.0억 원</a:t>
+            </a:r>
+            <a:endParaRPr lang="en-US" sz="1150" dirty="0"/>
+          </a:p>
+        </p:txBody>
+      </p:sp>
+      <p:sp>
+        <p:nvSpPr>
+          <p:cNvPr id="22" name="Shape 20"/>
+          <p:cNvSpPr/>
+          <p:nvPr/>
+        </p:nvSpPr>
+        <p:spPr>
+          <a:xfrm>
+            <a:off x="795528" y="4389120"/>
+            <a:ext cx="4934560" cy="0"/>
+          </a:xfrm>
+          <a:prstGeom prst="line">
+            <a:avLst/>
+          </a:prstGeom>
+          <a:noFill/>
+          <a:ln w="3810">
+            <a:solidFill>
+              <a:srgbClr val="CBD5E0"/>
+            </a:solidFill>
+            <a:prstDash val="solid"/>
+          </a:ln>
+        </p:spPr>
+      </p:sp>
+      <p:sp>
+        <p:nvSpPr>
+          <p:cNvPr id="23" name="Text 21"/>
+          <p:cNvSpPr/>
+          <p:nvPr/>
+        </p:nvSpPr>
+        <p:spPr>
+          <a:xfrm>
+            <a:off x="795528" y="4389120"/>
+            <a:ext cx="1875133" cy="475488"/>
+          </a:xfrm>
+          <a:prstGeom prst="rect">
+            <a:avLst/>
+          </a:prstGeom>
+          <a:noFill/>
+          <a:ln/>
+        </p:spPr>
+        <p:txBody>
+          <a:bodyPr wrap="square" lIns="0" tIns="0" rIns="0" bIns="0" rtlCol="0" anchor="ctr"/>
+          <a:lstStyle/>
+          <a:p>
+            <a:pPr indent="0" marL="0">
+              <a:lnSpc>
+                <a:spcPct val="120000"/>
+              </a:lnSpc>
+              <a:buNone/>
+            </a:pPr>
+            <a:r>
+              <a:rPr lang="en-US" sz="1150" dirty="0">
+                <a:solidFill>
+                  <a:srgbClr val="718096"/>
+                </a:solidFill>
+                <a:latin typeface="Pretendard" pitchFamily="34" charset="0"/>
+                <a:ea typeface="Pretendard" pitchFamily="34" charset="-122"/>
+                <a:cs typeface="Pretendard" pitchFamily="34" charset="-120"/>
+              </a:rPr>
+              <a:t>(-) 담보대출 조달</a:t>
+            </a:r>
+            <a:endParaRPr lang="en-US" sz="1150" dirty="0"/>
+          </a:p>
+        </p:txBody>
+      </p:sp>
+      <p:sp>
+        <p:nvSpPr>
+          <p:cNvPr id="24" name="Text 22"/>
+          <p:cNvSpPr/>
+          <p:nvPr/>
+        </p:nvSpPr>
+        <p:spPr>
+          <a:xfrm>
+            <a:off x="2670661" y="4389120"/>
+            <a:ext cx="3059427" cy="475488"/>
+          </a:xfrm>
+          <a:prstGeom prst="rect">
+            <a:avLst/>
+          </a:prstGeom>
+          <a:noFill/>
+          <a:ln/>
+        </p:spPr>
+        <p:txBody>
+          <a:bodyPr wrap="square" lIns="0" tIns="0" rIns="0" bIns="0" rtlCol="0" anchor="ctr"/>
+          <a:lstStyle/>
+          <a:p>
+            <a:pPr indent="0" marL="0">
+              <a:lnSpc>
+                <a:spcPct val="120000"/>
+              </a:lnSpc>
+              <a:buNone/>
+            </a:pPr>
+            <a:r>
+              <a:rPr lang="en-US" sz="1150" b="1" dirty="0">
+                <a:solidFill>
+                  <a:srgbClr val="10161F"/>
+                </a:solidFill>
+                <a:latin typeface="Pretendard" pitchFamily="34" charset="0"/>
+                <a:ea typeface="Pretendard" pitchFamily="34" charset="-122"/>
+                <a:cs typeface="Pretendard" pitchFamily="34" charset="-120"/>
+              </a:rPr>
+              <a:t>120.0억 원</a:t>
+            </a:r>
+            <a:endParaRPr lang="en-US" sz="1150" dirty="0"/>
+          </a:p>
+        </p:txBody>
+      </p:sp>
+      <p:sp>
+        <p:nvSpPr>
+          <p:cNvPr id="25" name="Shape 23"/>
+          <p:cNvSpPr/>
+          <p:nvPr/>
+        </p:nvSpPr>
+        <p:spPr>
+          <a:xfrm>
+            <a:off x="795528" y="4864608"/>
+            <a:ext cx="4934560" cy="0"/>
+          </a:xfrm>
+          <a:prstGeom prst="line">
+            <a:avLst/>
+          </a:prstGeom>
+          <a:noFill/>
+          <a:ln w="3810">
+            <a:solidFill>
+              <a:srgbClr val="CBD5E0"/>
+            </a:solidFill>
+            <a:prstDash val="solid"/>
+          </a:ln>
+        </p:spPr>
+      </p:sp>
+      <p:sp>
+        <p:nvSpPr>
+          <p:cNvPr id="26" name="Text 24"/>
+          <p:cNvSpPr/>
+          <p:nvPr/>
+        </p:nvSpPr>
+        <p:spPr>
+          <a:xfrm>
+            <a:off x="795528" y="4864608"/>
+            <a:ext cx="1875133" cy="475488"/>
+          </a:xfrm>
+          <a:prstGeom prst="rect">
+            <a:avLst/>
+          </a:prstGeom>
+          <a:noFill/>
+          <a:ln/>
+        </p:spPr>
+        <p:txBody>
+          <a:bodyPr wrap="square" lIns="0" tIns="0" rIns="0" bIns="0" rtlCol="0" anchor="ctr"/>
+          <a:lstStyle/>
+          <a:p>
+            <a:pPr indent="0" marL="0">
+              <a:lnSpc>
+                <a:spcPct val="120000"/>
+              </a:lnSpc>
+              <a:buNone/>
+            </a:pPr>
+            <a:r>
+              <a:rPr lang="en-US" sz="1150" dirty="0">
+                <a:solidFill>
+                  <a:srgbClr val="718096"/>
+                </a:solidFill>
+                <a:latin typeface="Pretendard" pitchFamily="34" charset="0"/>
+                <a:ea typeface="Pretendard" pitchFamily="34" charset="-122"/>
+                <a:cs typeface="Pretendard" pitchFamily="34" charset="-120"/>
+              </a:rPr>
+              <a:t>실투자금 (Net Equity)</a:t>
+            </a:r>
+            <a:endParaRPr lang="en-US" sz="1150" dirty="0"/>
+          </a:p>
+        </p:txBody>
+      </p:sp>
+      <p:sp>
+        <p:nvSpPr>
+          <p:cNvPr id="27" name="Text 25"/>
+          <p:cNvSpPr/>
+          <p:nvPr/>
+        </p:nvSpPr>
+        <p:spPr>
+          <a:xfrm>
+            <a:off x="2670661" y="4864608"/>
+            <a:ext cx="3059427" cy="475488"/>
+          </a:xfrm>
+          <a:prstGeom prst="rect">
+            <a:avLst/>
+          </a:prstGeom>
+          <a:noFill/>
+          <a:ln/>
+        </p:spPr>
+        <p:txBody>
+          <a:bodyPr wrap="square" lIns="0" tIns="0" rIns="0" bIns="0" rtlCol="0" anchor="ctr"/>
+          <a:lstStyle/>
+          <a:p>
+            <a:pPr indent="0" marL="0">
+              <a:lnSpc>
+                <a:spcPct val="120000"/>
+              </a:lnSpc>
+              <a:buNone/>
+            </a:pPr>
+            <a:r>
+              <a:rPr lang="en-US" sz="1150" b="1" dirty="0">
+                <a:solidFill>
+                  <a:srgbClr val="10161F"/>
+                </a:solidFill>
+                <a:latin typeface="Pretendard" pitchFamily="34" charset="0"/>
+                <a:ea typeface="Pretendard" pitchFamily="34" charset="-122"/>
+                <a:cs typeface="Pretendard" pitchFamily="34" charset="-120"/>
+              </a:rPr>
+              <a:t>121.2억 원</a:t>
+            </a:r>
+            <a:endParaRPr lang="en-US" sz="1150" dirty="0"/>
+          </a:p>
+        </p:txBody>
+      </p:sp>
+      <p:sp>
+        <p:nvSpPr>
+          <p:cNvPr id="28" name="Shape 26"/>
+          <p:cNvSpPr/>
+          <p:nvPr/>
+        </p:nvSpPr>
+        <p:spPr>
+          <a:xfrm>
+            <a:off x="6233008" y="1417320"/>
+            <a:ext cx="5391760" cy="4389120"/>
+          </a:xfrm>
+          <a:prstGeom prst="roundRect">
+            <a:avLst>
+              <a:gd name="adj" fmla="val 1250"/>
+            </a:avLst>
+          </a:prstGeom>
+          <a:solidFill>
+            <a:srgbClr val="F7FAFC"/>
+          </a:solidFill>
+          <a:ln w="6350">
+            <a:solidFill>
+              <a:srgbClr val="CBD5E0"/>
+            </a:solidFill>
+            <a:prstDash val="solid"/>
+          </a:ln>
+        </p:spPr>
+      </p:sp>
+      <p:sp>
+        <p:nvSpPr>
+          <p:cNvPr id="29" name="Text 27"/>
+          <p:cNvSpPr/>
+          <p:nvPr/>
+        </p:nvSpPr>
+        <p:spPr>
+          <a:xfrm>
+            <a:off x="6461608" y="1618488"/>
+            <a:ext cx="4934560" cy="320040"/>
+          </a:xfrm>
+          <a:prstGeom prst="rect">
+            <a:avLst/>
+          </a:prstGeom>
+          <a:noFill/>
+          <a:ln/>
+        </p:spPr>
+        <p:txBody>
+          <a:bodyPr wrap="square" lIns="0" tIns="0" rIns="0" bIns="0" rtlCol="0" anchor="ctr"/>
+          <a:lstStyle/>
+          <a:p>
+            <a:pPr indent="0" marL="0">
+              <a:buNone/>
+            </a:pPr>
+            <a:r>
+              <a:rPr lang="en-US" sz="1350" b="1" dirty="0">
+                <a:solidFill>
+                  <a:srgbClr val="977024"/>
+                </a:solidFill>
+                <a:latin typeface="Pretendard" pitchFamily="34" charset="0"/>
+                <a:ea typeface="Pretendard" pitchFamily="34" charset="-122"/>
+                <a:cs typeface="Pretendard" pitchFamily="34" charset="-120"/>
+              </a:rPr>
+              <a:t>2. LTV 시나리오별 레버리지 효과</a:t>
+            </a:r>
+            <a:endParaRPr lang="en-US" sz="1350" dirty="0"/>
+          </a:p>
+        </p:txBody>
+      </p:sp>
+      <p:graphicFrame>
+        <p:nvGraphicFramePr>
+          <p:cNvPr id="11" name="Table 0"/>
+          <p:cNvGraphicFramePr>
+            <a:graphicFrameLocks noGrp="1"/>
+          </p:cNvGraphicFramePr>
+          <p:nvPr>
+            <p:extLst>
+              <p:ext uri="{D42A27DB-BD31-4B8C-83A1-F6EECF244321}">
+                <p14:modId xmlns:p14="http://schemas.microsoft.com/office/powerpoint/2010/main" val="1579011935"/>
+              </p:ext>
+            </p:extLst>
+          </p:nvPr>
+        </p:nvGraphicFramePr>
+        <p:xfrm>
+          <a:off x="6461608" y="2057400"/>
+          <a:ext cx="4934560" cy="914400"/>
+        </p:xfrm>
+        <a:graphic>
+          <a:graphicData uri="http://schemas.openxmlformats.org/drawingml/2006/table">
+            <a:tbl>
+              <a:tblPr/>
+              <a:tblGrid>
+                <a:gridCol w="1463040"/>
+                <a:gridCol w="1005840"/>
+                <a:gridCol w="1280160"/>
+                <a:gridCol w="1280160"/>
+              </a:tblGrid>
+              <a:tr h="457200">
+                <a:tc>
+                  <a:txBody>
+                    <a:bodyPr/>
+                    <a:lstStyle/>
+                    <a:p>
+                      <a:pPr indent="0" marL="0">
+                        <a:buNone/>
+                      </a:pPr>
+                      <a:r>
+                        <a:rPr lang="en-US" sz="1100" b="1" dirty="0">
+                          <a:solidFill>
+                            <a:srgbClr val="718096"/>
+                          </a:solidFill>
+                          <a:latin typeface="Pretendard" pitchFamily="34" charset="0"/>
+                          <a:ea typeface="Pretendard" pitchFamily="34" charset="-122"/>
+                          <a:cs typeface="Pretendard" pitchFamily="34" charset="-120"/>
+                        </a:rPr>
+                        <a:t>구분</a:t>
+                      </a:r>
+                      <a:endParaRPr lang="en-US" sz="1100" dirty="0">
+                        <a:latin typeface="Pretendard" charset="0"/>
+                        <a:ea typeface="Pretendard" charset="0"/>
+                        <a:cs typeface="Pretendard" charset="0"/>
+                      </a:endParaRPr>
+                    </a:p>
+                  </a:txBody>
+                  <a:tcPr marL="50800" marR="50800" marT="25400" marB="25400" anchor="ctr">
+                    <a:lnL w="3810" cap="flat" cmpd="sng" algn="ctr">
+                      <a:solidFill>
+                        <a:srgbClr val="CBD5E0"/>
+                      </a:solidFill>
+                      <a:prstDash val="solid"/>
+                      <a:round/>
+                      <a:headEnd type="none" w="med" len="med"/>
+                      <a:tailEnd type="none" w="med" len="med"/>
+                    </a:lnL>
+                    <a:lnR w="3810" cap="flat" cmpd="sng" algn="ctr">
+                      <a:solidFill>
+                        <a:srgbClr val="CBD5E0"/>
+                      </a:solidFill>
+                      <a:prstDash val="solid"/>
+                      <a:round/>
+                      <a:headEnd type="none" w="med" len="med"/>
+                      <a:tailEnd type="none" w="med" len="med"/>
+                    </a:lnR>
+                    <a:lnT w="3810" cap="flat" cmpd="sng" algn="ctr">
+                      <a:solidFill>
+                        <a:srgbClr val="CBD5E0"/>
+                      </a:solidFill>
+                      <a:prstDash val="solid"/>
+                      <a:round/>
+                      <a:headEnd type="none" w="med" len="med"/>
+                      <a:tailEnd type="none" w="med" len="med"/>
+                    </a:lnT>
+                    <a:lnB w="3810" cap="flat" cmpd="sng" algn="ctr">
+                      <a:solidFill>
+                        <a:srgbClr val="CBD5E0"/>
+                      </a:solidFill>
+                      <a:prstDash val="solid"/>
+                      <a:round/>
+                      <a:headEnd type="none" w="med" len="med"/>
+                      <a:tailEnd type="none" w="med" len="med"/>
+                    </a:lnB>
+                    <a:solidFill>
+                      <a:srgbClr val="F7FAFC"/>
+                    </a:solidFill>
+                  </a:tcPr>
+                </a:tc>
+                <a:tc>
+                  <a:txBody>
+                    <a:bodyPr/>
+                    <a:lstStyle/>
+                    <a:p>
+                      <a:pPr indent="0" marL="0">
+                        <a:buNone/>
+                      </a:pPr>
+                      <a:r>
+                        <a:rPr lang="en-US" sz="1100" b="1" dirty="0">
+                          <a:solidFill>
+                            <a:srgbClr val="718096"/>
+                          </a:solidFill>
+                          <a:latin typeface="Pretendard" pitchFamily="34" charset="0"/>
+                          <a:ea typeface="Pretendard" pitchFamily="34" charset="-122"/>
+                          <a:cs typeface="Pretendard" pitchFamily="34" charset="-120"/>
+                        </a:rPr>
+                        <a:t>대출비율</a:t>
+                      </a:r>
+                      <a:endParaRPr lang="en-US" sz="1100" dirty="0">
+                        <a:latin typeface="Pretendard" charset="0"/>
+                        <a:ea typeface="Pretendard" charset="0"/>
+                        <a:cs typeface="Pretendard" charset="0"/>
+                      </a:endParaRPr>
+                    </a:p>
+                  </a:txBody>
+                  <a:tcPr marL="50800" marR="50800" marT="25400" marB="25400" anchor="ctr">
+                    <a:lnL w="3810" cap="flat" cmpd="sng" algn="ctr">
+                      <a:solidFill>
+                        <a:srgbClr val="CBD5E0"/>
+                      </a:solidFill>
+                      <a:prstDash val="solid"/>
+                      <a:round/>
+                      <a:headEnd type="none" w="med" len="med"/>
+                      <a:tailEnd type="none" w="med" len="med"/>
+                    </a:lnL>
+                    <a:lnR w="3810" cap="flat" cmpd="sng" algn="ctr">
+                      <a:solidFill>
+                        <a:srgbClr val="CBD5E0"/>
+                      </a:solidFill>
+                      <a:prstDash val="solid"/>
+                      <a:round/>
+                      <a:headEnd type="none" w="med" len="med"/>
+                      <a:tailEnd type="none" w="med" len="med"/>
+                    </a:lnR>
+                    <a:lnT w="3810" cap="flat" cmpd="sng" algn="ctr">
+                      <a:solidFill>
+                        <a:srgbClr val="CBD5E0"/>
+                      </a:solidFill>
+                      <a:prstDash val="solid"/>
+                      <a:round/>
+                      <a:headEnd type="none" w="med" len="med"/>
+                      <a:tailEnd type="none" w="med" len="med"/>
+                    </a:lnT>
+                    <a:lnB w="3810" cap="flat" cmpd="sng" algn="ctr">
+                      <a:solidFill>
+                        <a:srgbClr val="CBD5E0"/>
+                      </a:solidFill>
+                      <a:prstDash val="solid"/>
+                      <a:round/>
+                      <a:headEnd type="none" w="med" len="med"/>
+                      <a:tailEnd type="none" w="med" len="med"/>
+                    </a:lnB>
+                    <a:solidFill>
+                      <a:srgbClr val="F7FAFC"/>
+                    </a:solidFill>
+                  </a:tcPr>
+                </a:tc>
+                <a:tc>
+                  <a:txBody>
+                    <a:bodyPr/>
+                    <a:lstStyle/>
+                    <a:p>
+                      <a:pPr indent="0" marL="0">
+                        <a:buNone/>
+                      </a:pPr>
+                      <a:r>
+                        <a:rPr lang="en-US" sz="1100" b="1" dirty="0">
+                          <a:solidFill>
+                            <a:srgbClr val="718096"/>
+                          </a:solidFill>
+                          <a:latin typeface="Pretendard" pitchFamily="34" charset="0"/>
+                          <a:ea typeface="Pretendard" pitchFamily="34" charset="-122"/>
+                          <a:cs typeface="Pretendard" pitchFamily="34" charset="-120"/>
+                        </a:rPr>
+                        <a:t>실투자금</a:t>
+                      </a:r>
+                      <a:endParaRPr lang="en-US" sz="1100" dirty="0">
+                        <a:latin typeface="Pretendard" charset="0"/>
+                        <a:ea typeface="Pretendard" charset="0"/>
+                        <a:cs typeface="Pretendard" charset="0"/>
+                      </a:endParaRPr>
+                    </a:p>
+                  </a:txBody>
+                  <a:tcPr marL="50800" marR="50800" marT="25400" marB="25400" anchor="ctr">
+                    <a:lnL w="3810" cap="flat" cmpd="sng" algn="ctr">
+                      <a:solidFill>
+                        <a:srgbClr val="CBD5E0"/>
+                      </a:solidFill>
+                      <a:prstDash val="solid"/>
+                      <a:round/>
+                      <a:headEnd type="none" w="med" len="med"/>
+                      <a:tailEnd type="none" w="med" len="med"/>
+                    </a:lnL>
+                    <a:lnR w="3810" cap="flat" cmpd="sng" algn="ctr">
+                      <a:solidFill>
+                        <a:srgbClr val="CBD5E0"/>
+                      </a:solidFill>
+                      <a:prstDash val="solid"/>
+                      <a:round/>
+                      <a:headEnd type="none" w="med" len="med"/>
+                      <a:tailEnd type="none" w="med" len="med"/>
+                    </a:lnR>
+                    <a:lnT w="3810" cap="flat" cmpd="sng" algn="ctr">
+                      <a:solidFill>
+                        <a:srgbClr val="CBD5E0"/>
+                      </a:solidFill>
+                      <a:prstDash val="solid"/>
+                      <a:round/>
+                      <a:headEnd type="none" w="med" len="med"/>
+                      <a:tailEnd type="none" w="med" len="med"/>
+                    </a:lnT>
+                    <a:lnB w="3810" cap="flat" cmpd="sng" algn="ctr">
+                      <a:solidFill>
+                        <a:srgbClr val="CBD5E0"/>
+                      </a:solidFill>
+                      <a:prstDash val="solid"/>
+                      <a:round/>
+                      <a:headEnd type="none" w="med" len="med"/>
+                      <a:tailEnd type="none" w="med" len="med"/>
+                    </a:lnB>
+                    <a:solidFill>
+                      <a:srgbClr val="F7FAFC"/>
+                    </a:solidFill>
+                  </a:tcPr>
+                </a:tc>
+                <a:tc>
+                  <a:txBody>
+                    <a:bodyPr/>
+                    <a:lstStyle/>
+                    <a:p>
+                      <a:pPr indent="0" marL="0">
+                        <a:buNone/>
+                      </a:pPr>
+                      <a:r>
+                        <a:rPr lang="en-US" sz="1100" b="1" dirty="0">
+                          <a:solidFill>
+                            <a:srgbClr val="718096"/>
+                          </a:solidFill>
+                          <a:latin typeface="Pretendard" pitchFamily="34" charset="0"/>
+                          <a:ea typeface="Pretendard" pitchFamily="34" charset="-122"/>
+                          <a:cs typeface="Pretendard" pitchFamily="34" charset="-120"/>
+                        </a:rPr>
+                        <a:t>예상수익률</a:t>
+                      </a:r>
+                      <a:endParaRPr lang="en-US" sz="1100" dirty="0">
+                        <a:latin typeface="Pretendard" charset="0"/>
+                        <a:ea typeface="Pretendard" charset="0"/>
+                        <a:cs typeface="Pretendard" charset="0"/>
+                      </a:endParaRPr>
+                    </a:p>
+                  </a:txBody>
+                  <a:tcPr marL="50800" marR="50800" marT="25400" marB="25400" anchor="ctr">
+                    <a:lnL w="3810" cap="flat" cmpd="sng" algn="ctr">
+                      <a:solidFill>
+                        <a:srgbClr val="CBD5E0"/>
+                      </a:solidFill>
+                      <a:prstDash val="solid"/>
+                      <a:round/>
+                      <a:headEnd type="none" w="med" len="med"/>
+                      <a:tailEnd type="none" w="med" len="med"/>
+                    </a:lnL>
+                    <a:lnR w="3810" cap="flat" cmpd="sng" algn="ctr">
+                      <a:solidFill>
+                        <a:srgbClr val="CBD5E0"/>
+                      </a:solidFill>
+                      <a:prstDash val="solid"/>
+                      <a:round/>
+                      <a:headEnd type="none" w="med" len="med"/>
+                      <a:tailEnd type="none" w="med" len="med"/>
+                    </a:lnR>
+                    <a:lnT w="3810" cap="flat" cmpd="sng" algn="ctr">
+                      <a:solidFill>
+                        <a:srgbClr val="CBD5E0"/>
+                      </a:solidFill>
+                      <a:prstDash val="solid"/>
+                      <a:round/>
+                      <a:headEnd type="none" w="med" len="med"/>
+                      <a:tailEnd type="none" w="med" len="med"/>
+                    </a:lnT>
+                    <a:lnB w="3810" cap="flat" cmpd="sng" algn="ctr">
+                      <a:solidFill>
+                        <a:srgbClr val="CBD5E0"/>
+                      </a:solidFill>
+                      <a:prstDash val="solid"/>
+                      <a:round/>
+                      <a:headEnd type="none" w="med" len="med"/>
+                      <a:tailEnd type="none" w="med" len="med"/>
+                    </a:lnB>
+                    <a:solidFill>
+                      <a:srgbClr val="F7FAFC"/>
+                    </a:solidFill>
+                  </a:tcPr>
+                </a:tc>
+              </a:tr>
+              <a:tr h="457200">
+                <a:tc>
+                  <a:txBody>
+                    <a:bodyPr/>
+                    <a:lstStyle/>
+                    <a:p>
+                      <a:pPr indent="0" marL="0">
+                        <a:buNone/>
+                      </a:pPr>
+                      <a:r>
+                        <a:rPr lang="en-US" sz="1100" b="1" dirty="0">
+                          <a:solidFill>
+                            <a:srgbClr val="10161F"/>
+                          </a:solidFill>
+                          <a:latin typeface="Pretendard" pitchFamily="34" charset="0"/>
+                          <a:ea typeface="Pretendard" pitchFamily="34" charset="-122"/>
+                          <a:cs typeface="Pretendard" pitchFamily="34" charset="-120"/>
+                        </a:rPr>
+                        <a:t>전액 </a:t>
+                      </a:r>
+                      <a:pPr indent="0" marL="0">
+                        <a:buNone/>
+                      </a:pPr>
+                      <a:r>
+                        <a:rPr lang="en-US" sz="1100" b="1" dirty="0">
+                          <a:solidFill>
+                            <a:srgbClr val="10161F"/>
+                          </a:solidFill>
+                          <a:latin typeface="Pretendard" pitchFamily="34" charset="0"/>
+                          <a:ea typeface="Pretendard" pitchFamily="34" charset="-122"/>
+                          <a:cs typeface="Pretendard" pitchFamily="34" charset="-120"/>
+                        </a:rPr>
+                        <a:t>자기자본 </a:t>
+                      </a:r>
+                      <a:pPr indent="0" marL="0">
+                        <a:buNone/>
+                      </a:pPr>
+                      <a:r>
+                        <a:rPr lang="en-US" sz="1100" b="1" dirty="0">
+                          <a:solidFill>
+                            <a:srgbClr val="10161F"/>
+                          </a:solidFill>
+                          <a:latin typeface="Pretendard" pitchFamily="34" charset="0"/>
+                          <a:ea typeface="Pretendard" pitchFamily="34" charset="-122"/>
+                          <a:cs typeface="Pretendard" pitchFamily="34" charset="-120"/>
+                        </a:rPr>
+                        <a:t>(무차입)</a:t>
+                      </a:r>
+                      <a:endParaRPr lang="en-US" sz="1100" dirty="0">
+                        <a:latin typeface="Pretendard" charset="0"/>
+                        <a:ea typeface="Pretendard" charset="0"/>
+                        <a:cs typeface="Pretendard" charset="0"/>
+                      </a:endParaRPr>
+                    </a:p>
+                  </a:txBody>
+                  <a:tcPr marL="50800" marR="50800" marT="25400" marB="25400" anchor="ctr">
+                    <a:lnL w="3810" cap="flat" cmpd="sng" algn="ctr">
+                      <a:solidFill>
+                        <a:srgbClr val="CBD5E0"/>
+                      </a:solidFill>
+                      <a:prstDash val="solid"/>
+                      <a:round/>
+                      <a:headEnd type="none" w="med" len="med"/>
+                      <a:tailEnd type="none" w="med" len="med"/>
+                    </a:lnL>
+                    <a:lnR w="3810" cap="flat" cmpd="sng" algn="ctr">
+                      <a:solidFill>
+                        <a:srgbClr val="CBD5E0"/>
+                      </a:solidFill>
+                      <a:prstDash val="solid"/>
+                      <a:round/>
+                      <a:headEnd type="none" w="med" len="med"/>
+                      <a:tailEnd type="none" w="med" len="med"/>
+                    </a:lnR>
+                    <a:lnT w="3810" cap="flat" cmpd="sng" algn="ctr">
+                      <a:solidFill>
+                        <a:srgbClr val="CBD5E0"/>
+                      </a:solidFill>
+                      <a:prstDash val="solid"/>
+                      <a:round/>
+                      <a:headEnd type="none" w="med" len="med"/>
+                      <a:tailEnd type="none" w="med" len="med"/>
+                    </a:lnT>
+                    <a:lnB w="3810" cap="flat" cmpd="sng" algn="ctr">
+                      <a:solidFill>
+                        <a:srgbClr val="CBD5E0"/>
+                      </a:solidFill>
+                      <a:prstDash val="solid"/>
+                      <a:round/>
+                      <a:headEnd type="none" w="med" len="med"/>
+                      <a:tailEnd type="none" w="med" len="med"/>
+                    </a:lnB>
+                    <a:solidFill>
+                      <a:srgbClr val="FFFFFF"/>
+                    </a:solidFill>
+                  </a:tcPr>
+                </a:tc>
+                <a:tc>
+                  <a:txBody>
+                    <a:bodyPr/>
+                    <a:lstStyle/>
+                    <a:p>
+                      <a:pPr indent="0" marL="0">
+                        <a:buNone/>
+                      </a:pPr>
+                      <a:r>
+                        <a:rPr lang="en-US" sz="1100" dirty="0">
+                          <a:solidFill>
+                            <a:srgbClr val="10161F"/>
+                          </a:solidFill>
+                          <a:latin typeface="Pretendard" pitchFamily="34" charset="0"/>
+                          <a:ea typeface="Pretendard" pitchFamily="34" charset="-122"/>
+                          <a:cs typeface="Pretendard" pitchFamily="34" charset="-120"/>
+                        </a:rPr>
+                        <a:t>0%</a:t>
+                      </a:r>
+                      <a:endParaRPr lang="en-US" sz="1100" dirty="0">
+                        <a:latin typeface="Pretendard" charset="0"/>
+                        <a:ea typeface="Pretendard" charset="0"/>
+                        <a:cs typeface="Pretendard" charset="0"/>
+                      </a:endParaRPr>
+                    </a:p>
+                  </a:txBody>
+                  <a:tcPr marL="50800" marR="50800" marT="25400" marB="25400" anchor="ctr">
+                    <a:lnL w="3810" cap="flat" cmpd="sng" algn="ctr">
+                      <a:solidFill>
+                        <a:srgbClr val="CBD5E0"/>
+                      </a:solidFill>
+                      <a:prstDash val="solid"/>
+                      <a:round/>
+                      <a:headEnd type="none" w="med" len="med"/>
+                      <a:tailEnd type="none" w="med" len="med"/>
+                    </a:lnL>
+                    <a:lnR w="3810" cap="flat" cmpd="sng" algn="ctr">
+                      <a:solidFill>
+                        <a:srgbClr val="CBD5E0"/>
+                      </a:solidFill>
+                      <a:prstDash val="solid"/>
+                      <a:round/>
+                      <a:headEnd type="none" w="med" len="med"/>
+                      <a:tailEnd type="none" w="med" len="med"/>
+                    </a:lnR>
+                    <a:lnT w="3810" cap="flat" cmpd="sng" algn="ctr">
+                      <a:solidFill>
+                        <a:srgbClr val="CBD5E0"/>
+                      </a:solidFill>
+                      <a:prstDash val="solid"/>
+                      <a:round/>
+                      <a:headEnd type="none" w="med" len="med"/>
+                      <a:tailEnd type="none" w="med" len="med"/>
+                    </a:lnT>
+                    <a:lnB w="3810" cap="flat" cmpd="sng" algn="ctr">
+                      <a:solidFill>
+                        <a:srgbClr val="CBD5E0"/>
+                      </a:solidFill>
+                      <a:prstDash val="solid"/>
+                      <a:round/>
+                      <a:headEnd type="none" w="med" len="med"/>
+                      <a:tailEnd type="none" w="med" len="med"/>
+                    </a:lnB>
+                    <a:solidFill>
+                      <a:srgbClr val="FFFFFF"/>
+                    </a:solidFill>
+                  </a:tcPr>
+                </a:tc>
+                <a:tc>
+                  <a:txBody>
+                    <a:bodyPr/>
+                    <a:lstStyle/>
+                    <a:p>
+                      <a:pPr indent="0" marL="0">
+                        <a:buNone/>
+                      </a:pPr>
+                      <a:r>
+                        <a:rPr lang="en-US" sz="1100" dirty="0">
+                          <a:solidFill>
+                            <a:srgbClr val="10161F"/>
+                          </a:solidFill>
+                          <a:latin typeface="Pretendard" pitchFamily="34" charset="0"/>
+                          <a:ea typeface="Pretendard" pitchFamily="34" charset="-122"/>
+                          <a:cs typeface="Pretendard" pitchFamily="34" charset="-120"/>
+                        </a:rPr>
+                        <a:t>241.2억</a:t>
+                      </a:r>
+                      <a:endParaRPr lang="en-US" sz="1100" dirty="0">
+                        <a:latin typeface="Pretendard" charset="0"/>
+                        <a:ea typeface="Pretendard" charset="0"/>
+                        <a:cs typeface="Pretendard" charset="0"/>
+                      </a:endParaRPr>
+                    </a:p>
+                  </a:txBody>
+                  <a:tcPr marL="50800" marR="50800" marT="25400" marB="25400" anchor="ctr">
+                    <a:lnL w="3810" cap="flat" cmpd="sng" algn="ctr">
+                      <a:solidFill>
+                        <a:srgbClr val="CBD5E0"/>
+                      </a:solidFill>
+                      <a:prstDash val="solid"/>
+                      <a:round/>
+                      <a:headEnd type="none" w="med" len="med"/>
+                      <a:tailEnd type="none" w="med" len="med"/>
+                    </a:lnL>
+                    <a:lnR w="3810" cap="flat" cmpd="sng" algn="ctr">
+                      <a:solidFill>
+                        <a:srgbClr val="CBD5E0"/>
+                      </a:solidFill>
+                      <a:prstDash val="solid"/>
+                      <a:round/>
+                      <a:headEnd type="none" w="med" len="med"/>
+                      <a:tailEnd type="none" w="med" len="med"/>
+                    </a:lnR>
+                    <a:lnT w="3810" cap="flat" cmpd="sng" algn="ctr">
+                      <a:solidFill>
+                        <a:srgbClr val="CBD5E0"/>
+                      </a:solidFill>
+                      <a:prstDash val="solid"/>
+                      <a:round/>
+                      <a:headEnd type="none" w="med" len="med"/>
+                      <a:tailEnd type="none" w="med" len="med"/>
+                    </a:lnT>
+                    <a:lnB w="3810" cap="flat" cmpd="sng" algn="ctr">
+                      <a:solidFill>
+                        <a:srgbClr val="CBD5E0"/>
+                      </a:solidFill>
+                      <a:prstDash val="solid"/>
+                      <a:round/>
+                      <a:headEnd type="none" w="med" len="med"/>
+                      <a:tailEnd type="none" w="med" len="med"/>
+                    </a:lnB>
+                    <a:solidFill>
+                      <a:srgbClr val="FFFFFF"/>
+                    </a:solidFill>
+                  </a:tcPr>
+                </a:tc>
+                <a:tc>
+                  <a:txBody>
+                    <a:bodyPr/>
+                    <a:lstStyle/>
+                    <a:p>
+                      <a:pPr indent="0" marL="0">
+                        <a:buNone/>
+                      </a:pPr>
+                      <a:r>
+                        <a:rPr lang="en-US" sz="1100" dirty="0">
+                          <a:solidFill>
+                            <a:srgbClr val="10161F"/>
+                          </a:solidFill>
+                          <a:latin typeface="Pretendard" pitchFamily="34" charset="0"/>
+                          <a:ea typeface="Pretendard" pitchFamily="34" charset="-122"/>
+                          <a:cs typeface="Pretendard" pitchFamily="34" charset="-120"/>
+                        </a:rPr>
+                        <a:t>3.78%</a:t>
+                      </a:r>
+                      <a:endParaRPr lang="en-US" sz="1100" dirty="0">
+                        <a:latin typeface="Pretendard" charset="0"/>
+                        <a:ea typeface="Pretendard" charset="0"/>
+                        <a:cs typeface="Pretendard" charset="0"/>
+                      </a:endParaRPr>
+                    </a:p>
+                  </a:txBody>
+                  <a:tcPr marL="50800" marR="50800" marT="25400" marB="25400" anchor="ctr">
+                    <a:lnL w="3810" cap="flat" cmpd="sng" algn="ctr">
+                      <a:solidFill>
+                        <a:srgbClr val="CBD5E0"/>
+                      </a:solidFill>
+                      <a:prstDash val="solid"/>
+                      <a:round/>
+                      <a:headEnd type="none" w="med" len="med"/>
+                      <a:tailEnd type="none" w="med" len="med"/>
+                    </a:lnL>
+                    <a:lnR w="3810" cap="flat" cmpd="sng" algn="ctr">
+                      <a:solidFill>
+                        <a:srgbClr val="CBD5E0"/>
+                      </a:solidFill>
+                      <a:prstDash val="solid"/>
+                      <a:round/>
+                      <a:headEnd type="none" w="med" len="med"/>
+                      <a:tailEnd type="none" w="med" len="med"/>
+                    </a:lnR>
+                    <a:lnT w="3810" cap="flat" cmpd="sng" algn="ctr">
+                      <a:solidFill>
+                        <a:srgbClr val="CBD5E0"/>
+                      </a:solidFill>
+                      <a:prstDash val="solid"/>
+                      <a:round/>
+                      <a:headEnd type="none" w="med" len="med"/>
+                      <a:tailEnd type="none" w="med" len="med"/>
+                    </a:lnT>
+                    <a:lnB w="3810" cap="flat" cmpd="sng" algn="ctr">
+                      <a:solidFill>
+                        <a:srgbClr val="CBD5E0"/>
+                      </a:solidFill>
+                      <a:prstDash val="solid"/>
+                      <a:round/>
+                      <a:headEnd type="none" w="med" len="med"/>
+                      <a:tailEnd type="none" w="med" len="med"/>
+                    </a:lnB>
+                    <a:solidFill>
+                      <a:srgbClr val="FFFFFF"/>
+                    </a:solidFill>
+                  </a:tcPr>
+                </a:tc>
+              </a:tr>
+              <a:tr h="457200">
+                <a:tc>
+                  <a:txBody>
+                    <a:bodyPr/>
+                    <a:lstStyle/>
+                    <a:p>
+                      <a:pPr indent="0" marL="0">
+                        <a:buNone/>
+                      </a:pPr>
+                      <a:r>
+                        <a:rPr lang="en-US" sz="1100" b="1" dirty="0">
+                          <a:solidFill>
+                            <a:srgbClr val="10161F"/>
+                          </a:solidFill>
+                          <a:latin typeface="Pretendard" pitchFamily="34" charset="0"/>
+                          <a:ea typeface="Pretendard" pitchFamily="34" charset="-122"/>
+                          <a:cs typeface="Pretendard" pitchFamily="34" charset="-120"/>
+                        </a:rPr>
+                        <a:t>보수적 </a:t>
+                      </a:r>
+                      <a:pPr indent="0" marL="0">
+                        <a:buNone/>
+                      </a:pPr>
+                      <a:r>
+                        <a:rPr lang="en-US" sz="1100" b="1" dirty="0">
+                          <a:solidFill>
+                            <a:srgbClr val="10161F"/>
+                          </a:solidFill>
+                          <a:latin typeface="Pretendard" pitchFamily="34" charset="0"/>
+                          <a:ea typeface="Pretendard" pitchFamily="34" charset="-122"/>
+                          <a:cs typeface="Pretendard" pitchFamily="34" charset="-120"/>
+                        </a:rPr>
+                        <a:t>차입 </a:t>
+                      </a:r>
+                      <a:pPr indent="0" marL="0">
+                        <a:buNone/>
+                      </a:pPr>
+                      <a:r>
+                        <a:rPr lang="en-US" sz="1100" b="1" dirty="0">
+                          <a:solidFill>
+                            <a:srgbClr val="10161F"/>
+                          </a:solidFill>
+                          <a:latin typeface="Pretendard" pitchFamily="34" charset="0"/>
+                          <a:ea typeface="Pretendard" pitchFamily="34" charset="-122"/>
+                          <a:cs typeface="Pretendard" pitchFamily="34" charset="-120"/>
+                        </a:rPr>
+                        <a:t>(안정형)</a:t>
+                      </a:r>
+                      <a:endParaRPr lang="en-US" sz="1100" dirty="0">
+                        <a:latin typeface="Pretendard" charset="0"/>
+                        <a:ea typeface="Pretendard" charset="0"/>
+                        <a:cs typeface="Pretendard" charset="0"/>
+                      </a:endParaRPr>
+                    </a:p>
+                  </a:txBody>
+                  <a:tcPr marL="50800" marR="50800" marT="25400" marB="25400" anchor="ctr">
+                    <a:lnL w="3810" cap="flat" cmpd="sng" algn="ctr">
+                      <a:solidFill>
+                        <a:srgbClr val="CBD5E0"/>
+                      </a:solidFill>
+                      <a:prstDash val="solid"/>
+                      <a:round/>
+                      <a:headEnd type="none" w="med" len="med"/>
+                      <a:tailEnd type="none" w="med" len="med"/>
+                    </a:lnL>
+                    <a:lnR w="3810" cap="flat" cmpd="sng" algn="ctr">
+                      <a:solidFill>
+                        <a:srgbClr val="CBD5E0"/>
+                      </a:solidFill>
+                      <a:prstDash val="solid"/>
+                      <a:round/>
+                      <a:headEnd type="none" w="med" len="med"/>
+                      <a:tailEnd type="none" w="med" len="med"/>
+                    </a:lnR>
+                    <a:lnT w="3810" cap="flat" cmpd="sng" algn="ctr">
+                      <a:solidFill>
+                        <a:srgbClr val="CBD5E0"/>
+                      </a:solidFill>
+                      <a:prstDash val="solid"/>
+                      <a:round/>
+                      <a:headEnd type="none" w="med" len="med"/>
+                      <a:tailEnd type="none" w="med" len="med"/>
+                    </a:lnT>
+                    <a:lnB w="3810" cap="flat" cmpd="sng" algn="ctr">
+                      <a:solidFill>
+                        <a:srgbClr val="CBD5E0"/>
+                      </a:solidFill>
+                      <a:prstDash val="solid"/>
+                      <a:round/>
+                      <a:headEnd type="none" w="med" len="med"/>
+                      <a:tailEnd type="none" w="med" len="med"/>
+                    </a:lnB>
+                    <a:solidFill>
+                      <a:srgbClr val="F7FAFC"/>
+                    </a:solidFill>
+                  </a:tcPr>
+                </a:tc>
+                <a:tc>
+                  <a:txBody>
+                    <a:bodyPr/>
+                    <a:lstStyle/>
+                    <a:p>
+                      <a:pPr indent="0" marL="0">
+                        <a:buNone/>
+                      </a:pPr>
+                      <a:r>
+                        <a:rPr lang="en-US" sz="1100" dirty="0">
+                          <a:solidFill>
+                            <a:srgbClr val="10161F"/>
+                          </a:solidFill>
+                          <a:latin typeface="Pretendard" pitchFamily="34" charset="0"/>
+                          <a:ea typeface="Pretendard" pitchFamily="34" charset="-122"/>
+                          <a:cs typeface="Pretendard" pitchFamily="34" charset="-120"/>
+                        </a:rPr>
+                        <a:t>40%</a:t>
+                      </a:r>
+                      <a:endParaRPr lang="en-US" sz="1100" dirty="0">
+                        <a:latin typeface="Pretendard" charset="0"/>
+                        <a:ea typeface="Pretendard" charset="0"/>
+                        <a:cs typeface="Pretendard" charset="0"/>
+                      </a:endParaRPr>
+                    </a:p>
+                  </a:txBody>
+                  <a:tcPr marL="50800" marR="50800" marT="25400" marB="25400" anchor="ctr">
+                    <a:lnL w="3810" cap="flat" cmpd="sng" algn="ctr">
+                      <a:solidFill>
+                        <a:srgbClr val="CBD5E0"/>
+                      </a:solidFill>
+                      <a:prstDash val="solid"/>
+                      <a:round/>
+                      <a:headEnd type="none" w="med" len="med"/>
+                      <a:tailEnd type="none" w="med" len="med"/>
+                    </a:lnL>
+                    <a:lnR w="3810" cap="flat" cmpd="sng" algn="ctr">
+                      <a:solidFill>
+                        <a:srgbClr val="CBD5E0"/>
+                      </a:solidFill>
+                      <a:prstDash val="solid"/>
+                      <a:round/>
+                      <a:headEnd type="none" w="med" len="med"/>
+                      <a:tailEnd type="none" w="med" len="med"/>
+                    </a:lnR>
+                    <a:lnT w="3810" cap="flat" cmpd="sng" algn="ctr">
+                      <a:solidFill>
+                        <a:srgbClr val="CBD5E0"/>
+                      </a:solidFill>
+                      <a:prstDash val="solid"/>
+                      <a:round/>
+                      <a:headEnd type="none" w="med" len="med"/>
+                      <a:tailEnd type="none" w="med" len="med"/>
+                    </a:lnT>
+                    <a:lnB w="3810" cap="flat" cmpd="sng" algn="ctr">
+                      <a:solidFill>
+                        <a:srgbClr val="CBD5E0"/>
+                      </a:solidFill>
+                      <a:prstDash val="solid"/>
+                      <a:round/>
+                      <a:headEnd type="none" w="med" len="med"/>
+                      <a:tailEnd type="none" w="med" len="med"/>
+                    </a:lnB>
+                    <a:solidFill>
+                      <a:srgbClr val="F7FAFC"/>
+                    </a:solidFill>
+                  </a:tcPr>
+                </a:tc>
+                <a:tc>
+                  <a:txBody>
+                    <a:bodyPr/>
+                    <a:lstStyle/>
+                    <a:p>
+                      <a:pPr indent="0" marL="0">
+                        <a:buNone/>
+                      </a:pPr>
+                      <a:r>
+                        <a:rPr lang="en-US" sz="1100" dirty="0">
+                          <a:solidFill>
+                            <a:srgbClr val="10161F"/>
+                          </a:solidFill>
+                          <a:latin typeface="Pretendard" pitchFamily="34" charset="0"/>
+                          <a:ea typeface="Pretendard" pitchFamily="34" charset="-122"/>
+                          <a:cs typeface="Pretendard" pitchFamily="34" charset="-120"/>
+                        </a:rPr>
+                        <a:t>145.2억</a:t>
+                      </a:r>
+                      <a:endParaRPr lang="en-US" sz="1100" dirty="0">
+                        <a:latin typeface="Pretendard" charset="0"/>
+                        <a:ea typeface="Pretendard" charset="0"/>
+                        <a:cs typeface="Pretendard" charset="0"/>
+                      </a:endParaRPr>
+                    </a:p>
+                  </a:txBody>
+                  <a:tcPr marL="50800" marR="50800" marT="25400" marB="25400" anchor="ctr">
+                    <a:lnL w="3810" cap="flat" cmpd="sng" algn="ctr">
+                      <a:solidFill>
+                        <a:srgbClr val="CBD5E0"/>
+                      </a:solidFill>
+                      <a:prstDash val="solid"/>
+                      <a:round/>
+                      <a:headEnd type="none" w="med" len="med"/>
+                      <a:tailEnd type="none" w="med" len="med"/>
+                    </a:lnL>
+                    <a:lnR w="3810" cap="flat" cmpd="sng" algn="ctr">
+                      <a:solidFill>
+                        <a:srgbClr val="CBD5E0"/>
+                      </a:solidFill>
+                      <a:prstDash val="solid"/>
+                      <a:round/>
+                      <a:headEnd type="none" w="med" len="med"/>
+                      <a:tailEnd type="none" w="med" len="med"/>
+                    </a:lnR>
+                    <a:lnT w="3810" cap="flat" cmpd="sng" algn="ctr">
+                      <a:solidFill>
+                        <a:srgbClr val="CBD5E0"/>
+                      </a:solidFill>
+                      <a:prstDash val="solid"/>
+                      <a:round/>
+                      <a:headEnd type="none" w="med" len="med"/>
+                      <a:tailEnd type="none" w="med" len="med"/>
+                    </a:lnT>
+                    <a:lnB w="3810" cap="flat" cmpd="sng" algn="ctr">
+                      <a:solidFill>
+                        <a:srgbClr val="CBD5E0"/>
+                      </a:solidFill>
+                      <a:prstDash val="solid"/>
+                      <a:round/>
+                      <a:headEnd type="none" w="med" len="med"/>
+                      <a:tailEnd type="none" w="med" len="med"/>
+                    </a:lnB>
+                    <a:solidFill>
+                      <a:srgbClr val="F7FAFC"/>
+                    </a:solidFill>
+                  </a:tcPr>
+                </a:tc>
+                <a:tc>
+                  <a:txBody>
+                    <a:bodyPr/>
+                    <a:lstStyle/>
+                    <a:p>
+                      <a:pPr indent="0" marL="0">
+                        <a:buNone/>
+                      </a:pPr>
+                      <a:r>
+                        <a:rPr lang="en-US" sz="1100" dirty="0">
+                          <a:solidFill>
+                            <a:srgbClr val="10161F"/>
+                          </a:solidFill>
+                          <a:latin typeface="Pretendard" pitchFamily="34" charset="0"/>
+                          <a:ea typeface="Pretendard" pitchFamily="34" charset="-122"/>
+                          <a:cs typeface="Pretendard" pitchFamily="34" charset="-120"/>
+                        </a:rPr>
+                        <a:t>3.11%</a:t>
+                      </a:r>
+                      <a:endParaRPr lang="en-US" sz="1100" dirty="0">
+                        <a:latin typeface="Pretendard" charset="0"/>
+                        <a:ea typeface="Pretendard" charset="0"/>
+                        <a:cs typeface="Pretendard" charset="0"/>
+                      </a:endParaRPr>
+                    </a:p>
+                  </a:txBody>
+                  <a:tcPr marL="50800" marR="50800" marT="25400" marB="25400" anchor="ctr">
+                    <a:lnL w="3810" cap="flat" cmpd="sng" algn="ctr">
+                      <a:solidFill>
+                        <a:srgbClr val="CBD5E0"/>
+                      </a:solidFill>
+                      <a:prstDash val="solid"/>
+                      <a:round/>
+                      <a:headEnd type="none" w="med" len="med"/>
+                      <a:tailEnd type="none" w="med" len="med"/>
+                    </a:lnL>
+                    <a:lnR w="3810" cap="flat" cmpd="sng" algn="ctr">
+                      <a:solidFill>
+                        <a:srgbClr val="CBD5E0"/>
+                      </a:solidFill>
+                      <a:prstDash val="solid"/>
+                      <a:round/>
+                      <a:headEnd type="none" w="med" len="med"/>
+                      <a:tailEnd type="none" w="med" len="med"/>
+                    </a:lnR>
+                    <a:lnT w="3810" cap="flat" cmpd="sng" algn="ctr">
+                      <a:solidFill>
+                        <a:srgbClr val="CBD5E0"/>
+                      </a:solidFill>
+                      <a:prstDash val="solid"/>
+                      <a:round/>
+                      <a:headEnd type="none" w="med" len="med"/>
+                      <a:tailEnd type="none" w="med" len="med"/>
+                    </a:lnT>
+                    <a:lnB w="3810" cap="flat" cmpd="sng" algn="ctr">
+                      <a:solidFill>
+                        <a:srgbClr val="CBD5E0"/>
+                      </a:solidFill>
+                      <a:prstDash val="solid"/>
+                      <a:round/>
+                      <a:headEnd type="none" w="med" len="med"/>
+                      <a:tailEnd type="none" w="med" len="med"/>
+                    </a:lnB>
+                    <a:solidFill>
+                      <a:srgbClr val="F7FAFC"/>
+                    </a:solidFill>
+                  </a:tcPr>
+                </a:tc>
+              </a:tr>
+              <a:tr h="457200">
+                <a:tc>
+                  <a:txBody>
+                    <a:bodyPr/>
+                    <a:lstStyle/>
+                    <a:p>
+                      <a:pPr indent="0" marL="0">
+                        <a:buNone/>
+                      </a:pPr>
+                      <a:r>
+                        <a:rPr lang="en-US" sz="1100" b="1" dirty="0">
+                          <a:solidFill>
+                            <a:srgbClr val="10161F"/>
+                          </a:solidFill>
+                          <a:latin typeface="Pretendard" pitchFamily="34" charset="0"/>
+                          <a:ea typeface="Pretendard" pitchFamily="34" charset="-122"/>
+                          <a:cs typeface="Pretendard" pitchFamily="34" charset="-120"/>
+                        </a:rPr>
+                        <a:t>표준 </a:t>
+                      </a:r>
+                      <a:pPr indent="0" marL="0">
+                        <a:buNone/>
+                      </a:pPr>
+                      <a:r>
+                        <a:rPr lang="en-US" sz="1100" b="1" dirty="0">
+                          <a:solidFill>
+                            <a:srgbClr val="10161F"/>
+                          </a:solidFill>
+                          <a:latin typeface="Pretendard" pitchFamily="34" charset="0"/>
+                          <a:ea typeface="Pretendard" pitchFamily="34" charset="-122"/>
+                          <a:cs typeface="Pretendard" pitchFamily="34" charset="-120"/>
+                        </a:rPr>
+                        <a:t>차입 </a:t>
+                      </a:r>
+                      <a:pPr indent="0" marL="0">
+                        <a:buNone/>
+                      </a:pPr>
+                      <a:r>
+                        <a:rPr lang="en-US" sz="1100" b="1" dirty="0">
+                          <a:solidFill>
+                            <a:srgbClr val="10161F"/>
+                          </a:solidFill>
+                          <a:latin typeface="Pretendard" pitchFamily="34" charset="0"/>
+                          <a:ea typeface="Pretendard" pitchFamily="34" charset="-122"/>
+                          <a:cs typeface="Pretendard" pitchFamily="34" charset="-120"/>
+                        </a:rPr>
+                        <a:t>(기본형)</a:t>
+                      </a:r>
+                      <a:endParaRPr lang="en-US" sz="1100" dirty="0">
+                        <a:latin typeface="Pretendard" charset="0"/>
+                        <a:ea typeface="Pretendard" charset="0"/>
+                        <a:cs typeface="Pretendard" charset="0"/>
+                      </a:endParaRPr>
+                    </a:p>
+                  </a:txBody>
+                  <a:tcPr marL="50800" marR="50800" marT="25400" marB="25400" anchor="ctr">
+                    <a:lnL w="3810" cap="flat" cmpd="sng" algn="ctr">
+                      <a:solidFill>
+                        <a:srgbClr val="CBD5E0"/>
+                      </a:solidFill>
+                      <a:prstDash val="solid"/>
+                      <a:round/>
+                      <a:headEnd type="none" w="med" len="med"/>
+                      <a:tailEnd type="none" w="med" len="med"/>
+                    </a:lnL>
+                    <a:lnR w="3810" cap="flat" cmpd="sng" algn="ctr">
+                      <a:solidFill>
+                        <a:srgbClr val="CBD5E0"/>
+                      </a:solidFill>
+                      <a:prstDash val="solid"/>
+                      <a:round/>
+                      <a:headEnd type="none" w="med" len="med"/>
+                      <a:tailEnd type="none" w="med" len="med"/>
+                    </a:lnR>
+                    <a:lnT w="3810" cap="flat" cmpd="sng" algn="ctr">
+                      <a:solidFill>
+                        <a:srgbClr val="CBD5E0"/>
+                      </a:solidFill>
+                      <a:prstDash val="solid"/>
+                      <a:round/>
+                      <a:headEnd type="none" w="med" len="med"/>
+                      <a:tailEnd type="none" w="med" len="med"/>
+                    </a:lnT>
+                    <a:lnB w="3810" cap="flat" cmpd="sng" algn="ctr">
+                      <a:solidFill>
+                        <a:srgbClr val="CBD5E0"/>
+                      </a:solidFill>
+                      <a:prstDash val="solid"/>
+                      <a:round/>
+                      <a:headEnd type="none" w="med" len="med"/>
+                      <a:tailEnd type="none" w="med" len="med"/>
+                    </a:lnB>
+                    <a:solidFill>
+                      <a:srgbClr val="FFFFFF"/>
+                    </a:solidFill>
+                  </a:tcPr>
+                </a:tc>
+                <a:tc>
+                  <a:txBody>
+                    <a:bodyPr/>
+                    <a:lstStyle/>
+                    <a:p>
+                      <a:pPr indent="0" marL="0">
+                        <a:buNone/>
+                      </a:pPr>
+                      <a:r>
+                        <a:rPr lang="en-US" sz="1100" dirty="0">
+                          <a:solidFill>
+                            <a:srgbClr val="10161F"/>
+                          </a:solidFill>
+                          <a:latin typeface="Pretendard" pitchFamily="34" charset="0"/>
+                          <a:ea typeface="Pretendard" pitchFamily="34" charset="-122"/>
+                          <a:cs typeface="Pretendard" pitchFamily="34" charset="-120"/>
+                        </a:rPr>
+                        <a:t>50%</a:t>
+                      </a:r>
+                      <a:endParaRPr lang="en-US" sz="1100" dirty="0">
+                        <a:latin typeface="Pretendard" charset="0"/>
+                        <a:ea typeface="Pretendard" charset="0"/>
+                        <a:cs typeface="Pretendard" charset="0"/>
+                      </a:endParaRPr>
+                    </a:p>
+                  </a:txBody>
+                  <a:tcPr marL="50800" marR="50800" marT="25400" marB="25400" anchor="ctr">
+                    <a:lnL w="3810" cap="flat" cmpd="sng" algn="ctr">
+                      <a:solidFill>
+                        <a:srgbClr val="CBD5E0"/>
+                      </a:solidFill>
+                      <a:prstDash val="solid"/>
+                      <a:round/>
+                      <a:headEnd type="none" w="med" len="med"/>
+                      <a:tailEnd type="none" w="med" len="med"/>
+                    </a:lnL>
+                    <a:lnR w="3810" cap="flat" cmpd="sng" algn="ctr">
+                      <a:solidFill>
+                        <a:srgbClr val="CBD5E0"/>
+                      </a:solidFill>
+                      <a:prstDash val="solid"/>
+                      <a:round/>
+                      <a:headEnd type="none" w="med" len="med"/>
+                      <a:tailEnd type="none" w="med" len="med"/>
+                    </a:lnR>
+                    <a:lnT w="3810" cap="flat" cmpd="sng" algn="ctr">
+                      <a:solidFill>
+                        <a:srgbClr val="CBD5E0"/>
+                      </a:solidFill>
+                      <a:prstDash val="solid"/>
+                      <a:round/>
+                      <a:headEnd type="none" w="med" len="med"/>
+                      <a:tailEnd type="none" w="med" len="med"/>
+                    </a:lnT>
+                    <a:lnB w="3810" cap="flat" cmpd="sng" algn="ctr">
+                      <a:solidFill>
+                        <a:srgbClr val="CBD5E0"/>
+                      </a:solidFill>
+                      <a:prstDash val="solid"/>
+                      <a:round/>
+                      <a:headEnd type="none" w="med" len="med"/>
+                      <a:tailEnd type="none" w="med" len="med"/>
+                    </a:lnB>
+                    <a:solidFill>
+                      <a:srgbClr val="FFFFFF"/>
+                    </a:solidFill>
+                  </a:tcPr>
+                </a:tc>
+                <a:tc>
+                  <a:txBody>
+                    <a:bodyPr/>
+                    <a:lstStyle/>
+                    <a:p>
+                      <a:pPr indent="0" marL="0">
+                        <a:buNone/>
+                      </a:pPr>
+                      <a:r>
+                        <a:rPr lang="en-US" sz="1100" dirty="0">
+                          <a:solidFill>
+                            <a:srgbClr val="10161F"/>
+                          </a:solidFill>
+                          <a:latin typeface="Pretendard" pitchFamily="34" charset="0"/>
+                          <a:ea typeface="Pretendard" pitchFamily="34" charset="-122"/>
+                          <a:cs typeface="Pretendard" pitchFamily="34" charset="-120"/>
+                        </a:rPr>
+                        <a:t>121.2억</a:t>
+                      </a:r>
+                      <a:endParaRPr lang="en-US" sz="1100" dirty="0">
+                        <a:latin typeface="Pretendard" charset="0"/>
+                        <a:ea typeface="Pretendard" charset="0"/>
+                        <a:cs typeface="Pretendard" charset="0"/>
+                      </a:endParaRPr>
+                    </a:p>
+                  </a:txBody>
+                  <a:tcPr marL="50800" marR="50800" marT="25400" marB="25400" anchor="ctr">
+                    <a:lnL w="3810" cap="flat" cmpd="sng" algn="ctr">
+                      <a:solidFill>
+                        <a:srgbClr val="CBD5E0"/>
+                      </a:solidFill>
+                      <a:prstDash val="solid"/>
+                      <a:round/>
+                      <a:headEnd type="none" w="med" len="med"/>
+                      <a:tailEnd type="none" w="med" len="med"/>
+                    </a:lnL>
+                    <a:lnR w="3810" cap="flat" cmpd="sng" algn="ctr">
+                      <a:solidFill>
+                        <a:srgbClr val="CBD5E0"/>
+                      </a:solidFill>
+                      <a:prstDash val="solid"/>
+                      <a:round/>
+                      <a:headEnd type="none" w="med" len="med"/>
+                      <a:tailEnd type="none" w="med" len="med"/>
+                    </a:lnR>
+                    <a:lnT w="3810" cap="flat" cmpd="sng" algn="ctr">
+                      <a:solidFill>
+                        <a:srgbClr val="CBD5E0"/>
+                      </a:solidFill>
+                      <a:prstDash val="solid"/>
+                      <a:round/>
+                      <a:headEnd type="none" w="med" len="med"/>
+                      <a:tailEnd type="none" w="med" len="med"/>
+                    </a:lnT>
+                    <a:lnB w="3810" cap="flat" cmpd="sng" algn="ctr">
+                      <a:solidFill>
+                        <a:srgbClr val="CBD5E0"/>
+                      </a:solidFill>
+                      <a:prstDash val="solid"/>
+                      <a:round/>
+                      <a:headEnd type="none" w="med" len="med"/>
+                      <a:tailEnd type="none" w="med" len="med"/>
+                    </a:lnB>
+                    <a:solidFill>
+                      <a:srgbClr val="FFFFFF"/>
+                    </a:solidFill>
+                  </a:tcPr>
+                </a:tc>
+                <a:tc>
+                  <a:txBody>
+                    <a:bodyPr/>
+                    <a:lstStyle/>
+                    <a:p>
+                      <a:pPr indent="0" marL="0">
+                        <a:buNone/>
+                      </a:pPr>
+                      <a:r>
+                        <a:rPr lang="en-US" sz="1100" dirty="0">
+                          <a:solidFill>
+                            <a:srgbClr val="10161F"/>
+                          </a:solidFill>
+                          <a:latin typeface="Pretendard" pitchFamily="34" charset="0"/>
+                          <a:ea typeface="Pretendard" pitchFamily="34" charset="-122"/>
+                          <a:cs typeface="Pretendard" pitchFamily="34" charset="-120"/>
+                        </a:rPr>
+                        <a:t>2.77%</a:t>
+                      </a:r>
+                      <a:endParaRPr lang="en-US" sz="1100" dirty="0">
+                        <a:latin typeface="Pretendard" charset="0"/>
+                        <a:ea typeface="Pretendard" charset="0"/>
+                        <a:cs typeface="Pretendard" charset="0"/>
+                      </a:endParaRPr>
+                    </a:p>
+                  </a:txBody>
+                  <a:tcPr marL="50800" marR="50800" marT="25400" marB="25400" anchor="ctr">
+                    <a:lnL w="3810" cap="flat" cmpd="sng" algn="ctr">
+                      <a:solidFill>
+                        <a:srgbClr val="CBD5E0"/>
+                      </a:solidFill>
+                      <a:prstDash val="solid"/>
+                      <a:round/>
+                      <a:headEnd type="none" w="med" len="med"/>
+                      <a:tailEnd type="none" w="med" len="med"/>
+                    </a:lnL>
+                    <a:lnR w="3810" cap="flat" cmpd="sng" algn="ctr">
+                      <a:solidFill>
+                        <a:srgbClr val="CBD5E0"/>
+                      </a:solidFill>
+                      <a:prstDash val="solid"/>
+                      <a:round/>
+                      <a:headEnd type="none" w="med" len="med"/>
+                      <a:tailEnd type="none" w="med" len="med"/>
+                    </a:lnR>
+                    <a:lnT w="3810" cap="flat" cmpd="sng" algn="ctr">
+                      <a:solidFill>
+                        <a:srgbClr val="CBD5E0"/>
+                      </a:solidFill>
+                      <a:prstDash val="solid"/>
+                      <a:round/>
+                      <a:headEnd type="none" w="med" len="med"/>
+                      <a:tailEnd type="none" w="med" len="med"/>
+                    </a:lnT>
+                    <a:lnB w="3810" cap="flat" cmpd="sng" algn="ctr">
+                      <a:solidFill>
+                        <a:srgbClr val="CBD5E0"/>
+                      </a:solidFill>
+                      <a:prstDash val="solid"/>
+                      <a:round/>
+                      <a:headEnd type="none" w="med" len="med"/>
+                      <a:tailEnd type="none" w="med" len="med"/>
+                    </a:lnB>
+                    <a:solidFill>
+                      <a:srgbClr val="FFFFFF"/>
+                    </a:solidFill>
+                  </a:tcPr>
+                </a:tc>
+              </a:tr>
+              <a:tr h="457200">
+                <a:tc>
+                  <a:txBody>
+                    <a:bodyPr/>
+                    <a:lstStyle/>
+                    <a:p>
+                      <a:pPr indent="0" marL="0">
+                        <a:buNone/>
+                      </a:pPr>
+                      <a:r>
+                        <a:rPr lang="en-US" sz="1100" b="1" dirty="0">
+                          <a:solidFill>
+                            <a:srgbClr val="10161F"/>
+                          </a:solidFill>
+                          <a:latin typeface="Pretendard" pitchFamily="34" charset="0"/>
+                          <a:ea typeface="Pretendard" pitchFamily="34" charset="-122"/>
+                          <a:cs typeface="Pretendard" pitchFamily="34" charset="-120"/>
+                        </a:rPr>
+                        <a:t>적극적 </a:t>
+                      </a:r>
+                      <a:pPr indent="0" marL="0">
+                        <a:buNone/>
+                      </a:pPr>
+                      <a:r>
+                        <a:rPr lang="en-US" sz="1100" b="1" dirty="0">
+                          <a:solidFill>
+                            <a:srgbClr val="10161F"/>
+                          </a:solidFill>
+                          <a:latin typeface="Pretendard" pitchFamily="34" charset="0"/>
+                          <a:ea typeface="Pretendard" pitchFamily="34" charset="-122"/>
+                          <a:cs typeface="Pretendard" pitchFamily="34" charset="-120"/>
+                        </a:rPr>
+                        <a:t>차입 </a:t>
+                      </a:r>
+                      <a:pPr indent="0" marL="0">
+                        <a:buNone/>
+                      </a:pPr>
+                      <a:r>
+                        <a:rPr lang="en-US" sz="1100" b="1" dirty="0">
+                          <a:solidFill>
+                            <a:srgbClr val="10161F"/>
+                          </a:solidFill>
+                          <a:latin typeface="Pretendard" pitchFamily="34" charset="0"/>
+                          <a:ea typeface="Pretendard" pitchFamily="34" charset="-122"/>
+                          <a:cs typeface="Pretendard" pitchFamily="34" charset="-120"/>
+                        </a:rPr>
+                        <a:t>(레버리지)</a:t>
+                      </a:r>
+                      <a:endParaRPr lang="en-US" sz="1100" dirty="0">
+                        <a:latin typeface="Pretendard" charset="0"/>
+                        <a:ea typeface="Pretendard" charset="0"/>
+                        <a:cs typeface="Pretendard" charset="0"/>
+                      </a:endParaRPr>
+                    </a:p>
+                  </a:txBody>
+                  <a:tcPr marL="50800" marR="50800" marT="25400" marB="25400" anchor="ctr">
+                    <a:lnL w="3810" cap="flat" cmpd="sng" algn="ctr">
+                      <a:solidFill>
+                        <a:srgbClr val="CBD5E0"/>
+                      </a:solidFill>
+                      <a:prstDash val="solid"/>
+                      <a:round/>
+                      <a:headEnd type="none" w="med" len="med"/>
+                      <a:tailEnd type="none" w="med" len="med"/>
+                    </a:lnL>
+                    <a:lnR w="3810" cap="flat" cmpd="sng" algn="ctr">
+                      <a:solidFill>
+                        <a:srgbClr val="CBD5E0"/>
+                      </a:solidFill>
+                      <a:prstDash val="solid"/>
+                      <a:round/>
+                      <a:headEnd type="none" w="med" len="med"/>
+                      <a:tailEnd type="none" w="med" len="med"/>
+                    </a:lnR>
+                    <a:lnT w="3810" cap="flat" cmpd="sng" algn="ctr">
+                      <a:solidFill>
+                        <a:srgbClr val="CBD5E0"/>
+                      </a:solidFill>
+                      <a:prstDash val="solid"/>
+                      <a:round/>
+                      <a:headEnd type="none" w="med" len="med"/>
+                      <a:tailEnd type="none" w="med" len="med"/>
+                    </a:lnT>
+                    <a:lnB w="3810" cap="flat" cmpd="sng" algn="ctr">
+                      <a:solidFill>
+                        <a:srgbClr val="CBD5E0"/>
+                      </a:solidFill>
+                      <a:prstDash val="solid"/>
+                      <a:round/>
+                      <a:headEnd type="none" w="med" len="med"/>
+                      <a:tailEnd type="none" w="med" len="med"/>
+                    </a:lnB>
+                    <a:solidFill>
+                      <a:srgbClr val="F7FAFC"/>
+                    </a:solidFill>
+                  </a:tcPr>
+                </a:tc>
+                <a:tc>
+                  <a:txBody>
+                    <a:bodyPr/>
+                    <a:lstStyle/>
+                    <a:p>
+                      <a:pPr indent="0" marL="0">
+                        <a:buNone/>
+                      </a:pPr>
+                      <a:r>
+                        <a:rPr lang="en-US" sz="1100" dirty="0">
+                          <a:solidFill>
+                            <a:srgbClr val="10161F"/>
+                          </a:solidFill>
+                          <a:latin typeface="Pretendard" pitchFamily="34" charset="0"/>
+                          <a:ea typeface="Pretendard" pitchFamily="34" charset="-122"/>
+                          <a:cs typeface="Pretendard" pitchFamily="34" charset="-120"/>
+                        </a:rPr>
+                        <a:t>60%</a:t>
+                      </a:r>
+                      <a:endParaRPr lang="en-US" sz="1100" dirty="0">
+                        <a:latin typeface="Pretendard" charset="0"/>
+                        <a:ea typeface="Pretendard" charset="0"/>
+                        <a:cs typeface="Pretendard" charset="0"/>
+                      </a:endParaRPr>
+                    </a:p>
+                  </a:txBody>
+                  <a:tcPr marL="50800" marR="50800" marT="25400" marB="25400" anchor="ctr">
+                    <a:lnL w="3810" cap="flat" cmpd="sng" algn="ctr">
+                      <a:solidFill>
+                        <a:srgbClr val="CBD5E0"/>
+                      </a:solidFill>
+                      <a:prstDash val="solid"/>
+                      <a:round/>
+                      <a:headEnd type="none" w="med" len="med"/>
+                      <a:tailEnd type="none" w="med" len="med"/>
+                    </a:lnL>
+                    <a:lnR w="3810" cap="flat" cmpd="sng" algn="ctr">
+                      <a:solidFill>
+                        <a:srgbClr val="CBD5E0"/>
+                      </a:solidFill>
+                      <a:prstDash val="solid"/>
+                      <a:round/>
+                      <a:headEnd type="none" w="med" len="med"/>
+                      <a:tailEnd type="none" w="med" len="med"/>
+                    </a:lnR>
+                    <a:lnT w="3810" cap="flat" cmpd="sng" algn="ctr">
+                      <a:solidFill>
+                        <a:srgbClr val="CBD5E0"/>
+                      </a:solidFill>
+                      <a:prstDash val="solid"/>
+                      <a:round/>
+                      <a:headEnd type="none" w="med" len="med"/>
+                      <a:tailEnd type="none" w="med" len="med"/>
+                    </a:lnT>
+                    <a:lnB w="3810" cap="flat" cmpd="sng" algn="ctr">
+                      <a:solidFill>
+                        <a:srgbClr val="CBD5E0"/>
+                      </a:solidFill>
+                      <a:prstDash val="solid"/>
+                      <a:round/>
+                      <a:headEnd type="none" w="med" len="med"/>
+                      <a:tailEnd type="none" w="med" len="med"/>
+                    </a:lnB>
+                    <a:solidFill>
+                      <a:srgbClr val="F7FAFC"/>
+                    </a:solidFill>
+                  </a:tcPr>
+                </a:tc>
+                <a:tc>
+                  <a:txBody>
+                    <a:bodyPr/>
+                    <a:lstStyle/>
+                    <a:p>
+                      <a:pPr indent="0" marL="0">
+                        <a:buNone/>
+                      </a:pPr>
+                      <a:r>
+                        <a:rPr lang="en-US" sz="1100" dirty="0">
+                          <a:solidFill>
+                            <a:srgbClr val="10161F"/>
+                          </a:solidFill>
+                          <a:latin typeface="Pretendard" pitchFamily="34" charset="0"/>
+                          <a:ea typeface="Pretendard" pitchFamily="34" charset="-122"/>
+                          <a:cs typeface="Pretendard" pitchFamily="34" charset="-120"/>
+                        </a:rPr>
+                        <a:t>97.2억</a:t>
+                      </a:r>
+                      <a:endParaRPr lang="en-US" sz="1100" dirty="0">
+                        <a:latin typeface="Pretendard" charset="0"/>
+                        <a:ea typeface="Pretendard" charset="0"/>
+                        <a:cs typeface="Pretendard" charset="0"/>
+                      </a:endParaRPr>
+                    </a:p>
+                  </a:txBody>
+                  <a:tcPr marL="50800" marR="50800" marT="25400" marB="25400" anchor="ctr">
+                    <a:lnL w="3810" cap="flat" cmpd="sng" algn="ctr">
+                      <a:solidFill>
+                        <a:srgbClr val="CBD5E0"/>
+                      </a:solidFill>
+                      <a:prstDash val="solid"/>
+                      <a:round/>
+                      <a:headEnd type="none" w="med" len="med"/>
+                      <a:tailEnd type="none" w="med" len="med"/>
+                    </a:lnL>
+                    <a:lnR w="3810" cap="flat" cmpd="sng" algn="ctr">
+                      <a:solidFill>
+                        <a:srgbClr val="CBD5E0"/>
+                      </a:solidFill>
+                      <a:prstDash val="solid"/>
+                      <a:round/>
+                      <a:headEnd type="none" w="med" len="med"/>
+                      <a:tailEnd type="none" w="med" len="med"/>
+                    </a:lnR>
+                    <a:lnT w="3810" cap="flat" cmpd="sng" algn="ctr">
+                      <a:solidFill>
+                        <a:srgbClr val="CBD5E0"/>
+                      </a:solidFill>
+                      <a:prstDash val="solid"/>
+                      <a:round/>
+                      <a:headEnd type="none" w="med" len="med"/>
+                      <a:tailEnd type="none" w="med" len="med"/>
+                    </a:lnT>
+                    <a:lnB w="3810" cap="flat" cmpd="sng" algn="ctr">
+                      <a:solidFill>
+                        <a:srgbClr val="CBD5E0"/>
+                      </a:solidFill>
+                      <a:prstDash val="solid"/>
+                      <a:round/>
+                      <a:headEnd type="none" w="med" len="med"/>
+                      <a:tailEnd type="none" w="med" len="med"/>
+                    </a:lnB>
+                    <a:solidFill>
+                      <a:srgbClr val="F7FAFC"/>
+                    </a:solidFill>
+                  </a:tcPr>
+                </a:tc>
+                <a:tc>
+                  <a:txBody>
+                    <a:bodyPr/>
+                    <a:lstStyle/>
+                    <a:p>
+                      <a:pPr indent="0" marL="0">
+                        <a:buNone/>
+                      </a:pPr>
+                      <a:r>
+                        <a:rPr lang="en-US" sz="1100" dirty="0">
+                          <a:solidFill>
+                            <a:srgbClr val="10161F"/>
+                          </a:solidFill>
+                          <a:latin typeface="Pretendard" pitchFamily="34" charset="0"/>
+                          <a:ea typeface="Pretendard" pitchFamily="34" charset="-122"/>
+                          <a:cs typeface="Pretendard" pitchFamily="34" charset="-120"/>
+                        </a:rPr>
+                        <a:t>2.27%</a:t>
+                      </a:r>
+                      <a:endParaRPr lang="en-US" sz="1100" dirty="0">
+                        <a:latin typeface="Pretendard" charset="0"/>
+                        <a:ea typeface="Pretendard" charset="0"/>
+                        <a:cs typeface="Pretendard" charset="0"/>
+                      </a:endParaRPr>
+                    </a:p>
+                  </a:txBody>
+                  <a:tcPr marL="50800" marR="50800" marT="25400" marB="25400" anchor="ctr">
+                    <a:lnL w="3810" cap="flat" cmpd="sng" algn="ctr">
+                      <a:solidFill>
+                        <a:srgbClr val="CBD5E0"/>
+                      </a:solidFill>
+                      <a:prstDash val="solid"/>
+                      <a:round/>
+                      <a:headEnd type="none" w="med" len="med"/>
+                      <a:tailEnd type="none" w="med" len="med"/>
+                    </a:lnL>
+                    <a:lnR w="3810" cap="flat" cmpd="sng" algn="ctr">
+                      <a:solidFill>
+                        <a:srgbClr val="CBD5E0"/>
+                      </a:solidFill>
+                      <a:prstDash val="solid"/>
+                      <a:round/>
+                      <a:headEnd type="none" w="med" len="med"/>
+                      <a:tailEnd type="none" w="med" len="med"/>
+                    </a:lnR>
+                    <a:lnT w="3810" cap="flat" cmpd="sng" algn="ctr">
+                      <a:solidFill>
+                        <a:srgbClr val="CBD5E0"/>
+                      </a:solidFill>
+                      <a:prstDash val="solid"/>
+                      <a:round/>
+                      <a:headEnd type="none" w="med" len="med"/>
+                      <a:tailEnd type="none" w="med" len="med"/>
+                    </a:lnT>
+                    <a:lnB w="3810" cap="flat" cmpd="sng" algn="ctr">
+                      <a:solidFill>
+                        <a:srgbClr val="CBD5E0"/>
+                      </a:solidFill>
+                      <a:prstDash val="solid"/>
+                      <a:round/>
+                      <a:headEnd type="none" w="med" len="med"/>
+                      <a:tailEnd type="none" w="med" len="med"/>
+                    </a:lnB>
+                    <a:solidFill>
+                      <a:srgbClr val="F7FAFC"/>
+                    </a:solidFill>
+                  </a:tcPr>
+                </a:tc>
+              </a:tr>
+            </a:tbl>
+          </a:graphicData>
+        </a:graphic>
+      </p:graphicFrame>
+      <p:sp>
+        <p:nvSpPr>
+          <p:cNvPr id="31" name="Shape 28"/>
+          <p:cNvSpPr/>
+          <p:nvPr/>
+        </p:nvSpPr>
+        <p:spPr>
+          <a:xfrm>
+            <a:off x="6461608" y="4069080"/>
+            <a:ext cx="4934560" cy="1463040"/>
+          </a:xfrm>
+          <a:prstGeom prst="roundRect">
+            <a:avLst>
+              <a:gd name="adj" fmla="val 3750"/>
+            </a:avLst>
+          </a:prstGeom>
+          <a:solidFill>
+            <a:srgbClr val="FEEBC8"/>
+          </a:solidFill>
+          <a:ln/>
+        </p:spPr>
+      </p:sp>
+      <p:sp>
+        <p:nvSpPr>
+          <p:cNvPr id="32" name="Shape 29"/>
+          <p:cNvSpPr/>
+          <p:nvPr/>
+        </p:nvSpPr>
+        <p:spPr>
+          <a:xfrm>
+            <a:off x="6461608" y="4123944"/>
+            <a:ext cx="36576" cy="1353312"/>
+          </a:xfrm>
+          <a:prstGeom prst="rect">
+            <a:avLst/>
+          </a:prstGeom>
+          <a:solidFill>
+            <a:srgbClr val="9C4221"/>
+          </a:solidFill>
+          <a:ln/>
+        </p:spPr>
+      </p:sp>
+      <p:sp>
+        <p:nvSpPr>
+          <p:cNvPr id="33" name="Text 30"/>
+          <p:cNvSpPr/>
+          <p:nvPr/>
+        </p:nvSpPr>
+        <p:spPr>
+          <a:xfrm>
+            <a:off x="6644488" y="4178808"/>
+            <a:ext cx="4605376" cy="201168"/>
+          </a:xfrm>
+          <a:prstGeom prst="rect">
+            <a:avLst/>
+          </a:prstGeom>
+          <a:noFill/>
+          <a:ln/>
+        </p:spPr>
+        <p:txBody>
+          <a:bodyPr wrap="square" lIns="0" tIns="0" rIns="0" bIns="0" rtlCol="0" anchor="ctr"/>
+          <a:lstStyle/>
+          <a:p>
+            <a:pPr indent="0" marL="0">
+              <a:buNone/>
+            </a:pPr>
+            <a:r>
+              <a:rPr lang="en-US" sz="1050" b="1" dirty="0">
+                <a:solidFill>
+                  <a:srgbClr val="9C4221"/>
+                </a:solidFill>
+                <a:latin typeface="Pretendard" pitchFamily="34" charset="0"/>
+                <a:ea typeface="Pretendard" pitchFamily="34" charset="-122"/>
+                <a:cs typeface="Pretendard" pitchFamily="34" charset="-120"/>
+              </a:rPr>
+              <a:t>역레버리지 유의 구간</a:t>
+            </a:r>
+            <a:endParaRPr lang="en-US" sz="1050" dirty="0"/>
+          </a:p>
+        </p:txBody>
+      </p:sp>
+      <p:sp>
+        <p:nvSpPr>
+          <p:cNvPr id="34" name="Text 31"/>
+          <p:cNvSpPr/>
+          <p:nvPr/>
+        </p:nvSpPr>
+        <p:spPr>
+          <a:xfrm>
+            <a:off x="6644488" y="4398264"/>
+            <a:ext cx="4605376" cy="1060704"/>
+          </a:xfrm>
+          <a:prstGeom prst="rect">
+            <a:avLst/>
+          </a:prstGeom>
+          <a:noFill/>
+          <a:ln/>
+        </p:spPr>
+        <p:txBody>
+          <a:bodyPr wrap="square" lIns="0" tIns="0" rIns="0" bIns="0" rtlCol="0" anchor="t"/>
+          <a:lstStyle/>
+          <a:p>
+            <a:pPr indent="0" marL="0">
+              <a:lnSpc>
+                <a:spcPct val="120000"/>
+              </a:lnSpc>
+              <a:buNone/>
+            </a:pPr>
+            <a:r>
+              <a:rPr lang="en-US" sz="930" dirty="0">
+                <a:solidFill>
+                  <a:srgbClr val="10161F"/>
+                </a:solidFill>
+                <a:latin typeface="Pretendard" pitchFamily="34" charset="0"/>
+                <a:ea typeface="Pretendard" pitchFamily="34" charset="-122"/>
+                <a:cs typeface="Pretendard" pitchFamily="34" charset="-120"/>
+              </a:rPr>
+              <a:t>차입 금리가 자산 총수익률을 상회하여 대출 실행 시 자기자본수익률이 하락할 수 있습니다. 에쿼티 비중 확대를 권장합니다.</a:t>
+            </a:r>
+            <a:endParaRPr lang="en-US" sz="930" dirty="0"/>
+          </a:p>
+        </p:txBody>
+      </p:sp>
+      <p:sp>
+        <p:nvSpPr>
+          <p:cNvPr id="35" name="Text 32"/>
+          <p:cNvSpPr/>
+          <p:nvPr/>
+        </p:nvSpPr>
+        <p:spPr>
+          <a:xfrm>
+            <a:off x="566928" y="6382512"/>
+            <a:ext cx="7315200" cy="219456"/>
+          </a:xfrm>
+          <a:prstGeom prst="rect">
+            <a:avLst/>
+          </a:prstGeom>
+          <a:noFill/>
+          <a:ln/>
+        </p:spPr>
+        <p:txBody>
+          <a:bodyPr wrap="square" lIns="0" tIns="0" rIns="0" bIns="0" rtlCol="0" anchor="ctr"/>
+          <a:lstStyle/>
+          <a:p>
+            <a:pPr indent="0" marL="0">
+              <a:buNone/>
+            </a:pPr>
+            <a:r>
+              <a:rPr lang="en-US" sz="800" dirty="0">
+                <a:solidFill>
+                  <a:srgbClr val="718096"/>
+                </a:solidFill>
+                <a:latin typeface="Pretendard" pitchFamily="34" charset="0"/>
+                <a:ea typeface="Pretendard" pitchFamily="34" charset="-122"/>
+                <a:cs typeface="Pretendard" pitchFamily="34" charset="-120"/>
+              </a:rPr>
+              <a:t>크리딜   |   </a:t>
+            </a:r>
+            <a:endParaRPr lang="en-US" sz="800" dirty="0"/>
+          </a:p>
+        </p:txBody>
+      </p:sp>
+      <p:sp>
+        <p:nvSpPr>
+          <p:cNvPr id="36" name="Text 33"/>
+          <p:cNvSpPr/>
+          <p:nvPr/>
+        </p:nvSpPr>
+        <p:spPr>
+          <a:xfrm>
+            <a:off x="10710367" y="6382512"/>
+            <a:ext cx="914400" cy="219456"/>
+          </a:xfrm>
+          <a:prstGeom prst="rect">
+            <a:avLst/>
+          </a:prstGeom>
+          <a:noFill/>
+          <a:ln/>
+        </p:spPr>
+        <p:txBody>
+          <a:bodyPr wrap="square" lIns="0" tIns="0" rIns="0" bIns="0" rtlCol="0" anchor="ctr"/>
+          <a:lstStyle/>
+          <a:p>
+            <a:pPr algn="r" indent="0" marL="0">
+              <a:buNone/>
+            </a:pPr>
+            <a:r>
+              <a:rPr lang="en-US" sz="900" b="1" dirty="0">
+                <a:solidFill>
+                  <a:srgbClr val="B98A2E"/>
+                </a:solidFill>
+                <a:latin typeface="Arial" pitchFamily="34" charset="0"/>
+                <a:ea typeface="Arial" pitchFamily="34" charset="-122"/>
+                <a:cs typeface="Arial" pitchFamily="34" charset="-120"/>
+              </a:rPr>
+              <a:t>9</a:t>
+            </a:r>
+            <a:endParaRPr lang="en-US" sz="900" dirty="0"/>
+          </a:p>
+        </p:txBody>
+      </p:sp>
+    </p:spTree>
+  </p:cSld>
+  <p:clrMapOvr>
+    <a:masterClrMapping/>
+  </p:clrMapOvr>
+</p:sld>
+</file>
+
+<file path=ppt/slides/slide11.xml><?xml version="1.0" encoding="utf-8"?>
+<p:sld xmlns:a="http://schemas.openxmlformats.org/drawingml/2006/main" xmlns:r="http://schemas.openxmlformats.org/officeDocument/2006/relationships" xmlns:p="http://schemas.openxmlformats.org/presentationml/2006/main">
+  <p:cSld name="Slide 11">
+    <p:bg>
+      <p:bgPr>
+        <a:solidFill>
+          <a:srgbClr val="FFFFFF"/>
+        </a:solidFill>
+      </p:bgPr>
+    </p:bg>
+    <p:spTree>
+      <p:nvGrpSpPr>
+        <p:cNvPr id="1" name=""/>
+        <p:cNvGrpSpPr/>
+        <p:nvPr/>
+      </p:nvGrpSpPr>
+      <p:grpSpPr>
+        <a:xfrm>
+          <a:off x="0" y="0"/>
+          <a:ext cx="0" cy="0"/>
+          <a:chOff x="0" y="0"/>
+          <a:chExt cx="0" cy="0"/>
+        </a:xfrm>
+      </p:grpSpPr>
+      <p:sp>
+        <p:nvSpPr>
+          <p:cNvPr id="2" name="Shape 0"/>
+          <p:cNvSpPr/>
+          <p:nvPr/>
+        </p:nvSpPr>
+        <p:spPr>
+          <a:xfrm>
+            <a:off x="566928" y="457200"/>
+            <a:ext cx="384048" cy="384048"/>
+          </a:xfrm>
+          <a:prstGeom prst="ellipse">
+            <a:avLst/>
+          </a:prstGeom>
+          <a:solidFill>
+            <a:srgbClr val="B98A2E"/>
+          </a:solidFill>
+          <a:ln/>
+        </p:spPr>
+      </p:sp>
+      <p:sp>
+        <p:nvSpPr>
+          <p:cNvPr id="3" name="Text 1"/>
+          <p:cNvSpPr/>
+          <p:nvPr/>
+        </p:nvSpPr>
+        <p:spPr>
+          <a:xfrm>
+            <a:off x="566928" y="457200"/>
+            <a:ext cx="384048" cy="384048"/>
+          </a:xfrm>
+          <a:prstGeom prst="rect">
+            <a:avLst/>
+          </a:prstGeom>
+          <a:noFill/>
+          <a:ln/>
+        </p:spPr>
+        <p:txBody>
+          <a:bodyPr wrap="square" lIns="0" tIns="0" rIns="0" bIns="0" rtlCol="0" anchor="ctr"/>
+          <a:lstStyle/>
+          <a:p>
+            <a:pPr algn="ctr" indent="0" marL="0">
+              <a:buNone/>
+            </a:pPr>
+            <a:r>
+              <a:rPr lang="en-US" sz="1300" b="1" dirty="0">
+                <a:solidFill>
+                  <a:srgbClr val="FFFFFF"/>
+                </a:solidFill>
+                <a:latin typeface="Arial" pitchFamily="34" charset="0"/>
+                <a:ea typeface="Arial" pitchFamily="34" charset="-122"/>
+                <a:cs typeface="Arial" pitchFamily="34" charset="-120"/>
+              </a:rPr>
+              <a:t>10</a:t>
+            </a:r>
+            <a:endParaRPr lang="en-US" sz="1300" dirty="0"/>
+          </a:p>
+        </p:txBody>
+      </p:sp>
+      <p:sp>
+        <p:nvSpPr>
+          <p:cNvPr id="4" name="Text 2"/>
+          <p:cNvSpPr/>
+          <p:nvPr/>
+        </p:nvSpPr>
+        <p:spPr>
+          <a:xfrm>
+            <a:off x="1133856" y="457200"/>
+            <a:ext cx="10490911" cy="182880"/>
+          </a:xfrm>
+          <a:prstGeom prst="rect">
+            <a:avLst/>
+          </a:prstGeom>
+          <a:noFill/>
+          <a:ln/>
+        </p:spPr>
+        <p:txBody>
+          <a:bodyPr wrap="square" lIns="0" tIns="0" rIns="0" bIns="0" rtlCol="0" anchor="ctr"/>
+          <a:lstStyle/>
+          <a:p>
+            <a:pPr indent="0" marL="0">
+              <a:buNone/>
+            </a:pPr>
+            <a:r>
+              <a:rPr lang="en-US" sz="950" b="1" spc="200" kern="0" dirty="0">
+                <a:solidFill>
+                  <a:srgbClr val="B98A2E"/>
+                </a:solidFill>
+                <a:latin typeface="Arial" pitchFamily="34" charset="0"/>
+                <a:ea typeface="Arial" pitchFamily="34" charset="-122"/>
+                <a:cs typeface="Arial" pitchFamily="34" charset="-120"/>
+              </a:rPr>
+              <a:t>Risk</a:t>
+            </a:r>
+            <a:endParaRPr lang="en-US" sz="950" dirty="0"/>
+          </a:p>
+        </p:txBody>
+      </p:sp>
+      <p:sp>
+        <p:nvSpPr>
+          <p:cNvPr id="5" name="Text 3"/>
+          <p:cNvSpPr/>
+          <p:nvPr/>
+        </p:nvSpPr>
+        <p:spPr>
+          <a:xfrm>
+            <a:off x="1133856" y="640080"/>
+            <a:ext cx="10490911" cy="365760"/>
+          </a:xfrm>
+          <a:prstGeom prst="rect">
+            <a:avLst/>
+          </a:prstGeom>
+          <a:noFill/>
+          <a:ln/>
+        </p:spPr>
+        <p:txBody>
+          <a:bodyPr wrap="square" lIns="0" tIns="0" rIns="0" bIns="0" rtlCol="0" anchor="ctr"/>
+          <a:lstStyle/>
+          <a:p>
+            <a:pPr indent="0" marL="0">
+              <a:buNone/>
+            </a:pPr>
+            <a:r>
+              <a:rPr lang="en-US" sz="2300" b="1" dirty="0">
+                <a:solidFill>
+                  <a:srgbClr val="10161F"/>
+                </a:solidFill>
+                <a:latin typeface="Pretendard" pitchFamily="34" charset="0"/>
+                <a:ea typeface="Pretendard" pitchFamily="34" charset="-122"/>
+                <a:cs typeface="Pretendard" pitchFamily="34" charset="-120"/>
+              </a:rPr>
+              <a:t>리스크는 무엇이고 대응책은 있는가</a:t>
+            </a:r>
+            <a:endParaRPr lang="en-US" sz="2300" dirty="0"/>
+          </a:p>
+        </p:txBody>
+      </p:sp>
+      <p:sp>
+        <p:nvSpPr>
+          <p:cNvPr id="6" name="Shape 4"/>
+          <p:cNvSpPr/>
+          <p:nvPr/>
+        </p:nvSpPr>
+        <p:spPr>
+          <a:xfrm>
+            <a:off x="566928" y="1417320"/>
+            <a:ext cx="11057839" cy="3657600"/>
+          </a:xfrm>
+          <a:prstGeom prst="roundRect">
+            <a:avLst>
+              <a:gd name="adj" fmla="val 1500"/>
+            </a:avLst>
+          </a:prstGeom>
+          <a:solidFill>
+            <a:srgbClr val="F7FAFC"/>
+          </a:solidFill>
+          <a:ln w="6350">
+            <a:solidFill>
+              <a:srgbClr val="CBD5E0"/>
+            </a:solidFill>
+            <a:prstDash val="solid"/>
+          </a:ln>
+        </p:spPr>
+      </p:sp>
+      <p:sp>
+        <p:nvSpPr>
+          <p:cNvPr id="7" name="Shape 5"/>
+          <p:cNvSpPr/>
+          <p:nvPr/>
+        </p:nvSpPr>
+        <p:spPr>
+          <a:xfrm>
+            <a:off x="566928" y="1417320"/>
+            <a:ext cx="11057839" cy="45720"/>
+          </a:xfrm>
+          <a:prstGeom prst="rect">
+            <a:avLst/>
+          </a:prstGeom>
+          <a:solidFill>
+            <a:srgbClr val="B98A2E"/>
+          </a:solidFill>
+          <a:ln/>
+        </p:spPr>
+      </p:sp>
+      <p:sp>
+        <p:nvSpPr>
+          <p:cNvPr id="8" name="Text 6"/>
+          <p:cNvSpPr/>
+          <p:nvPr/>
+        </p:nvSpPr>
+        <p:spPr>
+          <a:xfrm>
+            <a:off x="795528" y="1618488"/>
+            <a:ext cx="10600639" cy="292608"/>
+          </a:xfrm>
+          <a:prstGeom prst="rect">
+            <a:avLst/>
+          </a:prstGeom>
+          <a:noFill/>
+          <a:ln/>
+        </p:spPr>
+        <p:txBody>
+          <a:bodyPr wrap="square" lIns="0" tIns="0" rIns="0" bIns="0" rtlCol="0" anchor="ctr"/>
+          <a:lstStyle/>
+          <a:p>
+            <a:pPr indent="0" marL="0">
+              <a:buNone/>
+            </a:pPr>
+            <a:r>
+              <a:rPr lang="en-US" sz="1350" b="1" dirty="0">
+                <a:solidFill>
+                  <a:srgbClr val="977024"/>
+                </a:solidFill>
+                <a:latin typeface="Pretendard" pitchFamily="34" charset="0"/>
+                <a:ea typeface="Pretendard" pitchFamily="34" charset="-122"/>
+                <a:cs typeface="Pretendard" pitchFamily="34" charset="-120"/>
+              </a:rPr>
+              <a:t>용도 리스크</a:t>
+            </a:r>
+            <a:endParaRPr lang="en-US" sz="1350" dirty="0"/>
+          </a:p>
+        </p:txBody>
+      </p:sp>
+      <p:sp>
+        <p:nvSpPr>
+          <p:cNvPr id="9" name="Text 7"/>
+          <p:cNvSpPr/>
+          <p:nvPr/>
+        </p:nvSpPr>
+        <p:spPr>
+          <a:xfrm>
+            <a:off x="795528" y="1947672"/>
+            <a:ext cx="10600639" cy="365760"/>
+          </a:xfrm>
+          <a:prstGeom prst="rect">
+            <a:avLst/>
+          </a:prstGeom>
+          <a:noFill/>
+          <a:ln/>
+        </p:spPr>
+        <p:txBody>
+          <a:bodyPr wrap="square" lIns="0" tIns="0" rIns="0" bIns="0" rtlCol="0" anchor="ctr">
+            <a:normAutofit/>
+          </a:bodyPr>
+          <a:lstStyle/>
+          <a:p>
+            <a:pPr indent="0" marL="0">
+              <a:buNone/>
+            </a:pPr>
+            <a:r>
+              <a:rPr lang="en-US" sz="1250" b="1" dirty="0">
+                <a:solidFill>
+                  <a:srgbClr val="10161F"/>
+                </a:solidFill>
+                <a:latin typeface="Pretendard" pitchFamily="34" charset="0"/>
+                <a:ea typeface="Pretendard" pitchFamily="34" charset="-122"/>
+                <a:cs typeface="Pretendard" pitchFamily="34" charset="-120"/>
+              </a:rPr>
+              <a:t>—</a:t>
+            </a:r>
+            <a:endParaRPr lang="en-US" sz="1250" dirty="0"/>
+          </a:p>
+        </p:txBody>
+      </p:sp>
+      <p:sp>
+        <p:nvSpPr>
+          <p:cNvPr id="10" name="Text 8"/>
+          <p:cNvSpPr/>
+          <p:nvPr/>
+        </p:nvSpPr>
+        <p:spPr>
+          <a:xfrm>
+            <a:off x="795528" y="2377440"/>
+            <a:ext cx="10600639" cy="2606040"/>
+          </a:xfrm>
+          <a:prstGeom prst="rect">
+            <a:avLst/>
+          </a:prstGeom>
+          <a:noFill/>
+          <a:ln/>
+        </p:spPr>
+        <p:txBody>
+          <a:bodyPr wrap="square" lIns="0" tIns="0" rIns="0" bIns="0" rtlCol="0" anchor="t">
+            <a:normAutofit/>
+          </a:bodyPr>
+          <a:lstStyle/>
+          <a:p>
+            <a:pPr marL="342900" indent="-342900">
+              <a:lnSpc>
+                <a:spcPct val="125000"/>
+              </a:lnSpc>
+              <a:buSzPct val="100000"/>
+              <a:buChar char="•"/>
+            </a:pPr>
+            <a:r>
+              <a:rPr lang="en-US" sz="1100" dirty="0">
+                <a:solidFill>
+                  <a:srgbClr val="10161F"/>
+                </a:solidFill>
+                <a:latin typeface="Pretendard" pitchFamily="34" charset="0"/>
+                <a:ea typeface="Pretendard" pitchFamily="34" charset="-122"/>
+                <a:cs typeface="Pretendard" pitchFamily="34" charset="-120"/>
+              </a:rPr>
+              <a:t>{"ok":true,"mocked":true,"extractedFields":{"area_signal":"역삼","asset_type":"[건물명 비공개]","price_band":"300억","size_signal":"3000평(약 9917.4㎡)"},"extractedFacts":{"region":"역삼","exactAddressCandidate":"역</a:t>
+            </a:r>
+            <a:endParaRPr lang="en-US" sz="1100" dirty="0"/>
+          </a:p>
+        </p:txBody>
+      </p:sp>
+      <p:sp>
+        <p:nvSpPr>
+          <p:cNvPr id="11" name="Shape 9"/>
+          <p:cNvSpPr/>
+          <p:nvPr/>
+        </p:nvSpPr>
+        <p:spPr>
+          <a:xfrm>
+            <a:off x="566928" y="5193792"/>
+            <a:ext cx="11057839" cy="621792"/>
+          </a:xfrm>
+          <a:prstGeom prst="roundRect">
+            <a:avLst>
+              <a:gd name="adj" fmla="val 8824"/>
+            </a:avLst>
+          </a:prstGeom>
+          <a:solidFill>
+            <a:srgbClr val="F7FAFC"/>
+          </a:solidFill>
+          <a:ln w="6350">
+            <a:solidFill>
+              <a:srgbClr val="CBD5E0"/>
+            </a:solidFill>
+            <a:prstDash val="solid"/>
+          </a:ln>
+        </p:spPr>
+      </p:sp>
+      <p:sp>
+        <p:nvSpPr>
+          <p:cNvPr id="12" name="Text 10"/>
+          <p:cNvSpPr/>
+          <p:nvPr/>
+        </p:nvSpPr>
+        <p:spPr>
+          <a:xfrm>
+            <a:off x="795528" y="5193792"/>
+            <a:ext cx="10600639" cy="621792"/>
+          </a:xfrm>
+          <a:prstGeom prst="rect">
+            <a:avLst/>
+          </a:prstGeom>
+          <a:noFill/>
+          <a:ln/>
+        </p:spPr>
+        <p:txBody>
+          <a:bodyPr wrap="square" lIns="0" tIns="0" rIns="0" bIns="0" rtlCol="0" anchor="ctr"/>
+          <a:lstStyle/>
+          <a:p>
+            <a:pPr indent="0" marL="0">
+              <a:buNone/>
+            </a:pPr>
+            <a:r>
+              <a:rPr lang="en-US" sz="1100" dirty="0">
+                <a:solidFill>
+                  <a:srgbClr val="10161F"/>
+                </a:solidFill>
+                <a:latin typeface="Pretendard" pitchFamily="34" charset="0"/>
+                <a:ea typeface="Pretendard" pitchFamily="34" charset="-122"/>
+                <a:cs typeface="Pretendard" pitchFamily="34" charset="-120"/>
+              </a:rPr>
+              <a:t>※ 본 리스크 체크는 공부 및 브로커 확인 기반이며, 매수 전 전문 실사팀(변호사/건축사)을 통한 정밀 실사가 필요합니다.</a:t>
+            </a:r>
+            <a:endParaRPr lang="en-US" sz="1100" dirty="0"/>
+          </a:p>
+        </p:txBody>
+      </p:sp>
+      <p:sp>
+        <p:nvSpPr>
+          <p:cNvPr id="13" name="Text 11"/>
+          <p:cNvSpPr/>
+          <p:nvPr/>
+        </p:nvSpPr>
+        <p:spPr>
+          <a:xfrm>
+            <a:off x="566928" y="6382512"/>
+            <a:ext cx="7315200" cy="219456"/>
+          </a:xfrm>
+          <a:prstGeom prst="rect">
+            <a:avLst/>
+          </a:prstGeom>
+          <a:noFill/>
+          <a:ln/>
+        </p:spPr>
+        <p:txBody>
+          <a:bodyPr wrap="square" lIns="0" tIns="0" rIns="0" bIns="0" rtlCol="0" anchor="ctr"/>
+          <a:lstStyle/>
+          <a:p>
+            <a:pPr indent="0" marL="0">
+              <a:buNone/>
+            </a:pPr>
+            <a:r>
+              <a:rPr lang="en-US" sz="800" dirty="0">
+                <a:solidFill>
+                  <a:srgbClr val="718096"/>
+                </a:solidFill>
+                <a:latin typeface="Pretendard" pitchFamily="34" charset="0"/>
+                <a:ea typeface="Pretendard" pitchFamily="34" charset="-122"/>
+                <a:cs typeface="Pretendard" pitchFamily="34" charset="-120"/>
+              </a:rPr>
+              <a:t>크리딜   |   </a:t>
+            </a:r>
+            <a:endParaRPr lang="en-US" sz="800" dirty="0"/>
+          </a:p>
+        </p:txBody>
+      </p:sp>
+      <p:sp>
+        <p:nvSpPr>
+          <p:cNvPr id="14" name="Text 12"/>
+          <p:cNvSpPr/>
+          <p:nvPr/>
+        </p:nvSpPr>
+        <p:spPr>
+          <a:xfrm>
+            <a:off x="10710367" y="6382512"/>
+            <a:ext cx="914400" cy="219456"/>
+          </a:xfrm>
+          <a:prstGeom prst="rect">
+            <a:avLst/>
+          </a:prstGeom>
+          <a:noFill/>
+          <a:ln/>
+        </p:spPr>
+        <p:txBody>
+          <a:bodyPr wrap="square" lIns="0" tIns="0" rIns="0" bIns="0" rtlCol="0" anchor="ctr"/>
+          <a:lstStyle/>
+          <a:p>
+            <a:pPr algn="r" indent="0" marL="0">
+              <a:buNone/>
+            </a:pPr>
+            <a:r>
+              <a:rPr lang="en-US" sz="900" b="1" dirty="0">
+                <a:solidFill>
+                  <a:srgbClr val="B98A2E"/>
+                </a:solidFill>
+                <a:latin typeface="Arial" pitchFamily="34" charset="0"/>
+                <a:ea typeface="Arial" pitchFamily="34" charset="-122"/>
+                <a:cs typeface="Arial" pitchFamily="34" charset="-120"/>
+              </a:rPr>
+              <a:t>10</a:t>
+            </a:r>
+            <a:endParaRPr lang="en-US" sz="900" dirty="0"/>
+          </a:p>
+        </p:txBody>
+      </p:sp>
+    </p:spTree>
+  </p:cSld>
+  <p:clrMapOvr>
+    <a:masterClrMapping/>
+  </p:clrMapOvr>
+</p:sld>
+</file>
+
+<file path=ppt/slides/slide12.xml><?xml version="1.0" encoding="utf-8"?>
+<p:sld xmlns:a="http://schemas.openxmlformats.org/drawingml/2006/main" xmlns:r="http://schemas.openxmlformats.org/officeDocument/2006/relationships" xmlns:p="http://schemas.openxmlformats.org/presentationml/2006/main">
+  <p:cSld name="Slide 12">
+    <p:bg>
+      <p:bgPr>
+        <a:solidFill>
+          <a:srgbClr val="FFFFFF"/>
+        </a:solidFill>
+      </p:bgPr>
+    </p:bg>
+    <p:spTree>
+      <p:nvGrpSpPr>
+        <p:cNvPr id="1" name=""/>
+        <p:cNvGrpSpPr/>
+        <p:nvPr/>
+      </p:nvGrpSpPr>
+      <p:grpSpPr>
+        <a:xfrm>
+          <a:off x="0" y="0"/>
+          <a:ext cx="0" cy="0"/>
+          <a:chOff x="0" y="0"/>
+          <a:chExt cx="0" cy="0"/>
+        </a:xfrm>
+      </p:grpSpPr>
+      <p:sp>
+        <p:nvSpPr>
+          <p:cNvPr id="2" name="Shape 0"/>
+          <p:cNvSpPr/>
+          <p:nvPr/>
+        </p:nvSpPr>
+        <p:spPr>
+          <a:xfrm>
+            <a:off x="566928" y="457200"/>
+            <a:ext cx="384048" cy="384048"/>
+          </a:xfrm>
+          <a:prstGeom prst="ellipse">
+            <a:avLst/>
+          </a:prstGeom>
+          <a:solidFill>
+            <a:srgbClr val="B98A2E"/>
+          </a:solidFill>
+          <a:ln/>
+        </p:spPr>
+      </p:sp>
+      <p:sp>
+        <p:nvSpPr>
+          <p:cNvPr id="3" name="Text 1"/>
+          <p:cNvSpPr/>
+          <p:nvPr/>
+        </p:nvSpPr>
+        <p:spPr>
+          <a:xfrm>
+            <a:off x="566928" y="457200"/>
+            <a:ext cx="384048" cy="384048"/>
+          </a:xfrm>
+          <a:prstGeom prst="rect">
+            <a:avLst/>
+          </a:prstGeom>
+          <a:noFill/>
+          <a:ln/>
+        </p:spPr>
+        <p:txBody>
+          <a:bodyPr wrap="square" lIns="0" tIns="0" rIns="0" bIns="0" rtlCol="0" anchor="ctr"/>
+          <a:lstStyle/>
+          <a:p>
+            <a:pPr algn="ctr" indent="0" marL="0">
+              <a:buNone/>
+            </a:pPr>
+            <a:r>
+              <a:rPr lang="en-US" sz="1300" b="1" dirty="0">
+                <a:solidFill>
+                  <a:srgbClr val="FFFFFF"/>
+                </a:solidFill>
+                <a:latin typeface="Arial" pitchFamily="34" charset="0"/>
+                <a:ea typeface="Arial" pitchFamily="34" charset="-122"/>
+                <a:cs typeface="Arial" pitchFamily="34" charset="-120"/>
+              </a:rPr>
+              <a:t>11</a:t>
+            </a:r>
+            <a:endParaRPr lang="en-US" sz="1300" dirty="0"/>
+          </a:p>
+        </p:txBody>
+      </p:sp>
+      <p:sp>
+        <p:nvSpPr>
+          <p:cNvPr id="4" name="Text 2"/>
+          <p:cNvSpPr/>
+          <p:nvPr/>
+        </p:nvSpPr>
+        <p:spPr>
+          <a:xfrm>
+            <a:off x="1133856" y="457200"/>
+            <a:ext cx="10490911" cy="182880"/>
+          </a:xfrm>
+          <a:prstGeom prst="rect">
+            <a:avLst/>
+          </a:prstGeom>
+          <a:noFill/>
+          <a:ln/>
+        </p:spPr>
+        <p:txBody>
+          <a:bodyPr wrap="square" lIns="0" tIns="0" rIns="0" bIns="0" rtlCol="0" anchor="ctr"/>
+          <a:lstStyle/>
+          <a:p>
+            <a:pPr indent="0" marL="0">
+              <a:buNone/>
+            </a:pPr>
+            <a:r>
+              <a:rPr lang="en-US" sz="950" b="1" spc="200" kern="0" dirty="0">
+                <a:solidFill>
+                  <a:srgbClr val="B98A2E"/>
+                </a:solidFill>
+                <a:latin typeface="Arial" pitchFamily="34" charset="0"/>
+                <a:ea typeface="Arial" pitchFamily="34" charset="-122"/>
+                <a:cs typeface="Arial" pitchFamily="34" charset="-120"/>
+              </a:rPr>
+              <a:t>Checklist</a:t>
+            </a:r>
+            <a:endParaRPr lang="en-US" sz="950" dirty="0"/>
+          </a:p>
+        </p:txBody>
+      </p:sp>
+      <p:sp>
+        <p:nvSpPr>
+          <p:cNvPr id="5" name="Text 3"/>
+          <p:cNvSpPr/>
+          <p:nvPr/>
+        </p:nvSpPr>
+        <p:spPr>
+          <a:xfrm>
+            <a:off x="1133856" y="640080"/>
+            <a:ext cx="10490911" cy="365760"/>
+          </a:xfrm>
+          <a:prstGeom prst="rect">
+            <a:avLst/>
+          </a:prstGeom>
+          <a:noFill/>
+          <a:ln/>
+        </p:spPr>
+        <p:txBody>
+          <a:bodyPr wrap="square" lIns="0" tIns="0" rIns="0" bIns="0" rtlCol="0" anchor="ctr"/>
+          <a:lstStyle/>
+          <a:p>
+            <a:pPr indent="0" marL="0">
+              <a:buNone/>
+            </a:pPr>
+            <a:r>
+              <a:rPr lang="en-US" sz="2300" b="1" dirty="0">
+                <a:solidFill>
+                  <a:srgbClr val="10161F"/>
+                </a:solidFill>
+                <a:latin typeface="Pretendard" pitchFamily="34" charset="0"/>
+                <a:ea typeface="Pretendard" pitchFamily="34" charset="-122"/>
+                <a:cs typeface="Pretendard" pitchFamily="34" charset="-120"/>
+              </a:rPr>
+              <a:t>실사 및 확인 필요사항</a:t>
+            </a:r>
+            <a:endParaRPr lang="en-US" sz="2300" dirty="0"/>
+          </a:p>
+        </p:txBody>
+      </p:sp>
+      <p:sp>
+        <p:nvSpPr>
+          <p:cNvPr id="6" name="Text 4"/>
+          <p:cNvSpPr/>
+          <p:nvPr/>
+        </p:nvSpPr>
+        <p:spPr>
+          <a:xfrm>
+            <a:off x="566928" y="1371600"/>
+            <a:ext cx="11057839" cy="237744"/>
+          </a:xfrm>
+          <a:prstGeom prst="rect">
+            <a:avLst/>
+          </a:prstGeom>
+          <a:noFill/>
+          <a:ln/>
+        </p:spPr>
+        <p:txBody>
+          <a:bodyPr wrap="square" lIns="0" tIns="0" rIns="0" bIns="0" rtlCol="0" anchor="ctr"/>
+          <a:lstStyle/>
+          <a:p>
+            <a:pPr indent="0" marL="0">
+              <a:buNone/>
+            </a:pPr>
+            <a:r>
+              <a:rPr lang="en-US" sz="1100" b="1" dirty="0">
+                <a:solidFill>
+                  <a:srgbClr val="10161F"/>
+                </a:solidFill>
+                <a:latin typeface="Pretendard" pitchFamily="34" charset="0"/>
+                <a:ea typeface="Pretendard" pitchFamily="34" charset="-122"/>
+                <a:cs typeface="Pretendard" pitchFamily="34" charset="-120"/>
+              </a:rPr>
+              <a:t>거래 안정성 확보를 위한 필수 법률·물리·임대차 실사 점검 항목 (총 6건)</a:t>
+            </a:r>
+            <a:endParaRPr lang="en-US" sz="1100" dirty="0"/>
+          </a:p>
+        </p:txBody>
+      </p:sp>
+      <p:sp>
+        <p:nvSpPr>
+          <p:cNvPr id="7" name="Shape 5"/>
+          <p:cNvSpPr/>
+          <p:nvPr/>
+        </p:nvSpPr>
+        <p:spPr>
+          <a:xfrm>
+            <a:off x="566928" y="1719072"/>
+            <a:ext cx="5368900" cy="868680"/>
+          </a:xfrm>
+          <a:prstGeom prst="rect">
+            <a:avLst/>
+          </a:prstGeom>
+          <a:solidFill>
+            <a:srgbClr val="F7FAFC"/>
+          </a:solidFill>
+          <a:ln w="6350">
+            <a:solidFill>
+              <a:srgbClr val="D9B668"/>
+            </a:solidFill>
+            <a:prstDash val="solid"/>
+          </a:ln>
+        </p:spPr>
+      </p:sp>
+      <p:sp>
+        <p:nvSpPr>
+          <p:cNvPr id="8" name="Shape 6"/>
+          <p:cNvSpPr/>
+          <p:nvPr/>
+        </p:nvSpPr>
+        <p:spPr>
+          <a:xfrm>
+            <a:off x="704088" y="1883664"/>
+            <a:ext cx="320040" cy="320040"/>
+          </a:xfrm>
+          <a:prstGeom prst="rect">
+            <a:avLst/>
+          </a:prstGeom>
+          <a:solidFill>
+            <a:srgbClr val="977024"/>
+          </a:solidFill>
+          <a:ln/>
+        </p:spPr>
+      </p:sp>
+      <p:sp>
+        <p:nvSpPr>
+          <p:cNvPr id="9" name="Text 7"/>
+          <p:cNvSpPr/>
+          <p:nvPr/>
+        </p:nvSpPr>
+        <p:spPr>
+          <a:xfrm>
+            <a:off x="704088" y="1883664"/>
+            <a:ext cx="320040" cy="320040"/>
+          </a:xfrm>
+          <a:prstGeom prst="rect">
+            <a:avLst/>
+          </a:prstGeom>
+          <a:noFill/>
+          <a:ln/>
+        </p:spPr>
+        <p:txBody>
+          <a:bodyPr wrap="square" rtlCol="0" anchor="ctr"/>
+          <a:lstStyle/>
+          <a:p>
+            <a:pPr algn="ctr" indent="0" marL="0">
+              <a:buNone/>
+            </a:pPr>
+            <a:r>
+              <a:rPr lang="en-US" sz="1100" b="1" dirty="0">
+                <a:solidFill>
+                  <a:srgbClr val="000000"/>
+                </a:solidFill>
+                <a:latin typeface="Pretendard" pitchFamily="34" charset="0"/>
+                <a:ea typeface="Pretendard" pitchFamily="34" charset="-122"/>
+                <a:cs typeface="Pretendard" pitchFamily="34" charset="-120"/>
+              </a:rPr>
+              <a:t>✓</a:t>
+            </a:r>
+            <a:endParaRPr lang="en-US" sz="1100" dirty="0"/>
+          </a:p>
+        </p:txBody>
+      </p:sp>
+      <p:sp>
+        <p:nvSpPr>
+          <p:cNvPr id="10" name="Text 8"/>
+          <p:cNvSpPr/>
+          <p:nvPr/>
+        </p:nvSpPr>
+        <p:spPr>
+          <a:xfrm>
+            <a:off x="1115568" y="1828800"/>
+            <a:ext cx="4683100" cy="685800"/>
+          </a:xfrm>
+          <a:prstGeom prst="rect">
+            <a:avLst/>
+          </a:prstGeom>
+          <a:noFill/>
+          <a:ln/>
+        </p:spPr>
+        <p:txBody>
+          <a:bodyPr wrap="square" rtlCol="0" anchor="ctr"/>
+          <a:lstStyle/>
+          <a:p>
+            <a:pPr indent="0" marL="0">
+              <a:lnSpc>
+                <a:spcPct val="115000"/>
+              </a:lnSpc>
+              <a:buNone/>
+            </a:pPr>
+            <a:r>
+              <a:rPr lang="en-US" sz="1050" dirty="0">
+                <a:solidFill>
+                  <a:srgbClr val="10161F"/>
+                </a:solidFill>
+                <a:latin typeface="Pretendard" pitchFamily="34" charset="0"/>
+                <a:ea typeface="Pretendard" pitchFamily="34" charset="-122"/>
+                <a:cs typeface="Pretendard" pitchFamily="34" charset="-120"/>
+              </a:rPr>
+              <a:t>등기부등본 갑구/을구 권리관계 및 근저당 채권최고액 전액 말소 조건 원본 대조</a:t>
+            </a:r>
+            <a:endParaRPr lang="en-US" sz="1050" dirty="0"/>
+          </a:p>
+        </p:txBody>
+      </p:sp>
+      <p:sp>
+        <p:nvSpPr>
+          <p:cNvPr id="11" name="Shape 9"/>
+          <p:cNvSpPr/>
+          <p:nvPr/>
+        </p:nvSpPr>
+        <p:spPr>
+          <a:xfrm>
+            <a:off x="566928" y="2715768"/>
+            <a:ext cx="5368900" cy="868680"/>
+          </a:xfrm>
+          <a:prstGeom prst="rect">
+            <a:avLst/>
+          </a:prstGeom>
+          <a:solidFill>
+            <a:srgbClr val="F7FAFC"/>
+          </a:solidFill>
+          <a:ln w="6350">
+            <a:solidFill>
+              <a:srgbClr val="D9B668"/>
+            </a:solidFill>
+            <a:prstDash val="solid"/>
+          </a:ln>
+        </p:spPr>
+      </p:sp>
+      <p:sp>
+        <p:nvSpPr>
+          <p:cNvPr id="12" name="Shape 10"/>
+          <p:cNvSpPr/>
+          <p:nvPr/>
+        </p:nvSpPr>
+        <p:spPr>
+          <a:xfrm>
+            <a:off x="704088" y="2880360"/>
+            <a:ext cx="320040" cy="320040"/>
+          </a:xfrm>
+          <a:prstGeom prst="rect">
+            <a:avLst/>
+          </a:prstGeom>
+          <a:solidFill>
+            <a:srgbClr val="977024"/>
+          </a:solidFill>
+          <a:ln/>
+        </p:spPr>
+      </p:sp>
+      <p:sp>
+        <p:nvSpPr>
+          <p:cNvPr id="13" name="Text 11"/>
+          <p:cNvSpPr/>
+          <p:nvPr/>
+        </p:nvSpPr>
+        <p:spPr>
+          <a:xfrm>
+            <a:off x="704088" y="2880360"/>
+            <a:ext cx="320040" cy="320040"/>
+          </a:xfrm>
+          <a:prstGeom prst="rect">
+            <a:avLst/>
+          </a:prstGeom>
+          <a:noFill/>
+          <a:ln/>
+        </p:spPr>
+        <p:txBody>
+          <a:bodyPr wrap="square" rtlCol="0" anchor="ctr"/>
+          <a:lstStyle/>
+          <a:p>
+            <a:pPr algn="ctr" indent="0" marL="0">
+              <a:buNone/>
+            </a:pPr>
+            <a:r>
+              <a:rPr lang="en-US" sz="1100" b="1" dirty="0">
+                <a:solidFill>
+                  <a:srgbClr val="000000"/>
+                </a:solidFill>
+                <a:latin typeface="Pretendard" pitchFamily="34" charset="0"/>
+                <a:ea typeface="Pretendard" pitchFamily="34" charset="-122"/>
+                <a:cs typeface="Pretendard" pitchFamily="34" charset="-120"/>
+              </a:rPr>
+              <a:t>✓</a:t>
+            </a:r>
+            <a:endParaRPr lang="en-US" sz="1100" dirty="0"/>
+          </a:p>
+        </p:txBody>
+      </p:sp>
+      <p:sp>
+        <p:nvSpPr>
+          <p:cNvPr id="14" name="Text 12"/>
+          <p:cNvSpPr/>
+          <p:nvPr/>
+        </p:nvSpPr>
+        <p:spPr>
+          <a:xfrm>
+            <a:off x="1115568" y="2825496"/>
+            <a:ext cx="4683100" cy="685800"/>
+          </a:xfrm>
+          <a:prstGeom prst="rect">
+            <a:avLst/>
+          </a:prstGeom>
+          <a:noFill/>
+          <a:ln/>
+        </p:spPr>
+        <p:txBody>
+          <a:bodyPr wrap="square" rtlCol="0" anchor="ctr"/>
+          <a:lstStyle/>
+          <a:p>
+            <a:pPr indent="0" marL="0">
+              <a:lnSpc>
+                <a:spcPct val="115000"/>
+              </a:lnSpc>
+              <a:buNone/>
+            </a:pPr>
+            <a:r>
+              <a:rPr lang="en-US" sz="1050" dirty="0">
+                <a:solidFill>
+                  <a:srgbClr val="10161F"/>
+                </a:solidFill>
+                <a:latin typeface="Pretendard" pitchFamily="34" charset="0"/>
+                <a:ea typeface="Pretendard" pitchFamily="34" charset="-122"/>
+                <a:cs typeface="Pretendard" pitchFamily="34" charset="-120"/>
+              </a:rPr>
+              <a:t>임대차 원본 계약서 대조 (보증금, 월임대료, 관리비 실입금 내역 및 제소전화해조서)</a:t>
+            </a:r>
+            <a:endParaRPr lang="en-US" sz="1050" dirty="0"/>
+          </a:p>
+        </p:txBody>
+      </p:sp>
+      <p:sp>
+        <p:nvSpPr>
+          <p:cNvPr id="15" name="Shape 13"/>
+          <p:cNvSpPr/>
+          <p:nvPr/>
+        </p:nvSpPr>
+        <p:spPr>
+          <a:xfrm>
+            <a:off x="566928" y="3712464"/>
+            <a:ext cx="5368900" cy="868680"/>
+          </a:xfrm>
+          <a:prstGeom prst="rect">
+            <a:avLst/>
+          </a:prstGeom>
+          <a:solidFill>
+            <a:srgbClr val="F7FAFC"/>
+          </a:solidFill>
+          <a:ln w="6350">
+            <a:solidFill>
+              <a:srgbClr val="D9B668"/>
+            </a:solidFill>
+            <a:prstDash val="solid"/>
+          </a:ln>
+        </p:spPr>
+      </p:sp>
+      <p:sp>
+        <p:nvSpPr>
+          <p:cNvPr id="16" name="Shape 14"/>
+          <p:cNvSpPr/>
+          <p:nvPr/>
+        </p:nvSpPr>
+        <p:spPr>
+          <a:xfrm>
+            <a:off x="704088" y="3877056"/>
+            <a:ext cx="320040" cy="320040"/>
+          </a:xfrm>
+          <a:prstGeom prst="rect">
+            <a:avLst/>
+          </a:prstGeom>
+          <a:solidFill>
+            <a:srgbClr val="977024"/>
+          </a:solidFill>
+          <a:ln/>
+        </p:spPr>
+      </p:sp>
+      <p:sp>
+        <p:nvSpPr>
+          <p:cNvPr id="17" name="Text 15"/>
+          <p:cNvSpPr/>
+          <p:nvPr/>
+        </p:nvSpPr>
+        <p:spPr>
+          <a:xfrm>
+            <a:off x="704088" y="3877056"/>
+            <a:ext cx="320040" cy="320040"/>
+          </a:xfrm>
+          <a:prstGeom prst="rect">
+            <a:avLst/>
+          </a:prstGeom>
+          <a:noFill/>
+          <a:ln/>
+        </p:spPr>
+        <p:txBody>
+          <a:bodyPr wrap="square" rtlCol="0" anchor="ctr"/>
+          <a:lstStyle/>
+          <a:p>
+            <a:pPr algn="ctr" indent="0" marL="0">
+              <a:buNone/>
+            </a:pPr>
+            <a:r>
+              <a:rPr lang="en-US" sz="1100" b="1" dirty="0">
+                <a:solidFill>
+                  <a:srgbClr val="000000"/>
+                </a:solidFill>
+                <a:latin typeface="Pretendard" pitchFamily="34" charset="0"/>
+                <a:ea typeface="Pretendard" pitchFamily="34" charset="-122"/>
+                <a:cs typeface="Pretendard" pitchFamily="34" charset="-120"/>
+              </a:rPr>
+              <a:t>✓</a:t>
+            </a:r>
+            <a:endParaRPr lang="en-US" sz="1100" dirty="0"/>
+          </a:p>
+        </p:txBody>
+      </p:sp>
+      <p:sp>
+        <p:nvSpPr>
+          <p:cNvPr id="18" name="Text 16"/>
+          <p:cNvSpPr/>
+          <p:nvPr/>
+        </p:nvSpPr>
+        <p:spPr>
+          <a:xfrm>
+            <a:off x="1115568" y="3822192"/>
+            <a:ext cx="4683100" cy="685800"/>
+          </a:xfrm>
+          <a:prstGeom prst="rect">
+            <a:avLst/>
+          </a:prstGeom>
+          <a:noFill/>
+          <a:ln/>
+        </p:spPr>
+        <p:txBody>
+          <a:bodyPr wrap="square" rtlCol="0" anchor="ctr"/>
+          <a:lstStyle/>
+          <a:p>
+            <a:pPr indent="0" marL="0">
+              <a:lnSpc>
+                <a:spcPct val="115000"/>
+              </a:lnSpc>
+              <a:buNone/>
+            </a:pPr>
+            <a:r>
+              <a:rPr lang="en-US" sz="1050" dirty="0">
+                <a:solidFill>
+                  <a:srgbClr val="10161F"/>
+                </a:solidFill>
+                <a:latin typeface="Pretendard" pitchFamily="34" charset="0"/>
+                <a:ea typeface="Pretendard" pitchFamily="34" charset="-122"/>
+                <a:cs typeface="Pretendard" pitchFamily="34" charset="-120"/>
+              </a:rPr>
+              <a:t>건축물대장상 위반건축물 등재 여부 및 불법 증축·용도변경 이행강제금 납부 이력 점검</a:t>
+            </a:r>
+            <a:endParaRPr lang="en-US" sz="1050" dirty="0"/>
+          </a:p>
+        </p:txBody>
+      </p:sp>
+      <p:sp>
+        <p:nvSpPr>
+          <p:cNvPr id="19" name="Shape 17"/>
+          <p:cNvSpPr/>
+          <p:nvPr/>
+        </p:nvSpPr>
+        <p:spPr>
+          <a:xfrm>
+            <a:off x="6255868" y="1719072"/>
+            <a:ext cx="5368900" cy="868680"/>
+          </a:xfrm>
+          <a:prstGeom prst="rect">
+            <a:avLst/>
+          </a:prstGeom>
+          <a:solidFill>
+            <a:srgbClr val="F7FAFC"/>
+          </a:solidFill>
+          <a:ln w="6350">
+            <a:solidFill>
+              <a:srgbClr val="D9B668"/>
+            </a:solidFill>
+            <a:prstDash val="solid"/>
+          </a:ln>
+        </p:spPr>
+      </p:sp>
+      <p:sp>
+        <p:nvSpPr>
+          <p:cNvPr id="20" name="Shape 18"/>
+          <p:cNvSpPr/>
+          <p:nvPr/>
+        </p:nvSpPr>
+        <p:spPr>
+          <a:xfrm>
+            <a:off x="6393028" y="1883664"/>
+            <a:ext cx="320040" cy="320040"/>
+          </a:xfrm>
+          <a:prstGeom prst="rect">
+            <a:avLst/>
+          </a:prstGeom>
+          <a:solidFill>
+            <a:srgbClr val="977024"/>
+          </a:solidFill>
+          <a:ln/>
+        </p:spPr>
+      </p:sp>
+      <p:sp>
+        <p:nvSpPr>
+          <p:cNvPr id="21" name="Text 19"/>
+          <p:cNvSpPr/>
+          <p:nvPr/>
+        </p:nvSpPr>
+        <p:spPr>
+          <a:xfrm>
+            <a:off x="6393028" y="1883664"/>
+            <a:ext cx="320040" cy="320040"/>
+          </a:xfrm>
+          <a:prstGeom prst="rect">
+            <a:avLst/>
+          </a:prstGeom>
+          <a:noFill/>
+          <a:ln/>
+        </p:spPr>
+        <p:txBody>
+          <a:bodyPr wrap="square" rtlCol="0" anchor="ctr"/>
+          <a:lstStyle/>
+          <a:p>
+            <a:pPr algn="ctr" indent="0" marL="0">
+              <a:buNone/>
+            </a:pPr>
+            <a:r>
+              <a:rPr lang="en-US" sz="1100" b="1" dirty="0">
+                <a:solidFill>
+                  <a:srgbClr val="000000"/>
+                </a:solidFill>
+                <a:latin typeface="Pretendard" pitchFamily="34" charset="0"/>
+                <a:ea typeface="Pretendard" pitchFamily="34" charset="-122"/>
+                <a:cs typeface="Pretendard" pitchFamily="34" charset="-120"/>
+              </a:rPr>
+              <a:t>✓</a:t>
+            </a:r>
+            <a:endParaRPr lang="en-US" sz="1100" dirty="0"/>
+          </a:p>
+        </p:txBody>
+      </p:sp>
+      <p:sp>
+        <p:nvSpPr>
+          <p:cNvPr id="22" name="Text 20"/>
+          <p:cNvSpPr/>
+          <p:nvPr/>
+        </p:nvSpPr>
+        <p:spPr>
+          <a:xfrm>
+            <a:off x="6804508" y="1828800"/>
+            <a:ext cx="4683100" cy="685800"/>
+          </a:xfrm>
+          <a:prstGeom prst="rect">
+            <a:avLst/>
+          </a:prstGeom>
+          <a:noFill/>
+          <a:ln/>
+        </p:spPr>
+        <p:txBody>
+          <a:bodyPr wrap="square" rtlCol="0" anchor="ctr"/>
+          <a:lstStyle/>
+          <a:p>
+            <a:pPr indent="0" marL="0">
+              <a:lnSpc>
+                <a:spcPct val="115000"/>
+              </a:lnSpc>
+              <a:buNone/>
+            </a:pPr>
+            <a:r>
+              <a:rPr lang="en-US" sz="1050" dirty="0">
+                <a:solidFill>
+                  <a:srgbClr val="10161F"/>
+                </a:solidFill>
+                <a:latin typeface="Pretendard" pitchFamily="34" charset="0"/>
+                <a:ea typeface="Pretendard" pitchFamily="34" charset="-122"/>
+                <a:cs typeface="Pretendard" pitchFamily="34" charset="-120"/>
+              </a:rPr>
+              <a:t>토지이용계획확인원상 도시계획시설 저촉, 건축선 후퇴, 지구단위계획 특별계획구역 확인</a:t>
+            </a:r>
+            <a:endParaRPr lang="en-US" sz="1050" dirty="0"/>
+          </a:p>
+        </p:txBody>
+      </p:sp>
+      <p:sp>
+        <p:nvSpPr>
+          <p:cNvPr id="23" name="Shape 21"/>
+          <p:cNvSpPr/>
+          <p:nvPr/>
+        </p:nvSpPr>
+        <p:spPr>
+          <a:xfrm>
+            <a:off x="6255868" y="2715768"/>
+            <a:ext cx="5368900" cy="868680"/>
+          </a:xfrm>
+          <a:prstGeom prst="rect">
+            <a:avLst/>
+          </a:prstGeom>
+          <a:solidFill>
+            <a:srgbClr val="F7FAFC"/>
+          </a:solidFill>
+          <a:ln w="6350">
+            <a:solidFill>
+              <a:srgbClr val="D9B668"/>
+            </a:solidFill>
+            <a:prstDash val="solid"/>
+          </a:ln>
+        </p:spPr>
+      </p:sp>
+      <p:sp>
+        <p:nvSpPr>
+          <p:cNvPr id="24" name="Shape 22"/>
+          <p:cNvSpPr/>
+          <p:nvPr/>
+        </p:nvSpPr>
+        <p:spPr>
+          <a:xfrm>
+            <a:off x="6393028" y="2880360"/>
+            <a:ext cx="320040" cy="320040"/>
+          </a:xfrm>
+          <a:prstGeom prst="rect">
+            <a:avLst/>
+          </a:prstGeom>
+          <a:solidFill>
+            <a:srgbClr val="977024"/>
+          </a:solidFill>
+          <a:ln/>
+        </p:spPr>
+      </p:sp>
+      <p:sp>
+        <p:nvSpPr>
+          <p:cNvPr id="25" name="Text 23"/>
+          <p:cNvSpPr/>
+          <p:nvPr/>
+        </p:nvSpPr>
+        <p:spPr>
+          <a:xfrm>
+            <a:off x="6393028" y="2880360"/>
+            <a:ext cx="320040" cy="320040"/>
+          </a:xfrm>
+          <a:prstGeom prst="rect">
+            <a:avLst/>
+          </a:prstGeom>
+          <a:noFill/>
+          <a:ln/>
+        </p:spPr>
+        <p:txBody>
+          <a:bodyPr wrap="square" rtlCol="0" anchor="ctr"/>
+          <a:lstStyle/>
+          <a:p>
+            <a:pPr algn="ctr" indent="0" marL="0">
+              <a:buNone/>
+            </a:pPr>
+            <a:r>
+              <a:rPr lang="en-US" sz="1100" b="1" dirty="0">
+                <a:solidFill>
+                  <a:srgbClr val="000000"/>
+                </a:solidFill>
+                <a:latin typeface="Pretendard" pitchFamily="34" charset="0"/>
+                <a:ea typeface="Pretendard" pitchFamily="34" charset="-122"/>
+                <a:cs typeface="Pretendard" pitchFamily="34" charset="-120"/>
+              </a:rPr>
+              <a:t>✓</a:t>
+            </a:r>
+            <a:endParaRPr lang="en-US" sz="1100" dirty="0"/>
+          </a:p>
+        </p:txBody>
+      </p:sp>
+      <p:sp>
+        <p:nvSpPr>
+          <p:cNvPr id="26" name="Text 24"/>
+          <p:cNvSpPr/>
+          <p:nvPr/>
+        </p:nvSpPr>
+        <p:spPr>
+          <a:xfrm>
+            <a:off x="6804508" y="2825496"/>
+            <a:ext cx="4683100" cy="685800"/>
+          </a:xfrm>
+          <a:prstGeom prst="rect">
+            <a:avLst/>
+          </a:prstGeom>
+          <a:noFill/>
+          <a:ln/>
+        </p:spPr>
+        <p:txBody>
+          <a:bodyPr wrap="square" rtlCol="0" anchor="ctr"/>
+          <a:lstStyle/>
+          <a:p>
+            <a:pPr indent="0" marL="0">
+              <a:lnSpc>
+                <a:spcPct val="115000"/>
+              </a:lnSpc>
+              <a:buNone/>
+            </a:pPr>
+            <a:r>
+              <a:rPr lang="en-US" sz="1050" dirty="0">
+                <a:solidFill>
+                  <a:srgbClr val="10161F"/>
+                </a:solidFill>
+                <a:latin typeface="Pretendard" pitchFamily="34" charset="0"/>
+                <a:ea typeface="Pretendard" pitchFamily="34" charset="-122"/>
+                <a:cs typeface="Pretendard" pitchFamily="34" charset="-120"/>
+              </a:rPr>
+              <a:t>기계식 주차기 정기 안전점검 합격증, 승강기 검사필증, 소방 완비증명서 실물 실사</a:t>
+            </a:r>
+            <a:endParaRPr lang="en-US" sz="1050" dirty="0"/>
+          </a:p>
+        </p:txBody>
+      </p:sp>
+      <p:sp>
+        <p:nvSpPr>
+          <p:cNvPr id="27" name="Shape 25"/>
+          <p:cNvSpPr/>
+          <p:nvPr/>
+        </p:nvSpPr>
+        <p:spPr>
+          <a:xfrm>
+            <a:off x="6255868" y="3712464"/>
+            <a:ext cx="5368900" cy="868680"/>
+          </a:xfrm>
+          <a:prstGeom prst="rect">
+            <a:avLst/>
+          </a:prstGeom>
+          <a:solidFill>
+            <a:srgbClr val="F7FAFC"/>
+          </a:solidFill>
+          <a:ln w="6350">
+            <a:solidFill>
+              <a:srgbClr val="D9B668"/>
+            </a:solidFill>
+            <a:prstDash val="solid"/>
+          </a:ln>
+        </p:spPr>
+      </p:sp>
+      <p:sp>
+        <p:nvSpPr>
+          <p:cNvPr id="28" name="Shape 26"/>
+          <p:cNvSpPr/>
+          <p:nvPr/>
+        </p:nvSpPr>
+        <p:spPr>
+          <a:xfrm>
+            <a:off x="6393028" y="3877056"/>
+            <a:ext cx="320040" cy="320040"/>
+          </a:xfrm>
+          <a:prstGeom prst="rect">
+            <a:avLst/>
+          </a:prstGeom>
+          <a:solidFill>
+            <a:srgbClr val="977024"/>
+          </a:solidFill>
+          <a:ln/>
+        </p:spPr>
+      </p:sp>
+      <p:sp>
+        <p:nvSpPr>
+          <p:cNvPr id="29" name="Text 27"/>
+          <p:cNvSpPr/>
+          <p:nvPr/>
+        </p:nvSpPr>
+        <p:spPr>
+          <a:xfrm>
+            <a:off x="6393028" y="3877056"/>
+            <a:ext cx="320040" cy="320040"/>
+          </a:xfrm>
+          <a:prstGeom prst="rect">
+            <a:avLst/>
+          </a:prstGeom>
+          <a:noFill/>
+          <a:ln/>
+        </p:spPr>
+        <p:txBody>
+          <a:bodyPr wrap="square" rtlCol="0" anchor="ctr"/>
+          <a:lstStyle/>
+          <a:p>
+            <a:pPr algn="ctr" indent="0" marL="0">
+              <a:buNone/>
+            </a:pPr>
+            <a:r>
+              <a:rPr lang="en-US" sz="1100" b="1" dirty="0">
+                <a:solidFill>
+                  <a:srgbClr val="000000"/>
+                </a:solidFill>
+                <a:latin typeface="Pretendard" pitchFamily="34" charset="0"/>
+                <a:ea typeface="Pretendard" pitchFamily="34" charset="-122"/>
+                <a:cs typeface="Pretendard" pitchFamily="34" charset="-120"/>
+              </a:rPr>
+              <a:t>✓</a:t>
+            </a:r>
+            <a:endParaRPr lang="en-US" sz="1100" dirty="0"/>
+          </a:p>
+        </p:txBody>
+      </p:sp>
+      <p:sp>
+        <p:nvSpPr>
+          <p:cNvPr id="30" name="Text 28"/>
+          <p:cNvSpPr/>
+          <p:nvPr/>
+        </p:nvSpPr>
+        <p:spPr>
+          <a:xfrm>
+            <a:off x="6804508" y="3822192"/>
+            <a:ext cx="4683100" cy="685800"/>
+          </a:xfrm>
+          <a:prstGeom prst="rect">
+            <a:avLst/>
+          </a:prstGeom>
+          <a:noFill/>
+          <a:ln/>
+        </p:spPr>
+        <p:txBody>
+          <a:bodyPr wrap="square" rtlCol="0" anchor="ctr"/>
+          <a:lstStyle/>
+          <a:p>
+            <a:pPr indent="0" marL="0">
+              <a:lnSpc>
+                <a:spcPct val="115000"/>
+              </a:lnSpc>
+              <a:buNone/>
+            </a:pPr>
+            <a:r>
+              <a:rPr lang="en-US" sz="1050" dirty="0">
+                <a:solidFill>
+                  <a:srgbClr val="10161F"/>
+                </a:solidFill>
+                <a:latin typeface="Pretendard" pitchFamily="34" charset="0"/>
+                <a:ea typeface="Pretendard" pitchFamily="34" charset="-122"/>
+                <a:cs typeface="Pretendard" pitchFamily="34" charset="-120"/>
+              </a:rPr>
+              <a:t>정화조 용량 대비 현 업종 적합성 및 하수도 원인자부담금 추가 부과 대상 여부 확인</a:t>
+            </a:r>
+            <a:endParaRPr lang="en-US" sz="1050" dirty="0"/>
+          </a:p>
+        </p:txBody>
+      </p:sp>
+      <p:sp>
+        <p:nvSpPr>
+          <p:cNvPr id="31" name="Shape 29"/>
+          <p:cNvSpPr/>
+          <p:nvPr/>
+        </p:nvSpPr>
+        <p:spPr>
+          <a:xfrm>
+            <a:off x="566928" y="5760720"/>
+            <a:ext cx="11057839" cy="594360"/>
+          </a:xfrm>
+          <a:prstGeom prst="rect">
+            <a:avLst/>
+          </a:prstGeom>
+          <a:solidFill>
+            <a:srgbClr val="D9B668"/>
+          </a:solidFill>
+          <a:ln/>
+        </p:spPr>
+      </p:sp>
+      <p:sp>
+        <p:nvSpPr>
+          <p:cNvPr id="32" name="Text 30"/>
+          <p:cNvSpPr/>
+          <p:nvPr/>
+        </p:nvSpPr>
+        <p:spPr>
+          <a:xfrm>
+            <a:off x="749808" y="5833872"/>
+            <a:ext cx="10692079" cy="448056"/>
+          </a:xfrm>
+          <a:prstGeom prst="rect">
+            <a:avLst/>
+          </a:prstGeom>
+          <a:noFill/>
+          <a:ln/>
+        </p:spPr>
+        <p:txBody>
+          <a:bodyPr wrap="square" rtlCol="0" anchor="ctr"/>
+          <a:lstStyle/>
+          <a:p>
+            <a:pPr indent="0" marL="0">
+              <a:buNone/>
+            </a:pPr>
+            <a:r>
+              <a:rPr lang="en-US" sz="950" b="1" dirty="0">
+                <a:solidFill>
+                  <a:srgbClr val="977024"/>
+                </a:solidFill>
+                <a:latin typeface="Pretendard" pitchFamily="34" charset="0"/>
+                <a:ea typeface="Pretendard" pitchFamily="34" charset="-122"/>
+                <a:cs typeface="Pretendard" pitchFamily="34" charset="-120"/>
+              </a:rPr>
+              <a:t>※ 본 체크리스트는 계약 전 매수인의 안전한 자산 인수를 위한 필수 확인 사항이며, 실사(Due Diligence) 결과에 따라 매매 조건 및 잔금 일정이 조정될 수 있습니다.</a:t>
+            </a:r>
+            <a:endParaRPr lang="en-US" sz="950" dirty="0"/>
+          </a:p>
+        </p:txBody>
+      </p:sp>
+      <p:sp>
+        <p:nvSpPr>
+          <p:cNvPr id="33" name="Text 31"/>
+          <p:cNvSpPr/>
+          <p:nvPr/>
+        </p:nvSpPr>
+        <p:spPr>
+          <a:xfrm>
+            <a:off x="566928" y="6382512"/>
+            <a:ext cx="7315200" cy="219456"/>
+          </a:xfrm>
+          <a:prstGeom prst="rect">
+            <a:avLst/>
+          </a:prstGeom>
+          <a:noFill/>
+          <a:ln/>
+        </p:spPr>
+        <p:txBody>
+          <a:bodyPr wrap="square" lIns="0" tIns="0" rIns="0" bIns="0" rtlCol="0" anchor="ctr"/>
+          <a:lstStyle/>
+          <a:p>
+            <a:pPr indent="0" marL="0">
+              <a:buNone/>
+            </a:pPr>
+            <a:r>
+              <a:rPr lang="en-US" sz="800" dirty="0">
+                <a:solidFill>
+                  <a:srgbClr val="718096"/>
+                </a:solidFill>
+                <a:latin typeface="Pretendard" pitchFamily="34" charset="0"/>
+                <a:ea typeface="Pretendard" pitchFamily="34" charset="-122"/>
+                <a:cs typeface="Pretendard" pitchFamily="34" charset="-120"/>
+              </a:rPr>
+              <a:t>크리딜   |   </a:t>
+            </a:r>
+            <a:endParaRPr lang="en-US" sz="800" dirty="0"/>
+          </a:p>
+        </p:txBody>
+      </p:sp>
+      <p:sp>
+        <p:nvSpPr>
+          <p:cNvPr id="34" name="Text 32"/>
+          <p:cNvSpPr/>
+          <p:nvPr/>
+        </p:nvSpPr>
+        <p:spPr>
+          <a:xfrm>
+            <a:off x="10710367" y="6382512"/>
+            <a:ext cx="914400" cy="219456"/>
+          </a:xfrm>
+          <a:prstGeom prst="rect">
+            <a:avLst/>
+          </a:prstGeom>
+          <a:noFill/>
+          <a:ln/>
+        </p:spPr>
+        <p:txBody>
+          <a:bodyPr wrap="square" lIns="0" tIns="0" rIns="0" bIns="0" rtlCol="0" anchor="ctr"/>
+          <a:lstStyle/>
+          <a:p>
+            <a:pPr algn="r" indent="0" marL="0">
+              <a:buNone/>
+            </a:pPr>
+            <a:r>
+              <a:rPr lang="en-US" sz="900" b="1" dirty="0">
+                <a:solidFill>
+                  <a:srgbClr val="B98A2E"/>
+                </a:solidFill>
+                <a:latin typeface="Arial" pitchFamily="34" charset="0"/>
+                <a:ea typeface="Arial" pitchFamily="34" charset="-122"/>
+                <a:cs typeface="Arial" pitchFamily="34" charset="-120"/>
+              </a:rPr>
+              <a:t>11</a:t>
+            </a:r>
+            <a:endParaRPr lang="en-US" sz="900" dirty="0"/>
+          </a:p>
+        </p:txBody>
+      </p:sp>
+    </p:spTree>
+  </p:cSld>
+  <p:clrMapOvr>
+    <a:masterClrMapping/>
+  </p:clrMapOvr>
+</p:sld>
+</file>
+
+<file path=ppt/slides/slide13.xml><?xml version="1.0" encoding="utf-8"?>
+<p:sld xmlns:a="http://schemas.openxmlformats.org/drawingml/2006/main" xmlns:r="http://schemas.openxmlformats.org/officeDocument/2006/relationships" xmlns:p="http://schemas.openxmlformats.org/presentationml/2006/main">
+  <p:cSld name="Slide 13">
     <p:bg>
       <p:bgPr>
         <a:solidFill>
@@ -2368,7 +7052,7 @@
                 <a:ea typeface="Arial" pitchFamily="34" charset="-122"/>
                 <a:cs typeface="Arial" pitchFamily="34" charset="-120"/>
               </a:rPr>
-              <a:t>10</a:t>
+              <a:t>12</a:t>
             </a:r>
             <a:endParaRPr lang="en-US" sz="1300" dirty="0"/>
           </a:p>
@@ -2407,7 +7091,7 @@
                 <a:ea typeface="Arial" pitchFamily="34" charset="-122"/>
                 <a:cs typeface="Arial" pitchFamily="34" charset="-120"/>
               </a:rPr>
-              <a:t>Disclaimer</a:t>
+              <a:t>Closing</a:t>
             </a:r>
             <a:endParaRPr lang="en-US" sz="950" dirty="0"/>
           </a:p>
@@ -2597,7 +7281,7 @@
               <a:buNone/>
             </a:pPr>
             <a:r>
-              <a:rPr lang="en-US" sz="850" dirty="0">
+              <a:rPr lang="en-US" sz="900" dirty="0">
                 <a:solidFill>
                   <a:srgbClr val="A0AEC0"/>
                 </a:solidFill>
@@ -2607,7 +7291,7 @@
               </a:rPr>
               <a:t>담당 중개사에게 초기 관심 표명 및 상담 요청</a:t>
             </a:r>
-            <a:endParaRPr lang="en-US" sz="850" dirty="0"/>
+            <a:endParaRPr lang="en-US" sz="900" dirty="0"/>
           </a:p>
         </p:txBody>
       </p:sp>
@@ -2795,7 +7479,7 @@
               <a:buNone/>
             </a:pPr>
             <a:r>
-              <a:rPr lang="en-US" sz="850" dirty="0">
+              <a:rPr lang="en-US" sz="900" dirty="0">
                 <a:solidFill>
                   <a:srgbClr val="A0AEC0"/>
                 </a:solidFill>
@@ -2805,7 +7489,7 @@
               </a:rPr>
               <a:t>비밀유지계약 후 상세 임대차·재무 자료 제공</a:t>
             </a:r>
-            <a:endParaRPr lang="en-US" sz="850" dirty="0"/>
+            <a:endParaRPr lang="en-US" sz="900" dirty="0"/>
           </a:p>
         </p:txBody>
       </p:sp>
@@ -2993,7 +7677,7 @@
               <a:buNone/>
             </a:pPr>
             <a:r>
-              <a:rPr lang="en-US" sz="850" dirty="0">
+              <a:rPr lang="en-US" sz="900" dirty="0">
                 <a:solidFill>
                   <a:srgbClr val="A0AEC0"/>
                 </a:solidFill>
@@ -3003,7 +7687,7 @@
               </a:rPr>
               <a:t>건물 컨디션 및 설비 직접 확인 후 의향서(LOI) 제출</a:t>
             </a:r>
-            <a:endParaRPr lang="en-US" sz="850" dirty="0"/>
+            <a:endParaRPr lang="en-US" sz="900" dirty="0"/>
           </a:p>
         </p:txBody>
       </p:sp>
@@ -3093,7 +7777,7 @@
               <a:buNone/>
             </a:pPr>
             <a:r>
-              <a:rPr lang="en-US" sz="850" b="1" dirty="0">
+              <a:rPr lang="en-US" sz="900" b="1" dirty="0">
                 <a:solidFill>
                   <a:srgbClr val="FFFFFF"/>
                 </a:solidFill>
@@ -3103,7 +7787,7 @@
               </a:rPr>
               <a:t>✓ 공부확인</a:t>
             </a:r>
-            <a:endParaRPr lang="en-US" sz="850" dirty="0"/>
+            <a:endParaRPr lang="en-US" sz="900" dirty="0"/>
           </a:p>
         </p:txBody>
       </p:sp>
@@ -3193,7 +7877,7 @@
               <a:buNone/>
             </a:pPr>
             <a:r>
-              <a:rPr lang="en-US" sz="850" b="1" dirty="0">
+              <a:rPr lang="en-US" sz="900" b="1" dirty="0">
                 <a:solidFill>
                   <a:srgbClr val="FFFFFF"/>
                 </a:solidFill>
@@ -3203,7 +7887,7 @@
               </a:rPr>
               <a:t>★ 전문가검증</a:t>
             </a:r>
-            <a:endParaRPr lang="en-US" sz="850" dirty="0"/>
+            <a:endParaRPr lang="en-US" sz="900" dirty="0"/>
           </a:p>
         </p:txBody>
       </p:sp>
@@ -3293,7 +7977,7 @@
               <a:buNone/>
             </a:pPr>
             <a:r>
-              <a:rPr lang="en-US" sz="850" b="1" dirty="0">
+              <a:rPr lang="en-US" sz="900" b="1" dirty="0">
                 <a:solidFill>
                   <a:srgbClr val="FFFFFF"/>
                 </a:solidFill>
@@ -3303,7 +7987,7 @@
               </a:rPr>
               <a:t>▲ 매도인고지</a:t>
             </a:r>
-            <a:endParaRPr lang="en-US" sz="850" dirty="0"/>
+            <a:endParaRPr lang="en-US" sz="900" dirty="0"/>
           </a:p>
         </p:txBody>
       </p:sp>
@@ -3393,7 +8077,7 @@
               <a:buNone/>
             </a:pPr>
             <a:r>
-              <a:rPr lang="en-US" sz="850" b="1" dirty="0">
+              <a:rPr lang="en-US" sz="900" b="1" dirty="0">
                 <a:solidFill>
                   <a:srgbClr val="FFFFFF"/>
                 </a:solidFill>
@@ -3403,7 +8087,7 @@
               </a:rPr>
               <a:t>● 중개인입력</a:t>
             </a:r>
-            <a:endParaRPr lang="en-US" sz="850" dirty="0"/>
+            <a:endParaRPr lang="en-US" sz="900" dirty="0"/>
           </a:p>
         </p:txBody>
       </p:sp>
@@ -3493,7 +8177,7 @@
               <a:buNone/>
             </a:pPr>
             <a:r>
-              <a:rPr lang="en-US" sz="850" b="1" dirty="0">
+              <a:rPr lang="en-US" sz="900" b="1" dirty="0">
                 <a:solidFill>
                   <a:srgbClr val="FFFFFF"/>
                 </a:solidFill>
@@ -3503,7 +8187,7 @@
               </a:rPr>
               <a:t>◇ AI추정·가정</a:t>
             </a:r>
-            <a:endParaRPr lang="en-US" sz="850" dirty="0"/>
+            <a:endParaRPr lang="en-US" sz="900" dirty="0"/>
           </a:p>
         </p:txBody>
       </p:sp>
@@ -3635,7 +8319,7 @@
               <a:buNone/>
             </a:pPr>
             <a:r>
-              <a:rPr lang="en-US" sz="850" dirty="0">
+              <a:rPr lang="en-US" sz="900" dirty="0">
                 <a:solidFill>
                   <a:srgbClr val="A0AEC0"/>
                 </a:solidFill>
@@ -3645,7 +8329,7 @@
               </a:rPr>
               <a:t>본 자료는 투자 권유가 아니며, 기재된 정보의 정확성을 보증하지 않습니다.</a:t>
             </a:r>
-            <a:endParaRPr lang="en-US" sz="850" dirty="0"/>
+            <a:endParaRPr lang="en-US" sz="900" dirty="0"/>
           </a:p>
         </p:txBody>
       </p:sp>
@@ -3780,7 +8464,732 @@
                 <a:ea typeface="Arial" pitchFamily="34" charset="-122"/>
                 <a:cs typeface="Arial" pitchFamily="34" charset="-120"/>
               </a:rPr>
-              <a:t>10</a:t>
+              <a:t>12</a:t>
+            </a:r>
+            <a:endParaRPr lang="en-US" sz="900" dirty="0"/>
+          </a:p>
+        </p:txBody>
+      </p:sp>
+    </p:spTree>
+  </p:cSld>
+  <p:clrMapOvr>
+    <a:masterClrMapping/>
+  </p:clrMapOvr>
+</p:sld>
+</file>
+
+<file path=ppt/slides/slide14.xml><?xml version="1.0" encoding="utf-8"?>
+<p:sld xmlns:a="http://schemas.openxmlformats.org/drawingml/2006/main" xmlns:r="http://schemas.openxmlformats.org/officeDocument/2006/relationships" xmlns:p="http://schemas.openxmlformats.org/presentationml/2006/main">
+  <p:cSld name="Slide 14">
+    <p:bg>
+      <p:bgPr>
+        <a:solidFill>
+          <a:srgbClr val="FFFFFF"/>
+        </a:solidFill>
+      </p:bgPr>
+    </p:bg>
+    <p:spTree>
+      <p:nvGrpSpPr>
+        <p:cNvPr id="1" name=""/>
+        <p:cNvGrpSpPr/>
+        <p:nvPr/>
+      </p:nvGrpSpPr>
+      <p:grpSpPr>
+        <a:xfrm>
+          <a:off x="0" y="0"/>
+          <a:ext cx="0" cy="0"/>
+          <a:chOff x="0" y="0"/>
+          <a:chExt cx="0" cy="0"/>
+        </a:xfrm>
+      </p:grpSpPr>
+      <p:sp>
+        <p:nvSpPr>
+          <p:cNvPr id="2" name="Shape 0"/>
+          <p:cNvSpPr/>
+          <p:nvPr/>
+        </p:nvSpPr>
+        <p:spPr>
+          <a:xfrm>
+            <a:off x="566928" y="457200"/>
+            <a:ext cx="384048" cy="384048"/>
+          </a:xfrm>
+          <a:prstGeom prst="ellipse">
+            <a:avLst/>
+          </a:prstGeom>
+          <a:solidFill>
+            <a:srgbClr val="B98A2E"/>
+          </a:solidFill>
+          <a:ln/>
+        </p:spPr>
+      </p:sp>
+      <p:sp>
+        <p:nvSpPr>
+          <p:cNvPr id="3" name="Text 1"/>
+          <p:cNvSpPr/>
+          <p:nvPr/>
+        </p:nvSpPr>
+        <p:spPr>
+          <a:xfrm>
+            <a:off x="566928" y="457200"/>
+            <a:ext cx="384048" cy="384048"/>
+          </a:xfrm>
+          <a:prstGeom prst="rect">
+            <a:avLst/>
+          </a:prstGeom>
+          <a:noFill/>
+          <a:ln/>
+        </p:spPr>
+        <p:txBody>
+          <a:bodyPr wrap="square" lIns="0" tIns="0" rIns="0" bIns="0" rtlCol="0" anchor="ctr"/>
+          <a:lstStyle/>
+          <a:p>
+            <a:pPr algn="ctr" indent="0" marL="0">
+              <a:buNone/>
+            </a:pPr>
+            <a:r>
+              <a:rPr lang="en-US" sz="1300" b="1" dirty="0">
+                <a:solidFill>
+                  <a:srgbClr val="FFFFFF"/>
+                </a:solidFill>
+                <a:latin typeface="Arial" pitchFamily="34" charset="0"/>
+                <a:ea typeface="Arial" pitchFamily="34" charset="-122"/>
+                <a:cs typeface="Arial" pitchFamily="34" charset="-120"/>
+              </a:rPr>
+              <a:t>13</a:t>
+            </a:r>
+            <a:endParaRPr lang="en-US" sz="1300" dirty="0"/>
+          </a:p>
+        </p:txBody>
+      </p:sp>
+      <p:sp>
+        <p:nvSpPr>
+          <p:cNvPr id="4" name="Text 2"/>
+          <p:cNvSpPr/>
+          <p:nvPr/>
+        </p:nvSpPr>
+        <p:spPr>
+          <a:xfrm>
+            <a:off x="1133856" y="457200"/>
+            <a:ext cx="10490911" cy="182880"/>
+          </a:xfrm>
+          <a:prstGeom prst="rect">
+            <a:avLst/>
+          </a:prstGeom>
+          <a:noFill/>
+          <a:ln/>
+        </p:spPr>
+        <p:txBody>
+          <a:bodyPr wrap="square" lIns="0" tIns="0" rIns="0" bIns="0" rtlCol="0" anchor="ctr"/>
+          <a:lstStyle/>
+          <a:p>
+            <a:pPr indent="0" marL="0">
+              <a:buNone/>
+            </a:pPr>
+            <a:r>
+              <a:rPr lang="en-US" sz="950" b="1" spc="200" kern="0" dirty="0">
+                <a:solidFill>
+                  <a:srgbClr val="B98A2E"/>
+                </a:solidFill>
+                <a:latin typeface="Arial" pitchFamily="34" charset="0"/>
+                <a:ea typeface="Arial" pitchFamily="34" charset="-122"/>
+                <a:cs typeface="Arial" pitchFamily="34" charset="-120"/>
+              </a:rPr>
+              <a:t>Records</a:t>
+            </a:r>
+            <a:endParaRPr lang="en-US" sz="950" dirty="0"/>
+          </a:p>
+        </p:txBody>
+      </p:sp>
+      <p:sp>
+        <p:nvSpPr>
+          <p:cNvPr id="5" name="Text 3"/>
+          <p:cNvSpPr/>
+          <p:nvPr/>
+        </p:nvSpPr>
+        <p:spPr>
+          <a:xfrm>
+            <a:off x="1133856" y="640080"/>
+            <a:ext cx="10490911" cy="365760"/>
+          </a:xfrm>
+          <a:prstGeom prst="rect">
+            <a:avLst/>
+          </a:prstGeom>
+          <a:noFill/>
+          <a:ln/>
+        </p:spPr>
+        <p:txBody>
+          <a:bodyPr wrap="square" lIns="0" tIns="0" rIns="0" bIns="0" rtlCol="0" anchor="ctr"/>
+          <a:lstStyle/>
+          <a:p>
+            <a:pPr indent="0" marL="0">
+              <a:buNone/>
+            </a:pPr>
+            <a:r>
+              <a:rPr lang="en-US" sz="2300" b="1" dirty="0">
+                <a:solidFill>
+                  <a:srgbClr val="10161F"/>
+                </a:solidFill>
+                <a:latin typeface="Pretendard" pitchFamily="34" charset="0"/>
+                <a:ea typeface="Pretendard" pitchFamily="34" charset="-122"/>
+                <a:cs typeface="Pretendard" pitchFamily="34" charset="-120"/>
+              </a:rPr>
+              <a:t>공부 발췌</a:t>
+            </a:r>
+            <a:endParaRPr lang="en-US" sz="2300" dirty="0"/>
+          </a:p>
+        </p:txBody>
+      </p:sp>
+      <p:sp>
+        <p:nvSpPr>
+          <p:cNvPr id="6" name="Text 4"/>
+          <p:cNvSpPr/>
+          <p:nvPr/>
+        </p:nvSpPr>
+        <p:spPr>
+          <a:xfrm>
+            <a:off x="566928" y="1371600"/>
+            <a:ext cx="6858000" cy="237744"/>
+          </a:xfrm>
+          <a:prstGeom prst="rect">
+            <a:avLst/>
+          </a:prstGeom>
+          <a:noFill/>
+          <a:ln/>
+        </p:spPr>
+        <p:txBody>
+          <a:bodyPr wrap="square" lIns="0" tIns="0" rIns="0" bIns="0" rtlCol="0" anchor="ctr"/>
+          <a:lstStyle/>
+          <a:p>
+            <a:pPr indent="0" marL="0">
+              <a:buNone/>
+            </a:pPr>
+            <a:r>
+              <a:rPr lang="en-US" sz="1100" b="1" dirty="0">
+                <a:solidFill>
+                  <a:srgbClr val="10161F"/>
+                </a:solidFill>
+                <a:latin typeface="Pretendard" pitchFamily="34" charset="0"/>
+                <a:ea typeface="Pretendard" pitchFamily="34" charset="-122"/>
+                <a:cs typeface="Pretendard" pitchFamily="34" charset="-120"/>
+              </a:rPr>
+              <a:t>건축물대장 표제부</a:t>
+            </a:r>
+            <a:endParaRPr lang="en-US" sz="1100" dirty="0"/>
+          </a:p>
+        </p:txBody>
+      </p:sp>
+      <p:sp>
+        <p:nvSpPr>
+          <p:cNvPr id="7" name="Text 5"/>
+          <p:cNvSpPr/>
+          <p:nvPr/>
+        </p:nvSpPr>
+        <p:spPr>
+          <a:xfrm>
+            <a:off x="566928" y="1645920"/>
+            <a:ext cx="2606040" cy="438912"/>
+          </a:xfrm>
+          <a:prstGeom prst="rect">
+            <a:avLst/>
+          </a:prstGeom>
+          <a:noFill/>
+          <a:ln/>
+        </p:spPr>
+        <p:txBody>
+          <a:bodyPr wrap="square" lIns="0" tIns="0" rIns="0" bIns="0" rtlCol="0" anchor="ctr"/>
+          <a:lstStyle/>
+          <a:p>
+            <a:pPr indent="0" marL="0">
+              <a:lnSpc>
+                <a:spcPct val="120000"/>
+              </a:lnSpc>
+              <a:buNone/>
+            </a:pPr>
+            <a:r>
+              <a:rPr lang="en-US" sz="1350" dirty="0">
+                <a:solidFill>
+                  <a:srgbClr val="718096"/>
+                </a:solidFill>
+                <a:latin typeface="Pretendard" pitchFamily="34" charset="0"/>
+                <a:ea typeface="Pretendard" pitchFamily="34" charset="-122"/>
+                <a:cs typeface="Pretendard" pitchFamily="34" charset="-120"/>
+              </a:rPr>
+              <a:t>연면적</a:t>
+            </a:r>
+            <a:endParaRPr lang="en-US" sz="1350" dirty="0"/>
+          </a:p>
+        </p:txBody>
+      </p:sp>
+      <p:sp>
+        <p:nvSpPr>
+          <p:cNvPr id="8" name="Text 6"/>
+          <p:cNvSpPr/>
+          <p:nvPr/>
+        </p:nvSpPr>
+        <p:spPr>
+          <a:xfrm>
+            <a:off x="3172968" y="1645920"/>
+            <a:ext cx="4251960" cy="438912"/>
+          </a:xfrm>
+          <a:prstGeom prst="rect">
+            <a:avLst/>
+          </a:prstGeom>
+          <a:noFill/>
+          <a:ln/>
+        </p:spPr>
+        <p:txBody>
+          <a:bodyPr wrap="square" lIns="0" tIns="0" rIns="0" bIns="0" rtlCol="0" anchor="ctr"/>
+          <a:lstStyle/>
+          <a:p>
+            <a:pPr indent="0" marL="0">
+              <a:lnSpc>
+                <a:spcPct val="120000"/>
+              </a:lnSpc>
+              <a:buNone/>
+            </a:pPr>
+            <a:r>
+              <a:rPr lang="en-US" sz="1350" b="1" dirty="0">
+                <a:solidFill>
+                  <a:srgbClr val="10161F"/>
+                </a:solidFill>
+                <a:latin typeface="Pretendard" pitchFamily="34" charset="0"/>
+                <a:ea typeface="Pretendard" pitchFamily="34" charset="-122"/>
+                <a:cs typeface="Pretendard" pitchFamily="34" charset="-120"/>
+              </a:rPr>
+              <a:t>5,000㎡ (1512.5평)</a:t>
+            </a:r>
+            <a:endParaRPr lang="en-US" sz="1350" dirty="0"/>
+          </a:p>
+        </p:txBody>
+      </p:sp>
+      <p:sp>
+        <p:nvSpPr>
+          <p:cNvPr id="9" name="Shape 7"/>
+          <p:cNvSpPr/>
+          <p:nvPr/>
+        </p:nvSpPr>
+        <p:spPr>
+          <a:xfrm>
+            <a:off x="7604608" y="1371600"/>
+            <a:ext cx="0" cy="4754880"/>
+          </a:xfrm>
+          <a:prstGeom prst="line">
+            <a:avLst/>
+          </a:prstGeom>
+          <a:noFill/>
+          <a:ln w="8890">
+            <a:solidFill>
+              <a:srgbClr val="B98A2E"/>
+            </a:solidFill>
+            <a:prstDash val="solid"/>
+          </a:ln>
+        </p:spPr>
+      </p:sp>
+      <p:sp>
+        <p:nvSpPr>
+          <p:cNvPr id="10" name="Shape 8"/>
+          <p:cNvSpPr/>
+          <p:nvPr/>
+        </p:nvSpPr>
+        <p:spPr>
+          <a:xfrm>
+            <a:off x="7784287" y="1645920"/>
+            <a:ext cx="3840480" cy="2103120"/>
+          </a:xfrm>
+          <a:prstGeom prst="roundRect">
+            <a:avLst>
+              <a:gd name="adj" fmla="val 2609"/>
+            </a:avLst>
+          </a:prstGeom>
+          <a:solidFill>
+            <a:srgbClr val="BEE3F8"/>
+          </a:solidFill>
+          <a:ln/>
+        </p:spPr>
+      </p:sp>
+      <p:sp>
+        <p:nvSpPr>
+          <p:cNvPr id="11" name="Shape 9"/>
+          <p:cNvSpPr/>
+          <p:nvPr/>
+        </p:nvSpPr>
+        <p:spPr>
+          <a:xfrm>
+            <a:off x="7784287" y="1700784"/>
+            <a:ext cx="36576" cy="1993392"/>
+          </a:xfrm>
+          <a:prstGeom prst="rect">
+            <a:avLst/>
+          </a:prstGeom>
+          <a:solidFill>
+            <a:srgbClr val="2B6CB0"/>
+          </a:solidFill>
+          <a:ln/>
+        </p:spPr>
+      </p:sp>
+      <p:sp>
+        <p:nvSpPr>
+          <p:cNvPr id="12" name="Text 10"/>
+          <p:cNvSpPr/>
+          <p:nvPr/>
+        </p:nvSpPr>
+        <p:spPr>
+          <a:xfrm>
+            <a:off x="7967167" y="1755648"/>
+            <a:ext cx="3511296" cy="201168"/>
+          </a:xfrm>
+          <a:prstGeom prst="rect">
+            <a:avLst/>
+          </a:prstGeom>
+          <a:noFill/>
+          <a:ln/>
+        </p:spPr>
+        <p:txBody>
+          <a:bodyPr wrap="square" lIns="0" tIns="0" rIns="0" bIns="0" rtlCol="0" anchor="ctr"/>
+          <a:lstStyle/>
+          <a:p>
+            <a:pPr indent="0" marL="0">
+              <a:buNone/>
+            </a:pPr>
+            <a:r>
+              <a:rPr lang="en-US" sz="1050" b="1" dirty="0">
+                <a:solidFill>
+                  <a:srgbClr val="2B6CB0"/>
+                </a:solidFill>
+                <a:latin typeface="Pretendard" pitchFamily="34" charset="0"/>
+                <a:ea typeface="Pretendard" pitchFamily="34" charset="-122"/>
+                <a:cs typeface="Pretendard" pitchFamily="34" charset="-120"/>
+              </a:rPr>
+              <a:t>입지 및 권리관계 실사 포인트</a:t>
+            </a:r>
+            <a:endParaRPr lang="en-US" sz="1050" dirty="0"/>
+          </a:p>
+        </p:txBody>
+      </p:sp>
+      <p:sp>
+        <p:nvSpPr>
+          <p:cNvPr id="13" name="Text 11"/>
+          <p:cNvSpPr/>
+          <p:nvPr/>
+        </p:nvSpPr>
+        <p:spPr>
+          <a:xfrm>
+            <a:off x="7967167" y="1975104"/>
+            <a:ext cx="3511296" cy="1700784"/>
+          </a:xfrm>
+          <a:prstGeom prst="rect">
+            <a:avLst/>
+          </a:prstGeom>
+          <a:noFill/>
+          <a:ln/>
+        </p:spPr>
+        <p:txBody>
+          <a:bodyPr wrap="square" lIns="0" tIns="0" rIns="0" bIns="0" rtlCol="0" anchor="t"/>
+          <a:lstStyle/>
+          <a:p>
+            <a:pPr marL="342900" indent="-342900">
+              <a:lnSpc>
+                <a:spcPct val="120000"/>
+              </a:lnSpc>
+              <a:buSzPct val="100000"/>
+              <a:buChar char="•"/>
+            </a:pPr>
+            <a:r>
+              <a:rPr lang="en-US" sz="930" dirty="0">
+                <a:solidFill>
+                  <a:srgbClr val="10161F"/>
+                </a:solidFill>
+                <a:latin typeface="Pretendard" pitchFamily="34" charset="0"/>
+                <a:ea typeface="Pretendard" pitchFamily="34" charset="-122"/>
+                <a:cs typeface="Pretendard" pitchFamily="34" charset="-120"/>
+              </a:rPr>
+              <a:t>물건 접면 도로 폭 및 진출입 여건은 현장 실사 확인 사항입니다</a:t>
+            </a:r>
+            <a:endParaRPr lang="en-US" sz="930" dirty="0"/>
+          </a:p>
+          <a:p>
+            <a:pPr marL="342900" indent="-342900">
+              <a:lnSpc>
+                <a:spcPct val="120000"/>
+              </a:lnSpc>
+              <a:buSzPct val="100000"/>
+              <a:buChar char="•"/>
+            </a:pPr>
+            <a:r>
+              <a:rPr lang="en-US" sz="930" dirty="0">
+                <a:solidFill>
+                  <a:srgbClr val="10161F"/>
+                </a:solidFill>
+                <a:latin typeface="Pretendard" pitchFamily="34" charset="0"/>
+                <a:ea typeface="Pretendard" pitchFamily="34" charset="-122"/>
+                <a:cs typeface="Pretendard" pitchFamily="34" charset="-120"/>
+              </a:rPr>
+              <a:t>등기부등본상 권리관계 및 제한물권 설정 여부를 확인하였습니다</a:t>
+            </a:r>
+            <a:endParaRPr lang="en-US" sz="930" dirty="0"/>
+          </a:p>
+          <a:p>
+            <a:pPr marL="342900" indent="-342900">
+              <a:lnSpc>
+                <a:spcPct val="120000"/>
+              </a:lnSpc>
+              <a:buSzPct val="100000"/>
+              <a:buChar char="•"/>
+            </a:pPr>
+            <a:r>
+              <a:rPr lang="en-US" sz="930" dirty="0">
+                <a:solidFill>
+                  <a:srgbClr val="10161F"/>
+                </a:solidFill>
+                <a:latin typeface="Pretendard" pitchFamily="34" charset="0"/>
+                <a:ea typeface="Pretendard" pitchFamily="34" charset="-122"/>
+                <a:cs typeface="Pretendard" pitchFamily="34" charset="-120"/>
+              </a:rPr>
+              <a:t>지구단위계획 및 토지이용계획상 허용 용도를 검토하였습니다</a:t>
+            </a:r>
+            <a:endParaRPr lang="en-US" sz="930" dirty="0"/>
+          </a:p>
+        </p:txBody>
+      </p:sp>
+      <p:sp>
+        <p:nvSpPr>
+          <p:cNvPr id="14" name="Shape 12"/>
+          <p:cNvSpPr/>
+          <p:nvPr/>
+        </p:nvSpPr>
+        <p:spPr>
+          <a:xfrm>
+            <a:off x="7784287" y="3977640"/>
+            <a:ext cx="3840480" cy="2148840"/>
+          </a:xfrm>
+          <a:prstGeom prst="roundRect">
+            <a:avLst>
+              <a:gd name="adj" fmla="val 2553"/>
+            </a:avLst>
+          </a:prstGeom>
+          <a:solidFill>
+            <a:srgbClr val="BEE3F8"/>
+          </a:solidFill>
+          <a:ln/>
+        </p:spPr>
+      </p:sp>
+      <p:sp>
+        <p:nvSpPr>
+          <p:cNvPr id="15" name="Shape 13"/>
+          <p:cNvSpPr/>
+          <p:nvPr/>
+        </p:nvSpPr>
+        <p:spPr>
+          <a:xfrm>
+            <a:off x="7784287" y="4032504"/>
+            <a:ext cx="36576" cy="2039112"/>
+          </a:xfrm>
+          <a:prstGeom prst="rect">
+            <a:avLst/>
+          </a:prstGeom>
+          <a:solidFill>
+            <a:srgbClr val="2B6CB0"/>
+          </a:solidFill>
+          <a:ln/>
+        </p:spPr>
+      </p:sp>
+      <p:sp>
+        <p:nvSpPr>
+          <p:cNvPr id="16" name="Text 14"/>
+          <p:cNvSpPr/>
+          <p:nvPr/>
+        </p:nvSpPr>
+        <p:spPr>
+          <a:xfrm>
+            <a:off x="7967167" y="4087368"/>
+            <a:ext cx="3511296" cy="201168"/>
+          </a:xfrm>
+          <a:prstGeom prst="rect">
+            <a:avLst/>
+          </a:prstGeom>
+          <a:noFill/>
+          <a:ln/>
+        </p:spPr>
+        <p:txBody>
+          <a:bodyPr wrap="square" lIns="0" tIns="0" rIns="0" bIns="0" rtlCol="0" anchor="ctr"/>
+          <a:lstStyle/>
+          <a:p>
+            <a:pPr indent="0" marL="0">
+              <a:buNone/>
+            </a:pPr>
+            <a:r>
+              <a:rPr lang="en-US" sz="1050" b="1" dirty="0">
+                <a:solidFill>
+                  <a:srgbClr val="2B6CB0"/>
+                </a:solidFill>
+                <a:latin typeface="Pretendard" pitchFamily="34" charset="0"/>
+                <a:ea typeface="Pretendard" pitchFamily="34" charset="-122"/>
+                <a:cs typeface="Pretendard" pitchFamily="34" charset="-120"/>
+              </a:rPr>
+              <a:t>임대차 및 운용 관리 상태</a:t>
+            </a:r>
+            <a:endParaRPr lang="en-US" sz="1050" dirty="0"/>
+          </a:p>
+        </p:txBody>
+      </p:sp>
+      <p:sp>
+        <p:nvSpPr>
+          <p:cNvPr id="17" name="Text 15"/>
+          <p:cNvSpPr/>
+          <p:nvPr/>
+        </p:nvSpPr>
+        <p:spPr>
+          <a:xfrm>
+            <a:off x="7967167" y="4306824"/>
+            <a:ext cx="3511296" cy="1746504"/>
+          </a:xfrm>
+          <a:prstGeom prst="rect">
+            <a:avLst/>
+          </a:prstGeom>
+          <a:noFill/>
+          <a:ln/>
+        </p:spPr>
+        <p:txBody>
+          <a:bodyPr wrap="square" lIns="0" tIns="0" rIns="0" bIns="0" rtlCol="0" anchor="t"/>
+          <a:lstStyle/>
+          <a:p>
+            <a:pPr marL="342900" indent="-342900">
+              <a:lnSpc>
+                <a:spcPct val="120000"/>
+              </a:lnSpc>
+              <a:buSzPct val="100000"/>
+              <a:buChar char="•"/>
+            </a:pPr>
+            <a:r>
+              <a:rPr lang="en-US" sz="930" dirty="0">
+                <a:solidFill>
+                  <a:srgbClr val="10161F"/>
+                </a:solidFill>
+                <a:latin typeface="Pretendard" pitchFamily="34" charset="0"/>
+                <a:ea typeface="Pretendard" pitchFamily="34" charset="-122"/>
+                <a:cs typeface="Pretendard" pitchFamily="34" charset="-120"/>
+              </a:rPr>
+              <a:t>주요 임차인별 계약 만기 분산 및 렌트롤 실사가 필요합니다</a:t>
+            </a:r>
+            <a:endParaRPr lang="en-US" sz="930" dirty="0"/>
+          </a:p>
+          <a:p>
+            <a:pPr marL="342900" indent="-342900">
+              <a:lnSpc>
+                <a:spcPct val="120000"/>
+              </a:lnSpc>
+              <a:buSzPct val="100000"/>
+              <a:buChar char="•"/>
+            </a:pPr>
+            <a:r>
+              <a:rPr lang="en-US" sz="930" dirty="0">
+                <a:solidFill>
+                  <a:srgbClr val="10161F"/>
+                </a:solidFill>
+                <a:latin typeface="Pretendard" pitchFamily="34" charset="0"/>
+                <a:ea typeface="Pretendard" pitchFamily="34" charset="-122"/>
+                <a:cs typeface="Pretendard" pitchFamily="34" charset="-120"/>
+              </a:rPr>
+              <a:t>관리비 정산 내역 및 수선유지비 집행 이력을 점검하였습니다</a:t>
+            </a:r>
+            <a:endParaRPr lang="en-US" sz="930" dirty="0"/>
+          </a:p>
+          <a:p>
+            <a:pPr marL="342900" indent="-342900">
+              <a:lnSpc>
+                <a:spcPct val="120000"/>
+              </a:lnSpc>
+              <a:buSzPct val="100000"/>
+              <a:buChar char="•"/>
+            </a:pPr>
+            <a:r>
+              <a:rPr lang="en-US" sz="930" dirty="0">
+                <a:solidFill>
+                  <a:srgbClr val="10161F"/>
+                </a:solidFill>
+                <a:latin typeface="Pretendard" pitchFamily="34" charset="0"/>
+                <a:ea typeface="Pretendard" pitchFamily="34" charset="-122"/>
+                <a:cs typeface="Pretendard" pitchFamily="34" charset="-120"/>
+              </a:rPr>
+              <a:t>취득세 감면 및 대출 조달 구조는 금융·세무 자문 후 확정됩니다</a:t>
+            </a:r>
+            <a:endParaRPr lang="en-US" sz="930" dirty="0"/>
+          </a:p>
+        </p:txBody>
+      </p:sp>
+      <p:sp>
+        <p:nvSpPr>
+          <p:cNvPr id="18" name="Text 16"/>
+          <p:cNvSpPr/>
+          <p:nvPr/>
+        </p:nvSpPr>
+        <p:spPr>
+          <a:xfrm>
+            <a:off x="566928" y="6382512"/>
+            <a:ext cx="7315200" cy="219456"/>
+          </a:xfrm>
+          <a:prstGeom prst="rect">
+            <a:avLst/>
+          </a:prstGeom>
+          <a:noFill/>
+          <a:ln/>
+        </p:spPr>
+        <p:txBody>
+          <a:bodyPr wrap="square" lIns="0" tIns="0" rIns="0" bIns="0" rtlCol="0" anchor="ctr"/>
+          <a:lstStyle/>
+          <a:p>
+            <a:pPr indent="0" marL="0">
+              <a:buNone/>
+            </a:pPr>
+            <a:r>
+              <a:rPr lang="en-US" sz="800" dirty="0">
+                <a:solidFill>
+                  <a:srgbClr val="718096"/>
+                </a:solidFill>
+                <a:latin typeface="Pretendard" pitchFamily="34" charset="0"/>
+                <a:ea typeface="Pretendard" pitchFamily="34" charset="-122"/>
+                <a:cs typeface="Pretendard" pitchFamily="34" charset="-120"/>
+              </a:rPr>
+              <a:t>크리딜   |   </a:t>
+            </a:r>
+            <a:endParaRPr lang="en-US" sz="800" dirty="0"/>
+          </a:p>
+        </p:txBody>
+      </p:sp>
+      <p:sp>
+        <p:nvSpPr>
+          <p:cNvPr id="19" name="Text 17"/>
+          <p:cNvSpPr/>
+          <p:nvPr/>
+        </p:nvSpPr>
+        <p:spPr>
+          <a:xfrm>
+            <a:off x="10710367" y="6382512"/>
+            <a:ext cx="914400" cy="219456"/>
+          </a:xfrm>
+          <a:prstGeom prst="rect">
+            <a:avLst/>
+          </a:prstGeom>
+          <a:noFill/>
+          <a:ln/>
+        </p:spPr>
+        <p:txBody>
+          <a:bodyPr wrap="square" lIns="0" tIns="0" rIns="0" bIns="0" rtlCol="0" anchor="ctr"/>
+          <a:lstStyle/>
+          <a:p>
+            <a:pPr algn="r" indent="0" marL="0">
+              <a:buNone/>
+            </a:pPr>
+            <a:r>
+              <a:rPr lang="en-US" sz="900" b="1" dirty="0">
+                <a:solidFill>
+                  <a:srgbClr val="B98A2E"/>
+                </a:solidFill>
+                <a:latin typeface="Arial" pitchFamily="34" charset="0"/>
+                <a:ea typeface="Arial" pitchFamily="34" charset="-122"/>
+                <a:cs typeface="Arial" pitchFamily="34" charset="-120"/>
+              </a:rPr>
+              <a:t>13</a:t>
             </a:r>
             <a:endParaRPr lang="en-US" sz="900" dirty="0"/>
           </a:p>
@@ -4091,7 +9500,7 @@
         </p:nvSpPr>
         <p:spPr>
           <a:xfrm>
-            <a:off x="731520" y="2276856"/>
+            <a:off x="731520" y="2313432"/>
             <a:ext cx="2298116" cy="402336"/>
           </a:xfrm>
           <a:prstGeom prst="rect">
@@ -4198,7 +9607,7 @@
         </p:nvSpPr>
         <p:spPr>
           <a:xfrm>
-            <a:off x="3541700" y="2276856"/>
+            <a:off x="3541700" y="2313432"/>
             <a:ext cx="2298116" cy="402336"/>
           </a:xfrm>
           <a:prstGeom prst="rect">
@@ -4305,7 +9714,7 @@
         </p:nvSpPr>
         <p:spPr>
           <a:xfrm>
-            <a:off x="6351880" y="2276856"/>
+            <a:off x="6351880" y="2313432"/>
             <a:ext cx="2298116" cy="402336"/>
           </a:xfrm>
           <a:prstGeom prst="rect">
@@ -4412,7 +9821,7 @@
         </p:nvSpPr>
         <p:spPr>
           <a:xfrm>
-            <a:off x="9162059" y="2276856"/>
+            <a:off x="9162059" y="2313432"/>
             <a:ext cx="2298116" cy="402336"/>
           </a:xfrm>
           <a:prstGeom prst="rect">
@@ -5127,117 +10536,9 @@
           </a:p>
         </p:txBody>
       </p:sp>
-      <p:pic>
-        <p:nvPicPr>
-          <p:cNvPr id="6" name="Image 0" descr="preencoded.png">    </p:cNvPr>
-          <p:cNvPicPr>
-            <a:picLocks noChangeAspect="1"/>
-          </p:cNvPicPr>
-          <p:nvPr/>
-        </p:nvPicPr>
-        <p:blipFill>
-          <a:blip r:embed="rId1"/>
-          <a:stretch>
-            <a:fillRect/>
-          </a:stretch>
-        </p:blipFill>
-        <p:spPr>
-          <a:xfrm>
-            <a:off x="566928" y="1481328"/>
-            <a:ext cx="5120640" cy="4114800"/>
-          </a:xfrm>
-          <a:prstGeom prst="rect">
-            <a:avLst/>
-          </a:prstGeom>
-        </p:spPr>
-      </p:pic>
-      <p:sp>
-        <p:nvSpPr>
-          <p:cNvPr id="7" name="Text 4"/>
-          <p:cNvSpPr/>
-          <p:nvPr/>
-        </p:nvSpPr>
-        <p:spPr>
-          <a:xfrm>
-            <a:off x="6053328" y="1481328"/>
-            <a:ext cx="2117147" cy="493776"/>
-          </a:xfrm>
-          <a:prstGeom prst="rect">
-            <a:avLst/>
-          </a:prstGeom>
-          <a:noFill/>
-          <a:ln/>
-        </p:spPr>
-        <p:txBody>
-          <a:bodyPr wrap="square" lIns="0" tIns="0" rIns="0" bIns="0" rtlCol="0" anchor="ctr"/>
-          <a:lstStyle/>
-          <a:p>
-            <a:pPr indent="0" marL="0">
-              <a:lnSpc>
-                <a:spcPct val="120000"/>
-              </a:lnSpc>
-              <a:buNone/>
-            </a:pPr>
-            <a:r>
-              <a:rPr lang="en-US" sz="1300" dirty="0">
-                <a:solidFill>
-                  <a:srgbClr val="718096"/>
-                </a:solidFill>
-                <a:latin typeface="Pretendard" pitchFamily="34" charset="0"/>
-                <a:ea typeface="Pretendard" pitchFamily="34" charset="-122"/>
-                <a:cs typeface="Pretendard" pitchFamily="34" charset="-120"/>
-              </a:rPr>
-              <a:t>교통 접근성</a:t>
-            </a:r>
-            <a:endParaRPr lang="en-US" sz="1300" dirty="0"/>
-          </a:p>
-        </p:txBody>
-      </p:sp>
-      <p:sp>
-        <p:nvSpPr>
-          <p:cNvPr id="8" name="Text 5"/>
-          <p:cNvSpPr/>
-          <p:nvPr/>
-        </p:nvSpPr>
-        <p:spPr>
-          <a:xfrm>
-            <a:off x="8170475" y="1481328"/>
-            <a:ext cx="3454292" cy="493776"/>
-          </a:xfrm>
-          <a:prstGeom prst="rect">
-            <a:avLst/>
-          </a:prstGeom>
-          <a:noFill/>
-          <a:ln/>
-        </p:spPr>
-        <p:txBody>
-          <a:bodyPr wrap="square" lIns="0" tIns="0" rIns="0" bIns="0" rtlCol="0" anchor="ctr"/>
-          <a:lstStyle/>
-          <a:p>
-            <a:pPr indent="0" marL="0">
-              <a:lnSpc>
-                <a:spcPct val="120000"/>
-              </a:lnSpc>
-              <a:buNone/>
-            </a:pPr>
-            <a:r>
-              <a:rPr lang="en-US" sz="1300" b="1" dirty="0">
-                <a:solidFill>
-                  <a:srgbClr val="10161F"/>
-                </a:solidFill>
-                <a:latin typeface="Pretendard" pitchFamily="34" charset="0"/>
-                <a:ea typeface="Pretendard" pitchFamily="34" charset="-122"/>
-                <a:cs typeface="Pretendard" pitchFamily="34" charset="-120"/>
-              </a:rPr>
-              <a:t>{"ok":true,"mocked":true,"extractedFields":{"area_signal":"역삼","asset_type":"오피스빌딩","price_band":"300억","size_signal":"3000평(약 9917.</a:t>
-            </a:r>
-            <a:endParaRPr lang="en-US" sz="1300" dirty="0"/>
-          </a:p>
-        </p:txBody>
-      </p:sp>
-      <p:sp>
-        <p:nvSpPr>
-          <p:cNvPr id="9" name="Text 6"/>
+      <p:sp>
+        <p:nvSpPr>
+          <p:cNvPr id="6" name="Text 4"/>
           <p:cNvSpPr/>
           <p:nvPr/>
         </p:nvSpPr>
@@ -5276,7 +10577,7 @@
       </p:sp>
       <p:sp>
         <p:nvSpPr>
-          <p:cNvPr id="10" name="Text 7"/>
+          <p:cNvPr id="7" name="Text 5"/>
           <p:cNvSpPr/>
           <p:nvPr/>
         </p:nvSpPr>
@@ -5310,45 +10611,6 @@
               <a:t>3</a:t>
             </a:r>
             <a:endParaRPr lang="en-US" sz="900" dirty="0"/>
-          </a:p>
-        </p:txBody>
-      </p:sp>
-      <p:sp>
-        <p:nvSpPr>
-          <p:cNvPr id="11" name="Text 8"/>
-          <p:cNvSpPr/>
-          <p:nvPr/>
-        </p:nvSpPr>
-        <p:spPr>
-          <a:xfrm>
-            <a:off x="566928" y="1481328"/>
-            <a:ext cx="11057839" cy="9692640"/>
-          </a:xfrm>
-          <a:prstGeom prst="rect">
-            <a:avLst/>
-          </a:prstGeom>
-          <a:noFill/>
-          <a:ln/>
-        </p:spPr>
-        <p:txBody>
-          <a:bodyPr wrap="square" lIns="0" tIns="0" rIns="0" bIns="0" rtlCol="0" anchor="t"/>
-          <a:lstStyle/>
-          <a:p>
-            <a:pPr indent="0" marL="0">
-              <a:buNone/>
-            </a:pPr>
-            <a:r>
-              <a:rPr lang="en-US" sz="1000" dirty="0">
-                <a:solidFill>
-                  <a:srgbClr val="10161F"/>
-                </a:solidFill>
-                <a:latin typeface="Pretendard" pitchFamily="34" charset="0"/>
-                <a:ea typeface="Pretendard" pitchFamily="34" charset="-122"/>
-                <a:cs typeface="Pretendard" pitchFamily="34" charset="-120"/>
-              </a:rPr>
-              <a:t>{"ok":true,"mocked":true,"extractedFields":{"area_signal":"역삼","asset_type":"오피스빌딩","price_band":"300억","size_signal":"3000평(약 9917.4㎡)"},"extractedFacts":{"region":"역삼","exactAddressCandidate":"역삼동 742-1","assetType":"오피스빌딩","priceText":"300억","sizeText":"3000평(약 9917.4㎡)","currentUse":"오피스","currentUseSignal":"근린생활시설","leaseSignal":"임대중","vacancySignal":"공실없음","tenantNames":["쿠팡","네이버"],"unitRentTexts":["301호: 1500만"],"sellerMotivationText":"자산 효율화","brokerNotes":["초역세권 매물"]},"detectedSensitiveFields":["exact_address","tenant_name"],"ambiguousFields":[],"warnings":[],"areaSignal":"역삼","assetType":"오피스빌딩","priceBand":"300억","sizeSignal":"3000평(약 9917.4㎡)","dealType":"매각","buildingName":"역삼 센트럴타워","exactAddress":"역삼동 742-1","totalFloorArea":9917.3,"buildYear":2015,"currentUseSignal":"근린생활시설","vacancySignal":"공실 없음","fitSummary":"초역세권 근생 빌딩으로 시행/사옥 매입에 최적화","cautionSummary":"주요 임차인 만기 조율 필요","hiddenFields":["exact_address","seller_motivation"],"confidence":{"areaSignal":"confirmed","assetType":"confirmed","priceBand":"ai_hypothesis","fitSummary":"ai_hypothesis"},"missingData":["sizeSignal"],"boundaryNote":"본 자료는 실거래 통계 기반 참고치입니다.","buyerType":"법인 사옥형","budgetRange":{"min":50,"max":80,"display":"50억~80억"},"preferredRegions":["강남","성수"],"assetTypes":["꼬마빌딩","사옥용"],"purchasePurpose":"사옥용 매입","mustHave":["초역세권","주차"],"niceToHave":["테라스","루프탑"],"riskTolerance":"medium","financingNote":"자본금 50% 준비","missingQuestions":["구체적인 입주 시기가 언제인가요?","선호하는 수익률이 있나요?"],"privacyNotes":["연락처 비공개"],"fitReasons":["매수자 예산(50-80억)에 부합하는 매물입니다.","요청하신 성수/강남 권역에 해당합니다."],"cautionReasons":["요청한 용도와 달리 명도 협의가 다소 필요합니다."],"recommendedNextAction":"현장 답사 제안","kakaoMessage":"안녕하세요! 요청하신 조건에 부합하는 추천 매물이 있어 안내해 드립니다. 확인해보시고 피드백 부탁드립니다.","title":"강남 역삼역 초역세권 오피스 사옥용 빌딩 매각","shortSummary":"역삼역 도보 5분 거리의 준신축급 대형 오피스빌딩입니다.","dealPoints":["초역세권","사옥 최적"],"cautionPoints":["명도 조율 필요"],"hiddenInfoNotice":["보증금 및 지번은 인가 후 확인 가능"],"gateMessage":"G1 등급 등록이 필요합니다.","kakaoText":"강남 역삼역 오피스 빌딩 매각 안내입니다.","exactUnitCandidate":"101호","floor":"1층","areaSqmText":"150㎡","spaceType":"office","depositText":"5000만","monthlyRentText":"400만","maintenanceFeeText":"50만","availableFromText":"즉시입주","leaseTermMonthsText":"24","incentivesText":"렌트프리 2개월","restrictions":[],"landlordIdentity":"김성수","currentTenant":"스타트업","vacancyReason":"이전 확장","rentNegotiation":"협의 가능","region":"성수동","areaSqm":150,"deposit":5000,"monthlyRent":400,"maintenanceFee":50,"availableFrom":"즉시입주","leaseTermMonths":24,"incentives":{"rentFreeMonths":2,"interiorSupport":"일부 인테리어 지원","freeRentDetail":"렌트프리 2개월 지원"},"shortSummaryLease":"성수역 도보 5분 거리 1층 리테일 상가 매물입니다."}</a:t>
-            </a:r>
-            <a:endParaRPr lang="en-US" sz="1000" dirty="0"/>
           </a:p>
         </p:txBody>
       </p:sp>
@@ -5437,7 +10699,7 @@
                 <a:ea typeface="Arial" pitchFamily="34" charset="-122"/>
                 <a:cs typeface="Arial" pitchFamily="34" charset="-120"/>
               </a:rPr>
-              <a:t>04</a:t>
+              <a:t>03</a:t>
             </a:r>
             <a:endParaRPr lang="en-US" sz="1300" dirty="0"/>
           </a:p>
@@ -5476,7 +10738,7 @@
                 <a:ea typeface="Arial" pitchFamily="34" charset="-122"/>
                 <a:cs typeface="Arial" pitchFamily="34" charset="-120"/>
               </a:rPr>
-              <a:t>Building</a:t>
+              <a:t>Land</a:t>
             </a:r>
             <a:endParaRPr lang="en-US" sz="950" dirty="0"/>
           </a:p>
@@ -5515,7 +10777,7 @@
                 <a:ea typeface="Pretendard" pitchFamily="34" charset="-122"/>
                 <a:cs typeface="Pretendard" pitchFamily="34" charset="-120"/>
               </a:rPr>
-              <a:t>이 건물, 어떤 자산인가</a:t>
+              <a:t>토지 현황</a:t>
             </a:r>
             <a:endParaRPr lang="en-US" sz="2300" dirty="0"/>
           </a:p>
@@ -5554,7 +10816,7 @@
                 <a:ea typeface="Pretendard" pitchFamily="34" charset="-122"/>
                 <a:cs typeface="Pretendard" pitchFamily="34" charset="-120"/>
               </a:rPr>
-              <a:t>건축물 개요 및 물리 스펙</a:t>
+              <a:t>토지이용계획 · 개별공시지가</a:t>
             </a:r>
             <a:endParaRPr lang="en-US" sz="1100" dirty="0"/>
           </a:p>
@@ -5569,7 +10831,7 @@
         <p:spPr>
           <a:xfrm>
             <a:off x="566928" y="1645920"/>
-            <a:ext cx="2606040" cy="402336"/>
+            <a:ext cx="2606040" cy="438912"/>
           </a:xfrm>
           <a:prstGeom prst="rect">
             <a:avLst/>
@@ -5588,7 +10850,7 @@
               <a:buNone/>
             </a:pPr>
             <a:r>
-              <a:rPr lang="en-US" sz="1400" dirty="0">
+              <a:rPr lang="en-US" sz="1350" dirty="0">
                 <a:solidFill>
                   <a:srgbClr val="718096"/>
                 </a:solidFill>
@@ -5596,9 +10858,9 @@
                 <a:ea typeface="Pretendard" pitchFamily="34" charset="-122"/>
                 <a:cs typeface="Pretendard" pitchFamily="34" charset="-120"/>
               </a:rPr>
-              <a:t>{"ok"</a:t>
-            </a:r>
-            <a:endParaRPr lang="en-US" sz="1400" dirty="0"/>
+              <a:t>용도지역</a:t>
+            </a:r>
+            <a:endParaRPr lang="en-US" sz="1350" dirty="0"/>
           </a:p>
         </p:txBody>
       </p:sp>
@@ -5611,7 +10873,7 @@
         <p:spPr>
           <a:xfrm>
             <a:off x="3172968" y="1645920"/>
-            <a:ext cx="4251960" cy="402336"/>
+            <a:ext cx="4251960" cy="438912"/>
           </a:xfrm>
           <a:prstGeom prst="rect">
             <a:avLst/>
@@ -5630,7 +10892,7 @@
               <a:buNone/>
             </a:pPr>
             <a:r>
-              <a:rPr lang="en-US" sz="1400" b="1" dirty="0">
+              <a:rPr lang="en-US" sz="1350" b="1" dirty="0">
                 <a:solidFill>
                   <a:srgbClr val="10161F"/>
                 </a:solidFill>
@@ -5638,9 +10900,9 @@
                 <a:ea typeface="Pretendard" pitchFamily="34" charset="-122"/>
                 <a:cs typeface="Pretendard" pitchFamily="34" charset="-120"/>
               </a:rPr>
-              <a:t>true,"mocked":true,"extractedFields":{"area_signal":"역삼","asset_type":"오피스빌딩","price_band":"300억","size_signal":"3000평(약 9917.4㎡)"},"extractedFacts":{"region":"역삼","exactAddressCandidate":"역삼동 742-1","assetType":"오피스빌딩","priceText":"300억","sizeText":"3000평(약 9917.4㎡)","currentUse":"오피스","currentUseSignal":"근린생활시설","leaseSignal":"임대중","vacancySignal":"공실없음","tenantNames":"쿠팡","네이버","unitRentTexts":"301호: 1500만","sellerMotivationText":"자산 효율화","brokerNotes":"초역세권 매물"},"detectedSensitiveFields":"exact_address","tenant_name","ambiguousFields":,"warnings":,"areaSignal":"역삼","assetType":"오피스빌딩","priceBand":"300억","sizeSignal":"3000평(약 9917.4㎡)","dealType":"매각","buildingName":"역삼 센트럴타워","exactAddress":"역삼동 742-1","totalFloorArea":9917.3,"buildYear":2015,"currentUseSignal":"근린생활시설","vacancySignal":"공실 없음","fitSummary":"초역세권 근생 빌딩으로 시행/사옥 매입에 최적화","cautionSummary":"주요 임차인 만기 조율 필요","hiddenFields":"exact_address","seller_motivation","confidence":{"areaSignal":"confirmed","assetType":"confirmed","priceBand":"ai_hypothesis","fitSummary":"ai_hypothesis"},"missingData":"sizeSignal","boundaryNote":"본 자료는 실거래 통계 기반 참고치입니다.","buyerType":"법인 사옥형","budgetRange":{"min":50,"max":80,"display":"50억~80억"},"preferredRegions":"강남","성수","assetTypes":"꼬마빌딩","사옥용","purchasePurpose":"사옥용 매입","mustHave":"초역세권","주차","niceToHave":"테라스","루프탑","riskTolerance":"medium","financingNote":"자본금 50% 준비","missingQuestions":"구체적인 입주 시기가 언제인가요?","선호하는 수익률이 있나요?","privacyNotes":"연락처 비공개","fitReasons":"매수자 예산(50-80억)에 부합하는 매물입니다.","요청하신 성수/강남 권역에 해당합니다.","cautionReasons":"요청한 용도와 달리 명도 협의가 다소 필요합니다.","recommendedNextAction":"현장 답사 제안","kakaoMessage":"안녕하세요! 요청하신 조건에 부합하는 추천 매물이 있어 안내해 드립니다. 확인해보시고 피드백 부탁드립니다.","title":"강남 역삼역 초역세권 오피스 사옥용 빌딩 매각","shortSummary":"역삼역 도보 5분 거리의 준신축급 대형 오피스빌딩입니다.","dealPoints":"초역세권","사옥 최적","cautionPoints":"명도 조율 필요","hiddenInfoNotice":"보증금 및 지번은 인가 후 확인 가능","gateMessage":"G1 등급 등록이 필요합니다.","kakaoText":"강남 역삼역 오피스 빌딩 매각 안내입니다.","exactUnitCandidate":"101호","floor":"1층","areaSqmText":"150㎡","spaceType":"office","depositText":"5000만","monthlyRentText":"400만","maintenanceFeeText":"50만","availableFromText":"즉시입주","leaseTermMonthsText":"24","incentivesText":"렌트프리 2개월","restrictions":,"landlordIdentity":"김성수","currentTenant":"스타트업","vacancyReason":"이전 확장","rentNegotiation":"협의 가능","region":"성수동","areaSqm":150,"deposit":5000,"monthlyRent":400,"maintenanceFee":50,"availableFrom":"즉시입주","leaseTermMonths":24,"incentives":{"rentFreeMonths":2,"interiorSupport":"일부 인테리어 지원","freeRentDetail":"렌트프리 2개월 지원"},"shortSummaryLease":"성수역 도보 5분 거리 1층 리테일 상가 매물입니다."}</a:t>
-            </a:r>
-            <a:endParaRPr lang="en-US" sz="1400" dirty="0"/>
+              <a:t>일반상업지역</a:t>
+            </a:r>
+            <a:endParaRPr lang="en-US" sz="1350" dirty="0"/>
           </a:p>
         </p:txBody>
       </p:sp>
@@ -5684,7 +10946,7 @@
             </a:avLst>
           </a:prstGeom>
           <a:solidFill>
-            <a:srgbClr val="F3EBDA"/>
+            <a:srgbClr val="BEE3F8"/>
           </a:solidFill>
           <a:ln/>
         </p:spPr>
@@ -5704,7 +10966,7 @@
             <a:avLst/>
           </a:prstGeom>
           <a:solidFill>
-            <a:srgbClr val="977024"/>
+            <a:srgbClr val="2B6CB0"/>
           </a:solidFill>
           <a:ln/>
         </p:spPr>
@@ -5733,6 +10995,17 @@
             <a:pPr indent="0" marL="0">
               <a:buNone/>
             </a:pPr>
+            <a:r>
+              <a:rPr lang="en-US" sz="1050" b="1" dirty="0">
+                <a:solidFill>
+                  <a:srgbClr val="2B6CB0"/>
+                </a:solidFill>
+                <a:latin typeface="Pretendard" pitchFamily="34" charset="0"/>
+                <a:ea typeface="Pretendard" pitchFamily="34" charset="-122"/>
+                <a:cs typeface="Pretendard" pitchFamily="34" charset="-120"/>
+              </a:rPr>
+              <a:t>입지 및 권리관계 실사 포인트</a:t>
+            </a:r>
             <a:endParaRPr lang="en-US" sz="1050" dirty="0"/>
           </a:p>
         </p:txBody>
@@ -5758,11 +11031,12 @@
           <a:bodyPr wrap="square" lIns="0" tIns="0" rIns="0" bIns="0" rtlCol="0" anchor="t"/>
           <a:lstStyle/>
           <a:p>
-            <a:pPr indent="0" marL="0">
+            <a:pPr marL="342900" indent="-342900">
               <a:lnSpc>
                 <a:spcPct val="120000"/>
               </a:lnSpc>
-              <a:buNone/>
+              <a:buSzPct val="100000"/>
+              <a:buChar char="•"/>
             </a:pPr>
             <a:r>
               <a:rPr lang="en-US" sz="930" dirty="0">
@@ -5773,15 +11047,223 @@
                 <a:ea typeface="Pretendard" pitchFamily="34" charset="-122"/>
                 <a:cs typeface="Pretendard" pitchFamily="34" charset="-120"/>
               </a:rPr>
-              <a:t>{"ok":true,"mocked":true,"extractedFields":{"area_signal":"역삼","asset_type":"오피스빌딩","price_band":"300억","size_signal":"3</a:t>
+              <a:t>물건 접면 도로 폭 및 진출입 여건은 현장 실사 확인 사항입니다</a:t>
             </a:r>
             <a:endParaRPr lang="en-US" sz="930" dirty="0"/>
           </a:p>
-        </p:txBody>
-      </p:sp>
-      <p:sp>
-        <p:nvSpPr>
-          <p:cNvPr id="14" name="Text 12"/>
+          <a:p>
+            <a:pPr marL="342900" indent="-342900">
+              <a:lnSpc>
+                <a:spcPct val="120000"/>
+              </a:lnSpc>
+              <a:buSzPct val="100000"/>
+              <a:buChar char="•"/>
+            </a:pPr>
+            <a:r>
+              <a:rPr lang="en-US" sz="930" dirty="0">
+                <a:solidFill>
+                  <a:srgbClr val="10161F"/>
+                </a:solidFill>
+                <a:latin typeface="Pretendard" pitchFamily="34" charset="0"/>
+                <a:ea typeface="Pretendard" pitchFamily="34" charset="-122"/>
+                <a:cs typeface="Pretendard" pitchFamily="34" charset="-120"/>
+              </a:rPr>
+              <a:t>등기부등본상 권리관계 및 제한물권 설정 여부를 확인하였습니다</a:t>
+            </a:r>
+            <a:endParaRPr lang="en-US" sz="930" dirty="0"/>
+          </a:p>
+          <a:p>
+            <a:pPr marL="342900" indent="-342900">
+              <a:lnSpc>
+                <a:spcPct val="120000"/>
+              </a:lnSpc>
+              <a:buSzPct val="100000"/>
+              <a:buChar char="•"/>
+            </a:pPr>
+            <a:r>
+              <a:rPr lang="en-US" sz="930" dirty="0">
+                <a:solidFill>
+                  <a:srgbClr val="10161F"/>
+                </a:solidFill>
+                <a:latin typeface="Pretendard" pitchFamily="34" charset="0"/>
+                <a:ea typeface="Pretendard" pitchFamily="34" charset="-122"/>
+                <a:cs typeface="Pretendard" pitchFamily="34" charset="-120"/>
+              </a:rPr>
+              <a:t>지구단위계획 및 토지이용계획상 허용 용도를 검토하였습니다</a:t>
+            </a:r>
+            <a:endParaRPr lang="en-US" sz="930" dirty="0"/>
+          </a:p>
+        </p:txBody>
+      </p:sp>
+      <p:sp>
+        <p:nvSpPr>
+          <p:cNvPr id="14" name="Shape 12"/>
+          <p:cNvSpPr/>
+          <p:nvPr/>
+        </p:nvSpPr>
+        <p:spPr>
+          <a:xfrm>
+            <a:off x="7784287" y="3977640"/>
+            <a:ext cx="3840480" cy="2148840"/>
+          </a:xfrm>
+          <a:prstGeom prst="roundRect">
+            <a:avLst>
+              <a:gd name="adj" fmla="val 2553"/>
+            </a:avLst>
+          </a:prstGeom>
+          <a:solidFill>
+            <a:srgbClr val="BEE3F8"/>
+          </a:solidFill>
+          <a:ln/>
+        </p:spPr>
+      </p:sp>
+      <p:sp>
+        <p:nvSpPr>
+          <p:cNvPr id="15" name="Shape 13"/>
+          <p:cNvSpPr/>
+          <p:nvPr/>
+        </p:nvSpPr>
+        <p:spPr>
+          <a:xfrm>
+            <a:off x="7784287" y="4032504"/>
+            <a:ext cx="36576" cy="2039112"/>
+          </a:xfrm>
+          <a:prstGeom prst="rect">
+            <a:avLst/>
+          </a:prstGeom>
+          <a:solidFill>
+            <a:srgbClr val="2B6CB0"/>
+          </a:solidFill>
+          <a:ln/>
+        </p:spPr>
+      </p:sp>
+      <p:sp>
+        <p:nvSpPr>
+          <p:cNvPr id="16" name="Text 14"/>
+          <p:cNvSpPr/>
+          <p:nvPr/>
+        </p:nvSpPr>
+        <p:spPr>
+          <a:xfrm>
+            <a:off x="7967167" y="4087368"/>
+            <a:ext cx="3511296" cy="201168"/>
+          </a:xfrm>
+          <a:prstGeom prst="rect">
+            <a:avLst/>
+          </a:prstGeom>
+          <a:noFill/>
+          <a:ln/>
+        </p:spPr>
+        <p:txBody>
+          <a:bodyPr wrap="square" lIns="0" tIns="0" rIns="0" bIns="0" rtlCol="0" anchor="ctr"/>
+          <a:lstStyle/>
+          <a:p>
+            <a:pPr indent="0" marL="0">
+              <a:buNone/>
+            </a:pPr>
+            <a:r>
+              <a:rPr lang="en-US" sz="1050" b="1" dirty="0">
+                <a:solidFill>
+                  <a:srgbClr val="2B6CB0"/>
+                </a:solidFill>
+                <a:latin typeface="Pretendard" pitchFamily="34" charset="0"/>
+                <a:ea typeface="Pretendard" pitchFamily="34" charset="-122"/>
+                <a:cs typeface="Pretendard" pitchFamily="34" charset="-120"/>
+              </a:rPr>
+              <a:t>임대차 및 운용 관리 상태</a:t>
+            </a:r>
+            <a:endParaRPr lang="en-US" sz="1050" dirty="0"/>
+          </a:p>
+        </p:txBody>
+      </p:sp>
+      <p:sp>
+        <p:nvSpPr>
+          <p:cNvPr id="17" name="Text 15"/>
+          <p:cNvSpPr/>
+          <p:nvPr/>
+        </p:nvSpPr>
+        <p:spPr>
+          <a:xfrm>
+            <a:off x="7967167" y="4306824"/>
+            <a:ext cx="3511296" cy="1746504"/>
+          </a:xfrm>
+          <a:prstGeom prst="rect">
+            <a:avLst/>
+          </a:prstGeom>
+          <a:noFill/>
+          <a:ln/>
+        </p:spPr>
+        <p:txBody>
+          <a:bodyPr wrap="square" lIns="0" tIns="0" rIns="0" bIns="0" rtlCol="0" anchor="t"/>
+          <a:lstStyle/>
+          <a:p>
+            <a:pPr marL="342900" indent="-342900">
+              <a:lnSpc>
+                <a:spcPct val="120000"/>
+              </a:lnSpc>
+              <a:buSzPct val="100000"/>
+              <a:buChar char="•"/>
+            </a:pPr>
+            <a:r>
+              <a:rPr lang="en-US" sz="930" dirty="0">
+                <a:solidFill>
+                  <a:srgbClr val="10161F"/>
+                </a:solidFill>
+                <a:latin typeface="Pretendard" pitchFamily="34" charset="0"/>
+                <a:ea typeface="Pretendard" pitchFamily="34" charset="-122"/>
+                <a:cs typeface="Pretendard" pitchFamily="34" charset="-120"/>
+              </a:rPr>
+              <a:t>주요 임차인별 계약 만기 분산 및 렌트롤 실사가 필요합니다</a:t>
+            </a:r>
+            <a:endParaRPr lang="en-US" sz="930" dirty="0"/>
+          </a:p>
+          <a:p>
+            <a:pPr marL="342900" indent="-342900">
+              <a:lnSpc>
+                <a:spcPct val="120000"/>
+              </a:lnSpc>
+              <a:buSzPct val="100000"/>
+              <a:buChar char="•"/>
+            </a:pPr>
+            <a:r>
+              <a:rPr lang="en-US" sz="930" dirty="0">
+                <a:solidFill>
+                  <a:srgbClr val="10161F"/>
+                </a:solidFill>
+                <a:latin typeface="Pretendard" pitchFamily="34" charset="0"/>
+                <a:ea typeface="Pretendard" pitchFamily="34" charset="-122"/>
+                <a:cs typeface="Pretendard" pitchFamily="34" charset="-120"/>
+              </a:rPr>
+              <a:t>관리비 정산 내역 및 수선유지비 집행 이력을 점검하였습니다</a:t>
+            </a:r>
+            <a:endParaRPr lang="en-US" sz="930" dirty="0"/>
+          </a:p>
+          <a:p>
+            <a:pPr marL="342900" indent="-342900">
+              <a:lnSpc>
+                <a:spcPct val="120000"/>
+              </a:lnSpc>
+              <a:buSzPct val="100000"/>
+              <a:buChar char="•"/>
+            </a:pPr>
+            <a:r>
+              <a:rPr lang="en-US" sz="930" dirty="0">
+                <a:solidFill>
+                  <a:srgbClr val="10161F"/>
+                </a:solidFill>
+                <a:latin typeface="Pretendard" pitchFamily="34" charset="0"/>
+                <a:ea typeface="Pretendard" pitchFamily="34" charset="-122"/>
+                <a:cs typeface="Pretendard" pitchFamily="34" charset="-120"/>
+              </a:rPr>
+              <a:t>취득세 감면 및 대출 조달 구조는 금융·세무 자문 후 확정됩니다</a:t>
+            </a:r>
+            <a:endParaRPr lang="en-US" sz="930" dirty="0"/>
+          </a:p>
+        </p:txBody>
+      </p:sp>
+      <p:sp>
+        <p:nvSpPr>
+          <p:cNvPr id="18" name="Text 16"/>
           <p:cNvSpPr/>
           <p:nvPr/>
         </p:nvSpPr>
@@ -5820,7 +11302,7 @@
       </p:sp>
       <p:sp>
         <p:nvSpPr>
-          <p:cNvPr id="15" name="Text 13"/>
+          <p:cNvPr id="19" name="Text 17"/>
           <p:cNvSpPr/>
           <p:nvPr/>
         </p:nvSpPr>
@@ -5851,7 +11333,7 @@
                 <a:ea typeface="Arial" pitchFamily="34" charset="-122"/>
                 <a:cs typeface="Arial" pitchFamily="34" charset="-120"/>
               </a:rPr>
-              <a:t>4</a:t>
+              <a:t>3</a:t>
             </a:r>
             <a:endParaRPr lang="en-US" sz="900" dirty="0"/>
           </a:p>
@@ -5942,7 +11424,7 @@
                 <a:ea typeface="Arial" pitchFamily="34" charset="-122"/>
                 <a:cs typeface="Arial" pitchFamily="34" charset="-120"/>
               </a:rPr>
-              <a:t>05</a:t>
+              <a:t>04</a:t>
             </a:r>
             <a:endParaRPr lang="en-US" sz="1300" dirty="0"/>
           </a:p>
@@ -5981,7 +11463,7 @@
                 <a:ea typeface="Arial" pitchFamily="34" charset="-122"/>
                 <a:cs typeface="Arial" pitchFamily="34" charset="-120"/>
               </a:rPr>
-              <a:t>Market Position</a:t>
+              <a:t>Building</a:t>
             </a:r>
             <a:endParaRPr lang="en-US" sz="950" dirty="0"/>
           </a:p>
@@ -6020,7 +11502,7 @@
                 <a:ea typeface="Pretendard" pitchFamily="34" charset="-122"/>
                 <a:cs typeface="Pretendard" pitchFamily="34" charset="-120"/>
               </a:rPr>
-              <a:t>시장 내 자산 위치와 가격 경쟁력</a:t>
+              <a:t>이 건물, 어떤 자산인가</a:t>
             </a:r>
             <a:endParaRPr lang="en-US" sz="2300" dirty="0"/>
           </a:p>
@@ -6074,7 +11556,7 @@
         <p:spPr>
           <a:xfrm>
             <a:off x="566928" y="1645920"/>
-            <a:ext cx="2606040" cy="402336"/>
+            <a:ext cx="2606040" cy="438912"/>
           </a:xfrm>
           <a:prstGeom prst="rect">
             <a:avLst/>
@@ -6093,7 +11575,7 @@
               <a:buNone/>
             </a:pPr>
             <a:r>
-              <a:rPr lang="en-US" sz="1400" dirty="0">
+              <a:rPr lang="en-US" sz="1350" dirty="0">
                 <a:solidFill>
                   <a:srgbClr val="718096"/>
                 </a:solidFill>
@@ -6103,7 +11585,7 @@
               </a:rPr>
               <a:t>{"ok"</a:t>
             </a:r>
-            <a:endParaRPr lang="en-US" sz="1400" dirty="0"/>
+            <a:endParaRPr lang="en-US" sz="1350" dirty="0"/>
           </a:p>
         </p:txBody>
       </p:sp>
@@ -6116,7 +11598,7 @@
         <p:spPr>
           <a:xfrm>
             <a:off x="3172968" y="1645920"/>
-            <a:ext cx="4251960" cy="402336"/>
+            <a:ext cx="4251960" cy="438912"/>
           </a:xfrm>
           <a:prstGeom prst="rect">
             <a:avLst/>
@@ -6135,7 +11617,7 @@
               <a:buNone/>
             </a:pPr>
             <a:r>
-              <a:rPr lang="en-US" sz="1400" b="1" dirty="0">
+              <a:rPr lang="en-US" sz="1350" b="1" dirty="0">
                 <a:solidFill>
                   <a:srgbClr val="10161F"/>
                 </a:solidFill>
@@ -6143,9 +11625,9 @@
                 <a:ea typeface="Pretendard" pitchFamily="34" charset="-122"/>
                 <a:cs typeface="Pretendard" pitchFamily="34" charset="-120"/>
               </a:rPr>
-              <a:t>true,"mocked":true,"extractedFields":{"area_signal":"역삼","asset_type":"오피스빌딩","price_band":"300억","size_signal":"3000평(약 9917.4㎡)"},"extractedFacts":{"region":"역삼","exactAddressCandidate":"역삼동 742-1","assetType":"오피스빌딩","priceText":"300억","sizeText":"3000평(약 9917.4㎡)","currentUse":"오피스","currentUseSignal":"근린생활시설","leaseSignal":"임대중","vacancySignal":"공실없음","tenantNames":"쿠팡","네이버","unitRentTexts":"301호: 1500만","sellerMotivationText":"자산 효율화","brokerNotes":"초역세권 매물"},"detectedSensitiveFields":"exact_address","tenant_name","ambiguousFields":,"warnings":,"areaSignal":"역삼","assetType":"오피스빌딩","priceBand":"300억","sizeSignal":"3000평(약 9917.4㎡)","dealType":"매각","buildingName":"역삼 센트럴타워","exactAddress":"역삼동 742-1","totalFloorArea":9917.3,"buildYear":2015,"currentUseSignal":"근린생활시설","vacancySignal":"공실 없음","fitSummary":"초역세권 근생 빌딩으로 시행/사옥 매입에 최적화","cautionSummary":"주요 임차인 만기 조율 필요","hiddenFields":"exact_address","seller_motivation","confidence":{"areaSignal":"confirmed","assetType":"confirmed","priceBand":"ai_hypothesis","fitSummary":"ai_hypothesis"},"missingData":"sizeSignal","boundaryNote":"본 자료는 실거래 통계 기반 참고치입니다.","buyerType":"법인 사옥형","budgetRange":{"min":50,"max":80,"display":"50억~80억"},"preferredRegions":"강남","성수","assetTypes":"꼬마빌딩","사옥용","purchasePurpose":"사옥용 매입","mustHave":"초역세권","주차","niceToHave":"테라스","루프탑","riskTolerance":"medium","financingNote":"자본금 50% 준비","missingQuestions":"구체적인 입주 시기가 언제인가요?","선호하는 수익률이 있나요?","privacyNotes":"연락처 비공개","fitReasons":"매수자 예산(50-80억)에 부합하는 매물입니다.","요청하신 성수/강남 권역에 해당합니다.","cautionReasons":"요청한 용도와 달리 명도 협의가 다소 필요합니다.","recommendedNextAction":"현장 답사 제안","kakaoMessage":"안녕하세요! 요청하신 조건에 부합하는 추천 매물이 있어 안내해 드립니다. 확인해보시고 피드백 부탁드립니다.","title":"강남 역삼역 초역세권 오피스 사옥용 빌딩 매각","shortSummary":"역삼역 도보 5분 거리의 준신축급 대형 오피스빌딩입니다.","dealPoints":"초역세권","사옥 최적","cautionPoints":"명도 조율 필요","hiddenInfoNotice":"보증금 및 지번은 인가 후 확인 가능","gateMessage":"G1 등급 등록이 필요합니다.","kakaoText":"강남 역삼역 오피스 빌딩 매각 안내입니다.","exactUnitCandidate":"101호","floor":"1층","areaSqmText":"150㎡","spaceType":"office","depositText":"5000만","monthlyRentText":"400만","maintenanceFeeText":"50만","availableFromText":"즉시입주","leaseTermMonthsText":"24","incentivesText":"렌트프리 2개월","restrictions":,"landlordIdentity":"김성수","currentTenant":"스타트업","vacancyReason":"이전 확장","rentNegotiation":"협의 가능","region":"성수동","areaSqm":150,"deposit":5000,"monthlyRent":400,"maintenanceFee":50,"availableFrom":"즉시입주","leaseTermMonths":24,"incentives":{"rentFreeMonths":2,"interiorSupport":"일부 인테리어 지원","freeRentDetail":"렌트프리 2개월 지원"},"shortSummaryLease":"성수역 도보 5분 거리 1층 리테일 상가 매물입니다."}</a:t>
-            </a:r>
-            <a:endParaRPr lang="en-US" sz="1400" dirty="0"/>
+              <a:t>true,"mocked":true,"extractedFields":{"area_signal":"역삼","asset_type":"건물명 비공개","price_band":"300억","size_signal":"3000평(약 9917.4㎡)"},"extractedFacts":{"region":"역삼","exactAddressCandidate":"역삼동 742-1","assetType":"건물명 비공개","priceText":"300억","sizeText":"3000평(약 9917.4㎡)","currentUse":"오피스","currentUseSignal":"근린생활시설","leaseSignal":"임대중","vacancySignal":"공실없음","tenantNames":"쿠팡","네이버","unitRentTexts":"301호: 1500만","sellerMotivationText":"자산 효율화","brokerNotes":"역세권 도보 3분 이내 매물"},"detectedSensitiveFields":"exact_address","tenant_name","ambiguousFields":,"warnings":,"areaSignal":"역삼","assetType":"건물명 비공개","priceBand":"300억","sizeSignal":"3000평(약 9917.4㎡)","dealType":"매각","buildingName":"역삼 건물명 비공개","exactAddress":"역삼동 742-1","totalFloorArea":9917.3,"buildYear":2015,"currentUseSignal":"근린생활시설","vacancySignal":"공실 없음","fitSummary":"역세권 도보 3분 이내 근생 빌딩으로 시행/사옥 매입에 최적화","cautionSummary":"주요 임차인 만기 조율 필요","hiddenFields":"exact_address","seller_motivation","confidence":{"areaSignal":"confirmed","assetType":"confirmed","priceBand":"ai_hypothesis","fitSummary":"ai_hypothesis"},"missingData":"sizeSignal","boundaryNote":"본 자료는 실거래 통계 기반 참고치입니다.","buyerType":"법인 사옥형","budgetRange":{"min":50,"max":80,"display":"50억~80억"},"preferredRegions":"강남","성수","assetTypes":"건물명 비공개","사옥용","purchasePurpose":"사옥용 매입","mustHave":"역세권 도보 3분 이내","주차","niceToHave":"테라스","루프탑","riskTolerance":"medium","financingNote":"자본금 50% 준비","missingQuestions":"구체적인 입주 시기가 언제인가요?","선호하는 수익률이 있나요?","privacyNotes":"연락처 비공개","fitReasons":"매수자 예산(50-80억)에 부합하는 매물입니다.","요청하신 성수/강남 권역에 해당합니다.","cautionReasons":"요청한 용도와 달리 명도 협의가 다소 필요합니다.","recommendedNextAction":"현장 답사 제안","kakaoMessage":"안녕하세요! 요청하신 조건에 부합하는 추천 매물이 있어 안내해 드립니다. 확인해보시고 피드백 부탁드립니다.","title":"강남 역삼역 역세권 도보 3분 이내 오피스 사옥용 빌딩 매각","shortSummary":"역삼역 도보 5분 거리의 준신축급 대형 건물명 비공개입니다.","dealPoints":"역세권 도보 3분 이내","사옥 최적","cautionPoints":"명도 조율 필요","hiddenInfoNotice":"보증금 및 지번은 인가 후 확인 가능","gateMessage":"G1 등급 등록이 필요합니다.","kakaoText":"강남 역삼역 오피스 빌딩 매각 안내입니다.","exactUnitCandidate":"101호","floor":"1층","areaSqmText":"150㎡","spaceType":"office","depositText":"5000만","monthlyRentText":"400만","maintenanceFeeText":"50만","availableFromText":"즉시입주","leaseTermMonthsText":"24","incentivesText":"렌트프리(무상임대) 2개월","restrictions":,"landlordIdentity":"김성수","currentTenant":"스타트업","vacancyReason":"이전 확장","rentNegotiation":"협의 가능","region":"성수동","areaSqm":150,"deposit":5000,"monthlyRent":400,"maintenanceFee":50,"availableFrom":"즉시입주","leaseTermMonths":24,"incentives":{"렌트프리(무상임대)(무상임대)Months":2,"interiorSupport":"일부 인테리어 지원","freeRentDetail":"렌트프리(무상임대) 2개월 지원"},"shortSummaryLease":"성수역 도보 5분 거리 1층 리테일 상가 매물입니다."}</a:t>
+            </a:r>
+            <a:endParaRPr lang="en-US" sz="1350" dirty="0"/>
           </a:p>
         </p:txBody>
       </p:sp>
@@ -6278,7 +11760,7 @@
                 <a:ea typeface="Pretendard" pitchFamily="34" charset="-122"/>
                 <a:cs typeface="Pretendard" pitchFamily="34" charset="-120"/>
               </a:rPr>
-              <a:t>{"ok":true,"mocked":true,"extractedFields":{"area_signal":"역삼","asset_type":"오피스빌딩","price_band":"300억","size_signal":"3</a:t>
+              <a:t>{"ok":true,"mocked":true,"extractedFields":{"area_signal":"역삼","asset_type":"[건물명 비공개]","price_band":"300억","size_signal</a:t>
             </a:r>
             <a:endParaRPr lang="en-US" sz="930" dirty="0"/>
           </a:p>
@@ -6356,7 +11838,7 @@
                 <a:ea typeface="Arial" pitchFamily="34" charset="-122"/>
                 <a:cs typeface="Arial" pitchFamily="34" charset="-120"/>
               </a:rPr>
-              <a:t>5</a:t>
+              <a:t>4</a:t>
             </a:r>
             <a:endParaRPr lang="en-US" sz="900" dirty="0"/>
           </a:p>
@@ -6447,7 +11929,7 @@
                 <a:ea typeface="Arial" pitchFamily="34" charset="-122"/>
                 <a:cs typeface="Arial" pitchFamily="34" charset="-120"/>
               </a:rPr>
-              <a:t>06</a:t>
+              <a:t>05</a:t>
             </a:r>
             <a:endParaRPr lang="en-US" sz="1300" dirty="0"/>
           </a:p>
@@ -6609,7 +12091,7 @@
                 <a:ea typeface="Pretendard" pitchFamily="34" charset="-122"/>
                 <a:cs typeface="Pretendard" pitchFamily="34" charset="-120"/>
               </a:rPr>
-              <a:t>true,"mocked":true,"extractedFields":{"area_signal":"역삼","asset_type":"오피스빌딩","price_band":"300억","size_signal":"3000평(약 9917.4㎡)"},"extractedFacts":{"region":"역삼","exactAddressCandidate":"역삼동 742-1","assetType":"오피스빌딩","priceText":"300억","sizeText":"3000평(약 9917.4㎡)","currentUse":"오피스","currentUseSignal":"근린생활시설","leaseSignal":"임대중","vacancySignal":"공실없음","tenantNames":"쿠팡","네이버","unitRentTexts":"301호: 1500만","sellerMotivationText":"자산 효율화","brokerNotes":"초역세권 매물"},"detectedSensitiveFields":"exact_address","tenant_name","ambiguousFields":,"warnings":,"areaSignal":"역삼","assetType":"오피스빌딩","priceBand":"300억","sizeSignal":"3000평(약 9917.4㎡)","dealType":"매각","buildingName":"역삼 센트럴타워","exactAddress":"역삼동 742-1","totalFloorArea":9917.3,"buildYear":2015,"currentUseSignal":"근린생활시설","vacancySignal":"공실 없음","fitSummary":"초역세권 근생 빌딩으로 시행/사옥 매입에 최적화","cautionSummary":"주요 임차인 만기 조율 필요","hiddenFields":"exact_address","seller_motivation","confidence":{"areaSignal":"confirmed","assetType":"confirmed","priceBand":"ai_hypothesis","fitSummary":"ai_hypothesis"},"missingData":"sizeSignal","boundaryNote":"본 자료는 실거래 통계 기반 참고치입니다.","buyerType":"법인 사옥형","budgetRange":{"min":50,"max":80,"display":"50억~80억"},"preferredRegions":"강남","성수","assetTypes":"꼬마빌딩","사옥용","purchasePurpose":"사옥용 매입","mustHave":"초역세권","주차","niceToHave":"테라스","루프탑","riskTolerance":"medium","financingNote":"자본금 50% 준비","missingQuestions":"구체적인 입주 시기가 언제인가요?","선호하는 수익률이 있나요?","privacyNotes":"연락처 비공개","fitReasons":"매수자 예산(50-80억)에 부합하는 매물입니다.","요청하신 성수/강남 권역에 해당합니다.","cautionReasons":"요청한 용도와 달리 명도 협의가 다소 필요합니다.","recommendedNextAction":"현장 답사 제안","kakaoMessage":"안녕하세요! 요청하신 조건에 부합하는 추천 매물이 있어 안내해 드립니다. 확인해보시고 피드백 부탁드립니다.","title":"강남 역삼역 초역세권 오피스 사옥용 빌딩 매각","shortSummary":"역삼역 도보 5분 거리의 준신축급 대형 오피스빌딩입니다.","dealPoints":"초역세권","사옥 최적","cautionPoints":"명도 조율 필요","hiddenInfoNotice":"보증금 및 지번은 인가 후 확인 가능","gateMessage":"G1 등급 등록이 필요합니다.","kakaoText":"강남 역삼역 오피스 빌딩 매각 안내입니다.","exactUnitCandidate":"101호","floor":"1층","areaSqmText":"150㎡","spaceType":"office","depositText":"5000만","monthlyRentText":"400만","maintenanceFeeText":"50만","availableFromText":"즉시입주","leaseTermMonthsText":"24","incentivesText":"렌트프리 2개월","restrictions":,"landlordIdentity":"김성수","currentTenant":"스타트업","vacancyReason":"이전 확장","rentNegotiation":"협의 가능","region":"성수동","areaSqm":150,"deposit":5000,"monthlyRent":400,"maintenanceFee":50,"availableFrom":"즉시입주","leaseTermMonths":24,"incentives":{"rentFreeMonths":2,"interiorSupport":"일부 인테리어 지원","freeRentDetail":"렌트프리 2개월 지원"},"shortSummaryLease":"성수역 도보 5분 거리 1층 리테일 상가 매물입니다."}</a:t>
+              <a:t>true,"mocked":true,"extractedFields":{"area_signal":"역삼","asset_type":"건물명 비공개","price_band":"300억","size_signal":"3000평(약 9917.4㎡)"},"extractedFacts":{"region":"역삼","exactAddressCandidate":"역삼동 742-1","assetType":"건물명 비공개","priceText":"300억","sizeText":"3000평(약 9917.4㎡)","currentUse":"오피스","currentUseSignal":"근린생활시설","leaseSignal":"임대중","vacancySignal":"공실없음","tenantNames":"쿠팡","네이버","unitRentTexts":"301호: 1500만","sellerMotivationText":"자산 효율화","brokerNotes":"역세권 도보 3분 이내 매물"},"detectedSensitiveFields":"exact_address","tenant_name","ambiguousFields":,"warnings":,"areaSignal":"역삼","assetType":"건물명 비공개","priceBand":"300억","sizeSignal":"3000평(약 9917.4㎡)","dealType":"매각","buildingName":"역삼 건물명 비공개","exactAddress":"역삼동 742-1","totalFloorArea":9917.3,"buildYear":2015,"currentUseSignal":"근린생활시설","vacancySignal":"공실 없음","fitSummary":"역세권 도보 3분 이내 근생 빌딩으로 시행/사옥 매입에 최적화","cautionSummary":"주요 임차인 만기 조율 필요","hiddenFields":"exact_address","seller_motivation","confidence":{"areaSignal":"confirmed","assetType":"confirmed","priceBand":"ai_hypothesis","fitSummary":"ai_hypothesis"},"missingData":"sizeSignal","boundaryNote":"본 자료는 실거래 통계 기반 참고치입니다.","buyerType":"법인 사옥형","budgetRange":{"min":50,"max":80,"display":"50억~80억"},"preferredRegions":"강남","성수","assetTypes":"건물명 비공개","사옥용","purchasePurpose":"사옥용 매입","mustHave":"역세권 도보 3분 이내","주차","niceToHave":"테라스","루프탑","riskTolerance":"medium","financingNote":"자본금 50% 준비","missingQuestions":"구체적인 입주 시기가 언제인가요?","선호하는 수익률이 있나요?","privacyNotes":"연락처 비공개","fitReasons":"매수자 예산(50-80억)에 부합하는 매물입니다.","요청하신 성수/강남 권역에 해당합니다.","cautionReasons":"요청한 용도와 달리 명도 협의가 다소 필요합니다.","recommendedNextAction":"현장 답사 제안","kakaoMessage":"안녕하세요! 요청하신 조건에 부합하는 추천 매물이 있어 안내해 드립니다. 확인해보시고 피드백 부탁드립니다.","title":"강남 역삼역 역세권 도보 3분 이내 오피스 사옥용 빌딩 매각","shortSummary":"역삼역 도보 5분 거리의 준신축급 대형 건물명 비공개입니다.","dealPoints":"역세권 도보 3분 이내","사옥 최적","cautionPoints":"명도 조율 필요","hiddenInfoNotice":"보증금 및 지번은 인가 후 확인 가능","gateMessage":"G1 등급 등록이 필요합니다.","kakaoText":"강남 역삼역 오피스 빌딩 매각 안내입니다.","exactUnitCandidate":"101호","floor":"1층","areaSqmText":"150㎡","spaceType":"office","depositText":"5000만","monthlyRentText":"400만","maintenanceFeeText":"50만","availableFromText":"즉시입주","leaseTermMonthsText":"24","incentivesText":"렌트프리 2개월","restrictions":,"landlordIdentity":"김성수","currentTenant":"스타트업","vacancyReason":"이전 확장","rentNegotiation":"협의 가능","region":"성수동","areaSqm":150,"deposit":5000,"monthlyRent":400,"maintenanceFee":50,"availableFrom":"즉시입주","leaseTermMonths":24,"incentives":{"렌트프리(무상임대)Months":2,"interiorSupport":"일부 인테리어 지원","freeRentDetail":"렌트프리 2개월 지원"},"shortSummaryLease":"성수역 도보 5분 거리 1층 리테일 상가 매물입니다."}</a:t>
             </a:r>
             <a:endParaRPr lang="en-US" sz="1400" dirty="0"/>
           </a:p>
@@ -6687,7 +12169,7 @@
                 <a:ea typeface="Arial" pitchFamily="34" charset="-122"/>
                 <a:cs typeface="Arial" pitchFamily="34" charset="-120"/>
               </a:rPr>
-              <a:t>6</a:t>
+              <a:t>5</a:t>
             </a:r>
             <a:endParaRPr lang="en-US" sz="900" dirty="0"/>
           </a:p>
@@ -6778,7 +12260,7 @@
                 <a:ea typeface="Arial" pitchFamily="34" charset="-122"/>
                 <a:cs typeface="Arial" pitchFamily="34" charset="-120"/>
               </a:rPr>
-              <a:t>07</a:t>
+              <a:t>06</a:t>
             </a:r>
             <a:endParaRPr lang="en-US" sz="1300" dirty="0"/>
           </a:p>
@@ -6817,7 +12299,7 @@
                 <a:ea typeface="Arial" pitchFamily="34" charset="-122"/>
                 <a:cs typeface="Arial" pitchFamily="34" charset="-120"/>
               </a:rPr>
-              <a:t>Risk</a:t>
+              <a:t>Trend</a:t>
             </a:r>
             <a:endParaRPr lang="en-US" sz="950" dirty="0"/>
           </a:p>
@@ -6856,7 +12338,7 @@
                 <a:ea typeface="Pretendard" pitchFamily="34" charset="-122"/>
                 <a:cs typeface="Pretendard" pitchFamily="34" charset="-120"/>
               </a:rPr>
-              <a:t>리스크는 무엇이고 대응책은 있는가</a:t>
+              <a:t>거래동향</a:t>
             </a:r>
             <a:endParaRPr lang="en-US" sz="2300" dirty="0"/>
           </a:p>
@@ -6870,12 +12352,35 @@
         </p:nvSpPr>
         <p:spPr>
           <a:xfrm>
-            <a:off x="566928" y="1417320"/>
-            <a:ext cx="11057839" cy="3657600"/>
+            <a:off x="566928" y="1325880"/>
+            <a:ext cx="11057839" cy="0"/>
+          </a:xfrm>
+          <a:prstGeom prst="line">
+            <a:avLst/>
+          </a:prstGeom>
+          <a:noFill/>
+          <a:ln w="19050">
+            <a:solidFill>
+              <a:srgbClr val="B98A2E"/>
+            </a:solidFill>
+            <a:prstDash val="solid"/>
+          </a:ln>
+        </p:spPr>
+      </p:sp>
+      <p:sp>
+        <p:nvSpPr>
+          <p:cNvPr id="7" name="Shape 5"/>
+          <p:cNvSpPr/>
+          <p:nvPr/>
+        </p:nvSpPr>
+        <p:spPr>
+          <a:xfrm>
+            <a:off x="566928" y="1554480"/>
+            <a:ext cx="3576218" cy="1188720"/>
           </a:xfrm>
           <a:prstGeom prst="roundRect">
             <a:avLst>
-              <a:gd name="adj" fmla="val 1500"/>
+              <a:gd name="adj" fmla="val 4615"/>
             </a:avLst>
           </a:prstGeom>
           <a:solidFill>
@@ -6891,34 +12396,14 @@
       </p:sp>
       <p:sp>
         <p:nvSpPr>
-          <p:cNvPr id="7" name="Shape 5"/>
-          <p:cNvSpPr/>
-          <p:nvPr/>
-        </p:nvSpPr>
-        <p:spPr>
-          <a:xfrm>
-            <a:off x="566928" y="1417320"/>
-            <a:ext cx="11057839" cy="45720"/>
-          </a:xfrm>
-          <a:prstGeom prst="rect">
-            <a:avLst/>
-          </a:prstGeom>
-          <a:solidFill>
-            <a:srgbClr val="B98A2E"/>
-          </a:solidFill>
-          <a:ln/>
-        </p:spPr>
-      </p:sp>
-      <p:sp>
-        <p:nvSpPr>
           <p:cNvPr id="8" name="Text 6"/>
           <p:cNvSpPr/>
           <p:nvPr/>
         </p:nvSpPr>
         <p:spPr>
           <a:xfrm>
-            <a:off x="795528" y="1618488"/>
-            <a:ext cx="10600639" cy="292608"/>
+            <a:off x="731520" y="1682496"/>
+            <a:ext cx="3247034" cy="201168"/>
           </a:xfrm>
           <a:prstGeom prst="rect">
             <a:avLst/>
@@ -6934,17 +12419,17 @@
               <a:buNone/>
             </a:pPr>
             <a:r>
-              <a:rPr lang="en-US" sz="1350" b="1" dirty="0">
-                <a:solidFill>
-                  <a:srgbClr val="977024"/>
-                </a:solidFill>
-                <a:latin typeface="Pretendard" pitchFamily="34" charset="0"/>
-                <a:ea typeface="Pretendard" pitchFamily="34" charset="-122"/>
-                <a:cs typeface="Pretendard" pitchFamily="34" charset="-120"/>
-              </a:rPr>
-              <a:t>용도 리스크</a:t>
-            </a:r>
-            <a:endParaRPr lang="en-US" sz="1350" dirty="0"/>
+              <a:rPr lang="en-US" sz="950" dirty="0">
+                <a:solidFill>
+                  <a:srgbClr val="718096"/>
+                </a:solidFill>
+                <a:latin typeface="Pretendard" pitchFamily="34" charset="0"/>
+                <a:ea typeface="Pretendard" pitchFamily="34" charset="-122"/>
+                <a:cs typeface="Pretendard" pitchFamily="34" charset="-120"/>
+              </a:rPr>
+              <a:t>{"ok"</a:t>
+            </a:r>
+            <a:endParaRPr lang="en-US" sz="950" dirty="0"/>
           </a:p>
         </p:txBody>
       </p:sp>
@@ -6956,8 +12441,8 @@
         </p:nvSpPr>
         <p:spPr>
           <a:xfrm>
-            <a:off x="795528" y="1947672"/>
-            <a:ext cx="10600639" cy="365760"/>
+            <a:off x="731520" y="1901952"/>
+            <a:ext cx="3247034" cy="402336"/>
           </a:xfrm>
           <a:prstGeom prst="rect">
             <a:avLst/>
@@ -6975,7 +12460,7 @@
               <a:buNone/>
             </a:pPr>
             <a:r>
-              <a:rPr lang="en-US" sz="1250" b="1" dirty="0">
+              <a:rPr lang="en-US" sz="2200" b="1" dirty="0">
                 <a:solidFill>
                   <a:srgbClr val="10161F"/>
                 </a:solidFill>
@@ -6983,82 +12468,52 @@
                 <a:ea typeface="Pretendard" pitchFamily="34" charset="-122"/>
                 <a:cs typeface="Pretendard" pitchFamily="34" charset="-120"/>
               </a:rPr>
-              <a:t>—</a:t>
-            </a:r>
-            <a:endParaRPr lang="en-US" sz="1250" dirty="0"/>
-          </a:p>
-        </p:txBody>
-      </p:sp>
-      <p:sp>
-        <p:nvSpPr>
-          <p:cNvPr id="10" name="Text 8"/>
-          <p:cNvSpPr/>
-          <p:nvPr/>
-        </p:nvSpPr>
-        <p:spPr>
-          <a:xfrm>
-            <a:off x="795528" y="2377440"/>
-            <a:ext cx="10600639" cy="2606040"/>
-          </a:xfrm>
-          <a:prstGeom prst="rect">
-            <a:avLst/>
-          </a:prstGeom>
-          <a:noFill/>
-          <a:ln/>
-        </p:spPr>
-        <p:txBody>
-          <a:bodyPr wrap="square" lIns="0" tIns="0" rIns="0" bIns="0" rtlCol="0" anchor="t">
-            <a:normAutofit/>
-          </a:bodyPr>
-          <a:lstStyle/>
-          <a:p>
-            <a:pPr marL="342900" indent="-342900">
-              <a:lnSpc>
-                <a:spcPct val="125000"/>
-              </a:lnSpc>
-              <a:buSzPct val="100000"/>
-              <a:buChar char="•"/>
-            </a:pPr>
-            <a:r>
-              <a:rPr lang="en-US" sz="1100" dirty="0">
-                <a:solidFill>
-                  <a:srgbClr val="10161F"/>
-                </a:solidFill>
-                <a:latin typeface="Pretendard" pitchFamily="34" charset="0"/>
-                <a:ea typeface="Pretendard" pitchFamily="34" charset="-122"/>
-                <a:cs typeface="Pretendard" pitchFamily="34" charset="-120"/>
-              </a:rPr>
-              <a:t>{"ok":true,"mocked":true,"extractedFields":{"area_signal":"역삼","asset_type":"오피스빌딩","price_band":"300억","size_signal":"3000평(약 9917.4㎡)"},"extractedFacts":{"region":"역삼","exactAddressCandidate":"역삼동 7</a:t>
-            </a:r>
-            <a:endParaRPr lang="en-US" sz="1100" dirty="0"/>
-          </a:p>
-        </p:txBody>
-      </p:sp>
-      <p:sp>
-        <p:nvSpPr>
-          <p:cNvPr id="11" name="Shape 9"/>
-          <p:cNvSpPr/>
-          <p:nvPr/>
-        </p:nvSpPr>
-        <p:spPr>
-          <a:xfrm>
-            <a:off x="566928" y="5193792"/>
-            <a:ext cx="11057839" cy="621792"/>
+              <a:t>300억</a:t>
+            </a:r>
+            <a:endParaRPr lang="en-US" sz="2200" dirty="0"/>
+          </a:p>
+        </p:txBody>
+      </p:sp>
+      <p:sp>
+        <p:nvSpPr>
+          <p:cNvPr id="10" name="Shape 8"/>
+          <p:cNvSpPr/>
+          <p:nvPr/>
+        </p:nvSpPr>
+        <p:spPr>
+          <a:xfrm>
+            <a:off x="566928" y="2999232"/>
+            <a:ext cx="11057839" cy="1280160"/>
           </a:xfrm>
           <a:prstGeom prst="roundRect">
             <a:avLst>
-              <a:gd name="adj" fmla="val 8824"/>
+              <a:gd name="adj" fmla="val 4286"/>
             </a:avLst>
           </a:prstGeom>
           <a:solidFill>
-            <a:srgbClr val="F7FAFC"/>
+            <a:srgbClr val="BEE3F8"/>
           </a:solidFill>
-          <a:ln w="6350">
-            <a:solidFill>
-              <a:srgbClr val="CBD5E0"/>
-            </a:solidFill>
-            <a:prstDash val="solid"/>
-          </a:ln>
+          <a:ln/>
+        </p:spPr>
+      </p:sp>
+      <p:sp>
+        <p:nvSpPr>
+          <p:cNvPr id="11" name="Shape 9"/>
+          <p:cNvSpPr/>
+          <p:nvPr/>
+        </p:nvSpPr>
+        <p:spPr>
+          <a:xfrm>
+            <a:off x="566928" y="3054096"/>
+            <a:ext cx="36576" cy="1170432"/>
+          </a:xfrm>
+          <a:prstGeom prst="rect">
+            <a:avLst/>
+          </a:prstGeom>
+          <a:solidFill>
+            <a:srgbClr val="2B6CB0"/>
+          </a:solidFill>
+          <a:ln/>
         </p:spPr>
       </p:sp>
       <p:sp>
@@ -7069,8 +12524,8 @@
         </p:nvSpPr>
         <p:spPr>
           <a:xfrm>
-            <a:off x="795528" y="5193792"/>
-            <a:ext cx="10600639" cy="621792"/>
+            <a:off x="749808" y="3108960"/>
+            <a:ext cx="10728655" cy="201168"/>
           </a:xfrm>
           <a:prstGeom prst="rect">
             <a:avLst/>
@@ -7086,7 +12541,49 @@
               <a:buNone/>
             </a:pPr>
             <a:r>
-              <a:rPr lang="en-US" sz="1100" dirty="0">
+              <a:rPr lang="en-US" sz="1050" b="1" dirty="0">
+                <a:solidFill>
+                  <a:srgbClr val="2B6CB0"/>
+                </a:solidFill>
+                <a:latin typeface="Pretendard" pitchFamily="34" charset="0"/>
+                <a:ea typeface="Pretendard" pitchFamily="34" charset="-122"/>
+                <a:cs typeface="Pretendard" pitchFamily="34" charset="-120"/>
+              </a:rPr>
+              <a:t>투자 가치 제안</a:t>
+            </a:r>
+            <a:endParaRPr lang="en-US" sz="1050" dirty="0"/>
+          </a:p>
+        </p:txBody>
+      </p:sp>
+      <p:sp>
+        <p:nvSpPr>
+          <p:cNvPr id="13" name="Text 11"/>
+          <p:cNvSpPr/>
+          <p:nvPr/>
+        </p:nvSpPr>
+        <p:spPr>
+          <a:xfrm>
+            <a:off x="749808" y="3328416"/>
+            <a:ext cx="10728655" cy="877824"/>
+          </a:xfrm>
+          <a:prstGeom prst="rect">
+            <a:avLst/>
+          </a:prstGeom>
+          <a:noFill/>
+          <a:ln/>
+        </p:spPr>
+        <p:txBody>
+          <a:bodyPr wrap="square" lIns="0" tIns="0" rIns="0" bIns="0" rtlCol="0" anchor="t"/>
+          <a:lstStyle/>
+          <a:p>
+            <a:pPr indent="0" marL="0">
+              <a:lnSpc>
+                <a:spcPct val="120000"/>
+              </a:lnSpc>
+              <a:buNone/>
+            </a:pPr>
+            <a:r>
+              <a:rPr lang="en-US" sz="930" dirty="0">
                 <a:solidFill>
                   <a:srgbClr val="10161F"/>
                 </a:solidFill>
@@ -7094,15 +12591,15 @@
                 <a:ea typeface="Pretendard" pitchFamily="34" charset="-122"/>
                 <a:cs typeface="Pretendard" pitchFamily="34" charset="-120"/>
               </a:rPr>
-              <a:t>※ 본 리스크 체크는 공부 및 브로커 확인 기반이며, 매수 전 전문 실사팀(변호사/건축사)을 통한 정밀 실사가 필요합니다.</a:t>
-            </a:r>
-            <a:endParaRPr lang="en-US" sz="1100" dirty="0"/>
-          </a:p>
-        </p:txBody>
-      </p:sp>
-      <p:sp>
-        <p:nvSpPr>
-          <p:cNvPr id="13" name="Text 11"/>
+              <a:t>{"ok":true,"mocked":true,"extractedFields":{"area_signal":"역삼","asset_type":"[건물명 비공개]","price_band":"300억","size_signal":"3000평(약 9917.4㎡)"},"extractedFacts":{"region":"역삼","exactAddressCandidate":"역삼동 742-1","assetType":"[건물명 비공개]","priceText":"300억","sizeText":"3000평(약 9917.4㎡)","currentUse":"오피스","currentUseSignal":"근린생활시설","leaseSignal":"임대중","vacancySignal":"공실없음","tenantNames":["쿠팡","네이버"],"unitRentTexts":["301호: 1500만"],"sellerMotivationText":"자산 효율화","brokerNotes":["역세권 도보 3분 이내 매물"]},"detectedSensitiveFields":["exact_address","tenant_name"],"ambiguousFields":[],"warnings":[],"areaSignal":"역삼","assetType":"[건물명 비공개]","priceBand":"300억","sizeSignal":"3000평(약 9917.4㎡)","dealType":"매각","buildingName":"역삼 [건물명 비공개]","exactAddress":"역삼동 742-1","totalFloorArea":9917.3,"buildYear":2015,"currentUseSignal":"근린생활시설","vacancySignal":"공실 없음","fitSummary":"역세권 도보 3분 이내 근생 빌딩으로 시행/사옥 매입에 최적화","cautionSummary":"주요 임차인 만기 조율 필요","hiddenFields":["exact_address","seller_motivation"],"confidence":{"areaSignal":"confirmed","assetType":"confirmed","priceBand":"ai_hypothesis","fitSummary":"ai_hypothesis"},"missingData":["sizeSignal"],"boundaryNote":"본 자료는 실거래 통계 기반 참고치입니다.","buyerType":"법인 사옥형","budgetRange":{"min":50,"max":80,"display":"50억~80억"},"preferredRegions":["강남","성수"],"assetTypes":["[건물명 비공개]","사옥용"],"purchasePurpose":"사옥용 매입","mustHave":["역세권 도보 3분 이내","주차"],"niceToHave":["테라스","루프탑"],"riskTolerance":"medium","financingNote":"자본금 50% 준비","missingQuestions":["구체적인 입주 시기가 언제인가요?","선호하는 수익률이 있나요?"],"privacyNotes":["연락처 비공개"],"fitReasons":["매수자 예산(50-80억)에 부합하는 매물입니다.","요청하신 성수/강남 권역에 해당합니다."],"cautionReasons":["요청한 용도와 달리 명도 협의가 다소 필요합니다."],"recommendedNextAction":"현장 답사 제안","kakaoMessage":"안녕하세요! 요청하신 조건에 부합하는 추천 매물이 있어 안내해 드립니다. 확인해보시고 피드백 부탁드립니다.","title":"강남 역삼역 역세권 도보 3분 이내 오피스 사옥용 빌딩 매각","shortSummary":"역삼역 도보 5분 거리의 준신축급 대형 [건물명 비공개]입니다.","dealPoints":["역세권 도보 3분 이내","사옥 최적"],"cautionPoints":["명도 조율 필요"],"hiddenInfoNotice":["보증금 및 지번은 인가 후 확인 가능"],"gateMessage":"G1 등급 등록이 필요합니다.","kakaoText":"강남 역삼역 오피스 빌딩 매각 안내입니다.","exactUnitCandidate":"101호","floor":"1층","areaSqmText":"150㎡","spaceType":"office","depositText":"5000만","monthlyRentText":"400만","maintenanceFeeText":"50만","availableFromText":"즉시입주","leaseTermMonthsText":"24","incentivesText":"렌트프리(무상임대) 2개월","restrictions":[],"landlordIdentity":"김성수","currentTenant":"스타트업","vacancyReason":"이전 확장","rentNegotiation":"협의 가능","region":"성수동","areaSqm":150,"deposit":5000,"monthlyRent":400,"maintenanceFee":50,"availableFrom":"즉시입주","leaseTermMonths":24,"incentives":{"렌트프리(무상임대)(무상임대)Months":2,"interiorSupport":"일부 인테리어 지원","freeRentDetail":"렌트프리(무상임대) 2개월 지원"},"shortSummaryLease":"성수역 도보 5분 거리 1층 리테일 상가 매물입니다."}</a:t>
+            </a:r>
+            <a:endParaRPr lang="en-US" sz="930" dirty="0"/>
+          </a:p>
+        </p:txBody>
+      </p:sp>
+      <p:sp>
+        <p:nvSpPr>
+          <p:cNvPr id="14" name="Text 12"/>
           <p:cNvSpPr/>
           <p:nvPr/>
         </p:nvSpPr>
@@ -7141,7 +12638,7 @@
       </p:sp>
       <p:sp>
         <p:nvSpPr>
-          <p:cNvPr id="14" name="Text 12"/>
+          <p:cNvPr id="15" name="Text 13"/>
           <p:cNvSpPr/>
           <p:nvPr/>
         </p:nvSpPr>
@@ -7172,7 +12669,7 @@
                 <a:ea typeface="Arial" pitchFamily="34" charset="-122"/>
                 <a:cs typeface="Arial" pitchFamily="34" charset="-120"/>
               </a:rPr>
-              <a:t>7</a:t>
+              <a:t>6</a:t>
             </a:r>
             <a:endParaRPr lang="en-US" sz="900" dirty="0"/>
           </a:p>
@@ -7189,6 +12686,13 @@
 <file path=ppt/slides/slide8.xml><?xml version="1.0" encoding="utf-8"?>
 <p:sld xmlns:a="http://schemas.openxmlformats.org/drawingml/2006/main" xmlns:r="http://schemas.openxmlformats.org/officeDocument/2006/relationships" xmlns:p="http://schemas.openxmlformats.org/presentationml/2006/main">
   <p:cSld name="Slide 8">
+    <p:bg>
+      <p:bgPr>
+        <a:solidFill>
+          <a:srgbClr val="FFFFFF"/>
+        </a:solidFill>
+      </p:bgPr>
+    </p:bg>
     <p:spTree>
       <p:nvGrpSpPr>
         <p:cNvPr id="1" name=""/>
@@ -7256,7 +12760,7 @@
                 <a:ea typeface="Arial" pitchFamily="34" charset="-122"/>
                 <a:cs typeface="Arial" pitchFamily="34" charset="-120"/>
               </a:rPr>
-              <a:t>08</a:t>
+              <a:t>07</a:t>
             </a:r>
             <a:endParaRPr lang="en-US" sz="1300" dirty="0"/>
           </a:p>
@@ -7295,7 +12799,7 @@
                 <a:ea typeface="Arial" pitchFamily="34" charset="-122"/>
                 <a:cs typeface="Arial" pitchFamily="34" charset="-120"/>
               </a:rPr>
-              <a:t>Checklist</a:t>
+              <a:t>Turnover</a:t>
             </a:r>
             <a:endParaRPr lang="en-US" sz="950" dirty="0"/>
           </a:p>
@@ -7334,7 +12838,7 @@
                 <a:ea typeface="Pretendard" pitchFamily="34" charset="-122"/>
                 <a:cs typeface="Pretendard" pitchFamily="34" charset="-120"/>
               </a:rPr>
-              <a:t>섹션 상세</a:t>
+              <a:t>권역 회전율</a:t>
             </a:r>
             <a:endParaRPr lang="en-US" sz="2300" dirty="0"/>
           </a:p>
@@ -7348,23 +12852,34 @@
         </p:nvSpPr>
         <p:spPr>
           <a:xfrm>
-            <a:off x="566928" y="1517904"/>
-            <a:ext cx="6492240" cy="274320"/>
-          </a:xfrm>
-          <a:prstGeom prst="rect">
-            <a:avLst/>
-          </a:prstGeom>
-          <a:noFill/>
-          <a:ln/>
-        </p:spPr>
-        <p:txBody>
-          <a:bodyPr wrap="square" rtlCol="0" anchor="ctr"/>
+            <a:off x="566928" y="1371600"/>
+            <a:ext cx="6858000" cy="237744"/>
+          </a:xfrm>
+          <a:prstGeom prst="rect">
+            <a:avLst/>
+          </a:prstGeom>
+          <a:noFill/>
+          <a:ln/>
+        </p:spPr>
+        <p:txBody>
+          <a:bodyPr wrap="square" lIns="0" tIns="0" rIns="0" bIns="0" rtlCol="0" anchor="ctr"/>
           <a:lstStyle/>
           <a:p>
             <a:pPr indent="0" marL="0">
               <a:buNone/>
             </a:pPr>
-            <a:endParaRPr lang="en-US" sz="1400" dirty="0"/>
+            <a:r>
+              <a:rPr lang="en-US" sz="1100" b="1" dirty="0">
+                <a:solidFill>
+                  <a:srgbClr val="10161F"/>
+                </a:solidFill>
+                <a:latin typeface="Pretendard" pitchFamily="34" charset="0"/>
+                <a:ea typeface="Pretendard" pitchFamily="34" charset="-122"/>
+                <a:cs typeface="Pretendard" pitchFamily="34" charset="-120"/>
+              </a:rPr>
+              <a:t>건축물 개요 및 물리 스펙</a:t>
+            </a:r>
+            <a:endParaRPr lang="en-US" sz="1100" dirty="0"/>
           </a:p>
         </p:txBody>
       </p:sp>
@@ -7376,29 +12891,220 @@
         </p:nvSpPr>
         <p:spPr>
           <a:xfrm>
-            <a:off x="566928" y="1874520"/>
-            <a:ext cx="6492240" cy="182880"/>
-          </a:xfrm>
-          <a:prstGeom prst="rect">
-            <a:avLst/>
-          </a:prstGeom>
-          <a:noFill/>
-          <a:ln/>
-        </p:spPr>
-        <p:txBody>
-          <a:bodyPr wrap="square" rtlCol="0" anchor="ctr"/>
+            <a:off x="566928" y="1645920"/>
+            <a:ext cx="2606040" cy="438912"/>
+          </a:xfrm>
+          <a:prstGeom prst="rect">
+            <a:avLst/>
+          </a:prstGeom>
+          <a:noFill/>
+          <a:ln/>
+        </p:spPr>
+        <p:txBody>
+          <a:bodyPr wrap="square" lIns="0" tIns="0" rIns="0" bIns="0" rtlCol="0" anchor="ctr"/>
           <a:lstStyle/>
           <a:p>
             <a:pPr indent="0" marL="0">
-              <a:buNone/>
-            </a:pPr>
-            <a:endParaRPr lang="en-US" sz="900" dirty="0"/>
+              <a:lnSpc>
+                <a:spcPct val="120000"/>
+              </a:lnSpc>
+              <a:buNone/>
+            </a:pPr>
+            <a:r>
+              <a:rPr lang="en-US" sz="1350" dirty="0">
+                <a:solidFill>
+                  <a:srgbClr val="718096"/>
+                </a:solidFill>
+                <a:latin typeface="Pretendard" pitchFamily="34" charset="0"/>
+                <a:ea typeface="Pretendard" pitchFamily="34" charset="-122"/>
+                <a:cs typeface="Pretendard" pitchFamily="34" charset="-120"/>
+              </a:rPr>
+              <a:t>{"ok"</a:t>
+            </a:r>
+            <a:endParaRPr lang="en-US" sz="1350" dirty="0"/>
           </a:p>
         </p:txBody>
       </p:sp>
       <p:sp>
         <p:nvSpPr>
           <p:cNvPr id="8" name="Text 6"/>
+          <p:cNvSpPr/>
+          <p:nvPr/>
+        </p:nvSpPr>
+        <p:spPr>
+          <a:xfrm>
+            <a:off x="3172968" y="1645920"/>
+            <a:ext cx="4251960" cy="438912"/>
+          </a:xfrm>
+          <a:prstGeom prst="rect">
+            <a:avLst/>
+          </a:prstGeom>
+          <a:noFill/>
+          <a:ln/>
+        </p:spPr>
+        <p:txBody>
+          <a:bodyPr wrap="square" lIns="0" tIns="0" rIns="0" bIns="0" rtlCol="0" anchor="ctr"/>
+          <a:lstStyle/>
+          <a:p>
+            <a:pPr indent="0" marL="0">
+              <a:lnSpc>
+                <a:spcPct val="120000"/>
+              </a:lnSpc>
+              <a:buNone/>
+            </a:pPr>
+            <a:r>
+              <a:rPr lang="en-US" sz="1350" b="1" dirty="0">
+                <a:solidFill>
+                  <a:srgbClr val="10161F"/>
+                </a:solidFill>
+                <a:latin typeface="Pretendard" pitchFamily="34" charset="0"/>
+                <a:ea typeface="Pretendard" pitchFamily="34" charset="-122"/>
+                <a:cs typeface="Pretendard" pitchFamily="34" charset="-120"/>
+              </a:rPr>
+              <a:t>true,"mocked":true,"extractedFields":{"area_signal":"역삼","asset_type":"건물명 비공개","price_band":"300억","size_signal":"3000평(약 9917.4㎡)"},"extractedFacts":{"region":"역삼","exactAddressCandidate":"역삼동 742-1","assetType":"건물명 비공개","priceText":"300억","sizeText":"3000평(약 9917.4㎡)","currentUse":"오피스","currentUseSignal":"근린생활시설","leaseSignal":"임대중","vacancySignal":"공실없음","tenantNames":"쿠팡","네이버","unitRentTexts":"301호: 1500만","sellerMotivationText":"자산 효율화","brokerNotes":"역세권 도보 3분 이내 매물"},"detectedSensitiveFields":"exact_address","tenant_name","ambiguousFields":,"warnings":,"areaSignal":"역삼","assetType":"건물명 비공개","priceBand":"300억","sizeSignal":"3000평(약 9917.4㎡)","dealType":"매각","buildingName":"역삼 건물명 비공개","exactAddress":"역삼동 742-1","totalFloorArea":9917.3,"buildYear":2015,"currentUseSignal":"근린생활시설","vacancySignal":"공실 없음","fitSummary":"역세권 도보 3분 이내 근생 빌딩으로 시행/사옥 매입에 최적화","cautionSummary":"주요 임차인 만기 조율 필요","hiddenFields":"exact_address","seller_motivation","confidence":{"areaSignal":"confirmed","assetType":"confirmed","priceBand":"ai_hypothesis","fitSummary":"ai_hypothesis"},"missingData":"sizeSignal","boundaryNote":"본 자료는 실거래 통계 기반 참고치입니다.","buyerType":"법인 사옥형","budgetRange":{"min":50,"max":80,"display":"50억~80억"},"preferredRegions":"강남","성수","assetTypes":"건물명 비공개","사옥용","purchasePurpose":"사옥용 매입","mustHave":"역세권 도보 3분 이내","주차","niceToHave":"테라스","루프탑","riskTolerance":"medium","financingNote":"자본금 50% 준비","missingQuestions":"구체적인 입주 시기가 언제인가요?","선호하는 수익률이 있나요?","privacyNotes":"연락처 비공개","fitReasons":"매수자 예산(50-80억)에 부합하는 매물입니다.","요청하신 성수/강남 권역에 해당합니다.","cautionReasons":"요청한 용도와 달리 명도 협의가 다소 필요합니다.","recommendedNextAction":"현장 답사 제안","kakaoMessage":"안녕하세요! 요청하신 조건에 부합하는 추천 매물이 있어 안내해 드립니다. 확인해보시고 피드백 부탁드립니다.","title":"강남 역삼역 역세권 도보 3분 이내 오피스 사옥용 빌딩 매각","shortSummary":"역삼역 도보 5분 거리의 준신축급 대형 건물명 비공개입니다.","dealPoints":"역세권 도보 3분 이내","사옥 최적","cautionPoints":"명도 조율 필요","hiddenInfoNotice":"보증금 및 지번은 인가 후 확인 가능","gateMessage":"G1 등급 등록이 필요합니다.","kakaoText":"강남 역삼역 오피스 빌딩 매각 안내입니다.","exactUnitCandidate":"101호","floor":"1층","areaSqmText":"150㎡","spaceType":"office","depositText":"5000만","monthlyRentText":"400만","maintenanceFeeText":"50만","availableFromText":"즉시입주","leaseTermMonthsText":"24","incentivesText":"렌트프리(무상임대) 2개월","restrictions":,"landlordIdentity":"김성수","currentTenant":"스타트업","vacancyReason":"이전 확장","rentNegotiation":"협의 가능","region":"성수동","areaSqm":150,"deposit":5000,"monthlyRent":400,"maintenanceFee":50,"availableFrom":"즉시입주","leaseTermMonths":24,"incentives":{"렌트프리(무상임대)(무상임대)Months":2,"interiorSupport":"일부 인테리어 지원","freeRentDetail":"렌트프리(무상임대) 2개월 지원"},"shortSummaryLease":"성수역 도보 5분 거리 1층 리테일 상가 매물입니다."}</a:t>
+            </a:r>
+            <a:endParaRPr lang="en-US" sz="1350" dirty="0"/>
+          </a:p>
+        </p:txBody>
+      </p:sp>
+      <p:sp>
+        <p:nvSpPr>
+          <p:cNvPr id="9" name="Shape 7"/>
+          <p:cNvSpPr/>
+          <p:nvPr/>
+        </p:nvSpPr>
+        <p:spPr>
+          <a:xfrm>
+            <a:off x="7604608" y="1371600"/>
+            <a:ext cx="0" cy="4754880"/>
+          </a:xfrm>
+          <a:prstGeom prst="line">
+            <a:avLst/>
+          </a:prstGeom>
+          <a:noFill/>
+          <a:ln w="8890">
+            <a:solidFill>
+              <a:srgbClr val="B98A2E"/>
+            </a:solidFill>
+            <a:prstDash val="solid"/>
+          </a:ln>
+        </p:spPr>
+      </p:sp>
+      <p:sp>
+        <p:nvSpPr>
+          <p:cNvPr id="10" name="Shape 8"/>
+          <p:cNvSpPr/>
+          <p:nvPr/>
+        </p:nvSpPr>
+        <p:spPr>
+          <a:xfrm>
+            <a:off x="7784287" y="1645920"/>
+            <a:ext cx="3840480" cy="2103120"/>
+          </a:xfrm>
+          <a:prstGeom prst="roundRect">
+            <a:avLst>
+              <a:gd name="adj" fmla="val 2609"/>
+            </a:avLst>
+          </a:prstGeom>
+          <a:solidFill>
+            <a:srgbClr val="F3EBDA"/>
+          </a:solidFill>
+          <a:ln/>
+        </p:spPr>
+      </p:sp>
+      <p:sp>
+        <p:nvSpPr>
+          <p:cNvPr id="11" name="Shape 9"/>
+          <p:cNvSpPr/>
+          <p:nvPr/>
+        </p:nvSpPr>
+        <p:spPr>
+          <a:xfrm>
+            <a:off x="7784287" y="1700784"/>
+            <a:ext cx="36576" cy="1993392"/>
+          </a:xfrm>
+          <a:prstGeom prst="rect">
+            <a:avLst/>
+          </a:prstGeom>
+          <a:solidFill>
+            <a:srgbClr val="977024"/>
+          </a:solidFill>
+          <a:ln/>
+        </p:spPr>
+      </p:sp>
+      <p:sp>
+        <p:nvSpPr>
+          <p:cNvPr id="12" name="Text 10"/>
+          <p:cNvSpPr/>
+          <p:nvPr/>
+        </p:nvSpPr>
+        <p:spPr>
+          <a:xfrm>
+            <a:off x="7967167" y="1755648"/>
+            <a:ext cx="3511296" cy="201168"/>
+          </a:xfrm>
+          <a:prstGeom prst="rect">
+            <a:avLst/>
+          </a:prstGeom>
+          <a:noFill/>
+          <a:ln/>
+        </p:spPr>
+        <p:txBody>
+          <a:bodyPr wrap="square" lIns="0" tIns="0" rIns="0" bIns="0" rtlCol="0" anchor="ctr"/>
+          <a:lstStyle/>
+          <a:p>
+            <a:pPr indent="0" marL="0">
+              <a:buNone/>
+            </a:pPr>
+            <a:endParaRPr lang="en-US" sz="1050" dirty="0"/>
+          </a:p>
+        </p:txBody>
+      </p:sp>
+      <p:sp>
+        <p:nvSpPr>
+          <p:cNvPr id="13" name="Text 11"/>
+          <p:cNvSpPr/>
+          <p:nvPr/>
+        </p:nvSpPr>
+        <p:spPr>
+          <a:xfrm>
+            <a:off x="7967167" y="1975104"/>
+            <a:ext cx="3511296" cy="1700784"/>
+          </a:xfrm>
+          <a:prstGeom prst="rect">
+            <a:avLst/>
+          </a:prstGeom>
+          <a:noFill/>
+          <a:ln/>
+        </p:spPr>
+        <p:txBody>
+          <a:bodyPr wrap="square" lIns="0" tIns="0" rIns="0" bIns="0" rtlCol="0" anchor="t"/>
+          <a:lstStyle/>
+          <a:p>
+            <a:pPr indent="0" marL="0">
+              <a:lnSpc>
+                <a:spcPct val="120000"/>
+              </a:lnSpc>
+              <a:buNone/>
+            </a:pPr>
+            <a:r>
+              <a:rPr lang="en-US" sz="930" dirty="0">
+                <a:solidFill>
+                  <a:srgbClr val="10161F"/>
+                </a:solidFill>
+                <a:latin typeface="Pretendard" pitchFamily="34" charset="0"/>
+                <a:ea typeface="Pretendard" pitchFamily="34" charset="-122"/>
+                <a:cs typeface="Pretendard" pitchFamily="34" charset="-120"/>
+              </a:rPr>
+              <a:t>{"ok":true,"mocked":true,"extractedFields":{"area_signal":"역삼","asset_type":"[건물명 비공개]","price_band":"300억","size_signal</a:t>
+            </a:r>
+            <a:endParaRPr lang="en-US" sz="930" dirty="0"/>
+          </a:p>
+        </p:txBody>
+      </p:sp>
+      <p:sp>
+        <p:nvSpPr>
+          <p:cNvPr id="14" name="Text 12"/>
           <p:cNvSpPr/>
           <p:nvPr/>
         </p:nvSpPr>
@@ -7437,7 +13143,7 @@
       </p:sp>
       <p:sp>
         <p:nvSpPr>
-          <p:cNvPr id="9" name="Text 7"/>
+          <p:cNvPr id="15" name="Text 13"/>
           <p:cNvSpPr/>
           <p:nvPr/>
         </p:nvSpPr>
@@ -7468,7 +13174,7 @@
                 <a:ea typeface="Arial" pitchFamily="34" charset="-122"/>
                 <a:cs typeface="Arial" pitchFamily="34" charset="-120"/>
               </a:rPr>
-              <a:t>8</a:t>
+              <a:t>7</a:t>
             </a:r>
             <a:endParaRPr lang="en-US" sz="900" dirty="0"/>
           </a:p>
@@ -7559,7 +13265,7 @@
                 <a:ea typeface="Arial" pitchFamily="34" charset="-122"/>
                 <a:cs typeface="Arial" pitchFamily="34" charset="-120"/>
               </a:rPr>
-              <a:t>09</a:t>
+              <a:t>08</a:t>
             </a:r>
             <a:endParaRPr lang="en-US" sz="1300" dirty="0"/>
           </a:p>
@@ -7598,7 +13304,7 @@
                 <a:ea typeface="Arial" pitchFamily="34" charset="-122"/>
                 <a:cs typeface="Arial" pitchFamily="34" charset="-120"/>
               </a:rPr>
-              <a:t>Process</a:t>
+              <a:t>Price</a:t>
             </a:r>
             <a:endParaRPr lang="en-US" sz="950" dirty="0"/>
           </a:p>
@@ -7637,7 +13343,7 @@
                 <a:ea typeface="Pretendard" pitchFamily="34" charset="-122"/>
                 <a:cs typeface="Pretendard" pitchFamily="34" charset="-120"/>
               </a:rPr>
-              <a:t>검토 후 다음 단계는 무엇인가</a:t>
+              <a:t>적정 가격</a:t>
             </a:r>
             <a:endParaRPr lang="en-US" sz="2300" dirty="0"/>
           </a:p>
@@ -7645,26 +13351,145 @@
       </p:sp>
       <p:sp>
         <p:nvSpPr>
-          <p:cNvPr id="6" name="Shape 4"/>
-          <p:cNvSpPr/>
-          <p:nvPr/>
-        </p:nvSpPr>
-        <p:spPr>
-          <a:xfrm>
-            <a:off x="566928" y="1572768"/>
-            <a:ext cx="2490140" cy="3200400"/>
-          </a:xfrm>
-          <a:prstGeom prst="roundRect">
-            <a:avLst>
-              <a:gd name="adj" fmla="val 2203"/>
-            </a:avLst>
-          </a:prstGeom>
-          <a:solidFill>
-            <a:srgbClr val="F7FAFC"/>
-          </a:solidFill>
-          <a:ln w="6350">
+          <p:cNvPr id="6" name="Text 4"/>
+          <p:cNvSpPr/>
+          <p:nvPr/>
+        </p:nvSpPr>
+        <p:spPr>
+          <a:xfrm>
+            <a:off x="566928" y="1371600"/>
+            <a:ext cx="6858000" cy="237744"/>
+          </a:xfrm>
+          <a:prstGeom prst="rect">
+            <a:avLst/>
+          </a:prstGeom>
+          <a:noFill/>
+          <a:ln/>
+        </p:spPr>
+        <p:txBody>
+          <a:bodyPr wrap="square" lIns="0" tIns="0" rIns="0" bIns="0" rtlCol="0" anchor="ctr"/>
+          <a:lstStyle/>
+          <a:p>
+            <a:pPr indent="0" marL="0">
+              <a:buNone/>
+            </a:pPr>
+            <a:r>
+              <a:rPr lang="en-US" sz="1100" b="1" dirty="0">
+                <a:solidFill>
+                  <a:srgbClr val="10161F"/>
+                </a:solidFill>
+                <a:latin typeface="Pretendard" pitchFamily="34" charset="0"/>
+                <a:ea typeface="Pretendard" pitchFamily="34" charset="-122"/>
+                <a:cs typeface="Pretendard" pitchFamily="34" charset="-120"/>
+              </a:rPr>
+              <a:t>건축물 개요 및 물리 스펙</a:t>
+            </a:r>
+            <a:endParaRPr lang="en-US" sz="1100" dirty="0"/>
+          </a:p>
+        </p:txBody>
+      </p:sp>
+      <p:sp>
+        <p:nvSpPr>
+          <p:cNvPr id="7" name="Text 5"/>
+          <p:cNvSpPr/>
+          <p:nvPr/>
+        </p:nvSpPr>
+        <p:spPr>
+          <a:xfrm>
+            <a:off x="566928" y="1645920"/>
+            <a:ext cx="2606040" cy="438912"/>
+          </a:xfrm>
+          <a:prstGeom prst="rect">
+            <a:avLst/>
+          </a:prstGeom>
+          <a:noFill/>
+          <a:ln/>
+        </p:spPr>
+        <p:txBody>
+          <a:bodyPr wrap="square" lIns="0" tIns="0" rIns="0" bIns="0" rtlCol="0" anchor="ctr"/>
+          <a:lstStyle/>
+          <a:p>
+            <a:pPr indent="0" marL="0">
+              <a:lnSpc>
+                <a:spcPct val="120000"/>
+              </a:lnSpc>
+              <a:buNone/>
+            </a:pPr>
+            <a:r>
+              <a:rPr lang="en-US" sz="1350" dirty="0">
+                <a:solidFill>
+                  <a:srgbClr val="718096"/>
+                </a:solidFill>
+                <a:latin typeface="Pretendard" pitchFamily="34" charset="0"/>
+                <a:ea typeface="Pretendard" pitchFamily="34" charset="-122"/>
+                <a:cs typeface="Pretendard" pitchFamily="34" charset="-120"/>
+              </a:rPr>
+              <a:t>{"ok"</a:t>
+            </a:r>
+            <a:endParaRPr lang="en-US" sz="1350" dirty="0"/>
+          </a:p>
+        </p:txBody>
+      </p:sp>
+      <p:sp>
+        <p:nvSpPr>
+          <p:cNvPr id="8" name="Text 6"/>
+          <p:cNvSpPr/>
+          <p:nvPr/>
+        </p:nvSpPr>
+        <p:spPr>
+          <a:xfrm>
+            <a:off x="3172968" y="1645920"/>
+            <a:ext cx="4251960" cy="438912"/>
+          </a:xfrm>
+          <a:prstGeom prst="rect">
+            <a:avLst/>
+          </a:prstGeom>
+          <a:noFill/>
+          <a:ln/>
+        </p:spPr>
+        <p:txBody>
+          <a:bodyPr wrap="square" lIns="0" tIns="0" rIns="0" bIns="0" rtlCol="0" anchor="ctr"/>
+          <a:lstStyle/>
+          <a:p>
+            <a:pPr indent="0" marL="0">
+              <a:lnSpc>
+                <a:spcPct val="120000"/>
+              </a:lnSpc>
+              <a:buNone/>
+            </a:pPr>
+            <a:r>
+              <a:rPr lang="en-US" sz="1350" b="1" dirty="0">
+                <a:solidFill>
+                  <a:srgbClr val="10161F"/>
+                </a:solidFill>
+                <a:latin typeface="Pretendard" pitchFamily="34" charset="0"/>
+                <a:ea typeface="Pretendard" pitchFamily="34" charset="-122"/>
+                <a:cs typeface="Pretendard" pitchFamily="34" charset="-120"/>
+              </a:rPr>
+              <a:t>true,"mocked":true,"extractedFields":{"area_signal":"역삼","asset_type":"건물명 비공개","price_band":"300억","size_signal":"3000평(약 9917.4㎡)"},"extractedFacts":{"region":"역삼","exactAddressCandidate":"역삼동 742-1","assetType":"건물명 비공개","priceText":"300억","sizeText":"3000평(약 9917.4㎡)","currentUse":"오피스","currentUseSignal":"근린생활시설","leaseSignal":"임대중","vacancySignal":"공실없음","tenantNames":"쿠팡","네이버","unitRentTexts":"301호: 1500만","sellerMotivationText":"자산 효율화","brokerNotes":"역세권 도보 3분 이내 매물"},"detectedSensitiveFields":"exact_address","tenant_name","ambiguousFields":,"warnings":,"areaSignal":"역삼","assetType":"건물명 비공개","priceBand":"300억","sizeSignal":"3000평(약 9917.4㎡)","dealType":"매각","buildingName":"역삼 건물명 비공개","exactAddress":"역삼동 742-1","totalFloorArea":9917.3,"buildYear":2015,"currentUseSignal":"근린생활시설","vacancySignal":"공실 없음","fitSummary":"역세권 도보 3분 이내 근생 빌딩으로 시행/사옥 매입에 최적화","cautionSummary":"주요 임차인 만기 조율 필요","hiddenFields":"exact_address","seller_motivation","confidence":{"areaSignal":"confirmed","assetType":"confirmed","priceBand":"ai_hypothesis","fitSummary":"ai_hypothesis"},"missingData":"sizeSignal","boundaryNote":"본 자료는 실거래 통계 기반 참고치입니다.","buyerType":"법인 사옥형","budgetRange":{"min":50,"max":80,"display":"50억~80억"},"preferredRegions":"강남","성수","assetTypes":"건물명 비공개","사옥용","purchasePurpose":"사옥용 매입","mustHave":"역세권 도보 3분 이내","주차","niceToHave":"테라스","루프탑","riskTolerance":"medium","financingNote":"자본금 50% 준비","missingQuestions":"구체적인 입주 시기가 언제인가요?","선호하는 수익률이 있나요?","privacyNotes":"연락처 비공개","fitReasons":"매수자 예산(50-80억)에 부합하는 매물입니다.","요청하신 성수/강남 권역에 해당합니다.","cautionReasons":"요청한 용도와 달리 명도 협의가 다소 필요합니다.","recommendedNextAction":"현장 답사 제안","kakaoMessage":"안녕하세요! 요청하신 조건에 부합하는 추천 매물이 있어 안내해 드립니다. 확인해보시고 피드백 부탁드립니다.","title":"강남 역삼역 역세권 도보 3분 이내 오피스 사옥용 빌딩 매각","shortSummary":"역삼역 도보 5분 거리의 준신축급 대형 건물명 비공개입니다.","dealPoints":"역세권 도보 3분 이내","사옥 최적","cautionPoints":"명도 조율 필요","hiddenInfoNotice":"보증금 및 지번은 인가 후 확인 가능","gateMessage":"G1 등급 등록이 필요합니다.","kakaoText":"강남 역삼역 오피스 빌딩 매각 안내입니다.","exactUnitCandidate":"101호","floor":"1층","areaSqmText":"150㎡","spaceType":"office","depositText":"5000만","monthlyRentText":"400만","maintenanceFeeText":"50만","availableFromText":"즉시입주","leaseTermMonthsText":"24","incentivesText":"렌트프리(무상임대) 2개월","restrictions":,"landlordIdentity":"김성수","currentTenant":"스타트업","vacancyReason":"이전 확장","rentNegotiation":"협의 가능","region":"성수동","areaSqm":150,"deposit":5000,"monthlyRent":400,"maintenanceFee":50,"availableFrom":"즉시입주","leaseTermMonths":24,"incentives":{"렌트프리(무상임대)(무상임대)Months":2,"interiorSupport":"일부 인테리어 지원","freeRentDetail":"렌트프리(무상임대) 2개월 지원"},"shortSummaryLease":"성수역 도보 5분 거리 1층 리테일 상가 매물입니다."}</a:t>
+            </a:r>
+            <a:endParaRPr lang="en-US" sz="1350" dirty="0"/>
+          </a:p>
+        </p:txBody>
+      </p:sp>
+      <p:sp>
+        <p:nvSpPr>
+          <p:cNvPr id="9" name="Shape 7"/>
+          <p:cNvSpPr/>
+          <p:nvPr/>
+        </p:nvSpPr>
+        <p:spPr>
+          <a:xfrm>
+            <a:off x="7604608" y="1371600"/>
+            <a:ext cx="0" cy="4754880"/>
+          </a:xfrm>
+          <a:prstGeom prst="line">
+            <a:avLst/>
+          </a:prstGeom>
+          <a:noFill/>
+          <a:ln w="8890">
             <a:solidFill>
-              <a:srgbClr val="CBD5E0"/>
+              <a:srgbClr val="B98A2E"/>
             </a:solidFill>
             <a:prstDash val="solid"/>
           </a:ln>
@@ -7672,781 +13497,189 @@
       </p:sp>
       <p:sp>
         <p:nvSpPr>
-          <p:cNvPr id="7" name="Shape 5"/>
-          <p:cNvSpPr/>
-          <p:nvPr/>
-        </p:nvSpPr>
-        <p:spPr>
-          <a:xfrm>
-            <a:off x="786384" y="1792224"/>
-            <a:ext cx="438912" cy="438912"/>
-          </a:xfrm>
-          <a:prstGeom prst="ellipse">
-            <a:avLst/>
+          <p:cNvPr id="10" name="Shape 8"/>
+          <p:cNvSpPr/>
+          <p:nvPr/>
+        </p:nvSpPr>
+        <p:spPr>
+          <a:xfrm>
+            <a:off x="7784287" y="1645920"/>
+            <a:ext cx="3840480" cy="2103120"/>
+          </a:xfrm>
+          <a:prstGeom prst="roundRect">
+            <a:avLst>
+              <a:gd name="adj" fmla="val 2609"/>
+            </a:avLst>
           </a:prstGeom>
           <a:solidFill>
-            <a:srgbClr val="B98A2E"/>
+            <a:srgbClr val="F3EBDA"/>
           </a:solidFill>
           <a:ln/>
         </p:spPr>
       </p:sp>
       <p:sp>
         <p:nvSpPr>
-          <p:cNvPr id="8" name="Text 6"/>
-          <p:cNvSpPr/>
-          <p:nvPr/>
-        </p:nvSpPr>
-        <p:spPr>
-          <a:xfrm>
-            <a:off x="786384" y="1792224"/>
-            <a:ext cx="438912" cy="438912"/>
-          </a:xfrm>
-          <a:prstGeom prst="rect">
-            <a:avLst/>
-          </a:prstGeom>
-          <a:noFill/>
-          <a:ln/>
-        </p:spPr>
-        <p:txBody>
-          <a:bodyPr wrap="square" lIns="0" tIns="0" rIns="0" bIns="0" rtlCol="0" anchor="ctr"/>
-          <a:lstStyle/>
-          <a:p>
-            <a:pPr algn="ctr" indent="0" marL="0">
-              <a:buNone/>
-            </a:pPr>
-            <a:r>
-              <a:rPr lang="en-US" sz="1400" b="1" dirty="0">
-                <a:solidFill>
-                  <a:srgbClr val="FFFFFF"/>
+          <p:cNvPr id="11" name="Shape 9"/>
+          <p:cNvSpPr/>
+          <p:nvPr/>
+        </p:nvSpPr>
+        <p:spPr>
+          <a:xfrm>
+            <a:off x="7784287" y="1700784"/>
+            <a:ext cx="36576" cy="1993392"/>
+          </a:xfrm>
+          <a:prstGeom prst="rect">
+            <a:avLst/>
+          </a:prstGeom>
+          <a:solidFill>
+            <a:srgbClr val="977024"/>
+          </a:solidFill>
+          <a:ln/>
+        </p:spPr>
+      </p:sp>
+      <p:sp>
+        <p:nvSpPr>
+          <p:cNvPr id="12" name="Text 10"/>
+          <p:cNvSpPr/>
+          <p:nvPr/>
+        </p:nvSpPr>
+        <p:spPr>
+          <a:xfrm>
+            <a:off x="7967167" y="1755648"/>
+            <a:ext cx="3511296" cy="201168"/>
+          </a:xfrm>
+          <a:prstGeom prst="rect">
+            <a:avLst/>
+          </a:prstGeom>
+          <a:noFill/>
+          <a:ln/>
+        </p:spPr>
+        <p:txBody>
+          <a:bodyPr wrap="square" lIns="0" tIns="0" rIns="0" bIns="0" rtlCol="0" anchor="ctr"/>
+          <a:lstStyle/>
+          <a:p>
+            <a:pPr indent="0" marL="0">
+              <a:buNone/>
+            </a:pPr>
+            <a:endParaRPr lang="en-US" sz="1050" dirty="0"/>
+          </a:p>
+        </p:txBody>
+      </p:sp>
+      <p:sp>
+        <p:nvSpPr>
+          <p:cNvPr id="13" name="Text 11"/>
+          <p:cNvSpPr/>
+          <p:nvPr/>
+        </p:nvSpPr>
+        <p:spPr>
+          <a:xfrm>
+            <a:off x="7967167" y="1975104"/>
+            <a:ext cx="3511296" cy="1700784"/>
+          </a:xfrm>
+          <a:prstGeom prst="rect">
+            <a:avLst/>
+          </a:prstGeom>
+          <a:noFill/>
+          <a:ln/>
+        </p:spPr>
+        <p:txBody>
+          <a:bodyPr wrap="square" lIns="0" tIns="0" rIns="0" bIns="0" rtlCol="0" anchor="t"/>
+          <a:lstStyle/>
+          <a:p>
+            <a:pPr indent="0" marL="0">
+              <a:lnSpc>
+                <a:spcPct val="120000"/>
+              </a:lnSpc>
+              <a:buNone/>
+            </a:pPr>
+            <a:r>
+              <a:rPr lang="en-US" sz="930" dirty="0">
+                <a:solidFill>
+                  <a:srgbClr val="10161F"/>
+                </a:solidFill>
+                <a:latin typeface="Pretendard" pitchFamily="34" charset="0"/>
+                <a:ea typeface="Pretendard" pitchFamily="34" charset="-122"/>
+                <a:cs typeface="Pretendard" pitchFamily="34" charset="-120"/>
+              </a:rPr>
+              <a:t>{"ok":true,"mocked":true,"extractedFields":{"area_signal":"역삼","asset_type":"[건물명 비공개]","price_band":"300억","size_signal</a:t>
+            </a:r>
+            <a:endParaRPr lang="en-US" sz="930" dirty="0"/>
+          </a:p>
+        </p:txBody>
+      </p:sp>
+      <p:sp>
+        <p:nvSpPr>
+          <p:cNvPr id="14" name="Text 12"/>
+          <p:cNvSpPr/>
+          <p:nvPr/>
+        </p:nvSpPr>
+        <p:spPr>
+          <a:xfrm>
+            <a:off x="566928" y="6382512"/>
+            <a:ext cx="7315200" cy="219456"/>
+          </a:xfrm>
+          <a:prstGeom prst="rect">
+            <a:avLst/>
+          </a:prstGeom>
+          <a:noFill/>
+          <a:ln/>
+        </p:spPr>
+        <p:txBody>
+          <a:bodyPr wrap="square" lIns="0" tIns="0" rIns="0" bIns="0" rtlCol="0" anchor="ctr"/>
+          <a:lstStyle/>
+          <a:p>
+            <a:pPr indent="0" marL="0">
+              <a:buNone/>
+            </a:pPr>
+            <a:r>
+              <a:rPr lang="en-US" sz="800" dirty="0">
+                <a:solidFill>
+                  <a:srgbClr val="718096"/>
+                </a:solidFill>
+                <a:latin typeface="Pretendard" pitchFamily="34" charset="0"/>
+                <a:ea typeface="Pretendard" pitchFamily="34" charset="-122"/>
+                <a:cs typeface="Pretendard" pitchFamily="34" charset="-120"/>
+              </a:rPr>
+              <a:t>크리딜   |   </a:t>
+            </a:r>
+            <a:endParaRPr lang="en-US" sz="800" dirty="0"/>
+          </a:p>
+        </p:txBody>
+      </p:sp>
+      <p:sp>
+        <p:nvSpPr>
+          <p:cNvPr id="15" name="Text 13"/>
+          <p:cNvSpPr/>
+          <p:nvPr/>
+        </p:nvSpPr>
+        <p:spPr>
+          <a:xfrm>
+            <a:off x="10710367" y="6382512"/>
+            <a:ext cx="914400" cy="219456"/>
+          </a:xfrm>
+          <a:prstGeom prst="rect">
+            <a:avLst/>
+          </a:prstGeom>
+          <a:noFill/>
+          <a:ln/>
+        </p:spPr>
+        <p:txBody>
+          <a:bodyPr wrap="square" lIns="0" tIns="0" rIns="0" bIns="0" rtlCol="0" anchor="ctr"/>
+          <a:lstStyle/>
+          <a:p>
+            <a:pPr algn="r" indent="0" marL="0">
+              <a:buNone/>
+            </a:pPr>
+            <a:r>
+              <a:rPr lang="en-US" sz="900" b="1" dirty="0">
+                <a:solidFill>
+                  <a:srgbClr val="B98A2E"/>
                 </a:solidFill>
                 <a:latin typeface="Arial" pitchFamily="34" charset="0"/>
                 <a:ea typeface="Arial" pitchFamily="34" charset="-122"/>
                 <a:cs typeface="Arial" pitchFamily="34" charset="-120"/>
               </a:rPr>
-              <a:t>01</a:t>
-            </a:r>
-            <a:endParaRPr lang="en-US" sz="1400" dirty="0"/>
-          </a:p>
-        </p:txBody>
-      </p:sp>
-      <p:sp>
-        <p:nvSpPr>
-          <p:cNvPr id="9" name="Text 7"/>
-          <p:cNvSpPr/>
-          <p:nvPr/>
-        </p:nvSpPr>
-        <p:spPr>
-          <a:xfrm>
-            <a:off x="786384" y="2304288"/>
-            <a:ext cx="2051228" cy="365760"/>
-          </a:xfrm>
-          <a:prstGeom prst="rect">
-            <a:avLst/>
-          </a:prstGeom>
-          <a:noFill/>
-          <a:ln/>
-        </p:spPr>
-        <p:txBody>
-          <a:bodyPr wrap="square" rtlCol="0" anchor="ctr"/>
-          <a:lstStyle/>
-          <a:p>
-            <a:pPr indent="0" marL="0">
-              <a:buNone/>
-            </a:pPr>
-            <a:r>
-              <a:rPr lang="en-US" sz="1600" b="1" dirty="0">
-                <a:solidFill>
-                  <a:srgbClr val="10161F"/>
-                </a:solidFill>
-                <a:latin typeface="Pretendard" pitchFamily="34" charset="0"/>
-                <a:ea typeface="Pretendard" pitchFamily="34" charset="-122"/>
-                <a:cs typeface="Pretendard" pitchFamily="34" charset="-120"/>
-              </a:rPr>
-              <a:t>1단계</a:t>
-            </a:r>
-            <a:endParaRPr lang="en-US" sz="1600" dirty="0"/>
-          </a:p>
-        </p:txBody>
-      </p:sp>
-      <p:sp>
-        <p:nvSpPr>
-          <p:cNvPr id="10" name="Text 8"/>
-          <p:cNvSpPr/>
-          <p:nvPr/>
-        </p:nvSpPr>
-        <p:spPr>
-          <a:xfrm>
-            <a:off x="786384" y="2761488"/>
-            <a:ext cx="2051228" cy="1828800"/>
-          </a:xfrm>
-          <a:prstGeom prst="rect">
-            <a:avLst/>
-          </a:prstGeom>
-          <a:noFill/>
-          <a:ln/>
-        </p:spPr>
-        <p:txBody>
-          <a:bodyPr wrap="square" rtlCol="0" anchor="t"/>
-          <a:lstStyle/>
-          <a:p>
-            <a:pPr indent="0" marL="0">
-              <a:buNone/>
-            </a:pPr>
-            <a:r>
-              <a:rPr lang="en-US" sz="1100" dirty="0">
-                <a:solidFill>
-                  <a:srgbClr val="10161F"/>
-                </a:solidFill>
-                <a:latin typeface="Pretendard" pitchFamily="34" charset="0"/>
-                <a:ea typeface="Pretendard" pitchFamily="34" charset="-122"/>
-                <a:cs typeface="Pretendard" pitchFamily="34" charset="-120"/>
-              </a:rPr>
-              <a:t>초기 관심 표명 → 담당자 연락</a:t>
-            </a:r>
-            <a:endParaRPr lang="en-US" sz="1100" dirty="0"/>
-          </a:p>
-        </p:txBody>
-      </p:sp>
-      <p:sp>
-        <p:nvSpPr>
-          <p:cNvPr id="11" name="Shape 9"/>
-          <p:cNvSpPr/>
-          <p:nvPr/>
-        </p:nvSpPr>
-        <p:spPr>
-          <a:xfrm>
-            <a:off x="3148508" y="3035808"/>
-            <a:ext cx="182880" cy="274320"/>
-          </a:xfrm>
-          <a:prstGeom prst="rightArrow">
-            <a:avLst/>
-          </a:prstGeom>
-          <a:solidFill>
-            <a:srgbClr val="CBD5E0"/>
-          </a:solidFill>
-          <a:ln w="6350">
-            <a:solidFill>
-              <a:srgbClr val="718096"/>
-            </a:solidFill>
-            <a:prstDash val="solid"/>
-          </a:ln>
-        </p:spPr>
-      </p:sp>
-      <p:sp>
-        <p:nvSpPr>
-          <p:cNvPr id="12" name="Shape 10"/>
-          <p:cNvSpPr/>
-          <p:nvPr/>
-        </p:nvSpPr>
-        <p:spPr>
-          <a:xfrm>
-            <a:off x="3422828" y="1572768"/>
-            <a:ext cx="2490140" cy="3200400"/>
-          </a:xfrm>
-          <a:prstGeom prst="roundRect">
-            <a:avLst>
-              <a:gd name="adj" fmla="val 2203"/>
-            </a:avLst>
-          </a:prstGeom>
-          <a:solidFill>
-            <a:srgbClr val="F7FAFC"/>
-          </a:solidFill>
-          <a:ln w="6350">
-            <a:solidFill>
-              <a:srgbClr val="CBD5E0"/>
-            </a:solidFill>
-            <a:prstDash val="solid"/>
-          </a:ln>
-        </p:spPr>
-      </p:sp>
-      <p:sp>
-        <p:nvSpPr>
-          <p:cNvPr id="13" name="Shape 11"/>
-          <p:cNvSpPr/>
-          <p:nvPr/>
-        </p:nvSpPr>
-        <p:spPr>
-          <a:xfrm>
-            <a:off x="3642284" y="1792224"/>
-            <a:ext cx="438912" cy="438912"/>
-          </a:xfrm>
-          <a:prstGeom prst="ellipse">
-            <a:avLst/>
-          </a:prstGeom>
-          <a:solidFill>
-            <a:srgbClr val="B98A2E"/>
-          </a:solidFill>
-          <a:ln/>
-        </p:spPr>
-      </p:sp>
-      <p:sp>
-        <p:nvSpPr>
-          <p:cNvPr id="14" name="Text 12"/>
-          <p:cNvSpPr/>
-          <p:nvPr/>
-        </p:nvSpPr>
-        <p:spPr>
-          <a:xfrm>
-            <a:off x="3642284" y="1792224"/>
-            <a:ext cx="438912" cy="438912"/>
-          </a:xfrm>
-          <a:prstGeom prst="rect">
-            <a:avLst/>
-          </a:prstGeom>
-          <a:noFill/>
-          <a:ln/>
-        </p:spPr>
-        <p:txBody>
-          <a:bodyPr wrap="square" lIns="0" tIns="0" rIns="0" bIns="0" rtlCol="0" anchor="ctr"/>
-          <a:lstStyle/>
-          <a:p>
-            <a:pPr algn="ctr" indent="0" marL="0">
-              <a:buNone/>
-            </a:pPr>
-            <a:r>
-              <a:rPr lang="en-US" sz="1400" b="1" dirty="0">
-                <a:solidFill>
-                  <a:srgbClr val="FFFFFF"/>
-                </a:solidFill>
-                <a:latin typeface="Arial" pitchFamily="34" charset="0"/>
-                <a:ea typeface="Arial" pitchFamily="34" charset="-122"/>
-                <a:cs typeface="Arial" pitchFamily="34" charset="-120"/>
-              </a:rPr>
-              <a:t>02</a:t>
-            </a:r>
-            <a:endParaRPr lang="en-US" sz="1400" dirty="0"/>
-          </a:p>
-        </p:txBody>
-      </p:sp>
-      <p:sp>
-        <p:nvSpPr>
-          <p:cNvPr id="15" name="Text 13"/>
-          <p:cNvSpPr/>
-          <p:nvPr/>
-        </p:nvSpPr>
-        <p:spPr>
-          <a:xfrm>
-            <a:off x="3642284" y="2304288"/>
-            <a:ext cx="2051228" cy="365760"/>
-          </a:xfrm>
-          <a:prstGeom prst="rect">
-            <a:avLst/>
-          </a:prstGeom>
-          <a:noFill/>
-          <a:ln/>
-        </p:spPr>
-        <p:txBody>
-          <a:bodyPr wrap="square" rtlCol="0" anchor="ctr"/>
-          <a:lstStyle/>
-          <a:p>
-            <a:pPr indent="0" marL="0">
-              <a:buNone/>
-            </a:pPr>
-            <a:r>
-              <a:rPr lang="en-US" sz="1600" b="1" dirty="0">
-                <a:solidFill>
-                  <a:srgbClr val="10161F"/>
-                </a:solidFill>
-                <a:latin typeface="Pretendard" pitchFamily="34" charset="0"/>
-                <a:ea typeface="Pretendard" pitchFamily="34" charset="-122"/>
-                <a:cs typeface="Pretendard" pitchFamily="34" charset="-120"/>
-              </a:rPr>
-              <a:t>2단계</a:t>
-            </a:r>
-            <a:endParaRPr lang="en-US" sz="1600" dirty="0"/>
-          </a:p>
-        </p:txBody>
-      </p:sp>
-      <p:sp>
-        <p:nvSpPr>
-          <p:cNvPr id="16" name="Text 14"/>
-          <p:cNvSpPr/>
-          <p:nvPr/>
-        </p:nvSpPr>
-        <p:spPr>
-          <a:xfrm>
-            <a:off x="3642284" y="2761488"/>
-            <a:ext cx="2051228" cy="1828800"/>
-          </a:xfrm>
-          <a:prstGeom prst="rect">
-            <a:avLst/>
-          </a:prstGeom>
-          <a:noFill/>
-          <a:ln/>
-        </p:spPr>
-        <p:txBody>
-          <a:bodyPr wrap="square" rtlCol="0" anchor="t"/>
-          <a:lstStyle/>
-          <a:p>
-            <a:pPr indent="0" marL="0">
-              <a:buNone/>
-            </a:pPr>
-            <a:r>
-              <a:rPr lang="en-US" sz="1100" dirty="0">
-                <a:solidFill>
-                  <a:srgbClr val="10161F"/>
-                </a:solidFill>
-                <a:latin typeface="Pretendard" pitchFamily="34" charset="0"/>
-                <a:ea typeface="Pretendard" pitchFamily="34" charset="-122"/>
-                <a:cs typeface="Pretendard" pitchFamily="34" charset="-120"/>
-              </a:rPr>
-              <a:t>NDA 체결 → 임차인 정보 및 임대차계약서 제공</a:t>
-            </a:r>
-            <a:endParaRPr lang="en-US" sz="1100" dirty="0"/>
-          </a:p>
-        </p:txBody>
-      </p:sp>
-      <p:sp>
-        <p:nvSpPr>
-          <p:cNvPr id="17" name="Shape 15"/>
-          <p:cNvSpPr/>
-          <p:nvPr/>
-        </p:nvSpPr>
-        <p:spPr>
-          <a:xfrm>
-            <a:off x="6004408" y="3035808"/>
-            <a:ext cx="182880" cy="274320"/>
-          </a:xfrm>
-          <a:prstGeom prst="rightArrow">
-            <a:avLst/>
-          </a:prstGeom>
-          <a:solidFill>
-            <a:srgbClr val="CBD5E0"/>
-          </a:solidFill>
-          <a:ln w="6350">
-            <a:solidFill>
-              <a:srgbClr val="718096"/>
-            </a:solidFill>
-            <a:prstDash val="solid"/>
-          </a:ln>
-        </p:spPr>
-      </p:sp>
-      <p:sp>
-        <p:nvSpPr>
-          <p:cNvPr id="18" name="Shape 16"/>
-          <p:cNvSpPr/>
-          <p:nvPr/>
-        </p:nvSpPr>
-        <p:spPr>
-          <a:xfrm>
-            <a:off x="6278728" y="1572768"/>
-            <a:ext cx="2490140" cy="3200400"/>
-          </a:xfrm>
-          <a:prstGeom prst="roundRect">
-            <a:avLst>
-              <a:gd name="adj" fmla="val 2203"/>
-            </a:avLst>
-          </a:prstGeom>
-          <a:solidFill>
-            <a:srgbClr val="F7FAFC"/>
-          </a:solidFill>
-          <a:ln w="6350">
-            <a:solidFill>
-              <a:srgbClr val="CBD5E0"/>
-            </a:solidFill>
-            <a:prstDash val="solid"/>
-          </a:ln>
-        </p:spPr>
-      </p:sp>
-      <p:sp>
-        <p:nvSpPr>
-          <p:cNvPr id="19" name="Shape 17"/>
-          <p:cNvSpPr/>
-          <p:nvPr/>
-        </p:nvSpPr>
-        <p:spPr>
-          <a:xfrm>
-            <a:off x="6498184" y="1792224"/>
-            <a:ext cx="438912" cy="438912"/>
-          </a:xfrm>
-          <a:prstGeom prst="ellipse">
-            <a:avLst/>
-          </a:prstGeom>
-          <a:solidFill>
-            <a:srgbClr val="B98A2E"/>
-          </a:solidFill>
-          <a:ln/>
-        </p:spPr>
-      </p:sp>
-      <p:sp>
-        <p:nvSpPr>
-          <p:cNvPr id="20" name="Text 18"/>
-          <p:cNvSpPr/>
-          <p:nvPr/>
-        </p:nvSpPr>
-        <p:spPr>
-          <a:xfrm>
-            <a:off x="6498184" y="1792224"/>
-            <a:ext cx="438912" cy="438912"/>
-          </a:xfrm>
-          <a:prstGeom prst="rect">
-            <a:avLst/>
-          </a:prstGeom>
-          <a:noFill/>
-          <a:ln/>
-        </p:spPr>
-        <p:txBody>
-          <a:bodyPr wrap="square" lIns="0" tIns="0" rIns="0" bIns="0" rtlCol="0" anchor="ctr"/>
-          <a:lstStyle/>
-          <a:p>
-            <a:pPr algn="ctr" indent="0" marL="0">
-              <a:buNone/>
-            </a:pPr>
-            <a:r>
-              <a:rPr lang="en-US" sz="1400" b="1" dirty="0">
-                <a:solidFill>
-                  <a:srgbClr val="FFFFFF"/>
-                </a:solidFill>
-                <a:latin typeface="Arial" pitchFamily="34" charset="0"/>
-                <a:ea typeface="Arial" pitchFamily="34" charset="-122"/>
-                <a:cs typeface="Arial" pitchFamily="34" charset="-120"/>
-              </a:rPr>
-              <a:t>03</a:t>
-            </a:r>
-            <a:endParaRPr lang="en-US" sz="1400" dirty="0"/>
-          </a:p>
-        </p:txBody>
-      </p:sp>
-      <p:sp>
-        <p:nvSpPr>
-          <p:cNvPr id="21" name="Text 19"/>
-          <p:cNvSpPr/>
-          <p:nvPr/>
-        </p:nvSpPr>
-        <p:spPr>
-          <a:xfrm>
-            <a:off x="6498184" y="2304288"/>
-            <a:ext cx="2051228" cy="365760"/>
-          </a:xfrm>
-          <a:prstGeom prst="rect">
-            <a:avLst/>
-          </a:prstGeom>
-          <a:noFill/>
-          <a:ln/>
-        </p:spPr>
-        <p:txBody>
-          <a:bodyPr wrap="square" rtlCol="0" anchor="ctr"/>
-          <a:lstStyle/>
-          <a:p>
-            <a:pPr indent="0" marL="0">
-              <a:buNone/>
-            </a:pPr>
-            <a:r>
-              <a:rPr lang="en-US" sz="1600" b="1" dirty="0">
-                <a:solidFill>
-                  <a:srgbClr val="10161F"/>
-                </a:solidFill>
-                <a:latin typeface="Pretendard" pitchFamily="34" charset="0"/>
-                <a:ea typeface="Pretendard" pitchFamily="34" charset="-122"/>
-                <a:cs typeface="Pretendard" pitchFamily="34" charset="-120"/>
-              </a:rPr>
-              <a:t>3단계</a:t>
-            </a:r>
-            <a:endParaRPr lang="en-US" sz="1600" dirty="0"/>
-          </a:p>
-        </p:txBody>
-      </p:sp>
-      <p:sp>
-        <p:nvSpPr>
-          <p:cNvPr id="22" name="Text 20"/>
-          <p:cNvSpPr/>
-          <p:nvPr/>
-        </p:nvSpPr>
-        <p:spPr>
-          <a:xfrm>
-            <a:off x="6498184" y="2761488"/>
-            <a:ext cx="2051228" cy="1828800"/>
-          </a:xfrm>
-          <a:prstGeom prst="rect">
-            <a:avLst/>
-          </a:prstGeom>
-          <a:noFill/>
-          <a:ln/>
-        </p:spPr>
-        <p:txBody>
-          <a:bodyPr wrap="square" rtlCol="0" anchor="t"/>
-          <a:lstStyle/>
-          <a:p>
-            <a:pPr indent="0" marL="0">
-              <a:buNone/>
-            </a:pPr>
-            <a:r>
-              <a:rPr lang="en-US" sz="1100" dirty="0">
-                <a:solidFill>
-                  <a:srgbClr val="10161F"/>
-                </a:solidFill>
-                <a:latin typeface="Pretendard" pitchFamily="34" charset="0"/>
-                <a:ea typeface="Pretendard" pitchFamily="34" charset="-122"/>
-                <a:cs typeface="Pretendard" pitchFamily="34" charset="-120"/>
-              </a:rPr>
-              <a:t>현장 실사 일정 조율 → 건물 컨디션 및 설비 직접 확인</a:t>
-            </a:r>
-            <a:endParaRPr lang="en-US" sz="1100" dirty="0"/>
-          </a:p>
-        </p:txBody>
-      </p:sp>
-      <p:sp>
-        <p:nvSpPr>
-          <p:cNvPr id="23" name="Shape 21"/>
-          <p:cNvSpPr/>
-          <p:nvPr/>
-        </p:nvSpPr>
-        <p:spPr>
-          <a:xfrm>
-            <a:off x="8860307" y="3035808"/>
-            <a:ext cx="182880" cy="274320"/>
-          </a:xfrm>
-          <a:prstGeom prst="rightArrow">
-            <a:avLst/>
-          </a:prstGeom>
-          <a:solidFill>
-            <a:srgbClr val="CBD5E0"/>
-          </a:solidFill>
-          <a:ln w="6350">
-            <a:solidFill>
-              <a:srgbClr val="718096"/>
-            </a:solidFill>
-            <a:prstDash val="solid"/>
-          </a:ln>
-        </p:spPr>
-      </p:sp>
-      <p:sp>
-        <p:nvSpPr>
-          <p:cNvPr id="24" name="Shape 22"/>
-          <p:cNvSpPr/>
-          <p:nvPr/>
-        </p:nvSpPr>
-        <p:spPr>
-          <a:xfrm>
-            <a:off x="9134627" y="1572768"/>
-            <a:ext cx="2490140" cy="3200400"/>
-          </a:xfrm>
-          <a:prstGeom prst="roundRect">
-            <a:avLst>
-              <a:gd name="adj" fmla="val 2203"/>
-            </a:avLst>
-          </a:prstGeom>
-          <a:solidFill>
-            <a:srgbClr val="F7FAFC"/>
-          </a:solidFill>
-          <a:ln w="6350">
-            <a:solidFill>
-              <a:srgbClr val="CBD5E0"/>
-            </a:solidFill>
-            <a:prstDash val="solid"/>
-          </a:ln>
-        </p:spPr>
-      </p:sp>
-      <p:sp>
-        <p:nvSpPr>
-          <p:cNvPr id="25" name="Shape 23"/>
-          <p:cNvSpPr/>
-          <p:nvPr/>
-        </p:nvSpPr>
-        <p:spPr>
-          <a:xfrm>
-            <a:off x="9354083" y="1792224"/>
-            <a:ext cx="438912" cy="438912"/>
-          </a:xfrm>
-          <a:prstGeom prst="ellipse">
-            <a:avLst/>
-          </a:prstGeom>
-          <a:solidFill>
-            <a:srgbClr val="B98A2E"/>
-          </a:solidFill>
-          <a:ln/>
-        </p:spPr>
-      </p:sp>
-      <p:sp>
-        <p:nvSpPr>
-          <p:cNvPr id="26" name="Text 24"/>
-          <p:cNvSpPr/>
-          <p:nvPr/>
-        </p:nvSpPr>
-        <p:spPr>
-          <a:xfrm>
-            <a:off x="9354083" y="1792224"/>
-            <a:ext cx="438912" cy="438912"/>
-          </a:xfrm>
-          <a:prstGeom prst="rect">
-            <a:avLst/>
-          </a:prstGeom>
-          <a:noFill/>
-          <a:ln/>
-        </p:spPr>
-        <p:txBody>
-          <a:bodyPr wrap="square" lIns="0" tIns="0" rIns="0" bIns="0" rtlCol="0" anchor="ctr"/>
-          <a:lstStyle/>
-          <a:p>
-            <a:pPr algn="ctr" indent="0" marL="0">
-              <a:buNone/>
-            </a:pPr>
-            <a:r>
-              <a:rPr lang="en-US" sz="1400" b="1" dirty="0">
-                <a:solidFill>
-                  <a:srgbClr val="FFFFFF"/>
-                </a:solidFill>
-                <a:latin typeface="Arial" pitchFamily="34" charset="0"/>
-                <a:ea typeface="Arial" pitchFamily="34" charset="-122"/>
-                <a:cs typeface="Arial" pitchFamily="34" charset="-120"/>
-              </a:rPr>
-              <a:t>04</a:t>
-            </a:r>
-            <a:endParaRPr lang="en-US" sz="1400" dirty="0"/>
-          </a:p>
-        </p:txBody>
-      </p:sp>
-      <p:sp>
-        <p:nvSpPr>
-          <p:cNvPr id="27" name="Text 25"/>
-          <p:cNvSpPr/>
-          <p:nvPr/>
-        </p:nvSpPr>
-        <p:spPr>
-          <a:xfrm>
-            <a:off x="9354083" y="2304288"/>
-            <a:ext cx="2051228" cy="365760"/>
-          </a:xfrm>
-          <a:prstGeom prst="rect">
-            <a:avLst/>
-          </a:prstGeom>
-          <a:noFill/>
-          <a:ln/>
-        </p:spPr>
-        <p:txBody>
-          <a:bodyPr wrap="square" rtlCol="0" anchor="ctr"/>
-          <a:lstStyle/>
-          <a:p>
-            <a:pPr indent="0" marL="0">
-              <a:buNone/>
-            </a:pPr>
-            <a:r>
-              <a:rPr lang="en-US" sz="1600" b="1" dirty="0">
-                <a:solidFill>
-                  <a:srgbClr val="10161F"/>
-                </a:solidFill>
-                <a:latin typeface="Pretendard" pitchFamily="34" charset="0"/>
-                <a:ea typeface="Pretendard" pitchFamily="34" charset="-122"/>
-                <a:cs typeface="Pretendard" pitchFamily="34" charset="-120"/>
-              </a:rPr>
-              <a:t>4단계</a:t>
-            </a:r>
-            <a:endParaRPr lang="en-US" sz="1600" dirty="0"/>
-          </a:p>
-        </p:txBody>
-      </p:sp>
-      <p:sp>
-        <p:nvSpPr>
-          <p:cNvPr id="28" name="Text 26"/>
-          <p:cNvSpPr/>
-          <p:nvPr/>
-        </p:nvSpPr>
-        <p:spPr>
-          <a:xfrm>
-            <a:off x="9354083" y="2761488"/>
-            <a:ext cx="2051228" cy="1828800"/>
-          </a:xfrm>
-          <a:prstGeom prst="rect">
-            <a:avLst/>
-          </a:prstGeom>
-          <a:noFill/>
-          <a:ln/>
-        </p:spPr>
-        <p:txBody>
-          <a:bodyPr wrap="square" rtlCol="0" anchor="t"/>
-          <a:lstStyle/>
-          <a:p>
-            <a:pPr indent="0" marL="0">
-              <a:buNone/>
-            </a:pPr>
-            <a:r>
-              <a:rPr lang="en-US" sz="1100" dirty="0">
-                <a:solidFill>
-                  <a:srgbClr val="10161F"/>
-                </a:solidFill>
-                <a:latin typeface="Pretendard" pitchFamily="34" charset="0"/>
-                <a:ea typeface="Pretendard" pitchFamily="34" charset="-122"/>
-                <a:cs typeface="Pretendard" pitchFamily="34" charset="-120"/>
-              </a:rPr>
-              <a:t>LOI(투자의향서) 제출 → 가격 협의 개시</a:t>
-            </a:r>
-            <a:endParaRPr lang="en-US" sz="1100" dirty="0"/>
-          </a:p>
-        </p:txBody>
-      </p:sp>
-      <p:sp>
-        <p:nvSpPr>
-          <p:cNvPr id="29" name="Text 27"/>
-          <p:cNvSpPr/>
-          <p:nvPr/>
-        </p:nvSpPr>
-        <p:spPr>
-          <a:xfrm>
-            <a:off x="566928" y="6382512"/>
-            <a:ext cx="7315200" cy="219456"/>
-          </a:xfrm>
-          <a:prstGeom prst="rect">
-            <a:avLst/>
-          </a:prstGeom>
-          <a:noFill/>
-          <a:ln/>
-        </p:spPr>
-        <p:txBody>
-          <a:bodyPr wrap="square" lIns="0" tIns="0" rIns="0" bIns="0" rtlCol="0" anchor="ctr"/>
-          <a:lstStyle/>
-          <a:p>
-            <a:pPr indent="0" marL="0">
-              <a:buNone/>
-            </a:pPr>
-            <a:r>
-              <a:rPr lang="en-US" sz="800" dirty="0">
-                <a:solidFill>
-                  <a:srgbClr val="718096"/>
-                </a:solidFill>
-                <a:latin typeface="Pretendard" pitchFamily="34" charset="0"/>
-                <a:ea typeface="Pretendard" pitchFamily="34" charset="-122"/>
-                <a:cs typeface="Pretendard" pitchFamily="34" charset="-120"/>
-              </a:rPr>
-              <a:t>크리딜   |   </a:t>
-            </a:r>
-            <a:endParaRPr lang="en-US" sz="800" dirty="0"/>
-          </a:p>
-        </p:txBody>
-      </p:sp>
-      <p:sp>
-        <p:nvSpPr>
-          <p:cNvPr id="30" name="Text 28"/>
-          <p:cNvSpPr/>
-          <p:nvPr/>
-        </p:nvSpPr>
-        <p:spPr>
-          <a:xfrm>
-            <a:off x="10710367" y="6382512"/>
-            <a:ext cx="914400" cy="219456"/>
-          </a:xfrm>
-          <a:prstGeom prst="rect">
-            <a:avLst/>
-          </a:prstGeom>
-          <a:noFill/>
-          <a:ln/>
-        </p:spPr>
-        <p:txBody>
-          <a:bodyPr wrap="square" lIns="0" tIns="0" rIns="0" bIns="0" rtlCol="0" anchor="ctr"/>
-          <a:lstStyle/>
-          <a:p>
-            <a:pPr algn="r" indent="0" marL="0">
-              <a:buNone/>
-            </a:pPr>
-            <a:r>
-              <a:rPr lang="en-US" sz="900" b="1" dirty="0">
-                <a:solidFill>
-                  <a:srgbClr val="B98A2E"/>
-                </a:solidFill>
-                <a:latin typeface="Arial" pitchFamily="34" charset="0"/>
-                <a:ea typeface="Arial" pitchFamily="34" charset="-122"/>
-                <a:cs typeface="Arial" pitchFamily="34" charset="-120"/>
-              </a:rPr>
-              <a:t>9</a:t>
+              <a:t>8</a:t>
             </a:r>
             <a:endParaRPr lang="en-US" sz="900" dirty="0"/>
           </a:p>

--- a/docs/test/stress/e2e-outputs/trading_case15_jongro_family_basic.pptx
+++ b/docs/test/stress/e2e-outputs/trading_case15_jongro_family_basic.pptx
@@ -19,9 +19,10 @@
     <p:sldId id="267" r:id="rId13"/>
     <p:sldId id="268" r:id="rId14"/>
     <p:sldId id="269" r:id="rId15"/>
+    <p:sldId id="270" r:id="rId16"/>
   </p:sldIdLst>
   <p:notesMasterIdLst>
-    <p:notesMasterId r:id="rId16"/>
+    <p:notesMasterId r:id="rId17"/>
   </p:notesMasterIdLst>
   <p:sldSz cx="12192000" cy="6858000"/>
   <p:notesSz cx="6858000" cy="12192000"/>
@@ -979,6 +980,94 @@
             <a:fld id="{F7021451-1387-4CA6-816F-3879F97B5CBC}" type="slidenum">
               <a:rPr lang="en-US"/>
               <a:t>14</a:t>
+            </a:fld>
+            <a:endParaRPr lang="en-US"/>
+          </a:p>
+        </p:txBody>
+      </p:sp>
+    </p:spTree>
+    <p:extLst>
+      <p:ext uri="{BB962C8B-B14F-4D97-AF65-F5344CB8AC3E}">
+        <p14:creationId xmlns:p14="http://schemas.microsoft.com/office/powerpoint/2010/main" val="1024086991"/>
+      </p:ext>
+    </p:extLst>
+  </p:cSld>
+  <p:clrMapOvr>
+    <a:masterClrMapping/>
+  </p:clrMapOvr>
+</p:notes>
+</file>
+
+<file path=ppt/notesSlides/notesSlide15.xml><?xml version="1.0" encoding="utf-8"?>
+<p:notes xmlns:a="http://schemas.openxmlformats.org/drawingml/2006/main" xmlns:r="http://schemas.openxmlformats.org/officeDocument/2006/relationships" xmlns:p="http://schemas.openxmlformats.org/presentationml/2006/main">
+  <p:cSld>
+    <p:spTree>
+      <p:nvGrpSpPr>
+        <p:cNvPr id="1" name=""/>
+        <p:cNvGrpSpPr/>
+        <p:nvPr/>
+      </p:nvGrpSpPr>
+      <p:grpSpPr>
+        <a:xfrm>
+          <a:off x="0" y="0"/>
+          <a:ext cx="0" cy="0"/>
+          <a:chOff x="0" y="0"/>
+          <a:chExt cx="0" cy="0"/>
+        </a:xfrm>
+      </p:grpSpPr>
+      <p:sp>
+        <p:nvSpPr>
+          <p:cNvPr id="2" name="Slide Image Placeholder 1"/>
+          <p:cNvSpPr>
+            <a:spLocks noGrp="1" noRot="1" noChangeAspect="1"/>
+          </p:cNvSpPr>
+          <p:nvPr>
+            <p:ph type="sldImg"/>
+          </p:nvPr>
+        </p:nvSpPr>
+        <p:spPr/>
+      </p:sp>
+      <p:sp>
+        <p:nvSpPr>
+          <p:cNvPr id="3" name="Notes Placeholder 2"/>
+          <p:cNvSpPr>
+            <a:spLocks noGrp="1"/>
+          </p:cNvSpPr>
+          <p:nvPr>
+            <p:ph type="body" idx="1"/>
+          </p:nvPr>
+        </p:nvSpPr>
+        <p:spPr/>
+        <p:txBody>
+          <a:bodyPr/>
+          <a:lstStyle/>
+          <a:p>
+            <a:r>
+              <a:rPr lang="en-US" dirty="0"/>
+              <a:t/>
+            </a:r>
+            <a:endParaRPr lang="en-US" dirty="0"/>
+          </a:p>
+        </p:txBody>
+      </p:sp>
+      <p:sp>
+        <p:nvSpPr>
+          <p:cNvPr id="4" name="Slide Number Placeholder 3"/>
+          <p:cNvSpPr>
+            <a:spLocks noGrp="1"/>
+          </p:cNvSpPr>
+          <p:nvPr>
+            <p:ph type="sldNum" sz="quarter" idx="10"/>
+          </p:nvPr>
+        </p:nvSpPr>
+        <p:spPr/>
+        <p:txBody>
+          <a:bodyPr/>
+          <a:lstStyle/>
+          <a:p>
+            <a:fld id="{F7021451-1387-4CA6-816F-3879F97B5CBC}" type="slidenum">
+              <a:rPr lang="en-US"/>
+              <a:t>15</a:t>
             </a:fld>
             <a:endParaRPr lang="en-US"/>
           </a:p>
@@ -6981,6 +7070,434 @@
     <p:bg>
       <p:bgPr>
         <a:solidFill>
+          <a:srgbClr val="FFFFFF"/>
+        </a:solidFill>
+      </p:bgPr>
+    </p:bg>
+    <p:spTree>
+      <p:nvGrpSpPr>
+        <p:cNvPr id="1" name=""/>
+        <p:cNvGrpSpPr/>
+        <p:nvPr/>
+      </p:nvGrpSpPr>
+      <p:grpSpPr>
+        <a:xfrm>
+          <a:off x="0" y="0"/>
+          <a:ext cx="0" cy="0"/>
+          <a:chOff x="0" y="0"/>
+          <a:chExt cx="0" cy="0"/>
+        </a:xfrm>
+      </p:grpSpPr>
+      <p:sp>
+        <p:nvSpPr>
+          <p:cNvPr id="2" name="Shape 0"/>
+          <p:cNvSpPr/>
+          <p:nvPr/>
+        </p:nvSpPr>
+        <p:spPr>
+          <a:xfrm>
+            <a:off x="566928" y="457200"/>
+            <a:ext cx="384048" cy="384048"/>
+          </a:xfrm>
+          <a:prstGeom prst="ellipse">
+            <a:avLst/>
+          </a:prstGeom>
+          <a:solidFill>
+            <a:srgbClr val="B98A2E"/>
+          </a:solidFill>
+          <a:ln/>
+        </p:spPr>
+      </p:sp>
+      <p:sp>
+        <p:nvSpPr>
+          <p:cNvPr id="3" name="Text 1"/>
+          <p:cNvSpPr/>
+          <p:nvPr/>
+        </p:nvSpPr>
+        <p:spPr>
+          <a:xfrm>
+            <a:off x="566928" y="457200"/>
+            <a:ext cx="384048" cy="384048"/>
+          </a:xfrm>
+          <a:prstGeom prst="rect">
+            <a:avLst/>
+          </a:prstGeom>
+          <a:noFill/>
+          <a:ln/>
+        </p:spPr>
+        <p:txBody>
+          <a:bodyPr wrap="square" lIns="0" tIns="0" rIns="0" bIns="0" rtlCol="0" anchor="ctr"/>
+          <a:lstStyle/>
+          <a:p>
+            <a:pPr algn="ctr" indent="0" marL="0">
+              <a:buNone/>
+            </a:pPr>
+            <a:r>
+              <a:rPr lang="en-US" sz="1300" b="1" dirty="0">
+                <a:solidFill>
+                  <a:srgbClr val="FFFFFF"/>
+                </a:solidFill>
+                <a:latin typeface="Arial" pitchFamily="34" charset="0"/>
+                <a:ea typeface="Arial" pitchFamily="34" charset="-122"/>
+                <a:cs typeface="Arial" pitchFamily="34" charset="-120"/>
+              </a:rPr>
+              <a:t>12</a:t>
+            </a:r>
+            <a:endParaRPr lang="en-US" sz="1300" dirty="0"/>
+          </a:p>
+        </p:txBody>
+      </p:sp>
+      <p:sp>
+        <p:nvSpPr>
+          <p:cNvPr id="4" name="Text 2"/>
+          <p:cNvSpPr/>
+          <p:nvPr/>
+        </p:nvSpPr>
+        <p:spPr>
+          <a:xfrm>
+            <a:off x="1133856" y="457200"/>
+            <a:ext cx="10490911" cy="182880"/>
+          </a:xfrm>
+          <a:prstGeom prst="rect">
+            <a:avLst/>
+          </a:prstGeom>
+          <a:noFill/>
+          <a:ln/>
+        </p:spPr>
+        <p:txBody>
+          <a:bodyPr wrap="square" lIns="0" tIns="0" rIns="0" bIns="0" rtlCol="0" anchor="ctr"/>
+          <a:lstStyle/>
+          <a:p>
+            <a:pPr indent="0" marL="0">
+              <a:buNone/>
+            </a:pPr>
+            <a:r>
+              <a:rPr lang="en-US" sz="950" b="1" spc="200" kern="0" dirty="0">
+                <a:solidFill>
+                  <a:srgbClr val="B98A2E"/>
+                </a:solidFill>
+                <a:latin typeface="Arial" pitchFamily="34" charset="0"/>
+                <a:ea typeface="Arial" pitchFamily="34" charset="-122"/>
+                <a:cs typeface="Arial" pitchFamily="34" charset="-120"/>
+              </a:rPr>
+              <a:t>Process</a:t>
+            </a:r>
+            <a:endParaRPr lang="en-US" sz="950" dirty="0"/>
+          </a:p>
+        </p:txBody>
+      </p:sp>
+      <p:sp>
+        <p:nvSpPr>
+          <p:cNvPr id="5" name="Text 3"/>
+          <p:cNvSpPr/>
+          <p:nvPr/>
+        </p:nvSpPr>
+        <p:spPr>
+          <a:xfrm>
+            <a:off x="1133856" y="640080"/>
+            <a:ext cx="10490911" cy="365760"/>
+          </a:xfrm>
+          <a:prstGeom prst="rect">
+            <a:avLst/>
+          </a:prstGeom>
+          <a:noFill/>
+          <a:ln/>
+        </p:spPr>
+        <p:txBody>
+          <a:bodyPr wrap="square" lIns="0" tIns="0" rIns="0" bIns="0" rtlCol="0" anchor="ctr"/>
+          <a:lstStyle/>
+          <a:p>
+            <a:pPr indent="0" marL="0">
+              <a:buNone/>
+            </a:pPr>
+            <a:r>
+              <a:rPr lang="en-US" sz="2300" b="1" dirty="0">
+                <a:solidFill>
+                  <a:srgbClr val="10161F"/>
+                </a:solidFill>
+                <a:latin typeface="Pretendard" pitchFamily="34" charset="0"/>
+                <a:ea typeface="Pretendard" pitchFamily="34" charset="-122"/>
+                <a:cs typeface="Pretendard" pitchFamily="34" charset="-120"/>
+              </a:rPr>
+              <a:t>검토 후 다음 단계는 무엇인가</a:t>
+            </a:r>
+            <a:endParaRPr lang="en-US" sz="2300" dirty="0"/>
+          </a:p>
+        </p:txBody>
+      </p:sp>
+      <p:sp>
+        <p:nvSpPr>
+          <p:cNvPr id="6" name="Shape 4"/>
+          <p:cNvSpPr/>
+          <p:nvPr/>
+        </p:nvSpPr>
+        <p:spPr>
+          <a:xfrm>
+            <a:off x="566928" y="1572768"/>
+            <a:ext cx="11057839" cy="3200400"/>
+          </a:xfrm>
+          <a:prstGeom prst="roundRect">
+            <a:avLst>
+              <a:gd name="adj" fmla="val 1714"/>
+            </a:avLst>
+          </a:prstGeom>
+          <a:solidFill>
+            <a:srgbClr val="F7FAFC"/>
+          </a:solidFill>
+          <a:ln w="6350">
+            <a:solidFill>
+              <a:srgbClr val="CBD5E0"/>
+            </a:solidFill>
+            <a:prstDash val="solid"/>
+          </a:ln>
+        </p:spPr>
+      </p:sp>
+      <p:sp>
+        <p:nvSpPr>
+          <p:cNvPr id="7" name="Shape 5"/>
+          <p:cNvSpPr/>
+          <p:nvPr/>
+        </p:nvSpPr>
+        <p:spPr>
+          <a:xfrm>
+            <a:off x="786384" y="1792224"/>
+            <a:ext cx="438912" cy="438912"/>
+          </a:xfrm>
+          <a:prstGeom prst="ellipse">
+            <a:avLst/>
+          </a:prstGeom>
+          <a:solidFill>
+            <a:srgbClr val="B98A2E"/>
+          </a:solidFill>
+          <a:ln/>
+        </p:spPr>
+      </p:sp>
+      <p:sp>
+        <p:nvSpPr>
+          <p:cNvPr id="8" name="Text 6"/>
+          <p:cNvSpPr/>
+          <p:nvPr/>
+        </p:nvSpPr>
+        <p:spPr>
+          <a:xfrm>
+            <a:off x="786384" y="1792224"/>
+            <a:ext cx="438912" cy="438912"/>
+          </a:xfrm>
+          <a:prstGeom prst="rect">
+            <a:avLst/>
+          </a:prstGeom>
+          <a:noFill/>
+          <a:ln/>
+        </p:spPr>
+        <p:txBody>
+          <a:bodyPr wrap="square" lIns="0" tIns="0" rIns="0" bIns="0" rtlCol="0" anchor="ctr"/>
+          <a:lstStyle/>
+          <a:p>
+            <a:pPr algn="ctr" indent="0" marL="0">
+              <a:buNone/>
+            </a:pPr>
+            <a:r>
+              <a:rPr lang="en-US" sz="1400" b="1" dirty="0">
+                <a:solidFill>
+                  <a:srgbClr val="FFFFFF"/>
+                </a:solidFill>
+                <a:latin typeface="Arial" pitchFamily="34" charset="0"/>
+                <a:ea typeface="Arial" pitchFamily="34" charset="-122"/>
+                <a:cs typeface="Arial" pitchFamily="34" charset="-120"/>
+              </a:rPr>
+              <a:t>01</a:t>
+            </a:r>
+            <a:endParaRPr lang="en-US" sz="1400" dirty="0"/>
+          </a:p>
+        </p:txBody>
+      </p:sp>
+      <p:sp>
+        <p:nvSpPr>
+          <p:cNvPr id="9" name="Text 7"/>
+          <p:cNvSpPr/>
+          <p:nvPr/>
+        </p:nvSpPr>
+        <p:spPr>
+          <a:xfrm>
+            <a:off x="786384" y="2304288"/>
+            <a:ext cx="10618927" cy="365760"/>
+          </a:xfrm>
+          <a:prstGeom prst="rect">
+            <a:avLst/>
+          </a:prstGeom>
+          <a:noFill/>
+          <a:ln/>
+        </p:spPr>
+        <p:txBody>
+          <a:bodyPr wrap="square" rtlCol="0" anchor="ctr"/>
+          <a:lstStyle/>
+          <a:p>
+            <a:pPr indent="0" marL="0">
+              <a:buNone/>
+            </a:pPr>
+            <a:r>
+              <a:rPr lang="en-US" sz="1600" b="1" dirty="0">
+                <a:solidFill>
+                  <a:srgbClr val="10161F"/>
+                </a:solidFill>
+                <a:latin typeface="Pretendard" pitchFamily="34" charset="0"/>
+                <a:ea typeface="Pretendard" pitchFamily="34" charset="-122"/>
+                <a:cs typeface="Pretendard" pitchFamily="34" charset="-120"/>
+              </a:rPr>
+              <a:t>1단계</a:t>
+            </a:r>
+            <a:endParaRPr lang="en-US" sz="1600" dirty="0"/>
+          </a:p>
+        </p:txBody>
+      </p:sp>
+      <p:sp>
+        <p:nvSpPr>
+          <p:cNvPr id="10" name="Text 8"/>
+          <p:cNvSpPr/>
+          <p:nvPr/>
+        </p:nvSpPr>
+        <p:spPr>
+          <a:xfrm>
+            <a:off x="786384" y="2761488"/>
+            <a:ext cx="10618927" cy="1828800"/>
+          </a:xfrm>
+          <a:prstGeom prst="rect">
+            <a:avLst/>
+          </a:prstGeom>
+          <a:noFill/>
+          <a:ln/>
+        </p:spPr>
+        <p:txBody>
+          <a:bodyPr wrap="square" rtlCol="0" anchor="t"/>
+          <a:lstStyle/>
+          <a:p>
+            <a:pPr indent="0" marL="0">
+              <a:buNone/>
+            </a:pPr>
+            <a:r>
+              <a:rPr lang="en-US" sz="1100" dirty="0">
+                <a:solidFill>
+                  <a:srgbClr val="10161F"/>
+                </a:solidFill>
+                <a:latin typeface="Pretendard" pitchFamily="34" charset="0"/>
+                <a:ea typeface="Pretendard" pitchFamily="34" charset="-122"/>
+                <a:cs typeface="Pretendard" pitchFamily="34" charset="-120"/>
+              </a:rPr>
+              <a:t>{"ok"</a:t>
+            </a:r>
+            <a:endParaRPr lang="en-US" sz="1100" dirty="0"/>
+          </a:p>
+          <a:p>
+            <a:pPr indent="0" marL="0">
+              <a:buNone/>
+            </a:pPr>
+            <a:r>
+              <a:rPr lang="en-US" sz="1100" dirty="0">
+                <a:solidFill>
+                  <a:srgbClr val="10161F"/>
+                </a:solidFill>
+                <a:latin typeface="Pretendard" pitchFamily="34" charset="0"/>
+                <a:ea typeface="Pretendard" pitchFamily="34" charset="-122"/>
+                <a:cs typeface="Pretendard" pitchFamily="34" charset="-120"/>
+              </a:rPr>
+              <a:t>true,"mocked":true,"extractedFields":{"area_signal":"역삼","asset_type":"[건물명 비공개]","price_band":"300억","size_signal":"3000평(약 9917.4㎡)"},"extractedFacts":{"region":"역삼","exactAddressCandidate":"역삼동 742-1","assetType":"[건물명 비공개]","priceText":"300억","sizeText":"3000평(약 9917.4㎡)","currentUse":"오피스","currentUseSignal":"근린생활시설","leaseSignal":"임대중","vacancySignal":"공실없음","tenantNames":["쿠팡","네이버"],"unitRentTexts":["301호: 1500만"],"sellerMotivationText":"자산 효율화","brokerNotes":["역세권 도보 3분 이내 매물"]},"detectedSensitiveFields":["exact_address","tenant_name"],"ambiguousFields":[],"warnings":[],"areaSignal":"역삼","assetType":"[건물명 비공개]","priceBand":"300억","sizeSignal":"3000평(약 9917.4㎡)","dealType":"매각","buildingName":"역삼 [건물명 비공개]","exactAddress":"역삼동 742-1","totalFloorArea":9917.3,"buildYear":2015,"currentUseSignal":"근린생활시설","vacancySignal":"공실 없음","fitSummary":"역세권 도보 3분 이내 근생 빌딩으로 시행/사옥 매입에 최적화","cautionSummary":"주요 임차인 만기 조율 필요","hiddenFields":["exact_address","seller_motivation"],"confidence":{"areaSignal":"confirmed","assetType":"confirmed","priceBand":"ai_hypothesis","fitSummary":"ai_hypothesis"},"missingData":["sizeSignal"],"boundaryNote":"본 자료는 실거래 통계 기반 참고치입니다.","buyerType":"법인 사옥형","budgetRange":{"min":50,"max":80,"display":"50억~80억"},"preferredRegions":["강남","성수"],"assetTypes":["[건물명 비공개]","사옥용"],"purchasePurpose":"사옥용 매입","mustHave":["역세권 도보 3분 이내","주차"],"niceToHave":["테라스","루프탑"],"riskTolerance":"medium","financingNote":"자본금 50% 준비","missingQuestions":["구체적인 입주 시기가 언제인가요?","선호하는 수익률이 있나요?"],"privacyNotes":["연락처 비공개"],"fitReasons":["매수자 예산(50-80억)에 부합하는 매물입니다.","요청하신 성수/강남 권역에 해당합니다."],"cautionReasons":["요청한 용도와 달리 명도 협의가 다소 필요합니다."],"recommendedNextAction":"현장 답사 제안","kakaoMessage":"안녕하세요! 요청하신 조건에 부합하는 추천 매물이 있어 안내해 드립니다. 확인해보시고 피드백 부탁드립니다.","title":"강남 역삼역 역세권 도보 3분 이내 오피스 사옥용 빌딩 매각","shortSummary":"역삼역 도보 5분 거리의 준신축급 대형 [건물명 비공개]입니다.","dealPoints":["역세권 도보 3분 이내","사옥 최적"],"cautionPoints":["명도 조율 필요"],"hiddenInfoNotice":["보증금 및 지번은 인가 후 확인 가능"],"gateMessage":"G1 등급 등록이 필요합니다.","kakaoText":"강남 역삼역 오피스 빌딩 매각 안내입니다.","exactUnitCandidate":"101호","floor":"1층","areaSqmText":"150㎡","spaceType":"office","depositText":"5000만","monthlyRentText":"400만","maintenanceFeeText":"50만","availableFromText":"즉시입주","leaseTermMonthsText":"24","incentivesText":"렌트프리(무상임대) 2개월","restrictions":[],"landlordIdentity":"김성수","currentTenant":"스타트업","vacancyReason":"이전 확장","rentNegotiation":"협의 가능","region":"성수동","areaSqm":150,"deposit":5000,"monthlyRent":400,"maintenanceFee":50,"availableFrom":"즉시입주","leaseTermMonths":24,"incentives":{"렌트프리(무상임대)(무상임대)Months":2,"interiorSupport":"일부 인테리어 지원","freeRentDetail":"렌트프리(무상임대) 2개월 지원"},"shortSummaryLease":"성수역 도보 5분 거리 1층 리테일 상가 매물입니다."}</a:t>
+            </a:r>
+            <a:endParaRPr lang="en-US" sz="1100" dirty="0"/>
+          </a:p>
+        </p:txBody>
+      </p:sp>
+      <p:sp>
+        <p:nvSpPr>
+          <p:cNvPr id="11" name="Text 9"/>
+          <p:cNvSpPr/>
+          <p:nvPr/>
+        </p:nvSpPr>
+        <p:spPr>
+          <a:xfrm>
+            <a:off x="566928" y="6382512"/>
+            <a:ext cx="7315200" cy="219456"/>
+          </a:xfrm>
+          <a:prstGeom prst="rect">
+            <a:avLst/>
+          </a:prstGeom>
+          <a:noFill/>
+          <a:ln/>
+        </p:spPr>
+        <p:txBody>
+          <a:bodyPr wrap="square" lIns="0" tIns="0" rIns="0" bIns="0" rtlCol="0" anchor="ctr"/>
+          <a:lstStyle/>
+          <a:p>
+            <a:pPr indent="0" marL="0">
+              <a:buNone/>
+            </a:pPr>
+            <a:r>
+              <a:rPr lang="en-US" sz="800" dirty="0">
+                <a:solidFill>
+                  <a:srgbClr val="718096"/>
+                </a:solidFill>
+                <a:latin typeface="Pretendard" pitchFamily="34" charset="0"/>
+                <a:ea typeface="Pretendard" pitchFamily="34" charset="-122"/>
+                <a:cs typeface="Pretendard" pitchFamily="34" charset="-120"/>
+              </a:rPr>
+              <a:t>크리딜   |   </a:t>
+            </a:r>
+            <a:endParaRPr lang="en-US" sz="800" dirty="0"/>
+          </a:p>
+        </p:txBody>
+      </p:sp>
+      <p:sp>
+        <p:nvSpPr>
+          <p:cNvPr id="12" name="Text 10"/>
+          <p:cNvSpPr/>
+          <p:nvPr/>
+        </p:nvSpPr>
+        <p:spPr>
+          <a:xfrm>
+            <a:off x="10710367" y="6382512"/>
+            <a:ext cx="914400" cy="219456"/>
+          </a:xfrm>
+          <a:prstGeom prst="rect">
+            <a:avLst/>
+          </a:prstGeom>
+          <a:noFill/>
+          <a:ln/>
+        </p:spPr>
+        <p:txBody>
+          <a:bodyPr wrap="square" lIns="0" tIns="0" rIns="0" bIns="0" rtlCol="0" anchor="ctr"/>
+          <a:lstStyle/>
+          <a:p>
+            <a:pPr algn="r" indent="0" marL="0">
+              <a:buNone/>
+            </a:pPr>
+            <a:r>
+              <a:rPr lang="en-US" sz="900" b="1" dirty="0">
+                <a:solidFill>
+                  <a:srgbClr val="B98A2E"/>
+                </a:solidFill>
+                <a:latin typeface="Arial" pitchFamily="34" charset="0"/>
+                <a:ea typeface="Arial" pitchFamily="34" charset="-122"/>
+                <a:cs typeface="Arial" pitchFamily="34" charset="-120"/>
+              </a:rPr>
+              <a:t>12</a:t>
+            </a:r>
+            <a:endParaRPr lang="en-US" sz="900" dirty="0"/>
+          </a:p>
+        </p:txBody>
+      </p:sp>
+    </p:spTree>
+  </p:cSld>
+  <p:clrMapOvr>
+    <a:masterClrMapping/>
+  </p:clrMapOvr>
+</p:sld>
+</file>
+
+<file path=ppt/slides/slide14.xml><?xml version="1.0" encoding="utf-8"?>
+<p:sld xmlns:a="http://schemas.openxmlformats.org/drawingml/2006/main" xmlns:r="http://schemas.openxmlformats.org/officeDocument/2006/relationships" xmlns:p="http://schemas.openxmlformats.org/presentationml/2006/main">
+  <p:cSld name="Slide 14">
+    <p:bg>
+      <p:bgPr>
+        <a:solidFill>
           <a:srgbClr val="10161F"/>
         </a:solidFill>
       </p:bgPr>
@@ -7052,7 +7569,7 @@
                 <a:ea typeface="Arial" pitchFamily="34" charset="-122"/>
                 <a:cs typeface="Arial" pitchFamily="34" charset="-120"/>
               </a:rPr>
-              <a:t>12</a:t>
+              <a:t>13</a:t>
             </a:r>
             <a:endParaRPr lang="en-US" sz="1300" dirty="0"/>
           </a:p>
@@ -8464,7 +8981,7 @@
                 <a:ea typeface="Arial" pitchFamily="34" charset="-122"/>
                 <a:cs typeface="Arial" pitchFamily="34" charset="-120"/>
               </a:rPr>
-              <a:t>12</a:t>
+              <a:t>13</a:t>
             </a:r>
             <a:endParaRPr lang="en-US" sz="900" dirty="0"/>
           </a:p>
@@ -8478,9 +8995,9 @@
 </p:sld>
 </file>
 
-<file path=ppt/slides/slide14.xml><?xml version="1.0" encoding="utf-8"?>
+<file path=ppt/slides/slide15.xml><?xml version="1.0" encoding="utf-8"?>
 <p:sld xmlns:a="http://schemas.openxmlformats.org/drawingml/2006/main" xmlns:r="http://schemas.openxmlformats.org/officeDocument/2006/relationships" xmlns:p="http://schemas.openxmlformats.org/presentationml/2006/main">
-  <p:cSld name="Slide 14">
+  <p:cSld name="Slide 15">
     <p:bg>
       <p:bgPr>
         <a:solidFill>
@@ -8555,7 +9072,7 @@
                 <a:ea typeface="Arial" pitchFamily="34" charset="-122"/>
                 <a:cs typeface="Arial" pitchFamily="34" charset="-120"/>
               </a:rPr>
-              <a:t>13</a:t>
+              <a:t>14</a:t>
             </a:r>
             <a:endParaRPr lang="en-US" sz="1300" dirty="0"/>
           </a:p>
@@ -9189,7 +9706,7 @@
                 <a:ea typeface="Arial" pitchFamily="34" charset="-122"/>
                 <a:cs typeface="Arial" pitchFamily="34" charset="-120"/>
               </a:rPr>
-              <a:t>13</a:t>
+              <a:t>14</a:t>
             </a:r>
             <a:endParaRPr lang="en-US" sz="900" dirty="0"/>
           </a:p>
@@ -12476,130 +12993,7 @@
       </p:sp>
       <p:sp>
         <p:nvSpPr>
-          <p:cNvPr id="10" name="Shape 8"/>
-          <p:cNvSpPr/>
-          <p:nvPr/>
-        </p:nvSpPr>
-        <p:spPr>
-          <a:xfrm>
-            <a:off x="566928" y="2999232"/>
-            <a:ext cx="11057839" cy="1280160"/>
-          </a:xfrm>
-          <a:prstGeom prst="roundRect">
-            <a:avLst>
-              <a:gd name="adj" fmla="val 4286"/>
-            </a:avLst>
-          </a:prstGeom>
-          <a:solidFill>
-            <a:srgbClr val="BEE3F8"/>
-          </a:solidFill>
-          <a:ln/>
-        </p:spPr>
-      </p:sp>
-      <p:sp>
-        <p:nvSpPr>
-          <p:cNvPr id="11" name="Shape 9"/>
-          <p:cNvSpPr/>
-          <p:nvPr/>
-        </p:nvSpPr>
-        <p:spPr>
-          <a:xfrm>
-            <a:off x="566928" y="3054096"/>
-            <a:ext cx="36576" cy="1170432"/>
-          </a:xfrm>
-          <a:prstGeom prst="rect">
-            <a:avLst/>
-          </a:prstGeom>
-          <a:solidFill>
-            <a:srgbClr val="2B6CB0"/>
-          </a:solidFill>
-          <a:ln/>
-        </p:spPr>
-      </p:sp>
-      <p:sp>
-        <p:nvSpPr>
-          <p:cNvPr id="12" name="Text 10"/>
-          <p:cNvSpPr/>
-          <p:nvPr/>
-        </p:nvSpPr>
-        <p:spPr>
-          <a:xfrm>
-            <a:off x="749808" y="3108960"/>
-            <a:ext cx="10728655" cy="201168"/>
-          </a:xfrm>
-          <a:prstGeom prst="rect">
-            <a:avLst/>
-          </a:prstGeom>
-          <a:noFill/>
-          <a:ln/>
-        </p:spPr>
-        <p:txBody>
-          <a:bodyPr wrap="square" lIns="0" tIns="0" rIns="0" bIns="0" rtlCol="0" anchor="ctr"/>
-          <a:lstStyle/>
-          <a:p>
-            <a:pPr indent="0" marL="0">
-              <a:buNone/>
-            </a:pPr>
-            <a:r>
-              <a:rPr lang="en-US" sz="1050" b="1" dirty="0">
-                <a:solidFill>
-                  <a:srgbClr val="2B6CB0"/>
-                </a:solidFill>
-                <a:latin typeface="Pretendard" pitchFamily="34" charset="0"/>
-                <a:ea typeface="Pretendard" pitchFamily="34" charset="-122"/>
-                <a:cs typeface="Pretendard" pitchFamily="34" charset="-120"/>
-              </a:rPr>
-              <a:t>투자 가치 제안</a:t>
-            </a:r>
-            <a:endParaRPr lang="en-US" sz="1050" dirty="0"/>
-          </a:p>
-        </p:txBody>
-      </p:sp>
-      <p:sp>
-        <p:nvSpPr>
-          <p:cNvPr id="13" name="Text 11"/>
-          <p:cNvSpPr/>
-          <p:nvPr/>
-        </p:nvSpPr>
-        <p:spPr>
-          <a:xfrm>
-            <a:off x="749808" y="3328416"/>
-            <a:ext cx="10728655" cy="877824"/>
-          </a:xfrm>
-          <a:prstGeom prst="rect">
-            <a:avLst/>
-          </a:prstGeom>
-          <a:noFill/>
-          <a:ln/>
-        </p:spPr>
-        <p:txBody>
-          <a:bodyPr wrap="square" lIns="0" tIns="0" rIns="0" bIns="0" rtlCol="0" anchor="t"/>
-          <a:lstStyle/>
-          <a:p>
-            <a:pPr indent="0" marL="0">
-              <a:lnSpc>
-                <a:spcPct val="120000"/>
-              </a:lnSpc>
-              <a:buNone/>
-            </a:pPr>
-            <a:r>
-              <a:rPr lang="en-US" sz="930" dirty="0">
-                <a:solidFill>
-                  <a:srgbClr val="10161F"/>
-                </a:solidFill>
-                <a:latin typeface="Pretendard" pitchFamily="34" charset="0"/>
-                <a:ea typeface="Pretendard" pitchFamily="34" charset="-122"/>
-                <a:cs typeface="Pretendard" pitchFamily="34" charset="-120"/>
-              </a:rPr>
-              <a:t>{"ok":true,"mocked":true,"extractedFields":{"area_signal":"역삼","asset_type":"[건물명 비공개]","price_band":"300억","size_signal":"3000평(약 9917.4㎡)"},"extractedFacts":{"region":"역삼","exactAddressCandidate":"역삼동 742-1","assetType":"[건물명 비공개]","priceText":"300억","sizeText":"3000평(약 9917.4㎡)","currentUse":"오피스","currentUseSignal":"근린생활시설","leaseSignal":"임대중","vacancySignal":"공실없음","tenantNames":["쿠팡","네이버"],"unitRentTexts":["301호: 1500만"],"sellerMotivationText":"자산 효율화","brokerNotes":["역세권 도보 3분 이내 매물"]},"detectedSensitiveFields":["exact_address","tenant_name"],"ambiguousFields":[],"warnings":[],"areaSignal":"역삼","assetType":"[건물명 비공개]","priceBand":"300억","sizeSignal":"3000평(약 9917.4㎡)","dealType":"매각","buildingName":"역삼 [건물명 비공개]","exactAddress":"역삼동 742-1","totalFloorArea":9917.3,"buildYear":2015,"currentUseSignal":"근린생활시설","vacancySignal":"공실 없음","fitSummary":"역세권 도보 3분 이내 근생 빌딩으로 시행/사옥 매입에 최적화","cautionSummary":"주요 임차인 만기 조율 필요","hiddenFields":["exact_address","seller_motivation"],"confidence":{"areaSignal":"confirmed","assetType":"confirmed","priceBand":"ai_hypothesis","fitSummary":"ai_hypothesis"},"missingData":["sizeSignal"],"boundaryNote":"본 자료는 실거래 통계 기반 참고치입니다.","buyerType":"법인 사옥형","budgetRange":{"min":50,"max":80,"display":"50억~80억"},"preferredRegions":["강남","성수"],"assetTypes":["[건물명 비공개]","사옥용"],"purchasePurpose":"사옥용 매입","mustHave":["역세권 도보 3분 이내","주차"],"niceToHave":["테라스","루프탑"],"riskTolerance":"medium","financingNote":"자본금 50% 준비","missingQuestions":["구체적인 입주 시기가 언제인가요?","선호하는 수익률이 있나요?"],"privacyNotes":["연락처 비공개"],"fitReasons":["매수자 예산(50-80억)에 부합하는 매물입니다.","요청하신 성수/강남 권역에 해당합니다."],"cautionReasons":["요청한 용도와 달리 명도 협의가 다소 필요합니다."],"recommendedNextAction":"현장 답사 제안","kakaoMessage":"안녕하세요! 요청하신 조건에 부합하는 추천 매물이 있어 안내해 드립니다. 확인해보시고 피드백 부탁드립니다.","title":"강남 역삼역 역세권 도보 3분 이내 오피스 사옥용 빌딩 매각","shortSummary":"역삼역 도보 5분 거리의 준신축급 대형 [건물명 비공개]입니다.","dealPoints":["역세권 도보 3분 이내","사옥 최적"],"cautionPoints":["명도 조율 필요"],"hiddenInfoNotice":["보증금 및 지번은 인가 후 확인 가능"],"gateMessage":"G1 등급 등록이 필요합니다.","kakaoText":"강남 역삼역 오피스 빌딩 매각 안내입니다.","exactUnitCandidate":"101호","floor":"1층","areaSqmText":"150㎡","spaceType":"office","depositText":"5000만","monthlyRentText":"400만","maintenanceFeeText":"50만","availableFromText":"즉시입주","leaseTermMonthsText":"24","incentivesText":"렌트프리(무상임대) 2개월","restrictions":[],"landlordIdentity":"김성수","currentTenant":"스타트업","vacancyReason":"이전 확장","rentNegotiation":"협의 가능","region":"성수동","areaSqm":150,"deposit":5000,"monthlyRent":400,"maintenanceFee":50,"availableFrom":"즉시입주","leaseTermMonths":24,"incentives":{"렌트프리(무상임대)(무상임대)Months":2,"interiorSupport":"일부 인테리어 지원","freeRentDetail":"렌트프리(무상임대) 2개월 지원"},"shortSummaryLease":"성수역 도보 5분 거리 1층 리테일 상가 매물입니다."}</a:t>
-            </a:r>
-            <a:endParaRPr lang="en-US" sz="930" dirty="0"/>
-          </a:p>
-        </p:txBody>
-      </p:sp>
-      <p:sp>
-        <p:nvSpPr>
-          <p:cNvPr id="14" name="Text 12"/>
+          <p:cNvPr id="10" name="Text 8"/>
           <p:cNvSpPr/>
           <p:nvPr/>
         </p:nvSpPr>
@@ -12638,7 +13032,7 @@
       </p:sp>
       <p:sp>
         <p:nvSpPr>
-          <p:cNvPr id="15" name="Text 13"/>
+          <p:cNvPr id="11" name="Text 9"/>
           <p:cNvSpPr/>
           <p:nvPr/>
         </p:nvSpPr>
